--- a/material/[SeSAC_YDP_6] 01_ot,git.pptx
+++ b/material/[SeSAC_YDP_6] 01_ot,git.pptx
@@ -5,10 +5,10 @@
     <p:sldMasterId id="2147483712" r:id="rId1"/>
   </p:sldMasterIdLst>
   <p:notesMasterIdLst>
-    <p:notesMasterId r:id="rId37"/>
+    <p:notesMasterId r:id="rId38"/>
   </p:notesMasterIdLst>
   <p:handoutMasterIdLst>
-    <p:handoutMasterId r:id="rId38"/>
+    <p:handoutMasterId r:id="rId39"/>
   </p:handoutMasterIdLst>
   <p:sldIdLst>
     <p:sldId id="675" r:id="rId2"/>
@@ -20,32 +20,33 @@
     <p:sldId id="678" r:id="rId8"/>
     <p:sldId id="672" r:id="rId9"/>
     <p:sldId id="673" r:id="rId10"/>
-    <p:sldId id="260" r:id="rId11"/>
-    <p:sldId id="687" r:id="rId12"/>
-    <p:sldId id="303" r:id="rId13"/>
-    <p:sldId id="679" r:id="rId14"/>
-    <p:sldId id="665" r:id="rId15"/>
-    <p:sldId id="291" r:id="rId16"/>
-    <p:sldId id="281" r:id="rId17"/>
-    <p:sldId id="686" r:id="rId18"/>
-    <p:sldId id="674" r:id="rId19"/>
-    <p:sldId id="676" r:id="rId20"/>
-    <p:sldId id="269" r:id="rId21"/>
-    <p:sldId id="262" r:id="rId22"/>
-    <p:sldId id="664" r:id="rId23"/>
-    <p:sldId id="283" r:id="rId24"/>
-    <p:sldId id="271" r:id="rId25"/>
-    <p:sldId id="683" r:id="rId26"/>
-    <p:sldId id="682" r:id="rId27"/>
-    <p:sldId id="270" r:id="rId28"/>
-    <p:sldId id="284" r:id="rId29"/>
-    <p:sldId id="263" r:id="rId30"/>
-    <p:sldId id="684" r:id="rId31"/>
-    <p:sldId id="677" r:id="rId32"/>
-    <p:sldId id="685" r:id="rId33"/>
-    <p:sldId id="670" r:id="rId34"/>
-    <p:sldId id="671" r:id="rId35"/>
-    <p:sldId id="268" r:id="rId36"/>
+    <p:sldId id="689" r:id="rId11"/>
+    <p:sldId id="260" r:id="rId12"/>
+    <p:sldId id="687" r:id="rId13"/>
+    <p:sldId id="303" r:id="rId14"/>
+    <p:sldId id="679" r:id="rId15"/>
+    <p:sldId id="665" r:id="rId16"/>
+    <p:sldId id="291" r:id="rId17"/>
+    <p:sldId id="281" r:id="rId18"/>
+    <p:sldId id="686" r:id="rId19"/>
+    <p:sldId id="674" r:id="rId20"/>
+    <p:sldId id="676" r:id="rId21"/>
+    <p:sldId id="269" r:id="rId22"/>
+    <p:sldId id="262" r:id="rId23"/>
+    <p:sldId id="664" r:id="rId24"/>
+    <p:sldId id="283" r:id="rId25"/>
+    <p:sldId id="271" r:id="rId26"/>
+    <p:sldId id="683" r:id="rId27"/>
+    <p:sldId id="682" r:id="rId28"/>
+    <p:sldId id="270" r:id="rId29"/>
+    <p:sldId id="284" r:id="rId30"/>
+    <p:sldId id="263" r:id="rId31"/>
+    <p:sldId id="684" r:id="rId32"/>
+    <p:sldId id="677" r:id="rId33"/>
+    <p:sldId id="685" r:id="rId34"/>
+    <p:sldId id="670" r:id="rId35"/>
+    <p:sldId id="671" r:id="rId36"/>
+    <p:sldId id="268" r:id="rId37"/>
   </p:sldIdLst>
   <p:sldSz cx="12192000" cy="6858000"/>
   <p:notesSz cx="6858000" cy="9144000"/>
@@ -249,7 +250,7 @@
           <a:p>
             <a:fld id="{AD4C2981-5314-425A-941B-9AEDC9FC9FEE}" type="datetimeFigureOut">
               <a:rPr lang="ko-KR" altLang="en-US" smtClean="0"/>
-              <a:t>2024-05-07</a:t>
+              <a:t>2024-05-08</a:t>
             </a:fld>
             <a:endParaRPr lang="ko-KR" altLang="en-US"/>
           </a:p>
@@ -426,7 +427,7 @@
           <a:p>
             <a:fld id="{2EF3F159-7250-4DD4-91C2-13B35D56E1AF}" type="datetimeFigureOut">
               <a:rPr lang="ko-KR" altLang="en-US" smtClean="0"/>
-              <a:t>2024-05-07</a:t>
+              <a:t>2024-05-08</a:t>
             </a:fld>
             <a:endParaRPr lang="ko-KR" altLang="en-US"/>
           </a:p>
@@ -866,7 +867,7 @@
           <a:p>
             <a:fld id="{E731A1BA-5463-484A-B77A-5C292E222CA2}" type="slidenum">
               <a:rPr lang="ko-KR" altLang="en-US" smtClean="0"/>
-              <a:t>11</a:t>
+              <a:t>12</a:t>
             </a:fld>
             <a:endParaRPr lang="ko-KR" altLang="en-US"/>
           </a:p>
@@ -974,7 +975,7 @@
           <a:p>
             <a:fld id="{C09E5BFC-1559-42F1-8940-AB342D56BF02}" type="slidenum">
               <a:rPr lang="ko-KR" altLang="en-US" smtClean="0"/>
-              <a:t>12</a:t>
+              <a:t>13</a:t>
             </a:fld>
             <a:endParaRPr lang="ko-KR" altLang="en-US"/>
           </a:p>
@@ -1058,7 +1059,7 @@
           <a:p>
             <a:fld id="{3550FCFC-DEF0-4809-AB35-5DCCCC68A436}" type="slidenum">
               <a:rPr lang="ko-KR" altLang="en-US" smtClean="0"/>
-              <a:t>13</a:t>
+              <a:t>14</a:t>
             </a:fld>
             <a:endParaRPr lang="ko-KR" altLang="en-US"/>
           </a:p>
@@ -1142,7 +1143,7 @@
           <a:p>
             <a:fld id="{3550FCFC-DEF0-4809-AB35-5DCCCC68A436}" type="slidenum">
               <a:rPr lang="ko-KR" altLang="en-US" smtClean="0"/>
-              <a:t>14</a:t>
+              <a:t>15</a:t>
             </a:fld>
             <a:endParaRPr lang="ko-KR" altLang="en-US"/>
           </a:p>
@@ -1271,7 +1272,7 @@
           <a:p>
             <a:fld id="{E731A1BA-5463-484A-B77A-5C292E222CA2}" type="slidenum">
               <a:rPr lang="ko-KR" altLang="en-US" smtClean="0"/>
-              <a:t>15</a:t>
+              <a:t>16</a:t>
             </a:fld>
             <a:endParaRPr lang="ko-KR" altLang="en-US"/>
           </a:p>
@@ -1358,7 +1359,7 @@
           <a:p>
             <a:fld id="{3550FCFC-DEF0-4809-AB35-5DCCCC68A436}" type="slidenum">
               <a:rPr lang="ko-KR" altLang="en-US" smtClean="0"/>
-              <a:t>16</a:t>
+              <a:t>17</a:t>
             </a:fld>
             <a:endParaRPr lang="ko-KR" altLang="en-US"/>
           </a:p>
@@ -1466,7 +1467,7 @@
           <a:p>
             <a:fld id="{E731A1BA-5463-484A-B77A-5C292E222CA2}" type="slidenum">
               <a:rPr lang="ko-KR" altLang="en-US" smtClean="0"/>
-              <a:t>17</a:t>
+              <a:t>18</a:t>
             </a:fld>
             <a:endParaRPr lang="ko-KR" altLang="en-US"/>
           </a:p>
@@ -1550,7 +1551,7 @@
           <a:p>
             <a:fld id="{C09E5BFC-1559-42F1-8940-AB342D56BF02}" type="slidenum">
               <a:rPr lang="ko-KR" altLang="en-US" smtClean="0"/>
-              <a:t>21</a:t>
+              <a:t>22</a:t>
             </a:fld>
             <a:endParaRPr lang="ko-KR" altLang="en-US"/>
           </a:p>
@@ -1634,7 +1635,7 @@
           <a:p>
             <a:fld id="{C09E5BFC-1559-42F1-8940-AB342D56BF02}" type="slidenum">
               <a:rPr lang="ko-KR" altLang="en-US" smtClean="0"/>
-              <a:t>22</a:t>
+              <a:t>23</a:t>
             </a:fld>
             <a:endParaRPr lang="ko-KR" altLang="en-US"/>
           </a:p>
@@ -1718,7 +1719,7 @@
           <a:p>
             <a:fld id="{C09E5BFC-1559-42F1-8940-AB342D56BF02}" type="slidenum">
               <a:rPr lang="ko-KR" altLang="en-US" smtClean="0"/>
-              <a:t>23</a:t>
+              <a:t>24</a:t>
             </a:fld>
             <a:endParaRPr lang="ko-KR" altLang="en-US"/>
           </a:p>
@@ -1886,7 +1887,7 @@
           <a:p>
             <a:fld id="{C09E5BFC-1559-42F1-8940-AB342D56BF02}" type="slidenum">
               <a:rPr lang="ko-KR" altLang="en-US" smtClean="0"/>
-              <a:t>24</a:t>
+              <a:t>25</a:t>
             </a:fld>
             <a:endParaRPr lang="ko-KR" altLang="en-US"/>
           </a:p>
@@ -2047,7 +2048,7 @@
           <a:p>
             <a:fld id="{C09E5BFC-1559-42F1-8940-AB342D56BF02}" type="slidenum">
               <a:rPr lang="ko-KR" altLang="en-US" smtClean="0"/>
-              <a:t>26</a:t>
+              <a:t>27</a:t>
             </a:fld>
             <a:endParaRPr lang="ko-KR" altLang="en-US"/>
           </a:p>
@@ -2131,7 +2132,7 @@
           <a:p>
             <a:fld id="{C09E5BFC-1559-42F1-8940-AB342D56BF02}" type="slidenum">
               <a:rPr lang="ko-KR" altLang="en-US" smtClean="0"/>
-              <a:t>29</a:t>
+              <a:t>30</a:t>
             </a:fld>
             <a:endParaRPr lang="ko-KR" altLang="en-US"/>
           </a:p>
@@ -2215,7 +2216,7 @@
           <a:p>
             <a:fld id="{C09E5BFC-1559-42F1-8940-AB342D56BF02}" type="slidenum">
               <a:rPr lang="ko-KR" altLang="en-US" smtClean="0"/>
-              <a:t>30</a:t>
+              <a:t>31</a:t>
             </a:fld>
             <a:endParaRPr lang="ko-KR" altLang="en-US"/>
           </a:p>
@@ -2299,7 +2300,7 @@
           <a:p>
             <a:fld id="{C09E5BFC-1559-42F1-8940-AB342D56BF02}" type="slidenum">
               <a:rPr lang="ko-KR" altLang="en-US" smtClean="0"/>
-              <a:t>33</a:t>
+              <a:t>34</a:t>
             </a:fld>
             <a:endParaRPr lang="ko-KR" altLang="en-US"/>
           </a:p>
@@ -2383,7 +2384,7 @@
           <a:p>
             <a:fld id="{C09E5BFC-1559-42F1-8940-AB342D56BF02}" type="slidenum">
               <a:rPr lang="ko-KR" altLang="en-US" smtClean="0"/>
-              <a:t>34</a:t>
+              <a:t>35</a:t>
             </a:fld>
             <a:endParaRPr lang="ko-KR" altLang="en-US"/>
           </a:p>
@@ -2467,7 +2468,7 @@
           <a:p>
             <a:fld id="{C09E5BFC-1559-42F1-8940-AB342D56BF02}" type="slidenum">
               <a:rPr lang="ko-KR" altLang="en-US" smtClean="0"/>
-              <a:t>35</a:t>
+              <a:t>36</a:t>
             </a:fld>
             <a:endParaRPr lang="ko-KR" altLang="en-US"/>
           </a:p>
@@ -7602,6 +7603,212 @@
       </p:grpSpPr>
       <p:sp>
         <p:nvSpPr>
+          <p:cNvPr id="3" name="날짜 개체 틀 2">
+            <a:extLst>
+              <a:ext uri="{FF2B5EF4-FFF2-40B4-BE49-F238E27FC236}">
+                <a16:creationId xmlns:a16="http://schemas.microsoft.com/office/drawing/2014/main" id="{2ADE279D-187D-FFC8-1BCF-39ED1039484B}"/>
+              </a:ext>
+            </a:extLst>
+          </p:cNvPr>
+          <p:cNvSpPr>
+            <a:spLocks noGrp="1"/>
+          </p:cNvSpPr>
+          <p:nvPr>
+            <p:ph type="dt" sz="half" idx="10"/>
+          </p:nvPr>
+        </p:nvSpPr>
+        <p:spPr/>
+        <p:txBody>
+          <a:bodyPr/>
+          <a:lstStyle/>
+          <a:p>
+            <a:fld id="{3C9CE3CE-253F-4F9D-BA15-C226C8D8501E}" type="datetime6">
+              <a:rPr lang="ko-KR" altLang="en-US" smtClean="0"/>
+              <a:t>2024년 5월</a:t>
+            </a:fld>
+            <a:endParaRPr lang="ko-KR" altLang="en-US"/>
+          </a:p>
+        </p:txBody>
+      </p:sp>
+      <p:sp>
+        <p:nvSpPr>
+          <p:cNvPr id="4" name="슬라이드 번호 개체 틀 3">
+            <a:extLst>
+              <a:ext uri="{FF2B5EF4-FFF2-40B4-BE49-F238E27FC236}">
+                <a16:creationId xmlns:a16="http://schemas.microsoft.com/office/drawing/2014/main" id="{C65620E2-371F-92B9-8FFF-EEF653C30865}"/>
+              </a:ext>
+            </a:extLst>
+          </p:cNvPr>
+          <p:cNvSpPr>
+            <a:spLocks noGrp="1"/>
+          </p:cNvSpPr>
+          <p:nvPr>
+            <p:ph type="sldNum" sz="quarter" idx="12"/>
+          </p:nvPr>
+        </p:nvSpPr>
+        <p:spPr/>
+        <p:txBody>
+          <a:bodyPr/>
+          <a:lstStyle/>
+          <a:p>
+            <a:fld id="{083A2CE0-18CD-4102-B738-4ACFF9E68BA4}" type="slidenum">
+              <a:rPr lang="ko-KR" altLang="en-US" smtClean="0"/>
+              <a:t>10</a:t>
+            </a:fld>
+            <a:endParaRPr lang="ko-KR" altLang="en-US"/>
+          </a:p>
+        </p:txBody>
+      </p:sp>
+      <p:sp>
+        <p:nvSpPr>
+          <p:cNvPr id="5" name="제목 4">
+            <a:extLst>
+              <a:ext uri="{FF2B5EF4-FFF2-40B4-BE49-F238E27FC236}">
+                <a16:creationId xmlns:a16="http://schemas.microsoft.com/office/drawing/2014/main" id="{6CE51FDC-3006-5D10-684A-6BF04168043C}"/>
+              </a:ext>
+            </a:extLst>
+          </p:cNvPr>
+          <p:cNvSpPr>
+            <a:spLocks noGrp="1"/>
+          </p:cNvSpPr>
+          <p:nvPr>
+            <p:ph type="title"/>
+          </p:nvPr>
+        </p:nvSpPr>
+        <p:spPr/>
+        <p:txBody>
+          <a:bodyPr/>
+          <a:lstStyle/>
+          <a:p>
+            <a:r>
+              <a:rPr lang="ko-KR" altLang="en-US" dirty="0"/>
+              <a:t>확약서 및 체크리스트 작성</a:t>
+            </a:r>
+          </a:p>
+        </p:txBody>
+      </p:sp>
+      <p:pic>
+        <p:nvPicPr>
+          <p:cNvPr id="7" name="그림 6">
+            <a:extLst>
+              <a:ext uri="{FF2B5EF4-FFF2-40B4-BE49-F238E27FC236}">
+                <a16:creationId xmlns:a16="http://schemas.microsoft.com/office/drawing/2014/main" id="{020B9F45-0BCE-4FFF-D576-1A68CF8A4E16}"/>
+              </a:ext>
+            </a:extLst>
+          </p:cNvPr>
+          <p:cNvPicPr>
+            <a:picLocks noChangeAspect="1"/>
+          </p:cNvPicPr>
+          <p:nvPr/>
+        </p:nvPicPr>
+        <p:blipFill>
+          <a:blip r:embed="rId2"/>
+          <a:stretch>
+            <a:fillRect/>
+          </a:stretch>
+        </p:blipFill>
+        <p:spPr>
+          <a:xfrm>
+            <a:off x="1486673" y="1539241"/>
+            <a:ext cx="3257805" cy="4526687"/>
+          </a:xfrm>
+          <a:prstGeom prst="rect">
+            <a:avLst/>
+          </a:prstGeom>
+        </p:spPr>
+      </p:pic>
+      <p:pic>
+        <p:nvPicPr>
+          <p:cNvPr id="13" name="그림 12">
+            <a:extLst>
+              <a:ext uri="{FF2B5EF4-FFF2-40B4-BE49-F238E27FC236}">
+                <a16:creationId xmlns:a16="http://schemas.microsoft.com/office/drawing/2014/main" id="{19362997-968B-2B22-074F-738C5AC2819E}"/>
+              </a:ext>
+            </a:extLst>
+          </p:cNvPr>
+          <p:cNvPicPr>
+            <a:picLocks noChangeAspect="1"/>
+          </p:cNvPicPr>
+          <p:nvPr/>
+        </p:nvPicPr>
+        <p:blipFill>
+          <a:blip r:embed="rId3"/>
+          <a:stretch>
+            <a:fillRect/>
+          </a:stretch>
+        </p:blipFill>
+        <p:spPr>
+          <a:xfrm>
+            <a:off x="7827195" y="1206765"/>
+            <a:ext cx="3425520" cy="4859163"/>
+          </a:xfrm>
+          <a:prstGeom prst="rect">
+            <a:avLst/>
+          </a:prstGeom>
+        </p:spPr>
+      </p:pic>
+      <p:pic>
+        <p:nvPicPr>
+          <p:cNvPr id="9" name="그림 8">
+            <a:extLst>
+              <a:ext uri="{FF2B5EF4-FFF2-40B4-BE49-F238E27FC236}">
+                <a16:creationId xmlns:a16="http://schemas.microsoft.com/office/drawing/2014/main" id="{AEC3B96B-E4B6-CA84-920F-DA215628233A}"/>
+              </a:ext>
+            </a:extLst>
+          </p:cNvPr>
+          <p:cNvPicPr>
+            <a:picLocks noChangeAspect="1"/>
+          </p:cNvPicPr>
+          <p:nvPr/>
+        </p:nvPicPr>
+        <p:blipFill>
+          <a:blip r:embed="rId4"/>
+          <a:stretch>
+            <a:fillRect/>
+          </a:stretch>
+        </p:blipFill>
+        <p:spPr>
+          <a:xfrm>
+            <a:off x="5926351" y="1539554"/>
+            <a:ext cx="3175791" cy="4526687"/>
+          </a:xfrm>
+          <a:prstGeom prst="rect">
+            <a:avLst/>
+          </a:prstGeom>
+        </p:spPr>
+      </p:pic>
+    </p:spTree>
+    <p:extLst>
+      <p:ext uri="{BB962C8B-B14F-4D97-AF65-F5344CB8AC3E}">
+        <p14:creationId xmlns:p14="http://schemas.microsoft.com/office/powerpoint/2010/main" val="2191844993"/>
+      </p:ext>
+    </p:extLst>
+  </p:cSld>
+  <p:clrMapOvr>
+    <a:masterClrMapping/>
+  </p:clrMapOvr>
+</p:sld>
+</file>
+
+<file path=ppt/slides/slide11.xml><?xml version="1.0" encoding="utf-8"?>
+<p:sld xmlns:a="http://schemas.openxmlformats.org/drawingml/2006/main" xmlns:r="http://schemas.openxmlformats.org/officeDocument/2006/relationships" xmlns:p="http://schemas.openxmlformats.org/presentationml/2006/main">
+  <p:cSld>
+    <p:spTree>
+      <p:nvGrpSpPr>
+        <p:cNvPr id="1" name=""/>
+        <p:cNvGrpSpPr/>
+        <p:nvPr/>
+      </p:nvGrpSpPr>
+      <p:grpSpPr>
+        <a:xfrm>
+          <a:off x="0" y="0"/>
+          <a:ext cx="0" cy="0"/>
+          <a:chOff x="0" y="0"/>
+          <a:chExt cx="0" cy="0"/>
+        </a:xfrm>
+      </p:grpSpPr>
+      <p:sp>
+        <p:nvSpPr>
           <p:cNvPr id="7" name="내용 개체 틀 2">
             <a:extLst>
               <a:ext uri="{FF2B5EF4-FFF2-40B4-BE49-F238E27FC236}">
@@ -7707,7 +7914,7 @@
           <a:p>
             <a:fld id="{083A2CE0-18CD-4102-B738-4ACFF9E68BA4}" type="slidenum">
               <a:rPr lang="ko-KR" altLang="en-US" smtClean="0"/>
-              <a:t>10</a:t>
+              <a:t>11</a:t>
             </a:fld>
             <a:endParaRPr lang="ko-KR" altLang="en-US"/>
           </a:p>
@@ -7835,7 +8042,7 @@
 </p:sld>
 </file>
 
-<file path=ppt/slides/slide11.xml><?xml version="1.0" encoding="utf-8"?>
+<file path=ppt/slides/slide12.xml><?xml version="1.0" encoding="utf-8"?>
 <p:sld xmlns:a="http://schemas.openxmlformats.org/drawingml/2006/main" xmlns:r="http://schemas.openxmlformats.org/officeDocument/2006/relationships" xmlns:p="http://schemas.openxmlformats.org/presentationml/2006/main">
   <p:cSld>
     <p:spTree>
@@ -8030,200 +8237,6 @@
     <p:extLst>
       <p:ext uri="{BB962C8B-B14F-4D97-AF65-F5344CB8AC3E}">
         <p14:creationId xmlns:p14="http://schemas.microsoft.com/office/powerpoint/2010/main" val="71235578"/>
-      </p:ext>
-    </p:extLst>
-  </p:cSld>
-  <p:clrMapOvr>
-    <a:masterClrMapping/>
-  </p:clrMapOvr>
-</p:sld>
-</file>
-
-<file path=ppt/slides/slide12.xml><?xml version="1.0" encoding="utf-8"?>
-<p:sld xmlns:a="http://schemas.openxmlformats.org/drawingml/2006/main" xmlns:r="http://schemas.openxmlformats.org/officeDocument/2006/relationships" xmlns:p="http://schemas.openxmlformats.org/presentationml/2006/main">
-  <p:cSld>
-    <p:spTree>
-      <p:nvGrpSpPr>
-        <p:cNvPr id="1" name=""/>
-        <p:cNvGrpSpPr/>
-        <p:nvPr/>
-      </p:nvGrpSpPr>
-      <p:grpSpPr>
-        <a:xfrm>
-          <a:off x="0" y="0"/>
-          <a:ext cx="0" cy="0"/>
-          <a:chOff x="0" y="0"/>
-          <a:chExt cx="0" cy="0"/>
-        </a:xfrm>
-      </p:grpSpPr>
-      <p:sp>
-        <p:nvSpPr>
-          <p:cNvPr id="8" name="직사각형 7">
-            <a:extLst>
-              <a:ext uri="{FF2B5EF4-FFF2-40B4-BE49-F238E27FC236}">
-                <a16:creationId xmlns:a16="http://schemas.microsoft.com/office/drawing/2014/main" id="{5BB94A53-7EB2-9249-2AA7-ADA76A47ACE2}"/>
-              </a:ext>
-            </a:extLst>
-          </p:cNvPr>
-          <p:cNvSpPr/>
-          <p:nvPr/>
-        </p:nvSpPr>
-        <p:spPr>
-          <a:xfrm>
-            <a:off x="1254034" y="2063931"/>
-            <a:ext cx="9666515" cy="2730137"/>
-          </a:xfrm>
-          <a:prstGeom prst="rect">
-            <a:avLst/>
-          </a:prstGeom>
-        </p:spPr>
-        <p:style>
-          <a:lnRef idx="2">
-            <a:schemeClr val="dk1">
-              <a:shade val="50000"/>
-            </a:schemeClr>
-          </a:lnRef>
-          <a:fillRef idx="1">
-            <a:schemeClr val="dk1"/>
-          </a:fillRef>
-          <a:effectRef idx="0">
-            <a:schemeClr val="dk1"/>
-          </a:effectRef>
-          <a:fontRef idx="minor">
-            <a:schemeClr val="lt1"/>
-          </a:fontRef>
-        </p:style>
-        <p:txBody>
-          <a:bodyPr rtlCol="0" anchor="ctr"/>
-          <a:lstStyle/>
-          <a:p>
-            <a:pPr algn="ctr"/>
-            <a:endParaRPr lang="ko-KR" altLang="en-US"/>
-          </a:p>
-        </p:txBody>
-      </p:sp>
-      <p:pic>
-        <p:nvPicPr>
-          <p:cNvPr id="7" name="내용 개체 틀 6">
-            <a:extLst>
-              <a:ext uri="{FF2B5EF4-FFF2-40B4-BE49-F238E27FC236}">
-                <a16:creationId xmlns:a16="http://schemas.microsoft.com/office/drawing/2014/main" id="{D8A1035E-C3E6-CAB4-CB53-772856074142}"/>
-              </a:ext>
-            </a:extLst>
-          </p:cNvPr>
-          <p:cNvPicPr>
-            <a:picLocks noGrp="1" noChangeAspect="1"/>
-          </p:cNvPicPr>
-          <p:nvPr>
-            <p:ph idx="1"/>
-          </p:nvPr>
-        </p:nvPicPr>
-        <p:blipFill>
-          <a:blip r:embed="rId3">
-            <a:extLst>
-              <a:ext uri="{28A0092B-C50C-407E-A947-70E740481C1C}">
-                <a14:useLocalDpi xmlns:a14="http://schemas.microsoft.com/office/drawing/2010/main" val="0"/>
-              </a:ext>
-            </a:extLst>
-          </a:blip>
-          <a:stretch>
-            <a:fillRect/>
-          </a:stretch>
-        </p:blipFill>
-        <p:spPr>
-          <a:xfrm>
-            <a:off x="1288803" y="2298642"/>
-            <a:ext cx="9614394" cy="2260716"/>
-          </a:xfrm>
-        </p:spPr>
-      </p:pic>
-      <p:sp>
-        <p:nvSpPr>
-          <p:cNvPr id="4" name="날짜 개체 틀 3">
-            <a:extLst>
-              <a:ext uri="{FF2B5EF4-FFF2-40B4-BE49-F238E27FC236}">
-                <a16:creationId xmlns:a16="http://schemas.microsoft.com/office/drawing/2014/main" id="{262E0B53-E0E0-F605-AE5D-CBC41626BB09}"/>
-              </a:ext>
-            </a:extLst>
-          </p:cNvPr>
-          <p:cNvSpPr>
-            <a:spLocks noGrp="1"/>
-          </p:cNvSpPr>
-          <p:nvPr>
-            <p:ph type="dt" sz="half" idx="10"/>
-          </p:nvPr>
-        </p:nvSpPr>
-        <p:spPr/>
-        <p:txBody>
-          <a:bodyPr/>
-          <a:lstStyle/>
-          <a:p>
-            <a:fld id="{3C9CE3CE-253F-4F9D-BA15-C226C8D8501E}" type="datetime6">
-              <a:rPr lang="ko-KR" altLang="en-US" smtClean="0"/>
-              <a:t>2024년 5월</a:t>
-            </a:fld>
-            <a:endParaRPr lang="ko-KR" altLang="en-US"/>
-          </a:p>
-        </p:txBody>
-      </p:sp>
-      <p:sp>
-        <p:nvSpPr>
-          <p:cNvPr id="5" name="슬라이드 번호 개체 틀 4">
-            <a:extLst>
-              <a:ext uri="{FF2B5EF4-FFF2-40B4-BE49-F238E27FC236}">
-                <a16:creationId xmlns:a16="http://schemas.microsoft.com/office/drawing/2014/main" id="{F07E3F96-E9FB-A7CD-5BE4-ECB3A6952CA2}"/>
-              </a:ext>
-            </a:extLst>
-          </p:cNvPr>
-          <p:cNvSpPr>
-            <a:spLocks noGrp="1"/>
-          </p:cNvSpPr>
-          <p:nvPr>
-            <p:ph type="sldNum" sz="quarter" idx="12"/>
-          </p:nvPr>
-        </p:nvSpPr>
-        <p:spPr/>
-        <p:txBody>
-          <a:bodyPr/>
-          <a:lstStyle/>
-          <a:p>
-            <a:fld id="{083A2CE0-18CD-4102-B738-4ACFF9E68BA4}" type="slidenum">
-              <a:rPr lang="ko-KR" altLang="en-US" smtClean="0"/>
-              <a:t>12</a:t>
-            </a:fld>
-            <a:endParaRPr lang="ko-KR" altLang="en-US"/>
-          </a:p>
-        </p:txBody>
-      </p:sp>
-      <p:sp>
-        <p:nvSpPr>
-          <p:cNvPr id="2" name="제목 1">
-            <a:extLst>
-              <a:ext uri="{FF2B5EF4-FFF2-40B4-BE49-F238E27FC236}">
-                <a16:creationId xmlns:a16="http://schemas.microsoft.com/office/drawing/2014/main" id="{DBCF21E7-CA19-7543-C877-324BE0E54368}"/>
-              </a:ext>
-            </a:extLst>
-          </p:cNvPr>
-          <p:cNvSpPr>
-            <a:spLocks noGrp="1"/>
-          </p:cNvSpPr>
-          <p:nvPr>
-            <p:ph type="title"/>
-          </p:nvPr>
-        </p:nvSpPr>
-        <p:spPr/>
-        <p:txBody>
-          <a:bodyPr/>
-          <a:lstStyle/>
-          <a:p>
-            <a:endParaRPr lang="ko-KR" altLang="en-US" dirty="0"/>
-          </a:p>
-        </p:txBody>
-      </p:sp>
-    </p:spTree>
-    <p:extLst>
-      <p:ext uri="{BB962C8B-B14F-4D97-AF65-F5344CB8AC3E}">
-        <p14:creationId xmlns:p14="http://schemas.microsoft.com/office/powerpoint/2010/main" val="3754047923"/>
       </p:ext>
     </p:extLst>
   </p:cSld>
@@ -8252,10 +8265,91 @@
       </p:grpSpPr>
       <p:sp>
         <p:nvSpPr>
+          <p:cNvPr id="8" name="직사각형 7">
+            <a:extLst>
+              <a:ext uri="{FF2B5EF4-FFF2-40B4-BE49-F238E27FC236}">
+                <a16:creationId xmlns:a16="http://schemas.microsoft.com/office/drawing/2014/main" id="{5BB94A53-7EB2-9249-2AA7-ADA76A47ACE2}"/>
+              </a:ext>
+            </a:extLst>
+          </p:cNvPr>
+          <p:cNvSpPr/>
+          <p:nvPr/>
+        </p:nvSpPr>
+        <p:spPr>
+          <a:xfrm>
+            <a:off x="1254034" y="2063931"/>
+            <a:ext cx="9666515" cy="2730137"/>
+          </a:xfrm>
+          <a:prstGeom prst="rect">
+            <a:avLst/>
+          </a:prstGeom>
+        </p:spPr>
+        <p:style>
+          <a:lnRef idx="2">
+            <a:schemeClr val="dk1">
+              <a:shade val="50000"/>
+            </a:schemeClr>
+          </a:lnRef>
+          <a:fillRef idx="1">
+            <a:schemeClr val="dk1"/>
+          </a:fillRef>
+          <a:effectRef idx="0">
+            <a:schemeClr val="dk1"/>
+          </a:effectRef>
+          <a:fontRef idx="minor">
+            <a:schemeClr val="lt1"/>
+          </a:fontRef>
+        </p:style>
+        <p:txBody>
+          <a:bodyPr rtlCol="0" anchor="ctr"/>
+          <a:lstStyle/>
+          <a:p>
+            <a:pPr algn="ctr"/>
+            <a:endParaRPr lang="ko-KR" altLang="en-US"/>
+          </a:p>
+        </p:txBody>
+      </p:sp>
+      <p:pic>
+        <p:nvPicPr>
+          <p:cNvPr id="7" name="내용 개체 틀 6">
+            <a:extLst>
+              <a:ext uri="{FF2B5EF4-FFF2-40B4-BE49-F238E27FC236}">
+                <a16:creationId xmlns:a16="http://schemas.microsoft.com/office/drawing/2014/main" id="{D8A1035E-C3E6-CAB4-CB53-772856074142}"/>
+              </a:ext>
+            </a:extLst>
+          </p:cNvPr>
+          <p:cNvPicPr>
+            <a:picLocks noGrp="1" noChangeAspect="1"/>
+          </p:cNvPicPr>
+          <p:nvPr>
+            <p:ph idx="1"/>
+          </p:nvPr>
+        </p:nvPicPr>
+        <p:blipFill>
+          <a:blip r:embed="rId3">
+            <a:extLst>
+              <a:ext uri="{28A0092B-C50C-407E-A947-70E740481C1C}">
+                <a14:useLocalDpi xmlns:a14="http://schemas.microsoft.com/office/drawing/2010/main" val="0"/>
+              </a:ext>
+            </a:extLst>
+          </a:blip>
+          <a:stretch>
+            <a:fillRect/>
+          </a:stretch>
+        </p:blipFill>
+        <p:spPr>
+          <a:xfrm>
+            <a:off x="1288803" y="2298642"/>
+            <a:ext cx="9614394" cy="2260716"/>
+          </a:xfrm>
+        </p:spPr>
+      </p:pic>
+      <p:sp>
+        <p:nvSpPr>
           <p:cNvPr id="4" name="날짜 개체 틀 3">
             <a:extLst>
               <a:ext uri="{FF2B5EF4-FFF2-40B4-BE49-F238E27FC236}">
-                <a16:creationId xmlns:a16="http://schemas.microsoft.com/office/drawing/2014/main" id="{8692A623-1E1A-7CB9-1FC7-84129EFA1C30}"/>
+                <a16:creationId xmlns:a16="http://schemas.microsoft.com/office/drawing/2014/main" id="{262E0B53-E0E0-F605-AE5D-CBC41626BB09}"/>
               </a:ext>
             </a:extLst>
           </p:cNvPr>
@@ -8271,7 +8365,7 @@
           <a:bodyPr/>
           <a:lstStyle/>
           <a:p>
-            <a:fld id="{2CFBFBFA-EBC3-4288-86D0-55A69B340430}" type="datetime6">
+            <a:fld id="{3C9CE3CE-253F-4F9D-BA15-C226C8D8501E}" type="datetime6">
               <a:rPr lang="ko-KR" altLang="en-US" smtClean="0"/>
               <a:t>2024년 5월</a:t>
             </a:fld>
@@ -8284,7 +8378,7 @@
           <p:cNvPr id="5" name="슬라이드 번호 개체 틀 4">
             <a:extLst>
               <a:ext uri="{FF2B5EF4-FFF2-40B4-BE49-F238E27FC236}">
-                <a16:creationId xmlns:a16="http://schemas.microsoft.com/office/drawing/2014/main" id="{0A828EB3-DD5D-5147-DB5C-6EBF4140E72C}"/>
+                <a16:creationId xmlns:a16="http://schemas.microsoft.com/office/drawing/2014/main" id="{F07E3F96-E9FB-A7CD-5BE4-ECB3A6952CA2}"/>
               </a:ext>
             </a:extLst>
           </p:cNvPr>
@@ -8310,204 +8404,33 @@
       </p:sp>
       <p:sp>
         <p:nvSpPr>
-          <p:cNvPr id="8" name="슬라이드 번호 개체 틀 4">
-            <a:extLst>
-              <a:ext uri="{FF2B5EF4-FFF2-40B4-BE49-F238E27FC236}">
-                <a16:creationId xmlns:a16="http://schemas.microsoft.com/office/drawing/2014/main" id="{A7866ED4-0F74-48BC-84C6-42485677A1A4}"/>
-              </a:ext>
-            </a:extLst>
-          </p:cNvPr>
-          <p:cNvSpPr>
-            <a:spLocks noGrp="1"/>
-          </p:cNvSpPr>
-          <p:nvPr/>
-        </p:nvSpPr>
-        <p:spPr>
-          <a:xfrm>
-            <a:off x="9029700" y="6303732"/>
-            <a:ext cx="2743200" cy="365125"/>
-          </a:xfrm>
-          <a:prstGeom prst="rect">
-            <a:avLst/>
-          </a:prstGeom>
-        </p:spPr>
-        <p:txBody>
-          <a:bodyPr vert="horz" lIns="91440" tIns="45720" rIns="91440" bIns="45720" rtlCol="0" anchor="ctr"/>
-          <a:lstStyle>
-            <a:defPPr>
-              <a:defRPr lang="ko-KR"/>
-            </a:defPPr>
-            <a:lvl1pPr marL="0" algn="r" defTabSz="914400" rtl="0" eaLnBrk="1" latinLnBrk="1" hangingPunct="1">
-              <a:defRPr sz="1200" kern="1200">
-                <a:solidFill>
-                  <a:schemeClr val="tx1">
-                    <a:tint val="75000"/>
-                  </a:schemeClr>
-                </a:solidFill>
-                <a:latin typeface="+mn-lt"/>
-                <a:ea typeface="+mn-ea"/>
-                <a:cs typeface="+mn-cs"/>
-              </a:defRPr>
-            </a:lvl1pPr>
-            <a:lvl2pPr marL="457200" algn="l" defTabSz="914400" rtl="0" eaLnBrk="1" latinLnBrk="1" hangingPunct="1">
-              <a:defRPr sz="1800" kern="1200">
-                <a:solidFill>
-                  <a:schemeClr val="tx1"/>
-                </a:solidFill>
-                <a:latin typeface="+mn-lt"/>
-                <a:ea typeface="+mn-ea"/>
-                <a:cs typeface="+mn-cs"/>
-              </a:defRPr>
-            </a:lvl2pPr>
-            <a:lvl3pPr marL="914400" algn="l" defTabSz="914400" rtl="0" eaLnBrk="1" latinLnBrk="1" hangingPunct="1">
-              <a:defRPr sz="1800" kern="1200">
-                <a:solidFill>
-                  <a:schemeClr val="tx1"/>
-                </a:solidFill>
-                <a:latin typeface="+mn-lt"/>
-                <a:ea typeface="+mn-ea"/>
-                <a:cs typeface="+mn-cs"/>
-              </a:defRPr>
-            </a:lvl3pPr>
-            <a:lvl4pPr marL="1371600" algn="l" defTabSz="914400" rtl="0" eaLnBrk="1" latinLnBrk="1" hangingPunct="1">
-              <a:defRPr sz="1800" kern="1200">
-                <a:solidFill>
-                  <a:schemeClr val="tx1"/>
-                </a:solidFill>
-                <a:latin typeface="+mn-lt"/>
-                <a:ea typeface="+mn-ea"/>
-                <a:cs typeface="+mn-cs"/>
-              </a:defRPr>
-            </a:lvl4pPr>
-            <a:lvl5pPr marL="1828800" algn="l" defTabSz="914400" rtl="0" eaLnBrk="1" latinLnBrk="1" hangingPunct="1">
-              <a:defRPr sz="1800" kern="1200">
-                <a:solidFill>
-                  <a:schemeClr val="tx1"/>
-                </a:solidFill>
-                <a:latin typeface="+mn-lt"/>
-                <a:ea typeface="+mn-ea"/>
-                <a:cs typeface="+mn-cs"/>
-              </a:defRPr>
-            </a:lvl5pPr>
-            <a:lvl6pPr marL="2286000" algn="l" defTabSz="914400" rtl="0" eaLnBrk="1" latinLnBrk="1" hangingPunct="1">
-              <a:defRPr sz="1800" kern="1200">
-                <a:solidFill>
-                  <a:schemeClr val="tx1"/>
-                </a:solidFill>
-                <a:latin typeface="+mn-lt"/>
-                <a:ea typeface="+mn-ea"/>
-                <a:cs typeface="+mn-cs"/>
-              </a:defRPr>
-            </a:lvl6pPr>
-            <a:lvl7pPr marL="2743200" algn="l" defTabSz="914400" rtl="0" eaLnBrk="1" latinLnBrk="1" hangingPunct="1">
-              <a:defRPr sz="1800" kern="1200">
-                <a:solidFill>
-                  <a:schemeClr val="tx1"/>
-                </a:solidFill>
-                <a:latin typeface="+mn-lt"/>
-                <a:ea typeface="+mn-ea"/>
-                <a:cs typeface="+mn-cs"/>
-              </a:defRPr>
-            </a:lvl7pPr>
-            <a:lvl8pPr marL="3200400" algn="l" defTabSz="914400" rtl="0" eaLnBrk="1" latinLnBrk="1" hangingPunct="1">
-              <a:defRPr sz="1800" kern="1200">
-                <a:solidFill>
-                  <a:schemeClr val="tx1"/>
-                </a:solidFill>
-                <a:latin typeface="+mn-lt"/>
-                <a:ea typeface="+mn-ea"/>
-                <a:cs typeface="+mn-cs"/>
-              </a:defRPr>
-            </a:lvl8pPr>
-            <a:lvl9pPr marL="3657600" algn="l" defTabSz="914400" rtl="0" eaLnBrk="1" latinLnBrk="1" hangingPunct="1">
-              <a:defRPr sz="1800" kern="1200">
-                <a:solidFill>
-                  <a:schemeClr val="tx1"/>
-                </a:solidFill>
-                <a:latin typeface="+mn-lt"/>
-                <a:ea typeface="+mn-ea"/>
-                <a:cs typeface="+mn-cs"/>
-              </a:defRPr>
-            </a:lvl9pPr>
-          </a:lstStyle>
-          <a:p>
-            <a:fld id="{083A2CE0-18CD-4102-B738-4ACFF9E68BA4}" type="slidenum">
-              <a:rPr lang="ko-KR" altLang="en-US" smtClean="0"/>
-              <a:pPr/>
-              <a:t>13</a:t>
-            </a:fld>
-            <a:endParaRPr lang="ko-KR" altLang="en-US"/>
-          </a:p>
-        </p:txBody>
-      </p:sp>
-      <p:sp>
-        <p:nvSpPr>
-          <p:cNvPr id="3" name="제목 1">
-            <a:extLst>
-              <a:ext uri="{FF2B5EF4-FFF2-40B4-BE49-F238E27FC236}">
-                <a16:creationId xmlns:a16="http://schemas.microsoft.com/office/drawing/2014/main" id="{43054EBB-F401-BE68-C4D1-B1DC2AE0520E}"/>
-              </a:ext>
-            </a:extLst>
-          </p:cNvPr>
-          <p:cNvSpPr>
-            <a:spLocks noGrp="1"/>
-          </p:cNvSpPr>
-          <p:nvPr/>
-        </p:nvSpPr>
-        <p:spPr>
-          <a:xfrm>
-            <a:off x="1265413" y="1649845"/>
-            <a:ext cx="10023122" cy="2999141"/>
-          </a:xfrm>
-          <a:prstGeom prst="rect">
-            <a:avLst/>
-          </a:prstGeom>
-        </p:spPr>
-        <p:txBody>
-          <a:bodyPr vert="horz" lIns="91440" tIns="45720" rIns="91440" bIns="45720" rtlCol="0" anchor="ctr">
-            <a:normAutofit/>
-          </a:bodyPr>
-          <a:lstStyle>
-            <a:lvl1pPr algn="l" defTabSz="914400" rtl="0" eaLnBrk="1" latinLnBrk="1" hangingPunct="1">
-              <a:lnSpc>
-                <a:spcPct val="90000"/>
-              </a:lnSpc>
-              <a:spcBef>
-                <a:spcPct val="0"/>
-              </a:spcBef>
-              <a:buNone/>
-              <a:defRPr sz="4400" kern="1200">
-                <a:solidFill>
-                  <a:schemeClr val="tx1"/>
-                </a:solidFill>
-                <a:latin typeface="+mj-lt"/>
-                <a:ea typeface="+mj-ea"/>
-                <a:cs typeface="+mj-cs"/>
-              </a:defRPr>
-            </a:lvl1pPr>
-          </a:lstStyle>
-          <a:p>
-            <a:pPr algn="ctr"/>
-            <a:r>
-              <a:rPr lang="ko-KR" altLang="en-US" sz="8800" dirty="0"/>
-              <a:t>션</a:t>
-            </a:r>
-            <a:r>
-              <a:rPr lang="en-US" altLang="ko-KR" sz="8800" dirty="0"/>
-              <a:t> </a:t>
-            </a:r>
-            <a:r>
-              <a:rPr lang="ko-KR" altLang="en-US" sz="8800" dirty="0"/>
-              <a:t>리더님</a:t>
-            </a:r>
-            <a:endParaRPr lang="en-US" altLang="ko-KR" sz="3200" dirty="0"/>
+          <p:cNvPr id="2" name="제목 1">
+            <a:extLst>
+              <a:ext uri="{FF2B5EF4-FFF2-40B4-BE49-F238E27FC236}">
+                <a16:creationId xmlns:a16="http://schemas.microsoft.com/office/drawing/2014/main" id="{DBCF21E7-CA19-7543-C877-324BE0E54368}"/>
+              </a:ext>
+            </a:extLst>
+          </p:cNvPr>
+          <p:cNvSpPr>
+            <a:spLocks noGrp="1"/>
+          </p:cNvSpPr>
+          <p:nvPr>
+            <p:ph type="title"/>
+          </p:nvPr>
+        </p:nvSpPr>
+        <p:spPr/>
+        <p:txBody>
+          <a:bodyPr/>
+          <a:lstStyle/>
+          <a:p>
+            <a:endParaRPr lang="ko-KR" altLang="en-US" dirty="0"/>
           </a:p>
         </p:txBody>
       </p:sp>
     </p:spTree>
     <p:extLst>
       <p:ext uri="{BB962C8B-B14F-4D97-AF65-F5344CB8AC3E}">
-        <p14:creationId xmlns:p14="http://schemas.microsoft.com/office/powerpoint/2010/main" val="2020943542"/>
+        <p14:creationId xmlns:p14="http://schemas.microsoft.com/office/powerpoint/2010/main" val="3754047923"/>
       </p:ext>
     </p:extLst>
   </p:cSld>
@@ -8773,18 +8696,302 @@
           <a:p>
             <a:pPr algn="ctr"/>
             <a:r>
-              <a:rPr lang="ko-KR" altLang="en-US" sz="8800" dirty="0" err="1"/>
+              <a:rPr lang="ko-KR" altLang="en-US" sz="8800" b="1" dirty="0"/>
+              <a:t>션</a:t>
+            </a:r>
+            <a:r>
+              <a:rPr lang="en-US" altLang="ko-KR" sz="8800" b="1" dirty="0"/>
+              <a:t> </a:t>
+            </a:r>
+            <a:r>
+              <a:rPr lang="ko-KR" altLang="en-US" sz="8800" b="1" dirty="0"/>
+              <a:t>리더님</a:t>
+            </a:r>
+            <a:endParaRPr lang="en-US" altLang="ko-KR" sz="3200" b="1" dirty="0"/>
+          </a:p>
+        </p:txBody>
+      </p:sp>
+    </p:spTree>
+    <p:extLst>
+      <p:ext uri="{BB962C8B-B14F-4D97-AF65-F5344CB8AC3E}">
+        <p14:creationId xmlns:p14="http://schemas.microsoft.com/office/powerpoint/2010/main" val="2020943542"/>
+      </p:ext>
+    </p:extLst>
+  </p:cSld>
+  <p:clrMapOvr>
+    <a:masterClrMapping/>
+  </p:clrMapOvr>
+</p:sld>
+</file>
+
+<file path=ppt/slides/slide15.xml><?xml version="1.0" encoding="utf-8"?>
+<p:sld xmlns:a="http://schemas.openxmlformats.org/drawingml/2006/main" xmlns:r="http://schemas.openxmlformats.org/officeDocument/2006/relationships" xmlns:p="http://schemas.openxmlformats.org/presentationml/2006/main">
+  <p:cSld>
+    <p:spTree>
+      <p:nvGrpSpPr>
+        <p:cNvPr id="1" name=""/>
+        <p:cNvGrpSpPr/>
+        <p:nvPr/>
+      </p:nvGrpSpPr>
+      <p:grpSpPr>
+        <a:xfrm>
+          <a:off x="0" y="0"/>
+          <a:ext cx="0" cy="0"/>
+          <a:chOff x="0" y="0"/>
+          <a:chExt cx="0" cy="0"/>
+        </a:xfrm>
+      </p:grpSpPr>
+      <p:sp>
+        <p:nvSpPr>
+          <p:cNvPr id="4" name="날짜 개체 틀 3">
+            <a:extLst>
+              <a:ext uri="{FF2B5EF4-FFF2-40B4-BE49-F238E27FC236}">
+                <a16:creationId xmlns:a16="http://schemas.microsoft.com/office/drawing/2014/main" id="{8692A623-1E1A-7CB9-1FC7-84129EFA1C30}"/>
+              </a:ext>
+            </a:extLst>
+          </p:cNvPr>
+          <p:cNvSpPr>
+            <a:spLocks noGrp="1"/>
+          </p:cNvSpPr>
+          <p:nvPr>
+            <p:ph type="dt" sz="half" idx="10"/>
+          </p:nvPr>
+        </p:nvSpPr>
+        <p:spPr/>
+        <p:txBody>
+          <a:bodyPr/>
+          <a:lstStyle/>
+          <a:p>
+            <a:fld id="{2CFBFBFA-EBC3-4288-86D0-55A69B340430}" type="datetime6">
+              <a:rPr lang="ko-KR" altLang="en-US" smtClean="0"/>
+              <a:t>2024년 5월</a:t>
+            </a:fld>
+            <a:endParaRPr lang="ko-KR" altLang="en-US"/>
+          </a:p>
+        </p:txBody>
+      </p:sp>
+      <p:sp>
+        <p:nvSpPr>
+          <p:cNvPr id="5" name="슬라이드 번호 개체 틀 4">
+            <a:extLst>
+              <a:ext uri="{FF2B5EF4-FFF2-40B4-BE49-F238E27FC236}">
+                <a16:creationId xmlns:a16="http://schemas.microsoft.com/office/drawing/2014/main" id="{0A828EB3-DD5D-5147-DB5C-6EBF4140E72C}"/>
+              </a:ext>
+            </a:extLst>
+          </p:cNvPr>
+          <p:cNvSpPr>
+            <a:spLocks noGrp="1"/>
+          </p:cNvSpPr>
+          <p:nvPr>
+            <p:ph type="sldNum" sz="quarter" idx="12"/>
+          </p:nvPr>
+        </p:nvSpPr>
+        <p:spPr/>
+        <p:txBody>
+          <a:bodyPr/>
+          <a:lstStyle/>
+          <a:p>
+            <a:fld id="{083A2CE0-18CD-4102-B738-4ACFF9E68BA4}" type="slidenum">
+              <a:rPr lang="ko-KR" altLang="en-US" smtClean="0"/>
+              <a:t>15</a:t>
+            </a:fld>
+            <a:endParaRPr lang="ko-KR" altLang="en-US"/>
+          </a:p>
+        </p:txBody>
+      </p:sp>
+      <p:sp>
+        <p:nvSpPr>
+          <p:cNvPr id="8" name="슬라이드 번호 개체 틀 4">
+            <a:extLst>
+              <a:ext uri="{FF2B5EF4-FFF2-40B4-BE49-F238E27FC236}">
+                <a16:creationId xmlns:a16="http://schemas.microsoft.com/office/drawing/2014/main" id="{A7866ED4-0F74-48BC-84C6-42485677A1A4}"/>
+              </a:ext>
+            </a:extLst>
+          </p:cNvPr>
+          <p:cNvSpPr>
+            <a:spLocks noGrp="1"/>
+          </p:cNvSpPr>
+          <p:nvPr/>
+        </p:nvSpPr>
+        <p:spPr>
+          <a:xfrm>
+            <a:off x="9029700" y="6303732"/>
+            <a:ext cx="2743200" cy="365125"/>
+          </a:xfrm>
+          <a:prstGeom prst="rect">
+            <a:avLst/>
+          </a:prstGeom>
+        </p:spPr>
+        <p:txBody>
+          <a:bodyPr vert="horz" lIns="91440" tIns="45720" rIns="91440" bIns="45720" rtlCol="0" anchor="ctr"/>
+          <a:lstStyle>
+            <a:defPPr>
+              <a:defRPr lang="ko-KR"/>
+            </a:defPPr>
+            <a:lvl1pPr marL="0" algn="r" defTabSz="914400" rtl="0" eaLnBrk="1" latinLnBrk="1" hangingPunct="1">
+              <a:defRPr sz="1200" kern="1200">
+                <a:solidFill>
+                  <a:schemeClr val="tx1">
+                    <a:tint val="75000"/>
+                  </a:schemeClr>
+                </a:solidFill>
+                <a:latin typeface="+mn-lt"/>
+                <a:ea typeface="+mn-ea"/>
+                <a:cs typeface="+mn-cs"/>
+              </a:defRPr>
+            </a:lvl1pPr>
+            <a:lvl2pPr marL="457200" algn="l" defTabSz="914400" rtl="0" eaLnBrk="1" latinLnBrk="1" hangingPunct="1">
+              <a:defRPr sz="1800" kern="1200">
+                <a:solidFill>
+                  <a:schemeClr val="tx1"/>
+                </a:solidFill>
+                <a:latin typeface="+mn-lt"/>
+                <a:ea typeface="+mn-ea"/>
+                <a:cs typeface="+mn-cs"/>
+              </a:defRPr>
+            </a:lvl2pPr>
+            <a:lvl3pPr marL="914400" algn="l" defTabSz="914400" rtl="0" eaLnBrk="1" latinLnBrk="1" hangingPunct="1">
+              <a:defRPr sz="1800" kern="1200">
+                <a:solidFill>
+                  <a:schemeClr val="tx1"/>
+                </a:solidFill>
+                <a:latin typeface="+mn-lt"/>
+                <a:ea typeface="+mn-ea"/>
+                <a:cs typeface="+mn-cs"/>
+              </a:defRPr>
+            </a:lvl3pPr>
+            <a:lvl4pPr marL="1371600" algn="l" defTabSz="914400" rtl="0" eaLnBrk="1" latinLnBrk="1" hangingPunct="1">
+              <a:defRPr sz="1800" kern="1200">
+                <a:solidFill>
+                  <a:schemeClr val="tx1"/>
+                </a:solidFill>
+                <a:latin typeface="+mn-lt"/>
+                <a:ea typeface="+mn-ea"/>
+                <a:cs typeface="+mn-cs"/>
+              </a:defRPr>
+            </a:lvl4pPr>
+            <a:lvl5pPr marL="1828800" algn="l" defTabSz="914400" rtl="0" eaLnBrk="1" latinLnBrk="1" hangingPunct="1">
+              <a:defRPr sz="1800" kern="1200">
+                <a:solidFill>
+                  <a:schemeClr val="tx1"/>
+                </a:solidFill>
+                <a:latin typeface="+mn-lt"/>
+                <a:ea typeface="+mn-ea"/>
+                <a:cs typeface="+mn-cs"/>
+              </a:defRPr>
+            </a:lvl5pPr>
+            <a:lvl6pPr marL="2286000" algn="l" defTabSz="914400" rtl="0" eaLnBrk="1" latinLnBrk="1" hangingPunct="1">
+              <a:defRPr sz="1800" kern="1200">
+                <a:solidFill>
+                  <a:schemeClr val="tx1"/>
+                </a:solidFill>
+                <a:latin typeface="+mn-lt"/>
+                <a:ea typeface="+mn-ea"/>
+                <a:cs typeface="+mn-cs"/>
+              </a:defRPr>
+            </a:lvl6pPr>
+            <a:lvl7pPr marL="2743200" algn="l" defTabSz="914400" rtl="0" eaLnBrk="1" latinLnBrk="1" hangingPunct="1">
+              <a:defRPr sz="1800" kern="1200">
+                <a:solidFill>
+                  <a:schemeClr val="tx1"/>
+                </a:solidFill>
+                <a:latin typeface="+mn-lt"/>
+                <a:ea typeface="+mn-ea"/>
+                <a:cs typeface="+mn-cs"/>
+              </a:defRPr>
+            </a:lvl7pPr>
+            <a:lvl8pPr marL="3200400" algn="l" defTabSz="914400" rtl="0" eaLnBrk="1" latinLnBrk="1" hangingPunct="1">
+              <a:defRPr sz="1800" kern="1200">
+                <a:solidFill>
+                  <a:schemeClr val="tx1"/>
+                </a:solidFill>
+                <a:latin typeface="+mn-lt"/>
+                <a:ea typeface="+mn-ea"/>
+                <a:cs typeface="+mn-cs"/>
+              </a:defRPr>
+            </a:lvl8pPr>
+            <a:lvl9pPr marL="3657600" algn="l" defTabSz="914400" rtl="0" eaLnBrk="1" latinLnBrk="1" hangingPunct="1">
+              <a:defRPr sz="1800" kern="1200">
+                <a:solidFill>
+                  <a:schemeClr val="tx1"/>
+                </a:solidFill>
+                <a:latin typeface="+mn-lt"/>
+                <a:ea typeface="+mn-ea"/>
+                <a:cs typeface="+mn-cs"/>
+              </a:defRPr>
+            </a:lvl9pPr>
+          </a:lstStyle>
+          <a:p>
+            <a:fld id="{083A2CE0-18CD-4102-B738-4ACFF9E68BA4}" type="slidenum">
+              <a:rPr lang="ko-KR" altLang="en-US" smtClean="0"/>
+              <a:pPr/>
+              <a:t>15</a:t>
+            </a:fld>
+            <a:endParaRPr lang="ko-KR" altLang="en-US"/>
+          </a:p>
+        </p:txBody>
+      </p:sp>
+      <p:sp>
+        <p:nvSpPr>
+          <p:cNvPr id="3" name="제목 1">
+            <a:extLst>
+              <a:ext uri="{FF2B5EF4-FFF2-40B4-BE49-F238E27FC236}">
+                <a16:creationId xmlns:a16="http://schemas.microsoft.com/office/drawing/2014/main" id="{43054EBB-F401-BE68-C4D1-B1DC2AE0520E}"/>
+              </a:ext>
+            </a:extLst>
+          </p:cNvPr>
+          <p:cNvSpPr>
+            <a:spLocks noGrp="1"/>
+          </p:cNvSpPr>
+          <p:nvPr/>
+        </p:nvSpPr>
+        <p:spPr>
+          <a:xfrm>
+            <a:off x="1265413" y="1649845"/>
+            <a:ext cx="10023122" cy="2999141"/>
+          </a:xfrm>
+          <a:prstGeom prst="rect">
+            <a:avLst/>
+          </a:prstGeom>
+        </p:spPr>
+        <p:txBody>
+          <a:bodyPr vert="horz" lIns="91440" tIns="45720" rIns="91440" bIns="45720" rtlCol="0" anchor="ctr">
+            <a:normAutofit/>
+          </a:bodyPr>
+          <a:lstStyle>
+            <a:lvl1pPr algn="l" defTabSz="914400" rtl="0" eaLnBrk="1" latinLnBrk="1" hangingPunct="1">
+              <a:lnSpc>
+                <a:spcPct val="90000"/>
+              </a:lnSpc>
+              <a:spcBef>
+                <a:spcPct val="0"/>
+              </a:spcBef>
+              <a:buNone/>
+              <a:defRPr sz="4400" kern="1200">
+                <a:solidFill>
+                  <a:schemeClr val="tx1"/>
+                </a:solidFill>
+                <a:latin typeface="+mj-lt"/>
+                <a:ea typeface="+mj-ea"/>
+                <a:cs typeface="+mj-cs"/>
+              </a:defRPr>
+            </a:lvl1pPr>
+          </a:lstStyle>
+          <a:p>
+            <a:pPr algn="ctr"/>
+            <a:r>
+              <a:rPr lang="ko-KR" altLang="en-US" sz="8800" b="1" dirty="0" err="1"/>
               <a:t>데이먼</a:t>
             </a:r>
             <a:r>
-              <a:rPr lang="en-US" altLang="ko-KR" sz="8800" dirty="0"/>
+              <a:rPr lang="en-US" altLang="ko-KR" sz="8800" b="1" dirty="0"/>
               <a:t> </a:t>
             </a:r>
             <a:r>
-              <a:rPr lang="ko-KR" altLang="en-US" sz="8800" dirty="0"/>
+              <a:rPr lang="ko-KR" altLang="en-US" sz="8800" b="1" dirty="0"/>
               <a:t>리더님</a:t>
             </a:r>
-            <a:endParaRPr lang="en-US" altLang="ko-KR" sz="3200" dirty="0"/>
+            <a:endParaRPr lang="en-US" altLang="ko-KR" sz="3200" b="1" dirty="0"/>
           </a:p>
         </p:txBody>
       </p:sp>
@@ -8801,7 +9008,7 @@
 </p:sld>
 </file>
 
-<file path=ppt/slides/slide15.xml><?xml version="1.0" encoding="utf-8"?>
+<file path=ppt/slides/slide16.xml><?xml version="1.0" encoding="utf-8"?>
 <p:sld xmlns:a="http://schemas.openxmlformats.org/drawingml/2006/main" xmlns:r="http://schemas.openxmlformats.org/officeDocument/2006/relationships" xmlns:p="http://schemas.openxmlformats.org/presentationml/2006/main">
   <p:cSld>
     <p:spTree>
@@ -8867,7 +9074,7 @@
 </p:sld>
 </file>
 
-<file path=ppt/slides/slide16.xml><?xml version="1.0" encoding="utf-8"?>
+<file path=ppt/slides/slide17.xml><?xml version="1.0" encoding="utf-8"?>
 <p:sld xmlns:a="http://schemas.openxmlformats.org/drawingml/2006/main" xmlns:r="http://schemas.openxmlformats.org/officeDocument/2006/relationships" xmlns:p="http://schemas.openxmlformats.org/presentationml/2006/main">
   <p:cSld>
     <p:spTree>
@@ -8936,7 +9143,7 @@
           <a:p>
             <a:fld id="{083A2CE0-18CD-4102-B738-4ACFF9E68BA4}" type="slidenum">
               <a:rPr lang="ko-KR" altLang="en-US" smtClean="0"/>
-              <a:t>16</a:t>
+              <a:t>17</a:t>
             </a:fld>
             <a:endParaRPr lang="ko-KR" altLang="en-US"/>
           </a:p>
@@ -9068,7 +9275,7 @@
             <a:fld id="{083A2CE0-18CD-4102-B738-4ACFF9E68BA4}" type="slidenum">
               <a:rPr lang="ko-KR" altLang="en-US" smtClean="0"/>
               <a:pPr/>
-              <a:t>16</a:t>
+              <a:t>17</a:t>
             </a:fld>
             <a:endParaRPr lang="ko-KR" altLang="en-US"/>
           </a:p>
@@ -9316,7 +9523,7 @@
 </p:sld>
 </file>
 
-<file path=ppt/slides/slide17.xml><?xml version="1.0" encoding="utf-8"?>
+<file path=ppt/slides/slide18.xml><?xml version="1.0" encoding="utf-8"?>
 <p:sld xmlns:a="http://schemas.openxmlformats.org/drawingml/2006/main" xmlns:r="http://schemas.openxmlformats.org/officeDocument/2006/relationships" xmlns:p="http://schemas.openxmlformats.org/presentationml/2006/main">
   <p:cSld>
     <p:spTree>
@@ -9497,196 +9704,6 @@
     <p:extLst>
       <p:ext uri="{BB962C8B-B14F-4D97-AF65-F5344CB8AC3E}">
         <p14:creationId xmlns:p14="http://schemas.microsoft.com/office/powerpoint/2010/main" val="1797300016"/>
-      </p:ext>
-    </p:extLst>
-  </p:cSld>
-  <p:clrMapOvr>
-    <a:masterClrMapping/>
-  </p:clrMapOvr>
-</p:sld>
-</file>
-
-<file path=ppt/slides/slide18.xml><?xml version="1.0" encoding="utf-8"?>
-<p:sld xmlns:a="http://schemas.openxmlformats.org/drawingml/2006/main" xmlns:r="http://schemas.openxmlformats.org/officeDocument/2006/relationships" xmlns:p="http://schemas.openxmlformats.org/presentationml/2006/main">
-  <p:cSld>
-    <p:spTree>
-      <p:nvGrpSpPr>
-        <p:cNvPr id="1" name=""/>
-        <p:cNvGrpSpPr/>
-        <p:nvPr/>
-      </p:nvGrpSpPr>
-      <p:grpSpPr>
-        <a:xfrm>
-          <a:off x="0" y="0"/>
-          <a:ext cx="0" cy="0"/>
-          <a:chOff x="0" y="0"/>
-          <a:chExt cx="0" cy="0"/>
-        </a:xfrm>
-      </p:grpSpPr>
-      <p:sp>
-        <p:nvSpPr>
-          <p:cNvPr id="7" name="내용 개체 틀 2">
-            <a:extLst>
-              <a:ext uri="{FF2B5EF4-FFF2-40B4-BE49-F238E27FC236}">
-                <a16:creationId xmlns:a16="http://schemas.microsoft.com/office/drawing/2014/main" id="{C4F7519B-60EE-E574-917E-11D77FC5B5DA}"/>
-              </a:ext>
-            </a:extLst>
-          </p:cNvPr>
-          <p:cNvSpPr>
-            <a:spLocks noGrp="1"/>
-          </p:cNvSpPr>
-          <p:nvPr>
-            <p:ph idx="1"/>
-          </p:nvPr>
-        </p:nvSpPr>
-        <p:spPr>
-          <a:xfrm>
-            <a:off x="7643351" y="2934932"/>
-            <a:ext cx="3033252" cy="899653"/>
-          </a:xfrm>
-        </p:spPr>
-        <p:txBody>
-          <a:bodyPr>
-            <a:normAutofit/>
-          </a:bodyPr>
-          <a:lstStyle/>
-          <a:p>
-            <a:pPr marL="0" indent="0">
-              <a:buNone/>
-            </a:pPr>
-            <a:r>
-              <a:rPr lang="ko-KR" altLang="en-US" sz="5000" b="1" dirty="0">
-                <a:solidFill>
-                  <a:srgbClr val="6EC173"/>
-                </a:solidFill>
-              </a:rPr>
-              <a:t>휴식 </a:t>
-            </a:r>
-            <a:r>
-              <a:rPr lang="en-US" altLang="ko-KR" sz="5000" b="1" dirty="0">
-                <a:solidFill>
-                  <a:srgbClr val="6EC173"/>
-                </a:solidFill>
-              </a:rPr>
-              <a:t>Time</a:t>
-            </a:r>
-            <a:endParaRPr lang="ko-KR" altLang="en-US" sz="5000" b="1" dirty="0">
-              <a:solidFill>
-                <a:srgbClr val="6EC173"/>
-              </a:solidFill>
-            </a:endParaRPr>
-          </a:p>
-        </p:txBody>
-      </p:sp>
-      <p:sp>
-        <p:nvSpPr>
-          <p:cNvPr id="4" name="날짜 개체 틀 3">
-            <a:extLst>
-              <a:ext uri="{FF2B5EF4-FFF2-40B4-BE49-F238E27FC236}">
-                <a16:creationId xmlns:a16="http://schemas.microsoft.com/office/drawing/2014/main" id="{1E263DFF-9BB9-D8A0-9B23-08F2727B6719}"/>
-              </a:ext>
-            </a:extLst>
-          </p:cNvPr>
-          <p:cNvSpPr>
-            <a:spLocks noGrp="1"/>
-          </p:cNvSpPr>
-          <p:nvPr>
-            <p:ph type="dt" sz="half" idx="10"/>
-          </p:nvPr>
-        </p:nvSpPr>
-        <p:spPr/>
-        <p:txBody>
-          <a:bodyPr/>
-          <a:lstStyle/>
-          <a:p>
-            <a:fld id="{1CB3B0AF-12E4-4E46-9E45-3FA033AAD3CB}" type="datetime6">
-              <a:rPr lang="ko-KR" altLang="en-US" smtClean="0"/>
-              <a:t>2024년 5월</a:t>
-            </a:fld>
-            <a:endParaRPr lang="ko-KR" altLang="en-US"/>
-          </a:p>
-        </p:txBody>
-      </p:sp>
-      <p:sp>
-        <p:nvSpPr>
-          <p:cNvPr id="5" name="슬라이드 번호 개체 틀 4">
-            <a:extLst>
-              <a:ext uri="{FF2B5EF4-FFF2-40B4-BE49-F238E27FC236}">
-                <a16:creationId xmlns:a16="http://schemas.microsoft.com/office/drawing/2014/main" id="{35DFD145-2786-3632-BC8A-7B6D36588D9A}"/>
-              </a:ext>
-            </a:extLst>
-          </p:cNvPr>
-          <p:cNvSpPr>
-            <a:spLocks noGrp="1"/>
-          </p:cNvSpPr>
-          <p:nvPr>
-            <p:ph type="sldNum" sz="quarter" idx="12"/>
-          </p:nvPr>
-        </p:nvSpPr>
-        <p:spPr/>
-        <p:txBody>
-          <a:bodyPr/>
-          <a:lstStyle/>
-          <a:p>
-            <a:fld id="{083A2CE0-18CD-4102-B738-4ACFF9E68BA4}" type="slidenum">
-              <a:rPr lang="ko-KR" altLang="en-US" smtClean="0"/>
-              <a:t>18</a:t>
-            </a:fld>
-            <a:endParaRPr lang="ko-KR" altLang="en-US"/>
-          </a:p>
-        </p:txBody>
-      </p:sp>
-      <p:pic>
-        <p:nvPicPr>
-          <p:cNvPr id="1026" name="Picture 2" descr="휴식하면 생기는 우리 몸의 변화들 &lt; 건강 &lt; 기사본문 - 마음건강 길">
-            <a:extLst>
-              <a:ext uri="{FF2B5EF4-FFF2-40B4-BE49-F238E27FC236}">
-                <a16:creationId xmlns:a16="http://schemas.microsoft.com/office/drawing/2014/main" id="{18418F7F-A468-D6C9-2551-45A9F2564211}"/>
-              </a:ext>
-            </a:extLst>
-          </p:cNvPr>
-          <p:cNvPicPr>
-            <a:picLocks noChangeAspect="1" noChangeArrowheads="1"/>
-          </p:cNvPicPr>
-          <p:nvPr/>
-        </p:nvPicPr>
-        <p:blipFill>
-          <a:blip r:embed="rId2">
-            <a:extLst>
-              <a:ext uri="{28A0092B-C50C-407E-A947-70E740481C1C}">
-                <a14:useLocalDpi xmlns:a14="http://schemas.microsoft.com/office/drawing/2010/main" val="0"/>
-              </a:ext>
-            </a:extLst>
-          </a:blip>
-          <a:srcRect/>
-          <a:stretch>
-            <a:fillRect/>
-          </a:stretch>
-        </p:blipFill>
-        <p:spPr bwMode="auto">
-          <a:xfrm>
-            <a:off x="1346765" y="1953160"/>
-            <a:ext cx="4427520" cy="2951680"/>
-          </a:xfrm>
-          <a:prstGeom prst="rect">
-            <a:avLst/>
-          </a:prstGeom>
-          <a:noFill/>
-          <a:extLst>
-            <a:ext uri="{909E8E84-426E-40DD-AFC4-6F175D3DCCD1}">
-              <a14:hiddenFill xmlns:a14="http://schemas.microsoft.com/office/drawing/2010/main">
-                <a:solidFill>
-                  <a:srgbClr val="FFFFFF"/>
-                </a:solidFill>
-              </a14:hiddenFill>
-            </a:ext>
-          </a:extLst>
-        </p:spPr>
-      </p:pic>
-    </p:spTree>
-    <p:extLst>
-      <p:ext uri="{BB962C8B-B14F-4D97-AF65-F5344CB8AC3E}">
-        <p14:creationId xmlns:p14="http://schemas.microsoft.com/office/powerpoint/2010/main" val="624053621"/>
       </p:ext>
     </p:extLst>
   </p:cSld>
@@ -9715,7 +9732,68 @@
       </p:grpSpPr>
       <p:sp>
         <p:nvSpPr>
-          <p:cNvPr id="2" name="날짜 개체 틀 1"/>
+          <p:cNvPr id="7" name="내용 개체 틀 2">
+            <a:extLst>
+              <a:ext uri="{FF2B5EF4-FFF2-40B4-BE49-F238E27FC236}">
+                <a16:creationId xmlns:a16="http://schemas.microsoft.com/office/drawing/2014/main" id="{C4F7519B-60EE-E574-917E-11D77FC5B5DA}"/>
+              </a:ext>
+            </a:extLst>
+          </p:cNvPr>
+          <p:cNvSpPr>
+            <a:spLocks noGrp="1"/>
+          </p:cNvSpPr>
+          <p:nvPr>
+            <p:ph idx="1"/>
+          </p:nvPr>
+        </p:nvSpPr>
+        <p:spPr>
+          <a:xfrm>
+            <a:off x="7643351" y="2934932"/>
+            <a:ext cx="3033252" cy="899653"/>
+          </a:xfrm>
+        </p:spPr>
+        <p:txBody>
+          <a:bodyPr>
+            <a:normAutofit/>
+          </a:bodyPr>
+          <a:lstStyle/>
+          <a:p>
+            <a:pPr marL="0" indent="0">
+              <a:buNone/>
+            </a:pPr>
+            <a:r>
+              <a:rPr lang="ko-KR" altLang="en-US" sz="5000" b="1" dirty="0">
+                <a:solidFill>
+                  <a:srgbClr val="6EC173"/>
+                </a:solidFill>
+              </a:rPr>
+              <a:t>휴식 </a:t>
+            </a:r>
+            <a:r>
+              <a:rPr lang="en-US" altLang="ko-KR" sz="5000" b="1" dirty="0">
+                <a:solidFill>
+                  <a:srgbClr val="6EC173"/>
+                </a:solidFill>
+              </a:rPr>
+              <a:t>Time</a:t>
+            </a:r>
+            <a:endParaRPr lang="ko-KR" altLang="en-US" sz="5000" b="1" dirty="0">
+              <a:solidFill>
+                <a:srgbClr val="6EC173"/>
+              </a:solidFill>
+            </a:endParaRPr>
+          </a:p>
+        </p:txBody>
+      </p:sp>
+      <p:sp>
+        <p:nvSpPr>
+          <p:cNvPr id="4" name="날짜 개체 틀 3">
+            <a:extLst>
+              <a:ext uri="{FF2B5EF4-FFF2-40B4-BE49-F238E27FC236}">
+                <a16:creationId xmlns:a16="http://schemas.microsoft.com/office/drawing/2014/main" id="{1E263DFF-9BB9-D8A0-9B23-08F2727B6719}"/>
+              </a:ext>
+            </a:extLst>
+          </p:cNvPr>
           <p:cNvSpPr>
             <a:spLocks noGrp="1"/>
           </p:cNvSpPr>
@@ -9728,7 +9806,7 @@
           <a:bodyPr/>
           <a:lstStyle/>
           <a:p>
-            <a:fld id="{0E19CB95-6D28-40F1-9DA3-1BAC5D4B5B4F}" type="datetime6">
+            <a:fld id="{1CB3B0AF-12E4-4E46-9E45-3FA033AAD3CB}" type="datetime6">
               <a:rPr lang="ko-KR" altLang="en-US" smtClean="0"/>
               <a:t>2024년 5월</a:t>
             </a:fld>
@@ -9738,7 +9816,13 @@
       </p:sp>
       <p:sp>
         <p:nvSpPr>
-          <p:cNvPr id="3" name="슬라이드 번호 개체 틀 2"/>
+          <p:cNvPr id="5" name="슬라이드 번호 개체 틀 4">
+            <a:extLst>
+              <a:ext uri="{FF2B5EF4-FFF2-40B4-BE49-F238E27FC236}">
+                <a16:creationId xmlns:a16="http://schemas.microsoft.com/office/drawing/2014/main" id="{35DFD145-2786-3632-BC8A-7B6D36588D9A}"/>
+              </a:ext>
+            </a:extLst>
+          </p:cNvPr>
           <p:cNvSpPr>
             <a:spLocks noGrp="1"/>
           </p:cNvSpPr>
@@ -9759,33 +9843,57 @@
           </a:p>
         </p:txBody>
       </p:sp>
-      <p:sp>
-        <p:nvSpPr>
-          <p:cNvPr id="4" name="제목 3"/>
-          <p:cNvSpPr>
-            <a:spLocks noGrp="1"/>
-          </p:cNvSpPr>
-          <p:nvPr>
-            <p:ph type="title"/>
-          </p:nvPr>
-        </p:nvSpPr>
-        <p:spPr/>
-        <p:txBody>
-          <a:bodyPr/>
-          <a:lstStyle/>
-          <a:p>
-            <a:r>
-              <a:rPr lang="en-US" altLang="ko-KR" dirty="0" err="1"/>
-              <a:t>Git</a:t>
-            </a:r>
-            <a:endParaRPr lang="ko-KR" altLang="en-US" dirty="0"/>
-          </a:p>
-        </p:txBody>
-      </p:sp>
+      <p:pic>
+        <p:nvPicPr>
+          <p:cNvPr id="1026" name="Picture 2" descr="휴식하면 생기는 우리 몸의 변화들 &lt; 건강 &lt; 기사본문 - 마음건강 길">
+            <a:extLst>
+              <a:ext uri="{FF2B5EF4-FFF2-40B4-BE49-F238E27FC236}">
+                <a16:creationId xmlns:a16="http://schemas.microsoft.com/office/drawing/2014/main" id="{18418F7F-A468-D6C9-2551-45A9F2564211}"/>
+              </a:ext>
+            </a:extLst>
+          </p:cNvPr>
+          <p:cNvPicPr>
+            <a:picLocks noChangeAspect="1" noChangeArrowheads="1"/>
+          </p:cNvPicPr>
+          <p:nvPr/>
+        </p:nvPicPr>
+        <p:blipFill>
+          <a:blip r:embed="rId2">
+            <a:extLst>
+              <a:ext uri="{28A0092B-C50C-407E-A947-70E740481C1C}">
+                <a14:useLocalDpi xmlns:a14="http://schemas.microsoft.com/office/drawing/2010/main" val="0"/>
+              </a:ext>
+            </a:extLst>
+          </a:blip>
+          <a:srcRect/>
+          <a:stretch>
+            <a:fillRect/>
+          </a:stretch>
+        </p:blipFill>
+        <p:spPr bwMode="auto">
+          <a:xfrm>
+            <a:off x="1346765" y="1953160"/>
+            <a:ext cx="4427520" cy="2951680"/>
+          </a:xfrm>
+          <a:prstGeom prst="rect">
+            <a:avLst/>
+          </a:prstGeom>
+          <a:noFill/>
+          <a:extLst>
+            <a:ext uri="{909E8E84-426E-40DD-AFC4-6F175D3DCCD1}">
+              <a14:hiddenFill xmlns:a14="http://schemas.microsoft.com/office/drawing/2010/main">
+                <a:solidFill>
+                  <a:srgbClr val="FFFFFF"/>
+                </a:solidFill>
+              </a14:hiddenFill>
+            </a:ext>
+          </a:extLst>
+        </p:spPr>
+      </p:pic>
     </p:spTree>
     <p:extLst>
       <p:ext uri="{BB962C8B-B14F-4D97-AF65-F5344CB8AC3E}">
-        <p14:creationId xmlns:p14="http://schemas.microsoft.com/office/powerpoint/2010/main" val="1583756813"/>
+        <p14:creationId xmlns:p14="http://schemas.microsoft.com/office/powerpoint/2010/main" val="624053621"/>
       </p:ext>
     </p:extLst>
   </p:cSld>
@@ -9856,7 +9964,7 @@
               <a:t>: </a:t>
             </a:r>
             <a:r>
-              <a:rPr lang="en-US" altLang="ko-KR" b="1" dirty="0" err="1">
+              <a:rPr lang="en-US" altLang="ko-KR" sz="2400" b="1" dirty="0" err="1">
                 <a:solidFill>
                   <a:srgbClr val="6EC173"/>
                 </a:solidFill>
@@ -9864,7 +9972,7 @@
               <a:t>SeSAC</a:t>
             </a:r>
             <a:r>
-              <a:rPr lang="en-US" altLang="ko-KR" b="1" dirty="0">
+              <a:rPr lang="en-US" altLang="ko-KR" sz="2400" b="1" dirty="0">
                 <a:solidFill>
                   <a:srgbClr val="6EC173"/>
                 </a:solidFill>
@@ -9872,7 +9980,7 @@
               <a:t> </a:t>
             </a:r>
             <a:r>
-              <a:rPr lang="ko-KR" altLang="en-US" b="1" dirty="0">
+              <a:rPr lang="ko-KR" altLang="en-US" sz="2400" b="1" dirty="0">
                 <a:solidFill>
                   <a:srgbClr val="6EC173"/>
                 </a:solidFill>
@@ -9880,7 +9988,7 @@
               <a:t>영등포캠퍼스 </a:t>
             </a:r>
             <a:r>
-              <a:rPr lang="en-US" altLang="ko-KR" b="1" dirty="0">
+              <a:rPr lang="en-US" altLang="ko-KR" sz="2400" b="1" dirty="0">
                 <a:solidFill>
                   <a:srgbClr val="6EC173"/>
                 </a:solidFill>
@@ -9888,12 +9996,12 @@
               <a:t>6</a:t>
             </a:r>
             <a:r>
-              <a:rPr lang="ko-KR" altLang="en-US" b="1" dirty="0">
+              <a:rPr lang="ko-KR" altLang="en-US" sz="2400" b="1" dirty="0">
                 <a:solidFill>
                   <a:srgbClr val="6EC173"/>
                 </a:solidFill>
               </a:rPr>
-              <a:t>기 웹 개발자 부트캠프</a:t>
+              <a:t>기 입문자도 가능한 웹 개발자 부트캠프</a:t>
             </a:r>
             <a:endParaRPr lang="en-US" altLang="ko-KR" b="1" dirty="0">
               <a:solidFill>
@@ -10189,13 +10297,7 @@
       </p:grpSpPr>
       <p:sp>
         <p:nvSpPr>
-          <p:cNvPr id="4" name="날짜 개체 틀 3">
-            <a:extLst>
-              <a:ext uri="{FF2B5EF4-FFF2-40B4-BE49-F238E27FC236}">
-                <a16:creationId xmlns:a16="http://schemas.microsoft.com/office/drawing/2014/main" id="{284930C1-3800-3283-7676-67E65B80E7F7}"/>
-              </a:ext>
-            </a:extLst>
-          </p:cNvPr>
+          <p:cNvPr id="2" name="날짜 개체 틀 1"/>
           <p:cNvSpPr>
             <a:spLocks noGrp="1"/>
           </p:cNvSpPr>
@@ -10208,7 +10310,7 @@
           <a:bodyPr/>
           <a:lstStyle/>
           <a:p>
-            <a:fld id="{BF037577-ED6E-4A9A-BE84-A36FE19DAF55}" type="datetime6">
+            <a:fld id="{0E19CB95-6D28-40F1-9DA3-1BAC5D4B5B4F}" type="datetime6">
               <a:rPr lang="ko-KR" altLang="en-US" smtClean="0"/>
               <a:t>2024년 5월</a:t>
             </a:fld>
@@ -10218,13 +10320,7 @@
       </p:sp>
       <p:sp>
         <p:nvSpPr>
-          <p:cNvPr id="5" name="슬라이드 번호 개체 틀 4">
-            <a:extLst>
-              <a:ext uri="{FF2B5EF4-FFF2-40B4-BE49-F238E27FC236}">
-                <a16:creationId xmlns:a16="http://schemas.microsoft.com/office/drawing/2014/main" id="{03BA4E39-F813-5D2B-7587-E29FCBC8261A}"/>
-              </a:ext>
-            </a:extLst>
-          </p:cNvPr>
+          <p:cNvPr id="3" name="슬라이드 번호 개체 틀 2"/>
           <p:cNvSpPr>
             <a:spLocks noGrp="1"/>
           </p:cNvSpPr>
@@ -10247,13 +10343,7 @@
       </p:sp>
       <p:sp>
         <p:nvSpPr>
-          <p:cNvPr id="2" name="제목 1">
-            <a:extLst>
-              <a:ext uri="{FF2B5EF4-FFF2-40B4-BE49-F238E27FC236}">
-                <a16:creationId xmlns:a16="http://schemas.microsoft.com/office/drawing/2014/main" id="{2734CB21-9153-185C-018C-D40EE0325E61}"/>
-              </a:ext>
-            </a:extLst>
-          </p:cNvPr>
+          <p:cNvPr id="4" name="제목 3"/>
           <p:cNvSpPr>
             <a:spLocks noGrp="1"/>
           </p:cNvSpPr>
@@ -10267,115 +10357,17 @@
           <a:lstStyle/>
           <a:p>
             <a:r>
-              <a:rPr lang="ko-KR" altLang="en-US" dirty="0"/>
-              <a:t>포트폴리오</a:t>
-            </a:r>
-            <a:r>
-              <a:rPr lang="en-US" altLang="ko-KR" dirty="0"/>
-              <a:t>?</a:t>
+              <a:rPr lang="en-US" altLang="ko-KR" dirty="0" err="1"/>
+              <a:t>Git</a:t>
             </a:r>
             <a:endParaRPr lang="ko-KR" altLang="en-US" dirty="0"/>
           </a:p>
         </p:txBody>
       </p:sp>
-      <p:pic>
-        <p:nvPicPr>
-          <p:cNvPr id="2052" name="Picture 4" descr="개발자 이력서 작성하기 (feat. 이력서 공개) | Wonny Log">
-            <a:extLst>
-              <a:ext uri="{FF2B5EF4-FFF2-40B4-BE49-F238E27FC236}">
-                <a16:creationId xmlns:a16="http://schemas.microsoft.com/office/drawing/2014/main" id="{9A1B6276-E204-7797-6B8C-3218CC40F9A6}"/>
-              </a:ext>
-            </a:extLst>
-          </p:cNvPr>
-          <p:cNvPicPr>
-            <a:picLocks noChangeAspect="1" noChangeArrowheads="1"/>
-          </p:cNvPicPr>
-          <p:nvPr/>
-        </p:nvPicPr>
-        <p:blipFill>
-          <a:blip r:embed="rId2">
-            <a:extLst>
-              <a:ext uri="{28A0092B-C50C-407E-A947-70E740481C1C}">
-                <a14:useLocalDpi xmlns:a14="http://schemas.microsoft.com/office/drawing/2010/main" val="0"/>
-              </a:ext>
-            </a:extLst>
-          </a:blip>
-          <a:srcRect/>
-          <a:stretch>
-            <a:fillRect/>
-          </a:stretch>
-        </p:blipFill>
-        <p:spPr bwMode="auto">
-          <a:xfrm>
-            <a:off x="5621595" y="1690688"/>
-            <a:ext cx="5898221" cy="4131827"/>
-          </a:xfrm>
-          <a:prstGeom prst="rect">
-            <a:avLst/>
-          </a:prstGeom>
-          <a:noFill/>
-          <a:extLst>
-            <a:ext uri="{909E8E84-426E-40DD-AFC4-6F175D3DCCD1}">
-              <a14:hiddenFill xmlns:a14="http://schemas.microsoft.com/office/drawing/2010/main">
-                <a:solidFill>
-                  <a:srgbClr val="FFFFFF"/>
-                </a:solidFill>
-              </a14:hiddenFill>
-            </a:ext>
-          </a:extLst>
-        </p:spPr>
-      </p:pic>
-      <p:pic>
-        <p:nvPicPr>
-          <p:cNvPr id="2050" name="Picture 2" descr="나를 구원해줄 그 분은 바로 git. 그리고 github">
-            <a:extLst>
-              <a:ext uri="{FF2B5EF4-FFF2-40B4-BE49-F238E27FC236}">
-                <a16:creationId xmlns:a16="http://schemas.microsoft.com/office/drawing/2014/main" id="{4F196619-D61F-85F9-D9CA-B99257E4E8C2}"/>
-              </a:ext>
-            </a:extLst>
-          </p:cNvPr>
-          <p:cNvPicPr>
-            <a:picLocks noChangeAspect="1" noChangeArrowheads="1"/>
-          </p:cNvPicPr>
-          <p:nvPr/>
-        </p:nvPicPr>
-        <p:blipFill>
-          <a:blip r:embed="rId3">
-            <a:extLst>
-              <a:ext uri="{28A0092B-C50C-407E-A947-70E740481C1C}">
-                <a14:useLocalDpi xmlns:a14="http://schemas.microsoft.com/office/drawing/2010/main" val="0"/>
-              </a:ext>
-            </a:extLst>
-          </a:blip>
-          <a:srcRect/>
-          <a:stretch>
-            <a:fillRect/>
-          </a:stretch>
-        </p:blipFill>
-        <p:spPr bwMode="auto">
-          <a:xfrm>
-            <a:off x="600998" y="1690155"/>
-            <a:ext cx="5257800" cy="1456386"/>
-          </a:xfrm>
-          <a:prstGeom prst="rect">
-            <a:avLst/>
-          </a:prstGeom>
-          <a:noFill/>
-          <a:extLst>
-            <a:ext uri="{909E8E84-426E-40DD-AFC4-6F175D3DCCD1}">
-              <a14:hiddenFill xmlns:a14="http://schemas.microsoft.com/office/drawing/2010/main">
-                <a:solidFill>
-                  <a:srgbClr val="FFFFFF"/>
-                </a:solidFill>
-              </a14:hiddenFill>
-            </a:ext>
-          </a:extLst>
-        </p:spPr>
-      </p:pic>
     </p:spTree>
     <p:extLst>
       <p:ext uri="{BB962C8B-B14F-4D97-AF65-F5344CB8AC3E}">
-        <p14:creationId xmlns:p14="http://schemas.microsoft.com/office/powerpoint/2010/main" val="1969496758"/>
+        <p14:creationId xmlns:p14="http://schemas.microsoft.com/office/powerpoint/2010/main" val="1583756813"/>
       </p:ext>
     </p:extLst>
   </p:cSld>
@@ -10407,7 +10399,7 @@
           <p:cNvPr id="4" name="날짜 개체 틀 3">
             <a:extLst>
               <a:ext uri="{FF2B5EF4-FFF2-40B4-BE49-F238E27FC236}">
-                <a16:creationId xmlns:a16="http://schemas.microsoft.com/office/drawing/2014/main" id="{844D8E3F-3E15-CA55-DE78-C9E8135D7DC5}"/>
+                <a16:creationId xmlns:a16="http://schemas.microsoft.com/office/drawing/2014/main" id="{284930C1-3800-3283-7676-67E65B80E7F7}"/>
               </a:ext>
             </a:extLst>
           </p:cNvPr>
@@ -10423,7 +10415,7 @@
           <a:bodyPr/>
           <a:lstStyle/>
           <a:p>
-            <a:fld id="{282CA0A7-0190-4FAD-B925-425179F7F418}" type="datetime6">
+            <a:fld id="{BF037577-ED6E-4A9A-BE84-A36FE19DAF55}" type="datetime6">
               <a:rPr lang="ko-KR" altLang="en-US" smtClean="0"/>
               <a:t>2024년 5월</a:t>
             </a:fld>
@@ -10436,7 +10428,7 @@
           <p:cNvPr id="5" name="슬라이드 번호 개체 틀 4">
             <a:extLst>
               <a:ext uri="{FF2B5EF4-FFF2-40B4-BE49-F238E27FC236}">
-                <a16:creationId xmlns:a16="http://schemas.microsoft.com/office/drawing/2014/main" id="{5DB29F7D-CB9C-794A-3A35-FAD82167AF9C}"/>
+                <a16:creationId xmlns:a16="http://schemas.microsoft.com/office/drawing/2014/main" id="{03BA4E39-F813-5D2B-7587-E29FCBC8261A}"/>
               </a:ext>
             </a:extLst>
           </p:cNvPr>
@@ -10460,12 +10452,45 @@
           </a:p>
         </p:txBody>
       </p:sp>
+      <p:sp>
+        <p:nvSpPr>
+          <p:cNvPr id="2" name="제목 1">
+            <a:extLst>
+              <a:ext uri="{FF2B5EF4-FFF2-40B4-BE49-F238E27FC236}">
+                <a16:creationId xmlns:a16="http://schemas.microsoft.com/office/drawing/2014/main" id="{2734CB21-9153-185C-018C-D40EE0325E61}"/>
+              </a:ext>
+            </a:extLst>
+          </p:cNvPr>
+          <p:cNvSpPr>
+            <a:spLocks noGrp="1"/>
+          </p:cNvSpPr>
+          <p:nvPr>
+            <p:ph type="title"/>
+          </p:nvPr>
+        </p:nvSpPr>
+        <p:spPr/>
+        <p:txBody>
+          <a:bodyPr/>
+          <a:lstStyle/>
+          <a:p>
+            <a:r>
+              <a:rPr lang="ko-KR" altLang="en-US" dirty="0"/>
+              <a:t>포트폴리오</a:t>
+            </a:r>
+            <a:r>
+              <a:rPr lang="en-US" altLang="ko-KR" dirty="0"/>
+              <a:t>?</a:t>
+            </a:r>
+            <a:endParaRPr lang="ko-KR" altLang="en-US" dirty="0"/>
+          </a:p>
+        </p:txBody>
+      </p:sp>
       <p:pic>
         <p:nvPicPr>
-          <p:cNvPr id="4098" name="Picture 2" descr="시작하기 | Git / GitHub 안내서">
-            <a:extLst>
-              <a:ext uri="{FF2B5EF4-FFF2-40B4-BE49-F238E27FC236}">
-                <a16:creationId xmlns:a16="http://schemas.microsoft.com/office/drawing/2014/main" id="{734FB0B1-DFE8-E05D-B8D6-E471B0B8E8F2}"/>
+          <p:cNvPr id="2052" name="Picture 4" descr="개발자 이력서 작성하기 (feat. 이력서 공개) | Wonny Log">
+            <a:extLst>
+              <a:ext uri="{FF2B5EF4-FFF2-40B4-BE49-F238E27FC236}">
+                <a16:creationId xmlns:a16="http://schemas.microsoft.com/office/drawing/2014/main" id="{9A1B6276-E204-7797-6B8C-3218CC40F9A6}"/>
               </a:ext>
             </a:extLst>
           </p:cNvPr>
@@ -10475,7 +10500,7 @@
           <p:nvPr/>
         </p:nvPicPr>
         <p:blipFill>
-          <a:blip r:embed="rId3">
+          <a:blip r:embed="rId2">
             <a:extLst>
               <a:ext uri="{28A0092B-C50C-407E-A947-70E740481C1C}">
                 <a14:useLocalDpi xmlns:a14="http://schemas.microsoft.com/office/drawing/2010/main" val="0"/>
@@ -10489,8 +10514,8 @@
         </p:blipFill>
         <p:spPr bwMode="auto">
           <a:xfrm>
-            <a:off x="1799777" y="1409915"/>
-            <a:ext cx="3126658" cy="1302774"/>
+            <a:off x="5621595" y="1690688"/>
+            <a:ext cx="5898221" cy="4131827"/>
           </a:xfrm>
           <a:prstGeom prst="rect">
             <a:avLst/>
@@ -10509,10 +10534,10 @@
       </p:pic>
       <p:pic>
         <p:nvPicPr>
-          <p:cNvPr id="4100" name="Picture 4" descr="GitHub README.me에서 소스코드를 링크하는 방법">
-            <a:extLst>
-              <a:ext uri="{FF2B5EF4-FFF2-40B4-BE49-F238E27FC236}">
-                <a16:creationId xmlns:a16="http://schemas.microsoft.com/office/drawing/2014/main" id="{784E6640-6DF9-E5D2-7549-7E3F6443F151}"/>
+          <p:cNvPr id="2050" name="Picture 2" descr="나를 구원해줄 그 분은 바로 git. 그리고 github">
+            <a:extLst>
+              <a:ext uri="{FF2B5EF4-FFF2-40B4-BE49-F238E27FC236}">
+                <a16:creationId xmlns:a16="http://schemas.microsoft.com/office/drawing/2014/main" id="{4F196619-D61F-85F9-D9CA-B99257E4E8C2}"/>
               </a:ext>
             </a:extLst>
           </p:cNvPr>
@@ -10522,7 +10547,7 @@
           <p:nvPr/>
         </p:nvPicPr>
         <p:blipFill>
-          <a:blip r:embed="rId4">
+          <a:blip r:embed="rId3">
             <a:extLst>
               <a:ext uri="{28A0092B-C50C-407E-A947-70E740481C1C}">
                 <a14:useLocalDpi xmlns:a14="http://schemas.microsoft.com/office/drawing/2010/main" val="0"/>
@@ -10536,8 +10561,8 @@
         </p:blipFill>
         <p:spPr bwMode="auto">
           <a:xfrm>
-            <a:off x="1349656" y="3214392"/>
-            <a:ext cx="4343694" cy="2432469"/>
+            <a:off x="600998" y="1690155"/>
+            <a:ext cx="5257800" cy="1456386"/>
           </a:xfrm>
           <a:prstGeom prst="rect">
             <a:avLst/>
@@ -10554,57 +10579,10 @@
           </a:extLst>
         </p:spPr>
       </p:pic>
-      <p:pic>
-        <p:nvPicPr>
-          <p:cNvPr id="4102" name="Picture 6" descr="React, Vue 개발자를 위한 VSCode Extension. VSCode를 사용하는 웹 개발자를 위한 Extension 추천 |  by Bora Lee | Medium | Medium">
-            <a:extLst>
-              <a:ext uri="{FF2B5EF4-FFF2-40B4-BE49-F238E27FC236}">
-                <a16:creationId xmlns:a16="http://schemas.microsoft.com/office/drawing/2014/main" id="{A24E52C0-B965-8877-0D3D-544095483FA7}"/>
-              </a:ext>
-            </a:extLst>
-          </p:cNvPr>
-          <p:cNvPicPr>
-            <a:picLocks noChangeAspect="1" noChangeArrowheads="1"/>
-          </p:cNvPicPr>
-          <p:nvPr/>
-        </p:nvPicPr>
-        <p:blipFill>
-          <a:blip r:embed="rId5">
-            <a:extLst>
-              <a:ext uri="{28A0092B-C50C-407E-A947-70E740481C1C}">
-                <a14:useLocalDpi xmlns:a14="http://schemas.microsoft.com/office/drawing/2010/main" val="0"/>
-              </a:ext>
-            </a:extLst>
-          </a:blip>
-          <a:srcRect/>
-          <a:stretch>
-            <a:fillRect/>
-          </a:stretch>
-        </p:blipFill>
-        <p:spPr bwMode="auto">
-          <a:xfrm>
-            <a:off x="6096000" y="1477872"/>
-            <a:ext cx="5248734" cy="2624367"/>
-          </a:xfrm>
-          <a:prstGeom prst="rect">
-            <a:avLst/>
-          </a:prstGeom>
-          <a:noFill/>
-          <a:extLst>
-            <a:ext uri="{909E8E84-426E-40DD-AFC4-6F175D3DCCD1}">
-              <a14:hiddenFill xmlns:a14="http://schemas.microsoft.com/office/drawing/2010/main">
-                <a:solidFill>
-                  <a:srgbClr val="FFFFFF"/>
-                </a:solidFill>
-              </a14:hiddenFill>
-            </a:ext>
-          </a:extLst>
-        </p:spPr>
-      </p:pic>
     </p:spTree>
     <p:extLst>
       <p:ext uri="{BB962C8B-B14F-4D97-AF65-F5344CB8AC3E}">
-        <p14:creationId xmlns:p14="http://schemas.microsoft.com/office/powerpoint/2010/main" val="2426247804"/>
+        <p14:creationId xmlns:p14="http://schemas.microsoft.com/office/powerpoint/2010/main" val="1969496758"/>
       </p:ext>
     </p:extLst>
   </p:cSld>
@@ -10636,7 +10614,7 @@
           <p:cNvPr id="4" name="날짜 개체 틀 3">
             <a:extLst>
               <a:ext uri="{FF2B5EF4-FFF2-40B4-BE49-F238E27FC236}">
-                <a16:creationId xmlns:a16="http://schemas.microsoft.com/office/drawing/2014/main" id="{FA492C02-0419-7C8D-8F70-9EAD19B9BFC5}"/>
+                <a16:creationId xmlns:a16="http://schemas.microsoft.com/office/drawing/2014/main" id="{844D8E3F-3E15-CA55-DE78-C9E8135D7DC5}"/>
               </a:ext>
             </a:extLst>
           </p:cNvPr>
@@ -10652,7 +10630,7 @@
           <a:bodyPr/>
           <a:lstStyle/>
           <a:p>
-            <a:fld id="{3C9CE3CE-253F-4F9D-BA15-C226C8D8501E}" type="datetime6">
+            <a:fld id="{282CA0A7-0190-4FAD-B925-425179F7F418}" type="datetime6">
               <a:rPr lang="ko-KR" altLang="en-US" smtClean="0"/>
               <a:t>2024년 5월</a:t>
             </a:fld>
@@ -10665,7 +10643,7 @@
           <p:cNvPr id="5" name="슬라이드 번호 개체 틀 4">
             <a:extLst>
               <a:ext uri="{FF2B5EF4-FFF2-40B4-BE49-F238E27FC236}">
-                <a16:creationId xmlns:a16="http://schemas.microsoft.com/office/drawing/2014/main" id="{66486D8F-3DFA-088C-30BB-98572100AF6A}"/>
+                <a16:creationId xmlns:a16="http://schemas.microsoft.com/office/drawing/2014/main" id="{5DB29F7D-CB9C-794A-3A35-FAD82167AF9C}"/>
               </a:ext>
             </a:extLst>
           </p:cNvPr>
@@ -10689,96 +10667,12 @@
           </a:p>
         </p:txBody>
       </p:sp>
-      <p:sp>
-        <p:nvSpPr>
-          <p:cNvPr id="2" name="제목 1">
-            <a:extLst>
-              <a:ext uri="{FF2B5EF4-FFF2-40B4-BE49-F238E27FC236}">
-                <a16:creationId xmlns:a16="http://schemas.microsoft.com/office/drawing/2014/main" id="{7E93C594-AF29-4C79-505A-FD8260282819}"/>
-              </a:ext>
-            </a:extLst>
-          </p:cNvPr>
-          <p:cNvSpPr>
-            <a:spLocks noGrp="1"/>
-          </p:cNvSpPr>
-          <p:nvPr>
-            <p:ph type="title"/>
-          </p:nvPr>
-        </p:nvSpPr>
-        <p:spPr/>
-        <p:txBody>
-          <a:bodyPr/>
-          <a:lstStyle/>
-          <a:p>
-            <a:r>
-              <a:rPr lang="en-US" altLang="ko-KR" dirty="0" err="1"/>
-              <a:t>Github</a:t>
-            </a:r>
-            <a:r>
-              <a:rPr lang="ko-KR" altLang="en-US" dirty="0"/>
-              <a:t> 회원가입</a:t>
-            </a:r>
-            <a:r>
-              <a:rPr lang="en-US" altLang="ko-KR" dirty="0"/>
-              <a:t>/</a:t>
-            </a:r>
-            <a:r>
-              <a:rPr lang="ko-KR" altLang="en-US" dirty="0"/>
-              <a:t>로그인</a:t>
-            </a:r>
-          </a:p>
-        </p:txBody>
-      </p:sp>
-      <p:sp>
-        <p:nvSpPr>
-          <p:cNvPr id="6" name="TextBox 5">
-            <a:extLst>
-              <a:ext uri="{FF2B5EF4-FFF2-40B4-BE49-F238E27FC236}">
-                <a16:creationId xmlns:a16="http://schemas.microsoft.com/office/drawing/2014/main" id="{B0F7D830-B9D4-9D0A-6994-18E2CD9C9915}"/>
-              </a:ext>
-            </a:extLst>
-          </p:cNvPr>
-          <p:cNvSpPr txBox="1"/>
-          <p:nvPr/>
-        </p:nvSpPr>
-        <p:spPr>
-          <a:xfrm>
-            <a:off x="846667" y="1794933"/>
-            <a:ext cx="7744178" cy="830997"/>
-          </a:xfrm>
-          <a:prstGeom prst="rect">
-            <a:avLst/>
-          </a:prstGeom>
-          <a:noFill/>
-        </p:spPr>
-        <p:txBody>
-          <a:bodyPr wrap="square" rtlCol="0">
-            <a:spAutoFit/>
-          </a:bodyPr>
-          <a:lstStyle/>
-          <a:p>
-            <a:r>
-              <a:rPr lang="en-US" altLang="ko-KR" sz="2400" dirty="0">
-                <a:hlinkClick r:id="rId3"/>
-              </a:rPr>
-              <a:t>https://github.com/</a:t>
-            </a:r>
-            <a:r>
-              <a:rPr lang="en-US" altLang="ko-KR" sz="2400" dirty="0"/>
-              <a:t> </a:t>
-            </a:r>
-          </a:p>
-          <a:p>
-            <a:endParaRPr lang="ko-KR" altLang="en-US" sz="2400" dirty="0"/>
-          </a:p>
-        </p:txBody>
-      </p:sp>
       <p:pic>
         <p:nvPicPr>
-          <p:cNvPr id="3" name="Picture 4" descr="GitHub README.me에서 소스코드를 링크하는 방법">
-            <a:extLst>
-              <a:ext uri="{FF2B5EF4-FFF2-40B4-BE49-F238E27FC236}">
-                <a16:creationId xmlns:a16="http://schemas.microsoft.com/office/drawing/2014/main" id="{92CC8123-1C3E-FCDA-140B-837F8597911D}"/>
+          <p:cNvPr id="4098" name="Picture 2" descr="시작하기 | Git / GitHub 안내서">
+            <a:extLst>
+              <a:ext uri="{FF2B5EF4-FFF2-40B4-BE49-F238E27FC236}">
+                <a16:creationId xmlns:a16="http://schemas.microsoft.com/office/drawing/2014/main" id="{734FB0B1-DFE8-E05D-B8D6-E471B0B8E8F2}"/>
               </a:ext>
             </a:extLst>
           </p:cNvPr>
@@ -10788,7 +10682,7 @@
           <p:nvPr/>
         </p:nvPicPr>
         <p:blipFill>
-          <a:blip r:embed="rId4">
+          <a:blip r:embed="rId3">
             <a:extLst>
               <a:ext uri="{28A0092B-C50C-407E-A947-70E740481C1C}">
                 <a14:useLocalDpi xmlns:a14="http://schemas.microsoft.com/office/drawing/2010/main" val="0"/>
@@ -10802,8 +10696,8 @@
         </p:blipFill>
         <p:spPr bwMode="auto">
           <a:xfrm>
-            <a:off x="3943355" y="2038926"/>
-            <a:ext cx="7308120" cy="4092548"/>
+            <a:off x="1799777" y="1409915"/>
+            <a:ext cx="3126658" cy="1302774"/>
           </a:xfrm>
           <a:prstGeom prst="rect">
             <a:avLst/>
@@ -10820,10 +10714,104 @@
           </a:extLst>
         </p:spPr>
       </p:pic>
+      <p:pic>
+        <p:nvPicPr>
+          <p:cNvPr id="4100" name="Picture 4" descr="GitHub README.me에서 소스코드를 링크하는 방법">
+            <a:extLst>
+              <a:ext uri="{FF2B5EF4-FFF2-40B4-BE49-F238E27FC236}">
+                <a16:creationId xmlns:a16="http://schemas.microsoft.com/office/drawing/2014/main" id="{784E6640-6DF9-E5D2-7549-7E3F6443F151}"/>
+              </a:ext>
+            </a:extLst>
+          </p:cNvPr>
+          <p:cNvPicPr>
+            <a:picLocks noChangeAspect="1" noChangeArrowheads="1"/>
+          </p:cNvPicPr>
+          <p:nvPr/>
+        </p:nvPicPr>
+        <p:blipFill>
+          <a:blip r:embed="rId4">
+            <a:extLst>
+              <a:ext uri="{28A0092B-C50C-407E-A947-70E740481C1C}">
+                <a14:useLocalDpi xmlns:a14="http://schemas.microsoft.com/office/drawing/2010/main" val="0"/>
+              </a:ext>
+            </a:extLst>
+          </a:blip>
+          <a:srcRect/>
+          <a:stretch>
+            <a:fillRect/>
+          </a:stretch>
+        </p:blipFill>
+        <p:spPr bwMode="auto">
+          <a:xfrm>
+            <a:off x="1349656" y="3214392"/>
+            <a:ext cx="4343694" cy="2432469"/>
+          </a:xfrm>
+          <a:prstGeom prst="rect">
+            <a:avLst/>
+          </a:prstGeom>
+          <a:noFill/>
+          <a:extLst>
+            <a:ext uri="{909E8E84-426E-40DD-AFC4-6F175D3DCCD1}">
+              <a14:hiddenFill xmlns:a14="http://schemas.microsoft.com/office/drawing/2010/main">
+                <a:solidFill>
+                  <a:srgbClr val="FFFFFF"/>
+                </a:solidFill>
+              </a14:hiddenFill>
+            </a:ext>
+          </a:extLst>
+        </p:spPr>
+      </p:pic>
+      <p:pic>
+        <p:nvPicPr>
+          <p:cNvPr id="4102" name="Picture 6" descr="React, Vue 개발자를 위한 VSCode Extension. VSCode를 사용하는 웹 개발자를 위한 Extension 추천 |  by Bora Lee | Medium | Medium">
+            <a:extLst>
+              <a:ext uri="{FF2B5EF4-FFF2-40B4-BE49-F238E27FC236}">
+                <a16:creationId xmlns:a16="http://schemas.microsoft.com/office/drawing/2014/main" id="{A24E52C0-B965-8877-0D3D-544095483FA7}"/>
+              </a:ext>
+            </a:extLst>
+          </p:cNvPr>
+          <p:cNvPicPr>
+            <a:picLocks noChangeAspect="1" noChangeArrowheads="1"/>
+          </p:cNvPicPr>
+          <p:nvPr/>
+        </p:nvPicPr>
+        <p:blipFill>
+          <a:blip r:embed="rId5">
+            <a:extLst>
+              <a:ext uri="{28A0092B-C50C-407E-A947-70E740481C1C}">
+                <a14:useLocalDpi xmlns:a14="http://schemas.microsoft.com/office/drawing/2010/main" val="0"/>
+              </a:ext>
+            </a:extLst>
+          </a:blip>
+          <a:srcRect/>
+          <a:stretch>
+            <a:fillRect/>
+          </a:stretch>
+        </p:blipFill>
+        <p:spPr bwMode="auto">
+          <a:xfrm>
+            <a:off x="6096000" y="1477872"/>
+            <a:ext cx="5248734" cy="2624367"/>
+          </a:xfrm>
+          <a:prstGeom prst="rect">
+            <a:avLst/>
+          </a:prstGeom>
+          <a:noFill/>
+          <a:extLst>
+            <a:ext uri="{909E8E84-426E-40DD-AFC4-6F175D3DCCD1}">
+              <a14:hiddenFill xmlns:a14="http://schemas.microsoft.com/office/drawing/2010/main">
+                <a:solidFill>
+                  <a:srgbClr val="FFFFFF"/>
+                </a:solidFill>
+              </a14:hiddenFill>
+            </a:ext>
+          </a:extLst>
+        </p:spPr>
+      </p:pic>
     </p:spTree>
     <p:extLst>
       <p:ext uri="{BB962C8B-B14F-4D97-AF65-F5344CB8AC3E}">
-        <p14:creationId xmlns:p14="http://schemas.microsoft.com/office/powerpoint/2010/main" val="1658716870"/>
+        <p14:creationId xmlns:p14="http://schemas.microsoft.com/office/powerpoint/2010/main" val="2426247804"/>
       </p:ext>
     </p:extLst>
   </p:cSld>
@@ -10930,12 +10918,20 @@
           <a:lstStyle/>
           <a:p>
             <a:r>
+              <a:rPr lang="en-US" altLang="ko-KR" dirty="0" err="1"/>
+              <a:t>Github</a:t>
+            </a:r>
+            <a:r>
+              <a:rPr lang="ko-KR" altLang="en-US" dirty="0"/>
+              <a:t> 회원가입</a:t>
+            </a:r>
+            <a:r>
               <a:rPr lang="en-US" altLang="ko-KR" dirty="0"/>
-              <a:t>VS Code </a:t>
+              <a:t>/</a:t>
             </a:r>
             <a:r>
               <a:rPr lang="ko-KR" altLang="en-US" dirty="0"/>
-              <a:t>설치 </a:t>
+              <a:t>로그인</a:t>
             </a:r>
           </a:p>
         </p:txBody>
@@ -10972,9 +10968,12 @@
               <a:rPr lang="en-US" altLang="ko-KR" sz="2400" dirty="0">
                 <a:hlinkClick r:id="rId3"/>
               </a:rPr>
-              <a:t>https://code.visualstudio.com/download</a:t>
-            </a:r>
-            <a:endParaRPr lang="en-US" altLang="ko-KR" sz="2400" dirty="0"/>
+              <a:t>https://github.com/</a:t>
+            </a:r>
+            <a:r>
+              <a:rPr lang="en-US" altLang="ko-KR" sz="2400" dirty="0"/>
+              <a:t> </a:t>
+            </a:r>
           </a:p>
           <a:p>
             <a:endParaRPr lang="ko-KR" altLang="en-US" sz="2400" dirty="0"/>
@@ -10983,10 +10982,10 @@
       </p:sp>
       <p:pic>
         <p:nvPicPr>
-          <p:cNvPr id="7" name="Picture 2" descr="Visual Studio Code 설치하기">
-            <a:extLst>
-              <a:ext uri="{FF2B5EF4-FFF2-40B4-BE49-F238E27FC236}">
-                <a16:creationId xmlns:a16="http://schemas.microsoft.com/office/drawing/2014/main" id="{B586C346-761E-B570-4747-559D7D55EAE9}"/>
+          <p:cNvPr id="3" name="Picture 4" descr="GitHub README.me에서 소스코드를 링크하는 방법">
+            <a:extLst>
+              <a:ext uri="{FF2B5EF4-FFF2-40B4-BE49-F238E27FC236}">
+                <a16:creationId xmlns:a16="http://schemas.microsoft.com/office/drawing/2014/main" id="{92CC8123-1C3E-FCDA-140B-837F8597911D}"/>
               </a:ext>
             </a:extLst>
           </p:cNvPr>
@@ -11010,8 +11009,8 @@
         </p:blipFill>
         <p:spPr bwMode="auto">
           <a:xfrm>
-            <a:off x="3680177" y="2683429"/>
-            <a:ext cx="7374486" cy="3097284"/>
+            <a:off x="3943355" y="2038926"/>
+            <a:ext cx="7308120" cy="4092548"/>
           </a:xfrm>
           <a:prstGeom prst="rect">
             <a:avLst/>
@@ -11031,7 +11030,7 @@
     </p:spTree>
     <p:extLst>
       <p:ext uri="{BB962C8B-B14F-4D97-AF65-F5344CB8AC3E}">
-        <p14:creationId xmlns:p14="http://schemas.microsoft.com/office/powerpoint/2010/main" val="3610078581"/>
+        <p14:creationId xmlns:p14="http://schemas.microsoft.com/office/powerpoint/2010/main" val="1658716870"/>
       </p:ext>
     </p:extLst>
   </p:cSld>
@@ -11063,6 +11062,214 @@
           <p:cNvPr id="4" name="날짜 개체 틀 3">
             <a:extLst>
               <a:ext uri="{FF2B5EF4-FFF2-40B4-BE49-F238E27FC236}">
+                <a16:creationId xmlns:a16="http://schemas.microsoft.com/office/drawing/2014/main" id="{FA492C02-0419-7C8D-8F70-9EAD19B9BFC5}"/>
+              </a:ext>
+            </a:extLst>
+          </p:cNvPr>
+          <p:cNvSpPr>
+            <a:spLocks noGrp="1"/>
+          </p:cNvSpPr>
+          <p:nvPr>
+            <p:ph type="dt" sz="half" idx="10"/>
+          </p:nvPr>
+        </p:nvSpPr>
+        <p:spPr/>
+        <p:txBody>
+          <a:bodyPr/>
+          <a:lstStyle/>
+          <a:p>
+            <a:fld id="{3C9CE3CE-253F-4F9D-BA15-C226C8D8501E}" type="datetime6">
+              <a:rPr lang="ko-KR" altLang="en-US" smtClean="0"/>
+              <a:t>2024년 5월</a:t>
+            </a:fld>
+            <a:endParaRPr lang="ko-KR" altLang="en-US"/>
+          </a:p>
+        </p:txBody>
+      </p:sp>
+      <p:sp>
+        <p:nvSpPr>
+          <p:cNvPr id="5" name="슬라이드 번호 개체 틀 4">
+            <a:extLst>
+              <a:ext uri="{FF2B5EF4-FFF2-40B4-BE49-F238E27FC236}">
+                <a16:creationId xmlns:a16="http://schemas.microsoft.com/office/drawing/2014/main" id="{66486D8F-3DFA-088C-30BB-98572100AF6A}"/>
+              </a:ext>
+            </a:extLst>
+          </p:cNvPr>
+          <p:cNvSpPr>
+            <a:spLocks noGrp="1"/>
+          </p:cNvSpPr>
+          <p:nvPr>
+            <p:ph type="sldNum" sz="quarter" idx="12"/>
+          </p:nvPr>
+        </p:nvSpPr>
+        <p:spPr/>
+        <p:txBody>
+          <a:bodyPr/>
+          <a:lstStyle/>
+          <a:p>
+            <a:fld id="{083A2CE0-18CD-4102-B738-4ACFF9E68BA4}" type="slidenum">
+              <a:rPr lang="ko-KR" altLang="en-US" smtClean="0"/>
+              <a:t>24</a:t>
+            </a:fld>
+            <a:endParaRPr lang="ko-KR" altLang="en-US"/>
+          </a:p>
+        </p:txBody>
+      </p:sp>
+      <p:sp>
+        <p:nvSpPr>
+          <p:cNvPr id="2" name="제목 1">
+            <a:extLst>
+              <a:ext uri="{FF2B5EF4-FFF2-40B4-BE49-F238E27FC236}">
+                <a16:creationId xmlns:a16="http://schemas.microsoft.com/office/drawing/2014/main" id="{7E93C594-AF29-4C79-505A-FD8260282819}"/>
+              </a:ext>
+            </a:extLst>
+          </p:cNvPr>
+          <p:cNvSpPr>
+            <a:spLocks noGrp="1"/>
+          </p:cNvSpPr>
+          <p:nvPr>
+            <p:ph type="title"/>
+          </p:nvPr>
+        </p:nvSpPr>
+        <p:spPr/>
+        <p:txBody>
+          <a:bodyPr/>
+          <a:lstStyle/>
+          <a:p>
+            <a:r>
+              <a:rPr lang="en-US" altLang="ko-KR" dirty="0"/>
+              <a:t>VS Code </a:t>
+            </a:r>
+            <a:r>
+              <a:rPr lang="ko-KR" altLang="en-US" dirty="0"/>
+              <a:t>설치 </a:t>
+            </a:r>
+          </a:p>
+        </p:txBody>
+      </p:sp>
+      <p:sp>
+        <p:nvSpPr>
+          <p:cNvPr id="6" name="TextBox 5">
+            <a:extLst>
+              <a:ext uri="{FF2B5EF4-FFF2-40B4-BE49-F238E27FC236}">
+                <a16:creationId xmlns:a16="http://schemas.microsoft.com/office/drawing/2014/main" id="{B0F7D830-B9D4-9D0A-6994-18E2CD9C9915}"/>
+              </a:ext>
+            </a:extLst>
+          </p:cNvPr>
+          <p:cNvSpPr txBox="1"/>
+          <p:nvPr/>
+        </p:nvSpPr>
+        <p:spPr>
+          <a:xfrm>
+            <a:off x="846667" y="1794933"/>
+            <a:ext cx="7744178" cy="830997"/>
+          </a:xfrm>
+          <a:prstGeom prst="rect">
+            <a:avLst/>
+          </a:prstGeom>
+          <a:noFill/>
+        </p:spPr>
+        <p:txBody>
+          <a:bodyPr wrap="square" rtlCol="0">
+            <a:spAutoFit/>
+          </a:bodyPr>
+          <a:lstStyle/>
+          <a:p>
+            <a:r>
+              <a:rPr lang="en-US" altLang="ko-KR" sz="2400" dirty="0">
+                <a:hlinkClick r:id="rId3"/>
+              </a:rPr>
+              <a:t>https://code.visualstudio.com/download</a:t>
+            </a:r>
+            <a:endParaRPr lang="en-US" altLang="ko-KR" sz="2400" dirty="0"/>
+          </a:p>
+          <a:p>
+            <a:endParaRPr lang="ko-KR" altLang="en-US" sz="2400" dirty="0"/>
+          </a:p>
+        </p:txBody>
+      </p:sp>
+      <p:pic>
+        <p:nvPicPr>
+          <p:cNvPr id="7" name="Picture 2" descr="Visual Studio Code 설치하기">
+            <a:extLst>
+              <a:ext uri="{FF2B5EF4-FFF2-40B4-BE49-F238E27FC236}">
+                <a16:creationId xmlns:a16="http://schemas.microsoft.com/office/drawing/2014/main" id="{B586C346-761E-B570-4747-559D7D55EAE9}"/>
+              </a:ext>
+            </a:extLst>
+          </p:cNvPr>
+          <p:cNvPicPr>
+            <a:picLocks noChangeAspect="1" noChangeArrowheads="1"/>
+          </p:cNvPicPr>
+          <p:nvPr/>
+        </p:nvPicPr>
+        <p:blipFill>
+          <a:blip r:embed="rId4">
+            <a:extLst>
+              <a:ext uri="{28A0092B-C50C-407E-A947-70E740481C1C}">
+                <a14:useLocalDpi xmlns:a14="http://schemas.microsoft.com/office/drawing/2010/main" val="0"/>
+              </a:ext>
+            </a:extLst>
+          </a:blip>
+          <a:srcRect/>
+          <a:stretch>
+            <a:fillRect/>
+          </a:stretch>
+        </p:blipFill>
+        <p:spPr bwMode="auto">
+          <a:xfrm>
+            <a:off x="3680177" y="2683429"/>
+            <a:ext cx="7374486" cy="3097284"/>
+          </a:xfrm>
+          <a:prstGeom prst="rect">
+            <a:avLst/>
+          </a:prstGeom>
+          <a:noFill/>
+          <a:extLst>
+            <a:ext uri="{909E8E84-426E-40DD-AFC4-6F175D3DCCD1}">
+              <a14:hiddenFill xmlns:a14="http://schemas.microsoft.com/office/drawing/2010/main">
+                <a:solidFill>
+                  <a:srgbClr val="FFFFFF"/>
+                </a:solidFill>
+              </a14:hiddenFill>
+            </a:ext>
+          </a:extLst>
+        </p:spPr>
+      </p:pic>
+    </p:spTree>
+    <p:extLst>
+      <p:ext uri="{BB962C8B-B14F-4D97-AF65-F5344CB8AC3E}">
+        <p14:creationId xmlns:p14="http://schemas.microsoft.com/office/powerpoint/2010/main" val="3610078581"/>
+      </p:ext>
+    </p:extLst>
+  </p:cSld>
+  <p:clrMapOvr>
+    <a:masterClrMapping/>
+  </p:clrMapOvr>
+</p:sld>
+</file>
+
+<file path=ppt/slides/slide25.xml><?xml version="1.0" encoding="utf-8"?>
+<p:sld xmlns:a="http://schemas.openxmlformats.org/drawingml/2006/main" xmlns:r="http://schemas.openxmlformats.org/officeDocument/2006/relationships" xmlns:p="http://schemas.openxmlformats.org/presentationml/2006/main">
+  <p:cSld>
+    <p:spTree>
+      <p:nvGrpSpPr>
+        <p:cNvPr id="1" name=""/>
+        <p:cNvGrpSpPr/>
+        <p:nvPr/>
+      </p:nvGrpSpPr>
+      <p:grpSpPr>
+        <a:xfrm>
+          <a:off x="0" y="0"/>
+          <a:ext cx="0" cy="0"/>
+          <a:chOff x="0" y="0"/>
+          <a:chExt cx="0" cy="0"/>
+        </a:xfrm>
+      </p:grpSpPr>
+      <p:sp>
+        <p:nvSpPr>
+          <p:cNvPr id="4" name="날짜 개체 틀 3">
+            <a:extLst>
+              <a:ext uri="{FF2B5EF4-FFF2-40B4-BE49-F238E27FC236}">
                 <a16:creationId xmlns:a16="http://schemas.microsoft.com/office/drawing/2014/main" id="{2989FCA7-10AB-8AF6-D2BD-97B935935DA7}"/>
               </a:ext>
             </a:extLst>
@@ -11110,7 +11317,7 @@
           <a:p>
             <a:fld id="{083A2CE0-18CD-4102-B738-4ACFF9E68BA4}" type="slidenum">
               <a:rPr lang="ko-KR" altLang="en-US" smtClean="0"/>
-              <a:t>24</a:t>
+              <a:t>25</a:t>
             </a:fld>
             <a:endParaRPr lang="ko-KR" altLang="en-US"/>
           </a:p>
@@ -11236,7 +11443,7 @@
 </p:sld>
 </file>
 
-<file path=ppt/slides/slide25.xml><?xml version="1.0" encoding="utf-8"?>
+<file path=ppt/slides/slide26.xml><?xml version="1.0" encoding="utf-8"?>
 <p:sld xmlns:a="http://schemas.openxmlformats.org/drawingml/2006/main" xmlns:r="http://schemas.openxmlformats.org/officeDocument/2006/relationships" xmlns:p="http://schemas.openxmlformats.org/presentationml/2006/main">
   <p:cSld>
     <p:spTree>
@@ -11347,7 +11554,7 @@
           <a:p>
             <a:fld id="{083A2CE0-18CD-4102-B738-4ACFF9E68BA4}" type="slidenum">
               <a:rPr lang="ko-KR" altLang="en-US" smtClean="0"/>
-              <a:t>25</a:t>
+              <a:t>26</a:t>
             </a:fld>
             <a:endParaRPr lang="ko-KR" altLang="en-US"/>
           </a:p>
@@ -11433,7 +11640,7 @@
 </p:sld>
 </file>
 
-<file path=ppt/slides/slide26.xml><?xml version="1.0" encoding="utf-8"?>
+<file path=ppt/slides/slide27.xml><?xml version="1.0" encoding="utf-8"?>
 <p:sld xmlns:a="http://schemas.openxmlformats.org/drawingml/2006/main" xmlns:r="http://schemas.openxmlformats.org/officeDocument/2006/relationships" xmlns:p="http://schemas.openxmlformats.org/presentationml/2006/main">
   <p:cSld>
     <p:spTree>
@@ -11757,7 +11964,7 @@
           <a:p>
             <a:fld id="{083A2CE0-18CD-4102-B738-4ACFF9E68BA4}" type="slidenum">
               <a:rPr lang="ko-KR" altLang="en-US" smtClean="0"/>
-              <a:t>26</a:t>
+              <a:t>27</a:t>
             </a:fld>
             <a:endParaRPr lang="ko-KR" altLang="en-US"/>
           </a:p>
@@ -11846,7 +12053,7 @@
 </p:sld>
 </file>
 
-<file path=ppt/slides/slide27.xml><?xml version="1.0" encoding="utf-8"?>
+<file path=ppt/slides/slide28.xml><?xml version="1.0" encoding="utf-8"?>
 <p:sld xmlns:a="http://schemas.openxmlformats.org/drawingml/2006/main" xmlns:r="http://schemas.openxmlformats.org/officeDocument/2006/relationships" xmlns:p="http://schemas.openxmlformats.org/presentationml/2006/main">
   <p:cSld>
     <p:spTree>
@@ -11962,7 +12169,7 @@
           <a:p>
             <a:fld id="{083A2CE0-18CD-4102-B738-4ACFF9E68BA4}" type="slidenum">
               <a:rPr lang="ko-KR" altLang="en-US" smtClean="0"/>
-              <a:t>27</a:t>
+              <a:t>28</a:t>
             </a:fld>
             <a:endParaRPr lang="ko-KR" altLang="en-US"/>
           </a:p>
@@ -12051,7 +12258,7 @@
 </p:sld>
 </file>
 
-<file path=ppt/slides/slide28.xml><?xml version="1.0" encoding="utf-8"?>
+<file path=ppt/slides/slide29.xml><?xml version="1.0" encoding="utf-8"?>
 <p:sld xmlns:a="http://schemas.openxmlformats.org/drawingml/2006/main" xmlns:r="http://schemas.openxmlformats.org/officeDocument/2006/relationships" xmlns:p="http://schemas.openxmlformats.org/presentationml/2006/main">
   <p:cSld>
     <p:spTree>
@@ -12120,7 +12327,7 @@
           <a:p>
             <a:fld id="{083A2CE0-18CD-4102-B738-4ACFF9E68BA4}" type="slidenum">
               <a:rPr lang="ko-KR" altLang="en-US" smtClean="0"/>
-              <a:t>28</a:t>
+              <a:t>29</a:t>
             </a:fld>
             <a:endParaRPr lang="ko-KR" altLang="en-US"/>
           </a:p>
@@ -12222,130 +12429,6 @@
     <p:extLst>
       <p:ext uri="{BB962C8B-B14F-4D97-AF65-F5344CB8AC3E}">
         <p14:creationId xmlns:p14="http://schemas.microsoft.com/office/powerpoint/2010/main" val="4165562748"/>
-      </p:ext>
-    </p:extLst>
-  </p:cSld>
-  <p:clrMapOvr>
-    <a:masterClrMapping/>
-  </p:clrMapOvr>
-</p:sld>
-</file>
-
-<file path=ppt/slides/slide29.xml><?xml version="1.0" encoding="utf-8"?>
-<p:sld xmlns:a="http://schemas.openxmlformats.org/drawingml/2006/main" xmlns:r="http://schemas.openxmlformats.org/officeDocument/2006/relationships" xmlns:p="http://schemas.openxmlformats.org/presentationml/2006/main">
-  <p:cSld>
-    <p:spTree>
-      <p:nvGrpSpPr>
-        <p:cNvPr id="1" name=""/>
-        <p:cNvGrpSpPr/>
-        <p:nvPr/>
-      </p:nvGrpSpPr>
-      <p:grpSpPr>
-        <a:xfrm>
-          <a:off x="0" y="0"/>
-          <a:ext cx="0" cy="0"/>
-          <a:chOff x="0" y="0"/>
-          <a:chExt cx="0" cy="0"/>
-        </a:xfrm>
-      </p:grpSpPr>
-      <p:sp>
-        <p:nvSpPr>
-          <p:cNvPr id="4" name="날짜 개체 틀 3">
-            <a:extLst>
-              <a:ext uri="{FF2B5EF4-FFF2-40B4-BE49-F238E27FC236}">
-                <a16:creationId xmlns:a16="http://schemas.microsoft.com/office/drawing/2014/main" id="{61EDE14B-F590-5390-4ED0-85934CA6481D}"/>
-              </a:ext>
-            </a:extLst>
-          </p:cNvPr>
-          <p:cNvSpPr>
-            <a:spLocks noGrp="1"/>
-          </p:cNvSpPr>
-          <p:nvPr>
-            <p:ph type="dt" sz="half" idx="10"/>
-          </p:nvPr>
-        </p:nvSpPr>
-        <p:spPr/>
-        <p:txBody>
-          <a:bodyPr/>
-          <a:lstStyle/>
-          <a:p>
-            <a:fld id="{126F6B89-4082-49DC-A306-910E461DCB41}" type="datetime6">
-              <a:rPr lang="ko-KR" altLang="en-US" smtClean="0"/>
-              <a:t>2024년 5월</a:t>
-            </a:fld>
-            <a:endParaRPr lang="ko-KR" altLang="en-US"/>
-          </a:p>
-        </p:txBody>
-      </p:sp>
-      <p:sp>
-        <p:nvSpPr>
-          <p:cNvPr id="5" name="슬라이드 번호 개체 틀 4">
-            <a:extLst>
-              <a:ext uri="{FF2B5EF4-FFF2-40B4-BE49-F238E27FC236}">
-                <a16:creationId xmlns:a16="http://schemas.microsoft.com/office/drawing/2014/main" id="{E4661428-D3BF-F776-8121-361B8C4DBA66}"/>
-              </a:ext>
-            </a:extLst>
-          </p:cNvPr>
-          <p:cNvSpPr>
-            <a:spLocks noGrp="1"/>
-          </p:cNvSpPr>
-          <p:nvPr>
-            <p:ph type="sldNum" sz="quarter" idx="12"/>
-          </p:nvPr>
-        </p:nvSpPr>
-        <p:spPr/>
-        <p:txBody>
-          <a:bodyPr/>
-          <a:lstStyle/>
-          <a:p>
-            <a:fld id="{083A2CE0-18CD-4102-B738-4ACFF9E68BA4}" type="slidenum">
-              <a:rPr lang="ko-KR" altLang="en-US" smtClean="0"/>
-              <a:t>29</a:t>
-            </a:fld>
-            <a:endParaRPr lang="ko-KR" altLang="en-US"/>
-          </a:p>
-        </p:txBody>
-      </p:sp>
-      <p:pic>
-        <p:nvPicPr>
-          <p:cNvPr id="8" name="그림 7" descr="텍스트, 표지판이(가) 표시된 사진&#10;&#10;자동 생성된 설명">
-            <a:extLst>
-              <a:ext uri="{FF2B5EF4-FFF2-40B4-BE49-F238E27FC236}">
-                <a16:creationId xmlns:a16="http://schemas.microsoft.com/office/drawing/2014/main" id="{81459821-95CF-3555-EA73-B302A2E8328F}"/>
-              </a:ext>
-            </a:extLst>
-          </p:cNvPr>
-          <p:cNvPicPr>
-            <a:picLocks noChangeAspect="1"/>
-          </p:cNvPicPr>
-          <p:nvPr/>
-        </p:nvPicPr>
-        <p:blipFill>
-          <a:blip r:embed="rId3">
-            <a:extLst>
-              <a:ext uri="{28A0092B-C50C-407E-A947-70E740481C1C}">
-                <a14:useLocalDpi xmlns:a14="http://schemas.microsoft.com/office/drawing/2010/main" val="0"/>
-              </a:ext>
-            </a:extLst>
-          </a:blip>
-          <a:stretch>
-            <a:fillRect/>
-          </a:stretch>
-        </p:blipFill>
-        <p:spPr>
-          <a:xfrm>
-            <a:off x="1234018" y="1374470"/>
-            <a:ext cx="9723963" cy="4109060"/>
-          </a:xfrm>
-          <a:prstGeom prst="rect">
-            <a:avLst/>
-          </a:prstGeom>
-        </p:spPr>
-      </p:pic>
-    </p:spTree>
-    <p:extLst>
-      <p:ext uri="{BB962C8B-B14F-4D97-AF65-F5344CB8AC3E}">
-        <p14:creationId xmlns:p14="http://schemas.microsoft.com/office/powerpoint/2010/main" val="3610709924"/>
       </p:ext>
     </p:extLst>
   </p:cSld>
@@ -12715,322 +12798,10 @@
       </p:grpSpPr>
       <p:sp>
         <p:nvSpPr>
-          <p:cNvPr id="2" name="내용 개체 틀 1">
-            <a:extLst>
-              <a:ext uri="{FF2B5EF4-FFF2-40B4-BE49-F238E27FC236}">
-                <a16:creationId xmlns:a16="http://schemas.microsoft.com/office/drawing/2014/main" id="{1C847C42-5B19-643E-6060-D9D2F849F11D}"/>
-              </a:ext>
-            </a:extLst>
-          </p:cNvPr>
-          <p:cNvSpPr>
-            <a:spLocks noGrp="1"/>
-          </p:cNvSpPr>
-          <p:nvPr>
-            <p:ph idx="1"/>
-          </p:nvPr>
-        </p:nvSpPr>
-        <p:spPr/>
-        <p:txBody>
-          <a:bodyPr>
-            <a:normAutofit/>
-          </a:bodyPr>
-          <a:lstStyle/>
-          <a:p>
-            <a:pPr>
-              <a:lnSpc>
-                <a:spcPct val="100000"/>
-              </a:lnSpc>
-            </a:pPr>
-            <a:r>
-              <a:rPr lang="en-US" altLang="ko-KR" sz="2400" dirty="0">
-                <a:solidFill>
-                  <a:srgbClr val="0070C0"/>
-                </a:solidFill>
-                <a:ea typeface="강한공군체 Medium" panose="020B0600000101010101" pitchFamily="34" charset="-127"/>
-              </a:rPr>
-              <a:t>git status</a:t>
-            </a:r>
-            <a:r>
-              <a:rPr lang="en-US" altLang="ko-KR" sz="2400" dirty="0">
-                <a:ea typeface="강한공군체 Medium" panose="020B0600000101010101" pitchFamily="34" charset="-127"/>
-              </a:rPr>
-              <a:t> : </a:t>
-            </a:r>
-            <a:r>
-              <a:rPr lang="ko-KR" altLang="en-US" sz="2400" dirty="0">
-                <a:ea typeface="강한공군체 Medium" panose="020B0600000101010101" pitchFamily="34" charset="-127"/>
-              </a:rPr>
-              <a:t>현재 디렉토리 상태 보기</a:t>
-            </a:r>
-            <a:endParaRPr lang="en-US" altLang="ko-KR" sz="2400" dirty="0">
-              <a:ea typeface="강한공군체 Medium" panose="020B0600000101010101" pitchFamily="34" charset="-127"/>
-            </a:endParaRPr>
-          </a:p>
-          <a:p>
-            <a:pPr>
-              <a:lnSpc>
-                <a:spcPct val="100000"/>
-              </a:lnSpc>
-            </a:pPr>
-            <a:r>
-              <a:rPr lang="en-US" altLang="ko-KR" sz="2400" dirty="0">
-                <a:solidFill>
-                  <a:srgbClr val="0070C0"/>
-                </a:solidFill>
-                <a:ea typeface="강한공군체 Medium" panose="020B0600000101010101" pitchFamily="34" charset="-127"/>
-              </a:rPr>
-              <a:t>git add</a:t>
-            </a:r>
-            <a:r>
-              <a:rPr lang="ko-KR" altLang="en-US" sz="2400" dirty="0">
-                <a:solidFill>
-                  <a:srgbClr val="0070C0"/>
-                </a:solidFill>
-                <a:ea typeface="강한공군체 Medium" panose="020B0600000101010101" pitchFamily="34" charset="-127"/>
-              </a:rPr>
-              <a:t> </a:t>
-            </a:r>
-            <a:r>
-              <a:rPr lang="en-US" altLang="ko-KR" sz="2400" dirty="0">
-                <a:solidFill>
-                  <a:srgbClr val="0070C0"/>
-                </a:solidFill>
-                <a:ea typeface="강한공군체 Medium" panose="020B0600000101010101" pitchFamily="34" charset="-127"/>
-              </a:rPr>
-              <a:t>. </a:t>
-            </a:r>
-            <a:r>
-              <a:rPr lang="en-US" altLang="ko-KR" sz="2400" dirty="0">
-                <a:ea typeface="강한공군체 Medium" panose="020B0600000101010101" pitchFamily="34" charset="-127"/>
-              </a:rPr>
-              <a:t>: </a:t>
-            </a:r>
-            <a:r>
-              <a:rPr lang="ko-KR" altLang="en-US" sz="2400" dirty="0">
-                <a:ea typeface="강한공군체 Medium" panose="020B0600000101010101" pitchFamily="34" charset="-127"/>
-              </a:rPr>
-              <a:t>현재 디렉토리의 모든 변경 사항을 </a:t>
-            </a:r>
-            <a:r>
-              <a:rPr lang="ko-KR" altLang="en-US" sz="2400" dirty="0" err="1">
-                <a:ea typeface="강한공군체 Medium" panose="020B0600000101010101" pitchFamily="34" charset="-127"/>
-              </a:rPr>
-              <a:t>스테이징</a:t>
-            </a:r>
-            <a:r>
-              <a:rPr lang="ko-KR" altLang="en-US" sz="2400" dirty="0">
-                <a:ea typeface="강한공군체 Medium" panose="020B0600000101010101" pitchFamily="34" charset="-127"/>
-              </a:rPr>
-              <a:t> 영역에 추가 </a:t>
-            </a:r>
-            <a:endParaRPr lang="en-US" altLang="ko-KR" sz="2400" dirty="0">
-              <a:ea typeface="강한공군체 Medium" panose="020B0600000101010101" pitchFamily="34" charset="-127"/>
-            </a:endParaRPr>
-          </a:p>
-          <a:p>
-            <a:pPr>
-              <a:lnSpc>
-                <a:spcPct val="100000"/>
-              </a:lnSpc>
-            </a:pPr>
-            <a:r>
-              <a:rPr lang="en-US" altLang="ko-KR" sz="2400" dirty="0">
-                <a:solidFill>
-                  <a:srgbClr val="0070C0"/>
-                </a:solidFill>
-                <a:ea typeface="강한공군체 Medium" panose="020B0600000101010101" pitchFamily="34" charset="-127"/>
-              </a:rPr>
-              <a:t>git status </a:t>
-            </a:r>
-            <a:r>
-              <a:rPr lang="en-US" altLang="ko-KR" sz="2400" dirty="0">
-                <a:ea typeface="강한공군체 Medium" panose="020B0600000101010101" pitchFamily="34" charset="-127"/>
-              </a:rPr>
-              <a:t>: </a:t>
-            </a:r>
-            <a:r>
-              <a:rPr lang="ko-KR" altLang="en-US" sz="2400" dirty="0">
-                <a:ea typeface="강한공군체 Medium" panose="020B0600000101010101" pitchFamily="34" charset="-127"/>
-              </a:rPr>
-              <a:t>현재 디렉토리 상태 보기 </a:t>
-            </a:r>
-            <a:r>
-              <a:rPr lang="en-US" altLang="ko-KR" sz="2400" dirty="0">
-                <a:ea typeface="강한공군체 Medium" panose="020B0600000101010101" pitchFamily="34" charset="-127"/>
-              </a:rPr>
-              <a:t>(</a:t>
-            </a:r>
-            <a:r>
-              <a:rPr lang="ko-KR" altLang="en-US" sz="2400" dirty="0">
-                <a:ea typeface="강한공군체 Medium" panose="020B0600000101010101" pitchFamily="34" charset="-127"/>
-              </a:rPr>
-              <a:t>상태 변경 확인</a:t>
-            </a:r>
-            <a:r>
-              <a:rPr lang="en-US" altLang="ko-KR" sz="2400" dirty="0">
-                <a:ea typeface="강한공군체 Medium" panose="020B0600000101010101" pitchFamily="34" charset="-127"/>
-              </a:rPr>
-              <a:t>)</a:t>
-            </a:r>
-          </a:p>
-          <a:p>
-            <a:pPr>
-              <a:lnSpc>
-                <a:spcPct val="100000"/>
-              </a:lnSpc>
-            </a:pPr>
-            <a:r>
-              <a:rPr lang="en-US" altLang="ko-KR" sz="2400" dirty="0">
-                <a:solidFill>
-                  <a:srgbClr val="0070C0"/>
-                </a:solidFill>
-                <a:ea typeface="강한공군체 Medium" panose="020B0600000101010101" pitchFamily="34" charset="-127"/>
-              </a:rPr>
-              <a:t>git</a:t>
-            </a:r>
-            <a:r>
-              <a:rPr lang="ko-KR" altLang="en-US" sz="2400" dirty="0">
-                <a:solidFill>
-                  <a:srgbClr val="0070C0"/>
-                </a:solidFill>
-                <a:ea typeface="강한공군체 Medium" panose="020B0600000101010101" pitchFamily="34" charset="-127"/>
-              </a:rPr>
-              <a:t> </a:t>
-            </a:r>
-            <a:r>
-              <a:rPr lang="en-US" altLang="ko-KR" sz="2400" dirty="0">
-                <a:solidFill>
-                  <a:srgbClr val="0070C0"/>
-                </a:solidFill>
-                <a:ea typeface="강한공군체 Medium" panose="020B0600000101010101" pitchFamily="34" charset="-127"/>
-              </a:rPr>
-              <a:t>commit -m “study: first commit” </a:t>
-            </a:r>
-            <a:r>
-              <a:rPr lang="en-US" altLang="ko-KR" sz="2400" dirty="0">
-                <a:ea typeface="강한공군체 Medium" panose="020B0600000101010101" pitchFamily="34" charset="-127"/>
-              </a:rPr>
-              <a:t>: </a:t>
-            </a:r>
-            <a:r>
-              <a:rPr lang="ko-KR" altLang="en-US" sz="2400" dirty="0" err="1">
-                <a:ea typeface="강한공군체 Medium" panose="020B0600000101010101" pitchFamily="34" charset="-127"/>
-              </a:rPr>
-              <a:t>스테이징</a:t>
-            </a:r>
-            <a:r>
-              <a:rPr lang="ko-KR" altLang="en-US" sz="2400" dirty="0">
-                <a:ea typeface="강한공군체 Medium" panose="020B0600000101010101" pitchFamily="34" charset="-127"/>
-              </a:rPr>
-              <a:t> 영역의 파일을 커밋하여 저장소의 히스토리에 기록</a:t>
-            </a:r>
-            <a:endParaRPr lang="en-US" altLang="ko-KR" sz="2400" dirty="0">
-              <a:ea typeface="강한공군체 Medium" panose="020B0600000101010101" pitchFamily="34" charset="-127"/>
-            </a:endParaRPr>
-          </a:p>
-          <a:p>
-            <a:pPr>
-              <a:lnSpc>
-                <a:spcPct val="100000"/>
-              </a:lnSpc>
-            </a:pPr>
-            <a:r>
-              <a:rPr lang="en-US" altLang="ko-KR" sz="2400" dirty="0">
-                <a:solidFill>
-                  <a:srgbClr val="0070C0"/>
-                </a:solidFill>
-                <a:ea typeface="강한공군체 Medium" panose="020B0600000101010101" pitchFamily="34" charset="-127"/>
-              </a:rPr>
-              <a:t>git log </a:t>
-            </a:r>
-            <a:r>
-              <a:rPr lang="en-US" altLang="ko-KR" sz="2400" dirty="0">
-                <a:ea typeface="강한공군체 Medium" panose="020B0600000101010101" pitchFamily="34" charset="-127"/>
-              </a:rPr>
-              <a:t>: </a:t>
-            </a:r>
-            <a:r>
-              <a:rPr lang="ko-KR" altLang="en-US" sz="2400" dirty="0">
-                <a:ea typeface="강한공군체 Medium" panose="020B0600000101010101" pitchFamily="34" charset="-127"/>
-              </a:rPr>
-              <a:t>저장소의 </a:t>
-            </a:r>
-            <a:r>
-              <a:rPr lang="ko-KR" altLang="en-US" sz="2400" dirty="0" err="1">
-                <a:ea typeface="강한공군체 Medium" panose="020B0600000101010101" pitchFamily="34" charset="-127"/>
-              </a:rPr>
-              <a:t>커밋</a:t>
-            </a:r>
-            <a:r>
-              <a:rPr lang="ko-KR" altLang="en-US" sz="2400" dirty="0">
-                <a:ea typeface="강한공군체 Medium" panose="020B0600000101010101" pitchFamily="34" charset="-127"/>
-              </a:rPr>
-              <a:t> 히스토리 확인</a:t>
-            </a:r>
-            <a:endParaRPr lang="en-US" altLang="ko-KR" sz="2400" dirty="0">
-              <a:ea typeface="강한공군체 Medium" panose="020B0600000101010101" pitchFamily="34" charset="-127"/>
-            </a:endParaRPr>
-          </a:p>
-          <a:p>
-            <a:pPr>
-              <a:lnSpc>
-                <a:spcPct val="100000"/>
-              </a:lnSpc>
-            </a:pPr>
-            <a:r>
-              <a:rPr lang="en-US" altLang="ko-KR" sz="2400" dirty="0">
-                <a:solidFill>
-                  <a:srgbClr val="0070C0"/>
-                </a:solidFill>
-                <a:ea typeface="강한공군체 Medium" panose="020B0600000101010101" pitchFamily="34" charset="-127"/>
-              </a:rPr>
-              <a:t>git</a:t>
-            </a:r>
-            <a:r>
-              <a:rPr lang="ko-KR" altLang="en-US" sz="2400" dirty="0">
-                <a:solidFill>
-                  <a:srgbClr val="0070C0"/>
-                </a:solidFill>
-                <a:ea typeface="강한공군체 Medium" panose="020B0600000101010101" pitchFamily="34" charset="-127"/>
-              </a:rPr>
-              <a:t> </a:t>
-            </a:r>
-            <a:r>
-              <a:rPr lang="en-US" altLang="ko-KR" sz="2400" dirty="0">
-                <a:solidFill>
-                  <a:srgbClr val="0070C0"/>
-                </a:solidFill>
-                <a:ea typeface="강한공군체 Medium" panose="020B0600000101010101" pitchFamily="34" charset="-127"/>
-              </a:rPr>
-              <a:t>push –u origin main </a:t>
-            </a:r>
-            <a:r>
-              <a:rPr lang="en-US" altLang="ko-KR" sz="2400" dirty="0">
-                <a:ea typeface="강한공군체 Medium" panose="020B0600000101010101" pitchFamily="34" charset="-127"/>
-              </a:rPr>
-              <a:t>: </a:t>
-            </a:r>
-            <a:r>
-              <a:rPr lang="ko-KR" altLang="en-US" sz="2400" dirty="0">
-                <a:ea typeface="강한공군체 Medium" panose="020B0600000101010101" pitchFamily="34" charset="-127"/>
-              </a:rPr>
-              <a:t>로컬 저장소의 변경 사항을 원격 저장소로 푸시</a:t>
-            </a:r>
-            <a:endParaRPr lang="en-US" altLang="ko-KR" sz="2400" dirty="0">
-              <a:ea typeface="강한공군체 Medium" panose="020B0600000101010101" pitchFamily="34" charset="-127"/>
-            </a:endParaRPr>
-          </a:p>
-          <a:p>
-            <a:endParaRPr lang="ko-KR" altLang="en-US" sz="2400" dirty="0"/>
-          </a:p>
-        </p:txBody>
-      </p:sp>
-      <p:sp>
-        <p:nvSpPr>
-          <p:cNvPr id="3" name="날짜 개체 틀 2">
-            <a:extLst>
-              <a:ext uri="{FF2B5EF4-FFF2-40B4-BE49-F238E27FC236}">
-                <a16:creationId xmlns:a16="http://schemas.microsoft.com/office/drawing/2014/main" id="{A9D7B475-9B14-ED2B-6D54-DB49F3841811}"/>
+          <p:cNvPr id="4" name="날짜 개체 틀 3">
+            <a:extLst>
+              <a:ext uri="{FF2B5EF4-FFF2-40B4-BE49-F238E27FC236}">
+                <a16:creationId xmlns:a16="http://schemas.microsoft.com/office/drawing/2014/main" id="{61EDE14B-F590-5390-4ED0-85934CA6481D}"/>
               </a:ext>
             </a:extLst>
           </p:cNvPr>
@@ -13046,7 +12817,7 @@
           <a:bodyPr/>
           <a:lstStyle/>
           <a:p>
-            <a:fld id="{3C9CE3CE-253F-4F9D-BA15-C226C8D8501E}" type="datetime6">
+            <a:fld id="{126F6B89-4082-49DC-A306-910E461DCB41}" type="datetime6">
               <a:rPr lang="ko-KR" altLang="en-US" smtClean="0"/>
               <a:t>2024년 5월</a:t>
             </a:fld>
@@ -13056,10 +12827,10 @@
       </p:sp>
       <p:sp>
         <p:nvSpPr>
-          <p:cNvPr id="4" name="슬라이드 번호 개체 틀 3">
-            <a:extLst>
-              <a:ext uri="{FF2B5EF4-FFF2-40B4-BE49-F238E27FC236}">
-                <a16:creationId xmlns:a16="http://schemas.microsoft.com/office/drawing/2014/main" id="{E32B312E-2FAB-7276-F2BF-2F6DBC9DD044}"/>
+          <p:cNvPr id="5" name="슬라이드 번호 개체 틀 4">
+            <a:extLst>
+              <a:ext uri="{FF2B5EF4-FFF2-40B4-BE49-F238E27FC236}">
+                <a16:creationId xmlns:a16="http://schemas.microsoft.com/office/drawing/2014/main" id="{E4661428-D3BF-F776-8121-361B8C4DBA66}"/>
               </a:ext>
             </a:extLst>
           </p:cNvPr>
@@ -13083,42 +12854,46 @@
           </a:p>
         </p:txBody>
       </p:sp>
-      <p:sp>
-        <p:nvSpPr>
-          <p:cNvPr id="5" name="제목 4">
-            <a:extLst>
-              <a:ext uri="{FF2B5EF4-FFF2-40B4-BE49-F238E27FC236}">
-                <a16:creationId xmlns:a16="http://schemas.microsoft.com/office/drawing/2014/main" id="{1DD2F534-EE96-0891-B750-CA1FFA363EA9}"/>
-              </a:ext>
-            </a:extLst>
-          </p:cNvPr>
-          <p:cNvSpPr>
-            <a:spLocks noGrp="1"/>
-          </p:cNvSpPr>
-          <p:nvPr>
-            <p:ph type="title"/>
-          </p:nvPr>
-        </p:nvSpPr>
-        <p:spPr/>
-        <p:txBody>
-          <a:bodyPr/>
-          <a:lstStyle/>
-          <a:p>
-            <a:r>
-              <a:rPr lang="en-US" altLang="ko-KR" dirty="0"/>
-              <a:t>Git </a:t>
-            </a:r>
-            <a:r>
-              <a:rPr lang="ko-KR" altLang="en-US" dirty="0"/>
-              <a:t>명령어</a:t>
-            </a:r>
-          </a:p>
-        </p:txBody>
-      </p:sp>
+      <p:pic>
+        <p:nvPicPr>
+          <p:cNvPr id="8" name="그림 7" descr="텍스트, 표지판이(가) 표시된 사진&#10;&#10;자동 생성된 설명">
+            <a:extLst>
+              <a:ext uri="{FF2B5EF4-FFF2-40B4-BE49-F238E27FC236}">
+                <a16:creationId xmlns:a16="http://schemas.microsoft.com/office/drawing/2014/main" id="{81459821-95CF-3555-EA73-B302A2E8328F}"/>
+              </a:ext>
+            </a:extLst>
+          </p:cNvPr>
+          <p:cNvPicPr>
+            <a:picLocks noChangeAspect="1"/>
+          </p:cNvPicPr>
+          <p:nvPr/>
+        </p:nvPicPr>
+        <p:blipFill>
+          <a:blip r:embed="rId3">
+            <a:extLst>
+              <a:ext uri="{28A0092B-C50C-407E-A947-70E740481C1C}">
+                <a14:useLocalDpi xmlns:a14="http://schemas.microsoft.com/office/drawing/2010/main" val="0"/>
+              </a:ext>
+            </a:extLst>
+          </a:blip>
+          <a:stretch>
+            <a:fillRect/>
+          </a:stretch>
+        </p:blipFill>
+        <p:spPr>
+          <a:xfrm>
+            <a:off x="1234018" y="1374470"/>
+            <a:ext cx="9723963" cy="4109060"/>
+          </a:xfrm>
+          <a:prstGeom prst="rect">
+            <a:avLst/>
+          </a:prstGeom>
+        </p:spPr>
+      </p:pic>
     </p:spTree>
     <p:extLst>
       <p:ext uri="{BB962C8B-B14F-4D97-AF65-F5344CB8AC3E}">
-        <p14:creationId xmlns:p14="http://schemas.microsoft.com/office/powerpoint/2010/main" val="656453146"/>
+        <p14:creationId xmlns:p14="http://schemas.microsoft.com/office/powerpoint/2010/main" val="3610709924"/>
       </p:ext>
     </p:extLst>
   </p:cSld>
@@ -13147,7 +12922,325 @@
       </p:grpSpPr>
       <p:sp>
         <p:nvSpPr>
-          <p:cNvPr id="2" name="날짜 개체 틀 1"/>
+          <p:cNvPr id="2" name="내용 개체 틀 1">
+            <a:extLst>
+              <a:ext uri="{FF2B5EF4-FFF2-40B4-BE49-F238E27FC236}">
+                <a16:creationId xmlns:a16="http://schemas.microsoft.com/office/drawing/2014/main" id="{1C847C42-5B19-643E-6060-D9D2F849F11D}"/>
+              </a:ext>
+            </a:extLst>
+          </p:cNvPr>
+          <p:cNvSpPr>
+            <a:spLocks noGrp="1"/>
+          </p:cNvSpPr>
+          <p:nvPr>
+            <p:ph idx="1"/>
+          </p:nvPr>
+        </p:nvSpPr>
+        <p:spPr/>
+        <p:txBody>
+          <a:bodyPr>
+            <a:normAutofit/>
+          </a:bodyPr>
+          <a:lstStyle/>
+          <a:p>
+            <a:pPr>
+              <a:lnSpc>
+                <a:spcPct val="100000"/>
+              </a:lnSpc>
+            </a:pPr>
+            <a:r>
+              <a:rPr lang="en-US" altLang="ko-KR" sz="2400" dirty="0">
+                <a:solidFill>
+                  <a:srgbClr val="0070C0"/>
+                </a:solidFill>
+                <a:ea typeface="강한공군체 Medium" panose="020B0600000101010101" pitchFamily="34" charset="-127"/>
+              </a:rPr>
+              <a:t>git status</a:t>
+            </a:r>
+            <a:r>
+              <a:rPr lang="en-US" altLang="ko-KR" sz="2400" dirty="0">
+                <a:ea typeface="강한공군체 Medium" panose="020B0600000101010101" pitchFamily="34" charset="-127"/>
+              </a:rPr>
+              <a:t> : </a:t>
+            </a:r>
+            <a:r>
+              <a:rPr lang="ko-KR" altLang="en-US" sz="2400" dirty="0">
+                <a:ea typeface="강한공군체 Medium" panose="020B0600000101010101" pitchFamily="34" charset="-127"/>
+              </a:rPr>
+              <a:t>현재 디렉토리 상태 보기</a:t>
+            </a:r>
+            <a:endParaRPr lang="en-US" altLang="ko-KR" sz="2400" dirty="0">
+              <a:ea typeface="강한공군체 Medium" panose="020B0600000101010101" pitchFamily="34" charset="-127"/>
+            </a:endParaRPr>
+          </a:p>
+          <a:p>
+            <a:pPr>
+              <a:lnSpc>
+                <a:spcPct val="100000"/>
+              </a:lnSpc>
+            </a:pPr>
+            <a:r>
+              <a:rPr lang="en-US" altLang="ko-KR" sz="2400" dirty="0">
+                <a:solidFill>
+                  <a:srgbClr val="0070C0"/>
+                </a:solidFill>
+                <a:ea typeface="강한공군체 Medium" panose="020B0600000101010101" pitchFamily="34" charset="-127"/>
+              </a:rPr>
+              <a:t>git add</a:t>
+            </a:r>
+            <a:r>
+              <a:rPr lang="ko-KR" altLang="en-US" sz="2400" dirty="0">
+                <a:solidFill>
+                  <a:srgbClr val="0070C0"/>
+                </a:solidFill>
+                <a:ea typeface="강한공군체 Medium" panose="020B0600000101010101" pitchFamily="34" charset="-127"/>
+              </a:rPr>
+              <a:t> </a:t>
+            </a:r>
+            <a:r>
+              <a:rPr lang="en-US" altLang="ko-KR" sz="2400" dirty="0">
+                <a:solidFill>
+                  <a:srgbClr val="0070C0"/>
+                </a:solidFill>
+                <a:ea typeface="강한공군체 Medium" panose="020B0600000101010101" pitchFamily="34" charset="-127"/>
+              </a:rPr>
+              <a:t>. </a:t>
+            </a:r>
+            <a:r>
+              <a:rPr lang="en-US" altLang="ko-KR" sz="2400" dirty="0">
+                <a:ea typeface="강한공군체 Medium" panose="020B0600000101010101" pitchFamily="34" charset="-127"/>
+              </a:rPr>
+              <a:t>: </a:t>
+            </a:r>
+            <a:r>
+              <a:rPr lang="ko-KR" altLang="en-US" sz="2400" dirty="0">
+                <a:ea typeface="강한공군체 Medium" panose="020B0600000101010101" pitchFamily="34" charset="-127"/>
+              </a:rPr>
+              <a:t>현재 디렉토리의 모든 변경 사항을 </a:t>
+            </a:r>
+            <a:r>
+              <a:rPr lang="ko-KR" altLang="en-US" sz="2400" dirty="0" err="1">
+                <a:ea typeface="강한공군체 Medium" panose="020B0600000101010101" pitchFamily="34" charset="-127"/>
+              </a:rPr>
+              <a:t>스테이징</a:t>
+            </a:r>
+            <a:r>
+              <a:rPr lang="ko-KR" altLang="en-US" sz="2400" dirty="0">
+                <a:ea typeface="강한공군체 Medium" panose="020B0600000101010101" pitchFamily="34" charset="-127"/>
+              </a:rPr>
+              <a:t> 영역에 추가 </a:t>
+            </a:r>
+            <a:endParaRPr lang="en-US" altLang="ko-KR" sz="2400" dirty="0">
+              <a:ea typeface="강한공군체 Medium" panose="020B0600000101010101" pitchFamily="34" charset="-127"/>
+            </a:endParaRPr>
+          </a:p>
+          <a:p>
+            <a:pPr>
+              <a:lnSpc>
+                <a:spcPct val="100000"/>
+              </a:lnSpc>
+            </a:pPr>
+            <a:r>
+              <a:rPr lang="en-US" altLang="ko-KR" sz="2400" dirty="0">
+                <a:solidFill>
+                  <a:srgbClr val="0070C0"/>
+                </a:solidFill>
+                <a:ea typeface="강한공군체 Medium" panose="020B0600000101010101" pitchFamily="34" charset="-127"/>
+              </a:rPr>
+              <a:t>git status </a:t>
+            </a:r>
+            <a:r>
+              <a:rPr lang="en-US" altLang="ko-KR" sz="2400" dirty="0">
+                <a:ea typeface="강한공군체 Medium" panose="020B0600000101010101" pitchFamily="34" charset="-127"/>
+              </a:rPr>
+              <a:t>: </a:t>
+            </a:r>
+            <a:r>
+              <a:rPr lang="ko-KR" altLang="en-US" sz="2400" dirty="0">
+                <a:ea typeface="강한공군체 Medium" panose="020B0600000101010101" pitchFamily="34" charset="-127"/>
+              </a:rPr>
+              <a:t>현재 디렉토리 상태 보기 </a:t>
+            </a:r>
+            <a:r>
+              <a:rPr lang="en-US" altLang="ko-KR" sz="2400" dirty="0">
+                <a:ea typeface="강한공군체 Medium" panose="020B0600000101010101" pitchFamily="34" charset="-127"/>
+              </a:rPr>
+              <a:t>(</a:t>
+            </a:r>
+            <a:r>
+              <a:rPr lang="ko-KR" altLang="en-US" sz="2400" dirty="0">
+                <a:ea typeface="강한공군체 Medium" panose="020B0600000101010101" pitchFamily="34" charset="-127"/>
+              </a:rPr>
+              <a:t>상태 변경 확인</a:t>
+            </a:r>
+            <a:r>
+              <a:rPr lang="en-US" altLang="ko-KR" sz="2400" dirty="0">
+                <a:ea typeface="강한공군체 Medium" panose="020B0600000101010101" pitchFamily="34" charset="-127"/>
+              </a:rPr>
+              <a:t>)</a:t>
+            </a:r>
+          </a:p>
+          <a:p>
+            <a:pPr>
+              <a:lnSpc>
+                <a:spcPct val="100000"/>
+              </a:lnSpc>
+            </a:pPr>
+            <a:r>
+              <a:rPr lang="en-US" altLang="ko-KR" sz="2400" dirty="0">
+                <a:solidFill>
+                  <a:srgbClr val="0070C0"/>
+                </a:solidFill>
+                <a:ea typeface="강한공군체 Medium" panose="020B0600000101010101" pitchFamily="34" charset="-127"/>
+              </a:rPr>
+              <a:t>git</a:t>
+            </a:r>
+            <a:r>
+              <a:rPr lang="ko-KR" altLang="en-US" sz="2400" dirty="0">
+                <a:solidFill>
+                  <a:srgbClr val="0070C0"/>
+                </a:solidFill>
+                <a:ea typeface="강한공군체 Medium" panose="020B0600000101010101" pitchFamily="34" charset="-127"/>
+              </a:rPr>
+              <a:t> </a:t>
+            </a:r>
+            <a:r>
+              <a:rPr lang="en-US" altLang="ko-KR" sz="2400" dirty="0">
+                <a:solidFill>
+                  <a:srgbClr val="0070C0"/>
+                </a:solidFill>
+                <a:ea typeface="강한공군체 Medium" panose="020B0600000101010101" pitchFamily="34" charset="-127"/>
+              </a:rPr>
+              <a:t>commit -m “study: first commit” </a:t>
+            </a:r>
+            <a:r>
+              <a:rPr lang="en-US" altLang="ko-KR" sz="2400" dirty="0">
+                <a:ea typeface="강한공군체 Medium" panose="020B0600000101010101" pitchFamily="34" charset="-127"/>
+              </a:rPr>
+              <a:t>: </a:t>
+            </a:r>
+            <a:r>
+              <a:rPr lang="ko-KR" altLang="en-US" sz="2400" dirty="0" err="1">
+                <a:ea typeface="강한공군체 Medium" panose="020B0600000101010101" pitchFamily="34" charset="-127"/>
+              </a:rPr>
+              <a:t>스테이징</a:t>
+            </a:r>
+            <a:r>
+              <a:rPr lang="ko-KR" altLang="en-US" sz="2400" dirty="0">
+                <a:ea typeface="강한공군체 Medium" panose="020B0600000101010101" pitchFamily="34" charset="-127"/>
+              </a:rPr>
+              <a:t> 영역의 파일을 커밋하여 저장소의 히스토리에 기록</a:t>
+            </a:r>
+            <a:endParaRPr lang="en-US" altLang="ko-KR" sz="2400" dirty="0">
+              <a:ea typeface="강한공군체 Medium" panose="020B0600000101010101" pitchFamily="34" charset="-127"/>
+            </a:endParaRPr>
+          </a:p>
+          <a:p>
+            <a:pPr>
+              <a:lnSpc>
+                <a:spcPct val="100000"/>
+              </a:lnSpc>
+            </a:pPr>
+            <a:r>
+              <a:rPr lang="en-US" altLang="ko-KR" sz="2400" dirty="0">
+                <a:solidFill>
+                  <a:srgbClr val="0070C0"/>
+                </a:solidFill>
+                <a:ea typeface="강한공군체 Medium" panose="020B0600000101010101" pitchFamily="34" charset="-127"/>
+              </a:rPr>
+              <a:t>git log </a:t>
+            </a:r>
+            <a:r>
+              <a:rPr lang="en-US" altLang="ko-KR" sz="2400" dirty="0">
+                <a:ea typeface="강한공군체 Medium" panose="020B0600000101010101" pitchFamily="34" charset="-127"/>
+              </a:rPr>
+              <a:t>: </a:t>
+            </a:r>
+            <a:r>
+              <a:rPr lang="ko-KR" altLang="en-US" sz="2400" dirty="0">
+                <a:ea typeface="강한공군체 Medium" panose="020B0600000101010101" pitchFamily="34" charset="-127"/>
+              </a:rPr>
+              <a:t>저장소의 </a:t>
+            </a:r>
+            <a:r>
+              <a:rPr lang="ko-KR" altLang="en-US" sz="2400" dirty="0" err="1">
+                <a:ea typeface="강한공군체 Medium" panose="020B0600000101010101" pitchFamily="34" charset="-127"/>
+              </a:rPr>
+              <a:t>커밋</a:t>
+            </a:r>
+            <a:r>
+              <a:rPr lang="ko-KR" altLang="en-US" sz="2400" dirty="0">
+                <a:ea typeface="강한공군체 Medium" panose="020B0600000101010101" pitchFamily="34" charset="-127"/>
+              </a:rPr>
+              <a:t> 히스토리 확인</a:t>
+            </a:r>
+            <a:endParaRPr lang="en-US" altLang="ko-KR" sz="2400" dirty="0">
+              <a:ea typeface="강한공군체 Medium" panose="020B0600000101010101" pitchFamily="34" charset="-127"/>
+            </a:endParaRPr>
+          </a:p>
+          <a:p>
+            <a:pPr>
+              <a:lnSpc>
+                <a:spcPct val="100000"/>
+              </a:lnSpc>
+            </a:pPr>
+            <a:r>
+              <a:rPr lang="en-US" altLang="ko-KR" sz="2400" dirty="0">
+                <a:solidFill>
+                  <a:srgbClr val="0070C0"/>
+                </a:solidFill>
+                <a:ea typeface="강한공군체 Medium" panose="020B0600000101010101" pitchFamily="34" charset="-127"/>
+              </a:rPr>
+              <a:t>git</a:t>
+            </a:r>
+            <a:r>
+              <a:rPr lang="ko-KR" altLang="en-US" sz="2400" dirty="0">
+                <a:solidFill>
+                  <a:srgbClr val="0070C0"/>
+                </a:solidFill>
+                <a:ea typeface="강한공군체 Medium" panose="020B0600000101010101" pitchFamily="34" charset="-127"/>
+              </a:rPr>
+              <a:t> </a:t>
+            </a:r>
+            <a:r>
+              <a:rPr lang="en-US" altLang="ko-KR" sz="2400" dirty="0">
+                <a:solidFill>
+                  <a:srgbClr val="0070C0"/>
+                </a:solidFill>
+                <a:ea typeface="강한공군체 Medium" panose="020B0600000101010101" pitchFamily="34" charset="-127"/>
+              </a:rPr>
+              <a:t>push –u origin main </a:t>
+            </a:r>
+            <a:r>
+              <a:rPr lang="en-US" altLang="ko-KR" sz="2400" dirty="0">
+                <a:ea typeface="강한공군체 Medium" panose="020B0600000101010101" pitchFamily="34" charset="-127"/>
+              </a:rPr>
+              <a:t>: </a:t>
+            </a:r>
+            <a:r>
+              <a:rPr lang="ko-KR" altLang="en-US" sz="2400" dirty="0">
+                <a:ea typeface="강한공군체 Medium" panose="020B0600000101010101" pitchFamily="34" charset="-127"/>
+              </a:rPr>
+              <a:t>로컬 저장소의 변경 사항을 원격 저장소로 푸시</a:t>
+            </a:r>
+            <a:endParaRPr lang="en-US" altLang="ko-KR" sz="2400" dirty="0">
+              <a:ea typeface="강한공군체 Medium" panose="020B0600000101010101" pitchFamily="34" charset="-127"/>
+            </a:endParaRPr>
+          </a:p>
+          <a:p>
+            <a:endParaRPr lang="ko-KR" altLang="en-US" sz="2400" dirty="0"/>
+          </a:p>
+        </p:txBody>
+      </p:sp>
+      <p:sp>
+        <p:nvSpPr>
+          <p:cNvPr id="3" name="날짜 개체 틀 2">
+            <a:extLst>
+              <a:ext uri="{FF2B5EF4-FFF2-40B4-BE49-F238E27FC236}">
+                <a16:creationId xmlns:a16="http://schemas.microsoft.com/office/drawing/2014/main" id="{A9D7B475-9B14-ED2B-6D54-DB49F3841811}"/>
+              </a:ext>
+            </a:extLst>
+          </p:cNvPr>
           <p:cNvSpPr>
             <a:spLocks noGrp="1"/>
           </p:cNvSpPr>
@@ -13160,7 +13253,7 @@
           <a:bodyPr/>
           <a:lstStyle/>
           <a:p>
-            <a:fld id="{0E19CB95-6D28-40F1-9DA3-1BAC5D4B5B4F}" type="datetime6">
+            <a:fld id="{3C9CE3CE-253F-4F9D-BA15-C226C8D8501E}" type="datetime6">
               <a:rPr lang="ko-KR" altLang="en-US" smtClean="0"/>
               <a:t>2024년 5월</a:t>
             </a:fld>
@@ -13170,7 +13263,13 @@
       </p:sp>
       <p:sp>
         <p:nvSpPr>
-          <p:cNvPr id="3" name="슬라이드 번호 개체 틀 2"/>
+          <p:cNvPr id="4" name="슬라이드 번호 개체 틀 3">
+            <a:extLst>
+              <a:ext uri="{FF2B5EF4-FFF2-40B4-BE49-F238E27FC236}">
+                <a16:creationId xmlns:a16="http://schemas.microsoft.com/office/drawing/2014/main" id="{E32B312E-2FAB-7276-F2BF-2F6DBC9DD044}"/>
+              </a:ext>
+            </a:extLst>
+          </p:cNvPr>
           <p:cNvSpPr>
             <a:spLocks noGrp="1"/>
           </p:cNvSpPr>
@@ -13193,7 +13292,13 @@
       </p:sp>
       <p:sp>
         <p:nvSpPr>
-          <p:cNvPr id="4" name="제목 3"/>
+          <p:cNvPr id="5" name="제목 4">
+            <a:extLst>
+              <a:ext uri="{FF2B5EF4-FFF2-40B4-BE49-F238E27FC236}">
+                <a16:creationId xmlns:a16="http://schemas.microsoft.com/office/drawing/2014/main" id="{1DD2F534-EE96-0891-B750-CA1FFA363EA9}"/>
+              </a:ext>
+            </a:extLst>
+          </p:cNvPr>
           <p:cNvSpPr>
             <a:spLocks noGrp="1"/>
           </p:cNvSpPr>
@@ -13207,17 +13312,20 @@
           <a:lstStyle/>
           <a:p>
             <a:r>
-              <a:rPr lang="ko-KR" altLang="en-US" dirty="0" err="1"/>
-              <a:t>블로깅</a:t>
-            </a:r>
-            <a:endParaRPr lang="ko-KR" altLang="en-US" dirty="0"/>
+              <a:rPr lang="en-US" altLang="ko-KR" dirty="0"/>
+              <a:t>Git </a:t>
+            </a:r>
+            <a:r>
+              <a:rPr lang="ko-KR" altLang="en-US" dirty="0"/>
+              <a:t>명령어</a:t>
+            </a:r>
           </a:p>
         </p:txBody>
       </p:sp>
     </p:spTree>
     <p:extLst>
       <p:ext uri="{BB962C8B-B14F-4D97-AF65-F5344CB8AC3E}">
-        <p14:creationId xmlns:p14="http://schemas.microsoft.com/office/powerpoint/2010/main" val="327552701"/>
+        <p14:creationId xmlns:p14="http://schemas.microsoft.com/office/powerpoint/2010/main" val="656453146"/>
       </p:ext>
     </p:extLst>
   </p:cSld>
@@ -13246,6 +13354,105 @@
       </p:grpSpPr>
       <p:sp>
         <p:nvSpPr>
+          <p:cNvPr id="2" name="날짜 개체 틀 1"/>
+          <p:cNvSpPr>
+            <a:spLocks noGrp="1"/>
+          </p:cNvSpPr>
+          <p:nvPr>
+            <p:ph type="dt" sz="half" idx="10"/>
+          </p:nvPr>
+        </p:nvSpPr>
+        <p:spPr/>
+        <p:txBody>
+          <a:bodyPr/>
+          <a:lstStyle/>
+          <a:p>
+            <a:fld id="{0E19CB95-6D28-40F1-9DA3-1BAC5D4B5B4F}" type="datetime6">
+              <a:rPr lang="ko-KR" altLang="en-US" smtClean="0"/>
+              <a:t>2024년 5월</a:t>
+            </a:fld>
+            <a:endParaRPr lang="ko-KR" altLang="en-US"/>
+          </a:p>
+        </p:txBody>
+      </p:sp>
+      <p:sp>
+        <p:nvSpPr>
+          <p:cNvPr id="3" name="슬라이드 번호 개체 틀 2"/>
+          <p:cNvSpPr>
+            <a:spLocks noGrp="1"/>
+          </p:cNvSpPr>
+          <p:nvPr>
+            <p:ph type="sldNum" sz="quarter" idx="12"/>
+          </p:nvPr>
+        </p:nvSpPr>
+        <p:spPr/>
+        <p:txBody>
+          <a:bodyPr/>
+          <a:lstStyle/>
+          <a:p>
+            <a:fld id="{083A2CE0-18CD-4102-B738-4ACFF9E68BA4}" type="slidenum">
+              <a:rPr lang="ko-KR" altLang="en-US" smtClean="0"/>
+              <a:t>32</a:t>
+            </a:fld>
+            <a:endParaRPr lang="ko-KR" altLang="en-US"/>
+          </a:p>
+        </p:txBody>
+      </p:sp>
+      <p:sp>
+        <p:nvSpPr>
+          <p:cNvPr id="4" name="제목 3"/>
+          <p:cNvSpPr>
+            <a:spLocks noGrp="1"/>
+          </p:cNvSpPr>
+          <p:nvPr>
+            <p:ph type="title"/>
+          </p:nvPr>
+        </p:nvSpPr>
+        <p:spPr/>
+        <p:txBody>
+          <a:bodyPr/>
+          <a:lstStyle/>
+          <a:p>
+            <a:r>
+              <a:rPr lang="ko-KR" altLang="en-US" dirty="0" err="1"/>
+              <a:t>블로깅</a:t>
+            </a:r>
+            <a:endParaRPr lang="ko-KR" altLang="en-US" dirty="0"/>
+          </a:p>
+        </p:txBody>
+      </p:sp>
+    </p:spTree>
+    <p:extLst>
+      <p:ext uri="{BB962C8B-B14F-4D97-AF65-F5344CB8AC3E}">
+        <p14:creationId xmlns:p14="http://schemas.microsoft.com/office/powerpoint/2010/main" val="327552701"/>
+      </p:ext>
+    </p:extLst>
+  </p:cSld>
+  <p:clrMapOvr>
+    <a:masterClrMapping/>
+  </p:clrMapOvr>
+</p:sld>
+</file>
+
+<file path=ppt/slides/slide33.xml><?xml version="1.0" encoding="utf-8"?>
+<p:sld xmlns:a="http://schemas.openxmlformats.org/drawingml/2006/main" xmlns:r="http://schemas.openxmlformats.org/officeDocument/2006/relationships" xmlns:p="http://schemas.openxmlformats.org/presentationml/2006/main">
+  <p:cSld>
+    <p:spTree>
+      <p:nvGrpSpPr>
+        <p:cNvPr id="1" name=""/>
+        <p:cNvGrpSpPr/>
+        <p:nvPr/>
+      </p:nvGrpSpPr>
+      <p:grpSpPr>
+        <a:xfrm>
+          <a:off x="0" y="0"/>
+          <a:ext cx="0" cy="0"/>
+          <a:chOff x="0" y="0"/>
+          <a:chExt cx="0" cy="0"/>
+        </a:xfrm>
+      </p:grpSpPr>
+      <p:sp>
+        <p:nvSpPr>
           <p:cNvPr id="3" name="날짜 개체 틀 2">
             <a:extLst>
               <a:ext uri="{FF2B5EF4-FFF2-40B4-BE49-F238E27FC236}">
@@ -13296,7 +13503,7 @@
           <a:p>
             <a:fld id="{083A2CE0-18CD-4102-B738-4ACFF9E68BA4}" type="slidenum">
               <a:rPr lang="ko-KR" altLang="en-US" smtClean="0"/>
-              <a:t>32</a:t>
+              <a:t>33</a:t>
             </a:fld>
             <a:endParaRPr lang="ko-KR" altLang="en-US"/>
           </a:p>
@@ -14045,7 +14252,7 @@
 </p:sld>
 </file>
 
-<file path=ppt/slides/slide33.xml><?xml version="1.0" encoding="utf-8"?>
+<file path=ppt/slides/slide34.xml><?xml version="1.0" encoding="utf-8"?>
 <p:sld xmlns:a="http://schemas.openxmlformats.org/drawingml/2006/main" xmlns:r="http://schemas.openxmlformats.org/officeDocument/2006/relationships" xmlns:p="http://schemas.openxmlformats.org/presentationml/2006/main">
   <p:cSld>
     <p:spTree>
@@ -14154,7 +14361,7 @@
           <a:p>
             <a:fld id="{083A2CE0-18CD-4102-B738-4ACFF9E68BA4}" type="slidenum">
               <a:rPr lang="ko-KR" altLang="en-US" smtClean="0"/>
-              <a:t>33</a:t>
+              <a:t>34</a:t>
             </a:fld>
             <a:endParaRPr lang="ko-KR" altLang="en-US"/>
           </a:p>
@@ -14235,7 +14442,7 @@
 </p:sld>
 </file>
 
-<file path=ppt/slides/slide34.xml><?xml version="1.0" encoding="utf-8"?>
+<file path=ppt/slides/slide35.xml><?xml version="1.0" encoding="utf-8"?>
 <p:sld xmlns:a="http://schemas.openxmlformats.org/drawingml/2006/main" xmlns:r="http://schemas.openxmlformats.org/officeDocument/2006/relationships" xmlns:p="http://schemas.openxmlformats.org/presentationml/2006/main">
   <p:cSld>
     <p:spTree>
@@ -14654,7 +14861,7 @@
           <a:p>
             <a:fld id="{083A2CE0-18CD-4102-B738-4ACFF9E68BA4}" type="slidenum">
               <a:rPr lang="ko-KR" altLang="en-US" smtClean="0"/>
-              <a:t>34</a:t>
+              <a:t>35</a:t>
             </a:fld>
             <a:endParaRPr lang="ko-KR" altLang="en-US"/>
           </a:p>
@@ -14731,7 +14938,7 @@
 </p:sld>
 </file>
 
-<file path=ppt/slides/slide35.xml><?xml version="1.0" encoding="utf-8"?>
+<file path=ppt/slides/slide36.xml><?xml version="1.0" encoding="utf-8"?>
 <p:sld xmlns:a="http://schemas.openxmlformats.org/drawingml/2006/main" xmlns:r="http://schemas.openxmlformats.org/officeDocument/2006/relationships" xmlns:p="http://schemas.openxmlformats.org/presentationml/2006/main">
   <p:cSld>
     <p:spTree>
@@ -14800,7 +15007,7 @@
           <a:p>
             <a:fld id="{083A2CE0-18CD-4102-B738-4ACFF9E68BA4}" type="slidenum">
               <a:rPr lang="ko-KR" altLang="en-US" smtClean="0"/>
-              <a:t>35</a:t>
+              <a:t>36</a:t>
             </a:fld>
             <a:endParaRPr lang="ko-KR" altLang="en-US"/>
           </a:p>

--- a/material/[SeSAC_YDP_6] 01_ot,git.pptx
+++ b/material/[SeSAC_YDP_6] 01_ot,git.pptx
@@ -5,48 +5,45 @@
     <p:sldMasterId id="2147483712" r:id="rId1"/>
   </p:sldMasterIdLst>
   <p:notesMasterIdLst>
-    <p:notesMasterId r:id="rId38"/>
+    <p:notesMasterId r:id="rId35"/>
   </p:notesMasterIdLst>
   <p:handoutMasterIdLst>
-    <p:handoutMasterId r:id="rId39"/>
+    <p:handoutMasterId r:id="rId36"/>
   </p:handoutMasterIdLst>
   <p:sldIdLst>
     <p:sldId id="675" r:id="rId2"/>
     <p:sldId id="258" r:id="rId3"/>
-    <p:sldId id="295" r:id="rId4"/>
+    <p:sldId id="690" r:id="rId4"/>
     <p:sldId id="688" r:id="rId5"/>
-    <p:sldId id="275" r:id="rId6"/>
-    <p:sldId id="276" r:id="rId7"/>
+    <p:sldId id="295" r:id="rId6"/>
+    <p:sldId id="275" r:id="rId7"/>
     <p:sldId id="678" r:id="rId8"/>
-    <p:sldId id="672" r:id="rId9"/>
-    <p:sldId id="673" r:id="rId10"/>
-    <p:sldId id="689" r:id="rId11"/>
-    <p:sldId id="260" r:id="rId12"/>
-    <p:sldId id="687" r:id="rId13"/>
-    <p:sldId id="303" r:id="rId14"/>
-    <p:sldId id="679" r:id="rId15"/>
-    <p:sldId id="665" r:id="rId16"/>
-    <p:sldId id="291" r:id="rId17"/>
-    <p:sldId id="281" r:id="rId18"/>
-    <p:sldId id="686" r:id="rId19"/>
-    <p:sldId id="674" r:id="rId20"/>
-    <p:sldId id="676" r:id="rId21"/>
-    <p:sldId id="269" r:id="rId22"/>
-    <p:sldId id="262" r:id="rId23"/>
-    <p:sldId id="664" r:id="rId24"/>
-    <p:sldId id="283" r:id="rId25"/>
-    <p:sldId id="271" r:id="rId26"/>
-    <p:sldId id="683" r:id="rId27"/>
-    <p:sldId id="682" r:id="rId28"/>
-    <p:sldId id="270" r:id="rId29"/>
-    <p:sldId id="284" r:id="rId30"/>
-    <p:sldId id="263" r:id="rId31"/>
-    <p:sldId id="684" r:id="rId32"/>
-    <p:sldId id="677" r:id="rId33"/>
-    <p:sldId id="685" r:id="rId34"/>
-    <p:sldId id="670" r:id="rId35"/>
-    <p:sldId id="671" r:id="rId36"/>
-    <p:sldId id="268" r:id="rId37"/>
+    <p:sldId id="691" r:id="rId9"/>
+    <p:sldId id="689" r:id="rId10"/>
+    <p:sldId id="687" r:id="rId11"/>
+    <p:sldId id="303" r:id="rId12"/>
+    <p:sldId id="679" r:id="rId13"/>
+    <p:sldId id="665" r:id="rId14"/>
+    <p:sldId id="291" r:id="rId15"/>
+    <p:sldId id="281" r:id="rId16"/>
+    <p:sldId id="686" r:id="rId17"/>
+    <p:sldId id="676" r:id="rId18"/>
+    <p:sldId id="269" r:id="rId19"/>
+    <p:sldId id="262" r:id="rId20"/>
+    <p:sldId id="664" r:id="rId21"/>
+    <p:sldId id="283" r:id="rId22"/>
+    <p:sldId id="271" r:id="rId23"/>
+    <p:sldId id="683" r:id="rId24"/>
+    <p:sldId id="682" r:id="rId25"/>
+    <p:sldId id="270" r:id="rId26"/>
+    <p:sldId id="284" r:id="rId27"/>
+    <p:sldId id="263" r:id="rId28"/>
+    <p:sldId id="684" r:id="rId29"/>
+    <p:sldId id="677" r:id="rId30"/>
+    <p:sldId id="685" r:id="rId31"/>
+    <p:sldId id="670" r:id="rId32"/>
+    <p:sldId id="671" r:id="rId33"/>
+    <p:sldId id="693" r:id="rId34"/>
   </p:sldIdLst>
   <p:sldSz cx="12192000" cy="6858000"/>
   <p:notesSz cx="6858000" cy="9144000"/>
@@ -250,7 +247,7 @@
           <a:p>
             <a:fld id="{AD4C2981-5314-425A-941B-9AEDC9FC9FEE}" type="datetimeFigureOut">
               <a:rPr lang="ko-KR" altLang="en-US" smtClean="0"/>
-              <a:t>2024-05-08</a:t>
+              <a:t>2024-05-10</a:t>
             </a:fld>
             <a:endParaRPr lang="ko-KR" altLang="en-US"/>
           </a:p>
@@ -427,7 +424,7 @@
           <a:p>
             <a:fld id="{2EF3F159-7250-4DD4-91C2-13B35D56E1AF}" type="datetimeFigureOut">
               <a:rPr lang="ko-KR" altLang="en-US" smtClean="0"/>
-              <a:t>2024-05-08</a:t>
+              <a:t>2024-05-10</a:t>
             </a:fld>
             <a:endParaRPr lang="ko-KR" altLang="en-US"/>
           </a:p>
@@ -783,13 +780,7 @@
   <p:cSld>
     <p:spTree>
       <p:nvGrpSpPr>
-        <p:cNvPr id="1" name="">
-          <a:extLst>
-            <a:ext uri="{FF2B5EF4-FFF2-40B4-BE49-F238E27FC236}">
-              <a16:creationId xmlns:a16="http://schemas.microsoft.com/office/drawing/2014/main" id="{EE889837-5033-E8CC-A215-EF02DE0D4850}"/>
-            </a:ext>
-          </a:extLst>
-        </p:cNvPr>
+        <p:cNvPr id="1" name=""/>
         <p:cNvGrpSpPr/>
         <p:nvPr/>
       </p:nvGrpSpPr>
@@ -803,13 +794,7 @@
       </p:grpSpPr>
       <p:sp>
         <p:nvSpPr>
-          <p:cNvPr id="2" name="슬라이드 이미지 개체 틀 1">
-            <a:extLst>
-              <a:ext uri="{FF2B5EF4-FFF2-40B4-BE49-F238E27FC236}">
-                <a16:creationId xmlns:a16="http://schemas.microsoft.com/office/drawing/2014/main" id="{ABA24305-7705-D76E-7641-5985CBEB82B0}"/>
-              </a:ext>
-            </a:extLst>
-          </p:cNvPr>
+          <p:cNvPr id="2" name="슬라이드 이미지 개체 틀 1"/>
           <p:cNvSpPr>
             <a:spLocks noGrp="1" noRot="1" noChangeAspect="1"/>
           </p:cNvSpPr>
@@ -821,13 +806,7 @@
       </p:sp>
       <p:sp>
         <p:nvSpPr>
-          <p:cNvPr id="3" name="슬라이드 노트 개체 틀 2">
-            <a:extLst>
-              <a:ext uri="{FF2B5EF4-FFF2-40B4-BE49-F238E27FC236}">
-                <a16:creationId xmlns:a16="http://schemas.microsoft.com/office/drawing/2014/main" id="{1B348CC1-237A-6D67-9854-8DD2CFF59978}"/>
-              </a:ext>
-            </a:extLst>
-          </p:cNvPr>
+          <p:cNvPr id="3" name="슬라이드 노트 개체 틀 2"/>
           <p:cNvSpPr>
             <a:spLocks noGrp="1"/>
           </p:cNvSpPr>
@@ -840,19 +819,37 @@
           <a:bodyPr/>
           <a:lstStyle/>
           <a:p>
-            <a:endParaRPr lang="en-US" altLang="ko-KR" dirty="0"/>
-          </a:p>
-        </p:txBody>
-      </p:sp>
-      <p:sp>
-        <p:nvSpPr>
-          <p:cNvPr id="4" name="슬라이드 번호 개체 틀 3">
-            <a:extLst>
-              <a:ext uri="{FF2B5EF4-FFF2-40B4-BE49-F238E27FC236}">
-                <a16:creationId xmlns:a16="http://schemas.microsoft.com/office/drawing/2014/main" id="{2FA454ED-AA18-8AA3-0D45-94405B3EE498}"/>
-              </a:ext>
-            </a:extLst>
-          </p:cNvPr>
+            <a:r>
+              <a:rPr lang="ko-KR" altLang="en-US" dirty="0"/>
+              <a:t>선생님</a:t>
+            </a:r>
+            <a:r>
+              <a:rPr lang="en-US" altLang="ko-KR" dirty="0"/>
+              <a:t>, </a:t>
+            </a:r>
+            <a:r>
+              <a:rPr lang="ko-KR" altLang="en-US" dirty="0"/>
+              <a:t>강사님 불러도 안가요</a:t>
+            </a:r>
+            <a:r>
+              <a:rPr lang="en-US" altLang="ko-KR" dirty="0"/>
+              <a:t>~~ </a:t>
+            </a:r>
+            <a:r>
+              <a:rPr lang="ko-KR" altLang="en-US" dirty="0" err="1"/>
+              <a:t>크루리더</a:t>
+            </a:r>
+            <a:r>
+              <a:rPr lang="en-US" altLang="ko-KR" dirty="0"/>
+              <a:t>!!</a:t>
+            </a:r>
+            <a:endParaRPr lang="ko-KR" altLang="en-US" dirty="0"/>
+          </a:p>
+        </p:txBody>
+      </p:sp>
+      <p:sp>
+        <p:nvSpPr>
+          <p:cNvPr id="4" name="슬라이드 번호 개체 틀 3"/>
           <p:cNvSpPr>
             <a:spLocks noGrp="1"/>
           </p:cNvSpPr>
@@ -865,9 +862,9 @@
           <a:bodyPr/>
           <a:lstStyle/>
           <a:p>
-            <a:fld id="{E731A1BA-5463-484A-B77A-5C292E222CA2}" type="slidenum">
+            <a:fld id="{C09E5BFC-1559-42F1-8940-AB342D56BF02}" type="slidenum">
               <a:rPr lang="ko-KR" altLang="en-US" smtClean="0"/>
-              <a:t>12</a:t>
+              <a:t>11</a:t>
             </a:fld>
             <a:endParaRPr lang="ko-KR" altLang="en-US"/>
           </a:p>
@@ -876,7 +873,7 @@
     </p:spTree>
     <p:extLst>
       <p:ext uri="{BB962C8B-B14F-4D97-AF65-F5344CB8AC3E}">
-        <p14:creationId xmlns:p14="http://schemas.microsoft.com/office/powerpoint/2010/main" val="981924324"/>
+        <p14:creationId xmlns:p14="http://schemas.microsoft.com/office/powerpoint/2010/main" val="3500864067"/>
       </p:ext>
     </p:extLst>
   </p:cSld>
@@ -930,30 +927,6 @@
           <a:bodyPr/>
           <a:lstStyle/>
           <a:p>
-            <a:r>
-              <a:rPr lang="ko-KR" altLang="en-US" dirty="0"/>
-              <a:t>선생님</a:t>
-            </a:r>
-            <a:r>
-              <a:rPr lang="en-US" altLang="ko-KR" dirty="0"/>
-              <a:t>, </a:t>
-            </a:r>
-            <a:r>
-              <a:rPr lang="ko-KR" altLang="en-US" dirty="0"/>
-              <a:t>강사님 불러도 안가요</a:t>
-            </a:r>
-            <a:r>
-              <a:rPr lang="en-US" altLang="ko-KR" dirty="0"/>
-              <a:t>~~ </a:t>
-            </a:r>
-            <a:r>
-              <a:rPr lang="ko-KR" altLang="en-US" dirty="0" err="1"/>
-              <a:t>크루리더</a:t>
-            </a:r>
-            <a:r>
-              <a:rPr lang="en-US" altLang="ko-KR" dirty="0"/>
-              <a:t>!!</a:t>
-            </a:r>
             <a:endParaRPr lang="ko-KR" altLang="en-US" dirty="0"/>
           </a:p>
         </p:txBody>
@@ -973,9 +946,9 @@
           <a:bodyPr/>
           <a:lstStyle/>
           <a:p>
-            <a:fld id="{C09E5BFC-1559-42F1-8940-AB342D56BF02}" type="slidenum">
+            <a:fld id="{3550FCFC-DEF0-4809-AB35-5DCCCC68A436}" type="slidenum">
               <a:rPr lang="ko-KR" altLang="en-US" smtClean="0"/>
-              <a:t>13</a:t>
+              <a:t>12</a:t>
             </a:fld>
             <a:endParaRPr lang="ko-KR" altLang="en-US"/>
           </a:p>
@@ -984,7 +957,7 @@
     </p:spTree>
     <p:extLst>
       <p:ext uri="{BB962C8B-B14F-4D97-AF65-F5344CB8AC3E}">
-        <p14:creationId xmlns:p14="http://schemas.microsoft.com/office/powerpoint/2010/main" val="3500864067"/>
+        <p14:creationId xmlns:p14="http://schemas.microsoft.com/office/powerpoint/2010/main" val="1742751810"/>
       </p:ext>
     </p:extLst>
   </p:cSld>
@@ -1059,7 +1032,7 @@
           <a:p>
             <a:fld id="{3550FCFC-DEF0-4809-AB35-5DCCCC68A436}" type="slidenum">
               <a:rPr lang="ko-KR" altLang="en-US" smtClean="0"/>
-              <a:t>14</a:t>
+              <a:t>13</a:t>
             </a:fld>
             <a:endParaRPr lang="ko-KR" altLang="en-US"/>
           </a:p>
@@ -1068,7 +1041,7 @@
     </p:spTree>
     <p:extLst>
       <p:ext uri="{BB962C8B-B14F-4D97-AF65-F5344CB8AC3E}">
-        <p14:creationId xmlns:p14="http://schemas.microsoft.com/office/powerpoint/2010/main" val="1742751810"/>
+        <p14:creationId xmlns:p14="http://schemas.microsoft.com/office/powerpoint/2010/main" val="1644858578"/>
       </p:ext>
     </p:extLst>
   </p:cSld>
@@ -1122,7 +1095,52 @@
           <a:bodyPr/>
           <a:lstStyle/>
           <a:p>
-            <a:endParaRPr lang="ko-KR" altLang="en-US" dirty="0"/>
+            <a:r>
+              <a:rPr lang="ko-KR" altLang="en-US" dirty="0" err="1"/>
+              <a:t>코딩오울</a:t>
+            </a:r>
+            <a:r>
+              <a:rPr lang="ko-KR" altLang="en-US" dirty="0"/>
+              <a:t> 소개 </a:t>
+            </a:r>
+            <a:endParaRPr lang="en-US" altLang="ko-KR" dirty="0"/>
+          </a:p>
+          <a:p>
+            <a:pPr marL="171450" indent="-171450">
+              <a:buFont typeface="Wingdings" panose="05000000000000000000" pitchFamily="2" charset="2"/>
+              <a:buChar char="è"/>
+            </a:pPr>
+            <a:r>
+              <a:rPr lang="ko-KR" altLang="en-US" dirty="0" err="1"/>
+              <a:t>마니또</a:t>
+            </a:r>
+            <a:r>
+              <a:rPr lang="ko-KR" altLang="en-US" dirty="0"/>
+              <a:t> 설명 및 종이 배부</a:t>
+            </a:r>
+            <a:endParaRPr lang="en-US" altLang="ko-KR" dirty="0"/>
+          </a:p>
+          <a:p>
+            <a:pPr marL="171450" indent="-171450">
+              <a:buFont typeface="Wingdings" panose="05000000000000000000" pitchFamily="2" charset="2"/>
+              <a:buChar char="è"/>
+            </a:pPr>
+            <a:r>
+              <a:rPr lang="ko-KR" altLang="en-US" dirty="0"/>
+              <a:t>크루 자기소개</a:t>
+            </a:r>
+            <a:endParaRPr lang="en-US" altLang="ko-KR" dirty="0"/>
+          </a:p>
+          <a:p>
+            <a:pPr marL="171450" indent="-171450">
+              <a:buFont typeface="Wingdings" panose="05000000000000000000" pitchFamily="2" charset="2"/>
+              <a:buChar char="è"/>
+            </a:pPr>
+            <a:r>
+              <a:rPr lang="ko-KR" altLang="en-US" dirty="0"/>
+              <a:t>빙고 게임 </a:t>
+            </a:r>
+            <a:endParaRPr lang="en-US" altLang="ko-KR" dirty="0"/>
           </a:p>
         </p:txBody>
       </p:sp>
@@ -1141,9 +1159,9 @@
           <a:bodyPr/>
           <a:lstStyle/>
           <a:p>
-            <a:fld id="{3550FCFC-DEF0-4809-AB35-5DCCCC68A436}" type="slidenum">
+            <a:fld id="{E731A1BA-5463-484A-B77A-5C292E222CA2}" type="slidenum">
               <a:rPr lang="ko-KR" altLang="en-US" smtClean="0"/>
-              <a:t>15</a:t>
+              <a:t>14</a:t>
             </a:fld>
             <a:endParaRPr lang="ko-KR" altLang="en-US"/>
           </a:p>
@@ -1152,7 +1170,7 @@
     </p:spTree>
     <p:extLst>
       <p:ext uri="{BB962C8B-B14F-4D97-AF65-F5344CB8AC3E}">
-        <p14:creationId xmlns:p14="http://schemas.microsoft.com/office/powerpoint/2010/main" val="1644858578"/>
+        <p14:creationId xmlns:p14="http://schemas.microsoft.com/office/powerpoint/2010/main" val="3238105207"/>
       </p:ext>
     </p:extLst>
   </p:cSld>
@@ -1207,135 +1225,6 @@
           <a:lstStyle/>
           <a:p>
             <a:r>
-              <a:rPr lang="ko-KR" altLang="en-US" dirty="0" err="1"/>
-              <a:t>코딩오울</a:t>
-            </a:r>
-            <a:r>
-              <a:rPr lang="ko-KR" altLang="en-US" dirty="0"/>
-              <a:t> 소개 </a:t>
-            </a:r>
-            <a:endParaRPr lang="en-US" altLang="ko-KR" dirty="0"/>
-          </a:p>
-          <a:p>
-            <a:pPr marL="171450" indent="-171450">
-              <a:buFont typeface="Wingdings" panose="05000000000000000000" pitchFamily="2" charset="2"/>
-              <a:buChar char="è"/>
-            </a:pPr>
-            <a:r>
-              <a:rPr lang="ko-KR" altLang="en-US" dirty="0" err="1"/>
-              <a:t>마니또</a:t>
-            </a:r>
-            <a:r>
-              <a:rPr lang="ko-KR" altLang="en-US" dirty="0"/>
-              <a:t> 설명 및 종이 배부</a:t>
-            </a:r>
-            <a:endParaRPr lang="en-US" altLang="ko-KR" dirty="0"/>
-          </a:p>
-          <a:p>
-            <a:pPr marL="171450" indent="-171450">
-              <a:buFont typeface="Wingdings" panose="05000000000000000000" pitchFamily="2" charset="2"/>
-              <a:buChar char="è"/>
-            </a:pPr>
-            <a:r>
-              <a:rPr lang="ko-KR" altLang="en-US" dirty="0"/>
-              <a:t>크루 자기소개</a:t>
-            </a:r>
-            <a:endParaRPr lang="en-US" altLang="ko-KR" dirty="0"/>
-          </a:p>
-          <a:p>
-            <a:pPr marL="171450" indent="-171450">
-              <a:buFont typeface="Wingdings" panose="05000000000000000000" pitchFamily="2" charset="2"/>
-              <a:buChar char="è"/>
-            </a:pPr>
-            <a:r>
-              <a:rPr lang="ko-KR" altLang="en-US" dirty="0"/>
-              <a:t>빙고 게임 </a:t>
-            </a:r>
-            <a:endParaRPr lang="en-US" altLang="ko-KR" dirty="0"/>
-          </a:p>
-        </p:txBody>
-      </p:sp>
-      <p:sp>
-        <p:nvSpPr>
-          <p:cNvPr id="4" name="슬라이드 번호 개체 틀 3"/>
-          <p:cNvSpPr>
-            <a:spLocks noGrp="1"/>
-          </p:cNvSpPr>
-          <p:nvPr>
-            <p:ph type="sldNum" sz="quarter" idx="5"/>
-          </p:nvPr>
-        </p:nvSpPr>
-        <p:spPr/>
-        <p:txBody>
-          <a:bodyPr/>
-          <a:lstStyle/>
-          <a:p>
-            <a:fld id="{E731A1BA-5463-484A-B77A-5C292E222CA2}" type="slidenum">
-              <a:rPr lang="ko-KR" altLang="en-US" smtClean="0"/>
-              <a:t>16</a:t>
-            </a:fld>
-            <a:endParaRPr lang="ko-KR" altLang="en-US"/>
-          </a:p>
-        </p:txBody>
-      </p:sp>
-    </p:spTree>
-    <p:extLst>
-      <p:ext uri="{BB962C8B-B14F-4D97-AF65-F5344CB8AC3E}">
-        <p14:creationId xmlns:p14="http://schemas.microsoft.com/office/powerpoint/2010/main" val="3238105207"/>
-      </p:ext>
-    </p:extLst>
-  </p:cSld>
-  <p:clrMapOvr>
-    <a:masterClrMapping/>
-  </p:clrMapOvr>
-</p:notes>
-</file>
-
-<file path=ppt/notesSlides/notesSlide15.xml><?xml version="1.0" encoding="utf-8"?>
-<p:notes xmlns:a="http://schemas.openxmlformats.org/drawingml/2006/main" xmlns:r="http://schemas.openxmlformats.org/officeDocument/2006/relationships" xmlns:p="http://schemas.openxmlformats.org/presentationml/2006/main">
-  <p:cSld>
-    <p:spTree>
-      <p:nvGrpSpPr>
-        <p:cNvPr id="1" name=""/>
-        <p:cNvGrpSpPr/>
-        <p:nvPr/>
-      </p:nvGrpSpPr>
-      <p:grpSpPr>
-        <a:xfrm>
-          <a:off x="0" y="0"/>
-          <a:ext cx="0" cy="0"/>
-          <a:chOff x="0" y="0"/>
-          <a:chExt cx="0" cy="0"/>
-        </a:xfrm>
-      </p:grpSpPr>
-      <p:sp>
-        <p:nvSpPr>
-          <p:cNvPr id="2" name="슬라이드 이미지 개체 틀 1"/>
-          <p:cNvSpPr>
-            <a:spLocks noGrp="1" noRot="1" noChangeAspect="1"/>
-          </p:cNvSpPr>
-          <p:nvPr>
-            <p:ph type="sldImg"/>
-          </p:nvPr>
-        </p:nvSpPr>
-        <p:spPr/>
-      </p:sp>
-      <p:sp>
-        <p:nvSpPr>
-          <p:cNvPr id="3" name="슬라이드 노트 개체 틀 2"/>
-          <p:cNvSpPr>
-            <a:spLocks noGrp="1"/>
-          </p:cNvSpPr>
-          <p:nvPr>
-            <p:ph type="body" idx="1"/>
-          </p:nvPr>
-        </p:nvSpPr>
-        <p:spPr/>
-        <p:txBody>
-          <a:bodyPr/>
-          <a:lstStyle/>
-          <a:p>
-            <a:r>
               <a:rPr lang="ko-KR" altLang="en-US" dirty="0"/>
               <a:t>한 명 지목 후 크루가 타 크루 랜덤 지목</a:t>
             </a:r>
@@ -1359,7 +1248,7 @@
           <a:p>
             <a:fld id="{3550FCFC-DEF0-4809-AB35-5DCCCC68A436}" type="slidenum">
               <a:rPr lang="ko-KR" altLang="en-US" smtClean="0"/>
-              <a:t>17</a:t>
+              <a:t>15</a:t>
             </a:fld>
             <a:endParaRPr lang="ko-KR" altLang="en-US"/>
           </a:p>
@@ -1378,7 +1267,7 @@
 </p:notes>
 </file>
 
-<file path=ppt/notesSlides/notesSlide16.xml><?xml version="1.0" encoding="utf-8"?>
+<file path=ppt/notesSlides/notesSlide15.xml><?xml version="1.0" encoding="utf-8"?>
 <p:notes xmlns:a="http://schemas.openxmlformats.org/drawingml/2006/main" xmlns:r="http://schemas.openxmlformats.org/officeDocument/2006/relationships" xmlns:p="http://schemas.openxmlformats.org/presentationml/2006/main">
   <p:cSld>
     <p:spTree>
@@ -1467,7 +1356,7 @@
           <a:p>
             <a:fld id="{E731A1BA-5463-484A-B77A-5C292E222CA2}" type="slidenum">
               <a:rPr lang="ko-KR" altLang="en-US" smtClean="0"/>
-              <a:t>18</a:t>
+              <a:t>16</a:t>
             </a:fld>
             <a:endParaRPr lang="ko-KR" altLang="en-US"/>
           </a:p>
@@ -1477,6 +1366,90 @@
     <p:extLst>
       <p:ext uri="{BB962C8B-B14F-4D97-AF65-F5344CB8AC3E}">
         <p14:creationId xmlns:p14="http://schemas.microsoft.com/office/powerpoint/2010/main" val="2583816745"/>
+      </p:ext>
+    </p:extLst>
+  </p:cSld>
+  <p:clrMapOvr>
+    <a:masterClrMapping/>
+  </p:clrMapOvr>
+</p:notes>
+</file>
+
+<file path=ppt/notesSlides/notesSlide16.xml><?xml version="1.0" encoding="utf-8"?>
+<p:notes xmlns:a="http://schemas.openxmlformats.org/drawingml/2006/main" xmlns:r="http://schemas.openxmlformats.org/officeDocument/2006/relationships" xmlns:p="http://schemas.openxmlformats.org/presentationml/2006/main">
+  <p:cSld>
+    <p:spTree>
+      <p:nvGrpSpPr>
+        <p:cNvPr id="1" name=""/>
+        <p:cNvGrpSpPr/>
+        <p:nvPr/>
+      </p:nvGrpSpPr>
+      <p:grpSpPr>
+        <a:xfrm>
+          <a:off x="0" y="0"/>
+          <a:ext cx="0" cy="0"/>
+          <a:chOff x="0" y="0"/>
+          <a:chExt cx="0" cy="0"/>
+        </a:xfrm>
+      </p:grpSpPr>
+      <p:sp>
+        <p:nvSpPr>
+          <p:cNvPr id="2" name="슬라이드 이미지 개체 틀 1"/>
+          <p:cNvSpPr>
+            <a:spLocks noGrp="1" noRot="1" noChangeAspect="1"/>
+          </p:cNvSpPr>
+          <p:nvPr>
+            <p:ph type="sldImg"/>
+          </p:nvPr>
+        </p:nvSpPr>
+        <p:spPr/>
+      </p:sp>
+      <p:sp>
+        <p:nvSpPr>
+          <p:cNvPr id="3" name="슬라이드 노트 개체 틀 2"/>
+          <p:cNvSpPr>
+            <a:spLocks noGrp="1"/>
+          </p:cNvSpPr>
+          <p:nvPr>
+            <p:ph type="body" idx="1"/>
+          </p:nvPr>
+        </p:nvSpPr>
+        <p:spPr/>
+        <p:txBody>
+          <a:bodyPr/>
+          <a:lstStyle/>
+          <a:p>
+            <a:endParaRPr lang="ko-KR" altLang="en-US" dirty="0"/>
+          </a:p>
+        </p:txBody>
+      </p:sp>
+      <p:sp>
+        <p:nvSpPr>
+          <p:cNvPr id="4" name="슬라이드 번호 개체 틀 3"/>
+          <p:cNvSpPr>
+            <a:spLocks noGrp="1"/>
+          </p:cNvSpPr>
+          <p:nvPr>
+            <p:ph type="sldNum" sz="quarter" idx="5"/>
+          </p:nvPr>
+        </p:nvSpPr>
+        <p:spPr/>
+        <p:txBody>
+          <a:bodyPr/>
+          <a:lstStyle/>
+          <a:p>
+            <a:fld id="{C09E5BFC-1559-42F1-8940-AB342D56BF02}" type="slidenum">
+              <a:rPr lang="ko-KR" altLang="en-US" smtClean="0"/>
+              <a:t>19</a:t>
+            </a:fld>
+            <a:endParaRPr lang="ko-KR" altLang="en-US"/>
+          </a:p>
+        </p:txBody>
+      </p:sp>
+    </p:spTree>
+    <p:extLst>
+      <p:ext uri="{BB962C8B-B14F-4D97-AF65-F5344CB8AC3E}">
+        <p14:creationId xmlns:p14="http://schemas.microsoft.com/office/powerpoint/2010/main" val="2367117523"/>
       </p:ext>
     </p:extLst>
   </p:cSld>
@@ -1551,7 +1524,7 @@
           <a:p>
             <a:fld id="{C09E5BFC-1559-42F1-8940-AB342D56BF02}" type="slidenum">
               <a:rPr lang="ko-KR" altLang="en-US" smtClean="0"/>
-              <a:t>22</a:t>
+              <a:t>20</a:t>
             </a:fld>
             <a:endParaRPr lang="ko-KR" altLang="en-US"/>
           </a:p>
@@ -1560,7 +1533,7 @@
     </p:spTree>
     <p:extLst>
       <p:ext uri="{BB962C8B-B14F-4D97-AF65-F5344CB8AC3E}">
-        <p14:creationId xmlns:p14="http://schemas.microsoft.com/office/powerpoint/2010/main" val="2367117523"/>
+        <p14:creationId xmlns:p14="http://schemas.microsoft.com/office/powerpoint/2010/main" val="2256288870"/>
       </p:ext>
     </p:extLst>
   </p:cSld>
@@ -1635,7 +1608,7 @@
           <a:p>
             <a:fld id="{C09E5BFC-1559-42F1-8940-AB342D56BF02}" type="slidenum">
               <a:rPr lang="ko-KR" altLang="en-US" smtClean="0"/>
-              <a:t>23</a:t>
+              <a:t>21</a:t>
             </a:fld>
             <a:endParaRPr lang="ko-KR" altLang="en-US"/>
           </a:p>
@@ -1644,7 +1617,7 @@
     </p:spTree>
     <p:extLst>
       <p:ext uri="{BB962C8B-B14F-4D97-AF65-F5344CB8AC3E}">
-        <p14:creationId xmlns:p14="http://schemas.microsoft.com/office/powerpoint/2010/main" val="2256288870"/>
+        <p14:creationId xmlns:p14="http://schemas.microsoft.com/office/powerpoint/2010/main" val="3721176523"/>
       </p:ext>
     </p:extLst>
   </p:cSld>
@@ -1719,7 +1692,7 @@
           <a:p>
             <a:fld id="{C09E5BFC-1559-42F1-8940-AB342D56BF02}" type="slidenum">
               <a:rPr lang="ko-KR" altLang="en-US" smtClean="0"/>
-              <a:t>24</a:t>
+              <a:t>22</a:t>
             </a:fld>
             <a:endParaRPr lang="ko-KR" altLang="en-US"/>
           </a:p>
@@ -1728,7 +1701,7 @@
     </p:spTree>
     <p:extLst>
       <p:ext uri="{BB962C8B-B14F-4D97-AF65-F5344CB8AC3E}">
-        <p14:creationId xmlns:p14="http://schemas.microsoft.com/office/powerpoint/2010/main" val="3721176523"/>
+        <p14:creationId xmlns:p14="http://schemas.microsoft.com/office/powerpoint/2010/main" val="845693474"/>
       </p:ext>
     </p:extLst>
   </p:cSld>
@@ -1782,7 +1755,10 @@
           <a:bodyPr/>
           <a:lstStyle/>
           <a:p>
-            <a:endParaRPr lang="ko-KR" altLang="en-US" dirty="0"/>
+            <a:r>
+              <a:rPr lang="ko-KR" altLang="en-US" dirty="0"/>
+              <a:t>과정 소개</a:t>
+            </a:r>
           </a:p>
         </p:txBody>
       </p:sp>
@@ -1823,90 +1799,6 @@
 </file>
 
 <file path=ppt/notesSlides/notesSlide20.xml><?xml version="1.0" encoding="utf-8"?>
-<p:notes xmlns:a="http://schemas.openxmlformats.org/drawingml/2006/main" xmlns:r="http://schemas.openxmlformats.org/officeDocument/2006/relationships" xmlns:p="http://schemas.openxmlformats.org/presentationml/2006/main">
-  <p:cSld>
-    <p:spTree>
-      <p:nvGrpSpPr>
-        <p:cNvPr id="1" name=""/>
-        <p:cNvGrpSpPr/>
-        <p:nvPr/>
-      </p:nvGrpSpPr>
-      <p:grpSpPr>
-        <a:xfrm>
-          <a:off x="0" y="0"/>
-          <a:ext cx="0" cy="0"/>
-          <a:chOff x="0" y="0"/>
-          <a:chExt cx="0" cy="0"/>
-        </a:xfrm>
-      </p:grpSpPr>
-      <p:sp>
-        <p:nvSpPr>
-          <p:cNvPr id="2" name="슬라이드 이미지 개체 틀 1"/>
-          <p:cNvSpPr>
-            <a:spLocks noGrp="1" noRot="1" noChangeAspect="1"/>
-          </p:cNvSpPr>
-          <p:nvPr>
-            <p:ph type="sldImg"/>
-          </p:nvPr>
-        </p:nvSpPr>
-        <p:spPr/>
-      </p:sp>
-      <p:sp>
-        <p:nvSpPr>
-          <p:cNvPr id="3" name="슬라이드 노트 개체 틀 2"/>
-          <p:cNvSpPr>
-            <a:spLocks noGrp="1"/>
-          </p:cNvSpPr>
-          <p:nvPr>
-            <p:ph type="body" idx="1"/>
-          </p:nvPr>
-        </p:nvSpPr>
-        <p:spPr/>
-        <p:txBody>
-          <a:bodyPr/>
-          <a:lstStyle/>
-          <a:p>
-            <a:endParaRPr lang="ko-KR" altLang="en-US" dirty="0"/>
-          </a:p>
-        </p:txBody>
-      </p:sp>
-      <p:sp>
-        <p:nvSpPr>
-          <p:cNvPr id="4" name="슬라이드 번호 개체 틀 3"/>
-          <p:cNvSpPr>
-            <a:spLocks noGrp="1"/>
-          </p:cNvSpPr>
-          <p:nvPr>
-            <p:ph type="sldNum" sz="quarter" idx="5"/>
-          </p:nvPr>
-        </p:nvSpPr>
-        <p:spPr/>
-        <p:txBody>
-          <a:bodyPr/>
-          <a:lstStyle/>
-          <a:p>
-            <a:fld id="{C09E5BFC-1559-42F1-8940-AB342D56BF02}" type="slidenum">
-              <a:rPr lang="ko-KR" altLang="en-US" smtClean="0"/>
-              <a:t>25</a:t>
-            </a:fld>
-            <a:endParaRPr lang="ko-KR" altLang="en-US"/>
-          </a:p>
-        </p:txBody>
-      </p:sp>
-    </p:spTree>
-    <p:extLst>
-      <p:ext uri="{BB962C8B-B14F-4D97-AF65-F5344CB8AC3E}">
-        <p14:creationId xmlns:p14="http://schemas.microsoft.com/office/powerpoint/2010/main" val="845693474"/>
-      </p:ext>
-    </p:extLst>
-  </p:cSld>
-  <p:clrMapOvr>
-    <a:masterClrMapping/>
-  </p:clrMapOvr>
-</p:notes>
-</file>
-
-<file path=ppt/notesSlides/notesSlide21.xml><?xml version="1.0" encoding="utf-8"?>
 <p:notes xmlns:a="http://schemas.openxmlformats.org/drawingml/2006/main" xmlns:r="http://schemas.openxmlformats.org/officeDocument/2006/relationships" xmlns:p="http://schemas.openxmlformats.org/presentationml/2006/main">
   <p:cSld>
     <p:spTree>
@@ -2048,7 +1940,7 @@
           <a:p>
             <a:fld id="{C09E5BFC-1559-42F1-8940-AB342D56BF02}" type="slidenum">
               <a:rPr lang="ko-KR" altLang="en-US" smtClean="0"/>
-              <a:t>27</a:t>
+              <a:t>24</a:t>
             </a:fld>
             <a:endParaRPr lang="ko-KR" altLang="en-US"/>
           </a:p>
@@ -2058,6 +1950,90 @@
     <p:extLst>
       <p:ext uri="{BB962C8B-B14F-4D97-AF65-F5344CB8AC3E}">
         <p14:creationId xmlns:p14="http://schemas.microsoft.com/office/powerpoint/2010/main" val="540481338"/>
+      </p:ext>
+    </p:extLst>
+  </p:cSld>
+  <p:clrMapOvr>
+    <a:masterClrMapping/>
+  </p:clrMapOvr>
+</p:notes>
+</file>
+
+<file path=ppt/notesSlides/notesSlide21.xml><?xml version="1.0" encoding="utf-8"?>
+<p:notes xmlns:a="http://schemas.openxmlformats.org/drawingml/2006/main" xmlns:r="http://schemas.openxmlformats.org/officeDocument/2006/relationships" xmlns:p="http://schemas.openxmlformats.org/presentationml/2006/main">
+  <p:cSld>
+    <p:spTree>
+      <p:nvGrpSpPr>
+        <p:cNvPr id="1" name=""/>
+        <p:cNvGrpSpPr/>
+        <p:nvPr/>
+      </p:nvGrpSpPr>
+      <p:grpSpPr>
+        <a:xfrm>
+          <a:off x="0" y="0"/>
+          <a:ext cx="0" cy="0"/>
+          <a:chOff x="0" y="0"/>
+          <a:chExt cx="0" cy="0"/>
+        </a:xfrm>
+      </p:grpSpPr>
+      <p:sp>
+        <p:nvSpPr>
+          <p:cNvPr id="2" name="슬라이드 이미지 개체 틀 1"/>
+          <p:cNvSpPr>
+            <a:spLocks noGrp="1" noRot="1" noChangeAspect="1"/>
+          </p:cNvSpPr>
+          <p:nvPr>
+            <p:ph type="sldImg"/>
+          </p:nvPr>
+        </p:nvSpPr>
+        <p:spPr/>
+      </p:sp>
+      <p:sp>
+        <p:nvSpPr>
+          <p:cNvPr id="3" name="슬라이드 노트 개체 틀 2"/>
+          <p:cNvSpPr>
+            <a:spLocks noGrp="1"/>
+          </p:cNvSpPr>
+          <p:nvPr>
+            <p:ph type="body" idx="1"/>
+          </p:nvPr>
+        </p:nvSpPr>
+        <p:spPr/>
+        <p:txBody>
+          <a:bodyPr/>
+          <a:lstStyle/>
+          <a:p>
+            <a:endParaRPr lang="ko-KR" altLang="en-US" dirty="0"/>
+          </a:p>
+        </p:txBody>
+      </p:sp>
+      <p:sp>
+        <p:nvSpPr>
+          <p:cNvPr id="4" name="슬라이드 번호 개체 틀 3"/>
+          <p:cNvSpPr>
+            <a:spLocks noGrp="1"/>
+          </p:cNvSpPr>
+          <p:nvPr>
+            <p:ph type="sldNum" sz="quarter" idx="5"/>
+          </p:nvPr>
+        </p:nvSpPr>
+        <p:spPr/>
+        <p:txBody>
+          <a:bodyPr/>
+          <a:lstStyle/>
+          <a:p>
+            <a:fld id="{C09E5BFC-1559-42F1-8940-AB342D56BF02}" type="slidenum">
+              <a:rPr lang="ko-KR" altLang="en-US" smtClean="0"/>
+              <a:t>27</a:t>
+            </a:fld>
+            <a:endParaRPr lang="ko-KR" altLang="en-US"/>
+          </a:p>
+        </p:txBody>
+      </p:sp>
+    </p:spTree>
+    <p:extLst>
+      <p:ext uri="{BB962C8B-B14F-4D97-AF65-F5344CB8AC3E}">
+        <p14:creationId xmlns:p14="http://schemas.microsoft.com/office/powerpoint/2010/main" val="372157867"/>
       </p:ext>
     </p:extLst>
   </p:cSld>
@@ -2132,7 +2108,7 @@
           <a:p>
             <a:fld id="{C09E5BFC-1559-42F1-8940-AB342D56BF02}" type="slidenum">
               <a:rPr lang="ko-KR" altLang="en-US" smtClean="0"/>
-              <a:t>30</a:t>
+              <a:t>28</a:t>
             </a:fld>
             <a:endParaRPr lang="ko-KR" altLang="en-US"/>
           </a:p>
@@ -2141,7 +2117,7 @@
     </p:spTree>
     <p:extLst>
       <p:ext uri="{BB962C8B-B14F-4D97-AF65-F5344CB8AC3E}">
-        <p14:creationId xmlns:p14="http://schemas.microsoft.com/office/powerpoint/2010/main" val="372157867"/>
+        <p14:creationId xmlns:p14="http://schemas.microsoft.com/office/powerpoint/2010/main" val="2128179871"/>
       </p:ext>
     </p:extLst>
   </p:cSld>
@@ -2225,7 +2201,7 @@
     </p:spTree>
     <p:extLst>
       <p:ext uri="{BB962C8B-B14F-4D97-AF65-F5344CB8AC3E}">
-        <p14:creationId xmlns:p14="http://schemas.microsoft.com/office/powerpoint/2010/main" val="2128179871"/>
+        <p14:creationId xmlns:p14="http://schemas.microsoft.com/office/powerpoint/2010/main" val="4278536765"/>
       </p:ext>
     </p:extLst>
   </p:cSld>
@@ -2300,91 +2276,7 @@
           <a:p>
             <a:fld id="{C09E5BFC-1559-42F1-8940-AB342D56BF02}" type="slidenum">
               <a:rPr lang="ko-KR" altLang="en-US" smtClean="0"/>
-              <a:t>34</a:t>
-            </a:fld>
-            <a:endParaRPr lang="ko-KR" altLang="en-US"/>
-          </a:p>
-        </p:txBody>
-      </p:sp>
-    </p:spTree>
-    <p:extLst>
-      <p:ext uri="{BB962C8B-B14F-4D97-AF65-F5344CB8AC3E}">
-        <p14:creationId xmlns:p14="http://schemas.microsoft.com/office/powerpoint/2010/main" val="4278536765"/>
-      </p:ext>
-    </p:extLst>
-  </p:cSld>
-  <p:clrMapOvr>
-    <a:masterClrMapping/>
-  </p:clrMapOvr>
-</p:notes>
-</file>
-
-<file path=ppt/notesSlides/notesSlide25.xml><?xml version="1.0" encoding="utf-8"?>
-<p:notes xmlns:a="http://schemas.openxmlformats.org/drawingml/2006/main" xmlns:r="http://schemas.openxmlformats.org/officeDocument/2006/relationships" xmlns:p="http://schemas.openxmlformats.org/presentationml/2006/main">
-  <p:cSld>
-    <p:spTree>
-      <p:nvGrpSpPr>
-        <p:cNvPr id="1" name=""/>
-        <p:cNvGrpSpPr/>
-        <p:nvPr/>
-      </p:nvGrpSpPr>
-      <p:grpSpPr>
-        <a:xfrm>
-          <a:off x="0" y="0"/>
-          <a:ext cx="0" cy="0"/>
-          <a:chOff x="0" y="0"/>
-          <a:chExt cx="0" cy="0"/>
-        </a:xfrm>
-      </p:grpSpPr>
-      <p:sp>
-        <p:nvSpPr>
-          <p:cNvPr id="2" name="슬라이드 이미지 개체 틀 1"/>
-          <p:cNvSpPr>
-            <a:spLocks noGrp="1" noRot="1" noChangeAspect="1"/>
-          </p:cNvSpPr>
-          <p:nvPr>
-            <p:ph type="sldImg"/>
-          </p:nvPr>
-        </p:nvSpPr>
-        <p:spPr/>
-      </p:sp>
-      <p:sp>
-        <p:nvSpPr>
-          <p:cNvPr id="3" name="슬라이드 노트 개체 틀 2"/>
-          <p:cNvSpPr>
-            <a:spLocks noGrp="1"/>
-          </p:cNvSpPr>
-          <p:nvPr>
-            <p:ph type="body" idx="1"/>
-          </p:nvPr>
-        </p:nvSpPr>
-        <p:spPr/>
-        <p:txBody>
-          <a:bodyPr/>
-          <a:lstStyle/>
-          <a:p>
-            <a:endParaRPr lang="ko-KR" altLang="en-US" dirty="0"/>
-          </a:p>
-        </p:txBody>
-      </p:sp>
-      <p:sp>
-        <p:nvSpPr>
-          <p:cNvPr id="4" name="슬라이드 번호 개체 틀 3"/>
-          <p:cNvSpPr>
-            <a:spLocks noGrp="1"/>
-          </p:cNvSpPr>
-          <p:nvPr>
-            <p:ph type="sldNum" sz="quarter" idx="5"/>
-          </p:nvPr>
-        </p:nvSpPr>
-        <p:spPr/>
-        <p:txBody>
-          <a:bodyPr/>
-          <a:lstStyle/>
-          <a:p>
-            <a:fld id="{C09E5BFC-1559-42F1-8940-AB342D56BF02}" type="slidenum">
-              <a:rPr lang="ko-KR" altLang="en-US" smtClean="0"/>
-              <a:t>35</a:t>
+              <a:t>32</a:t>
             </a:fld>
             <a:endParaRPr lang="ko-KR" altLang="en-US"/>
           </a:p>
@@ -2394,90 +2286,6 @@
     <p:extLst>
       <p:ext uri="{BB962C8B-B14F-4D97-AF65-F5344CB8AC3E}">
         <p14:creationId xmlns:p14="http://schemas.microsoft.com/office/powerpoint/2010/main" val="660201451"/>
-      </p:ext>
-    </p:extLst>
-  </p:cSld>
-  <p:clrMapOvr>
-    <a:masterClrMapping/>
-  </p:clrMapOvr>
-</p:notes>
-</file>
-
-<file path=ppt/notesSlides/notesSlide26.xml><?xml version="1.0" encoding="utf-8"?>
-<p:notes xmlns:a="http://schemas.openxmlformats.org/drawingml/2006/main" xmlns:r="http://schemas.openxmlformats.org/officeDocument/2006/relationships" xmlns:p="http://schemas.openxmlformats.org/presentationml/2006/main">
-  <p:cSld>
-    <p:spTree>
-      <p:nvGrpSpPr>
-        <p:cNvPr id="1" name=""/>
-        <p:cNvGrpSpPr/>
-        <p:nvPr/>
-      </p:nvGrpSpPr>
-      <p:grpSpPr>
-        <a:xfrm>
-          <a:off x="0" y="0"/>
-          <a:ext cx="0" cy="0"/>
-          <a:chOff x="0" y="0"/>
-          <a:chExt cx="0" cy="0"/>
-        </a:xfrm>
-      </p:grpSpPr>
-      <p:sp>
-        <p:nvSpPr>
-          <p:cNvPr id="2" name="슬라이드 이미지 개체 틀 1"/>
-          <p:cNvSpPr>
-            <a:spLocks noGrp="1" noRot="1" noChangeAspect="1"/>
-          </p:cNvSpPr>
-          <p:nvPr>
-            <p:ph type="sldImg"/>
-          </p:nvPr>
-        </p:nvSpPr>
-        <p:spPr/>
-      </p:sp>
-      <p:sp>
-        <p:nvSpPr>
-          <p:cNvPr id="3" name="슬라이드 노트 개체 틀 2"/>
-          <p:cNvSpPr>
-            <a:spLocks noGrp="1"/>
-          </p:cNvSpPr>
-          <p:nvPr>
-            <p:ph type="body" idx="1"/>
-          </p:nvPr>
-        </p:nvSpPr>
-        <p:spPr/>
-        <p:txBody>
-          <a:bodyPr/>
-          <a:lstStyle/>
-          <a:p>
-            <a:endParaRPr lang="ko-KR" altLang="en-US" dirty="0"/>
-          </a:p>
-        </p:txBody>
-      </p:sp>
-      <p:sp>
-        <p:nvSpPr>
-          <p:cNvPr id="4" name="슬라이드 번호 개체 틀 3"/>
-          <p:cNvSpPr>
-            <a:spLocks noGrp="1"/>
-          </p:cNvSpPr>
-          <p:nvPr>
-            <p:ph type="sldNum" sz="quarter" idx="5"/>
-          </p:nvPr>
-        </p:nvSpPr>
-        <p:spPr/>
-        <p:txBody>
-          <a:bodyPr/>
-          <a:lstStyle/>
-          <a:p>
-            <a:fld id="{C09E5BFC-1559-42F1-8940-AB342D56BF02}" type="slidenum">
-              <a:rPr lang="ko-KR" altLang="en-US" smtClean="0"/>
-              <a:t>36</a:t>
-            </a:fld>
-            <a:endParaRPr lang="ko-KR" altLang="en-US"/>
-          </a:p>
-        </p:txBody>
-      </p:sp>
-    </p:spTree>
-    <p:extLst>
-      <p:ext uri="{BB962C8B-B14F-4D97-AF65-F5344CB8AC3E}">
-        <p14:creationId xmlns:p14="http://schemas.microsoft.com/office/powerpoint/2010/main" val="2038089841"/>
       </p:ext>
     </p:extLst>
   </p:cSld>
@@ -2531,271 +2339,39 @@
           <a:bodyPr/>
           <a:lstStyle/>
           <a:p>
-            <a:pPr>
-              <a:buFont typeface="Arial" panose="020B0604020202020204" pitchFamily="34" charset="0"/>
+            <a:pPr marL="0" marR="0" lvl="0" indent="0" algn="l" defTabSz="914400" rtl="0" eaLnBrk="1" fontAlgn="auto" latinLnBrk="1" hangingPunct="1">
+              <a:lnSpc>
+                <a:spcPct val="100000"/>
+              </a:lnSpc>
+              <a:spcBef>
+                <a:spcPts val="0"/>
+              </a:spcBef>
+              <a:spcAft>
+                <a:spcPts val="0"/>
+              </a:spcAft>
+              <a:buClrTx/>
+              <a:buSzTx/>
+              <a:buFontTx/>
               <a:buNone/>
+              <a:tabLst/>
+              <a:defRPr/>
             </a:pPr>
             <a:r>
               <a:rPr lang="ko-KR" altLang="en-US" dirty="0"/>
-              <a:t>이렇게 일단은 계획 중</a:t>
+              <a:t>후기 보셨나요</a:t>
             </a:r>
             <a:r>
               <a:rPr lang="en-US" altLang="ko-KR" dirty="0"/>
-              <a:t>~</a:t>
-            </a:r>
-          </a:p>
-          <a:p>
-            <a:pPr>
-              <a:buFont typeface="Arial" panose="020B0604020202020204" pitchFamily="34" charset="0"/>
-              <a:buNone/>
-            </a:pPr>
-            <a:endParaRPr lang="en-US" altLang="ko-KR" dirty="0"/>
-          </a:p>
-          <a:p>
-            <a:pPr>
-              <a:buFont typeface="Arial" panose="020B0604020202020204" pitchFamily="34" charset="0"/>
-              <a:buChar char="•"/>
-            </a:pPr>
-            <a:r>
-              <a:rPr lang="en-US" altLang="ko-KR" dirty="0"/>
-              <a:t>1</a:t>
+              <a:t>? </a:t>
             </a:r>
             <a:r>
               <a:rPr lang="ko-KR" altLang="en-US" dirty="0"/>
-              <a:t>대 </a:t>
-            </a:r>
-            <a:r>
-              <a:rPr lang="en-US" altLang="ko-KR" dirty="0"/>
-              <a:t>1 </a:t>
-            </a:r>
-            <a:r>
-              <a:rPr lang="ko-KR" altLang="en-US" dirty="0"/>
-              <a:t>개별 컨설팅이나 취업 연계를 통해 여러분들이 모두 취</a:t>
-            </a:r>
-            <a:r>
-              <a:rPr lang="en-US" altLang="ko-KR" dirty="0"/>
-              <a:t>/</a:t>
-            </a:r>
-            <a:r>
-              <a:rPr lang="ko-KR" altLang="en-US" dirty="0"/>
-              <a:t>창업에 성공할 수 있도록 도움을 드릴 것이다</a:t>
-            </a:r>
-            <a:r>
-              <a:rPr lang="en-US" altLang="ko-KR" dirty="0"/>
-              <a:t>.</a:t>
-            </a:r>
-          </a:p>
-          <a:p>
-            <a:pPr>
-              <a:buFont typeface="Arial" panose="020B0604020202020204" pitchFamily="34" charset="0"/>
-              <a:buChar char="•"/>
-            </a:pPr>
-            <a:r>
-              <a:rPr lang="ko-KR" altLang="en-US" dirty="0"/>
-              <a:t>교육 기간 동안 백과 프론트 등의 것이 확정되는데</a:t>
-            </a:r>
-            <a:r>
-              <a:rPr lang="en-US" altLang="ko-KR" dirty="0"/>
-              <a:t>, </a:t>
-            </a:r>
-            <a:r>
-              <a:rPr lang="ko-KR" altLang="en-US" dirty="0"/>
-              <a:t>이때는 최대한 의견을 반영할 것이다</a:t>
-            </a:r>
-            <a:r>
-              <a:rPr lang="en-US" altLang="ko-KR" dirty="0"/>
-              <a:t>.</a:t>
-            </a:r>
-          </a:p>
-          <a:p>
-            <a:pPr>
-              <a:buFont typeface="Arial" panose="020B0604020202020204" pitchFamily="34" charset="0"/>
-              <a:buChar char="•"/>
-            </a:pPr>
-            <a:r>
-              <a:rPr lang="ko-KR" altLang="en-US" dirty="0"/>
-              <a:t>이를 위해 수업은 커리큘럼대로 초반에는 진행되겠지만 </a:t>
-            </a:r>
-            <a:r>
-              <a:rPr lang="ko-KR" altLang="en-US" b="1" dirty="0"/>
-              <a:t>상황을 최대한 반영해 유동적으로 진행될 </a:t>
-            </a:r>
-            <a:r>
-              <a:rPr lang="ko-KR" altLang="en-US" dirty="0"/>
-              <a:t>것이며</a:t>
-            </a:r>
-            <a:r>
-              <a:rPr lang="en-US" altLang="ko-KR" dirty="0"/>
-              <a:t>, </a:t>
-            </a:r>
-            <a:r>
-              <a:rPr lang="ko-KR" altLang="en-US" b="1" dirty="0"/>
-              <a:t>이런 유동성이 앞서 말한 성과를 달성하는 데 도움이 된 큰 요인 중 하나</a:t>
-            </a:r>
-            <a:r>
-              <a:rPr lang="ko-KR" altLang="en-US" dirty="0"/>
-              <a:t>였다</a:t>
-            </a:r>
-            <a:r>
-              <a:rPr lang="en-US" altLang="ko-KR" dirty="0"/>
-              <a:t>.</a:t>
-            </a:r>
-          </a:p>
-          <a:p>
-            <a:pPr>
-              <a:buFont typeface="Arial" panose="020B0604020202020204" pitchFamily="34" charset="0"/>
-              <a:buChar char="•"/>
-            </a:pPr>
-            <a:endParaRPr lang="en-US" altLang="ko-KR" dirty="0"/>
-          </a:p>
-          <a:p>
-            <a:pPr>
-              <a:buFont typeface="Arial" panose="020B0604020202020204" pitchFamily="34" charset="0"/>
-              <a:buChar char="•"/>
-            </a:pPr>
-            <a:endParaRPr lang="en-US" altLang="ko-KR" dirty="0"/>
-          </a:p>
-          <a:p>
-            <a:r>
-              <a:rPr lang="ko-KR" altLang="en-US" b="1" dirty="0"/>
-              <a:t>💡 </a:t>
-            </a:r>
-            <a:r>
-              <a:rPr lang="ko-KR" altLang="en-US" b="1" dirty="0" err="1"/>
-              <a:t>버퍼링</a:t>
-            </a:r>
-            <a:r>
-              <a:rPr lang="ko-KR" altLang="en-US" b="1" dirty="0"/>
-              <a:t> 수업</a:t>
-            </a:r>
-          </a:p>
-          <a:p>
-            <a:r>
-              <a:rPr lang="ko-KR" altLang="en-US" dirty="0" err="1"/>
-              <a:t>버퍼링</a:t>
-            </a:r>
-            <a:r>
-              <a:rPr lang="ko-KR" altLang="en-US" dirty="0"/>
-              <a:t> 수업이란</a:t>
+              <a:t>왜 좋을까요</a:t>
             </a:r>
             <a:r>
               <a:rPr lang="en-US" altLang="ko-KR" dirty="0"/>
               <a:t>?</a:t>
             </a:r>
-          </a:p>
-          <a:p>
-            <a:r>
-              <a:rPr lang="ko-KR" altLang="en-US" dirty="0"/>
-              <a:t>교육생들의 기본 지식이 다를 수 있으니 </a:t>
-            </a:r>
-            <a:r>
-              <a:rPr lang="en-US" altLang="ko-KR" dirty="0"/>
-              <a:t>1~2</a:t>
-            </a:r>
-            <a:r>
-              <a:rPr lang="ko-KR" altLang="en-US" dirty="0"/>
-              <a:t>주간 사전 지식을 서로 평탄하게 맞추기 위해 필요한 작업</a:t>
-            </a:r>
-          </a:p>
-          <a:p>
-            <a:r>
-              <a:rPr lang="en-US" altLang="ko-KR" dirty="0"/>
-              <a:t>1~2</a:t>
-            </a:r>
-            <a:r>
-              <a:rPr lang="ko-KR" altLang="en-US" dirty="0"/>
-              <a:t>주간 </a:t>
-            </a:r>
-            <a:r>
-              <a:rPr lang="en-US" altLang="ko-KR" dirty="0"/>
-              <a:t>000</a:t>
-            </a:r>
-            <a:r>
-              <a:rPr lang="ko-KR" altLang="en-US" dirty="0"/>
-              <a:t>를 수업할 건데</a:t>
-            </a:r>
-            <a:r>
-              <a:rPr lang="en-US" altLang="ko-KR" dirty="0"/>
-              <a:t>, </a:t>
-            </a:r>
-            <a:r>
-              <a:rPr lang="ko-KR" altLang="en-US" dirty="0"/>
-              <a:t>미리 알고 있는 분들은 과제만 해결하면 빨리 집에 가도 된다</a:t>
-            </a:r>
-            <a:r>
-              <a:rPr lang="en-US" altLang="ko-KR" dirty="0"/>
-              <a:t>.</a:t>
-            </a:r>
-          </a:p>
-          <a:p>
-            <a:r>
-              <a:rPr lang="ko-KR" altLang="en-US" dirty="0"/>
-              <a:t>처음 </a:t>
-            </a:r>
-            <a:r>
-              <a:rPr lang="en-US" altLang="ko-KR" dirty="0"/>
-              <a:t>1~2</a:t>
-            </a:r>
-            <a:r>
-              <a:rPr lang="ko-KR" altLang="en-US" dirty="0"/>
-              <a:t>주 간은 </a:t>
-            </a:r>
-            <a:r>
-              <a:rPr lang="ko-KR" altLang="en-US" dirty="0" err="1"/>
-              <a:t>버퍼링</a:t>
-            </a:r>
-            <a:r>
-              <a:rPr lang="ko-KR" altLang="en-US" dirty="0"/>
-              <a:t> 수업을 할 것이기 때문에 사전 지식이 많으면 지루하게 느껴질 수 있고</a:t>
-            </a:r>
-            <a:r>
-              <a:rPr lang="en-US" altLang="ko-KR" dirty="0"/>
-              <a:t>, </a:t>
-            </a:r>
-            <a:r>
-              <a:rPr lang="ko-KR" altLang="en-US" dirty="0"/>
-              <a:t>사전 지식이 부족하면 </a:t>
-            </a:r>
-            <a:r>
-              <a:rPr lang="ko-KR" altLang="en-US" dirty="0" err="1"/>
-              <a:t>빡세게</a:t>
-            </a:r>
-            <a:r>
-              <a:rPr lang="ko-KR" altLang="en-US" dirty="0"/>
-              <a:t> 느껴질 수 있다</a:t>
-            </a:r>
-            <a:r>
-              <a:rPr lang="en-US" altLang="ko-KR" dirty="0"/>
-              <a:t>. </a:t>
-            </a:r>
-            <a:r>
-              <a:rPr lang="ko-KR" altLang="en-US" dirty="0"/>
-              <a:t>이런 현상은 모두 자연스러운 것이고</a:t>
-            </a:r>
-            <a:r>
-              <a:rPr lang="en-US" altLang="ko-KR" dirty="0"/>
-              <a:t>, 3</a:t>
-            </a:r>
-            <a:r>
-              <a:rPr lang="ko-KR" altLang="en-US" dirty="0"/>
-              <a:t>주가 되었을 때는 모두 적응이 되었을 것이다</a:t>
-            </a:r>
-            <a:r>
-              <a:rPr lang="en-US" altLang="ko-KR" dirty="0"/>
-              <a:t>.</a:t>
-            </a:r>
-          </a:p>
-          <a:p>
-            <a:r>
-              <a:rPr lang="ko-KR" altLang="en-US" dirty="0"/>
-              <a:t>그때까지 모두 힘내시고 어려운 게 있으면 여기 상주 운영 선생님이 도움을 주실 것이다</a:t>
-            </a:r>
-            <a:r>
-              <a:rPr lang="en-US" altLang="ko-KR" dirty="0"/>
-              <a:t>.</a:t>
-            </a:r>
-          </a:p>
-          <a:p>
             <a:endParaRPr lang="ko-KR" altLang="en-US" dirty="0"/>
           </a:p>
           <a:p>
@@ -2829,7 +2405,7 @@
     </p:spTree>
     <p:extLst>
       <p:ext uri="{BB962C8B-B14F-4D97-AF65-F5344CB8AC3E}">
-        <p14:creationId xmlns:p14="http://schemas.microsoft.com/office/powerpoint/2010/main" val="3934584758"/>
+        <p14:creationId xmlns:p14="http://schemas.microsoft.com/office/powerpoint/2010/main" val="2132453445"/>
       </p:ext>
     </p:extLst>
   </p:cSld>
@@ -2882,6 +2458,46 @@
         <p:txBody>
           <a:bodyPr/>
           <a:lstStyle/>
+          <a:p>
+            <a:pPr marL="0" marR="0" lvl="0" indent="0" algn="l" defTabSz="914400" rtl="0" eaLnBrk="1" fontAlgn="auto" latinLnBrk="1" hangingPunct="1">
+              <a:lnSpc>
+                <a:spcPct val="100000"/>
+              </a:lnSpc>
+              <a:spcBef>
+                <a:spcPts val="0"/>
+              </a:spcBef>
+              <a:spcAft>
+                <a:spcPts val="0"/>
+              </a:spcAft>
+              <a:buClrTx/>
+              <a:buSzTx/>
+              <a:buFontTx/>
+              <a:buNone/>
+              <a:tabLst/>
+              <a:defRPr/>
+            </a:pPr>
+            <a:r>
+              <a:rPr lang="ko-KR" altLang="en-US" dirty="0"/>
+              <a:t>후기 보셨나요</a:t>
+            </a:r>
+            <a:r>
+              <a:rPr lang="en-US" altLang="ko-KR" dirty="0"/>
+              <a:t>? </a:t>
+            </a:r>
+            <a:r>
+              <a:rPr lang="ko-KR" altLang="en-US" dirty="0"/>
+              <a:t>왜 좋을까요</a:t>
+            </a:r>
+            <a:r>
+              <a:rPr lang="en-US" altLang="ko-KR" dirty="0"/>
+              <a:t>?</a:t>
+            </a:r>
+            <a:r>
+              <a:rPr lang="ko-KR" altLang="en-US" dirty="0"/>
+              <a:t> 이렇기 때문이죠</a:t>
+            </a:r>
+            <a:endParaRPr lang="en-US" altLang="ko-KR" dirty="0"/>
+          </a:p>
           <a:p>
             <a:endParaRPr lang="ko-KR" altLang="en-US" dirty="0"/>
           </a:p>
@@ -2967,19 +2583,30 @@
           <a:bodyPr/>
           <a:lstStyle/>
           <a:p>
-            <a:pPr marL="228600" indent="-228600">
-              <a:buAutoNum type="arabicPeriod"/>
+            <a:pPr>
+              <a:buFont typeface="Arial" panose="020B0604020202020204" pitchFamily="34" charset="0"/>
+              <a:buNone/>
             </a:pPr>
             <a:r>
               <a:rPr lang="ko-KR" altLang="en-US" dirty="0"/>
-              <a:t>맞춤 수업</a:t>
-            </a:r>
+              <a:t>이렇게 일단은 계획 중</a:t>
+            </a:r>
+            <a:r>
+              <a:rPr lang="en-US" altLang="ko-KR" dirty="0"/>
+              <a:t>~</a:t>
+            </a:r>
+          </a:p>
+          <a:p>
+            <a:pPr>
+              <a:buFont typeface="Arial" panose="020B0604020202020204" pitchFamily="34" charset="0"/>
+              <a:buNone/>
+            </a:pPr>
             <a:endParaRPr lang="en-US" altLang="ko-KR" dirty="0"/>
           </a:p>
           <a:p>
-            <a:pPr marL="171450" indent="-171450">
-              <a:buFontTx/>
-              <a:buChar char="-"/>
+            <a:pPr>
+              <a:buFont typeface="Arial" panose="020B0604020202020204" pitchFamily="34" charset="0"/>
+              <a:buChar char="•"/>
             </a:pPr>
             <a:r>
               <a:rPr lang="en-US" altLang="ko-KR" dirty="0"/>
@@ -3011,33 +2638,21 @@
             </a:r>
           </a:p>
           <a:p>
-            <a:pPr marL="171450" indent="-171450">
-              <a:buFontTx/>
-              <a:buChar char="-"/>
+            <a:pPr>
+              <a:buFont typeface="Arial" panose="020B0604020202020204" pitchFamily="34" charset="0"/>
+              <a:buChar char="•"/>
             </a:pPr>
             <a:r>
+              <a:rPr lang="ko-KR" altLang="en-US" dirty="0"/>
+              <a:t>교육 기간 동안 백과 프론트 등의 것이 확정되는데</a:t>
+            </a:r>
+            <a:r>
               <a:rPr lang="en-US" altLang="ko-KR" dirty="0"/>
-              <a:t>6</a:t>
+              <a:t>, </a:t>
             </a:r>
             <a:r>
               <a:rPr lang="ko-KR" altLang="en-US" dirty="0"/>
-              <a:t>개월 교육이 끝나기 전에 백과 프론트에 대한 것들이 확정이 된다</a:t>
-            </a:r>
-            <a:r>
-              <a:rPr lang="en-US" altLang="ko-KR" dirty="0"/>
-              <a:t>. </a:t>
-            </a:r>
-            <a:r>
-              <a:rPr lang="ko-KR" altLang="en-US" dirty="0"/>
-              <a:t>이때 최대한 여러분들의 의견을 반영해 수업을 </a:t>
-            </a:r>
-            <a:r>
-              <a:rPr lang="ko-KR" altLang="en-US" dirty="0" err="1"/>
-              <a:t>진행해나가고</a:t>
-            </a:r>
-            <a:r>
-              <a:rPr lang="ko-KR" altLang="en-US" dirty="0"/>
-              <a:t> 도움을 드릴 것이다</a:t>
+              <a:t>이때는 최대한 의견을 반영할 것이다</a:t>
             </a:r>
             <a:r>
               <a:rPr lang="en-US" altLang="ko-KR" dirty="0"/>
@@ -3045,29 +2660,33 @@
             </a:r>
           </a:p>
           <a:p>
-            <a:pPr marL="171450" indent="-171450">
-              <a:buFontTx/>
-              <a:buChar char="-"/>
+            <a:pPr>
+              <a:buFont typeface="Arial" panose="020B0604020202020204" pitchFamily="34" charset="0"/>
+              <a:buChar char="•"/>
             </a:pPr>
             <a:r>
               <a:rPr lang="ko-KR" altLang="en-US" dirty="0"/>
-              <a:t>이를 위해 수업의 커리큘럼은 초반에는 그대로 진행해 나가겠지만</a:t>
+              <a:t>이를 위해 수업은 커리큘럼대로 초반에는 진행되겠지만 </a:t>
+            </a:r>
+            <a:r>
+              <a:rPr lang="ko-KR" altLang="en-US" b="1" dirty="0"/>
+              <a:t>상황을 최대한 반영해 유동적으로 진행될 </a:t>
+            </a:r>
+            <a:r>
+              <a:rPr lang="ko-KR" altLang="en-US" dirty="0"/>
+              <a:t>것이며</a:t>
             </a:r>
             <a:r>
               <a:rPr lang="en-US" altLang="ko-KR" dirty="0"/>
               <a:t>, </a:t>
             </a:r>
             <a:r>
+              <a:rPr lang="ko-KR" altLang="en-US" b="1" dirty="0"/>
+              <a:t>이런 유동성이 앞서 말한 성과를 달성하는 데 도움이 된 큰 요인 중 하나</a:t>
+            </a:r>
+            <a:r>
               <a:rPr lang="ko-KR" altLang="en-US" dirty="0"/>
-              <a:t>상황을 최대한 반영해 유동적으로 진행될 것이다</a:t>
-            </a:r>
-            <a:r>
-              <a:rPr lang="en-US" altLang="ko-KR" dirty="0"/>
-              <a:t>. </a:t>
-            </a:r>
-            <a:r>
-              <a:rPr lang="ko-KR" altLang="en-US" dirty="0"/>
-              <a:t>이런 유동성이 앞서 말한 성과를 달성하는데 도움이 된 큰 요인 중 하나였다</a:t>
+              <a:t>였다</a:t>
             </a:r>
             <a:r>
               <a:rPr lang="en-US" altLang="ko-KR" dirty="0"/>
@@ -3075,143 +2694,7 @@
             </a:r>
           </a:p>
           <a:p>
-            <a:pPr marL="171450" indent="-171450">
-              <a:buFontTx/>
-              <a:buChar char="-"/>
-            </a:pPr>
-            <a:endParaRPr lang="en-US" altLang="ko-KR" dirty="0"/>
-          </a:p>
-          <a:p>
-            <a:pPr marL="228600" indent="-228600">
-              <a:buAutoNum type="arabicPeriod"/>
-            </a:pPr>
-            <a:r>
-              <a:rPr lang="ko-KR" altLang="en-US" dirty="0" err="1"/>
-              <a:t>버퍼링</a:t>
-            </a:r>
-            <a:r>
-              <a:rPr lang="ko-KR" altLang="en-US" dirty="0"/>
-              <a:t> 수업</a:t>
-            </a:r>
-            <a:endParaRPr lang="en-US" altLang="ko-KR" dirty="0"/>
-          </a:p>
-          <a:p>
-            <a:pPr marL="171450" indent="-171450">
-              <a:buFontTx/>
-              <a:buChar char="-"/>
-            </a:pPr>
-            <a:r>
-              <a:rPr lang="ko-KR" altLang="en-US" dirty="0"/>
-              <a:t>짧게는 </a:t>
-            </a:r>
-            <a:r>
-              <a:rPr lang="en-US" altLang="ko-KR" dirty="0"/>
-              <a:t>2</a:t>
-            </a:r>
-            <a:r>
-              <a:rPr lang="ko-KR" altLang="en-US" dirty="0"/>
-              <a:t>주</a:t>
-            </a:r>
-            <a:r>
-              <a:rPr lang="en-US" altLang="ko-KR" dirty="0"/>
-              <a:t>, </a:t>
-            </a:r>
-            <a:r>
-              <a:rPr lang="ko-KR" altLang="en-US" dirty="0"/>
-              <a:t>길게는 한 달 간은 </a:t>
-            </a:r>
-            <a:r>
-              <a:rPr lang="ko-KR" altLang="en-US" dirty="0" err="1"/>
-              <a:t>버퍼링</a:t>
-            </a:r>
-            <a:r>
-              <a:rPr lang="ko-KR" altLang="en-US" dirty="0"/>
-              <a:t> 수업 형태로 수업을 진행할 것이다</a:t>
-            </a:r>
-            <a:r>
-              <a:rPr lang="en-US" altLang="ko-KR" dirty="0"/>
-              <a:t>.</a:t>
-            </a:r>
-          </a:p>
-          <a:p>
-            <a:pPr marL="171450" indent="-171450">
-              <a:buFontTx/>
-              <a:buChar char="-"/>
-            </a:pPr>
-            <a:r>
-              <a:rPr lang="ko-KR" altLang="en-US" dirty="0"/>
-              <a:t>교육생분들의 기본 지식이 모두 다를 수 있으니</a:t>
-            </a:r>
-            <a:r>
-              <a:rPr lang="en-US" altLang="ko-KR" dirty="0"/>
-              <a:t>, </a:t>
-            </a:r>
-            <a:r>
-              <a:rPr lang="ko-KR" altLang="en-US" dirty="0"/>
-              <a:t>그 사전 지식을 서로 평탄하게 맞추기 위해 필요한 작업이 </a:t>
-            </a:r>
-            <a:r>
-              <a:rPr lang="ko-KR" altLang="en-US" dirty="0" err="1"/>
-              <a:t>버펄이</a:t>
-            </a:r>
-            <a:r>
-              <a:rPr lang="ko-KR" altLang="en-US" dirty="0"/>
-              <a:t> 수업이다</a:t>
-            </a:r>
-            <a:r>
-              <a:rPr lang="en-US" altLang="ko-KR" dirty="0"/>
-              <a:t>.</a:t>
-            </a:r>
-          </a:p>
-          <a:p>
-            <a:pPr marL="171450" indent="-171450">
-              <a:buFontTx/>
-              <a:buChar char="-"/>
-            </a:pPr>
-            <a:r>
-              <a:rPr lang="ko-KR" altLang="en-US" dirty="0" err="1"/>
-              <a:t>버퍼링</a:t>
-            </a:r>
-            <a:r>
-              <a:rPr lang="ko-KR" altLang="en-US" dirty="0"/>
-              <a:t> 수업 도중에는 사전 지식이 많은 분들은 지루하게 느껴질 수 있고</a:t>
-            </a:r>
-            <a:r>
-              <a:rPr lang="en-US" altLang="ko-KR" dirty="0"/>
-              <a:t>, </a:t>
-            </a:r>
-            <a:r>
-              <a:rPr lang="ko-KR" altLang="en-US" dirty="0"/>
-              <a:t>사전 지식이 부족하신 분들은 힘들게 느껴질 수 있다</a:t>
-            </a:r>
-            <a:r>
-              <a:rPr lang="en-US" altLang="ko-KR" dirty="0"/>
-              <a:t>. </a:t>
-            </a:r>
-            <a:r>
-              <a:rPr lang="ko-KR" altLang="en-US" dirty="0"/>
-              <a:t>이런 현상은 모두 자연스러운 것이고</a:t>
-            </a:r>
-            <a:r>
-              <a:rPr lang="en-US" altLang="ko-KR" dirty="0"/>
-              <a:t>, </a:t>
-            </a:r>
-            <a:r>
-              <a:rPr lang="ko-KR" altLang="en-US" dirty="0"/>
-              <a:t>한 달 뒤 </a:t>
-            </a:r>
-            <a:r>
-              <a:rPr lang="ko-KR" altLang="en-US" dirty="0" err="1"/>
-              <a:t>버퍼링</a:t>
-            </a:r>
-            <a:r>
-              <a:rPr lang="ko-KR" altLang="en-US" dirty="0"/>
-              <a:t> 수업이 모두 끝나셨을 때는 모두 적응이 되었을 것이다</a:t>
-            </a:r>
-            <a:r>
-              <a:rPr lang="en-US" altLang="ko-KR" dirty="0"/>
-              <a:t>.</a:t>
-            </a:r>
+            <a:endParaRPr lang="ko-KR" altLang="en-US" dirty="0"/>
           </a:p>
         </p:txBody>
       </p:sp>
@@ -3241,7 +2724,7 @@
     </p:spTree>
     <p:extLst>
       <p:ext uri="{BB962C8B-B14F-4D97-AF65-F5344CB8AC3E}">
-        <p14:creationId xmlns:p14="http://schemas.microsoft.com/office/powerpoint/2010/main" val="1339477228"/>
+        <p14:creationId xmlns:p14="http://schemas.microsoft.com/office/powerpoint/2010/main" val="3934584758"/>
       </p:ext>
     </p:extLst>
   </p:cSld>
@@ -3295,33 +2778,47 @@
           <a:bodyPr/>
           <a:lstStyle/>
           <a:p>
+            <a:pPr marL="228600" indent="-228600">
+              <a:buAutoNum type="arabicPeriod"/>
+            </a:pPr>
+            <a:r>
+              <a:rPr lang="ko-KR" altLang="en-US" dirty="0"/>
+              <a:t>맞춤 수업</a:t>
+            </a:r>
+            <a:endParaRPr lang="en-US" altLang="ko-KR" dirty="0"/>
+          </a:p>
+          <a:p>
             <a:pPr marL="171450" indent="-171450">
               <a:buFontTx/>
               <a:buChar char="-"/>
             </a:pPr>
             <a:r>
+              <a:rPr lang="en-US" altLang="ko-KR" dirty="0"/>
+              <a:t>1</a:t>
+            </a:r>
+            <a:r>
               <a:rPr lang="ko-KR" altLang="en-US" dirty="0"/>
-              <a:t>공부를 하시면 가장 힘든 시기가 처음 한달</a:t>
+              <a:t>대 </a:t>
             </a:r>
             <a:r>
               <a:rPr lang="en-US" altLang="ko-KR" dirty="0"/>
-              <a:t>, 3</a:t>
+              <a:t>1 </a:t>
             </a:r>
             <a:r>
               <a:rPr lang="ko-KR" altLang="en-US" dirty="0"/>
-              <a:t>달이 되는 시점</a:t>
+              <a:t>개별 컨설팅이나 취업 연계를 통해 여러분들이 모두 취</a:t>
             </a:r>
             <a:r>
               <a:rPr lang="en-US" altLang="ko-KR" dirty="0"/>
-              <a:t>(50%), 80%</a:t>
+              <a:t>/</a:t>
             </a:r>
             <a:r>
               <a:rPr lang="ko-KR" altLang="en-US" dirty="0"/>
-              <a:t>가 되는 시점이 가장 힘드실 거다</a:t>
+              <a:t>창업에 성공할 수 있도록 도움을 드릴 것이다</a:t>
             </a:r>
             <a:r>
               <a:rPr lang="en-US" altLang="ko-KR" dirty="0"/>
-              <a:t>. </a:t>
+              <a:t>.</a:t>
             </a:r>
           </a:p>
           <a:p>
@@ -3330,24 +2827,12 @@
               <a:buChar char="-"/>
             </a:pPr>
             <a:r>
+              <a:rPr lang="en-US" altLang="ko-KR" dirty="0"/>
+              <a:t>6</a:t>
+            </a:r>
+            <a:r>
               <a:rPr lang="ko-KR" altLang="en-US" dirty="0"/>
-              <a:t>처음 한 달 동안 왜 나만 못하지</a:t>
-            </a:r>
-            <a:r>
-              <a:rPr lang="en-US" altLang="ko-KR" dirty="0"/>
-              <a:t>? </a:t>
-            </a:r>
-            <a:r>
-              <a:rPr lang="ko-KR" altLang="en-US" dirty="0"/>
-              <a:t>나는 이 길이 잘 안 맞는가</a:t>
-            </a:r>
-            <a:r>
-              <a:rPr lang="en-US" altLang="ko-KR" dirty="0"/>
-              <a:t>? </a:t>
-            </a:r>
-            <a:r>
-              <a:rPr lang="ko-KR" altLang="en-US" dirty="0"/>
-              <a:t>라는 생각이 분명히 드실 것이다</a:t>
+              <a:t>개월 교육이 끝나기 전에 백과 프론트에 대한 것들이 확정이 된다</a:t>
             </a:r>
             <a:r>
               <a:rPr lang="en-US" altLang="ko-KR" dirty="0"/>
@@ -3355,15 +2840,15 @@
             </a:r>
             <a:r>
               <a:rPr lang="ko-KR" altLang="en-US" dirty="0"/>
-              <a:t>하지만</a:t>
-            </a:r>
-            <a:r>
-              <a:rPr lang="en-US" altLang="ko-KR" dirty="0"/>
-              <a:t>, </a:t>
+              <a:t>이때 최대한 여러분들의 의견을 반영해 수업을 </a:t>
+            </a:r>
+            <a:r>
+              <a:rPr lang="ko-KR" altLang="en-US" dirty="0" err="1"/>
+              <a:t>진행해나가고</a:t>
             </a:r>
             <a:r>
               <a:rPr lang="ko-KR" altLang="en-US" dirty="0"/>
-              <a:t>이 모든 것들은 자연스러운 현상으로 힘든 기간을 참고 견디시면 분명 길이 보이실 겁니다</a:t>
+              <a:t> 도움을 드릴 것이다</a:t>
             </a:r>
             <a:r>
               <a:rPr lang="en-US" altLang="ko-KR" dirty="0"/>
@@ -3377,7 +2862,7 @@
             </a:pPr>
             <a:r>
               <a:rPr lang="ko-KR" altLang="en-US" dirty="0"/>
-              <a:t>다른 모든 직무</a:t>
+              <a:t>이를 위해 수업의 커리큘럼은 초반에는 그대로 진행해 나가겠지만</a:t>
             </a:r>
             <a:r>
               <a:rPr lang="en-US" altLang="ko-KR" dirty="0"/>
@@ -3385,7 +2870,7 @@
             </a:r>
             <a:r>
               <a:rPr lang="ko-KR" altLang="en-US" dirty="0"/>
-              <a:t>지식들이 마찬가지겠지만 개발영역은 특히 더 계단식으로 성장합니다</a:t>
+              <a:t>상황을 최대한 반영해 유동적으로 진행될 것이다</a:t>
             </a:r>
             <a:r>
               <a:rPr lang="en-US" altLang="ko-KR" dirty="0"/>
@@ -3393,27 +2878,7 @@
             </a:r>
             <a:r>
               <a:rPr lang="ko-KR" altLang="en-US" dirty="0"/>
-              <a:t>내가 왜 안 바뀌지 라고 </a:t>
-            </a:r>
-            <a:r>
-              <a:rPr lang="ko-KR" altLang="en-US" dirty="0" err="1"/>
-              <a:t>게속</a:t>
-            </a:r>
-            <a:r>
-              <a:rPr lang="ko-KR" altLang="en-US" dirty="0"/>
-              <a:t> 가는 것처럼 </a:t>
-            </a:r>
-            <a:r>
-              <a:rPr lang="ko-KR" altLang="en-US" dirty="0" err="1"/>
-              <a:t>보이겟지만</a:t>
-            </a:r>
-            <a:r>
-              <a:rPr lang="en-US" altLang="ko-KR" dirty="0"/>
-              <a:t>, </a:t>
-            </a:r>
-            <a:r>
-              <a:rPr lang="ko-KR" altLang="en-US" dirty="0"/>
-              <a:t>어느 순간 깨달음을 얻는 것처럼 역량이 확 늘어날 것입니다</a:t>
+              <a:t>이런 유동성이 앞서 말한 성과를 달성하는데 도움이 된 큰 요인 중 하나였다</a:t>
             </a:r>
             <a:r>
               <a:rPr lang="en-US" altLang="ko-KR" dirty="0"/>
@@ -3425,18 +2890,21 @@
               <a:buFontTx/>
               <a:buChar char="-"/>
             </a:pPr>
+            <a:endParaRPr lang="en-US" altLang="ko-KR" dirty="0"/>
+          </a:p>
+          <a:p>
+            <a:pPr marL="228600" indent="-228600">
+              <a:buAutoNum type="arabicPeriod"/>
+            </a:pPr>
+            <a:r>
+              <a:rPr lang="ko-KR" altLang="en-US" dirty="0" err="1"/>
+              <a:t>버퍼링</a:t>
+            </a:r>
             <a:r>
               <a:rPr lang="ko-KR" altLang="en-US" dirty="0"/>
-              <a:t>정체기 기간 동안 힘드시겠지만 저와 함께 포기하지 말고 꾸준히 노력하면서 얻고자 하는 것을 </a:t>
-            </a:r>
-            <a:r>
-              <a:rPr lang="ko-KR" altLang="en-US" dirty="0" err="1"/>
-              <a:t>얻어내봅시다</a:t>
-            </a:r>
-            <a:r>
-              <a:rPr lang="en-US" altLang="ko-KR" dirty="0"/>
-              <a:t>. </a:t>
-            </a:r>
+              <a:t> 수업</a:t>
+            </a:r>
+            <a:endParaRPr lang="en-US" altLang="ko-KR" dirty="0"/>
           </a:p>
           <a:p>
             <a:pPr marL="171450" indent="-171450">
@@ -3444,20 +2912,16 @@
               <a:buChar char="-"/>
             </a:pPr>
             <a:r>
+              <a:rPr lang="ko-KR" altLang="en-US" dirty="0"/>
+              <a:t>짧게는 </a:t>
+            </a:r>
+            <a:r>
               <a:rPr lang="en-US" altLang="ko-KR" dirty="0"/>
-              <a:t>3</a:t>
+              <a:t>2</a:t>
             </a:r>
             <a:r>
               <a:rPr lang="ko-KR" altLang="en-US" dirty="0"/>
-              <a:t>개월 시점에는 성장의 폭이 줄어들었다고 느끼실 수 있는데 그것 또한 당연한 수순이겠죠</a:t>
-            </a:r>
-            <a:r>
-              <a:rPr lang="en-US" altLang="ko-KR" dirty="0"/>
-              <a:t>? 3</a:t>
-            </a:r>
-            <a:r>
-              <a:rPr lang="ko-KR" altLang="en-US" dirty="0"/>
-              <a:t>개월 동안 실력이 향상했으니</a:t>
+              <a:t>주</a:t>
             </a:r>
             <a:r>
               <a:rPr lang="en-US" altLang="ko-KR" dirty="0"/>
@@ -3465,7 +2929,15 @@
             </a:r>
             <a:r>
               <a:rPr lang="ko-KR" altLang="en-US" dirty="0"/>
-              <a:t>배우는 것이 어려워질 것이고 그와 연관되어 이해가 어렵고 응용이 어려운 건 당연해지는 것입니다</a:t>
+              <a:t>길게는 한 달 간은 </a:t>
+            </a:r>
+            <a:r>
+              <a:rPr lang="ko-KR" altLang="en-US" dirty="0" err="1"/>
+              <a:t>버퍼링</a:t>
+            </a:r>
+            <a:r>
+              <a:rPr lang="ko-KR" altLang="en-US" dirty="0"/>
+              <a:t> 수업 형태로 수업을 진행할 것이다</a:t>
             </a:r>
             <a:r>
               <a:rPr lang="en-US" altLang="ko-KR" dirty="0"/>
@@ -3479,17 +2951,78 @@
             </a:pPr>
             <a:r>
               <a:rPr lang="ko-KR" altLang="en-US" dirty="0"/>
-              <a:t>이 모든 어려움을 저와 함께 </a:t>
+              <a:t>교육생분들의 기본 지식이 모두 다를 수 있으니</a:t>
+            </a:r>
+            <a:r>
+              <a:rPr lang="en-US" altLang="ko-KR" dirty="0"/>
+              <a:t>, </a:t>
+            </a:r>
+            <a:r>
+              <a:rPr lang="ko-KR" altLang="en-US" dirty="0"/>
+              <a:t>그 사전 지식을 서로 평탄하게 맞추기 위해 필요한 작업이 </a:t>
             </a:r>
             <a:r>
               <a:rPr lang="ko-KR" altLang="en-US" dirty="0" err="1"/>
-              <a:t>해결해나가봅시다</a:t>
+              <a:t>버펄이</a:t>
+            </a:r>
+            <a:r>
+              <a:rPr lang="ko-KR" altLang="en-US" dirty="0"/>
+              <a:t> 수업이다</a:t>
             </a:r>
             <a:r>
               <a:rPr lang="en-US" altLang="ko-KR" dirty="0"/>
               <a:t>.</a:t>
             </a:r>
-            <a:endParaRPr lang="ko-KR" altLang="en-US" dirty="0"/>
+          </a:p>
+          <a:p>
+            <a:pPr marL="171450" indent="-171450">
+              <a:buFontTx/>
+              <a:buChar char="-"/>
+            </a:pPr>
+            <a:r>
+              <a:rPr lang="ko-KR" altLang="en-US" dirty="0" err="1"/>
+              <a:t>버퍼링</a:t>
+            </a:r>
+            <a:r>
+              <a:rPr lang="ko-KR" altLang="en-US" dirty="0"/>
+              <a:t> 수업 도중에는 사전 지식이 많은 분들은 지루하게 느껴질 수 있고</a:t>
+            </a:r>
+            <a:r>
+              <a:rPr lang="en-US" altLang="ko-KR" dirty="0"/>
+              <a:t>, </a:t>
+            </a:r>
+            <a:r>
+              <a:rPr lang="ko-KR" altLang="en-US" dirty="0"/>
+              <a:t>사전 지식이 부족하신 분들은 힘들게 느껴질 수 있다</a:t>
+            </a:r>
+            <a:r>
+              <a:rPr lang="en-US" altLang="ko-KR" dirty="0"/>
+              <a:t>. </a:t>
+            </a:r>
+            <a:r>
+              <a:rPr lang="ko-KR" altLang="en-US" dirty="0"/>
+              <a:t>이런 현상은 모두 자연스러운 것이고</a:t>
+            </a:r>
+            <a:r>
+              <a:rPr lang="en-US" altLang="ko-KR" dirty="0"/>
+              <a:t>, </a:t>
+            </a:r>
+            <a:r>
+              <a:rPr lang="ko-KR" altLang="en-US" dirty="0"/>
+              <a:t>한 달 뒤 </a:t>
+            </a:r>
+            <a:r>
+              <a:rPr lang="ko-KR" altLang="en-US" dirty="0" err="1"/>
+              <a:t>버퍼링</a:t>
+            </a:r>
+            <a:r>
+              <a:rPr lang="ko-KR" altLang="en-US" dirty="0"/>
+              <a:t> 수업이 모두 끝나셨을 때는 모두 적응이 되었을 것이다</a:t>
+            </a:r>
+            <a:r>
+              <a:rPr lang="en-US" altLang="ko-KR" dirty="0"/>
+              <a:t>.</a:t>
+            </a:r>
           </a:p>
         </p:txBody>
       </p:sp>
@@ -3519,7 +3052,7 @@
     </p:spTree>
     <p:extLst>
       <p:ext uri="{BB962C8B-B14F-4D97-AF65-F5344CB8AC3E}">
-        <p14:creationId xmlns:p14="http://schemas.microsoft.com/office/powerpoint/2010/main" val="2934351828"/>
+        <p14:creationId xmlns:p14="http://schemas.microsoft.com/office/powerpoint/2010/main" val="1339477228"/>
       </p:ext>
     </p:extLst>
   </p:cSld>
@@ -3736,7 +3269,7 @@
     </p:spTree>
     <p:extLst>
       <p:ext uri="{BB962C8B-B14F-4D97-AF65-F5344CB8AC3E}">
-        <p14:creationId xmlns:p14="http://schemas.microsoft.com/office/powerpoint/2010/main" val="3794120007"/>
+        <p14:creationId xmlns:p14="http://schemas.microsoft.com/office/powerpoint/2010/main" val="1588788050"/>
       </p:ext>
     </p:extLst>
   </p:cSld>
@@ -3751,7 +3284,13 @@
   <p:cSld>
     <p:spTree>
       <p:nvGrpSpPr>
-        <p:cNvPr id="1" name=""/>
+        <p:cNvPr id="1" name="">
+          <a:extLst>
+            <a:ext uri="{FF2B5EF4-FFF2-40B4-BE49-F238E27FC236}">
+              <a16:creationId xmlns:a16="http://schemas.microsoft.com/office/drawing/2014/main" id="{EE889837-5033-E8CC-A215-EF02DE0D4850}"/>
+            </a:ext>
+          </a:extLst>
+        </p:cNvPr>
         <p:cNvGrpSpPr/>
         <p:nvPr/>
       </p:nvGrpSpPr>
@@ -3765,7 +3304,13 @@
       </p:grpSpPr>
       <p:sp>
         <p:nvSpPr>
-          <p:cNvPr id="2" name="슬라이드 이미지 개체 틀 1"/>
+          <p:cNvPr id="2" name="슬라이드 이미지 개체 틀 1">
+            <a:extLst>
+              <a:ext uri="{FF2B5EF4-FFF2-40B4-BE49-F238E27FC236}">
+                <a16:creationId xmlns:a16="http://schemas.microsoft.com/office/drawing/2014/main" id="{ABA24305-7705-D76E-7641-5985CBEB82B0}"/>
+              </a:ext>
+            </a:extLst>
+          </p:cNvPr>
           <p:cNvSpPr>
             <a:spLocks noGrp="1" noRot="1" noChangeAspect="1"/>
           </p:cNvSpPr>
@@ -3777,7 +3322,13 @@
       </p:sp>
       <p:sp>
         <p:nvSpPr>
-          <p:cNvPr id="3" name="슬라이드 노트 개체 틀 2"/>
+          <p:cNvPr id="3" name="슬라이드 노트 개체 틀 2">
+            <a:extLst>
+              <a:ext uri="{FF2B5EF4-FFF2-40B4-BE49-F238E27FC236}">
+                <a16:creationId xmlns:a16="http://schemas.microsoft.com/office/drawing/2014/main" id="{1B348CC1-237A-6D67-9854-8DD2CFF59978}"/>
+              </a:ext>
+            </a:extLst>
+          </p:cNvPr>
           <p:cNvSpPr>
             <a:spLocks noGrp="1"/>
           </p:cNvSpPr>
@@ -3790,13 +3341,19 @@
           <a:bodyPr/>
           <a:lstStyle/>
           <a:p>
-            <a:endParaRPr lang="ko-KR" altLang="en-US" dirty="0"/>
-          </a:p>
-        </p:txBody>
-      </p:sp>
-      <p:sp>
-        <p:nvSpPr>
-          <p:cNvPr id="4" name="슬라이드 번호 개체 틀 3"/>
+            <a:endParaRPr lang="en-US" altLang="ko-KR" dirty="0"/>
+          </a:p>
+        </p:txBody>
+      </p:sp>
+      <p:sp>
+        <p:nvSpPr>
+          <p:cNvPr id="4" name="슬라이드 번호 개체 틀 3">
+            <a:extLst>
+              <a:ext uri="{FF2B5EF4-FFF2-40B4-BE49-F238E27FC236}">
+                <a16:creationId xmlns:a16="http://schemas.microsoft.com/office/drawing/2014/main" id="{2FA454ED-AA18-8AA3-0D45-94405B3EE498}"/>
+              </a:ext>
+            </a:extLst>
+          </p:cNvPr>
           <p:cNvSpPr>
             <a:spLocks noGrp="1"/>
           </p:cNvSpPr>
@@ -3809,9 +3366,9 @@
           <a:bodyPr/>
           <a:lstStyle/>
           <a:p>
-            <a:fld id="{C09E5BFC-1559-42F1-8940-AB342D56BF02}" type="slidenum">
+            <a:fld id="{E731A1BA-5463-484A-B77A-5C292E222CA2}" type="slidenum">
               <a:rPr lang="ko-KR" altLang="en-US" smtClean="0"/>
-              <a:t>9</a:t>
+              <a:t>10</a:t>
             </a:fld>
             <a:endParaRPr lang="ko-KR" altLang="en-US"/>
           </a:p>
@@ -3820,7 +3377,7 @@
     </p:spTree>
     <p:extLst>
       <p:ext uri="{BB962C8B-B14F-4D97-AF65-F5344CB8AC3E}">
-        <p14:creationId xmlns:p14="http://schemas.microsoft.com/office/powerpoint/2010/main" val="1995049866"/>
+        <p14:creationId xmlns:p14="http://schemas.microsoft.com/office/powerpoint/2010/main" val="981924324"/>
       </p:ext>
     </p:extLst>
   </p:cSld>
@@ -7589,7 +7146,13 @@
   <p:cSld>
     <p:spTree>
       <p:nvGrpSpPr>
-        <p:cNvPr id="1" name=""/>
+        <p:cNvPr id="1" name="">
+          <a:extLst>
+            <a:ext uri="{FF2B5EF4-FFF2-40B4-BE49-F238E27FC236}">
+              <a16:creationId xmlns:a16="http://schemas.microsoft.com/office/drawing/2014/main" id="{E5086F13-2195-8D0E-D6A3-98C83B7A6B7B}"/>
+            </a:ext>
+          </a:extLst>
+        </p:cNvPr>
         <p:cNvGrpSpPr/>
         <p:nvPr/>
       </p:nvGrpSpPr>
@@ -7603,184 +7166,176 @@
       </p:grpSpPr>
       <p:sp>
         <p:nvSpPr>
-          <p:cNvPr id="3" name="날짜 개체 틀 2">
-            <a:extLst>
-              <a:ext uri="{FF2B5EF4-FFF2-40B4-BE49-F238E27FC236}">
-                <a16:creationId xmlns:a16="http://schemas.microsoft.com/office/drawing/2014/main" id="{2ADE279D-187D-FFC8-1BCF-39ED1039484B}"/>
-              </a:ext>
-            </a:extLst>
-          </p:cNvPr>
-          <p:cNvSpPr>
-            <a:spLocks noGrp="1"/>
-          </p:cNvSpPr>
-          <p:nvPr>
-            <p:ph type="dt" sz="half" idx="10"/>
-          </p:nvPr>
-        </p:nvSpPr>
-        <p:spPr/>
-        <p:txBody>
-          <a:bodyPr/>
-          <a:lstStyle/>
-          <a:p>
-            <a:fld id="{3C9CE3CE-253F-4F9D-BA15-C226C8D8501E}" type="datetime6">
-              <a:rPr lang="ko-KR" altLang="en-US" smtClean="0"/>
-              <a:t>2024년 5월</a:t>
-            </a:fld>
-            <a:endParaRPr lang="ko-KR" altLang="en-US"/>
-          </a:p>
-        </p:txBody>
-      </p:sp>
-      <p:sp>
-        <p:nvSpPr>
-          <p:cNvPr id="4" name="슬라이드 번호 개체 틀 3">
-            <a:extLst>
-              <a:ext uri="{FF2B5EF4-FFF2-40B4-BE49-F238E27FC236}">
-                <a16:creationId xmlns:a16="http://schemas.microsoft.com/office/drawing/2014/main" id="{C65620E2-371F-92B9-8FFF-EEF653C30865}"/>
-              </a:ext>
-            </a:extLst>
-          </p:cNvPr>
-          <p:cNvSpPr>
-            <a:spLocks noGrp="1"/>
-          </p:cNvSpPr>
-          <p:nvPr>
-            <p:ph type="sldNum" sz="quarter" idx="12"/>
-          </p:nvPr>
-        </p:nvSpPr>
-        <p:spPr/>
-        <p:txBody>
-          <a:bodyPr/>
-          <a:lstStyle/>
-          <a:p>
-            <a:fld id="{083A2CE0-18CD-4102-B738-4ACFF9E68BA4}" type="slidenum">
-              <a:rPr lang="ko-KR" altLang="en-US" smtClean="0"/>
-              <a:t>10</a:t>
-            </a:fld>
-            <a:endParaRPr lang="ko-KR" altLang="en-US"/>
-          </a:p>
-        </p:txBody>
-      </p:sp>
-      <p:sp>
-        <p:nvSpPr>
-          <p:cNvPr id="5" name="제목 4">
-            <a:extLst>
-              <a:ext uri="{FF2B5EF4-FFF2-40B4-BE49-F238E27FC236}">
-                <a16:creationId xmlns:a16="http://schemas.microsoft.com/office/drawing/2014/main" id="{6CE51FDC-3006-5D10-684A-6BF04168043C}"/>
-              </a:ext>
-            </a:extLst>
-          </p:cNvPr>
-          <p:cNvSpPr>
-            <a:spLocks noGrp="1"/>
-          </p:cNvSpPr>
-          <p:nvPr>
-            <p:ph type="title"/>
-          </p:nvPr>
-        </p:nvSpPr>
-        <p:spPr/>
-        <p:txBody>
-          <a:bodyPr/>
-          <a:lstStyle/>
-          <a:p>
-            <a:r>
-              <a:rPr lang="ko-KR" altLang="en-US" dirty="0"/>
-              <a:t>확약서 및 체크리스트 작성</a:t>
-            </a:r>
-          </a:p>
-        </p:txBody>
-      </p:sp>
-      <p:pic>
-        <p:nvPicPr>
-          <p:cNvPr id="7" name="그림 6">
-            <a:extLst>
-              <a:ext uri="{FF2B5EF4-FFF2-40B4-BE49-F238E27FC236}">
-                <a16:creationId xmlns:a16="http://schemas.microsoft.com/office/drawing/2014/main" id="{020B9F45-0BCE-4FFF-D576-1A68CF8A4E16}"/>
-              </a:ext>
-            </a:extLst>
-          </p:cNvPr>
-          <p:cNvPicPr>
-            <a:picLocks noChangeAspect="1"/>
-          </p:cNvPicPr>
+          <p:cNvPr id="2" name="제목 1">
+            <a:extLst>
+              <a:ext uri="{FF2B5EF4-FFF2-40B4-BE49-F238E27FC236}">
+                <a16:creationId xmlns:a16="http://schemas.microsoft.com/office/drawing/2014/main" id="{63509AA9-CAC2-DE98-C83D-D4737B9956D9}"/>
+              </a:ext>
+            </a:extLst>
+          </p:cNvPr>
+          <p:cNvSpPr>
+            <a:spLocks noGrp="1"/>
+          </p:cNvSpPr>
           <p:nvPr/>
-        </p:nvPicPr>
-        <p:blipFill>
-          <a:blip r:embed="rId2"/>
-          <a:stretch>
-            <a:fillRect/>
-          </a:stretch>
-        </p:blipFill>
+        </p:nvSpPr>
         <p:spPr>
           <a:xfrm>
-            <a:off x="1486673" y="1539241"/>
-            <a:ext cx="3257805" cy="4526687"/>
+            <a:off x="4358478" y="1806765"/>
+            <a:ext cx="7004806" cy="2999141"/>
           </a:xfrm>
           <a:prstGeom prst="rect">
             <a:avLst/>
           </a:prstGeom>
         </p:spPr>
-      </p:pic>
+        <p:txBody>
+          <a:bodyPr vert="horz" lIns="91440" tIns="45720" rIns="91440" bIns="45720" rtlCol="0" anchor="ctr">
+            <a:normAutofit/>
+          </a:bodyPr>
+          <a:lstStyle>
+            <a:lvl1pPr algn="l" defTabSz="914400" rtl="0" eaLnBrk="1" latinLnBrk="1" hangingPunct="1">
+              <a:lnSpc>
+                <a:spcPct val="90000"/>
+              </a:lnSpc>
+              <a:spcBef>
+                <a:spcPct val="0"/>
+              </a:spcBef>
+              <a:buNone/>
+              <a:defRPr sz="4400" kern="1200">
+                <a:solidFill>
+                  <a:schemeClr val="tx1"/>
+                </a:solidFill>
+                <a:latin typeface="+mj-lt"/>
+                <a:ea typeface="+mj-ea"/>
+                <a:cs typeface="+mj-cs"/>
+              </a:defRPr>
+            </a:lvl1pPr>
+          </a:lstStyle>
+          <a:p>
+            <a:pPr algn="ctr"/>
+            <a:r>
+              <a:rPr lang="en-US" altLang="ko-KR" sz="8800" b="1" dirty="0">
+                <a:solidFill>
+                  <a:schemeClr val="accent1"/>
+                </a:solidFill>
+              </a:rPr>
+              <a:t>BREAK TIME!!</a:t>
+            </a:r>
+          </a:p>
+        </p:txBody>
+      </p:sp>
       <p:pic>
         <p:nvPicPr>
-          <p:cNvPr id="13" name="그림 12">
-            <a:extLst>
-              <a:ext uri="{FF2B5EF4-FFF2-40B4-BE49-F238E27FC236}">
-                <a16:creationId xmlns:a16="http://schemas.microsoft.com/office/drawing/2014/main" id="{19362997-968B-2B22-074F-738C5AC2819E}"/>
+          <p:cNvPr id="3" name="Picture 2" descr="휴식하면 생기는 우리 몸의 변화들 &lt; 건강 &lt; 기사본문 - 마음건강 길">
+            <a:extLst>
+              <a:ext uri="{FF2B5EF4-FFF2-40B4-BE49-F238E27FC236}">
+                <a16:creationId xmlns:a16="http://schemas.microsoft.com/office/drawing/2014/main" id="{9F17459D-6F7B-6896-B8F4-F7C6F766FA13}"/>
               </a:ext>
             </a:extLst>
           </p:cNvPr>
           <p:cNvPicPr>
-            <a:picLocks noChangeAspect="1"/>
+            <a:picLocks noChangeAspect="1" noChangeArrowheads="1"/>
           </p:cNvPicPr>
           <p:nvPr/>
         </p:nvPicPr>
         <p:blipFill>
-          <a:blip r:embed="rId3"/>
+          <a:blip r:embed="rId3">
+            <a:extLst>
+              <a:ext uri="{28A0092B-C50C-407E-A947-70E740481C1C}">
+                <a14:useLocalDpi xmlns:a14="http://schemas.microsoft.com/office/drawing/2010/main" val="0"/>
+              </a:ext>
+            </a:extLst>
+          </a:blip>
+          <a:srcRect/>
           <a:stretch>
             <a:fillRect/>
           </a:stretch>
         </p:blipFill>
+        <p:spPr bwMode="auto">
+          <a:xfrm>
+            <a:off x="1296416" y="2583593"/>
+            <a:ext cx="2741843" cy="1827895"/>
+          </a:xfrm>
+          <a:prstGeom prst="rect">
+            <a:avLst/>
+          </a:prstGeom>
+          <a:noFill/>
+          <a:extLst>
+            <a:ext uri="{909E8E84-426E-40DD-AFC4-6F175D3DCCD1}">
+              <a14:hiddenFill xmlns:a14="http://schemas.microsoft.com/office/drawing/2010/main">
+                <a:solidFill>
+                  <a:srgbClr val="FFFFFF"/>
+                </a:solidFill>
+              </a14:hiddenFill>
+            </a:ext>
+          </a:extLst>
+        </p:spPr>
+      </p:pic>
+      <p:sp>
+        <p:nvSpPr>
+          <p:cNvPr id="4" name="제목 1">
+            <a:extLst>
+              <a:ext uri="{FF2B5EF4-FFF2-40B4-BE49-F238E27FC236}">
+                <a16:creationId xmlns:a16="http://schemas.microsoft.com/office/drawing/2014/main" id="{CB7B3A94-2EA2-5E54-5FB0-7291FA08CED7}"/>
+              </a:ext>
+            </a:extLst>
+          </p:cNvPr>
+          <p:cNvSpPr>
+            <a:spLocks noGrp="1"/>
+          </p:cNvSpPr>
+          <p:nvPr/>
+        </p:nvSpPr>
         <p:spPr>
           <a:xfrm>
-            <a:off x="7827195" y="1206765"/>
-            <a:ext cx="3425520" cy="4859163"/>
+            <a:off x="5003381" y="3567794"/>
+            <a:ext cx="5715000" cy="1110901"/>
           </a:xfrm>
           <a:prstGeom prst="rect">
             <a:avLst/>
           </a:prstGeom>
         </p:spPr>
-      </p:pic>
-      <p:pic>
-        <p:nvPicPr>
-          <p:cNvPr id="9" name="그림 8">
-            <a:extLst>
-              <a:ext uri="{FF2B5EF4-FFF2-40B4-BE49-F238E27FC236}">
-                <a16:creationId xmlns:a16="http://schemas.microsoft.com/office/drawing/2014/main" id="{AEC3B96B-E4B6-CA84-920F-DA215628233A}"/>
-              </a:ext>
-            </a:extLst>
-          </p:cNvPr>
-          <p:cNvPicPr>
-            <a:picLocks noChangeAspect="1"/>
-          </p:cNvPicPr>
-          <p:nvPr/>
-        </p:nvPicPr>
-        <p:blipFill>
-          <a:blip r:embed="rId4"/>
-          <a:stretch>
-            <a:fillRect/>
-          </a:stretch>
-        </p:blipFill>
-        <p:spPr>
-          <a:xfrm>
-            <a:off x="5926351" y="1539554"/>
-            <a:ext cx="3175791" cy="4526687"/>
-          </a:xfrm>
-          <a:prstGeom prst="rect">
-            <a:avLst/>
-          </a:prstGeom>
-        </p:spPr>
-      </p:pic>
+        <p:txBody>
+          <a:bodyPr vert="horz" lIns="91440" tIns="45720" rIns="91440" bIns="45720" rtlCol="0" anchor="ctr">
+            <a:noAutofit/>
+          </a:bodyPr>
+          <a:lstStyle>
+            <a:lvl1pPr algn="l" defTabSz="914400" rtl="0" eaLnBrk="1" latinLnBrk="1" hangingPunct="1">
+              <a:lnSpc>
+                <a:spcPct val="90000"/>
+              </a:lnSpc>
+              <a:spcBef>
+                <a:spcPct val="0"/>
+              </a:spcBef>
+              <a:buNone/>
+              <a:defRPr sz="4400" kern="1200">
+                <a:solidFill>
+                  <a:schemeClr val="tx1"/>
+                </a:solidFill>
+                <a:latin typeface="+mj-lt"/>
+                <a:ea typeface="+mj-ea"/>
+                <a:cs typeface="+mj-cs"/>
+              </a:defRPr>
+            </a:lvl1pPr>
+          </a:lstStyle>
+          <a:p>
+            <a:pPr algn="ctr"/>
+            <a:r>
+              <a:rPr lang="ko-KR" altLang="en-US" sz="2000" b="1" dirty="0"/>
+              <a:t>휴식 이후 자기소개 할 예정이니 준비해주세요 </a:t>
+            </a:r>
+            <a:r>
+              <a:rPr lang="en-US" altLang="ko-KR" sz="2000" b="1" dirty="0">
+                <a:sym typeface="Wingdings" panose="05000000000000000000" pitchFamily="2" charset="2"/>
+              </a:rPr>
+              <a:t></a:t>
+            </a:r>
+            <a:endParaRPr lang="en-US" altLang="ko-KR" sz="2000" b="1" dirty="0"/>
+          </a:p>
+        </p:txBody>
+      </p:sp>
     </p:spTree>
     <p:extLst>
       <p:ext uri="{BB962C8B-B14F-4D97-AF65-F5344CB8AC3E}">
-        <p14:creationId xmlns:p14="http://schemas.microsoft.com/office/powerpoint/2010/main" val="2191844993"/>
+        <p14:creationId xmlns:p14="http://schemas.microsoft.com/office/powerpoint/2010/main" val="71235578"/>
       </p:ext>
     </p:extLst>
   </p:cSld>
@@ -7809,65 +7364,91 @@
       </p:grpSpPr>
       <p:sp>
         <p:nvSpPr>
-          <p:cNvPr id="7" name="내용 개체 틀 2">
-            <a:extLst>
-              <a:ext uri="{FF2B5EF4-FFF2-40B4-BE49-F238E27FC236}">
-                <a16:creationId xmlns:a16="http://schemas.microsoft.com/office/drawing/2014/main" id="{C4F7519B-60EE-E574-917E-11D77FC5B5DA}"/>
-              </a:ext>
-            </a:extLst>
-          </p:cNvPr>
-          <p:cNvSpPr>
-            <a:spLocks noGrp="1"/>
-          </p:cNvSpPr>
-          <p:nvPr>
-            <p:ph idx="1"/>
-          </p:nvPr>
+          <p:cNvPr id="8" name="직사각형 7">
+            <a:extLst>
+              <a:ext uri="{FF2B5EF4-FFF2-40B4-BE49-F238E27FC236}">
+                <a16:creationId xmlns:a16="http://schemas.microsoft.com/office/drawing/2014/main" id="{5BB94A53-7EB2-9249-2AA7-ADA76A47ACE2}"/>
+              </a:ext>
+            </a:extLst>
+          </p:cNvPr>
+          <p:cNvSpPr/>
+          <p:nvPr/>
         </p:nvSpPr>
         <p:spPr>
           <a:xfrm>
-            <a:off x="7643351" y="2934932"/>
-            <a:ext cx="3033252" cy="899653"/>
+            <a:off x="874507" y="2027200"/>
+            <a:ext cx="10515600" cy="3262671"/>
+          </a:xfrm>
+          <a:prstGeom prst="rect">
+            <a:avLst/>
+          </a:prstGeom>
+        </p:spPr>
+        <p:style>
+          <a:lnRef idx="2">
+            <a:schemeClr val="dk1">
+              <a:shade val="50000"/>
+            </a:schemeClr>
+          </a:lnRef>
+          <a:fillRef idx="1">
+            <a:schemeClr val="dk1"/>
+          </a:fillRef>
+          <a:effectRef idx="0">
+            <a:schemeClr val="dk1"/>
+          </a:effectRef>
+          <a:fontRef idx="minor">
+            <a:schemeClr val="lt1"/>
+          </a:fontRef>
+        </p:style>
+        <p:txBody>
+          <a:bodyPr rtlCol="0" anchor="ctr"/>
+          <a:lstStyle/>
+          <a:p>
+            <a:pPr algn="ctr"/>
+            <a:endParaRPr lang="ko-KR" altLang="en-US"/>
+          </a:p>
+        </p:txBody>
+      </p:sp>
+      <p:pic>
+        <p:nvPicPr>
+          <p:cNvPr id="7" name="내용 개체 틀 6">
+            <a:extLst>
+              <a:ext uri="{FF2B5EF4-FFF2-40B4-BE49-F238E27FC236}">
+                <a16:creationId xmlns:a16="http://schemas.microsoft.com/office/drawing/2014/main" id="{D8A1035E-C3E6-CAB4-CB53-772856074142}"/>
+              </a:ext>
+            </a:extLst>
+          </p:cNvPr>
+          <p:cNvPicPr>
+            <a:picLocks noGrp="1" noChangeAspect="1"/>
+          </p:cNvPicPr>
+          <p:nvPr>
+            <p:ph idx="1"/>
+          </p:nvPr>
+        </p:nvPicPr>
+        <p:blipFill>
+          <a:blip r:embed="rId3">
+            <a:extLst>
+              <a:ext uri="{28A0092B-C50C-407E-A947-70E740481C1C}">
+                <a14:useLocalDpi xmlns:a14="http://schemas.microsoft.com/office/drawing/2010/main" val="0"/>
+              </a:ext>
+            </a:extLst>
+          </a:blip>
+          <a:stretch>
+            <a:fillRect/>
+          </a:stretch>
+        </p:blipFill>
+        <p:spPr>
+          <a:xfrm>
+            <a:off x="1288803" y="2528177"/>
+            <a:ext cx="9614394" cy="2260716"/>
           </a:xfrm>
         </p:spPr>
-        <p:txBody>
-          <a:bodyPr>
-            <a:normAutofit/>
-          </a:bodyPr>
-          <a:lstStyle/>
-          <a:p>
-            <a:pPr marL="0" indent="0">
-              <a:buNone/>
-            </a:pPr>
-            <a:r>
-              <a:rPr lang="ko-KR" altLang="en-US" sz="5000" b="1" dirty="0">
-                <a:solidFill>
-                  <a:srgbClr val="6EC173"/>
-                </a:solidFill>
-              </a:rPr>
-              <a:t>휴식 </a:t>
-            </a:r>
-            <a:r>
-              <a:rPr lang="en-US" altLang="ko-KR" sz="5000" b="1" dirty="0">
-                <a:solidFill>
-                  <a:srgbClr val="6EC173"/>
-                </a:solidFill>
-              </a:rPr>
-              <a:t>Time</a:t>
-            </a:r>
-            <a:endParaRPr lang="ko-KR" altLang="en-US" sz="5000" b="1" dirty="0">
-              <a:solidFill>
-                <a:srgbClr val="6EC173"/>
-              </a:solidFill>
-            </a:endParaRPr>
-          </a:p>
-        </p:txBody>
-      </p:sp>
+      </p:pic>
       <p:sp>
         <p:nvSpPr>
           <p:cNvPr id="4" name="날짜 개체 틀 3">
             <a:extLst>
               <a:ext uri="{FF2B5EF4-FFF2-40B4-BE49-F238E27FC236}">
-                <a16:creationId xmlns:a16="http://schemas.microsoft.com/office/drawing/2014/main" id="{1E263DFF-9BB9-D8A0-9B23-08F2727B6719}"/>
+                <a16:creationId xmlns:a16="http://schemas.microsoft.com/office/drawing/2014/main" id="{262E0B53-E0E0-F605-AE5D-CBC41626BB09}"/>
               </a:ext>
             </a:extLst>
           </p:cNvPr>
@@ -7883,7 +7464,7 @@
           <a:bodyPr/>
           <a:lstStyle/>
           <a:p>
-            <a:fld id="{1CB3B0AF-12E4-4E46-9E45-3FA033AAD3CB}" type="datetime6">
+            <a:fld id="{3C9CE3CE-253F-4F9D-BA15-C226C8D8501E}" type="datetime6">
               <a:rPr lang="ko-KR" altLang="en-US" smtClean="0"/>
               <a:t>2024년 5월</a:t>
             </a:fld>
@@ -7896,7 +7477,7 @@
           <p:cNvPr id="5" name="슬라이드 번호 개체 틀 4">
             <a:extLst>
               <a:ext uri="{FF2B5EF4-FFF2-40B4-BE49-F238E27FC236}">
-                <a16:creationId xmlns:a16="http://schemas.microsoft.com/office/drawing/2014/main" id="{35DFD145-2786-3632-BC8A-7B6D36588D9A}"/>
+                <a16:creationId xmlns:a16="http://schemas.microsoft.com/office/drawing/2014/main" id="{F07E3F96-E9FB-A7CD-5BE4-ECB3A6952CA2}"/>
               </a:ext>
             </a:extLst>
           </p:cNvPr>
@@ -7920,119 +7501,39 @@
           </a:p>
         </p:txBody>
       </p:sp>
-      <p:pic>
-        <p:nvPicPr>
-          <p:cNvPr id="1026" name="Picture 2" descr="휴식하면 생기는 우리 몸의 변화들 &lt; 건강 &lt; 기사본문 - 마음건강 길">
-            <a:extLst>
-              <a:ext uri="{FF2B5EF4-FFF2-40B4-BE49-F238E27FC236}">
-                <a16:creationId xmlns:a16="http://schemas.microsoft.com/office/drawing/2014/main" id="{18418F7F-A468-D6C9-2551-45A9F2564211}"/>
-              </a:ext>
-            </a:extLst>
-          </p:cNvPr>
-          <p:cNvPicPr>
-            <a:picLocks noChangeAspect="1" noChangeArrowheads="1"/>
-          </p:cNvPicPr>
-          <p:nvPr/>
-        </p:nvPicPr>
-        <p:blipFill>
-          <a:blip r:embed="rId2">
-            <a:extLst>
-              <a:ext uri="{28A0092B-C50C-407E-A947-70E740481C1C}">
-                <a14:useLocalDpi xmlns:a14="http://schemas.microsoft.com/office/drawing/2010/main" val="0"/>
-              </a:ext>
-            </a:extLst>
-          </a:blip>
-          <a:srcRect/>
-          <a:stretch>
-            <a:fillRect/>
-          </a:stretch>
-        </p:blipFill>
-        <p:spPr bwMode="auto">
-          <a:xfrm>
-            <a:off x="1346765" y="1953160"/>
-            <a:ext cx="4427520" cy="2951680"/>
-          </a:xfrm>
-          <a:prstGeom prst="rect">
-            <a:avLst/>
-          </a:prstGeom>
-          <a:noFill/>
-          <a:extLst>
-            <a:ext uri="{909E8E84-426E-40DD-AFC4-6F175D3DCCD1}">
-              <a14:hiddenFill xmlns:a14="http://schemas.microsoft.com/office/drawing/2010/main">
-                <a:solidFill>
-                  <a:srgbClr val="FFFFFF"/>
-                </a:solidFill>
-              </a14:hiddenFill>
-            </a:ext>
-          </a:extLst>
-        </p:spPr>
-      </p:pic>
       <p:sp>
         <p:nvSpPr>
           <p:cNvPr id="2" name="제목 1">
             <a:extLst>
               <a:ext uri="{FF2B5EF4-FFF2-40B4-BE49-F238E27FC236}">
-                <a16:creationId xmlns:a16="http://schemas.microsoft.com/office/drawing/2014/main" id="{73D511F8-7CF7-8410-E155-E09D29394D3A}"/>
-              </a:ext>
-            </a:extLst>
-          </p:cNvPr>
-          <p:cNvSpPr>
-            <a:spLocks noGrp="1"/>
-          </p:cNvSpPr>
-          <p:nvPr/>
-        </p:nvSpPr>
-        <p:spPr>
-          <a:xfrm>
-            <a:off x="6302477" y="3567794"/>
-            <a:ext cx="5715000" cy="1110901"/>
-          </a:xfrm>
-          <a:prstGeom prst="rect">
-            <a:avLst/>
-          </a:prstGeom>
-        </p:spPr>
-        <p:txBody>
-          <a:bodyPr vert="horz" lIns="91440" tIns="45720" rIns="91440" bIns="45720" rtlCol="0" anchor="ctr">
-            <a:noAutofit/>
-          </a:bodyPr>
-          <a:lstStyle>
-            <a:lvl1pPr algn="l" defTabSz="914400" rtl="0" eaLnBrk="1" latinLnBrk="1" hangingPunct="1">
-              <a:lnSpc>
-                <a:spcPct val="90000"/>
-              </a:lnSpc>
-              <a:spcBef>
-                <a:spcPct val="0"/>
-              </a:spcBef>
-              <a:buNone/>
-              <a:defRPr sz="4400" kern="1200">
-                <a:solidFill>
-                  <a:schemeClr val="tx1"/>
-                </a:solidFill>
-                <a:latin typeface="+mj-lt"/>
-                <a:ea typeface="+mj-ea"/>
-                <a:cs typeface="+mj-cs"/>
-              </a:defRPr>
-            </a:lvl1pPr>
-          </a:lstStyle>
-          <a:p>
-            <a:pPr algn="ctr"/>
-            <a:r>
-              <a:rPr lang="ko-KR" altLang="en-US" sz="2000" dirty="0"/>
-              <a:t>휴식 이후 자기소개 할 예정이니 준비해주세요 </a:t>
-            </a:r>
-            <a:r>
-              <a:rPr lang="en-US" altLang="ko-KR" sz="2000" dirty="0">
-                <a:sym typeface="Wingdings" panose="05000000000000000000" pitchFamily="2" charset="2"/>
-              </a:rPr>
-              <a:t></a:t>
-            </a:r>
-            <a:endParaRPr lang="en-US" altLang="ko-KR" sz="2000" dirty="0"/>
+                <a16:creationId xmlns:a16="http://schemas.microsoft.com/office/drawing/2014/main" id="{DBCF21E7-CA19-7543-C877-324BE0E54368}"/>
+              </a:ext>
+            </a:extLst>
+          </p:cNvPr>
+          <p:cNvSpPr>
+            <a:spLocks noGrp="1"/>
+          </p:cNvSpPr>
+          <p:nvPr>
+            <p:ph type="title"/>
+          </p:nvPr>
+        </p:nvSpPr>
+        <p:spPr/>
+        <p:txBody>
+          <a:bodyPr/>
+          <a:lstStyle/>
+          <a:p>
+            <a:r>
+              <a:rPr lang="ko-KR" altLang="en-US" dirty="0" err="1"/>
+              <a:t>코딩온에서는</a:t>
+            </a:r>
+            <a:endParaRPr lang="ko-KR" altLang="en-US" dirty="0"/>
           </a:p>
         </p:txBody>
       </p:sp>
     </p:spTree>
     <p:extLst>
       <p:ext uri="{BB962C8B-B14F-4D97-AF65-F5344CB8AC3E}">
-        <p14:creationId xmlns:p14="http://schemas.microsoft.com/office/powerpoint/2010/main" val="2841741811"/>
+        <p14:creationId xmlns:p14="http://schemas.microsoft.com/office/powerpoint/2010/main" val="3754047923"/>
       </p:ext>
     </p:extLst>
   </p:cSld>
@@ -8047,13 +7548,7 @@
   <p:cSld>
     <p:spTree>
       <p:nvGrpSpPr>
-        <p:cNvPr id="1" name="">
-          <a:extLst>
-            <a:ext uri="{FF2B5EF4-FFF2-40B4-BE49-F238E27FC236}">
-              <a16:creationId xmlns:a16="http://schemas.microsoft.com/office/drawing/2014/main" id="{E5086F13-2195-8D0E-D6A3-98C83B7A6B7B}"/>
-            </a:ext>
-          </a:extLst>
-        </p:cNvPr>
+        <p:cNvPr id="1" name=""/>
         <p:cNvGrpSpPr/>
         <p:nvPr/>
       </p:nvGrpSpPr>
@@ -8067,10 +7562,68 @@
       </p:grpSpPr>
       <p:sp>
         <p:nvSpPr>
-          <p:cNvPr id="2" name="제목 1">
-            <a:extLst>
-              <a:ext uri="{FF2B5EF4-FFF2-40B4-BE49-F238E27FC236}">
-                <a16:creationId xmlns:a16="http://schemas.microsoft.com/office/drawing/2014/main" id="{63509AA9-CAC2-DE98-C83D-D4737B9956D9}"/>
+          <p:cNvPr id="4" name="날짜 개체 틀 3">
+            <a:extLst>
+              <a:ext uri="{FF2B5EF4-FFF2-40B4-BE49-F238E27FC236}">
+                <a16:creationId xmlns:a16="http://schemas.microsoft.com/office/drawing/2014/main" id="{8692A623-1E1A-7CB9-1FC7-84129EFA1C30}"/>
+              </a:ext>
+            </a:extLst>
+          </p:cNvPr>
+          <p:cNvSpPr>
+            <a:spLocks noGrp="1"/>
+          </p:cNvSpPr>
+          <p:nvPr>
+            <p:ph type="dt" sz="half" idx="10"/>
+          </p:nvPr>
+        </p:nvSpPr>
+        <p:spPr/>
+        <p:txBody>
+          <a:bodyPr/>
+          <a:lstStyle/>
+          <a:p>
+            <a:fld id="{2CFBFBFA-EBC3-4288-86D0-55A69B340430}" type="datetime6">
+              <a:rPr lang="ko-KR" altLang="en-US" smtClean="0"/>
+              <a:t>2024년 5월</a:t>
+            </a:fld>
+            <a:endParaRPr lang="ko-KR" altLang="en-US"/>
+          </a:p>
+        </p:txBody>
+      </p:sp>
+      <p:sp>
+        <p:nvSpPr>
+          <p:cNvPr id="5" name="슬라이드 번호 개체 틀 4">
+            <a:extLst>
+              <a:ext uri="{FF2B5EF4-FFF2-40B4-BE49-F238E27FC236}">
+                <a16:creationId xmlns:a16="http://schemas.microsoft.com/office/drawing/2014/main" id="{0A828EB3-DD5D-5147-DB5C-6EBF4140E72C}"/>
+              </a:ext>
+            </a:extLst>
+          </p:cNvPr>
+          <p:cNvSpPr>
+            <a:spLocks noGrp="1"/>
+          </p:cNvSpPr>
+          <p:nvPr>
+            <p:ph type="sldNum" sz="quarter" idx="12"/>
+          </p:nvPr>
+        </p:nvSpPr>
+        <p:spPr/>
+        <p:txBody>
+          <a:bodyPr/>
+          <a:lstStyle/>
+          <a:p>
+            <a:fld id="{083A2CE0-18CD-4102-B738-4ACFF9E68BA4}" type="slidenum">
+              <a:rPr lang="ko-KR" altLang="en-US" smtClean="0"/>
+              <a:t>12</a:t>
+            </a:fld>
+            <a:endParaRPr lang="ko-KR" altLang="en-US"/>
+          </a:p>
+        </p:txBody>
+      </p:sp>
+      <p:sp>
+        <p:nvSpPr>
+          <p:cNvPr id="8" name="슬라이드 번호 개체 틀 4">
+            <a:extLst>
+              <a:ext uri="{FF2B5EF4-FFF2-40B4-BE49-F238E27FC236}">
+                <a16:creationId xmlns:a16="http://schemas.microsoft.com/office/drawing/2014/main" id="{A7866ED4-0F74-48BC-84C6-42485677A1A4}"/>
               </a:ext>
             </a:extLst>
           </p:cNvPr>
@@ -8081,8 +7634,140 @@
         </p:nvSpPr>
         <p:spPr>
           <a:xfrm>
-            <a:off x="4358478" y="1806765"/>
-            <a:ext cx="7004806" cy="2999141"/>
+            <a:off x="9029700" y="6303732"/>
+            <a:ext cx="2743200" cy="365125"/>
+          </a:xfrm>
+          <a:prstGeom prst="rect">
+            <a:avLst/>
+          </a:prstGeom>
+        </p:spPr>
+        <p:txBody>
+          <a:bodyPr vert="horz" lIns="91440" tIns="45720" rIns="91440" bIns="45720" rtlCol="0" anchor="ctr"/>
+          <a:lstStyle>
+            <a:defPPr>
+              <a:defRPr lang="ko-KR"/>
+            </a:defPPr>
+            <a:lvl1pPr marL="0" algn="r" defTabSz="914400" rtl="0" eaLnBrk="1" latinLnBrk="1" hangingPunct="1">
+              <a:defRPr sz="1200" kern="1200">
+                <a:solidFill>
+                  <a:schemeClr val="tx1">
+                    <a:tint val="75000"/>
+                  </a:schemeClr>
+                </a:solidFill>
+                <a:latin typeface="+mn-lt"/>
+                <a:ea typeface="+mn-ea"/>
+                <a:cs typeface="+mn-cs"/>
+              </a:defRPr>
+            </a:lvl1pPr>
+            <a:lvl2pPr marL="457200" algn="l" defTabSz="914400" rtl="0" eaLnBrk="1" latinLnBrk="1" hangingPunct="1">
+              <a:defRPr sz="1800" kern="1200">
+                <a:solidFill>
+                  <a:schemeClr val="tx1"/>
+                </a:solidFill>
+                <a:latin typeface="+mn-lt"/>
+                <a:ea typeface="+mn-ea"/>
+                <a:cs typeface="+mn-cs"/>
+              </a:defRPr>
+            </a:lvl2pPr>
+            <a:lvl3pPr marL="914400" algn="l" defTabSz="914400" rtl="0" eaLnBrk="1" latinLnBrk="1" hangingPunct="1">
+              <a:defRPr sz="1800" kern="1200">
+                <a:solidFill>
+                  <a:schemeClr val="tx1"/>
+                </a:solidFill>
+                <a:latin typeface="+mn-lt"/>
+                <a:ea typeface="+mn-ea"/>
+                <a:cs typeface="+mn-cs"/>
+              </a:defRPr>
+            </a:lvl3pPr>
+            <a:lvl4pPr marL="1371600" algn="l" defTabSz="914400" rtl="0" eaLnBrk="1" latinLnBrk="1" hangingPunct="1">
+              <a:defRPr sz="1800" kern="1200">
+                <a:solidFill>
+                  <a:schemeClr val="tx1"/>
+                </a:solidFill>
+                <a:latin typeface="+mn-lt"/>
+                <a:ea typeface="+mn-ea"/>
+                <a:cs typeface="+mn-cs"/>
+              </a:defRPr>
+            </a:lvl4pPr>
+            <a:lvl5pPr marL="1828800" algn="l" defTabSz="914400" rtl="0" eaLnBrk="1" latinLnBrk="1" hangingPunct="1">
+              <a:defRPr sz="1800" kern="1200">
+                <a:solidFill>
+                  <a:schemeClr val="tx1"/>
+                </a:solidFill>
+                <a:latin typeface="+mn-lt"/>
+                <a:ea typeface="+mn-ea"/>
+                <a:cs typeface="+mn-cs"/>
+              </a:defRPr>
+            </a:lvl5pPr>
+            <a:lvl6pPr marL="2286000" algn="l" defTabSz="914400" rtl="0" eaLnBrk="1" latinLnBrk="1" hangingPunct="1">
+              <a:defRPr sz="1800" kern="1200">
+                <a:solidFill>
+                  <a:schemeClr val="tx1"/>
+                </a:solidFill>
+                <a:latin typeface="+mn-lt"/>
+                <a:ea typeface="+mn-ea"/>
+                <a:cs typeface="+mn-cs"/>
+              </a:defRPr>
+            </a:lvl6pPr>
+            <a:lvl7pPr marL="2743200" algn="l" defTabSz="914400" rtl="0" eaLnBrk="1" latinLnBrk="1" hangingPunct="1">
+              <a:defRPr sz="1800" kern="1200">
+                <a:solidFill>
+                  <a:schemeClr val="tx1"/>
+                </a:solidFill>
+                <a:latin typeface="+mn-lt"/>
+                <a:ea typeface="+mn-ea"/>
+                <a:cs typeface="+mn-cs"/>
+              </a:defRPr>
+            </a:lvl7pPr>
+            <a:lvl8pPr marL="3200400" algn="l" defTabSz="914400" rtl="0" eaLnBrk="1" latinLnBrk="1" hangingPunct="1">
+              <a:defRPr sz="1800" kern="1200">
+                <a:solidFill>
+                  <a:schemeClr val="tx1"/>
+                </a:solidFill>
+                <a:latin typeface="+mn-lt"/>
+                <a:ea typeface="+mn-ea"/>
+                <a:cs typeface="+mn-cs"/>
+              </a:defRPr>
+            </a:lvl8pPr>
+            <a:lvl9pPr marL="3657600" algn="l" defTabSz="914400" rtl="0" eaLnBrk="1" latinLnBrk="1" hangingPunct="1">
+              <a:defRPr sz="1800" kern="1200">
+                <a:solidFill>
+                  <a:schemeClr val="tx1"/>
+                </a:solidFill>
+                <a:latin typeface="+mn-lt"/>
+                <a:ea typeface="+mn-ea"/>
+                <a:cs typeface="+mn-cs"/>
+              </a:defRPr>
+            </a:lvl9pPr>
+          </a:lstStyle>
+          <a:p>
+            <a:fld id="{083A2CE0-18CD-4102-B738-4ACFF9E68BA4}" type="slidenum">
+              <a:rPr lang="ko-KR" altLang="en-US" smtClean="0"/>
+              <a:pPr/>
+              <a:t>12</a:t>
+            </a:fld>
+            <a:endParaRPr lang="ko-KR" altLang="en-US"/>
+          </a:p>
+        </p:txBody>
+      </p:sp>
+      <p:sp>
+        <p:nvSpPr>
+          <p:cNvPr id="3" name="제목 1">
+            <a:extLst>
+              <a:ext uri="{FF2B5EF4-FFF2-40B4-BE49-F238E27FC236}">
+                <a16:creationId xmlns:a16="http://schemas.microsoft.com/office/drawing/2014/main" id="{43054EBB-F401-BE68-C4D1-B1DC2AE0520E}"/>
+              </a:ext>
+            </a:extLst>
+          </p:cNvPr>
+          <p:cNvSpPr>
+            <a:spLocks noGrp="1"/>
+          </p:cNvSpPr>
+          <p:nvPr/>
+        </p:nvSpPr>
+        <p:spPr>
+          <a:xfrm>
+            <a:off x="1265413" y="1649845"/>
+            <a:ext cx="10023122" cy="2999141"/>
           </a:xfrm>
           <a:prstGeom prst="rect">
             <a:avLst/>
@@ -8114,129 +7799,25 @@
           <a:p>
             <a:pPr algn="ctr"/>
             <a:r>
-              <a:rPr lang="en-US" altLang="ko-KR" sz="8800" b="1" dirty="0">
-                <a:solidFill>
-                  <a:schemeClr val="accent1"/>
-                </a:solidFill>
-              </a:rPr>
-              <a:t>BREAK TIME!!</a:t>
-            </a:r>
-          </a:p>
-        </p:txBody>
-      </p:sp>
-      <p:pic>
-        <p:nvPicPr>
-          <p:cNvPr id="3" name="Picture 2" descr="휴식하면 생기는 우리 몸의 변화들 &lt; 건강 &lt; 기사본문 - 마음건강 길">
-            <a:extLst>
-              <a:ext uri="{FF2B5EF4-FFF2-40B4-BE49-F238E27FC236}">
-                <a16:creationId xmlns:a16="http://schemas.microsoft.com/office/drawing/2014/main" id="{9F17459D-6F7B-6896-B8F4-F7C6F766FA13}"/>
-              </a:ext>
-            </a:extLst>
-          </p:cNvPr>
-          <p:cNvPicPr>
-            <a:picLocks noChangeAspect="1" noChangeArrowheads="1"/>
-          </p:cNvPicPr>
-          <p:nvPr/>
-        </p:nvPicPr>
-        <p:blipFill>
-          <a:blip r:embed="rId3">
-            <a:extLst>
-              <a:ext uri="{28A0092B-C50C-407E-A947-70E740481C1C}">
-                <a14:useLocalDpi xmlns:a14="http://schemas.microsoft.com/office/drawing/2010/main" val="0"/>
-              </a:ext>
-            </a:extLst>
-          </a:blip>
-          <a:srcRect/>
-          <a:stretch>
-            <a:fillRect/>
-          </a:stretch>
-        </p:blipFill>
-        <p:spPr bwMode="auto">
-          <a:xfrm>
-            <a:off x="1296416" y="2583593"/>
-            <a:ext cx="2741843" cy="1827895"/>
-          </a:xfrm>
-          <a:prstGeom prst="rect">
-            <a:avLst/>
-          </a:prstGeom>
-          <a:noFill/>
-          <a:extLst>
-            <a:ext uri="{909E8E84-426E-40DD-AFC4-6F175D3DCCD1}">
-              <a14:hiddenFill xmlns:a14="http://schemas.microsoft.com/office/drawing/2010/main">
-                <a:solidFill>
-                  <a:srgbClr val="FFFFFF"/>
-                </a:solidFill>
-              </a14:hiddenFill>
-            </a:ext>
-          </a:extLst>
-        </p:spPr>
-      </p:pic>
-      <p:sp>
-        <p:nvSpPr>
-          <p:cNvPr id="4" name="제목 1">
-            <a:extLst>
-              <a:ext uri="{FF2B5EF4-FFF2-40B4-BE49-F238E27FC236}">
-                <a16:creationId xmlns:a16="http://schemas.microsoft.com/office/drawing/2014/main" id="{CB7B3A94-2EA2-5E54-5FB0-7291FA08CED7}"/>
-              </a:ext>
-            </a:extLst>
-          </p:cNvPr>
-          <p:cNvSpPr>
-            <a:spLocks noGrp="1"/>
-          </p:cNvSpPr>
-          <p:nvPr/>
-        </p:nvSpPr>
-        <p:spPr>
-          <a:xfrm>
-            <a:off x="5003381" y="3567794"/>
-            <a:ext cx="5715000" cy="1110901"/>
-          </a:xfrm>
-          <a:prstGeom prst="rect">
-            <a:avLst/>
-          </a:prstGeom>
-        </p:spPr>
-        <p:txBody>
-          <a:bodyPr vert="horz" lIns="91440" tIns="45720" rIns="91440" bIns="45720" rtlCol="0" anchor="ctr">
-            <a:noAutofit/>
-          </a:bodyPr>
-          <a:lstStyle>
-            <a:lvl1pPr algn="l" defTabSz="914400" rtl="0" eaLnBrk="1" latinLnBrk="1" hangingPunct="1">
-              <a:lnSpc>
-                <a:spcPct val="90000"/>
-              </a:lnSpc>
-              <a:spcBef>
-                <a:spcPct val="0"/>
-              </a:spcBef>
-              <a:buNone/>
-              <a:defRPr sz="4400" kern="1200">
-                <a:solidFill>
-                  <a:schemeClr val="tx1"/>
-                </a:solidFill>
-                <a:latin typeface="+mj-lt"/>
-                <a:ea typeface="+mj-ea"/>
-                <a:cs typeface="+mj-cs"/>
-              </a:defRPr>
-            </a:lvl1pPr>
-          </a:lstStyle>
-          <a:p>
-            <a:pPr algn="ctr"/>
-            <a:r>
-              <a:rPr lang="ko-KR" altLang="en-US" sz="2000" b="1" dirty="0"/>
-              <a:t>휴식 이후 자기소개 할 예정이니 준비해주세요 </a:t>
-            </a:r>
-            <a:r>
-              <a:rPr lang="en-US" altLang="ko-KR" sz="2000" b="1" dirty="0">
-                <a:sym typeface="Wingdings" panose="05000000000000000000" pitchFamily="2" charset="2"/>
-              </a:rPr>
-              <a:t></a:t>
-            </a:r>
-            <a:endParaRPr lang="en-US" altLang="ko-KR" sz="2000" b="1" dirty="0"/>
+              <a:rPr lang="ko-KR" altLang="en-US" sz="8800" b="1" dirty="0"/>
+              <a:t>션</a:t>
+            </a:r>
+            <a:r>
+              <a:rPr lang="en-US" altLang="ko-KR" sz="8800" b="1" dirty="0"/>
+              <a:t> </a:t>
+            </a:r>
+            <a:r>
+              <a:rPr lang="ko-KR" altLang="en-US" sz="8800" b="1" dirty="0"/>
+              <a:t>리더님</a:t>
+            </a:r>
+            <a:endParaRPr lang="en-US" altLang="ko-KR" sz="3200" b="1" dirty="0"/>
           </a:p>
         </p:txBody>
       </p:sp>
     </p:spTree>
     <p:extLst>
       <p:ext uri="{BB962C8B-B14F-4D97-AF65-F5344CB8AC3E}">
-        <p14:creationId xmlns:p14="http://schemas.microsoft.com/office/powerpoint/2010/main" val="71235578"/>
+        <p14:creationId xmlns:p14="http://schemas.microsoft.com/office/powerpoint/2010/main" val="2020943542"/>
       </p:ext>
     </p:extLst>
   </p:cSld>
@@ -8265,200 +7846,6 @@
       </p:grpSpPr>
       <p:sp>
         <p:nvSpPr>
-          <p:cNvPr id="8" name="직사각형 7">
-            <a:extLst>
-              <a:ext uri="{FF2B5EF4-FFF2-40B4-BE49-F238E27FC236}">
-                <a16:creationId xmlns:a16="http://schemas.microsoft.com/office/drawing/2014/main" id="{5BB94A53-7EB2-9249-2AA7-ADA76A47ACE2}"/>
-              </a:ext>
-            </a:extLst>
-          </p:cNvPr>
-          <p:cNvSpPr/>
-          <p:nvPr/>
-        </p:nvSpPr>
-        <p:spPr>
-          <a:xfrm>
-            <a:off x="1254034" y="2063931"/>
-            <a:ext cx="9666515" cy="2730137"/>
-          </a:xfrm>
-          <a:prstGeom prst="rect">
-            <a:avLst/>
-          </a:prstGeom>
-        </p:spPr>
-        <p:style>
-          <a:lnRef idx="2">
-            <a:schemeClr val="dk1">
-              <a:shade val="50000"/>
-            </a:schemeClr>
-          </a:lnRef>
-          <a:fillRef idx="1">
-            <a:schemeClr val="dk1"/>
-          </a:fillRef>
-          <a:effectRef idx="0">
-            <a:schemeClr val="dk1"/>
-          </a:effectRef>
-          <a:fontRef idx="minor">
-            <a:schemeClr val="lt1"/>
-          </a:fontRef>
-        </p:style>
-        <p:txBody>
-          <a:bodyPr rtlCol="0" anchor="ctr"/>
-          <a:lstStyle/>
-          <a:p>
-            <a:pPr algn="ctr"/>
-            <a:endParaRPr lang="ko-KR" altLang="en-US"/>
-          </a:p>
-        </p:txBody>
-      </p:sp>
-      <p:pic>
-        <p:nvPicPr>
-          <p:cNvPr id="7" name="내용 개체 틀 6">
-            <a:extLst>
-              <a:ext uri="{FF2B5EF4-FFF2-40B4-BE49-F238E27FC236}">
-                <a16:creationId xmlns:a16="http://schemas.microsoft.com/office/drawing/2014/main" id="{D8A1035E-C3E6-CAB4-CB53-772856074142}"/>
-              </a:ext>
-            </a:extLst>
-          </p:cNvPr>
-          <p:cNvPicPr>
-            <a:picLocks noGrp="1" noChangeAspect="1"/>
-          </p:cNvPicPr>
-          <p:nvPr>
-            <p:ph idx="1"/>
-          </p:nvPr>
-        </p:nvPicPr>
-        <p:blipFill>
-          <a:blip r:embed="rId3">
-            <a:extLst>
-              <a:ext uri="{28A0092B-C50C-407E-A947-70E740481C1C}">
-                <a14:useLocalDpi xmlns:a14="http://schemas.microsoft.com/office/drawing/2010/main" val="0"/>
-              </a:ext>
-            </a:extLst>
-          </a:blip>
-          <a:stretch>
-            <a:fillRect/>
-          </a:stretch>
-        </p:blipFill>
-        <p:spPr>
-          <a:xfrm>
-            <a:off x="1288803" y="2298642"/>
-            <a:ext cx="9614394" cy="2260716"/>
-          </a:xfrm>
-        </p:spPr>
-      </p:pic>
-      <p:sp>
-        <p:nvSpPr>
-          <p:cNvPr id="4" name="날짜 개체 틀 3">
-            <a:extLst>
-              <a:ext uri="{FF2B5EF4-FFF2-40B4-BE49-F238E27FC236}">
-                <a16:creationId xmlns:a16="http://schemas.microsoft.com/office/drawing/2014/main" id="{262E0B53-E0E0-F605-AE5D-CBC41626BB09}"/>
-              </a:ext>
-            </a:extLst>
-          </p:cNvPr>
-          <p:cNvSpPr>
-            <a:spLocks noGrp="1"/>
-          </p:cNvSpPr>
-          <p:nvPr>
-            <p:ph type="dt" sz="half" idx="10"/>
-          </p:nvPr>
-        </p:nvSpPr>
-        <p:spPr/>
-        <p:txBody>
-          <a:bodyPr/>
-          <a:lstStyle/>
-          <a:p>
-            <a:fld id="{3C9CE3CE-253F-4F9D-BA15-C226C8D8501E}" type="datetime6">
-              <a:rPr lang="ko-KR" altLang="en-US" smtClean="0"/>
-              <a:t>2024년 5월</a:t>
-            </a:fld>
-            <a:endParaRPr lang="ko-KR" altLang="en-US"/>
-          </a:p>
-        </p:txBody>
-      </p:sp>
-      <p:sp>
-        <p:nvSpPr>
-          <p:cNvPr id="5" name="슬라이드 번호 개체 틀 4">
-            <a:extLst>
-              <a:ext uri="{FF2B5EF4-FFF2-40B4-BE49-F238E27FC236}">
-                <a16:creationId xmlns:a16="http://schemas.microsoft.com/office/drawing/2014/main" id="{F07E3F96-E9FB-A7CD-5BE4-ECB3A6952CA2}"/>
-              </a:ext>
-            </a:extLst>
-          </p:cNvPr>
-          <p:cNvSpPr>
-            <a:spLocks noGrp="1"/>
-          </p:cNvSpPr>
-          <p:nvPr>
-            <p:ph type="sldNum" sz="quarter" idx="12"/>
-          </p:nvPr>
-        </p:nvSpPr>
-        <p:spPr/>
-        <p:txBody>
-          <a:bodyPr/>
-          <a:lstStyle/>
-          <a:p>
-            <a:fld id="{083A2CE0-18CD-4102-B738-4ACFF9E68BA4}" type="slidenum">
-              <a:rPr lang="ko-KR" altLang="en-US" smtClean="0"/>
-              <a:t>13</a:t>
-            </a:fld>
-            <a:endParaRPr lang="ko-KR" altLang="en-US"/>
-          </a:p>
-        </p:txBody>
-      </p:sp>
-      <p:sp>
-        <p:nvSpPr>
-          <p:cNvPr id="2" name="제목 1">
-            <a:extLst>
-              <a:ext uri="{FF2B5EF4-FFF2-40B4-BE49-F238E27FC236}">
-                <a16:creationId xmlns:a16="http://schemas.microsoft.com/office/drawing/2014/main" id="{DBCF21E7-CA19-7543-C877-324BE0E54368}"/>
-              </a:ext>
-            </a:extLst>
-          </p:cNvPr>
-          <p:cNvSpPr>
-            <a:spLocks noGrp="1"/>
-          </p:cNvSpPr>
-          <p:nvPr>
-            <p:ph type="title"/>
-          </p:nvPr>
-        </p:nvSpPr>
-        <p:spPr/>
-        <p:txBody>
-          <a:bodyPr/>
-          <a:lstStyle/>
-          <a:p>
-            <a:endParaRPr lang="ko-KR" altLang="en-US" dirty="0"/>
-          </a:p>
-        </p:txBody>
-      </p:sp>
-    </p:spTree>
-    <p:extLst>
-      <p:ext uri="{BB962C8B-B14F-4D97-AF65-F5344CB8AC3E}">
-        <p14:creationId xmlns:p14="http://schemas.microsoft.com/office/powerpoint/2010/main" val="3754047923"/>
-      </p:ext>
-    </p:extLst>
-  </p:cSld>
-  <p:clrMapOvr>
-    <a:masterClrMapping/>
-  </p:clrMapOvr>
-</p:sld>
-</file>
-
-<file path=ppt/slides/slide14.xml><?xml version="1.0" encoding="utf-8"?>
-<p:sld xmlns:a="http://schemas.openxmlformats.org/drawingml/2006/main" xmlns:r="http://schemas.openxmlformats.org/officeDocument/2006/relationships" xmlns:p="http://schemas.openxmlformats.org/presentationml/2006/main">
-  <p:cSld>
-    <p:spTree>
-      <p:nvGrpSpPr>
-        <p:cNvPr id="1" name=""/>
-        <p:cNvGrpSpPr/>
-        <p:nvPr/>
-      </p:nvGrpSpPr>
-      <p:grpSpPr>
-        <a:xfrm>
-          <a:off x="0" y="0"/>
-          <a:ext cx="0" cy="0"/>
-          <a:chOff x="0" y="0"/>
-          <a:chExt cx="0" cy="0"/>
-        </a:xfrm>
-      </p:grpSpPr>
-      <p:sp>
-        <p:nvSpPr>
           <p:cNvPr id="4" name="날짜 개체 틀 3">
             <a:extLst>
               <a:ext uri="{FF2B5EF4-FFF2-40B4-BE49-F238E27FC236}">
@@ -8509,7 +7896,7 @@
           <a:p>
             <a:fld id="{083A2CE0-18CD-4102-B738-4ACFF9E68BA4}" type="slidenum">
               <a:rPr lang="ko-KR" altLang="en-US" smtClean="0"/>
-              <a:t>14</a:t>
+              <a:t>13</a:t>
             </a:fld>
             <a:endParaRPr lang="ko-KR" altLang="en-US"/>
           </a:p>
@@ -8641,7 +8028,7 @@
             <a:fld id="{083A2CE0-18CD-4102-B738-4ACFF9E68BA4}" type="slidenum">
               <a:rPr lang="ko-KR" altLang="en-US" smtClean="0"/>
               <a:pPr/>
-              <a:t>14</a:t>
+              <a:t>13</a:t>
             </a:fld>
             <a:endParaRPr lang="ko-KR" altLang="en-US"/>
           </a:p>
@@ -8696,290 +8083,6 @@
           <a:p>
             <a:pPr algn="ctr"/>
             <a:r>
-              <a:rPr lang="ko-KR" altLang="en-US" sz="8800" b="1" dirty="0"/>
-              <a:t>션</a:t>
-            </a:r>
-            <a:r>
-              <a:rPr lang="en-US" altLang="ko-KR" sz="8800" b="1" dirty="0"/>
-              <a:t> </a:t>
-            </a:r>
-            <a:r>
-              <a:rPr lang="ko-KR" altLang="en-US" sz="8800" b="1" dirty="0"/>
-              <a:t>리더님</a:t>
-            </a:r>
-            <a:endParaRPr lang="en-US" altLang="ko-KR" sz="3200" b="1" dirty="0"/>
-          </a:p>
-        </p:txBody>
-      </p:sp>
-    </p:spTree>
-    <p:extLst>
-      <p:ext uri="{BB962C8B-B14F-4D97-AF65-F5344CB8AC3E}">
-        <p14:creationId xmlns:p14="http://schemas.microsoft.com/office/powerpoint/2010/main" val="2020943542"/>
-      </p:ext>
-    </p:extLst>
-  </p:cSld>
-  <p:clrMapOvr>
-    <a:masterClrMapping/>
-  </p:clrMapOvr>
-</p:sld>
-</file>
-
-<file path=ppt/slides/slide15.xml><?xml version="1.0" encoding="utf-8"?>
-<p:sld xmlns:a="http://schemas.openxmlformats.org/drawingml/2006/main" xmlns:r="http://schemas.openxmlformats.org/officeDocument/2006/relationships" xmlns:p="http://schemas.openxmlformats.org/presentationml/2006/main">
-  <p:cSld>
-    <p:spTree>
-      <p:nvGrpSpPr>
-        <p:cNvPr id="1" name=""/>
-        <p:cNvGrpSpPr/>
-        <p:nvPr/>
-      </p:nvGrpSpPr>
-      <p:grpSpPr>
-        <a:xfrm>
-          <a:off x="0" y="0"/>
-          <a:ext cx="0" cy="0"/>
-          <a:chOff x="0" y="0"/>
-          <a:chExt cx="0" cy="0"/>
-        </a:xfrm>
-      </p:grpSpPr>
-      <p:sp>
-        <p:nvSpPr>
-          <p:cNvPr id="4" name="날짜 개체 틀 3">
-            <a:extLst>
-              <a:ext uri="{FF2B5EF4-FFF2-40B4-BE49-F238E27FC236}">
-                <a16:creationId xmlns:a16="http://schemas.microsoft.com/office/drawing/2014/main" id="{8692A623-1E1A-7CB9-1FC7-84129EFA1C30}"/>
-              </a:ext>
-            </a:extLst>
-          </p:cNvPr>
-          <p:cNvSpPr>
-            <a:spLocks noGrp="1"/>
-          </p:cNvSpPr>
-          <p:nvPr>
-            <p:ph type="dt" sz="half" idx="10"/>
-          </p:nvPr>
-        </p:nvSpPr>
-        <p:spPr/>
-        <p:txBody>
-          <a:bodyPr/>
-          <a:lstStyle/>
-          <a:p>
-            <a:fld id="{2CFBFBFA-EBC3-4288-86D0-55A69B340430}" type="datetime6">
-              <a:rPr lang="ko-KR" altLang="en-US" smtClean="0"/>
-              <a:t>2024년 5월</a:t>
-            </a:fld>
-            <a:endParaRPr lang="ko-KR" altLang="en-US"/>
-          </a:p>
-        </p:txBody>
-      </p:sp>
-      <p:sp>
-        <p:nvSpPr>
-          <p:cNvPr id="5" name="슬라이드 번호 개체 틀 4">
-            <a:extLst>
-              <a:ext uri="{FF2B5EF4-FFF2-40B4-BE49-F238E27FC236}">
-                <a16:creationId xmlns:a16="http://schemas.microsoft.com/office/drawing/2014/main" id="{0A828EB3-DD5D-5147-DB5C-6EBF4140E72C}"/>
-              </a:ext>
-            </a:extLst>
-          </p:cNvPr>
-          <p:cNvSpPr>
-            <a:spLocks noGrp="1"/>
-          </p:cNvSpPr>
-          <p:nvPr>
-            <p:ph type="sldNum" sz="quarter" idx="12"/>
-          </p:nvPr>
-        </p:nvSpPr>
-        <p:spPr/>
-        <p:txBody>
-          <a:bodyPr/>
-          <a:lstStyle/>
-          <a:p>
-            <a:fld id="{083A2CE0-18CD-4102-B738-4ACFF9E68BA4}" type="slidenum">
-              <a:rPr lang="ko-KR" altLang="en-US" smtClean="0"/>
-              <a:t>15</a:t>
-            </a:fld>
-            <a:endParaRPr lang="ko-KR" altLang="en-US"/>
-          </a:p>
-        </p:txBody>
-      </p:sp>
-      <p:sp>
-        <p:nvSpPr>
-          <p:cNvPr id="8" name="슬라이드 번호 개체 틀 4">
-            <a:extLst>
-              <a:ext uri="{FF2B5EF4-FFF2-40B4-BE49-F238E27FC236}">
-                <a16:creationId xmlns:a16="http://schemas.microsoft.com/office/drawing/2014/main" id="{A7866ED4-0F74-48BC-84C6-42485677A1A4}"/>
-              </a:ext>
-            </a:extLst>
-          </p:cNvPr>
-          <p:cNvSpPr>
-            <a:spLocks noGrp="1"/>
-          </p:cNvSpPr>
-          <p:nvPr/>
-        </p:nvSpPr>
-        <p:spPr>
-          <a:xfrm>
-            <a:off x="9029700" y="6303732"/>
-            <a:ext cx="2743200" cy="365125"/>
-          </a:xfrm>
-          <a:prstGeom prst="rect">
-            <a:avLst/>
-          </a:prstGeom>
-        </p:spPr>
-        <p:txBody>
-          <a:bodyPr vert="horz" lIns="91440" tIns="45720" rIns="91440" bIns="45720" rtlCol="0" anchor="ctr"/>
-          <a:lstStyle>
-            <a:defPPr>
-              <a:defRPr lang="ko-KR"/>
-            </a:defPPr>
-            <a:lvl1pPr marL="0" algn="r" defTabSz="914400" rtl="0" eaLnBrk="1" latinLnBrk="1" hangingPunct="1">
-              <a:defRPr sz="1200" kern="1200">
-                <a:solidFill>
-                  <a:schemeClr val="tx1">
-                    <a:tint val="75000"/>
-                  </a:schemeClr>
-                </a:solidFill>
-                <a:latin typeface="+mn-lt"/>
-                <a:ea typeface="+mn-ea"/>
-                <a:cs typeface="+mn-cs"/>
-              </a:defRPr>
-            </a:lvl1pPr>
-            <a:lvl2pPr marL="457200" algn="l" defTabSz="914400" rtl="0" eaLnBrk="1" latinLnBrk="1" hangingPunct="1">
-              <a:defRPr sz="1800" kern="1200">
-                <a:solidFill>
-                  <a:schemeClr val="tx1"/>
-                </a:solidFill>
-                <a:latin typeface="+mn-lt"/>
-                <a:ea typeface="+mn-ea"/>
-                <a:cs typeface="+mn-cs"/>
-              </a:defRPr>
-            </a:lvl2pPr>
-            <a:lvl3pPr marL="914400" algn="l" defTabSz="914400" rtl="0" eaLnBrk="1" latinLnBrk="1" hangingPunct="1">
-              <a:defRPr sz="1800" kern="1200">
-                <a:solidFill>
-                  <a:schemeClr val="tx1"/>
-                </a:solidFill>
-                <a:latin typeface="+mn-lt"/>
-                <a:ea typeface="+mn-ea"/>
-                <a:cs typeface="+mn-cs"/>
-              </a:defRPr>
-            </a:lvl3pPr>
-            <a:lvl4pPr marL="1371600" algn="l" defTabSz="914400" rtl="0" eaLnBrk="1" latinLnBrk="1" hangingPunct="1">
-              <a:defRPr sz="1800" kern="1200">
-                <a:solidFill>
-                  <a:schemeClr val="tx1"/>
-                </a:solidFill>
-                <a:latin typeface="+mn-lt"/>
-                <a:ea typeface="+mn-ea"/>
-                <a:cs typeface="+mn-cs"/>
-              </a:defRPr>
-            </a:lvl4pPr>
-            <a:lvl5pPr marL="1828800" algn="l" defTabSz="914400" rtl="0" eaLnBrk="1" latinLnBrk="1" hangingPunct="1">
-              <a:defRPr sz="1800" kern="1200">
-                <a:solidFill>
-                  <a:schemeClr val="tx1"/>
-                </a:solidFill>
-                <a:latin typeface="+mn-lt"/>
-                <a:ea typeface="+mn-ea"/>
-                <a:cs typeface="+mn-cs"/>
-              </a:defRPr>
-            </a:lvl5pPr>
-            <a:lvl6pPr marL="2286000" algn="l" defTabSz="914400" rtl="0" eaLnBrk="1" latinLnBrk="1" hangingPunct="1">
-              <a:defRPr sz="1800" kern="1200">
-                <a:solidFill>
-                  <a:schemeClr val="tx1"/>
-                </a:solidFill>
-                <a:latin typeface="+mn-lt"/>
-                <a:ea typeface="+mn-ea"/>
-                <a:cs typeface="+mn-cs"/>
-              </a:defRPr>
-            </a:lvl6pPr>
-            <a:lvl7pPr marL="2743200" algn="l" defTabSz="914400" rtl="0" eaLnBrk="1" latinLnBrk="1" hangingPunct="1">
-              <a:defRPr sz="1800" kern="1200">
-                <a:solidFill>
-                  <a:schemeClr val="tx1"/>
-                </a:solidFill>
-                <a:latin typeface="+mn-lt"/>
-                <a:ea typeface="+mn-ea"/>
-                <a:cs typeface="+mn-cs"/>
-              </a:defRPr>
-            </a:lvl7pPr>
-            <a:lvl8pPr marL="3200400" algn="l" defTabSz="914400" rtl="0" eaLnBrk="1" latinLnBrk="1" hangingPunct="1">
-              <a:defRPr sz="1800" kern="1200">
-                <a:solidFill>
-                  <a:schemeClr val="tx1"/>
-                </a:solidFill>
-                <a:latin typeface="+mn-lt"/>
-                <a:ea typeface="+mn-ea"/>
-                <a:cs typeface="+mn-cs"/>
-              </a:defRPr>
-            </a:lvl8pPr>
-            <a:lvl9pPr marL="3657600" algn="l" defTabSz="914400" rtl="0" eaLnBrk="1" latinLnBrk="1" hangingPunct="1">
-              <a:defRPr sz="1800" kern="1200">
-                <a:solidFill>
-                  <a:schemeClr val="tx1"/>
-                </a:solidFill>
-                <a:latin typeface="+mn-lt"/>
-                <a:ea typeface="+mn-ea"/>
-                <a:cs typeface="+mn-cs"/>
-              </a:defRPr>
-            </a:lvl9pPr>
-          </a:lstStyle>
-          <a:p>
-            <a:fld id="{083A2CE0-18CD-4102-B738-4ACFF9E68BA4}" type="slidenum">
-              <a:rPr lang="ko-KR" altLang="en-US" smtClean="0"/>
-              <a:pPr/>
-              <a:t>15</a:t>
-            </a:fld>
-            <a:endParaRPr lang="ko-KR" altLang="en-US"/>
-          </a:p>
-        </p:txBody>
-      </p:sp>
-      <p:sp>
-        <p:nvSpPr>
-          <p:cNvPr id="3" name="제목 1">
-            <a:extLst>
-              <a:ext uri="{FF2B5EF4-FFF2-40B4-BE49-F238E27FC236}">
-                <a16:creationId xmlns:a16="http://schemas.microsoft.com/office/drawing/2014/main" id="{43054EBB-F401-BE68-C4D1-B1DC2AE0520E}"/>
-              </a:ext>
-            </a:extLst>
-          </p:cNvPr>
-          <p:cNvSpPr>
-            <a:spLocks noGrp="1"/>
-          </p:cNvSpPr>
-          <p:nvPr/>
-        </p:nvSpPr>
-        <p:spPr>
-          <a:xfrm>
-            <a:off x="1265413" y="1649845"/>
-            <a:ext cx="10023122" cy="2999141"/>
-          </a:xfrm>
-          <a:prstGeom prst="rect">
-            <a:avLst/>
-          </a:prstGeom>
-        </p:spPr>
-        <p:txBody>
-          <a:bodyPr vert="horz" lIns="91440" tIns="45720" rIns="91440" bIns="45720" rtlCol="0" anchor="ctr">
-            <a:normAutofit/>
-          </a:bodyPr>
-          <a:lstStyle>
-            <a:lvl1pPr algn="l" defTabSz="914400" rtl="0" eaLnBrk="1" latinLnBrk="1" hangingPunct="1">
-              <a:lnSpc>
-                <a:spcPct val="90000"/>
-              </a:lnSpc>
-              <a:spcBef>
-                <a:spcPct val="0"/>
-              </a:spcBef>
-              <a:buNone/>
-              <a:defRPr sz="4400" kern="1200">
-                <a:solidFill>
-                  <a:schemeClr val="tx1"/>
-                </a:solidFill>
-                <a:latin typeface="+mj-lt"/>
-                <a:ea typeface="+mj-ea"/>
-                <a:cs typeface="+mj-cs"/>
-              </a:defRPr>
-            </a:lvl1pPr>
-          </a:lstStyle>
-          <a:p>
-            <a:pPr algn="ctr"/>
-            <a:r>
               <a:rPr lang="ko-KR" altLang="en-US" sz="8800" b="1" dirty="0" err="1"/>
               <a:t>데이먼</a:t>
             </a:r>
@@ -9008,7 +8111,7 @@
 </p:sld>
 </file>
 
-<file path=ppt/slides/slide16.xml><?xml version="1.0" encoding="utf-8"?>
+<file path=ppt/slides/slide14.xml><?xml version="1.0" encoding="utf-8"?>
 <p:sld xmlns:a="http://schemas.openxmlformats.org/drawingml/2006/main" xmlns:r="http://schemas.openxmlformats.org/officeDocument/2006/relationships" xmlns:p="http://schemas.openxmlformats.org/presentationml/2006/main">
   <p:cSld>
     <p:spTree>
@@ -9074,7 +8177,7 @@
 </p:sld>
 </file>
 
-<file path=ppt/slides/slide17.xml><?xml version="1.0" encoding="utf-8"?>
+<file path=ppt/slides/slide15.xml><?xml version="1.0" encoding="utf-8"?>
 <p:sld xmlns:a="http://schemas.openxmlformats.org/drawingml/2006/main" xmlns:r="http://schemas.openxmlformats.org/officeDocument/2006/relationships" xmlns:p="http://schemas.openxmlformats.org/presentationml/2006/main">
   <p:cSld>
     <p:spTree>
@@ -9143,7 +8246,7 @@
           <a:p>
             <a:fld id="{083A2CE0-18CD-4102-B738-4ACFF9E68BA4}" type="slidenum">
               <a:rPr lang="ko-KR" altLang="en-US" smtClean="0"/>
-              <a:t>17</a:t>
+              <a:t>15</a:t>
             </a:fld>
             <a:endParaRPr lang="ko-KR" altLang="en-US"/>
           </a:p>
@@ -9275,7 +8378,7 @@
             <a:fld id="{083A2CE0-18CD-4102-B738-4ACFF9E68BA4}" type="slidenum">
               <a:rPr lang="ko-KR" altLang="en-US" smtClean="0"/>
               <a:pPr/>
-              <a:t>17</a:t>
+              <a:t>15</a:t>
             </a:fld>
             <a:endParaRPr lang="ko-KR" altLang="en-US"/>
           </a:p>
@@ -9403,7 +8506,7 @@
         </p:nvSpPr>
         <p:spPr>
           <a:xfrm>
-            <a:off x="1265413" y="971147"/>
+            <a:off x="1350755" y="1218574"/>
             <a:ext cx="10023122" cy="2999141"/>
           </a:xfrm>
           <a:prstGeom prst="rect">
@@ -9451,62 +8554,62 @@
           <a:p>
             <a:pPr algn="ctr"/>
             <a:r>
-              <a:rPr lang="en-US" altLang="ko-KR" sz="3200" dirty="0"/>
+              <a:rPr lang="en-US" altLang="ko-KR" sz="2400" dirty="0"/>
               <a:t>feat. MBTI, </a:t>
             </a:r>
             <a:r>
-              <a:rPr lang="ko-KR" altLang="en-US" sz="3200" dirty="0"/>
+              <a:rPr lang="ko-KR" altLang="en-US" sz="2400" dirty="0"/>
               <a:t>취미</a:t>
             </a:r>
             <a:r>
-              <a:rPr lang="en-US" altLang="ko-KR" sz="3200" dirty="0"/>
+              <a:rPr lang="en-US" altLang="ko-KR" sz="2400" dirty="0"/>
               <a:t>, </a:t>
             </a:r>
             <a:r>
-              <a:rPr lang="ko-KR" altLang="en-US" sz="3200" dirty="0"/>
+              <a:rPr lang="ko-KR" altLang="en-US" sz="2400" dirty="0"/>
               <a:t>프론트</a:t>
             </a:r>
             <a:r>
-              <a:rPr lang="en-US" altLang="ko-KR" sz="3200" dirty="0"/>
+              <a:rPr lang="en-US" altLang="ko-KR" sz="2400" dirty="0"/>
               <a:t>/</a:t>
             </a:r>
             <a:r>
-              <a:rPr lang="ko-KR" altLang="en-US" sz="3200" dirty="0"/>
+              <a:rPr lang="ko-KR" altLang="en-US" sz="2400" dirty="0"/>
               <a:t>백</a:t>
             </a:r>
             <a:r>
-              <a:rPr lang="en-US" altLang="ko-KR" sz="3200" dirty="0"/>
+              <a:rPr lang="en-US" altLang="ko-KR" sz="2400" dirty="0"/>
               <a:t>, </a:t>
             </a:r>
             <a:r>
-              <a:rPr lang="ko-KR" altLang="en-US" sz="3200" dirty="0"/>
+              <a:rPr lang="ko-KR" altLang="en-US" sz="2400" dirty="0"/>
               <a:t>취</a:t>
             </a:r>
             <a:r>
-              <a:rPr lang="en-US" altLang="ko-KR" sz="3200" dirty="0"/>
+              <a:rPr lang="en-US" altLang="ko-KR" sz="2400" dirty="0"/>
               <a:t>/</a:t>
             </a:r>
             <a:r>
-              <a:rPr lang="ko-KR" altLang="en-US" sz="3200" dirty="0"/>
+              <a:rPr lang="ko-KR" altLang="en-US" sz="2400" dirty="0"/>
               <a:t>창업</a:t>
             </a:r>
             <a:r>
-              <a:rPr lang="en-US" altLang="ko-KR" sz="3200" dirty="0"/>
+              <a:rPr lang="en-US" altLang="ko-KR" sz="2400" dirty="0"/>
               <a:t>, </a:t>
             </a:r>
             <a:r>
-              <a:rPr lang="ko-KR" altLang="en-US" sz="3200" dirty="0"/>
+              <a:rPr lang="ko-KR" altLang="en-US" sz="2400" dirty="0"/>
               <a:t>목표</a:t>
             </a:r>
             <a:r>
-              <a:rPr lang="en-US" altLang="ko-KR" sz="3200" dirty="0"/>
+              <a:rPr lang="en-US" altLang="ko-KR" sz="2400" dirty="0"/>
               <a:t>… </a:t>
             </a:r>
             <a:r>
-              <a:rPr lang="ko-KR" altLang="en-US" sz="3200" dirty="0"/>
+              <a:rPr lang="ko-KR" altLang="en-US" sz="2400" dirty="0"/>
               <a:t>등등</a:t>
             </a:r>
-            <a:endParaRPr lang="en-US" altLang="ko-KR" sz="3200" dirty="0"/>
+            <a:endParaRPr lang="en-US" altLang="ko-KR" sz="2400" dirty="0"/>
           </a:p>
         </p:txBody>
       </p:sp>
@@ -9523,7 +8626,7 @@
 </p:sld>
 </file>
 
-<file path=ppt/slides/slide18.xml><?xml version="1.0" encoding="utf-8"?>
+<file path=ppt/slides/slide16.xml><?xml version="1.0" encoding="utf-8"?>
 <p:sld xmlns:a="http://schemas.openxmlformats.org/drawingml/2006/main" xmlns:r="http://schemas.openxmlformats.org/officeDocument/2006/relationships" xmlns:p="http://schemas.openxmlformats.org/presentationml/2006/main">
   <p:cSld>
     <p:spTree>
@@ -9690,7 +8793,7 @@
             <a:pPr algn="ctr"/>
             <a:r>
               <a:rPr lang="ko-KR" altLang="en-US" sz="2000" b="1" dirty="0" err="1"/>
-              <a:t>코딩오울과</a:t>
+              <a:t>오울이와</a:t>
             </a:r>
             <a:r>
               <a:rPr lang="ko-KR" altLang="en-US" sz="2000" b="1" dirty="0"/>
@@ -9704,6 +8807,375 @@
     <p:extLst>
       <p:ext uri="{BB962C8B-B14F-4D97-AF65-F5344CB8AC3E}">
         <p14:creationId xmlns:p14="http://schemas.microsoft.com/office/powerpoint/2010/main" val="1797300016"/>
+      </p:ext>
+    </p:extLst>
+  </p:cSld>
+  <p:clrMapOvr>
+    <a:masterClrMapping/>
+  </p:clrMapOvr>
+</p:sld>
+</file>
+
+<file path=ppt/slides/slide17.xml><?xml version="1.0" encoding="utf-8"?>
+<p:sld xmlns:a="http://schemas.openxmlformats.org/drawingml/2006/main" xmlns:r="http://schemas.openxmlformats.org/officeDocument/2006/relationships" xmlns:p="http://schemas.openxmlformats.org/presentationml/2006/main">
+  <p:cSld>
+    <p:spTree>
+      <p:nvGrpSpPr>
+        <p:cNvPr id="1" name=""/>
+        <p:cNvGrpSpPr/>
+        <p:nvPr/>
+      </p:nvGrpSpPr>
+      <p:grpSpPr>
+        <a:xfrm>
+          <a:off x="0" y="0"/>
+          <a:ext cx="0" cy="0"/>
+          <a:chOff x="0" y="0"/>
+          <a:chExt cx="0" cy="0"/>
+        </a:xfrm>
+      </p:grpSpPr>
+      <p:sp>
+        <p:nvSpPr>
+          <p:cNvPr id="2" name="날짜 개체 틀 1"/>
+          <p:cNvSpPr>
+            <a:spLocks noGrp="1"/>
+          </p:cNvSpPr>
+          <p:nvPr>
+            <p:ph type="dt" sz="half" idx="10"/>
+          </p:nvPr>
+        </p:nvSpPr>
+        <p:spPr/>
+        <p:txBody>
+          <a:bodyPr/>
+          <a:lstStyle/>
+          <a:p>
+            <a:fld id="{0E19CB95-6D28-40F1-9DA3-1BAC5D4B5B4F}" type="datetime6">
+              <a:rPr lang="ko-KR" altLang="en-US" smtClean="0"/>
+              <a:t>2024년 5월</a:t>
+            </a:fld>
+            <a:endParaRPr lang="ko-KR" altLang="en-US"/>
+          </a:p>
+        </p:txBody>
+      </p:sp>
+      <p:sp>
+        <p:nvSpPr>
+          <p:cNvPr id="3" name="슬라이드 번호 개체 틀 2"/>
+          <p:cNvSpPr>
+            <a:spLocks noGrp="1"/>
+          </p:cNvSpPr>
+          <p:nvPr>
+            <p:ph type="sldNum" sz="quarter" idx="12"/>
+          </p:nvPr>
+        </p:nvSpPr>
+        <p:spPr/>
+        <p:txBody>
+          <a:bodyPr/>
+          <a:lstStyle/>
+          <a:p>
+            <a:fld id="{083A2CE0-18CD-4102-B738-4ACFF9E68BA4}" type="slidenum">
+              <a:rPr lang="ko-KR" altLang="en-US" smtClean="0"/>
+              <a:t>17</a:t>
+            </a:fld>
+            <a:endParaRPr lang="ko-KR" altLang="en-US"/>
+          </a:p>
+        </p:txBody>
+      </p:sp>
+      <p:sp>
+        <p:nvSpPr>
+          <p:cNvPr id="4" name="제목 3"/>
+          <p:cNvSpPr>
+            <a:spLocks noGrp="1"/>
+          </p:cNvSpPr>
+          <p:nvPr>
+            <p:ph type="title"/>
+          </p:nvPr>
+        </p:nvSpPr>
+        <p:spPr/>
+        <p:txBody>
+          <a:bodyPr/>
+          <a:lstStyle/>
+          <a:p>
+            <a:r>
+              <a:rPr lang="en-US" altLang="ko-KR" dirty="0" err="1"/>
+              <a:t>Git</a:t>
+            </a:r>
+            <a:endParaRPr lang="ko-KR" altLang="en-US" dirty="0"/>
+          </a:p>
+        </p:txBody>
+      </p:sp>
+    </p:spTree>
+    <p:extLst>
+      <p:ext uri="{BB962C8B-B14F-4D97-AF65-F5344CB8AC3E}">
+        <p14:creationId xmlns:p14="http://schemas.microsoft.com/office/powerpoint/2010/main" val="1583756813"/>
+      </p:ext>
+    </p:extLst>
+  </p:cSld>
+  <p:clrMapOvr>
+    <a:masterClrMapping/>
+  </p:clrMapOvr>
+</p:sld>
+</file>
+
+<file path=ppt/slides/slide18.xml><?xml version="1.0" encoding="utf-8"?>
+<p:sld xmlns:a="http://schemas.openxmlformats.org/drawingml/2006/main" xmlns:r="http://schemas.openxmlformats.org/officeDocument/2006/relationships" xmlns:p="http://schemas.openxmlformats.org/presentationml/2006/main">
+  <p:cSld>
+    <p:spTree>
+      <p:nvGrpSpPr>
+        <p:cNvPr id="1" name=""/>
+        <p:cNvGrpSpPr/>
+        <p:nvPr/>
+      </p:nvGrpSpPr>
+      <p:grpSpPr>
+        <a:xfrm>
+          <a:off x="0" y="0"/>
+          <a:ext cx="0" cy="0"/>
+          <a:chOff x="0" y="0"/>
+          <a:chExt cx="0" cy="0"/>
+        </a:xfrm>
+      </p:grpSpPr>
+      <p:sp>
+        <p:nvSpPr>
+          <p:cNvPr id="4" name="날짜 개체 틀 3">
+            <a:extLst>
+              <a:ext uri="{FF2B5EF4-FFF2-40B4-BE49-F238E27FC236}">
+                <a16:creationId xmlns:a16="http://schemas.microsoft.com/office/drawing/2014/main" id="{284930C1-3800-3283-7676-67E65B80E7F7}"/>
+              </a:ext>
+            </a:extLst>
+          </p:cNvPr>
+          <p:cNvSpPr>
+            <a:spLocks noGrp="1"/>
+          </p:cNvSpPr>
+          <p:nvPr>
+            <p:ph type="dt" sz="half" idx="10"/>
+          </p:nvPr>
+        </p:nvSpPr>
+        <p:spPr/>
+        <p:txBody>
+          <a:bodyPr/>
+          <a:lstStyle/>
+          <a:p>
+            <a:fld id="{BF037577-ED6E-4A9A-BE84-A36FE19DAF55}" type="datetime6">
+              <a:rPr lang="ko-KR" altLang="en-US" smtClean="0"/>
+              <a:t>2024년 5월</a:t>
+            </a:fld>
+            <a:endParaRPr lang="ko-KR" altLang="en-US"/>
+          </a:p>
+        </p:txBody>
+      </p:sp>
+      <p:sp>
+        <p:nvSpPr>
+          <p:cNvPr id="5" name="슬라이드 번호 개체 틀 4">
+            <a:extLst>
+              <a:ext uri="{FF2B5EF4-FFF2-40B4-BE49-F238E27FC236}">
+                <a16:creationId xmlns:a16="http://schemas.microsoft.com/office/drawing/2014/main" id="{03BA4E39-F813-5D2B-7587-E29FCBC8261A}"/>
+              </a:ext>
+            </a:extLst>
+          </p:cNvPr>
+          <p:cNvSpPr>
+            <a:spLocks noGrp="1"/>
+          </p:cNvSpPr>
+          <p:nvPr>
+            <p:ph type="sldNum" sz="quarter" idx="12"/>
+          </p:nvPr>
+        </p:nvSpPr>
+        <p:spPr/>
+        <p:txBody>
+          <a:bodyPr/>
+          <a:lstStyle/>
+          <a:p>
+            <a:fld id="{083A2CE0-18CD-4102-B738-4ACFF9E68BA4}" type="slidenum">
+              <a:rPr lang="ko-KR" altLang="en-US" smtClean="0"/>
+              <a:t>18</a:t>
+            </a:fld>
+            <a:endParaRPr lang="ko-KR" altLang="en-US"/>
+          </a:p>
+        </p:txBody>
+      </p:sp>
+      <p:sp>
+        <p:nvSpPr>
+          <p:cNvPr id="2" name="제목 1">
+            <a:extLst>
+              <a:ext uri="{FF2B5EF4-FFF2-40B4-BE49-F238E27FC236}">
+                <a16:creationId xmlns:a16="http://schemas.microsoft.com/office/drawing/2014/main" id="{2734CB21-9153-185C-018C-D40EE0325E61}"/>
+              </a:ext>
+            </a:extLst>
+          </p:cNvPr>
+          <p:cNvSpPr>
+            <a:spLocks noGrp="1"/>
+          </p:cNvSpPr>
+          <p:nvPr>
+            <p:ph type="title"/>
+          </p:nvPr>
+        </p:nvSpPr>
+        <p:spPr/>
+        <p:txBody>
+          <a:bodyPr/>
+          <a:lstStyle/>
+          <a:p>
+            <a:r>
+              <a:rPr lang="ko-KR" altLang="en-US" dirty="0"/>
+              <a:t>좋은 포트폴리오를 가꿔보자</a:t>
+            </a:r>
+            <a:r>
+              <a:rPr lang="en-US" altLang="ko-KR" dirty="0"/>
+              <a:t>!</a:t>
+            </a:r>
+            <a:endParaRPr lang="ko-KR" altLang="en-US" dirty="0"/>
+          </a:p>
+        </p:txBody>
+      </p:sp>
+      <p:pic>
+        <p:nvPicPr>
+          <p:cNvPr id="2052" name="Picture 4" descr="개발자 이력서 작성하기 (feat. 이력서 공개) | Wonny Log">
+            <a:extLst>
+              <a:ext uri="{FF2B5EF4-FFF2-40B4-BE49-F238E27FC236}">
+                <a16:creationId xmlns:a16="http://schemas.microsoft.com/office/drawing/2014/main" id="{9A1B6276-E204-7797-6B8C-3218CC40F9A6}"/>
+              </a:ext>
+            </a:extLst>
+          </p:cNvPr>
+          <p:cNvPicPr>
+            <a:picLocks noChangeAspect="1" noChangeArrowheads="1"/>
+          </p:cNvPicPr>
+          <p:nvPr/>
+        </p:nvPicPr>
+        <p:blipFill>
+          <a:blip r:embed="rId2">
+            <a:extLst>
+              <a:ext uri="{28A0092B-C50C-407E-A947-70E740481C1C}">
+                <a14:useLocalDpi xmlns:a14="http://schemas.microsoft.com/office/drawing/2010/main" val="0"/>
+              </a:ext>
+            </a:extLst>
+          </a:blip>
+          <a:srcRect/>
+          <a:stretch>
+            <a:fillRect/>
+          </a:stretch>
+        </p:blipFill>
+        <p:spPr bwMode="auto">
+          <a:xfrm>
+            <a:off x="5710535" y="1735075"/>
+            <a:ext cx="5898221" cy="4131827"/>
+          </a:xfrm>
+          <a:prstGeom prst="rect">
+            <a:avLst/>
+          </a:prstGeom>
+          <a:noFill/>
+          <a:extLst>
+            <a:ext uri="{909E8E84-426E-40DD-AFC4-6F175D3DCCD1}">
+              <a14:hiddenFill xmlns:a14="http://schemas.microsoft.com/office/drawing/2010/main">
+                <a:solidFill>
+                  <a:srgbClr val="FFFFFF"/>
+                </a:solidFill>
+              </a14:hiddenFill>
+            </a:ext>
+          </a:extLst>
+        </p:spPr>
+      </p:pic>
+      <p:pic>
+        <p:nvPicPr>
+          <p:cNvPr id="3" name="Picture 2" descr="1일 1커밋의 목표를 가지고 있다면? - Bitbar Github 플러그인 설정하기 | Fernando 기술 블로그">
+            <a:extLst>
+              <a:ext uri="{FF2B5EF4-FFF2-40B4-BE49-F238E27FC236}">
+                <a16:creationId xmlns:a16="http://schemas.microsoft.com/office/drawing/2014/main" id="{2C642476-CCB6-28F2-C01B-E6AA8A634F21}"/>
+              </a:ext>
+            </a:extLst>
+          </p:cNvPr>
+          <p:cNvPicPr>
+            <a:picLocks noChangeAspect="1" noChangeArrowheads="1"/>
+          </p:cNvPicPr>
+          <p:nvPr/>
+        </p:nvPicPr>
+        <p:blipFill>
+          <a:blip r:embed="rId3">
+            <a:extLst>
+              <a:ext uri="{28A0092B-C50C-407E-A947-70E740481C1C}">
+                <a14:useLocalDpi xmlns:a14="http://schemas.microsoft.com/office/drawing/2010/main" val="0"/>
+              </a:ext>
+            </a:extLst>
+          </a:blip>
+          <a:srcRect/>
+          <a:stretch>
+            <a:fillRect/>
+          </a:stretch>
+        </p:blipFill>
+        <p:spPr bwMode="auto">
+          <a:xfrm>
+            <a:off x="689776" y="2695209"/>
+            <a:ext cx="4454449" cy="1833748"/>
+          </a:xfrm>
+          <a:prstGeom prst="rect">
+            <a:avLst/>
+          </a:prstGeom>
+          <a:noFill/>
+          <a:extLst>
+            <a:ext uri="{909E8E84-426E-40DD-AFC4-6F175D3DCCD1}">
+              <a14:hiddenFill xmlns:a14="http://schemas.microsoft.com/office/drawing/2010/main">
+                <a:solidFill>
+                  <a:srgbClr val="FFFFFF"/>
+                </a:solidFill>
+              </a14:hiddenFill>
+            </a:ext>
+          </a:extLst>
+        </p:spPr>
+      </p:pic>
+      <p:sp>
+        <p:nvSpPr>
+          <p:cNvPr id="6" name="TextBox 5">
+            <a:extLst>
+              <a:ext uri="{FF2B5EF4-FFF2-40B4-BE49-F238E27FC236}">
+                <a16:creationId xmlns:a16="http://schemas.microsoft.com/office/drawing/2014/main" id="{ABB5351B-8B66-EAAB-14E6-629AA921514C}"/>
+              </a:ext>
+            </a:extLst>
+          </p:cNvPr>
+          <p:cNvSpPr txBox="1"/>
+          <p:nvPr/>
+        </p:nvSpPr>
+        <p:spPr>
+          <a:xfrm>
+            <a:off x="1875686" y="4678729"/>
+            <a:ext cx="1930337" cy="338554"/>
+          </a:xfrm>
+          <a:prstGeom prst="rect">
+            <a:avLst/>
+          </a:prstGeom>
+          <a:noFill/>
+        </p:spPr>
+        <p:txBody>
+          <a:bodyPr wrap="none" rtlCol="0">
+            <a:spAutoFit/>
+          </a:bodyPr>
+          <a:lstStyle/>
+          <a:p>
+            <a:r>
+              <a:rPr lang="en-US" altLang="ko-KR" sz="1600" b="1" dirty="0">
+                <a:solidFill>
+                  <a:schemeClr val="accent6"/>
+                </a:solidFill>
+              </a:rPr>
+              <a:t>GitHub </a:t>
+            </a:r>
+            <a:r>
+              <a:rPr lang="ko-KR" altLang="en-US" sz="1600" b="1" dirty="0" err="1">
+                <a:solidFill>
+                  <a:schemeClr val="accent6"/>
+                </a:solidFill>
+              </a:rPr>
+              <a:t>잔디심기</a:t>
+            </a:r>
+            <a:r>
+              <a:rPr lang="ko-KR" altLang="en-US" sz="1600" b="1" dirty="0">
+                <a:solidFill>
+                  <a:schemeClr val="accent6"/>
+                </a:solidFill>
+              </a:rPr>
+              <a:t>🌱</a:t>
+            </a:r>
+          </a:p>
+        </p:txBody>
+      </p:sp>
+    </p:spTree>
+    <p:extLst>
+      <p:ext uri="{BB962C8B-B14F-4D97-AF65-F5344CB8AC3E}">
+        <p14:creationId xmlns:p14="http://schemas.microsoft.com/office/powerpoint/2010/main" val="1969496758"/>
       </p:ext>
     </p:extLst>
   </p:cSld>
@@ -9732,65 +9204,10 @@
       </p:grpSpPr>
       <p:sp>
         <p:nvSpPr>
-          <p:cNvPr id="7" name="내용 개체 틀 2">
-            <a:extLst>
-              <a:ext uri="{FF2B5EF4-FFF2-40B4-BE49-F238E27FC236}">
-                <a16:creationId xmlns:a16="http://schemas.microsoft.com/office/drawing/2014/main" id="{C4F7519B-60EE-E574-917E-11D77FC5B5DA}"/>
-              </a:ext>
-            </a:extLst>
-          </p:cNvPr>
-          <p:cNvSpPr>
-            <a:spLocks noGrp="1"/>
-          </p:cNvSpPr>
-          <p:nvPr>
-            <p:ph idx="1"/>
-          </p:nvPr>
-        </p:nvSpPr>
-        <p:spPr>
-          <a:xfrm>
-            <a:off x="7643351" y="2934932"/>
-            <a:ext cx="3033252" cy="899653"/>
-          </a:xfrm>
-        </p:spPr>
-        <p:txBody>
-          <a:bodyPr>
-            <a:normAutofit/>
-          </a:bodyPr>
-          <a:lstStyle/>
-          <a:p>
-            <a:pPr marL="0" indent="0">
-              <a:buNone/>
-            </a:pPr>
-            <a:r>
-              <a:rPr lang="ko-KR" altLang="en-US" sz="5000" b="1" dirty="0">
-                <a:solidFill>
-                  <a:srgbClr val="6EC173"/>
-                </a:solidFill>
-              </a:rPr>
-              <a:t>휴식 </a:t>
-            </a:r>
-            <a:r>
-              <a:rPr lang="en-US" altLang="ko-KR" sz="5000" b="1" dirty="0">
-                <a:solidFill>
-                  <a:srgbClr val="6EC173"/>
-                </a:solidFill>
-              </a:rPr>
-              <a:t>Time</a:t>
-            </a:r>
-            <a:endParaRPr lang="ko-KR" altLang="en-US" sz="5000" b="1" dirty="0">
-              <a:solidFill>
-                <a:srgbClr val="6EC173"/>
-              </a:solidFill>
-            </a:endParaRPr>
-          </a:p>
-        </p:txBody>
-      </p:sp>
-      <p:sp>
-        <p:nvSpPr>
           <p:cNvPr id="4" name="날짜 개체 틀 3">
             <a:extLst>
               <a:ext uri="{FF2B5EF4-FFF2-40B4-BE49-F238E27FC236}">
-                <a16:creationId xmlns:a16="http://schemas.microsoft.com/office/drawing/2014/main" id="{1E263DFF-9BB9-D8A0-9B23-08F2727B6719}"/>
+                <a16:creationId xmlns:a16="http://schemas.microsoft.com/office/drawing/2014/main" id="{844D8E3F-3E15-CA55-DE78-C9E8135D7DC5}"/>
               </a:ext>
             </a:extLst>
           </p:cNvPr>
@@ -9806,7 +9223,7 @@
           <a:bodyPr/>
           <a:lstStyle/>
           <a:p>
-            <a:fld id="{1CB3B0AF-12E4-4E46-9E45-3FA033AAD3CB}" type="datetime6">
+            <a:fld id="{282CA0A7-0190-4FAD-B925-425179F7F418}" type="datetime6">
               <a:rPr lang="ko-KR" altLang="en-US" smtClean="0"/>
               <a:t>2024년 5월</a:t>
             </a:fld>
@@ -9819,7 +9236,7 @@
           <p:cNvPr id="5" name="슬라이드 번호 개체 틀 4">
             <a:extLst>
               <a:ext uri="{FF2B5EF4-FFF2-40B4-BE49-F238E27FC236}">
-                <a16:creationId xmlns:a16="http://schemas.microsoft.com/office/drawing/2014/main" id="{35DFD145-2786-3632-BC8A-7B6D36588D9A}"/>
+                <a16:creationId xmlns:a16="http://schemas.microsoft.com/office/drawing/2014/main" id="{5DB29F7D-CB9C-794A-3A35-FAD82167AF9C}"/>
               </a:ext>
             </a:extLst>
           </p:cNvPr>
@@ -9845,10 +9262,10 @@
       </p:sp>
       <p:pic>
         <p:nvPicPr>
-          <p:cNvPr id="1026" name="Picture 2" descr="휴식하면 생기는 우리 몸의 변화들 &lt; 건강 &lt; 기사본문 - 마음건강 길">
-            <a:extLst>
-              <a:ext uri="{FF2B5EF4-FFF2-40B4-BE49-F238E27FC236}">
-                <a16:creationId xmlns:a16="http://schemas.microsoft.com/office/drawing/2014/main" id="{18418F7F-A468-D6C9-2551-45A9F2564211}"/>
+          <p:cNvPr id="4098" name="Picture 2" descr="시작하기 | Git / GitHub 안내서">
+            <a:extLst>
+              <a:ext uri="{FF2B5EF4-FFF2-40B4-BE49-F238E27FC236}">
+                <a16:creationId xmlns:a16="http://schemas.microsoft.com/office/drawing/2014/main" id="{734FB0B1-DFE8-E05D-B8D6-E471B0B8E8F2}"/>
               </a:ext>
             </a:extLst>
           </p:cNvPr>
@@ -9858,7 +9275,7 @@
           <p:nvPr/>
         </p:nvPicPr>
         <p:blipFill>
-          <a:blip r:embed="rId2">
+          <a:blip r:embed="rId3">
             <a:extLst>
               <a:ext uri="{28A0092B-C50C-407E-A947-70E740481C1C}">
                 <a14:useLocalDpi xmlns:a14="http://schemas.microsoft.com/office/drawing/2010/main" val="0"/>
@@ -9872,8 +9289,8 @@
         </p:blipFill>
         <p:spPr bwMode="auto">
           <a:xfrm>
-            <a:off x="1346765" y="1953160"/>
-            <a:ext cx="4427520" cy="2951680"/>
+            <a:off x="1799777" y="1409915"/>
+            <a:ext cx="3126658" cy="1302774"/>
           </a:xfrm>
           <a:prstGeom prst="rect">
             <a:avLst/>
@@ -9890,10 +9307,104 @@
           </a:extLst>
         </p:spPr>
       </p:pic>
+      <p:pic>
+        <p:nvPicPr>
+          <p:cNvPr id="3074" name="Picture 2" descr="VSCode 익스텐션 추천 리스트 | Lazy Ren">
+            <a:extLst>
+              <a:ext uri="{FF2B5EF4-FFF2-40B4-BE49-F238E27FC236}">
+                <a16:creationId xmlns:a16="http://schemas.microsoft.com/office/drawing/2014/main" id="{BBD46098-9A9A-2A88-67DF-22BB9F212584}"/>
+              </a:ext>
+            </a:extLst>
+          </p:cNvPr>
+          <p:cNvPicPr>
+            <a:picLocks noChangeAspect="1" noChangeArrowheads="1"/>
+          </p:cNvPicPr>
+          <p:nvPr/>
+        </p:nvPicPr>
+        <p:blipFill>
+          <a:blip r:embed="rId4">
+            <a:extLst>
+              <a:ext uri="{28A0092B-C50C-407E-A947-70E740481C1C}">
+                <a14:useLocalDpi xmlns:a14="http://schemas.microsoft.com/office/drawing/2010/main" val="0"/>
+              </a:ext>
+            </a:extLst>
+          </a:blip>
+          <a:srcRect/>
+          <a:stretch>
+            <a:fillRect/>
+          </a:stretch>
+        </p:blipFill>
+        <p:spPr bwMode="auto">
+          <a:xfrm>
+            <a:off x="6757387" y="2061977"/>
+            <a:ext cx="4572000" cy="2286000"/>
+          </a:xfrm>
+          <a:prstGeom prst="rect">
+            <a:avLst/>
+          </a:prstGeom>
+          <a:noFill/>
+          <a:extLst>
+            <a:ext uri="{909E8E84-426E-40DD-AFC4-6F175D3DCCD1}">
+              <a14:hiddenFill xmlns:a14="http://schemas.microsoft.com/office/drawing/2010/main">
+                <a:solidFill>
+                  <a:srgbClr val="FFFFFF"/>
+                </a:solidFill>
+              </a14:hiddenFill>
+            </a:ext>
+          </a:extLst>
+        </p:spPr>
+      </p:pic>
+      <p:pic>
+        <p:nvPicPr>
+          <p:cNvPr id="3076" name="Picture 4" descr="GitHub — A Beginner's Introduction | by Thiago Marsal Farias | Medium">
+            <a:extLst>
+              <a:ext uri="{FF2B5EF4-FFF2-40B4-BE49-F238E27FC236}">
+                <a16:creationId xmlns:a16="http://schemas.microsoft.com/office/drawing/2014/main" id="{05048B77-090B-D782-5A02-11C42B8CC57A}"/>
+              </a:ext>
+            </a:extLst>
+          </p:cNvPr>
+          <p:cNvPicPr>
+            <a:picLocks noChangeAspect="1" noChangeArrowheads="1"/>
+          </p:cNvPicPr>
+          <p:nvPr/>
+        </p:nvPicPr>
+        <p:blipFill>
+          <a:blip r:embed="rId5">
+            <a:extLst>
+              <a:ext uri="{28A0092B-C50C-407E-A947-70E740481C1C}">
+                <a14:useLocalDpi xmlns:a14="http://schemas.microsoft.com/office/drawing/2010/main" val="0"/>
+              </a:ext>
+            </a:extLst>
+          </a:blip>
+          <a:srcRect/>
+          <a:stretch>
+            <a:fillRect/>
+          </a:stretch>
+        </p:blipFill>
+        <p:spPr bwMode="auto">
+          <a:xfrm>
+            <a:off x="1195386" y="3469287"/>
+            <a:ext cx="4572001" cy="1694688"/>
+          </a:xfrm>
+          <a:prstGeom prst="rect">
+            <a:avLst/>
+          </a:prstGeom>
+          <a:noFill/>
+          <a:extLst>
+            <a:ext uri="{909E8E84-426E-40DD-AFC4-6F175D3DCCD1}">
+              <a14:hiddenFill xmlns:a14="http://schemas.microsoft.com/office/drawing/2010/main">
+                <a:solidFill>
+                  <a:srgbClr val="FFFFFF"/>
+                </a:solidFill>
+              </a14:hiddenFill>
+            </a:ext>
+          </a:extLst>
+        </p:spPr>
+      </p:pic>
     </p:spTree>
     <p:extLst>
       <p:ext uri="{BB962C8B-B14F-4D97-AF65-F5344CB8AC3E}">
-        <p14:creationId xmlns:p14="http://schemas.microsoft.com/office/powerpoint/2010/main" val="624053621"/>
+        <p14:creationId xmlns:p14="http://schemas.microsoft.com/office/powerpoint/2010/main" val="2426247804"/>
       </p:ext>
     </p:extLst>
   </p:cSld>
@@ -10297,7 +9808,13 @@
       </p:grpSpPr>
       <p:sp>
         <p:nvSpPr>
-          <p:cNvPr id="2" name="날짜 개체 틀 1"/>
+          <p:cNvPr id="4" name="날짜 개체 틀 3">
+            <a:extLst>
+              <a:ext uri="{FF2B5EF4-FFF2-40B4-BE49-F238E27FC236}">
+                <a16:creationId xmlns:a16="http://schemas.microsoft.com/office/drawing/2014/main" id="{FA492C02-0419-7C8D-8F70-9EAD19B9BFC5}"/>
+              </a:ext>
+            </a:extLst>
+          </p:cNvPr>
           <p:cNvSpPr>
             <a:spLocks noGrp="1"/>
           </p:cNvSpPr>
@@ -10310,7 +9827,7 @@
           <a:bodyPr/>
           <a:lstStyle/>
           <a:p>
-            <a:fld id="{0E19CB95-6D28-40F1-9DA3-1BAC5D4B5B4F}" type="datetime6">
+            <a:fld id="{3C9CE3CE-253F-4F9D-BA15-C226C8D8501E}" type="datetime6">
               <a:rPr lang="ko-KR" altLang="en-US" smtClean="0"/>
               <a:t>2024년 5월</a:t>
             </a:fld>
@@ -10320,7 +9837,13 @@
       </p:sp>
       <p:sp>
         <p:nvSpPr>
-          <p:cNvPr id="3" name="슬라이드 번호 개체 틀 2"/>
+          <p:cNvPr id="5" name="슬라이드 번호 개체 틀 4">
+            <a:extLst>
+              <a:ext uri="{FF2B5EF4-FFF2-40B4-BE49-F238E27FC236}">
+                <a16:creationId xmlns:a16="http://schemas.microsoft.com/office/drawing/2014/main" id="{66486D8F-3DFA-088C-30BB-98572100AF6A}"/>
+              </a:ext>
+            </a:extLst>
+          </p:cNvPr>
           <p:cNvSpPr>
             <a:spLocks noGrp="1"/>
           </p:cNvSpPr>
@@ -10343,7 +9866,13 @@
       </p:sp>
       <p:sp>
         <p:nvSpPr>
-          <p:cNvPr id="4" name="제목 3"/>
+          <p:cNvPr id="2" name="제목 1">
+            <a:extLst>
+              <a:ext uri="{FF2B5EF4-FFF2-40B4-BE49-F238E27FC236}">
+                <a16:creationId xmlns:a16="http://schemas.microsoft.com/office/drawing/2014/main" id="{7E93C594-AF29-4C79-505A-FD8260282819}"/>
+              </a:ext>
+            </a:extLst>
+          </p:cNvPr>
           <p:cNvSpPr>
             <a:spLocks noGrp="1"/>
           </p:cNvSpPr>
@@ -10358,16 +9887,118 @@
           <a:p>
             <a:r>
               <a:rPr lang="en-US" altLang="ko-KR" dirty="0" err="1"/>
-              <a:t>Git</a:t>
-            </a:r>
-            <a:endParaRPr lang="ko-KR" altLang="en-US" dirty="0"/>
-          </a:p>
-        </p:txBody>
-      </p:sp>
+              <a:t>Github</a:t>
+            </a:r>
+            <a:r>
+              <a:rPr lang="ko-KR" altLang="en-US" dirty="0"/>
+              <a:t> 회원가입</a:t>
+            </a:r>
+            <a:r>
+              <a:rPr lang="en-US" altLang="ko-KR" dirty="0"/>
+              <a:t>/</a:t>
+            </a:r>
+            <a:r>
+              <a:rPr lang="ko-KR" altLang="en-US" dirty="0"/>
+              <a:t>로그인</a:t>
+            </a:r>
+          </a:p>
+        </p:txBody>
+      </p:sp>
+      <p:sp>
+        <p:nvSpPr>
+          <p:cNvPr id="6" name="TextBox 5">
+            <a:extLst>
+              <a:ext uri="{FF2B5EF4-FFF2-40B4-BE49-F238E27FC236}">
+                <a16:creationId xmlns:a16="http://schemas.microsoft.com/office/drawing/2014/main" id="{B0F7D830-B9D4-9D0A-6994-18E2CD9C9915}"/>
+              </a:ext>
+            </a:extLst>
+          </p:cNvPr>
+          <p:cNvSpPr txBox="1"/>
+          <p:nvPr/>
+        </p:nvSpPr>
+        <p:spPr>
+          <a:xfrm>
+            <a:off x="846667" y="1794933"/>
+            <a:ext cx="7744178" cy="830997"/>
+          </a:xfrm>
+          <a:prstGeom prst="rect">
+            <a:avLst/>
+          </a:prstGeom>
+          <a:noFill/>
+        </p:spPr>
+        <p:txBody>
+          <a:bodyPr wrap="square" rtlCol="0">
+            <a:spAutoFit/>
+          </a:bodyPr>
+          <a:lstStyle/>
+          <a:p>
+            <a:r>
+              <a:rPr lang="en-US" altLang="ko-KR" sz="2400" dirty="0">
+                <a:hlinkClick r:id="rId3"/>
+              </a:rPr>
+              <a:t>https://github.com/</a:t>
+            </a:r>
+            <a:r>
+              <a:rPr lang="en-US" altLang="ko-KR" sz="2400" dirty="0"/>
+              <a:t> </a:t>
+            </a:r>
+          </a:p>
+          <a:p>
+            <a:endParaRPr lang="ko-KR" altLang="en-US" sz="2400" dirty="0"/>
+          </a:p>
+        </p:txBody>
+      </p:sp>
+      <p:pic>
+        <p:nvPicPr>
+          <p:cNvPr id="7" name="Picture 4" descr="GitHub — A Beginner's Introduction | by Thiago Marsal Farias | Medium">
+            <a:extLst>
+              <a:ext uri="{FF2B5EF4-FFF2-40B4-BE49-F238E27FC236}">
+                <a16:creationId xmlns:a16="http://schemas.microsoft.com/office/drawing/2014/main" id="{B89A765A-9124-E194-8F39-31B054301282}"/>
+              </a:ext>
+            </a:extLst>
+          </p:cNvPr>
+          <p:cNvPicPr>
+            <a:picLocks noChangeAspect="1" noChangeArrowheads="1"/>
+          </p:cNvPicPr>
+          <p:nvPr/>
+        </p:nvPicPr>
+        <p:blipFill>
+          <a:blip r:embed="rId4">
+            <a:extLst>
+              <a:ext uri="{28A0092B-C50C-407E-A947-70E740481C1C}">
+                <a14:useLocalDpi xmlns:a14="http://schemas.microsoft.com/office/drawing/2010/main" val="0"/>
+              </a:ext>
+            </a:extLst>
+          </a:blip>
+          <a:srcRect/>
+          <a:stretch>
+            <a:fillRect/>
+          </a:stretch>
+        </p:blipFill>
+        <p:spPr bwMode="auto">
+          <a:xfrm>
+            <a:off x="4444580" y="3053919"/>
+            <a:ext cx="7057782" cy="2616084"/>
+          </a:xfrm>
+          <a:prstGeom prst="rect">
+            <a:avLst/>
+          </a:prstGeom>
+          <a:noFill/>
+          <a:extLst>
+            <a:ext uri="{909E8E84-426E-40DD-AFC4-6F175D3DCCD1}">
+              <a14:hiddenFill xmlns:a14="http://schemas.microsoft.com/office/drawing/2010/main">
+                <a:solidFill>
+                  <a:srgbClr val="FFFFFF"/>
+                </a:solidFill>
+              </a14:hiddenFill>
+            </a:ext>
+          </a:extLst>
+        </p:spPr>
+      </p:pic>
     </p:spTree>
     <p:extLst>
       <p:ext uri="{BB962C8B-B14F-4D97-AF65-F5344CB8AC3E}">
-        <p14:creationId xmlns:p14="http://schemas.microsoft.com/office/powerpoint/2010/main" val="1583756813"/>
+        <p14:creationId xmlns:p14="http://schemas.microsoft.com/office/powerpoint/2010/main" val="1658716870"/>
       </p:ext>
     </p:extLst>
   </p:cSld>
@@ -10399,7 +10030,7 @@
           <p:cNvPr id="4" name="날짜 개체 틀 3">
             <a:extLst>
               <a:ext uri="{FF2B5EF4-FFF2-40B4-BE49-F238E27FC236}">
-                <a16:creationId xmlns:a16="http://schemas.microsoft.com/office/drawing/2014/main" id="{284930C1-3800-3283-7676-67E65B80E7F7}"/>
+                <a16:creationId xmlns:a16="http://schemas.microsoft.com/office/drawing/2014/main" id="{FA492C02-0419-7C8D-8F70-9EAD19B9BFC5}"/>
               </a:ext>
             </a:extLst>
           </p:cNvPr>
@@ -10415,7 +10046,7 @@
           <a:bodyPr/>
           <a:lstStyle/>
           <a:p>
-            <a:fld id="{BF037577-ED6E-4A9A-BE84-A36FE19DAF55}" type="datetime6">
+            <a:fld id="{3C9CE3CE-253F-4F9D-BA15-C226C8D8501E}" type="datetime6">
               <a:rPr lang="ko-KR" altLang="en-US" smtClean="0"/>
               <a:t>2024년 5월</a:t>
             </a:fld>
@@ -10428,7 +10059,7 @@
           <p:cNvPr id="5" name="슬라이드 번호 개체 틀 4">
             <a:extLst>
               <a:ext uri="{FF2B5EF4-FFF2-40B4-BE49-F238E27FC236}">
-                <a16:creationId xmlns:a16="http://schemas.microsoft.com/office/drawing/2014/main" id="{03BA4E39-F813-5D2B-7587-E29FCBC8261A}"/>
+                <a16:creationId xmlns:a16="http://schemas.microsoft.com/office/drawing/2014/main" id="{66486D8F-3DFA-088C-30BB-98572100AF6A}"/>
               </a:ext>
             </a:extLst>
           </p:cNvPr>
@@ -10457,7 +10088,7 @@
           <p:cNvPr id="2" name="제목 1">
             <a:extLst>
               <a:ext uri="{FF2B5EF4-FFF2-40B4-BE49-F238E27FC236}">
-                <a16:creationId xmlns:a16="http://schemas.microsoft.com/office/drawing/2014/main" id="{2734CB21-9153-185C-018C-D40EE0325E61}"/>
+                <a16:creationId xmlns:a16="http://schemas.microsoft.com/office/drawing/2014/main" id="{7E93C594-AF29-4C79-505A-FD8260282819}"/>
               </a:ext>
             </a:extLst>
           </p:cNvPr>
@@ -10474,23 +10105,63 @@
           <a:lstStyle/>
           <a:p>
             <a:r>
+              <a:rPr lang="en-US" altLang="ko-KR" dirty="0"/>
+              <a:t>VS Code </a:t>
+            </a:r>
+            <a:r>
               <a:rPr lang="ko-KR" altLang="en-US" dirty="0"/>
-              <a:t>포트폴리오</a:t>
-            </a:r>
-            <a:r>
-              <a:rPr lang="en-US" altLang="ko-KR" dirty="0"/>
-              <a:t>?</a:t>
-            </a:r>
-            <a:endParaRPr lang="ko-KR" altLang="en-US" dirty="0"/>
+              <a:t>설치 </a:t>
+            </a:r>
+          </a:p>
+        </p:txBody>
+      </p:sp>
+      <p:sp>
+        <p:nvSpPr>
+          <p:cNvPr id="6" name="TextBox 5">
+            <a:extLst>
+              <a:ext uri="{FF2B5EF4-FFF2-40B4-BE49-F238E27FC236}">
+                <a16:creationId xmlns:a16="http://schemas.microsoft.com/office/drawing/2014/main" id="{B0F7D830-B9D4-9D0A-6994-18E2CD9C9915}"/>
+              </a:ext>
+            </a:extLst>
+          </p:cNvPr>
+          <p:cNvSpPr txBox="1"/>
+          <p:nvPr/>
+        </p:nvSpPr>
+        <p:spPr>
+          <a:xfrm>
+            <a:off x="846667" y="1794933"/>
+            <a:ext cx="7744178" cy="830997"/>
+          </a:xfrm>
+          <a:prstGeom prst="rect">
+            <a:avLst/>
+          </a:prstGeom>
+          <a:noFill/>
+        </p:spPr>
+        <p:txBody>
+          <a:bodyPr wrap="square" rtlCol="0">
+            <a:spAutoFit/>
+          </a:bodyPr>
+          <a:lstStyle/>
+          <a:p>
+            <a:r>
+              <a:rPr lang="en-US" altLang="ko-KR" sz="2400" dirty="0">
+                <a:hlinkClick r:id="rId3"/>
+              </a:rPr>
+              <a:t>https://code.visualstudio.com/download</a:t>
+            </a:r>
+            <a:endParaRPr lang="en-US" altLang="ko-KR" sz="2400" dirty="0"/>
+          </a:p>
+          <a:p>
+            <a:endParaRPr lang="ko-KR" altLang="en-US" sz="2400" dirty="0"/>
           </a:p>
         </p:txBody>
       </p:sp>
       <p:pic>
         <p:nvPicPr>
-          <p:cNvPr id="2052" name="Picture 4" descr="개발자 이력서 작성하기 (feat. 이력서 공개) | Wonny Log">
-            <a:extLst>
-              <a:ext uri="{FF2B5EF4-FFF2-40B4-BE49-F238E27FC236}">
-                <a16:creationId xmlns:a16="http://schemas.microsoft.com/office/drawing/2014/main" id="{9A1B6276-E204-7797-6B8C-3218CC40F9A6}"/>
+          <p:cNvPr id="3" name="Picture 2" descr="VSCode 익스텐션 추천 리스트 | Lazy Ren">
+            <a:extLst>
+              <a:ext uri="{FF2B5EF4-FFF2-40B4-BE49-F238E27FC236}">
+                <a16:creationId xmlns:a16="http://schemas.microsoft.com/office/drawing/2014/main" id="{627B062B-9462-19DE-55BB-9FC514848CFA}"/>
               </a:ext>
             </a:extLst>
           </p:cNvPr>
@@ -10500,7 +10171,7 @@
           <p:nvPr/>
         </p:nvPicPr>
         <p:blipFill>
-          <a:blip r:embed="rId2">
+          <a:blip r:embed="rId4">
             <a:extLst>
               <a:ext uri="{28A0092B-C50C-407E-A947-70E740481C1C}">
                 <a14:useLocalDpi xmlns:a14="http://schemas.microsoft.com/office/drawing/2010/main" val="0"/>
@@ -10514,8 +10185,8 @@
         </p:blipFill>
         <p:spPr bwMode="auto">
           <a:xfrm>
-            <a:off x="5621595" y="1690688"/>
-            <a:ext cx="5898221" cy="4131827"/>
+            <a:off x="4718756" y="2518438"/>
+            <a:ext cx="6446668" cy="3223334"/>
           </a:xfrm>
           <a:prstGeom prst="rect">
             <a:avLst/>
@@ -10532,57 +10203,10 @@
           </a:extLst>
         </p:spPr>
       </p:pic>
-      <p:pic>
-        <p:nvPicPr>
-          <p:cNvPr id="2050" name="Picture 2" descr="나를 구원해줄 그 분은 바로 git. 그리고 github">
-            <a:extLst>
-              <a:ext uri="{FF2B5EF4-FFF2-40B4-BE49-F238E27FC236}">
-                <a16:creationId xmlns:a16="http://schemas.microsoft.com/office/drawing/2014/main" id="{4F196619-D61F-85F9-D9CA-B99257E4E8C2}"/>
-              </a:ext>
-            </a:extLst>
-          </p:cNvPr>
-          <p:cNvPicPr>
-            <a:picLocks noChangeAspect="1" noChangeArrowheads="1"/>
-          </p:cNvPicPr>
-          <p:nvPr/>
-        </p:nvPicPr>
-        <p:blipFill>
-          <a:blip r:embed="rId3">
-            <a:extLst>
-              <a:ext uri="{28A0092B-C50C-407E-A947-70E740481C1C}">
-                <a14:useLocalDpi xmlns:a14="http://schemas.microsoft.com/office/drawing/2010/main" val="0"/>
-              </a:ext>
-            </a:extLst>
-          </a:blip>
-          <a:srcRect/>
-          <a:stretch>
-            <a:fillRect/>
-          </a:stretch>
-        </p:blipFill>
-        <p:spPr bwMode="auto">
-          <a:xfrm>
-            <a:off x="600998" y="1690155"/>
-            <a:ext cx="5257800" cy="1456386"/>
-          </a:xfrm>
-          <a:prstGeom prst="rect">
-            <a:avLst/>
-          </a:prstGeom>
-          <a:noFill/>
-          <a:extLst>
-            <a:ext uri="{909E8E84-426E-40DD-AFC4-6F175D3DCCD1}">
-              <a14:hiddenFill xmlns:a14="http://schemas.microsoft.com/office/drawing/2010/main">
-                <a:solidFill>
-                  <a:srgbClr val="FFFFFF"/>
-                </a:solidFill>
-              </a14:hiddenFill>
-            </a:ext>
-          </a:extLst>
-        </p:spPr>
-      </p:pic>
     </p:spTree>
     <p:extLst>
       <p:ext uri="{BB962C8B-B14F-4D97-AF65-F5344CB8AC3E}">
-        <p14:creationId xmlns:p14="http://schemas.microsoft.com/office/powerpoint/2010/main" val="1969496758"/>
+        <p14:creationId xmlns:p14="http://schemas.microsoft.com/office/powerpoint/2010/main" val="3610078581"/>
       </p:ext>
     </p:extLst>
   </p:cSld>
@@ -10614,662 +10238,6 @@
           <p:cNvPr id="4" name="날짜 개체 틀 3">
             <a:extLst>
               <a:ext uri="{FF2B5EF4-FFF2-40B4-BE49-F238E27FC236}">
-                <a16:creationId xmlns:a16="http://schemas.microsoft.com/office/drawing/2014/main" id="{844D8E3F-3E15-CA55-DE78-C9E8135D7DC5}"/>
-              </a:ext>
-            </a:extLst>
-          </p:cNvPr>
-          <p:cNvSpPr>
-            <a:spLocks noGrp="1"/>
-          </p:cNvSpPr>
-          <p:nvPr>
-            <p:ph type="dt" sz="half" idx="10"/>
-          </p:nvPr>
-        </p:nvSpPr>
-        <p:spPr/>
-        <p:txBody>
-          <a:bodyPr/>
-          <a:lstStyle/>
-          <a:p>
-            <a:fld id="{282CA0A7-0190-4FAD-B925-425179F7F418}" type="datetime6">
-              <a:rPr lang="ko-KR" altLang="en-US" smtClean="0"/>
-              <a:t>2024년 5월</a:t>
-            </a:fld>
-            <a:endParaRPr lang="ko-KR" altLang="en-US"/>
-          </a:p>
-        </p:txBody>
-      </p:sp>
-      <p:sp>
-        <p:nvSpPr>
-          <p:cNvPr id="5" name="슬라이드 번호 개체 틀 4">
-            <a:extLst>
-              <a:ext uri="{FF2B5EF4-FFF2-40B4-BE49-F238E27FC236}">
-                <a16:creationId xmlns:a16="http://schemas.microsoft.com/office/drawing/2014/main" id="{5DB29F7D-CB9C-794A-3A35-FAD82167AF9C}"/>
-              </a:ext>
-            </a:extLst>
-          </p:cNvPr>
-          <p:cNvSpPr>
-            <a:spLocks noGrp="1"/>
-          </p:cNvSpPr>
-          <p:nvPr>
-            <p:ph type="sldNum" sz="quarter" idx="12"/>
-          </p:nvPr>
-        </p:nvSpPr>
-        <p:spPr/>
-        <p:txBody>
-          <a:bodyPr/>
-          <a:lstStyle/>
-          <a:p>
-            <a:fld id="{083A2CE0-18CD-4102-B738-4ACFF9E68BA4}" type="slidenum">
-              <a:rPr lang="ko-KR" altLang="en-US" smtClean="0"/>
-              <a:t>22</a:t>
-            </a:fld>
-            <a:endParaRPr lang="ko-KR" altLang="en-US"/>
-          </a:p>
-        </p:txBody>
-      </p:sp>
-      <p:pic>
-        <p:nvPicPr>
-          <p:cNvPr id="4098" name="Picture 2" descr="시작하기 | Git / GitHub 안내서">
-            <a:extLst>
-              <a:ext uri="{FF2B5EF4-FFF2-40B4-BE49-F238E27FC236}">
-                <a16:creationId xmlns:a16="http://schemas.microsoft.com/office/drawing/2014/main" id="{734FB0B1-DFE8-E05D-B8D6-E471B0B8E8F2}"/>
-              </a:ext>
-            </a:extLst>
-          </p:cNvPr>
-          <p:cNvPicPr>
-            <a:picLocks noChangeAspect="1" noChangeArrowheads="1"/>
-          </p:cNvPicPr>
-          <p:nvPr/>
-        </p:nvPicPr>
-        <p:blipFill>
-          <a:blip r:embed="rId3">
-            <a:extLst>
-              <a:ext uri="{28A0092B-C50C-407E-A947-70E740481C1C}">
-                <a14:useLocalDpi xmlns:a14="http://schemas.microsoft.com/office/drawing/2010/main" val="0"/>
-              </a:ext>
-            </a:extLst>
-          </a:blip>
-          <a:srcRect/>
-          <a:stretch>
-            <a:fillRect/>
-          </a:stretch>
-        </p:blipFill>
-        <p:spPr bwMode="auto">
-          <a:xfrm>
-            <a:off x="1799777" y="1409915"/>
-            <a:ext cx="3126658" cy="1302774"/>
-          </a:xfrm>
-          <a:prstGeom prst="rect">
-            <a:avLst/>
-          </a:prstGeom>
-          <a:noFill/>
-          <a:extLst>
-            <a:ext uri="{909E8E84-426E-40DD-AFC4-6F175D3DCCD1}">
-              <a14:hiddenFill xmlns:a14="http://schemas.microsoft.com/office/drawing/2010/main">
-                <a:solidFill>
-                  <a:srgbClr val="FFFFFF"/>
-                </a:solidFill>
-              </a14:hiddenFill>
-            </a:ext>
-          </a:extLst>
-        </p:spPr>
-      </p:pic>
-      <p:pic>
-        <p:nvPicPr>
-          <p:cNvPr id="4100" name="Picture 4" descr="GitHub README.me에서 소스코드를 링크하는 방법">
-            <a:extLst>
-              <a:ext uri="{FF2B5EF4-FFF2-40B4-BE49-F238E27FC236}">
-                <a16:creationId xmlns:a16="http://schemas.microsoft.com/office/drawing/2014/main" id="{784E6640-6DF9-E5D2-7549-7E3F6443F151}"/>
-              </a:ext>
-            </a:extLst>
-          </p:cNvPr>
-          <p:cNvPicPr>
-            <a:picLocks noChangeAspect="1" noChangeArrowheads="1"/>
-          </p:cNvPicPr>
-          <p:nvPr/>
-        </p:nvPicPr>
-        <p:blipFill>
-          <a:blip r:embed="rId4">
-            <a:extLst>
-              <a:ext uri="{28A0092B-C50C-407E-A947-70E740481C1C}">
-                <a14:useLocalDpi xmlns:a14="http://schemas.microsoft.com/office/drawing/2010/main" val="0"/>
-              </a:ext>
-            </a:extLst>
-          </a:blip>
-          <a:srcRect/>
-          <a:stretch>
-            <a:fillRect/>
-          </a:stretch>
-        </p:blipFill>
-        <p:spPr bwMode="auto">
-          <a:xfrm>
-            <a:off x="1349656" y="3214392"/>
-            <a:ext cx="4343694" cy="2432469"/>
-          </a:xfrm>
-          <a:prstGeom prst="rect">
-            <a:avLst/>
-          </a:prstGeom>
-          <a:noFill/>
-          <a:extLst>
-            <a:ext uri="{909E8E84-426E-40DD-AFC4-6F175D3DCCD1}">
-              <a14:hiddenFill xmlns:a14="http://schemas.microsoft.com/office/drawing/2010/main">
-                <a:solidFill>
-                  <a:srgbClr val="FFFFFF"/>
-                </a:solidFill>
-              </a14:hiddenFill>
-            </a:ext>
-          </a:extLst>
-        </p:spPr>
-      </p:pic>
-      <p:pic>
-        <p:nvPicPr>
-          <p:cNvPr id="4102" name="Picture 6" descr="React, Vue 개발자를 위한 VSCode Extension. VSCode를 사용하는 웹 개발자를 위한 Extension 추천 |  by Bora Lee | Medium | Medium">
-            <a:extLst>
-              <a:ext uri="{FF2B5EF4-FFF2-40B4-BE49-F238E27FC236}">
-                <a16:creationId xmlns:a16="http://schemas.microsoft.com/office/drawing/2014/main" id="{A24E52C0-B965-8877-0D3D-544095483FA7}"/>
-              </a:ext>
-            </a:extLst>
-          </p:cNvPr>
-          <p:cNvPicPr>
-            <a:picLocks noChangeAspect="1" noChangeArrowheads="1"/>
-          </p:cNvPicPr>
-          <p:nvPr/>
-        </p:nvPicPr>
-        <p:blipFill>
-          <a:blip r:embed="rId5">
-            <a:extLst>
-              <a:ext uri="{28A0092B-C50C-407E-A947-70E740481C1C}">
-                <a14:useLocalDpi xmlns:a14="http://schemas.microsoft.com/office/drawing/2010/main" val="0"/>
-              </a:ext>
-            </a:extLst>
-          </a:blip>
-          <a:srcRect/>
-          <a:stretch>
-            <a:fillRect/>
-          </a:stretch>
-        </p:blipFill>
-        <p:spPr bwMode="auto">
-          <a:xfrm>
-            <a:off x="6096000" y="1477872"/>
-            <a:ext cx="5248734" cy="2624367"/>
-          </a:xfrm>
-          <a:prstGeom prst="rect">
-            <a:avLst/>
-          </a:prstGeom>
-          <a:noFill/>
-          <a:extLst>
-            <a:ext uri="{909E8E84-426E-40DD-AFC4-6F175D3DCCD1}">
-              <a14:hiddenFill xmlns:a14="http://schemas.microsoft.com/office/drawing/2010/main">
-                <a:solidFill>
-                  <a:srgbClr val="FFFFFF"/>
-                </a:solidFill>
-              </a14:hiddenFill>
-            </a:ext>
-          </a:extLst>
-        </p:spPr>
-      </p:pic>
-    </p:spTree>
-    <p:extLst>
-      <p:ext uri="{BB962C8B-B14F-4D97-AF65-F5344CB8AC3E}">
-        <p14:creationId xmlns:p14="http://schemas.microsoft.com/office/powerpoint/2010/main" val="2426247804"/>
-      </p:ext>
-    </p:extLst>
-  </p:cSld>
-  <p:clrMapOvr>
-    <a:masterClrMapping/>
-  </p:clrMapOvr>
-</p:sld>
-</file>
-
-<file path=ppt/slides/slide23.xml><?xml version="1.0" encoding="utf-8"?>
-<p:sld xmlns:a="http://schemas.openxmlformats.org/drawingml/2006/main" xmlns:r="http://schemas.openxmlformats.org/officeDocument/2006/relationships" xmlns:p="http://schemas.openxmlformats.org/presentationml/2006/main">
-  <p:cSld>
-    <p:spTree>
-      <p:nvGrpSpPr>
-        <p:cNvPr id="1" name=""/>
-        <p:cNvGrpSpPr/>
-        <p:nvPr/>
-      </p:nvGrpSpPr>
-      <p:grpSpPr>
-        <a:xfrm>
-          <a:off x="0" y="0"/>
-          <a:ext cx="0" cy="0"/>
-          <a:chOff x="0" y="0"/>
-          <a:chExt cx="0" cy="0"/>
-        </a:xfrm>
-      </p:grpSpPr>
-      <p:sp>
-        <p:nvSpPr>
-          <p:cNvPr id="4" name="날짜 개체 틀 3">
-            <a:extLst>
-              <a:ext uri="{FF2B5EF4-FFF2-40B4-BE49-F238E27FC236}">
-                <a16:creationId xmlns:a16="http://schemas.microsoft.com/office/drawing/2014/main" id="{FA492C02-0419-7C8D-8F70-9EAD19B9BFC5}"/>
-              </a:ext>
-            </a:extLst>
-          </p:cNvPr>
-          <p:cNvSpPr>
-            <a:spLocks noGrp="1"/>
-          </p:cNvSpPr>
-          <p:nvPr>
-            <p:ph type="dt" sz="half" idx="10"/>
-          </p:nvPr>
-        </p:nvSpPr>
-        <p:spPr/>
-        <p:txBody>
-          <a:bodyPr/>
-          <a:lstStyle/>
-          <a:p>
-            <a:fld id="{3C9CE3CE-253F-4F9D-BA15-C226C8D8501E}" type="datetime6">
-              <a:rPr lang="ko-KR" altLang="en-US" smtClean="0"/>
-              <a:t>2024년 5월</a:t>
-            </a:fld>
-            <a:endParaRPr lang="ko-KR" altLang="en-US"/>
-          </a:p>
-        </p:txBody>
-      </p:sp>
-      <p:sp>
-        <p:nvSpPr>
-          <p:cNvPr id="5" name="슬라이드 번호 개체 틀 4">
-            <a:extLst>
-              <a:ext uri="{FF2B5EF4-FFF2-40B4-BE49-F238E27FC236}">
-                <a16:creationId xmlns:a16="http://schemas.microsoft.com/office/drawing/2014/main" id="{66486D8F-3DFA-088C-30BB-98572100AF6A}"/>
-              </a:ext>
-            </a:extLst>
-          </p:cNvPr>
-          <p:cNvSpPr>
-            <a:spLocks noGrp="1"/>
-          </p:cNvSpPr>
-          <p:nvPr>
-            <p:ph type="sldNum" sz="quarter" idx="12"/>
-          </p:nvPr>
-        </p:nvSpPr>
-        <p:spPr/>
-        <p:txBody>
-          <a:bodyPr/>
-          <a:lstStyle/>
-          <a:p>
-            <a:fld id="{083A2CE0-18CD-4102-B738-4ACFF9E68BA4}" type="slidenum">
-              <a:rPr lang="ko-KR" altLang="en-US" smtClean="0"/>
-              <a:t>23</a:t>
-            </a:fld>
-            <a:endParaRPr lang="ko-KR" altLang="en-US"/>
-          </a:p>
-        </p:txBody>
-      </p:sp>
-      <p:sp>
-        <p:nvSpPr>
-          <p:cNvPr id="2" name="제목 1">
-            <a:extLst>
-              <a:ext uri="{FF2B5EF4-FFF2-40B4-BE49-F238E27FC236}">
-                <a16:creationId xmlns:a16="http://schemas.microsoft.com/office/drawing/2014/main" id="{7E93C594-AF29-4C79-505A-FD8260282819}"/>
-              </a:ext>
-            </a:extLst>
-          </p:cNvPr>
-          <p:cNvSpPr>
-            <a:spLocks noGrp="1"/>
-          </p:cNvSpPr>
-          <p:nvPr>
-            <p:ph type="title"/>
-          </p:nvPr>
-        </p:nvSpPr>
-        <p:spPr/>
-        <p:txBody>
-          <a:bodyPr/>
-          <a:lstStyle/>
-          <a:p>
-            <a:r>
-              <a:rPr lang="en-US" altLang="ko-KR" dirty="0" err="1"/>
-              <a:t>Github</a:t>
-            </a:r>
-            <a:r>
-              <a:rPr lang="ko-KR" altLang="en-US" dirty="0"/>
-              <a:t> 회원가입</a:t>
-            </a:r>
-            <a:r>
-              <a:rPr lang="en-US" altLang="ko-KR" dirty="0"/>
-              <a:t>/</a:t>
-            </a:r>
-            <a:r>
-              <a:rPr lang="ko-KR" altLang="en-US" dirty="0"/>
-              <a:t>로그인</a:t>
-            </a:r>
-          </a:p>
-        </p:txBody>
-      </p:sp>
-      <p:sp>
-        <p:nvSpPr>
-          <p:cNvPr id="6" name="TextBox 5">
-            <a:extLst>
-              <a:ext uri="{FF2B5EF4-FFF2-40B4-BE49-F238E27FC236}">
-                <a16:creationId xmlns:a16="http://schemas.microsoft.com/office/drawing/2014/main" id="{B0F7D830-B9D4-9D0A-6994-18E2CD9C9915}"/>
-              </a:ext>
-            </a:extLst>
-          </p:cNvPr>
-          <p:cNvSpPr txBox="1"/>
-          <p:nvPr/>
-        </p:nvSpPr>
-        <p:spPr>
-          <a:xfrm>
-            <a:off x="846667" y="1794933"/>
-            <a:ext cx="7744178" cy="830997"/>
-          </a:xfrm>
-          <a:prstGeom prst="rect">
-            <a:avLst/>
-          </a:prstGeom>
-          <a:noFill/>
-        </p:spPr>
-        <p:txBody>
-          <a:bodyPr wrap="square" rtlCol="0">
-            <a:spAutoFit/>
-          </a:bodyPr>
-          <a:lstStyle/>
-          <a:p>
-            <a:r>
-              <a:rPr lang="en-US" altLang="ko-KR" sz="2400" dirty="0">
-                <a:hlinkClick r:id="rId3"/>
-              </a:rPr>
-              <a:t>https://github.com/</a:t>
-            </a:r>
-            <a:r>
-              <a:rPr lang="en-US" altLang="ko-KR" sz="2400" dirty="0"/>
-              <a:t> </a:t>
-            </a:r>
-          </a:p>
-          <a:p>
-            <a:endParaRPr lang="ko-KR" altLang="en-US" sz="2400" dirty="0"/>
-          </a:p>
-        </p:txBody>
-      </p:sp>
-      <p:pic>
-        <p:nvPicPr>
-          <p:cNvPr id="3" name="Picture 4" descr="GitHub README.me에서 소스코드를 링크하는 방법">
-            <a:extLst>
-              <a:ext uri="{FF2B5EF4-FFF2-40B4-BE49-F238E27FC236}">
-                <a16:creationId xmlns:a16="http://schemas.microsoft.com/office/drawing/2014/main" id="{92CC8123-1C3E-FCDA-140B-837F8597911D}"/>
-              </a:ext>
-            </a:extLst>
-          </p:cNvPr>
-          <p:cNvPicPr>
-            <a:picLocks noChangeAspect="1" noChangeArrowheads="1"/>
-          </p:cNvPicPr>
-          <p:nvPr/>
-        </p:nvPicPr>
-        <p:blipFill>
-          <a:blip r:embed="rId4">
-            <a:extLst>
-              <a:ext uri="{28A0092B-C50C-407E-A947-70E740481C1C}">
-                <a14:useLocalDpi xmlns:a14="http://schemas.microsoft.com/office/drawing/2010/main" val="0"/>
-              </a:ext>
-            </a:extLst>
-          </a:blip>
-          <a:srcRect/>
-          <a:stretch>
-            <a:fillRect/>
-          </a:stretch>
-        </p:blipFill>
-        <p:spPr bwMode="auto">
-          <a:xfrm>
-            <a:off x="3943355" y="2038926"/>
-            <a:ext cx="7308120" cy="4092548"/>
-          </a:xfrm>
-          <a:prstGeom prst="rect">
-            <a:avLst/>
-          </a:prstGeom>
-          <a:noFill/>
-          <a:extLst>
-            <a:ext uri="{909E8E84-426E-40DD-AFC4-6F175D3DCCD1}">
-              <a14:hiddenFill xmlns:a14="http://schemas.microsoft.com/office/drawing/2010/main">
-                <a:solidFill>
-                  <a:srgbClr val="FFFFFF"/>
-                </a:solidFill>
-              </a14:hiddenFill>
-            </a:ext>
-          </a:extLst>
-        </p:spPr>
-      </p:pic>
-    </p:spTree>
-    <p:extLst>
-      <p:ext uri="{BB962C8B-B14F-4D97-AF65-F5344CB8AC3E}">
-        <p14:creationId xmlns:p14="http://schemas.microsoft.com/office/powerpoint/2010/main" val="1658716870"/>
-      </p:ext>
-    </p:extLst>
-  </p:cSld>
-  <p:clrMapOvr>
-    <a:masterClrMapping/>
-  </p:clrMapOvr>
-</p:sld>
-</file>
-
-<file path=ppt/slides/slide24.xml><?xml version="1.0" encoding="utf-8"?>
-<p:sld xmlns:a="http://schemas.openxmlformats.org/drawingml/2006/main" xmlns:r="http://schemas.openxmlformats.org/officeDocument/2006/relationships" xmlns:p="http://schemas.openxmlformats.org/presentationml/2006/main">
-  <p:cSld>
-    <p:spTree>
-      <p:nvGrpSpPr>
-        <p:cNvPr id="1" name=""/>
-        <p:cNvGrpSpPr/>
-        <p:nvPr/>
-      </p:nvGrpSpPr>
-      <p:grpSpPr>
-        <a:xfrm>
-          <a:off x="0" y="0"/>
-          <a:ext cx="0" cy="0"/>
-          <a:chOff x="0" y="0"/>
-          <a:chExt cx="0" cy="0"/>
-        </a:xfrm>
-      </p:grpSpPr>
-      <p:sp>
-        <p:nvSpPr>
-          <p:cNvPr id="4" name="날짜 개체 틀 3">
-            <a:extLst>
-              <a:ext uri="{FF2B5EF4-FFF2-40B4-BE49-F238E27FC236}">
-                <a16:creationId xmlns:a16="http://schemas.microsoft.com/office/drawing/2014/main" id="{FA492C02-0419-7C8D-8F70-9EAD19B9BFC5}"/>
-              </a:ext>
-            </a:extLst>
-          </p:cNvPr>
-          <p:cNvSpPr>
-            <a:spLocks noGrp="1"/>
-          </p:cNvSpPr>
-          <p:nvPr>
-            <p:ph type="dt" sz="half" idx="10"/>
-          </p:nvPr>
-        </p:nvSpPr>
-        <p:spPr/>
-        <p:txBody>
-          <a:bodyPr/>
-          <a:lstStyle/>
-          <a:p>
-            <a:fld id="{3C9CE3CE-253F-4F9D-BA15-C226C8D8501E}" type="datetime6">
-              <a:rPr lang="ko-KR" altLang="en-US" smtClean="0"/>
-              <a:t>2024년 5월</a:t>
-            </a:fld>
-            <a:endParaRPr lang="ko-KR" altLang="en-US"/>
-          </a:p>
-        </p:txBody>
-      </p:sp>
-      <p:sp>
-        <p:nvSpPr>
-          <p:cNvPr id="5" name="슬라이드 번호 개체 틀 4">
-            <a:extLst>
-              <a:ext uri="{FF2B5EF4-FFF2-40B4-BE49-F238E27FC236}">
-                <a16:creationId xmlns:a16="http://schemas.microsoft.com/office/drawing/2014/main" id="{66486D8F-3DFA-088C-30BB-98572100AF6A}"/>
-              </a:ext>
-            </a:extLst>
-          </p:cNvPr>
-          <p:cNvSpPr>
-            <a:spLocks noGrp="1"/>
-          </p:cNvSpPr>
-          <p:nvPr>
-            <p:ph type="sldNum" sz="quarter" idx="12"/>
-          </p:nvPr>
-        </p:nvSpPr>
-        <p:spPr/>
-        <p:txBody>
-          <a:bodyPr/>
-          <a:lstStyle/>
-          <a:p>
-            <a:fld id="{083A2CE0-18CD-4102-B738-4ACFF9E68BA4}" type="slidenum">
-              <a:rPr lang="ko-KR" altLang="en-US" smtClean="0"/>
-              <a:t>24</a:t>
-            </a:fld>
-            <a:endParaRPr lang="ko-KR" altLang="en-US"/>
-          </a:p>
-        </p:txBody>
-      </p:sp>
-      <p:sp>
-        <p:nvSpPr>
-          <p:cNvPr id="2" name="제목 1">
-            <a:extLst>
-              <a:ext uri="{FF2B5EF4-FFF2-40B4-BE49-F238E27FC236}">
-                <a16:creationId xmlns:a16="http://schemas.microsoft.com/office/drawing/2014/main" id="{7E93C594-AF29-4C79-505A-FD8260282819}"/>
-              </a:ext>
-            </a:extLst>
-          </p:cNvPr>
-          <p:cNvSpPr>
-            <a:spLocks noGrp="1"/>
-          </p:cNvSpPr>
-          <p:nvPr>
-            <p:ph type="title"/>
-          </p:nvPr>
-        </p:nvSpPr>
-        <p:spPr/>
-        <p:txBody>
-          <a:bodyPr/>
-          <a:lstStyle/>
-          <a:p>
-            <a:r>
-              <a:rPr lang="en-US" altLang="ko-KR" dirty="0"/>
-              <a:t>VS Code </a:t>
-            </a:r>
-            <a:r>
-              <a:rPr lang="ko-KR" altLang="en-US" dirty="0"/>
-              <a:t>설치 </a:t>
-            </a:r>
-          </a:p>
-        </p:txBody>
-      </p:sp>
-      <p:sp>
-        <p:nvSpPr>
-          <p:cNvPr id="6" name="TextBox 5">
-            <a:extLst>
-              <a:ext uri="{FF2B5EF4-FFF2-40B4-BE49-F238E27FC236}">
-                <a16:creationId xmlns:a16="http://schemas.microsoft.com/office/drawing/2014/main" id="{B0F7D830-B9D4-9D0A-6994-18E2CD9C9915}"/>
-              </a:ext>
-            </a:extLst>
-          </p:cNvPr>
-          <p:cNvSpPr txBox="1"/>
-          <p:nvPr/>
-        </p:nvSpPr>
-        <p:spPr>
-          <a:xfrm>
-            <a:off x="846667" y="1794933"/>
-            <a:ext cx="7744178" cy="830997"/>
-          </a:xfrm>
-          <a:prstGeom prst="rect">
-            <a:avLst/>
-          </a:prstGeom>
-          <a:noFill/>
-        </p:spPr>
-        <p:txBody>
-          <a:bodyPr wrap="square" rtlCol="0">
-            <a:spAutoFit/>
-          </a:bodyPr>
-          <a:lstStyle/>
-          <a:p>
-            <a:r>
-              <a:rPr lang="en-US" altLang="ko-KR" sz="2400" dirty="0">
-                <a:hlinkClick r:id="rId3"/>
-              </a:rPr>
-              <a:t>https://code.visualstudio.com/download</a:t>
-            </a:r>
-            <a:endParaRPr lang="en-US" altLang="ko-KR" sz="2400" dirty="0"/>
-          </a:p>
-          <a:p>
-            <a:endParaRPr lang="ko-KR" altLang="en-US" sz="2400" dirty="0"/>
-          </a:p>
-        </p:txBody>
-      </p:sp>
-      <p:pic>
-        <p:nvPicPr>
-          <p:cNvPr id="7" name="Picture 2" descr="Visual Studio Code 설치하기">
-            <a:extLst>
-              <a:ext uri="{FF2B5EF4-FFF2-40B4-BE49-F238E27FC236}">
-                <a16:creationId xmlns:a16="http://schemas.microsoft.com/office/drawing/2014/main" id="{B586C346-761E-B570-4747-559D7D55EAE9}"/>
-              </a:ext>
-            </a:extLst>
-          </p:cNvPr>
-          <p:cNvPicPr>
-            <a:picLocks noChangeAspect="1" noChangeArrowheads="1"/>
-          </p:cNvPicPr>
-          <p:nvPr/>
-        </p:nvPicPr>
-        <p:blipFill>
-          <a:blip r:embed="rId4">
-            <a:extLst>
-              <a:ext uri="{28A0092B-C50C-407E-A947-70E740481C1C}">
-                <a14:useLocalDpi xmlns:a14="http://schemas.microsoft.com/office/drawing/2010/main" val="0"/>
-              </a:ext>
-            </a:extLst>
-          </a:blip>
-          <a:srcRect/>
-          <a:stretch>
-            <a:fillRect/>
-          </a:stretch>
-        </p:blipFill>
-        <p:spPr bwMode="auto">
-          <a:xfrm>
-            <a:off x="3680177" y="2683429"/>
-            <a:ext cx="7374486" cy="3097284"/>
-          </a:xfrm>
-          <a:prstGeom prst="rect">
-            <a:avLst/>
-          </a:prstGeom>
-          <a:noFill/>
-          <a:extLst>
-            <a:ext uri="{909E8E84-426E-40DD-AFC4-6F175D3DCCD1}">
-              <a14:hiddenFill xmlns:a14="http://schemas.microsoft.com/office/drawing/2010/main">
-                <a:solidFill>
-                  <a:srgbClr val="FFFFFF"/>
-                </a:solidFill>
-              </a14:hiddenFill>
-            </a:ext>
-          </a:extLst>
-        </p:spPr>
-      </p:pic>
-    </p:spTree>
-    <p:extLst>
-      <p:ext uri="{BB962C8B-B14F-4D97-AF65-F5344CB8AC3E}">
-        <p14:creationId xmlns:p14="http://schemas.microsoft.com/office/powerpoint/2010/main" val="3610078581"/>
-      </p:ext>
-    </p:extLst>
-  </p:cSld>
-  <p:clrMapOvr>
-    <a:masterClrMapping/>
-  </p:clrMapOvr>
-</p:sld>
-</file>
-
-<file path=ppt/slides/slide25.xml><?xml version="1.0" encoding="utf-8"?>
-<p:sld xmlns:a="http://schemas.openxmlformats.org/drawingml/2006/main" xmlns:r="http://schemas.openxmlformats.org/officeDocument/2006/relationships" xmlns:p="http://schemas.openxmlformats.org/presentationml/2006/main">
-  <p:cSld>
-    <p:spTree>
-      <p:nvGrpSpPr>
-        <p:cNvPr id="1" name=""/>
-        <p:cNvGrpSpPr/>
-        <p:nvPr/>
-      </p:nvGrpSpPr>
-      <p:grpSpPr>
-        <a:xfrm>
-          <a:off x="0" y="0"/>
-          <a:ext cx="0" cy="0"/>
-          <a:chOff x="0" y="0"/>
-          <a:chExt cx="0" cy="0"/>
-        </a:xfrm>
-      </p:grpSpPr>
-      <p:sp>
-        <p:nvSpPr>
-          <p:cNvPr id="4" name="날짜 개체 틀 3">
-            <a:extLst>
-              <a:ext uri="{FF2B5EF4-FFF2-40B4-BE49-F238E27FC236}">
                 <a16:creationId xmlns:a16="http://schemas.microsoft.com/office/drawing/2014/main" id="{2989FCA7-10AB-8AF6-D2BD-97B935935DA7}"/>
               </a:ext>
             </a:extLst>
@@ -11317,7 +10285,7 @@
           <a:p>
             <a:fld id="{083A2CE0-18CD-4102-B738-4ACFF9E68BA4}" type="slidenum">
               <a:rPr lang="ko-KR" altLang="en-US" smtClean="0"/>
-              <a:t>25</a:t>
+              <a:t>22</a:t>
             </a:fld>
             <a:endParaRPr lang="ko-KR" altLang="en-US"/>
           </a:p>
@@ -11443,7 +10411,7 @@
 </p:sld>
 </file>
 
-<file path=ppt/slides/slide26.xml><?xml version="1.0" encoding="utf-8"?>
+<file path=ppt/slides/slide23.xml><?xml version="1.0" encoding="utf-8"?>
 <p:sld xmlns:a="http://schemas.openxmlformats.org/drawingml/2006/main" xmlns:r="http://schemas.openxmlformats.org/officeDocument/2006/relationships" xmlns:p="http://schemas.openxmlformats.org/presentationml/2006/main">
   <p:cSld>
     <p:spTree>
@@ -11554,7 +10522,7 @@
           <a:p>
             <a:fld id="{083A2CE0-18CD-4102-B738-4ACFF9E68BA4}" type="slidenum">
               <a:rPr lang="ko-KR" altLang="en-US" smtClean="0"/>
-              <a:t>26</a:t>
+              <a:t>23</a:t>
             </a:fld>
             <a:endParaRPr lang="ko-KR" altLang="en-US"/>
           </a:p>
@@ -11640,7 +10608,7 @@
 </p:sld>
 </file>
 
-<file path=ppt/slides/slide27.xml><?xml version="1.0" encoding="utf-8"?>
+<file path=ppt/slides/slide24.xml><?xml version="1.0" encoding="utf-8"?>
 <p:sld xmlns:a="http://schemas.openxmlformats.org/drawingml/2006/main" xmlns:r="http://schemas.openxmlformats.org/officeDocument/2006/relationships" xmlns:p="http://schemas.openxmlformats.org/presentationml/2006/main">
   <p:cSld>
     <p:spTree>
@@ -11964,7 +10932,7 @@
           <a:p>
             <a:fld id="{083A2CE0-18CD-4102-B738-4ACFF9E68BA4}" type="slidenum">
               <a:rPr lang="ko-KR" altLang="en-US" smtClean="0"/>
-              <a:t>27</a:t>
+              <a:t>24</a:t>
             </a:fld>
             <a:endParaRPr lang="ko-KR" altLang="en-US"/>
           </a:p>
@@ -12053,7 +11021,7 @@
 </p:sld>
 </file>
 
-<file path=ppt/slides/slide28.xml><?xml version="1.0" encoding="utf-8"?>
+<file path=ppt/slides/slide25.xml><?xml version="1.0" encoding="utf-8"?>
 <p:sld xmlns:a="http://schemas.openxmlformats.org/drawingml/2006/main" xmlns:r="http://schemas.openxmlformats.org/officeDocument/2006/relationships" xmlns:p="http://schemas.openxmlformats.org/presentationml/2006/main">
   <p:cSld>
     <p:spTree>
@@ -12169,7 +11137,7 @@
           <a:p>
             <a:fld id="{083A2CE0-18CD-4102-B738-4ACFF9E68BA4}" type="slidenum">
               <a:rPr lang="ko-KR" altLang="en-US" smtClean="0"/>
-              <a:t>28</a:t>
+              <a:t>25</a:t>
             </a:fld>
             <a:endParaRPr lang="ko-KR" altLang="en-US"/>
           </a:p>
@@ -12258,7 +11226,7 @@
 </p:sld>
 </file>
 
-<file path=ppt/slides/slide29.xml><?xml version="1.0" encoding="utf-8"?>
+<file path=ppt/slides/slide26.xml><?xml version="1.0" encoding="utf-8"?>
 <p:sld xmlns:a="http://schemas.openxmlformats.org/drawingml/2006/main" xmlns:r="http://schemas.openxmlformats.org/officeDocument/2006/relationships" xmlns:p="http://schemas.openxmlformats.org/presentationml/2006/main">
   <p:cSld>
     <p:spTree>
@@ -12327,7 +11295,7 @@
           <a:p>
             <a:fld id="{083A2CE0-18CD-4102-B738-4ACFF9E68BA4}" type="slidenum">
               <a:rPr lang="ko-KR" altLang="en-US" smtClean="0"/>
-              <a:t>29</a:t>
+              <a:t>26</a:t>
             </a:fld>
             <a:endParaRPr lang="ko-KR" altLang="en-US"/>
           </a:p>
@@ -12438,7 +11406,7 @@
 </p:sld>
 </file>
 
-<file path=ppt/slides/slide3.xml><?xml version="1.0" encoding="utf-8"?>
+<file path=ppt/slides/slide27.xml><?xml version="1.0" encoding="utf-8"?>
 <p:sld xmlns:a="http://schemas.openxmlformats.org/drawingml/2006/main" xmlns:r="http://schemas.openxmlformats.org/officeDocument/2006/relationships" xmlns:p="http://schemas.openxmlformats.org/presentationml/2006/main">
   <p:cSld>
     <p:spTree>
@@ -12457,347 +11425,6 @@
       </p:grpSpPr>
       <p:sp>
         <p:nvSpPr>
-          <p:cNvPr id="2" name="제목 1">
-            <a:extLst>
-              <a:ext uri="{FF2B5EF4-FFF2-40B4-BE49-F238E27FC236}">
-                <a16:creationId xmlns:a16="http://schemas.microsoft.com/office/drawing/2014/main" id="{8EFEEF68-3BF6-EF45-0154-00BB91AFDEAE}"/>
-              </a:ext>
-            </a:extLst>
-          </p:cNvPr>
-          <p:cNvSpPr>
-            <a:spLocks noGrp="1"/>
-          </p:cNvSpPr>
-          <p:nvPr>
-            <p:ph type="title"/>
-          </p:nvPr>
-        </p:nvSpPr>
-        <p:spPr/>
-        <p:txBody>
-          <a:bodyPr/>
-          <a:lstStyle/>
-          <a:p>
-            <a:r>
-              <a:rPr lang="ko-KR" altLang="en-US" dirty="0"/>
-              <a:t>커리큘럼</a:t>
-            </a:r>
-          </a:p>
-        </p:txBody>
-      </p:sp>
-      <p:sp>
-        <p:nvSpPr>
-          <p:cNvPr id="13" name="내용 개체 틀 2">
-            <a:extLst>
-              <a:ext uri="{FF2B5EF4-FFF2-40B4-BE49-F238E27FC236}">
-                <a16:creationId xmlns:a16="http://schemas.microsoft.com/office/drawing/2014/main" id="{65050DE8-20B8-115C-553F-0315E19D8DB9}"/>
-              </a:ext>
-            </a:extLst>
-          </p:cNvPr>
-          <p:cNvSpPr>
-            <a:spLocks noGrp="1"/>
-          </p:cNvSpPr>
-          <p:nvPr>
-            <p:ph idx="1"/>
-          </p:nvPr>
-        </p:nvSpPr>
-        <p:spPr>
-          <a:xfrm>
-            <a:off x="304800" y="1331743"/>
-            <a:ext cx="10515600" cy="798626"/>
-          </a:xfrm>
-        </p:spPr>
-        <p:txBody>
-          <a:bodyPr>
-            <a:normAutofit/>
-          </a:bodyPr>
-          <a:lstStyle/>
-          <a:p>
-            <a:pPr marL="0" indent="0">
-              <a:lnSpc>
-                <a:spcPct val="100000"/>
-              </a:lnSpc>
-              <a:buNone/>
-            </a:pPr>
-            <a:r>
-              <a:rPr lang="en-US" altLang="ko-KR" sz="1400" b="0" i="0" dirty="0">
-                <a:solidFill>
-                  <a:srgbClr val="5FC32A"/>
-                </a:solidFill>
-                <a:effectLst/>
-                <a:highlight>
-                  <a:srgbClr val="FFFFFF"/>
-                </a:highlight>
-                <a:latin typeface="Pretendard" panose="02000503000000020004" pitchFamily="50" charset="-127"/>
-                <a:ea typeface="Pretendard" panose="02000503000000020004" pitchFamily="50" charset="-127"/>
-              </a:rPr>
-              <a:t>※ </a:t>
-            </a:r>
-            <a:r>
-              <a:rPr lang="ko-KR" altLang="en-US" sz="1400" b="0" i="0" dirty="0">
-                <a:solidFill>
-                  <a:srgbClr val="5FC32A"/>
-                </a:solidFill>
-                <a:effectLst/>
-                <a:highlight>
-                  <a:srgbClr val="FFFFFF"/>
-                </a:highlight>
-                <a:latin typeface="Pretendard" panose="02000503000000020004" pitchFamily="50" charset="-127"/>
-                <a:ea typeface="Pretendard" panose="02000503000000020004" pitchFamily="50" charset="-127"/>
-              </a:rPr>
-              <a:t>커리큘럼 및 수업 진도는 크루들의 요청 또는 기타 사유로 인하여 속도 조절 및 내용이 변경 될 수 있습니다</a:t>
-            </a:r>
-            <a:r>
-              <a:rPr lang="en-US" altLang="ko-KR" sz="1400" b="0" i="0" dirty="0">
-                <a:solidFill>
-                  <a:srgbClr val="5FC32A"/>
-                </a:solidFill>
-                <a:effectLst/>
-                <a:highlight>
-                  <a:srgbClr val="FFFFFF"/>
-                </a:highlight>
-                <a:latin typeface="Pretendard" panose="02000503000000020004" pitchFamily="50" charset="-127"/>
-                <a:ea typeface="Pretendard" panose="02000503000000020004" pitchFamily="50" charset="-127"/>
-              </a:rPr>
-              <a:t>.</a:t>
-            </a:r>
-            <a:br>
-              <a:rPr lang="ko-KR" altLang="en-US" sz="1400" dirty="0"/>
-            </a:br>
-            <a:r>
-              <a:rPr lang="en-US" altLang="ko-KR" sz="1400" b="0" i="0" dirty="0">
-                <a:solidFill>
-                  <a:srgbClr val="5FC32A"/>
-                </a:solidFill>
-                <a:effectLst/>
-                <a:highlight>
-                  <a:srgbClr val="FFFFFF"/>
-                </a:highlight>
-                <a:latin typeface="Pretendard" panose="02000503000000020004" pitchFamily="50" charset="-127"/>
-                <a:ea typeface="Pretendard" panose="02000503000000020004" pitchFamily="50" charset="-127"/>
-              </a:rPr>
-              <a:t>※ </a:t>
-            </a:r>
-            <a:r>
-              <a:rPr lang="ko-KR" altLang="en-US" sz="1400" b="0" i="0" dirty="0" err="1">
-                <a:solidFill>
-                  <a:srgbClr val="5FC32A"/>
-                </a:solidFill>
-                <a:effectLst/>
-                <a:highlight>
-                  <a:srgbClr val="FFFFFF"/>
-                </a:highlight>
-                <a:latin typeface="Pretendard" panose="02000503000000020004" pitchFamily="50" charset="-127"/>
-                <a:ea typeface="Pretendard" panose="02000503000000020004" pitchFamily="50" charset="-127"/>
-              </a:rPr>
-              <a:t>프론트엔드를</a:t>
-            </a:r>
-            <a:r>
-              <a:rPr lang="ko-KR" altLang="en-US" sz="1400" b="0" i="0" dirty="0">
-                <a:solidFill>
-                  <a:srgbClr val="5FC32A"/>
-                </a:solidFill>
-                <a:effectLst/>
-                <a:highlight>
-                  <a:srgbClr val="FFFFFF"/>
-                </a:highlight>
-                <a:latin typeface="Pretendard" panose="02000503000000020004" pitchFamily="50" charset="-127"/>
-                <a:ea typeface="Pretendard" panose="02000503000000020004" pitchFamily="50" charset="-127"/>
-              </a:rPr>
-              <a:t> 목표로 하는 크루는 </a:t>
-            </a:r>
-            <a:r>
-              <a:rPr lang="ko-KR" altLang="en-US" sz="1400" b="0" i="0" dirty="0" err="1">
-                <a:solidFill>
-                  <a:srgbClr val="5FC32A"/>
-                </a:solidFill>
-                <a:effectLst/>
-                <a:highlight>
-                  <a:srgbClr val="FFFFFF"/>
-                </a:highlight>
-                <a:latin typeface="Pretendard" panose="02000503000000020004" pitchFamily="50" charset="-127"/>
-                <a:ea typeface="Pretendard" panose="02000503000000020004" pitchFamily="50" charset="-127"/>
-              </a:rPr>
-              <a:t>프론트엔드</a:t>
-            </a:r>
-            <a:r>
-              <a:rPr lang="ko-KR" altLang="en-US" sz="1400" b="0" i="0" dirty="0">
-                <a:solidFill>
-                  <a:srgbClr val="5FC32A"/>
-                </a:solidFill>
-                <a:effectLst/>
-                <a:highlight>
-                  <a:srgbClr val="FFFFFF"/>
-                </a:highlight>
-                <a:latin typeface="Pretendard" panose="02000503000000020004" pitchFamily="50" charset="-127"/>
-                <a:ea typeface="Pretendard" panose="02000503000000020004" pitchFamily="50" charset="-127"/>
-              </a:rPr>
-              <a:t> 과정 종료 후 조기 취업 연계</a:t>
-            </a:r>
-            <a:r>
-              <a:rPr lang="en-US" altLang="ko-KR" sz="1400" b="0" i="0" dirty="0">
-                <a:solidFill>
-                  <a:srgbClr val="5FC32A"/>
-                </a:solidFill>
-                <a:effectLst/>
-                <a:highlight>
-                  <a:srgbClr val="FFFFFF"/>
-                </a:highlight>
-                <a:latin typeface="Pretendard" panose="02000503000000020004" pitchFamily="50" charset="-127"/>
-                <a:ea typeface="Pretendard" panose="02000503000000020004" pitchFamily="50" charset="-127"/>
-              </a:rPr>
-              <a:t>/1:1 </a:t>
-            </a:r>
-            <a:r>
-              <a:rPr lang="ko-KR" altLang="en-US" sz="1400" b="0" i="0" dirty="0">
-                <a:solidFill>
-                  <a:srgbClr val="5FC32A"/>
-                </a:solidFill>
-                <a:effectLst/>
-                <a:highlight>
-                  <a:srgbClr val="FFFFFF"/>
-                </a:highlight>
-                <a:latin typeface="Pretendard" panose="02000503000000020004" pitchFamily="50" charset="-127"/>
-                <a:ea typeface="Pretendard" panose="02000503000000020004" pitchFamily="50" charset="-127"/>
-              </a:rPr>
-              <a:t>맞춤 취업 컨설팅을 받으실 수 있습니다</a:t>
-            </a:r>
-            <a:r>
-              <a:rPr lang="en-US" altLang="ko-KR" sz="1400" b="0" i="0" dirty="0">
-                <a:solidFill>
-                  <a:srgbClr val="5FC32A"/>
-                </a:solidFill>
-                <a:effectLst/>
-                <a:highlight>
-                  <a:srgbClr val="FFFFFF"/>
-                </a:highlight>
-                <a:latin typeface="Pretendard" panose="02000503000000020004" pitchFamily="50" charset="-127"/>
-                <a:ea typeface="Pretendard" panose="02000503000000020004" pitchFamily="50" charset="-127"/>
-              </a:rPr>
-              <a:t>.</a:t>
-            </a:r>
-            <a:endParaRPr lang="ko-KR" altLang="en-US" sz="2000" dirty="0"/>
-          </a:p>
-        </p:txBody>
-      </p:sp>
-      <p:sp>
-        <p:nvSpPr>
-          <p:cNvPr id="4" name="날짜 개체 틀 3">
-            <a:extLst>
-              <a:ext uri="{FF2B5EF4-FFF2-40B4-BE49-F238E27FC236}">
-                <a16:creationId xmlns:a16="http://schemas.microsoft.com/office/drawing/2014/main" id="{1274CAE6-9D4F-D463-C895-6AA134533C1C}"/>
-              </a:ext>
-            </a:extLst>
-          </p:cNvPr>
-          <p:cNvSpPr>
-            <a:spLocks noGrp="1"/>
-          </p:cNvSpPr>
-          <p:nvPr>
-            <p:ph type="dt" sz="half" idx="10"/>
-          </p:nvPr>
-        </p:nvSpPr>
-        <p:spPr/>
-        <p:txBody>
-          <a:bodyPr/>
-          <a:lstStyle/>
-          <a:p>
-            <a:fld id="{3C9CE3CE-253F-4F9D-BA15-C226C8D8501E}" type="datetime6">
-              <a:rPr lang="ko-KR" altLang="en-US" smtClean="0"/>
-              <a:t>2024년 5월</a:t>
-            </a:fld>
-            <a:endParaRPr lang="ko-KR" altLang="en-US"/>
-          </a:p>
-        </p:txBody>
-      </p:sp>
-      <p:sp>
-        <p:nvSpPr>
-          <p:cNvPr id="5" name="슬라이드 번호 개체 틀 4">
-            <a:extLst>
-              <a:ext uri="{FF2B5EF4-FFF2-40B4-BE49-F238E27FC236}">
-                <a16:creationId xmlns:a16="http://schemas.microsoft.com/office/drawing/2014/main" id="{3340B0DF-C886-35CB-84E8-3A37F925C92F}"/>
-              </a:ext>
-            </a:extLst>
-          </p:cNvPr>
-          <p:cNvSpPr>
-            <a:spLocks noGrp="1"/>
-          </p:cNvSpPr>
-          <p:nvPr>
-            <p:ph type="sldNum" sz="quarter" idx="12"/>
-          </p:nvPr>
-        </p:nvSpPr>
-        <p:spPr/>
-        <p:txBody>
-          <a:bodyPr/>
-          <a:lstStyle/>
-          <a:p>
-            <a:fld id="{083A2CE0-18CD-4102-B738-4ACFF9E68BA4}" type="slidenum">
-              <a:rPr lang="ko-KR" altLang="en-US" smtClean="0"/>
-              <a:t>3</a:t>
-            </a:fld>
-            <a:endParaRPr lang="ko-KR" altLang="en-US"/>
-          </a:p>
-        </p:txBody>
-      </p:sp>
-      <p:pic>
-        <p:nvPicPr>
-          <p:cNvPr id="9" name="그림 8">
-            <a:extLst>
-              <a:ext uri="{FF2B5EF4-FFF2-40B4-BE49-F238E27FC236}">
-                <a16:creationId xmlns:a16="http://schemas.microsoft.com/office/drawing/2014/main" id="{E1E332B1-2398-F5BB-20D3-344BABEAB1F6}"/>
-              </a:ext>
-            </a:extLst>
-          </p:cNvPr>
-          <p:cNvPicPr>
-            <a:picLocks noChangeAspect="1"/>
-          </p:cNvPicPr>
-          <p:nvPr/>
-        </p:nvPicPr>
-        <p:blipFill>
-          <a:blip r:embed="rId3"/>
-          <a:stretch>
-            <a:fillRect/>
-          </a:stretch>
-        </p:blipFill>
-        <p:spPr>
-          <a:xfrm>
-            <a:off x="934788" y="2018857"/>
-            <a:ext cx="10322423" cy="3784188"/>
-          </a:xfrm>
-          <a:prstGeom prst="rect">
-            <a:avLst/>
-          </a:prstGeom>
-        </p:spPr>
-      </p:pic>
-    </p:spTree>
-    <p:extLst>
-      <p:ext uri="{BB962C8B-B14F-4D97-AF65-F5344CB8AC3E}">
-        <p14:creationId xmlns:p14="http://schemas.microsoft.com/office/powerpoint/2010/main" val="3735047107"/>
-      </p:ext>
-    </p:extLst>
-  </p:cSld>
-  <p:clrMapOvr>
-    <a:masterClrMapping/>
-  </p:clrMapOvr>
-</p:sld>
-</file>
-
-<file path=ppt/slides/slide30.xml><?xml version="1.0" encoding="utf-8"?>
-<p:sld xmlns:a="http://schemas.openxmlformats.org/drawingml/2006/main" xmlns:r="http://schemas.openxmlformats.org/officeDocument/2006/relationships" xmlns:p="http://schemas.openxmlformats.org/presentationml/2006/main">
-  <p:cSld>
-    <p:spTree>
-      <p:nvGrpSpPr>
-        <p:cNvPr id="1" name=""/>
-        <p:cNvGrpSpPr/>
-        <p:nvPr/>
-      </p:nvGrpSpPr>
-      <p:grpSpPr>
-        <a:xfrm>
-          <a:off x="0" y="0"/>
-          <a:ext cx="0" cy="0"/>
-          <a:chOff x="0" y="0"/>
-          <a:chExt cx="0" cy="0"/>
-        </a:xfrm>
-      </p:grpSpPr>
-      <p:sp>
-        <p:nvSpPr>
           <p:cNvPr id="4" name="날짜 개체 틀 3">
             <a:extLst>
               <a:ext uri="{FF2B5EF4-FFF2-40B4-BE49-F238E27FC236}">
@@ -12848,7 +11475,7 @@
           <a:p>
             <a:fld id="{083A2CE0-18CD-4102-B738-4ACFF9E68BA4}" type="slidenum">
               <a:rPr lang="ko-KR" altLang="en-US" smtClean="0"/>
-              <a:t>30</a:t>
+              <a:t>27</a:t>
             </a:fld>
             <a:endParaRPr lang="ko-KR" altLang="en-US"/>
           </a:p>
@@ -12903,7 +11530,7 @@
 </p:sld>
 </file>
 
-<file path=ppt/slides/slide31.xml><?xml version="1.0" encoding="utf-8"?>
+<file path=ppt/slides/slide28.xml><?xml version="1.0" encoding="utf-8"?>
 <p:sld xmlns:a="http://schemas.openxmlformats.org/drawingml/2006/main" xmlns:r="http://schemas.openxmlformats.org/officeDocument/2006/relationships" xmlns:p="http://schemas.openxmlformats.org/presentationml/2006/main">
   <p:cSld>
     <p:spTree>
@@ -13284,7 +11911,7 @@
           <a:p>
             <a:fld id="{083A2CE0-18CD-4102-B738-4ACFF9E68BA4}" type="slidenum">
               <a:rPr lang="ko-KR" altLang="en-US" smtClean="0"/>
-              <a:t>31</a:t>
+              <a:t>28</a:t>
             </a:fld>
             <a:endParaRPr lang="ko-KR" altLang="en-US"/>
           </a:p>
@@ -13335,7 +11962,7 @@
 </p:sld>
 </file>
 
-<file path=ppt/slides/slide32.xml><?xml version="1.0" encoding="utf-8"?>
+<file path=ppt/slides/slide29.xml><?xml version="1.0" encoding="utf-8"?>
 <p:sld xmlns:a="http://schemas.openxmlformats.org/drawingml/2006/main" xmlns:r="http://schemas.openxmlformats.org/officeDocument/2006/relationships" xmlns:p="http://schemas.openxmlformats.org/presentationml/2006/main">
   <p:cSld>
     <p:spTree>
@@ -13392,7 +12019,7 @@
           <a:p>
             <a:fld id="{083A2CE0-18CD-4102-B738-4ACFF9E68BA4}" type="slidenum">
               <a:rPr lang="ko-KR" altLang="en-US" smtClean="0"/>
-              <a:t>32</a:t>
+              <a:t>29</a:t>
             </a:fld>
             <a:endParaRPr lang="ko-KR" altLang="en-US"/>
           </a:p>
@@ -13434,7 +12061,7 @@
 </p:sld>
 </file>
 
-<file path=ppt/slides/slide33.xml><?xml version="1.0" encoding="utf-8"?>
+<file path=ppt/slides/slide3.xml><?xml version="1.0" encoding="utf-8"?>
 <p:sld xmlns:a="http://schemas.openxmlformats.org/drawingml/2006/main" xmlns:r="http://schemas.openxmlformats.org/officeDocument/2006/relationships" xmlns:p="http://schemas.openxmlformats.org/presentationml/2006/main">
   <p:cSld>
     <p:spTree>
@@ -13453,10 +12080,59 @@
       </p:grpSpPr>
       <p:sp>
         <p:nvSpPr>
+          <p:cNvPr id="2" name="내용 개체 틀 1">
+            <a:extLst>
+              <a:ext uri="{FF2B5EF4-FFF2-40B4-BE49-F238E27FC236}">
+                <a16:creationId xmlns:a16="http://schemas.microsoft.com/office/drawing/2014/main" id="{93247895-EA98-AEFB-FF6A-D36072B72E7D}"/>
+              </a:ext>
+            </a:extLst>
+          </p:cNvPr>
+          <p:cNvSpPr>
+            <a:spLocks noGrp="1"/>
+          </p:cNvSpPr>
+          <p:nvPr>
+            <p:ph idx="1"/>
+          </p:nvPr>
+        </p:nvSpPr>
+        <p:spPr/>
+        <p:txBody>
+          <a:bodyPr>
+            <a:normAutofit/>
+          </a:bodyPr>
+          <a:lstStyle/>
+          <a:p>
+            <a:r>
+              <a:rPr lang="en-US" altLang="ko-KR" sz="2400" dirty="0"/>
+              <a:t>5</a:t>
+            </a:r>
+            <a:r>
+              <a:rPr lang="ko-KR" altLang="en-US" sz="2400" dirty="0"/>
+              <a:t>기 수강 만족도 </a:t>
+            </a:r>
+            <a:r>
+              <a:rPr lang="en-US" altLang="ko-KR" sz="2400" b="1" dirty="0">
+                <a:solidFill>
+                  <a:schemeClr val="accent1"/>
+                </a:solidFill>
+              </a:rPr>
+              <a:t>94.7%</a:t>
+            </a:r>
+          </a:p>
+          <a:p>
+            <a:r>
+              <a:rPr lang="ko-KR" altLang="en-US" sz="2400" dirty="0"/>
+              <a:t>이전 기수 후기</a:t>
+            </a:r>
+            <a:endParaRPr lang="en-US" altLang="ko-KR" sz="2400" dirty="0"/>
+          </a:p>
+        </p:txBody>
+      </p:sp>
+      <p:sp>
+        <p:nvSpPr>
           <p:cNvPr id="3" name="날짜 개체 틀 2">
             <a:extLst>
               <a:ext uri="{FF2B5EF4-FFF2-40B4-BE49-F238E27FC236}">
-                <a16:creationId xmlns:a16="http://schemas.microsoft.com/office/drawing/2014/main" id="{3F048C50-6513-7049-7DEB-7C192C723808}"/>
+                <a16:creationId xmlns:a16="http://schemas.microsoft.com/office/drawing/2014/main" id="{9026B0A2-6B1A-872C-3604-6958EDC7F90B}"/>
               </a:ext>
             </a:extLst>
           </p:cNvPr>
@@ -13485,7 +12161,7 @@
           <p:cNvPr id="4" name="슬라이드 번호 개체 틀 3">
             <a:extLst>
               <a:ext uri="{FF2B5EF4-FFF2-40B4-BE49-F238E27FC236}">
-                <a16:creationId xmlns:a16="http://schemas.microsoft.com/office/drawing/2014/main" id="{1E67EFCB-9C02-BB06-0788-FAD7988F68DC}"/>
+                <a16:creationId xmlns:a16="http://schemas.microsoft.com/office/drawing/2014/main" id="{83913C3C-5339-6B33-2A46-19CB8B825491}"/>
               </a:ext>
             </a:extLst>
           </p:cNvPr>
@@ -13503,7 +12179,153 @@
           <a:p>
             <a:fld id="{083A2CE0-18CD-4102-B738-4ACFF9E68BA4}" type="slidenum">
               <a:rPr lang="ko-KR" altLang="en-US" smtClean="0"/>
-              <a:t>33</a:t>
+              <a:t>3</a:t>
+            </a:fld>
+            <a:endParaRPr lang="ko-KR" altLang="en-US"/>
+          </a:p>
+        </p:txBody>
+      </p:sp>
+      <p:sp>
+        <p:nvSpPr>
+          <p:cNvPr id="5" name="제목 4">
+            <a:extLst>
+              <a:ext uri="{FF2B5EF4-FFF2-40B4-BE49-F238E27FC236}">
+                <a16:creationId xmlns:a16="http://schemas.microsoft.com/office/drawing/2014/main" id="{F769FF13-D11F-9166-86C9-4CFB8A973D0F}"/>
+              </a:ext>
+            </a:extLst>
+          </p:cNvPr>
+          <p:cNvSpPr>
+            <a:spLocks noGrp="1"/>
+          </p:cNvSpPr>
+          <p:nvPr>
+            <p:ph type="title"/>
+          </p:nvPr>
+        </p:nvSpPr>
+        <p:spPr/>
+        <p:txBody>
+          <a:bodyPr/>
+          <a:lstStyle/>
+          <a:p>
+            <a:r>
+              <a:rPr lang="ko-KR" altLang="en-US" dirty="0"/>
+              <a:t>과정 후기</a:t>
+            </a:r>
+          </a:p>
+        </p:txBody>
+      </p:sp>
+      <p:pic>
+        <p:nvPicPr>
+          <p:cNvPr id="7" name="그림 6">
+            <a:extLst>
+              <a:ext uri="{FF2B5EF4-FFF2-40B4-BE49-F238E27FC236}">
+                <a16:creationId xmlns:a16="http://schemas.microsoft.com/office/drawing/2014/main" id="{D78EFA61-86D8-DFA8-6DF3-4755F855DE10}"/>
+              </a:ext>
+            </a:extLst>
+          </p:cNvPr>
+          <p:cNvPicPr>
+            <a:picLocks noChangeAspect="1"/>
+          </p:cNvPicPr>
+          <p:nvPr/>
+        </p:nvPicPr>
+        <p:blipFill>
+          <a:blip r:embed="rId3"/>
+          <a:stretch>
+            <a:fillRect/>
+          </a:stretch>
+        </p:blipFill>
+        <p:spPr>
+          <a:xfrm>
+            <a:off x="1470967" y="2892367"/>
+            <a:ext cx="9250066" cy="2715004"/>
+          </a:xfrm>
+          <a:prstGeom prst="rect">
+            <a:avLst/>
+          </a:prstGeom>
+        </p:spPr>
+      </p:pic>
+    </p:spTree>
+    <p:extLst>
+      <p:ext uri="{BB962C8B-B14F-4D97-AF65-F5344CB8AC3E}">
+        <p14:creationId xmlns:p14="http://schemas.microsoft.com/office/powerpoint/2010/main" val="3855112612"/>
+      </p:ext>
+    </p:extLst>
+  </p:cSld>
+  <p:clrMapOvr>
+    <a:masterClrMapping/>
+  </p:clrMapOvr>
+</p:sld>
+</file>
+
+<file path=ppt/slides/slide30.xml><?xml version="1.0" encoding="utf-8"?>
+<p:sld xmlns:a="http://schemas.openxmlformats.org/drawingml/2006/main" xmlns:r="http://schemas.openxmlformats.org/officeDocument/2006/relationships" xmlns:p="http://schemas.openxmlformats.org/presentationml/2006/main">
+  <p:cSld>
+    <p:spTree>
+      <p:nvGrpSpPr>
+        <p:cNvPr id="1" name=""/>
+        <p:cNvGrpSpPr/>
+        <p:nvPr/>
+      </p:nvGrpSpPr>
+      <p:grpSpPr>
+        <a:xfrm>
+          <a:off x="0" y="0"/>
+          <a:ext cx="0" cy="0"/>
+          <a:chOff x="0" y="0"/>
+          <a:chExt cx="0" cy="0"/>
+        </a:xfrm>
+      </p:grpSpPr>
+      <p:sp>
+        <p:nvSpPr>
+          <p:cNvPr id="3" name="날짜 개체 틀 2">
+            <a:extLst>
+              <a:ext uri="{FF2B5EF4-FFF2-40B4-BE49-F238E27FC236}">
+                <a16:creationId xmlns:a16="http://schemas.microsoft.com/office/drawing/2014/main" id="{3F048C50-6513-7049-7DEB-7C192C723808}"/>
+              </a:ext>
+            </a:extLst>
+          </p:cNvPr>
+          <p:cNvSpPr>
+            <a:spLocks noGrp="1"/>
+          </p:cNvSpPr>
+          <p:nvPr>
+            <p:ph type="dt" sz="half" idx="10"/>
+          </p:nvPr>
+        </p:nvSpPr>
+        <p:spPr/>
+        <p:txBody>
+          <a:bodyPr/>
+          <a:lstStyle/>
+          <a:p>
+            <a:fld id="{3C9CE3CE-253F-4F9D-BA15-C226C8D8501E}" type="datetime6">
+              <a:rPr lang="ko-KR" altLang="en-US" smtClean="0"/>
+              <a:t>2024년 5월</a:t>
+            </a:fld>
+            <a:endParaRPr lang="ko-KR" altLang="en-US"/>
+          </a:p>
+        </p:txBody>
+      </p:sp>
+      <p:sp>
+        <p:nvSpPr>
+          <p:cNvPr id="4" name="슬라이드 번호 개체 틀 3">
+            <a:extLst>
+              <a:ext uri="{FF2B5EF4-FFF2-40B4-BE49-F238E27FC236}">
+                <a16:creationId xmlns:a16="http://schemas.microsoft.com/office/drawing/2014/main" id="{1E67EFCB-9C02-BB06-0788-FAD7988F68DC}"/>
+              </a:ext>
+            </a:extLst>
+          </p:cNvPr>
+          <p:cNvSpPr>
+            <a:spLocks noGrp="1"/>
+          </p:cNvSpPr>
+          <p:nvPr>
+            <p:ph type="sldNum" sz="quarter" idx="12"/>
+          </p:nvPr>
+        </p:nvSpPr>
+        <p:spPr/>
+        <p:txBody>
+          <a:bodyPr/>
+          <a:lstStyle/>
+          <a:p>
+            <a:fld id="{083A2CE0-18CD-4102-B738-4ACFF9E68BA4}" type="slidenum">
+              <a:rPr lang="ko-KR" altLang="en-US" smtClean="0"/>
+              <a:t>30</a:t>
             </a:fld>
             <a:endParaRPr lang="ko-KR" altLang="en-US"/>
           </a:p>
@@ -14100,10 +12922,10 @@
       </p:pic>
       <p:pic>
         <p:nvPicPr>
-          <p:cNvPr id="10" name="Picture 4" descr="네이버 블로그 종합 가이드 [ 수익, 부업, 구조, 분석 ] : 네이버 블로그">
-            <a:extLst>
-              <a:ext uri="{FF2B5EF4-FFF2-40B4-BE49-F238E27FC236}">
-                <a16:creationId xmlns:a16="http://schemas.microsoft.com/office/drawing/2014/main" id="{3E132744-13F1-BFFC-3DE9-3203162C0DF6}"/>
+          <p:cNvPr id="11" name="Picture 6" descr="워드 프레스 - 무료 소셜 미디어개 아이콘">
+            <a:extLst>
+              <a:ext uri="{FF2B5EF4-FFF2-40B4-BE49-F238E27FC236}">
+                <a16:creationId xmlns:a16="http://schemas.microsoft.com/office/drawing/2014/main" id="{7D8F5D57-96D6-DE56-9084-AFFD0024500A}"/>
               </a:ext>
             </a:extLst>
           </p:cNvPr>
@@ -14113,7 +12935,7 @@
           <p:nvPr/>
         </p:nvPicPr>
         <p:blipFill>
-          <a:blip r:embed="rId6">
+          <a:blip r:embed="rId6" cstate="hqprint">
             <a:extLst>
               <a:ext uri="{28A0092B-C50C-407E-A947-70E740481C1C}">
                 <a14:useLocalDpi xmlns:a14="http://schemas.microsoft.com/office/drawing/2010/main" val="0"/>
@@ -14127,8 +12949,8 @@
         </p:blipFill>
         <p:spPr bwMode="auto">
           <a:xfrm>
-            <a:off x="7491703" y="2466143"/>
-            <a:ext cx="1270102" cy="1136741"/>
+            <a:off x="9287902" y="2505219"/>
+            <a:ext cx="1080000" cy="1080000"/>
           </a:xfrm>
           <a:prstGeom prst="rect">
             <a:avLst/>
@@ -14147,10 +12969,10 @@
       </p:pic>
       <p:pic>
         <p:nvPicPr>
-          <p:cNvPr id="11" name="Picture 6" descr="워드 프레스 - 무료 소셜 미디어개 아이콘">
-            <a:extLst>
-              <a:ext uri="{FF2B5EF4-FFF2-40B4-BE49-F238E27FC236}">
-                <a16:creationId xmlns:a16="http://schemas.microsoft.com/office/drawing/2014/main" id="{7D8F5D57-96D6-DE56-9084-AFFD0024500A}"/>
+          <p:cNvPr id="12" name="Picture 8" descr="로그인 - 포블로그 : 블로그 체험단 마케팅 서비스">
+            <a:extLst>
+              <a:ext uri="{FF2B5EF4-FFF2-40B4-BE49-F238E27FC236}">
+                <a16:creationId xmlns:a16="http://schemas.microsoft.com/office/drawing/2014/main" id="{B7689260-1B7D-899F-AD4A-3F3674041FC0}"/>
               </a:ext>
             </a:extLst>
           </p:cNvPr>
@@ -14174,8 +12996,8 @@
         </p:blipFill>
         <p:spPr bwMode="auto">
           <a:xfrm>
-            <a:off x="9035693" y="2840817"/>
-            <a:ext cx="929000" cy="929000"/>
+            <a:off x="8443779" y="3585219"/>
+            <a:ext cx="1080000" cy="1080000"/>
           </a:xfrm>
           <a:prstGeom prst="rect">
             <a:avLst/>
@@ -14194,10 +13016,10 @@
       </p:pic>
       <p:pic>
         <p:nvPicPr>
-          <p:cNvPr id="12" name="Picture 8" descr="로그인 - 포블로그 : 블로그 체험단 마케팅 서비스">
-            <a:extLst>
-              <a:ext uri="{FF2B5EF4-FFF2-40B4-BE49-F238E27FC236}">
-                <a16:creationId xmlns:a16="http://schemas.microsoft.com/office/drawing/2014/main" id="{B7689260-1B7D-899F-AD4A-3F3674041FC0}"/>
+          <p:cNvPr id="5122" name="Picture 2" descr="네이버 블로그 - Naver Blog 4.1.41 APK Download by NAVER Corp. - APKMirror">
+            <a:extLst>
+              <a:ext uri="{FF2B5EF4-FFF2-40B4-BE49-F238E27FC236}">
+                <a16:creationId xmlns:a16="http://schemas.microsoft.com/office/drawing/2014/main" id="{94BDB6B8-492C-0217-7AB8-5DEE82830DE2}"/>
               </a:ext>
             </a:extLst>
           </p:cNvPr>
@@ -14207,7 +13029,7 @@
           <p:nvPr/>
         </p:nvPicPr>
         <p:blipFill>
-          <a:blip r:embed="rId8" cstate="hqprint">
+          <a:blip r:embed="rId8">
             <a:extLst>
               <a:ext uri="{28A0092B-C50C-407E-A947-70E740481C1C}">
                 <a14:useLocalDpi xmlns:a14="http://schemas.microsoft.com/office/drawing/2010/main" val="0"/>
@@ -14221,8 +13043,8 @@
         </p:blipFill>
         <p:spPr bwMode="auto">
           <a:xfrm>
-            <a:off x="8428974" y="3769817"/>
-            <a:ext cx="665661" cy="665661"/>
+            <a:off x="7903779" y="2349000"/>
+            <a:ext cx="1080000" cy="1080000"/>
           </a:xfrm>
           <a:prstGeom prst="rect">
             <a:avLst/>
@@ -14252,7 +13074,7 @@
 </p:sld>
 </file>
 
-<file path=ppt/slides/slide34.xml><?xml version="1.0" encoding="utf-8"?>
+<file path=ppt/slides/slide31.xml><?xml version="1.0" encoding="utf-8"?>
 <p:sld xmlns:a="http://schemas.openxmlformats.org/drawingml/2006/main" xmlns:r="http://schemas.openxmlformats.org/officeDocument/2006/relationships" xmlns:p="http://schemas.openxmlformats.org/presentationml/2006/main">
   <p:cSld>
     <p:spTree>
@@ -14299,8 +13121,14 @@
               <a:rPr lang="en-US" altLang="ko-KR" sz="2400" dirty="0">
                 <a:hlinkClick r:id="rId3"/>
               </a:rPr>
-              <a:t>https://rb.gy/ij9td</a:t>
-            </a:r>
+              <a:t>https://bit.ly/3wAE0oE</a:t>
+            </a:r>
+            <a:endParaRPr lang="en-US" altLang="ko-KR" sz="2400" b="1" dirty="0"/>
+          </a:p>
+          <a:p>
+            <a:pPr marL="0" indent="0">
+              <a:buNone/>
+            </a:pPr>
             <a:r>
               <a:rPr lang="en-US" altLang="ko-KR" sz="2400" dirty="0"/>
               <a:t> </a:t>
@@ -14361,7 +13189,7 @@
           <a:p>
             <a:fld id="{083A2CE0-18CD-4102-B738-4ACFF9E68BA4}" type="slidenum">
               <a:rPr lang="ko-KR" altLang="en-US" smtClean="0"/>
-              <a:t>34</a:t>
+              <a:t>31</a:t>
             </a:fld>
             <a:endParaRPr lang="ko-KR" altLang="en-US"/>
           </a:p>
@@ -14401,10 +13229,10 @@
       </p:sp>
       <p:pic>
         <p:nvPicPr>
-          <p:cNvPr id="7" name="그림 6">
-            <a:extLst>
-              <a:ext uri="{FF2B5EF4-FFF2-40B4-BE49-F238E27FC236}">
-                <a16:creationId xmlns:a16="http://schemas.microsoft.com/office/drawing/2014/main" id="{6C80DFF7-EE45-5B20-20F3-E28EAAF5EE9A}"/>
+          <p:cNvPr id="8" name="그림 7">
+            <a:extLst>
+              <a:ext uri="{FF2B5EF4-FFF2-40B4-BE49-F238E27FC236}">
+                <a16:creationId xmlns:a16="http://schemas.microsoft.com/office/drawing/2014/main" id="{C9973E04-4F51-87BA-B101-90CD43CAA8EA}"/>
               </a:ext>
             </a:extLst>
           </p:cNvPr>
@@ -14421,8 +13249,8 @@
         </p:blipFill>
         <p:spPr>
           <a:xfrm>
-            <a:off x="6378825" y="516914"/>
-            <a:ext cx="5131077" cy="5436245"/>
+            <a:off x="6806557" y="782606"/>
+            <a:ext cx="4273076" cy="5292787"/>
           </a:xfrm>
           <a:prstGeom prst="rect">
             <a:avLst/>
@@ -14442,7 +13270,7 @@
 </p:sld>
 </file>
 
-<file path=ppt/slides/slide35.xml><?xml version="1.0" encoding="utf-8"?>
+<file path=ppt/slides/slide32.xml><?xml version="1.0" encoding="utf-8"?>
 <p:sld xmlns:a="http://schemas.openxmlformats.org/drawingml/2006/main" xmlns:r="http://schemas.openxmlformats.org/officeDocument/2006/relationships" xmlns:p="http://schemas.openxmlformats.org/presentationml/2006/main">
   <p:cSld>
     <p:spTree>
@@ -14483,17 +13311,17 @@
           <a:lstStyle/>
           <a:p>
             <a:r>
-              <a:rPr lang="ko-KR" altLang="en-US" dirty="0"/>
+              <a:rPr lang="ko-KR" altLang="en-US" sz="2400" dirty="0"/>
               <a:t>제목</a:t>
             </a:r>
-            <a:endParaRPr lang="en-US" altLang="ko-KR" dirty="0"/>
+            <a:endParaRPr lang="en-US" altLang="ko-KR" sz="2400" dirty="0"/>
           </a:p>
           <a:p>
             <a:pPr marL="457200" lvl="1" indent="0">
               <a:buNone/>
             </a:pPr>
             <a:r>
-              <a:rPr lang="en-US" altLang="ko-KR" b="1" dirty="0">
+              <a:rPr lang="en-US" altLang="ko-KR" sz="2000" b="1" dirty="0">
                 <a:solidFill>
                   <a:srgbClr val="6EC173"/>
                 </a:solidFill>
@@ -14501,7 +13329,7 @@
               <a:t>[</a:t>
             </a:r>
             <a:r>
-              <a:rPr lang="ko-KR" altLang="en-US" b="1" dirty="0">
+              <a:rPr lang="ko-KR" altLang="en-US" sz="2000" b="1" dirty="0">
                 <a:solidFill>
                   <a:srgbClr val="6EC173"/>
                 </a:solidFill>
@@ -14509,7 +13337,7 @@
               <a:t>새싹</a:t>
             </a:r>
             <a:r>
-              <a:rPr lang="en-US" altLang="ko-KR" b="1" dirty="0">
+              <a:rPr lang="en-US" altLang="ko-KR" sz="2000" b="1" dirty="0">
                 <a:solidFill>
                   <a:srgbClr val="6EC173"/>
                 </a:solidFill>
@@ -14517,7 +13345,7 @@
               <a:t>x</a:t>
             </a:r>
             <a:r>
-              <a:rPr lang="ko-KR" altLang="en-US" b="1" dirty="0" err="1">
+              <a:rPr lang="ko-KR" altLang="en-US" sz="2000" b="1" dirty="0" err="1">
                 <a:solidFill>
                   <a:srgbClr val="6EC173"/>
                 </a:solidFill>
@@ -14525,7 +13353,7 @@
               <a:t>코딩온</a:t>
             </a:r>
             <a:r>
-              <a:rPr lang="en-US" altLang="ko-KR" b="1" dirty="0">
+              <a:rPr lang="en-US" altLang="ko-KR" sz="2000" b="1" dirty="0">
                 <a:solidFill>
                   <a:srgbClr val="6EC173"/>
                 </a:solidFill>
@@ -14533,7 +13361,7 @@
               <a:t>] + </a:t>
             </a:r>
             <a:r>
-              <a:rPr lang="ko-KR" altLang="en-US" b="1" dirty="0" err="1">
+              <a:rPr lang="ko-KR" altLang="en-US" sz="2000" b="1" dirty="0" err="1">
                 <a:solidFill>
                   <a:srgbClr val="6EC173"/>
                 </a:solidFill>
@@ -14541,7 +13369,7 @@
               <a:t>과정명</a:t>
             </a:r>
             <a:r>
-              <a:rPr lang="ko-KR" altLang="en-US" b="1" dirty="0">
+              <a:rPr lang="ko-KR" altLang="en-US" sz="2000" b="1" dirty="0">
                 <a:solidFill>
                   <a:srgbClr val="6EC173"/>
                 </a:solidFill>
@@ -14549,7 +13377,7 @@
               <a:t> </a:t>
             </a:r>
             <a:r>
-              <a:rPr lang="en-US" altLang="ko-KR" b="1" dirty="0">
+              <a:rPr lang="en-US" altLang="ko-KR" sz="2000" b="1" dirty="0">
                 <a:solidFill>
                   <a:srgbClr val="6EC173"/>
                 </a:solidFill>
@@ -14557,7 +13385,7 @@
               <a:t>+ </a:t>
             </a:r>
             <a:r>
-              <a:rPr lang="ko-KR" altLang="en-US" b="1" dirty="0">
+              <a:rPr lang="ko-KR" altLang="en-US" sz="2000" b="1" dirty="0">
                 <a:solidFill>
                   <a:srgbClr val="6EC173"/>
                 </a:solidFill>
@@ -14565,7 +13393,7 @@
               <a:t>주차 </a:t>
             </a:r>
             <a:r>
-              <a:rPr lang="en-US" altLang="ko-KR" b="1" dirty="0">
+              <a:rPr lang="en-US" altLang="ko-KR" sz="2000" b="1" dirty="0">
                 <a:solidFill>
                   <a:srgbClr val="6EC173"/>
                 </a:solidFill>
@@ -14573,7 +13401,7 @@
               <a:t>+ ‘</a:t>
             </a:r>
             <a:r>
-              <a:rPr lang="ko-KR" altLang="en-US" b="1" dirty="0">
+              <a:rPr lang="ko-KR" altLang="en-US" sz="2000" b="1" dirty="0">
                 <a:solidFill>
                   <a:srgbClr val="6EC173"/>
                 </a:solidFill>
@@ -14581,7 +13409,7 @@
               <a:t>회고’ </a:t>
             </a:r>
             <a:r>
-              <a:rPr lang="en-US" altLang="ko-KR" b="1" dirty="0">
+              <a:rPr lang="en-US" altLang="ko-KR" sz="2000" b="1" dirty="0">
                 <a:solidFill>
                   <a:srgbClr val="6EC173"/>
                 </a:solidFill>
@@ -14589,7 +13417,7 @@
               <a:t>+ </a:t>
             </a:r>
             <a:r>
-              <a:rPr lang="ko-KR" altLang="en-US" b="1" dirty="0" err="1">
+              <a:rPr lang="ko-KR" altLang="en-US" sz="2000" b="1" dirty="0" err="1">
                 <a:solidFill>
                   <a:srgbClr val="6EC173"/>
                 </a:solidFill>
@@ -14597,14 +13425,14 @@
               <a:t>블로깅</a:t>
             </a:r>
             <a:r>
-              <a:rPr lang="ko-KR" altLang="en-US" b="1" dirty="0">
+              <a:rPr lang="ko-KR" altLang="en-US" sz="2000" b="1" dirty="0">
                 <a:solidFill>
                   <a:srgbClr val="6EC173"/>
                 </a:solidFill>
               </a:rPr>
               <a:t> 주제 </a:t>
             </a:r>
-            <a:endParaRPr lang="en-US" altLang="ko-KR" b="1" dirty="0">
+            <a:endParaRPr lang="en-US" altLang="ko-KR" sz="2000" b="1" dirty="0">
               <a:solidFill>
                 <a:srgbClr val="6EC173"/>
               </a:solidFill>
@@ -14615,162 +13443,174 @@
               <a:buNone/>
             </a:pPr>
             <a:r>
-              <a:rPr lang="en-US" altLang="ko-KR" dirty="0"/>
+              <a:rPr lang="en-US" altLang="ko-KR" sz="2000" dirty="0"/>
               <a:t>Ex) [</a:t>
             </a:r>
             <a:r>
-              <a:rPr lang="ko-KR" altLang="en-US" dirty="0"/>
+              <a:rPr lang="ko-KR" altLang="en-US" sz="2000" dirty="0"/>
               <a:t>새싹</a:t>
             </a:r>
             <a:r>
-              <a:rPr lang="en-US" altLang="ko-KR" dirty="0"/>
+              <a:rPr lang="en-US" altLang="ko-KR" sz="2000" dirty="0"/>
               <a:t>x</a:t>
             </a:r>
             <a:r>
-              <a:rPr lang="ko-KR" altLang="en-US" dirty="0" err="1"/>
+              <a:rPr lang="ko-KR" altLang="en-US" sz="2000" dirty="0" err="1"/>
               <a:t>코딩온</a:t>
             </a:r>
             <a:r>
-              <a:rPr lang="en-US" altLang="ko-KR" dirty="0"/>
+              <a:rPr lang="en-US" altLang="ko-KR" sz="2000" dirty="0"/>
               <a:t>] </a:t>
             </a:r>
             <a:r>
-              <a:rPr lang="ko-KR" altLang="en-US" dirty="0"/>
+              <a:rPr lang="ko-KR" altLang="en-US" sz="2000" dirty="0"/>
               <a:t>웹 개발자 부트캠프 과정 </a:t>
             </a:r>
             <a:r>
-              <a:rPr lang="en-US" altLang="ko-KR" dirty="0"/>
+              <a:rPr lang="en-US" altLang="ko-KR" sz="2000" dirty="0"/>
               <a:t>1</a:t>
             </a:r>
             <a:r>
-              <a:rPr lang="ko-KR" altLang="en-US" dirty="0"/>
+              <a:rPr lang="ko-KR" altLang="en-US" sz="2000" dirty="0"/>
               <a:t>주차 회고 </a:t>
             </a:r>
             <a:r>
-              <a:rPr lang="en-US" altLang="ko-KR" dirty="0"/>
+              <a:rPr lang="en-US" altLang="ko-KR" sz="2000" dirty="0"/>
               <a:t>| HTML </a:t>
             </a:r>
             <a:r>
-              <a:rPr lang="ko-KR" altLang="en-US" dirty="0"/>
+              <a:rPr lang="ko-KR" altLang="en-US" sz="2000" dirty="0"/>
               <a:t>태그 </a:t>
             </a:r>
-            <a:endParaRPr lang="en-US" altLang="ko-KR" dirty="0"/>
-          </a:p>
-          <a:p>
-            <a:r>
-              <a:rPr lang="ko-KR" altLang="en-US" dirty="0"/>
-              <a:t>내용</a:t>
-            </a:r>
-            <a:endParaRPr lang="en-US" altLang="ko-KR" dirty="0"/>
+            <a:endParaRPr lang="en-US" altLang="ko-KR" sz="2000" dirty="0"/>
           </a:p>
           <a:p>
             <a:pPr marL="457200" lvl="1" indent="0">
               <a:buNone/>
             </a:pPr>
-            <a:r>
-              <a:rPr lang="ko-KR" altLang="en-US" dirty="0"/>
-              <a:t>서론 → 본론 → 결론</a:t>
-            </a:r>
-            <a:r>
-              <a:rPr lang="en-US" altLang="ko-KR" dirty="0"/>
-              <a:t>(</a:t>
-            </a:r>
-            <a:r>
-              <a:rPr lang="ko-KR" altLang="en-US" dirty="0"/>
-              <a:t>회고</a:t>
-            </a:r>
-            <a:r>
-              <a:rPr lang="en-US" altLang="ko-KR" dirty="0"/>
-              <a:t>)</a:t>
-            </a:r>
-          </a:p>
-          <a:p>
-            <a:r>
-              <a:rPr lang="ko-KR" altLang="en-US" dirty="0"/>
-              <a:t>주기</a:t>
-            </a:r>
-            <a:endParaRPr lang="en-US" altLang="ko-KR" dirty="0"/>
+            <a:endParaRPr lang="en-US" altLang="ko-KR" sz="2000" dirty="0"/>
+          </a:p>
+          <a:p>
+            <a:r>
+              <a:rPr lang="ko-KR" altLang="en-US" sz="2400" dirty="0"/>
+              <a:t>내용</a:t>
+            </a:r>
+            <a:endParaRPr lang="en-US" altLang="ko-KR" sz="2400" dirty="0"/>
           </a:p>
           <a:p>
             <a:pPr marL="457200" lvl="1" indent="0">
               <a:buNone/>
             </a:pPr>
             <a:r>
-              <a:rPr lang="ko-KR" altLang="en-US" dirty="0"/>
-              <a:t>일주일에 </a:t>
-            </a:r>
-            <a:r>
-              <a:rPr lang="ko-KR" altLang="en-US" b="1" dirty="0">
-                <a:solidFill>
-                  <a:srgbClr val="6EC173"/>
-                </a:solidFill>
-              </a:rPr>
-              <a:t>최소 </a:t>
-            </a:r>
-            <a:r>
-              <a:rPr lang="en-US" altLang="ko-KR" b="1" dirty="0">
-                <a:solidFill>
-                  <a:srgbClr val="6EC173"/>
-                </a:solidFill>
-              </a:rPr>
-              <a:t>2</a:t>
-            </a:r>
-            <a:r>
-              <a:rPr lang="ko-KR" altLang="en-US" b="1" dirty="0">
-                <a:solidFill>
-                  <a:srgbClr val="6EC173"/>
-                </a:solidFill>
-              </a:rPr>
-              <a:t>번</a:t>
-            </a:r>
-            <a:r>
-              <a:rPr lang="en-US" altLang="ko-KR" dirty="0"/>
-              <a:t>!</a:t>
+              <a:rPr lang="ko-KR" altLang="en-US" sz="2000" dirty="0"/>
+              <a:t>서론 → 본론 → 결론</a:t>
+            </a:r>
+            <a:r>
+              <a:rPr lang="en-US" altLang="ko-KR" sz="2000" dirty="0"/>
+              <a:t>(</a:t>
+            </a:r>
+            <a:r>
+              <a:rPr lang="ko-KR" altLang="en-US" sz="2000" dirty="0"/>
+              <a:t>회고</a:t>
+            </a:r>
+            <a:r>
+              <a:rPr lang="en-US" altLang="ko-KR" sz="2000" dirty="0"/>
+              <a:t>)</a:t>
             </a:r>
           </a:p>
           <a:p>
             <a:pPr marL="457200" lvl="1" indent="0">
               <a:buNone/>
             </a:pPr>
-            <a:r>
-              <a:rPr lang="en-US" altLang="ko-KR" dirty="0"/>
-              <a:t>1</a:t>
-            </a:r>
-            <a:r>
-              <a:rPr lang="ko-KR" altLang="en-US" dirty="0"/>
-              <a:t>개의 프로젝트당 </a:t>
-            </a:r>
-            <a:r>
-              <a:rPr lang="en-US" altLang="ko-KR" b="1" dirty="0">
-                <a:solidFill>
-                  <a:srgbClr val="6EC173"/>
-                </a:solidFill>
-              </a:rPr>
-              <a:t>1</a:t>
-            </a:r>
-            <a:r>
-              <a:rPr lang="ko-KR" altLang="en-US" b="1" dirty="0">
-                <a:solidFill>
-                  <a:srgbClr val="6EC173"/>
-                </a:solidFill>
-              </a:rPr>
-              <a:t>개의 회고록</a:t>
-            </a:r>
-            <a:r>
-              <a:rPr lang="en-US" altLang="ko-KR" dirty="0"/>
-              <a:t>!</a:t>
-            </a:r>
+            <a:endParaRPr lang="en-US" altLang="ko-KR" sz="2000" dirty="0"/>
+          </a:p>
+          <a:p>
+            <a:r>
+              <a:rPr lang="ko-KR" altLang="en-US" sz="2400" dirty="0"/>
+              <a:t>주기</a:t>
+            </a:r>
+            <a:endParaRPr lang="en-US" altLang="ko-KR" sz="2400" dirty="0"/>
           </a:p>
           <a:p>
             <a:pPr marL="457200" lvl="1" indent="0">
               <a:buNone/>
             </a:pPr>
             <a:r>
-              <a:rPr lang="ko-KR" altLang="en-US" dirty="0"/>
+              <a:rPr lang="ko-KR" altLang="en-US" sz="2000" dirty="0"/>
+              <a:t>일주일에 </a:t>
+            </a:r>
+            <a:r>
+              <a:rPr lang="ko-KR" altLang="en-US" sz="2000" b="1" dirty="0">
+                <a:solidFill>
+                  <a:srgbClr val="6EC173"/>
+                </a:solidFill>
+              </a:rPr>
+              <a:t>최소 </a:t>
+            </a:r>
+            <a:r>
+              <a:rPr lang="en-US" altLang="ko-KR" sz="2000" b="1" dirty="0">
+                <a:solidFill>
+                  <a:srgbClr val="6EC173"/>
+                </a:solidFill>
+              </a:rPr>
+              <a:t>2</a:t>
+            </a:r>
+            <a:r>
+              <a:rPr lang="ko-KR" altLang="en-US" sz="2000" b="1" dirty="0">
+                <a:solidFill>
+                  <a:srgbClr val="6EC173"/>
+                </a:solidFill>
+              </a:rPr>
+              <a:t>번</a:t>
+            </a:r>
+            <a:r>
+              <a:rPr lang="en-US" altLang="ko-KR" sz="2000" dirty="0"/>
+              <a:t>!</a:t>
+            </a:r>
+          </a:p>
+          <a:p>
+            <a:pPr marL="457200" lvl="1" indent="0">
+              <a:buNone/>
+            </a:pPr>
+            <a:r>
+              <a:rPr lang="en-US" altLang="ko-KR" sz="2000" dirty="0"/>
+              <a:t>1</a:t>
+            </a:r>
+            <a:r>
+              <a:rPr lang="ko-KR" altLang="en-US" sz="2000" dirty="0"/>
+              <a:t>개의 프로젝트당 </a:t>
+            </a:r>
+            <a:r>
+              <a:rPr lang="en-US" altLang="ko-KR" sz="2000" b="1" dirty="0">
+                <a:solidFill>
+                  <a:srgbClr val="6EC173"/>
+                </a:solidFill>
+              </a:rPr>
+              <a:t>1</a:t>
+            </a:r>
+            <a:r>
+              <a:rPr lang="ko-KR" altLang="en-US" sz="2000" b="1" dirty="0">
+                <a:solidFill>
+                  <a:srgbClr val="6EC173"/>
+                </a:solidFill>
+              </a:rPr>
+              <a:t>개의 회고록</a:t>
+            </a:r>
+            <a:r>
+              <a:rPr lang="en-US" altLang="ko-KR" sz="2000" dirty="0"/>
+              <a:t>!</a:t>
+            </a:r>
+          </a:p>
+          <a:p>
+            <a:pPr marL="457200" lvl="1" indent="0">
+              <a:buNone/>
+            </a:pPr>
+            <a:r>
+              <a:rPr lang="ko-KR" altLang="en-US" sz="2000" dirty="0"/>
               <a:t>매주 링크를 </a:t>
             </a:r>
             <a:r>
-              <a:rPr lang="en-US" altLang="ko-KR" b="1" dirty="0">
+              <a:rPr lang="en-US" altLang="ko-KR" sz="2000" b="1" dirty="0">
                 <a:solidFill>
                   <a:srgbClr val="6EC173"/>
                 </a:solidFill>
@@ -14778,7 +13618,7 @@
               <a:t>Slack #</a:t>
             </a:r>
             <a:r>
-              <a:rPr lang="ko-KR" altLang="en-US" b="1" dirty="0" err="1">
+              <a:rPr lang="ko-KR" altLang="en-US" sz="2000" b="1" dirty="0" err="1">
                 <a:solidFill>
                   <a:srgbClr val="6EC173"/>
                 </a:solidFill>
@@ -14786,7 +13626,7 @@
               <a:t>블로깅</a:t>
             </a:r>
             <a:r>
-              <a:rPr lang="ko-KR" altLang="en-US" b="1" dirty="0">
+              <a:rPr lang="ko-KR" altLang="en-US" sz="2000" b="1" dirty="0">
                 <a:solidFill>
                   <a:srgbClr val="6EC173"/>
                 </a:solidFill>
@@ -14794,18 +13634,10 @@
               <a:t> 채널</a:t>
             </a:r>
             <a:r>
-              <a:rPr lang="ko-KR" altLang="en-US" dirty="0"/>
-              <a:t>에 댓글로 올리고 </a:t>
-            </a:r>
-            <a:r>
-              <a:rPr lang="ko-KR" altLang="en-US" dirty="0" err="1"/>
-              <a:t>크루리더에게</a:t>
-            </a:r>
-            <a:r>
-              <a:rPr lang="ko-KR" altLang="en-US" dirty="0"/>
-              <a:t> 피드백 받기</a:t>
-            </a:r>
-            <a:endParaRPr lang="en-US" altLang="ko-KR" dirty="0"/>
+              <a:rPr lang="ko-KR" altLang="en-US" sz="2000" dirty="0"/>
+              <a:t>에 댓글로 올리고 크루 리더에게 피드백 받기</a:t>
+            </a:r>
+            <a:endParaRPr lang="en-US" altLang="ko-KR" sz="2000" dirty="0"/>
           </a:p>
         </p:txBody>
       </p:sp>
@@ -14861,7 +13693,7 @@
           <a:p>
             <a:fld id="{083A2CE0-18CD-4102-B738-4ACFF9E68BA4}" type="slidenum">
               <a:rPr lang="ko-KR" altLang="en-US" smtClean="0"/>
-              <a:t>35</a:t>
+              <a:t>32</a:t>
             </a:fld>
             <a:endParaRPr lang="ko-KR" altLang="en-US"/>
           </a:p>
@@ -14897,10 +13729,10 @@
       </p:sp>
       <p:pic>
         <p:nvPicPr>
-          <p:cNvPr id="7" name="그림 6">
-            <a:extLst>
-              <a:ext uri="{FF2B5EF4-FFF2-40B4-BE49-F238E27FC236}">
-                <a16:creationId xmlns:a16="http://schemas.microsoft.com/office/drawing/2014/main" id="{43B10B3D-D6A7-89DE-3D04-375C76542972}"/>
+          <p:cNvPr id="12" name="그림 11" descr="텍스트, 스크린샷, 폰트이(가) 표시된 사진&#10;&#10;자동 생성된 설명">
+            <a:extLst>
+              <a:ext uri="{FF2B5EF4-FFF2-40B4-BE49-F238E27FC236}">
+                <a16:creationId xmlns:a16="http://schemas.microsoft.com/office/drawing/2014/main" id="{4C914F33-A7EA-A7BC-22F9-4EFF0EBDDD55}"/>
               </a:ext>
             </a:extLst>
           </p:cNvPr>
@@ -14910,15 +13742,21 @@
           <p:nvPr/>
         </p:nvPicPr>
         <p:blipFill>
-          <a:blip r:embed="rId3"/>
+          <a:blip r:embed="rId3">
+            <a:extLst>
+              <a:ext uri="{28A0092B-C50C-407E-A947-70E740481C1C}">
+                <a14:useLocalDpi xmlns:a14="http://schemas.microsoft.com/office/drawing/2010/main" val="0"/>
+              </a:ext>
+            </a:extLst>
+          </a:blip>
           <a:stretch>
             <a:fillRect/>
           </a:stretch>
         </p:blipFill>
         <p:spPr>
           <a:xfrm>
-            <a:off x="8654757" y="3007293"/>
-            <a:ext cx="3447161" cy="2214030"/>
+            <a:off x="6803941" y="3429000"/>
+            <a:ext cx="4916866" cy="1397239"/>
           </a:xfrm>
           <a:prstGeom prst="rect">
             <a:avLst/>
@@ -14938,7 +13776,7 @@
 </p:sld>
 </file>
 
-<file path=ppt/slides/slide36.xml><?xml version="1.0" encoding="utf-8"?>
+<file path=ppt/slides/slide33.xml><?xml version="1.0" encoding="utf-8"?>
 <p:sld xmlns:a="http://schemas.openxmlformats.org/drawingml/2006/main" xmlns:r="http://schemas.openxmlformats.org/officeDocument/2006/relationships" xmlns:p="http://schemas.openxmlformats.org/presentationml/2006/main">
   <p:cSld>
     <p:spTree>
@@ -14957,10 +13795,10 @@
       </p:grpSpPr>
       <p:sp>
         <p:nvSpPr>
-          <p:cNvPr id="4" name="날짜 개체 틀 3">
-            <a:extLst>
-              <a:ext uri="{FF2B5EF4-FFF2-40B4-BE49-F238E27FC236}">
-                <a16:creationId xmlns:a16="http://schemas.microsoft.com/office/drawing/2014/main" id="{227C26C2-F30B-D886-0F39-161B6A3B62B3}"/>
+          <p:cNvPr id="2" name="날짜 개체 틀 1">
+            <a:extLst>
+              <a:ext uri="{FF2B5EF4-FFF2-40B4-BE49-F238E27FC236}">
+                <a16:creationId xmlns:a16="http://schemas.microsoft.com/office/drawing/2014/main" id="{F69E91DF-D512-819C-5446-3F1A6A1347CA}"/>
               </a:ext>
             </a:extLst>
           </p:cNvPr>
@@ -14976,7 +13814,7 @@
           <a:bodyPr/>
           <a:lstStyle/>
           <a:p>
-            <a:fld id="{6ABF8140-662B-4C70-8D54-95183800525F}" type="datetime6">
+            <a:fld id="{DC6A871B-4800-495F-AC75-93D44C7DEBA5}" type="datetime6">
               <a:rPr lang="ko-KR" altLang="en-US" smtClean="0"/>
               <a:t>2024년 5월</a:t>
             </a:fld>
@@ -14986,10 +13824,10 @@
       </p:sp>
       <p:sp>
         <p:nvSpPr>
-          <p:cNvPr id="2" name="슬라이드 번호 개체 틀 1">
-            <a:extLst>
-              <a:ext uri="{FF2B5EF4-FFF2-40B4-BE49-F238E27FC236}">
-                <a16:creationId xmlns:a16="http://schemas.microsoft.com/office/drawing/2014/main" id="{5E76AA2F-B8E7-A2EF-0578-8EF88B065320}"/>
+          <p:cNvPr id="3" name="슬라이드 번호 개체 틀 2">
+            <a:extLst>
+              <a:ext uri="{FF2B5EF4-FFF2-40B4-BE49-F238E27FC236}">
+                <a16:creationId xmlns:a16="http://schemas.microsoft.com/office/drawing/2014/main" id="{112DA4CF-5E21-549B-FEA6-AF5F91B20EBE}"/>
               </a:ext>
             </a:extLst>
           </p:cNvPr>
@@ -15007,7 +13845,7 @@
           <a:p>
             <a:fld id="{083A2CE0-18CD-4102-B738-4ACFF9E68BA4}" type="slidenum">
               <a:rPr lang="ko-KR" altLang="en-US" smtClean="0"/>
-              <a:t>36</a:t>
+              <a:t>33</a:t>
             </a:fld>
             <a:endParaRPr lang="ko-KR" altLang="en-US"/>
           </a:p>
@@ -15015,10 +13853,10 @@
       </p:sp>
       <p:pic>
         <p:nvPicPr>
-          <p:cNvPr id="7" name="그림 6">
-            <a:extLst>
-              <a:ext uri="{FF2B5EF4-FFF2-40B4-BE49-F238E27FC236}">
-                <a16:creationId xmlns:a16="http://schemas.microsoft.com/office/drawing/2014/main" id="{9252EA24-2D13-56F8-F480-D4CE1C25B77F}"/>
+          <p:cNvPr id="4" name="그림 3">
+            <a:extLst>
+              <a:ext uri="{FF2B5EF4-FFF2-40B4-BE49-F238E27FC236}">
+                <a16:creationId xmlns:a16="http://schemas.microsoft.com/office/drawing/2014/main" id="{817D207A-32E2-37E2-5A5A-16ED5EB740C5}"/>
               </a:ext>
             </a:extLst>
           </p:cNvPr>
@@ -15028,7 +13866,7 @@
           <p:nvPr/>
         </p:nvPicPr>
         <p:blipFill>
-          <a:blip r:embed="rId3"/>
+          <a:blip r:embed="rId2"/>
           <a:stretch>
             <a:fillRect/>
           </a:stretch>
@@ -15046,7 +13884,7 @@
     </p:spTree>
     <p:extLst>
       <p:ext uri="{BB962C8B-B14F-4D97-AF65-F5344CB8AC3E}">
-        <p14:creationId xmlns:p14="http://schemas.microsoft.com/office/powerpoint/2010/main" val="4265744154"/>
+        <p14:creationId xmlns:p14="http://schemas.microsoft.com/office/powerpoint/2010/main" val="715755205"/>
       </p:ext>
     </p:extLst>
   </p:cSld>
@@ -15356,10 +14194,38 @@
       </p:grpSpPr>
       <p:sp>
         <p:nvSpPr>
-          <p:cNvPr id="6" name="내용 개체 틀 2">
-            <a:extLst>
-              <a:ext uri="{FF2B5EF4-FFF2-40B4-BE49-F238E27FC236}">
-                <a16:creationId xmlns:a16="http://schemas.microsoft.com/office/drawing/2014/main" id="{44C950B9-4BBE-BD19-B2FD-9EDB95106204}"/>
+          <p:cNvPr id="2" name="제목 1">
+            <a:extLst>
+              <a:ext uri="{FF2B5EF4-FFF2-40B4-BE49-F238E27FC236}">
+                <a16:creationId xmlns:a16="http://schemas.microsoft.com/office/drawing/2014/main" id="{8EFEEF68-3BF6-EF45-0154-00BB91AFDEAE}"/>
+              </a:ext>
+            </a:extLst>
+          </p:cNvPr>
+          <p:cNvSpPr>
+            <a:spLocks noGrp="1"/>
+          </p:cNvSpPr>
+          <p:nvPr>
+            <p:ph type="title"/>
+          </p:nvPr>
+        </p:nvSpPr>
+        <p:spPr/>
+        <p:txBody>
+          <a:bodyPr/>
+          <a:lstStyle/>
+          <a:p>
+            <a:r>
+              <a:rPr lang="ko-KR" altLang="en-US" dirty="0"/>
+              <a:t>커리큘럼</a:t>
+            </a:r>
+          </a:p>
+        </p:txBody>
+      </p:sp>
+      <p:sp>
+        <p:nvSpPr>
+          <p:cNvPr id="13" name="내용 개체 틀 2">
+            <a:extLst>
+              <a:ext uri="{FF2B5EF4-FFF2-40B4-BE49-F238E27FC236}">
+                <a16:creationId xmlns:a16="http://schemas.microsoft.com/office/drawing/2014/main" id="{65050DE8-20B8-115C-553F-0315E19D8DB9}"/>
               </a:ext>
             </a:extLst>
           </p:cNvPr>
@@ -15372,8 +14238,8 @@
         </p:nvSpPr>
         <p:spPr>
           <a:xfrm>
-            <a:off x="4477406" y="1042704"/>
-            <a:ext cx="7542529" cy="2512420"/>
+            <a:off x="304800" y="1331743"/>
+            <a:ext cx="10515600" cy="798626"/>
           </a:xfrm>
         </p:spPr>
         <p:txBody>
@@ -15384,61 +14250,168 @@
           <a:p>
             <a:pPr marL="0" indent="0">
               <a:lnSpc>
-                <a:spcPct val="150000"/>
+                <a:spcPct val="100000"/>
               </a:lnSpc>
               <a:buNone/>
             </a:pPr>
             <a:r>
-              <a:rPr lang="en-US" altLang="ko-KR" sz="3500" b="1" dirty="0">
-                <a:solidFill>
-                  <a:srgbClr val="6EC173"/>
-                </a:solidFill>
+              <a:rPr lang="en-US" altLang="ko-KR" sz="1400" b="0" i="0" dirty="0">
+                <a:solidFill>
+                  <a:srgbClr val="5FC32A"/>
+                </a:solidFill>
+                <a:effectLst/>
+                <a:highlight>
+                  <a:srgbClr val="FFFFFF"/>
+                </a:highlight>
+                <a:latin typeface="Pretendard" panose="02000503000000020004" pitchFamily="50" charset="-127"/>
+                <a:ea typeface="Pretendard" panose="02000503000000020004" pitchFamily="50" charset="-127"/>
               </a:rPr>
-              <a:t>1. </a:t>
-            </a:r>
-            <a:r>
-              <a:rPr lang="ko-KR" altLang="en-US" sz="3500" b="1" dirty="0" err="1">
-                <a:solidFill>
-                  <a:srgbClr val="6EC173"/>
-                </a:solidFill>
+              <a:t>※ </a:t>
+            </a:r>
+            <a:r>
+              <a:rPr lang="ko-KR" altLang="en-US" sz="1400" b="0" i="0" dirty="0">
+                <a:solidFill>
+                  <a:srgbClr val="5FC32A"/>
+                </a:solidFill>
+                <a:effectLst/>
+                <a:highlight>
+                  <a:srgbClr val="FFFFFF"/>
+                </a:highlight>
+                <a:latin typeface="Pretendard" panose="02000503000000020004" pitchFamily="50" charset="-127"/>
+                <a:ea typeface="Pretendard" panose="02000503000000020004" pitchFamily="50" charset="-127"/>
               </a:rPr>
-              <a:t>버퍼링</a:t>
-            </a:r>
-            <a:r>
-              <a:rPr lang="ko-KR" altLang="en-US" sz="3500" b="1" dirty="0">
-                <a:solidFill>
-                  <a:srgbClr val="6EC173"/>
-                </a:solidFill>
+              <a:t>커리큘럼 및 수업 진도는 크루들의 요청 또는 기타 사유로 인하여 속도 조절 및 내용이 변경 될 수 있습니다</a:t>
+            </a:r>
+            <a:r>
+              <a:rPr lang="en-US" altLang="ko-KR" sz="1400" b="0" i="0" dirty="0">
+                <a:solidFill>
+                  <a:srgbClr val="5FC32A"/>
+                </a:solidFill>
+                <a:effectLst/>
+                <a:highlight>
+                  <a:srgbClr val="FFFFFF"/>
+                </a:highlight>
+                <a:latin typeface="Pretendard" panose="02000503000000020004" pitchFamily="50" charset="-127"/>
+                <a:ea typeface="Pretendard" panose="02000503000000020004" pitchFamily="50" charset="-127"/>
               </a:rPr>
-              <a:t> 수업</a:t>
-            </a:r>
-            <a:endParaRPr lang="en-US" altLang="ko-KR" sz="3500" b="1" dirty="0">
-              <a:solidFill>
-                <a:srgbClr val="6EC173"/>
-              </a:solidFill>
-            </a:endParaRPr>
-          </a:p>
-          <a:p>
-            <a:pPr marL="0" indent="0">
-              <a:lnSpc>
-                <a:spcPct val="150000"/>
-              </a:lnSpc>
-              <a:buNone/>
-            </a:pPr>
-            <a:r>
-              <a:rPr lang="ko-KR" altLang="en-US" dirty="0"/>
-              <a:t>사전 지식을 서로 평탄하게 맞추기 위한 수업</a:t>
-            </a:r>
-            <a:endParaRPr lang="en-US" altLang="ko-KR" dirty="0"/>
-          </a:p>
-          <a:p>
-            <a:pPr marL="0" indent="0">
-              <a:lnSpc>
-                <a:spcPct val="150000"/>
-              </a:lnSpc>
-              <a:buNone/>
-            </a:pPr>
-            <a:endParaRPr lang="ko-KR" altLang="en-US" dirty="0"/>
+              <a:t>.</a:t>
+            </a:r>
+            <a:br>
+              <a:rPr lang="ko-KR" altLang="en-US" sz="1400" dirty="0"/>
+            </a:br>
+            <a:r>
+              <a:rPr lang="en-US" altLang="ko-KR" sz="1400" b="0" i="0" dirty="0">
+                <a:solidFill>
+                  <a:srgbClr val="5FC32A"/>
+                </a:solidFill>
+                <a:effectLst/>
+                <a:highlight>
+                  <a:srgbClr val="FFFFFF"/>
+                </a:highlight>
+                <a:latin typeface="Pretendard" panose="02000503000000020004" pitchFamily="50" charset="-127"/>
+                <a:ea typeface="Pretendard" panose="02000503000000020004" pitchFamily="50" charset="-127"/>
+              </a:rPr>
+              <a:t>※ </a:t>
+            </a:r>
+            <a:r>
+              <a:rPr lang="ko-KR" altLang="en-US" sz="1400" b="0" i="0" dirty="0" err="1">
+                <a:solidFill>
+                  <a:srgbClr val="5FC32A"/>
+                </a:solidFill>
+                <a:effectLst/>
+                <a:highlight>
+                  <a:srgbClr val="FFFFFF"/>
+                </a:highlight>
+                <a:latin typeface="Pretendard" panose="02000503000000020004" pitchFamily="50" charset="-127"/>
+                <a:ea typeface="Pretendard" panose="02000503000000020004" pitchFamily="50" charset="-127"/>
+              </a:rPr>
+              <a:t>프론트엔드를</a:t>
+            </a:r>
+            <a:r>
+              <a:rPr lang="ko-KR" altLang="en-US" sz="1400" b="0" i="0" dirty="0">
+                <a:solidFill>
+                  <a:srgbClr val="5FC32A"/>
+                </a:solidFill>
+                <a:effectLst/>
+                <a:highlight>
+                  <a:srgbClr val="FFFFFF"/>
+                </a:highlight>
+                <a:latin typeface="Pretendard" panose="02000503000000020004" pitchFamily="50" charset="-127"/>
+                <a:ea typeface="Pretendard" panose="02000503000000020004" pitchFamily="50" charset="-127"/>
+              </a:rPr>
+              <a:t> 목표로 하는 크루는 </a:t>
+            </a:r>
+            <a:r>
+              <a:rPr lang="ko-KR" altLang="en-US" sz="1400" b="0" i="0" dirty="0" err="1">
+                <a:solidFill>
+                  <a:srgbClr val="5FC32A"/>
+                </a:solidFill>
+                <a:effectLst/>
+                <a:highlight>
+                  <a:srgbClr val="FFFFFF"/>
+                </a:highlight>
+                <a:latin typeface="Pretendard" panose="02000503000000020004" pitchFamily="50" charset="-127"/>
+                <a:ea typeface="Pretendard" panose="02000503000000020004" pitchFamily="50" charset="-127"/>
+              </a:rPr>
+              <a:t>프론트엔드</a:t>
+            </a:r>
+            <a:r>
+              <a:rPr lang="ko-KR" altLang="en-US" sz="1400" b="0" i="0" dirty="0">
+                <a:solidFill>
+                  <a:srgbClr val="5FC32A"/>
+                </a:solidFill>
+                <a:effectLst/>
+                <a:highlight>
+                  <a:srgbClr val="FFFFFF"/>
+                </a:highlight>
+                <a:latin typeface="Pretendard" panose="02000503000000020004" pitchFamily="50" charset="-127"/>
+                <a:ea typeface="Pretendard" panose="02000503000000020004" pitchFamily="50" charset="-127"/>
+              </a:rPr>
+              <a:t> 과정 종료 후 조기 취업 연계</a:t>
+            </a:r>
+            <a:r>
+              <a:rPr lang="en-US" altLang="ko-KR" sz="1400" b="0" i="0" dirty="0">
+                <a:solidFill>
+                  <a:srgbClr val="5FC32A"/>
+                </a:solidFill>
+                <a:effectLst/>
+                <a:highlight>
+                  <a:srgbClr val="FFFFFF"/>
+                </a:highlight>
+                <a:latin typeface="Pretendard" panose="02000503000000020004" pitchFamily="50" charset="-127"/>
+                <a:ea typeface="Pretendard" panose="02000503000000020004" pitchFamily="50" charset="-127"/>
+              </a:rPr>
+              <a:t>/1:1 </a:t>
+            </a:r>
+            <a:r>
+              <a:rPr lang="ko-KR" altLang="en-US" sz="1400" b="0" i="0" dirty="0">
+                <a:solidFill>
+                  <a:srgbClr val="5FC32A"/>
+                </a:solidFill>
+                <a:effectLst/>
+                <a:highlight>
+                  <a:srgbClr val="FFFFFF"/>
+                </a:highlight>
+                <a:latin typeface="Pretendard" panose="02000503000000020004" pitchFamily="50" charset="-127"/>
+                <a:ea typeface="Pretendard" panose="02000503000000020004" pitchFamily="50" charset="-127"/>
+              </a:rPr>
+              <a:t>맞춤 취업 컨설팅을 받으실 수 있습니다</a:t>
+            </a:r>
+            <a:r>
+              <a:rPr lang="en-US" altLang="ko-KR" sz="1400" b="0" i="0" dirty="0">
+                <a:solidFill>
+                  <a:srgbClr val="5FC32A"/>
+                </a:solidFill>
+                <a:effectLst/>
+                <a:highlight>
+                  <a:srgbClr val="FFFFFF"/>
+                </a:highlight>
+                <a:latin typeface="Pretendard" panose="02000503000000020004" pitchFamily="50" charset="-127"/>
+                <a:ea typeface="Pretendard" panose="02000503000000020004" pitchFamily="50" charset="-127"/>
+              </a:rPr>
+              <a:t>.</a:t>
+            </a:r>
+            <a:endParaRPr lang="ko-KR" altLang="en-US" sz="2000" dirty="0"/>
           </a:p>
         </p:txBody>
       </p:sp>
@@ -15447,7 +14420,7 @@
           <p:cNvPr id="4" name="날짜 개체 틀 3">
             <a:extLst>
               <a:ext uri="{FF2B5EF4-FFF2-40B4-BE49-F238E27FC236}">
-                <a16:creationId xmlns:a16="http://schemas.microsoft.com/office/drawing/2014/main" id="{26479163-CD24-16A0-6953-E1368AD2858B}"/>
+                <a16:creationId xmlns:a16="http://schemas.microsoft.com/office/drawing/2014/main" id="{1274CAE6-9D4F-D463-C895-6AA134533C1C}"/>
               </a:ext>
             </a:extLst>
           </p:cNvPr>
@@ -15476,7 +14449,7 @@
           <p:cNvPr id="5" name="슬라이드 번호 개체 틀 4">
             <a:extLst>
               <a:ext uri="{FF2B5EF4-FFF2-40B4-BE49-F238E27FC236}">
-                <a16:creationId xmlns:a16="http://schemas.microsoft.com/office/drawing/2014/main" id="{74A69541-BCCC-043B-4836-056FF9FDB439}"/>
+                <a16:creationId xmlns:a16="http://schemas.microsoft.com/office/drawing/2014/main" id="{3340B0DF-C886-35CB-84E8-3A37F925C92F}"/>
               </a:ext>
             </a:extLst>
           </p:cNvPr>
@@ -15496,342 +14469,44 @@
               <a:rPr lang="ko-KR" altLang="en-US" smtClean="0"/>
               <a:t>5</a:t>
             </a:fld>
-            <a:endParaRPr lang="ko-KR" altLang="en-US" dirty="0"/>
+            <a:endParaRPr lang="ko-KR" altLang="en-US"/>
           </a:p>
         </p:txBody>
       </p:sp>
       <p:pic>
         <p:nvPicPr>
-          <p:cNvPr id="2050" name="Picture 2" descr="아프리카TV OGQ 마켓">
-            <a:extLst>
-              <a:ext uri="{FF2B5EF4-FFF2-40B4-BE49-F238E27FC236}">
-                <a16:creationId xmlns:a16="http://schemas.microsoft.com/office/drawing/2014/main" id="{AA441FC9-2EBF-3EC0-A887-5FBA50E379B1}"/>
+          <p:cNvPr id="9" name="그림 8">
+            <a:extLst>
+              <a:ext uri="{FF2B5EF4-FFF2-40B4-BE49-F238E27FC236}">
+                <a16:creationId xmlns:a16="http://schemas.microsoft.com/office/drawing/2014/main" id="{E1E332B1-2398-F5BB-20D3-344BABEAB1F6}"/>
               </a:ext>
             </a:extLst>
           </p:cNvPr>
           <p:cNvPicPr>
-            <a:picLocks noChangeAspect="1" noChangeArrowheads="1"/>
+            <a:picLocks noChangeAspect="1"/>
           </p:cNvPicPr>
           <p:nvPr/>
         </p:nvPicPr>
         <p:blipFill>
-          <a:blip r:embed="rId3">
-            <a:extLst>
-              <a:ext uri="{28A0092B-C50C-407E-A947-70E740481C1C}">
-                <a14:useLocalDpi xmlns:a14="http://schemas.microsoft.com/office/drawing/2010/main" val="0"/>
-              </a:ext>
-            </a:extLst>
-          </a:blip>
-          <a:srcRect/>
+          <a:blip r:embed="rId3"/>
           <a:stretch>
             <a:fillRect/>
           </a:stretch>
         </p:blipFill>
-        <p:spPr bwMode="auto">
-          <a:xfrm>
-            <a:off x="1169276" y="664670"/>
-            <a:ext cx="2191407" cy="2191407"/>
-          </a:xfrm>
-          <a:prstGeom prst="rect">
-            <a:avLst/>
-          </a:prstGeom>
-          <a:noFill/>
-          <a:extLst>
-            <a:ext uri="{909E8E84-426E-40DD-AFC4-6F175D3DCCD1}">
-              <a14:hiddenFill xmlns:a14="http://schemas.microsoft.com/office/drawing/2010/main">
-                <a:solidFill>
-                  <a:srgbClr val="FFFFFF"/>
-                </a:solidFill>
-              </a14:hiddenFill>
-            </a:ext>
-          </a:extLst>
-        </p:spPr>
-      </p:pic>
-      <p:pic>
-        <p:nvPicPr>
-          <p:cNvPr id="2052" name="Picture 4" descr="초소형 테트리스 만들기">
-            <a:extLst>
-              <a:ext uri="{FF2B5EF4-FFF2-40B4-BE49-F238E27FC236}">
-                <a16:creationId xmlns:a16="http://schemas.microsoft.com/office/drawing/2014/main" id="{412EDF1A-10BF-18C4-6161-398F2C979E62}"/>
-              </a:ext>
-            </a:extLst>
-          </p:cNvPr>
-          <p:cNvPicPr>
-            <a:picLocks noChangeAspect="1" noChangeArrowheads="1"/>
-          </p:cNvPicPr>
-          <p:nvPr/>
-        </p:nvPicPr>
-        <p:blipFill rotWithShape="1">
-          <a:blip r:embed="rId4">
-            <a:extLst>
-              <a:ext uri="{28A0092B-C50C-407E-A947-70E740481C1C}">
-                <a14:useLocalDpi xmlns:a14="http://schemas.microsoft.com/office/drawing/2010/main" val="0"/>
-              </a:ext>
-            </a:extLst>
-          </a:blip>
-          <a:srcRect l="33420" t="57395" r="33723"/>
-          <a:stretch/>
-        </p:blipFill>
-        <p:spPr bwMode="auto">
-          <a:xfrm>
-            <a:off x="996794" y="3809201"/>
-            <a:ext cx="2743200" cy="2000850"/>
-          </a:xfrm>
-          <a:prstGeom prst="rect">
-            <a:avLst/>
-          </a:prstGeom>
-          <a:noFill/>
-          <a:extLst>
-            <a:ext uri="{909E8E84-426E-40DD-AFC4-6F175D3DCCD1}">
-              <a14:hiddenFill xmlns:a14="http://schemas.microsoft.com/office/drawing/2010/main">
-                <a:solidFill>
-                  <a:srgbClr val="FFFFFF"/>
-                </a:solidFill>
-              </a14:hiddenFill>
-            </a:ext>
-          </a:extLst>
-        </p:spPr>
-      </p:pic>
-      <p:sp>
-        <p:nvSpPr>
-          <p:cNvPr id="9" name="내용 개체 틀 2">
-            <a:extLst>
-              <a:ext uri="{FF2B5EF4-FFF2-40B4-BE49-F238E27FC236}">
-                <a16:creationId xmlns:a16="http://schemas.microsoft.com/office/drawing/2014/main" id="{096A8525-E745-5CD7-290E-8B5ACC1A207C}"/>
-              </a:ext>
-            </a:extLst>
-          </p:cNvPr>
-          <p:cNvSpPr txBox="1">
-            <a:spLocks/>
-          </p:cNvSpPr>
-          <p:nvPr/>
-        </p:nvSpPr>
         <p:spPr>
           <a:xfrm>
-            <a:off x="4477405" y="3555124"/>
-            <a:ext cx="7542529" cy="2512420"/>
+            <a:off x="934788" y="2018857"/>
+            <a:ext cx="10322423" cy="3784188"/>
           </a:xfrm>
           <a:prstGeom prst="rect">
             <a:avLst/>
           </a:prstGeom>
         </p:spPr>
-        <p:txBody>
-          <a:bodyPr vert="horz" lIns="91440" tIns="45720" rIns="91440" bIns="45720" rtlCol="0">
-            <a:normAutofit/>
-          </a:bodyPr>
-          <a:lstStyle>
-            <a:lvl1pPr marL="228600" indent="-228600" algn="l" defTabSz="914400" rtl="0" eaLnBrk="1" latinLnBrk="1" hangingPunct="1">
-              <a:lnSpc>
-                <a:spcPct val="90000"/>
-              </a:lnSpc>
-              <a:spcBef>
-                <a:spcPts val="1000"/>
-              </a:spcBef>
-              <a:buFont typeface="Arial" panose="020B0604020202020204" pitchFamily="34" charset="0"/>
-              <a:buChar char="•"/>
-              <a:defRPr sz="2800" kern="1200">
-                <a:solidFill>
-                  <a:schemeClr val="tx1"/>
-                </a:solidFill>
-                <a:latin typeface="+mn-lt"/>
-                <a:ea typeface="+mn-ea"/>
-                <a:cs typeface="+mn-cs"/>
-              </a:defRPr>
-            </a:lvl1pPr>
-            <a:lvl2pPr marL="685800" indent="-228600" algn="l" defTabSz="914400" rtl="0" eaLnBrk="1" latinLnBrk="1" hangingPunct="1">
-              <a:lnSpc>
-                <a:spcPct val="90000"/>
-              </a:lnSpc>
-              <a:spcBef>
-                <a:spcPts val="500"/>
-              </a:spcBef>
-              <a:buFont typeface="Arial" panose="020B0604020202020204" pitchFamily="34" charset="0"/>
-              <a:buChar char="•"/>
-              <a:defRPr sz="2400" kern="1200">
-                <a:solidFill>
-                  <a:schemeClr val="tx1"/>
-                </a:solidFill>
-                <a:latin typeface="+mn-lt"/>
-                <a:ea typeface="+mn-ea"/>
-                <a:cs typeface="+mn-cs"/>
-              </a:defRPr>
-            </a:lvl2pPr>
-            <a:lvl3pPr marL="1143000" indent="-228600" algn="l" defTabSz="914400" rtl="0" eaLnBrk="1" latinLnBrk="1" hangingPunct="1">
-              <a:lnSpc>
-                <a:spcPct val="90000"/>
-              </a:lnSpc>
-              <a:spcBef>
-                <a:spcPts val="500"/>
-              </a:spcBef>
-              <a:buFont typeface="Arial" panose="020B0604020202020204" pitchFamily="34" charset="0"/>
-              <a:buChar char="•"/>
-              <a:defRPr sz="2000" kern="1200">
-                <a:solidFill>
-                  <a:schemeClr val="tx1"/>
-                </a:solidFill>
-                <a:latin typeface="+mn-lt"/>
-                <a:ea typeface="+mn-ea"/>
-                <a:cs typeface="+mn-cs"/>
-              </a:defRPr>
-            </a:lvl3pPr>
-            <a:lvl4pPr marL="1600200" indent="-228600" algn="l" defTabSz="914400" rtl="0" eaLnBrk="1" latinLnBrk="1" hangingPunct="1">
-              <a:lnSpc>
-                <a:spcPct val="90000"/>
-              </a:lnSpc>
-              <a:spcBef>
-                <a:spcPts val="500"/>
-              </a:spcBef>
-              <a:buFont typeface="Arial" panose="020B0604020202020204" pitchFamily="34" charset="0"/>
-              <a:buChar char="•"/>
-              <a:defRPr sz="1800" kern="1200">
-                <a:solidFill>
-                  <a:schemeClr val="tx1"/>
-                </a:solidFill>
-                <a:latin typeface="+mn-lt"/>
-                <a:ea typeface="+mn-ea"/>
-                <a:cs typeface="+mn-cs"/>
-              </a:defRPr>
-            </a:lvl4pPr>
-            <a:lvl5pPr marL="2057400" indent="-228600" algn="l" defTabSz="914400" rtl="0" eaLnBrk="1" latinLnBrk="1" hangingPunct="1">
-              <a:lnSpc>
-                <a:spcPct val="90000"/>
-              </a:lnSpc>
-              <a:spcBef>
-                <a:spcPts val="500"/>
-              </a:spcBef>
-              <a:buFont typeface="Arial" panose="020B0604020202020204" pitchFamily="34" charset="0"/>
-              <a:buChar char="•"/>
-              <a:defRPr sz="1800" kern="1200">
-                <a:solidFill>
-                  <a:schemeClr val="tx1"/>
-                </a:solidFill>
-                <a:latin typeface="+mn-lt"/>
-                <a:ea typeface="+mn-ea"/>
-                <a:cs typeface="+mn-cs"/>
-              </a:defRPr>
-            </a:lvl5pPr>
-            <a:lvl6pPr marL="2514600" indent="-228600" algn="l" defTabSz="914400" rtl="0" eaLnBrk="1" latinLnBrk="1" hangingPunct="1">
-              <a:lnSpc>
-                <a:spcPct val="90000"/>
-              </a:lnSpc>
-              <a:spcBef>
-                <a:spcPts val="500"/>
-              </a:spcBef>
-              <a:buFont typeface="Arial" panose="020B0604020202020204" pitchFamily="34" charset="0"/>
-              <a:buChar char="•"/>
-              <a:defRPr sz="1800" kern="1200">
-                <a:solidFill>
-                  <a:schemeClr val="tx1"/>
-                </a:solidFill>
-                <a:latin typeface="+mn-lt"/>
-                <a:ea typeface="+mn-ea"/>
-                <a:cs typeface="+mn-cs"/>
-              </a:defRPr>
-            </a:lvl6pPr>
-            <a:lvl7pPr marL="2971800" indent="-228600" algn="l" defTabSz="914400" rtl="0" eaLnBrk="1" latinLnBrk="1" hangingPunct="1">
-              <a:lnSpc>
-                <a:spcPct val="90000"/>
-              </a:lnSpc>
-              <a:spcBef>
-                <a:spcPts val="500"/>
-              </a:spcBef>
-              <a:buFont typeface="Arial" panose="020B0604020202020204" pitchFamily="34" charset="0"/>
-              <a:buChar char="•"/>
-              <a:defRPr sz="1800" kern="1200">
-                <a:solidFill>
-                  <a:schemeClr val="tx1"/>
-                </a:solidFill>
-                <a:latin typeface="+mn-lt"/>
-                <a:ea typeface="+mn-ea"/>
-                <a:cs typeface="+mn-cs"/>
-              </a:defRPr>
-            </a:lvl7pPr>
-            <a:lvl8pPr marL="3429000" indent="-228600" algn="l" defTabSz="914400" rtl="0" eaLnBrk="1" latinLnBrk="1" hangingPunct="1">
-              <a:lnSpc>
-                <a:spcPct val="90000"/>
-              </a:lnSpc>
-              <a:spcBef>
-                <a:spcPts val="500"/>
-              </a:spcBef>
-              <a:buFont typeface="Arial" panose="020B0604020202020204" pitchFamily="34" charset="0"/>
-              <a:buChar char="•"/>
-              <a:defRPr sz="1800" kern="1200">
-                <a:solidFill>
-                  <a:schemeClr val="tx1"/>
-                </a:solidFill>
-                <a:latin typeface="+mn-lt"/>
-                <a:ea typeface="+mn-ea"/>
-                <a:cs typeface="+mn-cs"/>
-              </a:defRPr>
-            </a:lvl8pPr>
-            <a:lvl9pPr marL="3886200" indent="-228600" algn="l" defTabSz="914400" rtl="0" eaLnBrk="1" latinLnBrk="1" hangingPunct="1">
-              <a:lnSpc>
-                <a:spcPct val="90000"/>
-              </a:lnSpc>
-              <a:spcBef>
-                <a:spcPts val="500"/>
-              </a:spcBef>
-              <a:buFont typeface="Arial" panose="020B0604020202020204" pitchFamily="34" charset="0"/>
-              <a:buChar char="•"/>
-              <a:defRPr sz="1800" kern="1200">
-                <a:solidFill>
-                  <a:schemeClr val="tx1"/>
-                </a:solidFill>
-                <a:latin typeface="+mn-lt"/>
-                <a:ea typeface="+mn-ea"/>
-                <a:cs typeface="+mn-cs"/>
-              </a:defRPr>
-            </a:lvl9pPr>
-          </a:lstStyle>
-          <a:p>
-            <a:pPr marL="0" indent="0">
-              <a:lnSpc>
-                <a:spcPct val="150000"/>
-              </a:lnSpc>
-              <a:buFont typeface="Arial" panose="020B0604020202020204" pitchFamily="34" charset="0"/>
-              <a:buNone/>
-            </a:pPr>
-            <a:r>
-              <a:rPr lang="en-US" altLang="ko-KR" sz="3500" b="1" dirty="0">
-                <a:solidFill>
-                  <a:srgbClr val="6EC173"/>
-                </a:solidFill>
-              </a:rPr>
-              <a:t>2. </a:t>
-            </a:r>
-            <a:r>
-              <a:rPr lang="ko-KR" altLang="en-US" sz="3500" b="1" dirty="0">
-                <a:solidFill>
-                  <a:srgbClr val="6EC173"/>
-                </a:solidFill>
-              </a:rPr>
-              <a:t>맞춤 수업</a:t>
-            </a:r>
-            <a:endParaRPr lang="en-US" altLang="ko-KR" sz="3500" b="1" dirty="0">
-              <a:solidFill>
-                <a:srgbClr val="6EC173"/>
-              </a:solidFill>
-            </a:endParaRPr>
-          </a:p>
-          <a:p>
-            <a:pPr marL="0" indent="0">
-              <a:lnSpc>
-                <a:spcPct val="150000"/>
-              </a:lnSpc>
-              <a:buFont typeface="Arial" panose="020B0604020202020204" pitchFamily="34" charset="0"/>
-              <a:buNone/>
-            </a:pPr>
-            <a:r>
-              <a:rPr lang="ko-KR" altLang="en-US" dirty="0"/>
-              <a:t>교육생 의견을 반영한 맞춤 수업 진행</a:t>
-            </a:r>
-          </a:p>
-        </p:txBody>
-      </p:sp>
+      </p:pic>
     </p:spTree>
     <p:extLst>
       <p:ext uri="{BB962C8B-B14F-4D97-AF65-F5344CB8AC3E}">
-        <p14:creationId xmlns:p14="http://schemas.microsoft.com/office/powerpoint/2010/main" val="203423183"/>
+        <p14:creationId xmlns:p14="http://schemas.microsoft.com/office/powerpoint/2010/main" val="3735047107"/>
       </p:ext>
     </p:extLst>
   </p:cSld>
@@ -15860,10 +14535,98 @@
       </p:grpSpPr>
       <p:sp>
         <p:nvSpPr>
+          <p:cNvPr id="6" name="내용 개체 틀 2">
+            <a:extLst>
+              <a:ext uri="{FF2B5EF4-FFF2-40B4-BE49-F238E27FC236}">
+                <a16:creationId xmlns:a16="http://schemas.microsoft.com/office/drawing/2014/main" id="{44C950B9-4BBE-BD19-B2FD-9EDB95106204}"/>
+              </a:ext>
+            </a:extLst>
+          </p:cNvPr>
+          <p:cNvSpPr>
+            <a:spLocks noGrp="1"/>
+          </p:cNvSpPr>
+          <p:nvPr>
+            <p:ph idx="1"/>
+          </p:nvPr>
+        </p:nvSpPr>
+        <p:spPr>
+          <a:xfrm>
+            <a:off x="4477406" y="1042704"/>
+            <a:ext cx="7542529" cy="2512420"/>
+          </a:xfrm>
+        </p:spPr>
+        <p:txBody>
+          <a:bodyPr>
+            <a:normAutofit/>
+          </a:bodyPr>
+          <a:lstStyle/>
+          <a:p>
+            <a:pPr marL="0" indent="0">
+              <a:lnSpc>
+                <a:spcPct val="150000"/>
+              </a:lnSpc>
+              <a:buNone/>
+            </a:pPr>
+            <a:r>
+              <a:rPr lang="en-US" altLang="ko-KR" sz="3500" b="1" dirty="0">
+                <a:solidFill>
+                  <a:srgbClr val="6EC173"/>
+                </a:solidFill>
+              </a:rPr>
+              <a:t>1. </a:t>
+            </a:r>
+            <a:r>
+              <a:rPr lang="ko-KR" altLang="en-US" sz="3500" b="1" dirty="0" err="1">
+                <a:solidFill>
+                  <a:srgbClr val="6EC173"/>
+                </a:solidFill>
+              </a:rPr>
+              <a:t>버퍼링</a:t>
+            </a:r>
+            <a:r>
+              <a:rPr lang="ko-KR" altLang="en-US" sz="3500" b="1" dirty="0">
+                <a:solidFill>
+                  <a:srgbClr val="6EC173"/>
+                </a:solidFill>
+              </a:rPr>
+              <a:t> 수업</a:t>
+            </a:r>
+            <a:endParaRPr lang="en-US" altLang="ko-KR" sz="3500" b="1" dirty="0">
+              <a:solidFill>
+                <a:srgbClr val="6EC173"/>
+              </a:solidFill>
+            </a:endParaRPr>
+          </a:p>
+          <a:p>
+            <a:pPr marL="0" indent="0">
+              <a:lnSpc>
+                <a:spcPct val="150000"/>
+              </a:lnSpc>
+              <a:buNone/>
+            </a:pPr>
+            <a:r>
+              <a:rPr lang="ko-KR" altLang="en-US" dirty="0"/>
+              <a:t>사전 지식을 서로 평탄하게 맞추기 위한 수업</a:t>
+            </a:r>
+            <a:endParaRPr lang="en-US" altLang="ko-KR" dirty="0"/>
+          </a:p>
+          <a:p>
+            <a:pPr marL="0" indent="0">
+              <a:lnSpc>
+                <a:spcPct val="150000"/>
+              </a:lnSpc>
+              <a:buNone/>
+            </a:pPr>
+            <a:endParaRPr lang="ko-KR" altLang="en-US" dirty="0"/>
+          </a:p>
+        </p:txBody>
+      </p:sp>
+      <p:sp>
+        <p:nvSpPr>
           <p:cNvPr id="4" name="날짜 개체 틀 3">
             <a:extLst>
               <a:ext uri="{FF2B5EF4-FFF2-40B4-BE49-F238E27FC236}">
-                <a16:creationId xmlns:a16="http://schemas.microsoft.com/office/drawing/2014/main" id="{95CF2FC7-70C5-E821-C1DD-35BBEBD50AD0}"/>
+                <a16:creationId xmlns:a16="http://schemas.microsoft.com/office/drawing/2014/main" id="{26479163-CD24-16A0-6953-E1368AD2858B}"/>
               </a:ext>
             </a:extLst>
           </p:cNvPr>
@@ -15892,7 +14655,7 @@
           <p:cNvPr id="5" name="슬라이드 번호 개체 틀 4">
             <a:extLst>
               <a:ext uri="{FF2B5EF4-FFF2-40B4-BE49-F238E27FC236}">
-                <a16:creationId xmlns:a16="http://schemas.microsoft.com/office/drawing/2014/main" id="{83402C30-9276-EDB7-5777-845657177299}"/>
+                <a16:creationId xmlns:a16="http://schemas.microsoft.com/office/drawing/2014/main" id="{74A69541-BCCC-043B-4836-056FF9FDB439}"/>
               </a:ext>
             </a:extLst>
           </p:cNvPr>
@@ -15912,16 +14675,16 @@
               <a:rPr lang="ko-KR" altLang="en-US" smtClean="0"/>
               <a:t>6</a:t>
             </a:fld>
-            <a:endParaRPr lang="ko-KR" altLang="en-US"/>
+            <a:endParaRPr lang="ko-KR" altLang="en-US" dirty="0"/>
           </a:p>
         </p:txBody>
       </p:sp>
       <p:pic>
         <p:nvPicPr>
-          <p:cNvPr id="3074" name="Picture 2" descr="계단식 성장의 중요성 : 네이버 블로그">
-            <a:extLst>
-              <a:ext uri="{FF2B5EF4-FFF2-40B4-BE49-F238E27FC236}">
-                <a16:creationId xmlns:a16="http://schemas.microsoft.com/office/drawing/2014/main" id="{D279DED3-A2F0-0154-AB54-91F8E8B4CB98}"/>
+          <p:cNvPr id="2050" name="Picture 2" descr="아프리카TV OGQ 마켓">
+            <a:extLst>
+              <a:ext uri="{FF2B5EF4-FFF2-40B4-BE49-F238E27FC236}">
+                <a16:creationId xmlns:a16="http://schemas.microsoft.com/office/drawing/2014/main" id="{AA441FC9-2EBF-3EC0-A887-5FBA50E379B1}"/>
               </a:ext>
             </a:extLst>
           </p:cNvPr>
@@ -15945,8 +14708,8 @@
         </p:blipFill>
         <p:spPr bwMode="auto">
           <a:xfrm>
-            <a:off x="1649185" y="728663"/>
-            <a:ext cx="7620000" cy="5400675"/>
+            <a:off x="1169276" y="664670"/>
+            <a:ext cx="2191407" cy="2191407"/>
           </a:xfrm>
           <a:prstGeom prst="rect">
             <a:avLst/>
@@ -15963,10 +14726,291 @@
           </a:extLst>
         </p:spPr>
       </p:pic>
+      <p:pic>
+        <p:nvPicPr>
+          <p:cNvPr id="2052" name="Picture 4" descr="초소형 테트리스 만들기">
+            <a:extLst>
+              <a:ext uri="{FF2B5EF4-FFF2-40B4-BE49-F238E27FC236}">
+                <a16:creationId xmlns:a16="http://schemas.microsoft.com/office/drawing/2014/main" id="{412EDF1A-10BF-18C4-6161-398F2C979E62}"/>
+              </a:ext>
+            </a:extLst>
+          </p:cNvPr>
+          <p:cNvPicPr>
+            <a:picLocks noChangeAspect="1" noChangeArrowheads="1"/>
+          </p:cNvPicPr>
+          <p:nvPr/>
+        </p:nvPicPr>
+        <p:blipFill rotWithShape="1">
+          <a:blip r:embed="rId4">
+            <a:extLst>
+              <a:ext uri="{28A0092B-C50C-407E-A947-70E740481C1C}">
+                <a14:useLocalDpi xmlns:a14="http://schemas.microsoft.com/office/drawing/2010/main" val="0"/>
+              </a:ext>
+            </a:extLst>
+          </a:blip>
+          <a:srcRect l="33420" t="57395" r="33723"/>
+          <a:stretch/>
+        </p:blipFill>
+        <p:spPr bwMode="auto">
+          <a:xfrm>
+            <a:off x="996794" y="3809201"/>
+            <a:ext cx="2743200" cy="2000850"/>
+          </a:xfrm>
+          <a:prstGeom prst="rect">
+            <a:avLst/>
+          </a:prstGeom>
+          <a:noFill/>
+          <a:extLst>
+            <a:ext uri="{909E8E84-426E-40DD-AFC4-6F175D3DCCD1}">
+              <a14:hiddenFill xmlns:a14="http://schemas.microsoft.com/office/drawing/2010/main">
+                <a:solidFill>
+                  <a:srgbClr val="FFFFFF"/>
+                </a:solidFill>
+              </a14:hiddenFill>
+            </a:ext>
+          </a:extLst>
+        </p:spPr>
+      </p:pic>
+      <p:sp>
+        <p:nvSpPr>
+          <p:cNvPr id="9" name="내용 개체 틀 2">
+            <a:extLst>
+              <a:ext uri="{FF2B5EF4-FFF2-40B4-BE49-F238E27FC236}">
+                <a16:creationId xmlns:a16="http://schemas.microsoft.com/office/drawing/2014/main" id="{096A8525-E745-5CD7-290E-8B5ACC1A207C}"/>
+              </a:ext>
+            </a:extLst>
+          </p:cNvPr>
+          <p:cNvSpPr txBox="1">
+            <a:spLocks/>
+          </p:cNvSpPr>
+          <p:nvPr/>
+        </p:nvSpPr>
+        <p:spPr>
+          <a:xfrm>
+            <a:off x="4477405" y="3555124"/>
+            <a:ext cx="7542529" cy="2512420"/>
+          </a:xfrm>
+          <a:prstGeom prst="rect">
+            <a:avLst/>
+          </a:prstGeom>
+        </p:spPr>
+        <p:txBody>
+          <a:bodyPr vert="horz" lIns="91440" tIns="45720" rIns="91440" bIns="45720" rtlCol="0">
+            <a:normAutofit/>
+          </a:bodyPr>
+          <a:lstStyle>
+            <a:lvl1pPr marL="228600" indent="-228600" algn="l" defTabSz="914400" rtl="0" eaLnBrk="1" latinLnBrk="1" hangingPunct="1">
+              <a:lnSpc>
+                <a:spcPct val="90000"/>
+              </a:lnSpc>
+              <a:spcBef>
+                <a:spcPts val="1000"/>
+              </a:spcBef>
+              <a:buFont typeface="Arial" panose="020B0604020202020204" pitchFamily="34" charset="0"/>
+              <a:buChar char="•"/>
+              <a:defRPr sz="2800" kern="1200">
+                <a:solidFill>
+                  <a:schemeClr val="tx1"/>
+                </a:solidFill>
+                <a:latin typeface="+mn-lt"/>
+                <a:ea typeface="+mn-ea"/>
+                <a:cs typeface="+mn-cs"/>
+              </a:defRPr>
+            </a:lvl1pPr>
+            <a:lvl2pPr marL="685800" indent="-228600" algn="l" defTabSz="914400" rtl="0" eaLnBrk="1" latinLnBrk="1" hangingPunct="1">
+              <a:lnSpc>
+                <a:spcPct val="90000"/>
+              </a:lnSpc>
+              <a:spcBef>
+                <a:spcPts val="500"/>
+              </a:spcBef>
+              <a:buFont typeface="Arial" panose="020B0604020202020204" pitchFamily="34" charset="0"/>
+              <a:buChar char="•"/>
+              <a:defRPr sz="2400" kern="1200">
+                <a:solidFill>
+                  <a:schemeClr val="tx1"/>
+                </a:solidFill>
+                <a:latin typeface="+mn-lt"/>
+                <a:ea typeface="+mn-ea"/>
+                <a:cs typeface="+mn-cs"/>
+              </a:defRPr>
+            </a:lvl2pPr>
+            <a:lvl3pPr marL="1143000" indent="-228600" algn="l" defTabSz="914400" rtl="0" eaLnBrk="1" latinLnBrk="1" hangingPunct="1">
+              <a:lnSpc>
+                <a:spcPct val="90000"/>
+              </a:lnSpc>
+              <a:spcBef>
+                <a:spcPts val="500"/>
+              </a:spcBef>
+              <a:buFont typeface="Arial" panose="020B0604020202020204" pitchFamily="34" charset="0"/>
+              <a:buChar char="•"/>
+              <a:defRPr sz="2000" kern="1200">
+                <a:solidFill>
+                  <a:schemeClr val="tx1"/>
+                </a:solidFill>
+                <a:latin typeface="+mn-lt"/>
+                <a:ea typeface="+mn-ea"/>
+                <a:cs typeface="+mn-cs"/>
+              </a:defRPr>
+            </a:lvl3pPr>
+            <a:lvl4pPr marL="1600200" indent="-228600" algn="l" defTabSz="914400" rtl="0" eaLnBrk="1" latinLnBrk="1" hangingPunct="1">
+              <a:lnSpc>
+                <a:spcPct val="90000"/>
+              </a:lnSpc>
+              <a:spcBef>
+                <a:spcPts val="500"/>
+              </a:spcBef>
+              <a:buFont typeface="Arial" panose="020B0604020202020204" pitchFamily="34" charset="0"/>
+              <a:buChar char="•"/>
+              <a:defRPr sz="1800" kern="1200">
+                <a:solidFill>
+                  <a:schemeClr val="tx1"/>
+                </a:solidFill>
+                <a:latin typeface="+mn-lt"/>
+                <a:ea typeface="+mn-ea"/>
+                <a:cs typeface="+mn-cs"/>
+              </a:defRPr>
+            </a:lvl4pPr>
+            <a:lvl5pPr marL="2057400" indent="-228600" algn="l" defTabSz="914400" rtl="0" eaLnBrk="1" latinLnBrk="1" hangingPunct="1">
+              <a:lnSpc>
+                <a:spcPct val="90000"/>
+              </a:lnSpc>
+              <a:spcBef>
+                <a:spcPts val="500"/>
+              </a:spcBef>
+              <a:buFont typeface="Arial" panose="020B0604020202020204" pitchFamily="34" charset="0"/>
+              <a:buChar char="•"/>
+              <a:defRPr sz="1800" kern="1200">
+                <a:solidFill>
+                  <a:schemeClr val="tx1"/>
+                </a:solidFill>
+                <a:latin typeface="+mn-lt"/>
+                <a:ea typeface="+mn-ea"/>
+                <a:cs typeface="+mn-cs"/>
+              </a:defRPr>
+            </a:lvl5pPr>
+            <a:lvl6pPr marL="2514600" indent="-228600" algn="l" defTabSz="914400" rtl="0" eaLnBrk="1" latinLnBrk="1" hangingPunct="1">
+              <a:lnSpc>
+                <a:spcPct val="90000"/>
+              </a:lnSpc>
+              <a:spcBef>
+                <a:spcPts val="500"/>
+              </a:spcBef>
+              <a:buFont typeface="Arial" panose="020B0604020202020204" pitchFamily="34" charset="0"/>
+              <a:buChar char="•"/>
+              <a:defRPr sz="1800" kern="1200">
+                <a:solidFill>
+                  <a:schemeClr val="tx1"/>
+                </a:solidFill>
+                <a:latin typeface="+mn-lt"/>
+                <a:ea typeface="+mn-ea"/>
+                <a:cs typeface="+mn-cs"/>
+              </a:defRPr>
+            </a:lvl6pPr>
+            <a:lvl7pPr marL="2971800" indent="-228600" algn="l" defTabSz="914400" rtl="0" eaLnBrk="1" latinLnBrk="1" hangingPunct="1">
+              <a:lnSpc>
+                <a:spcPct val="90000"/>
+              </a:lnSpc>
+              <a:spcBef>
+                <a:spcPts val="500"/>
+              </a:spcBef>
+              <a:buFont typeface="Arial" panose="020B0604020202020204" pitchFamily="34" charset="0"/>
+              <a:buChar char="•"/>
+              <a:defRPr sz="1800" kern="1200">
+                <a:solidFill>
+                  <a:schemeClr val="tx1"/>
+                </a:solidFill>
+                <a:latin typeface="+mn-lt"/>
+                <a:ea typeface="+mn-ea"/>
+                <a:cs typeface="+mn-cs"/>
+              </a:defRPr>
+            </a:lvl7pPr>
+            <a:lvl8pPr marL="3429000" indent="-228600" algn="l" defTabSz="914400" rtl="0" eaLnBrk="1" latinLnBrk="1" hangingPunct="1">
+              <a:lnSpc>
+                <a:spcPct val="90000"/>
+              </a:lnSpc>
+              <a:spcBef>
+                <a:spcPts val="500"/>
+              </a:spcBef>
+              <a:buFont typeface="Arial" panose="020B0604020202020204" pitchFamily="34" charset="0"/>
+              <a:buChar char="•"/>
+              <a:defRPr sz="1800" kern="1200">
+                <a:solidFill>
+                  <a:schemeClr val="tx1"/>
+                </a:solidFill>
+                <a:latin typeface="+mn-lt"/>
+                <a:ea typeface="+mn-ea"/>
+                <a:cs typeface="+mn-cs"/>
+              </a:defRPr>
+            </a:lvl8pPr>
+            <a:lvl9pPr marL="3886200" indent="-228600" algn="l" defTabSz="914400" rtl="0" eaLnBrk="1" latinLnBrk="1" hangingPunct="1">
+              <a:lnSpc>
+                <a:spcPct val="90000"/>
+              </a:lnSpc>
+              <a:spcBef>
+                <a:spcPts val="500"/>
+              </a:spcBef>
+              <a:buFont typeface="Arial" panose="020B0604020202020204" pitchFamily="34" charset="0"/>
+              <a:buChar char="•"/>
+              <a:defRPr sz="1800" kern="1200">
+                <a:solidFill>
+                  <a:schemeClr val="tx1"/>
+                </a:solidFill>
+                <a:latin typeface="+mn-lt"/>
+                <a:ea typeface="+mn-ea"/>
+                <a:cs typeface="+mn-cs"/>
+              </a:defRPr>
+            </a:lvl9pPr>
+          </a:lstStyle>
+          <a:p>
+            <a:pPr marL="0" indent="0">
+              <a:lnSpc>
+                <a:spcPct val="150000"/>
+              </a:lnSpc>
+              <a:buFont typeface="Arial" panose="020B0604020202020204" pitchFamily="34" charset="0"/>
+              <a:buNone/>
+            </a:pPr>
+            <a:r>
+              <a:rPr lang="en-US" altLang="ko-KR" sz="3500" b="1" dirty="0">
+                <a:solidFill>
+                  <a:srgbClr val="6EC173"/>
+                </a:solidFill>
+              </a:rPr>
+              <a:t>2. </a:t>
+            </a:r>
+            <a:r>
+              <a:rPr lang="ko-KR" altLang="en-US" sz="3500" b="1" dirty="0">
+                <a:solidFill>
+                  <a:srgbClr val="6EC173"/>
+                </a:solidFill>
+              </a:rPr>
+              <a:t>맞춤 수업</a:t>
+            </a:r>
+            <a:endParaRPr lang="en-US" altLang="ko-KR" sz="3500" b="1" dirty="0">
+              <a:solidFill>
+                <a:srgbClr val="6EC173"/>
+              </a:solidFill>
+            </a:endParaRPr>
+          </a:p>
+          <a:p>
+            <a:pPr marL="0" indent="0">
+              <a:lnSpc>
+                <a:spcPct val="150000"/>
+              </a:lnSpc>
+              <a:buFont typeface="Arial" panose="020B0604020202020204" pitchFamily="34" charset="0"/>
+              <a:buNone/>
+            </a:pPr>
+            <a:r>
+              <a:rPr lang="ko-KR" altLang="en-US" dirty="0"/>
+              <a:t>교육생 의견을 반영한 맞춤 수업 진행</a:t>
+            </a:r>
+          </a:p>
+        </p:txBody>
+      </p:sp>
     </p:spTree>
     <p:extLst>
       <p:ext uri="{BB962C8B-B14F-4D97-AF65-F5344CB8AC3E}">
-        <p14:creationId xmlns:p14="http://schemas.microsoft.com/office/powerpoint/2010/main" val="3229945317"/>
+        <p14:creationId xmlns:p14="http://schemas.microsoft.com/office/powerpoint/2010/main" val="203423183"/>
       </p:ext>
     </p:extLst>
   </p:cSld>
@@ -16325,32 +15369,92 @@
           <a:p>
             <a:pPr algn="r"/>
             <a:r>
-              <a:rPr lang="ko-KR" altLang="en-US" sz="1400" b="1" dirty="0"/>
+              <a:rPr lang="ko-KR" altLang="en-US" sz="1400" dirty="0">
+                <a:solidFill>
+                  <a:schemeClr val="accent5"/>
+                </a:solidFill>
+              </a:rPr>
               <a:t>참고</a:t>
             </a:r>
             <a:r>
-              <a:rPr lang="en-US" altLang="ko-KR" sz="1400" b="1" dirty="0"/>
+              <a:rPr lang="en-US" altLang="ko-KR" sz="1400" dirty="0">
+                <a:solidFill>
+                  <a:schemeClr val="accent5"/>
+                </a:solidFill>
+              </a:rPr>
               <a:t>. </a:t>
             </a:r>
             <a:r>
-              <a:rPr lang="ko-KR" altLang="en-US" sz="1400" b="1" dirty="0"/>
-              <a:t>과정별 </a:t>
-            </a:r>
-            <a:r>
-              <a:rPr lang="ko-KR" altLang="en-US" sz="1400" b="1" dirty="0" err="1"/>
+              <a:rPr lang="ko-KR" altLang="en-US" sz="1400" b="1" dirty="0">
+                <a:solidFill>
+                  <a:schemeClr val="accent5"/>
+                </a:solidFill>
+              </a:rPr>
+              <a:t>과정 </a:t>
+            </a:r>
+            <a:r>
+              <a:rPr lang="ko-KR" altLang="en-US" sz="1400" b="1" dirty="0" err="1">
+                <a:solidFill>
+                  <a:schemeClr val="accent5"/>
+                </a:solidFill>
+              </a:rPr>
               <a:t>진도율</a:t>
             </a:r>
             <a:r>
-              <a:rPr lang="ko-KR" altLang="en-US" sz="1400" b="1" dirty="0"/>
-              <a:t> 30~50%에 중간평가를 진행(</a:t>
-            </a:r>
-            <a:r>
-              <a:rPr lang="ko-KR" altLang="en-US" sz="1400" b="1" dirty="0" err="1"/>
+              <a:rPr lang="ko-KR" altLang="en-US" sz="1400" b="1" dirty="0">
+                <a:solidFill>
+                  <a:schemeClr val="accent5"/>
+                </a:solidFill>
+              </a:rPr>
+              <a:t> 30~50%에 중간평가</a:t>
+            </a:r>
+            <a:r>
+              <a:rPr lang="ko-KR" altLang="en-US" sz="1400" dirty="0">
+                <a:solidFill>
+                  <a:schemeClr val="accent5"/>
+                </a:solidFill>
+              </a:rPr>
+              <a:t>를 진행(</a:t>
+            </a:r>
+            <a:r>
+              <a:rPr lang="ko-KR" altLang="en-US" sz="1400" dirty="0" err="1">
+                <a:solidFill>
+                  <a:schemeClr val="accent5"/>
+                </a:solidFill>
+              </a:rPr>
               <a:t>역량평가+취업의지</a:t>
             </a:r>
             <a:r>
-              <a:rPr lang="ko-KR" altLang="en-US" sz="1400" b="1" dirty="0"/>
-              <a:t>/학습태도 평가)하여 과정 적합도가 현저히 낮은 교육생은 수강중단 될 수 있음(본 경우에는 예치금 반환)</a:t>
+              <a:rPr lang="ko-KR" altLang="en-US" sz="1400" dirty="0">
+                <a:solidFill>
+                  <a:schemeClr val="accent5"/>
+                </a:solidFill>
+              </a:rPr>
+              <a:t>/학습태도 평가)하여</a:t>
+            </a:r>
+            <a:endParaRPr lang="en-US" altLang="ko-KR" sz="1400" dirty="0">
+              <a:solidFill>
+                <a:schemeClr val="accent5"/>
+              </a:solidFill>
+            </a:endParaRPr>
+          </a:p>
+          <a:p>
+            <a:pPr algn="r"/>
+            <a:r>
+              <a:rPr lang="ko-KR" altLang="en-US" sz="1400" b="1" dirty="0">
+                <a:solidFill>
+                  <a:schemeClr val="accent5"/>
+                </a:solidFill>
+              </a:rPr>
+              <a:t>과정 적합도가 현저히 낮은 교육생은 수강중단</a:t>
+            </a:r>
+            <a:r>
+              <a:rPr lang="ko-KR" altLang="en-US" sz="1400" dirty="0">
+                <a:solidFill>
+                  <a:schemeClr val="accent5"/>
+                </a:solidFill>
+              </a:rPr>
+              <a:t> 될 수 있음(본 경우에는 예치금 반환)</a:t>
             </a:r>
           </a:p>
         </p:txBody>
@@ -16387,10 +15491,10 @@
       </p:grpSpPr>
       <p:sp>
         <p:nvSpPr>
-          <p:cNvPr id="3" name="내용 개체 틀 2">
-            <a:extLst>
-              <a:ext uri="{FF2B5EF4-FFF2-40B4-BE49-F238E27FC236}">
-                <a16:creationId xmlns:a16="http://schemas.microsoft.com/office/drawing/2014/main" id="{55C4046B-DF46-F3CF-89AE-FACD82780128}"/>
+          <p:cNvPr id="2" name="내용 개체 틀 1">
+            <a:extLst>
+              <a:ext uri="{FF2B5EF4-FFF2-40B4-BE49-F238E27FC236}">
+                <a16:creationId xmlns:a16="http://schemas.microsoft.com/office/drawing/2014/main" id="{D77A16AF-C0AC-0C40-8054-A9A433763826}"/>
               </a:ext>
             </a:extLst>
           </p:cNvPr>
@@ -16401,189 +15505,235 @@
             <p:ph idx="1"/>
           </p:nvPr>
         </p:nvSpPr>
-        <p:spPr>
-          <a:xfrm>
-            <a:off x="1930888" y="529897"/>
-            <a:ext cx="7789452" cy="2574554"/>
-          </a:xfrm>
-        </p:spPr>
+        <p:spPr/>
         <p:txBody>
           <a:bodyPr>
             <a:normAutofit/>
           </a:bodyPr>
           <a:lstStyle/>
           <a:p>
-            <a:pPr marL="0" indent="0">
-              <a:buNone/>
-            </a:pPr>
-            <a:r>
-              <a:rPr lang="ko-KR" altLang="en-US" b="1" dirty="0">
-                <a:solidFill>
-                  <a:srgbClr val="6EC173"/>
+            <a:r>
+              <a:rPr lang="ko-KR" altLang="en-US" sz="2400" b="1" dirty="0">
+                <a:solidFill>
+                  <a:schemeClr val="accent1"/>
                 </a:solidFill>
               </a:rPr>
-              <a:t>카카오톡</a:t>
-            </a:r>
-            <a:endParaRPr lang="en-US" altLang="ko-KR" b="1" dirty="0">
+              <a:t>카카오톡 오픈채팅방</a:t>
+            </a:r>
+            <a:endParaRPr lang="en-US" altLang="ko-KR" sz="2400" b="1" dirty="0">
               <a:solidFill>
-                <a:srgbClr val="6EC173"/>
+                <a:schemeClr val="accent1"/>
               </a:solidFill>
             </a:endParaRPr>
           </a:p>
           <a:p>
-            <a:pPr>
-              <a:buFontTx/>
-              <a:buChar char="-"/>
-            </a:pPr>
-            <a:r>
-              <a:rPr lang="ko-KR" altLang="en-US" sz="2000" dirty="0"/>
-              <a:t>목적</a:t>
-            </a:r>
-            <a:r>
-              <a:rPr lang="en-US" altLang="ko-KR" sz="2000" dirty="0"/>
+            <a:pPr lvl="1"/>
+            <a:r>
+              <a:rPr lang="ko-KR" altLang="en-US" sz="1800" dirty="0"/>
+              <a:t>수업 이외의 시간에 공지 및 정보 공유</a:t>
+            </a:r>
+            <a:endParaRPr lang="en-US" altLang="ko-KR" sz="1800" dirty="0"/>
+          </a:p>
+          <a:p>
+            <a:pPr lvl="1"/>
+            <a:r>
+              <a:rPr lang="ko-KR" altLang="en-US" sz="1800" dirty="0"/>
+              <a:t>해시 태그</a:t>
+            </a:r>
+            <a:r>
+              <a:rPr lang="en-US" altLang="ko-KR" sz="1800" dirty="0"/>
+              <a:t>: #</a:t>
+            </a:r>
+            <a:r>
+              <a:rPr lang="ko-KR" altLang="en-US" sz="1800" dirty="0" err="1"/>
+              <a:t>코딩온</a:t>
+            </a:r>
+            <a:r>
+              <a:rPr lang="ko-KR" altLang="en-US" sz="1800" dirty="0"/>
+              <a:t> </a:t>
+            </a:r>
+            <a:r>
+              <a:rPr lang="en-US" altLang="ko-KR" sz="1800" dirty="0"/>
+              <a:t>#CodingOn #SeSAC</a:t>
+            </a:r>
+            <a:r>
+              <a:rPr lang="ko-KR" altLang="en-US" sz="1800" dirty="0"/>
+              <a:t>영등포 </a:t>
+            </a:r>
+            <a:r>
+              <a:rPr lang="en-US" altLang="ko-KR" sz="1800" dirty="0"/>
+              <a:t>#</a:t>
+            </a:r>
+            <a:r>
+              <a:rPr lang="ko-KR" altLang="en-US" sz="1800" dirty="0" err="1"/>
+              <a:t>웹풀스택</a:t>
+            </a:r>
+            <a:endParaRPr lang="en-US" altLang="ko-KR" sz="1800" dirty="0"/>
+          </a:p>
+          <a:p>
+            <a:pPr lvl="1"/>
+            <a:r>
+              <a:rPr lang="ko-KR" altLang="en-US" sz="1800" dirty="0"/>
+              <a:t>입장 코드</a:t>
+            </a:r>
+            <a:r>
+              <a:rPr lang="en-US" altLang="ko-KR" sz="1800" dirty="0"/>
               <a:t>: </a:t>
             </a:r>
             <a:r>
-              <a:rPr lang="ko-KR" altLang="en-US" sz="2000" dirty="0"/>
-              <a:t>수업 이외의 시간 </a:t>
-            </a:r>
-            <a:r>
-              <a:rPr lang="en-US" altLang="ko-KR" sz="2000" dirty="0"/>
+              <a:rPr lang="en-US" altLang="ko-KR" sz="1800" b="1" dirty="0"/>
+              <a:t>CSYDP6</a:t>
+            </a:r>
+          </a:p>
+          <a:p>
+            <a:pPr lvl="1"/>
+            <a:r>
+              <a:rPr lang="ko-KR" altLang="en-US" sz="1800" dirty="0"/>
+              <a:t>이름 양식</a:t>
+            </a:r>
+            <a:r>
+              <a:rPr lang="en-US" altLang="ko-KR" sz="1800" dirty="0"/>
+              <a:t>: </a:t>
+            </a:r>
+            <a:r>
+              <a:rPr lang="ko-KR" altLang="en-US" sz="1800" b="1" dirty="0"/>
+              <a:t>본명 </a:t>
+            </a:r>
+            <a:r>
+              <a:rPr lang="en-US" altLang="ko-KR" sz="1800" b="1" dirty="0"/>
+              <a:t>(ex. </a:t>
+            </a:r>
+            <a:r>
+              <a:rPr lang="ko-KR" altLang="en-US" sz="1800" b="1" dirty="0"/>
+              <a:t>홍길동</a:t>
+            </a:r>
+            <a:r>
+              <a:rPr lang="en-US" altLang="ko-KR" sz="1800" b="1" dirty="0"/>
+              <a:t>)</a:t>
+            </a:r>
+          </a:p>
+          <a:p>
+            <a:pPr lvl="1"/>
+            <a:endParaRPr lang="en-US" altLang="ko-KR" sz="2400" dirty="0"/>
+          </a:p>
+          <a:p>
+            <a:r>
+              <a:rPr lang="en-US" altLang="ko-KR" sz="2400" b="1" dirty="0">
+                <a:solidFill>
+                  <a:schemeClr val="accent1"/>
+                </a:solidFill>
+              </a:rPr>
+              <a:t>Slack</a:t>
+            </a:r>
+            <a:r>
+              <a:rPr lang="en-US" altLang="ko-KR" sz="2400" dirty="0"/>
+              <a:t> </a:t>
+            </a:r>
+          </a:p>
+          <a:p>
+            <a:pPr lvl="1"/>
+            <a:r>
+              <a:rPr lang="ko-KR" altLang="en-US" sz="1800" dirty="0"/>
+              <a:t>수업 관련 소스</a:t>
+            </a:r>
+            <a:r>
+              <a:rPr lang="en-US" altLang="ko-KR" sz="1800" dirty="0"/>
               <a:t>(</a:t>
             </a:r>
             <a:r>
-              <a:rPr lang="ko-KR" altLang="en-US" sz="2000" dirty="0"/>
-              <a:t>월</a:t>
-            </a:r>
-            <a:r>
-              <a:rPr lang="en-US" altLang="ko-KR" sz="2000" dirty="0"/>
+              <a:rPr lang="ko-KR" altLang="en-US" sz="1800" dirty="0"/>
+              <a:t>링크</a:t>
+            </a:r>
+            <a:r>
+              <a:rPr lang="en-US" altLang="ko-KR" sz="1800" dirty="0"/>
               <a:t>, </a:t>
             </a:r>
             <a:r>
-              <a:rPr lang="ko-KR" altLang="en-US" sz="2000" dirty="0"/>
-              <a:t>수</a:t>
-            </a:r>
-            <a:r>
-              <a:rPr lang="en-US" altLang="ko-KR" sz="2000" dirty="0"/>
+              <a:rPr lang="ko-KR" altLang="en-US" sz="1800" dirty="0"/>
+              <a:t>이미지</a:t>
+            </a:r>
+            <a:r>
+              <a:rPr lang="en-US" altLang="ko-KR" sz="1800" dirty="0"/>
               <a:t>, </a:t>
             </a:r>
             <a:r>
-              <a:rPr lang="ko-KR" altLang="en-US" sz="2000" dirty="0"/>
-              <a:t>금 제외</a:t>
-            </a:r>
-            <a:r>
-              <a:rPr lang="en-US" altLang="ko-KR" sz="2000" dirty="0"/>
+              <a:rPr lang="ko-KR" altLang="en-US" sz="1800" dirty="0"/>
+              <a:t>코드 등</a:t>
+            </a:r>
+            <a:r>
+              <a:rPr lang="en-US" altLang="ko-KR" sz="1800" dirty="0"/>
               <a:t>) </a:t>
             </a:r>
             <a:r>
-              <a:rPr lang="ko-KR" altLang="en-US" sz="2000" dirty="0"/>
-              <a:t>공지 및 정보 공유 </a:t>
-            </a:r>
-            <a:endParaRPr lang="en-US" altLang="ko-KR" sz="2000" dirty="0">
-              <a:hlinkClick r:id="rId3"/>
-            </a:endParaRPr>
-          </a:p>
-          <a:p>
-            <a:pPr>
-              <a:buFontTx/>
-              <a:buChar char="-"/>
-            </a:pPr>
-            <a:r>
-              <a:rPr lang="en-US" altLang="ko-KR" sz="2000" dirty="0">
-                <a:hlinkClick r:id="rId4"/>
-              </a:rPr>
-              <a:t>https://open.kakao.com/o/glc3ilqg</a:t>
-            </a:r>
-            <a:endParaRPr lang="en-US" altLang="ko-KR" sz="2000" dirty="0"/>
-          </a:p>
-          <a:p>
-            <a:pPr>
-              <a:buFontTx/>
-              <a:buChar char="-"/>
-            </a:pPr>
-            <a:r>
-              <a:rPr lang="en-US" altLang="ko-KR" sz="2000" dirty="0"/>
-              <a:t>#</a:t>
-            </a:r>
-            <a:r>
-              <a:rPr lang="ko-KR" altLang="en-US" sz="2000" dirty="0" err="1"/>
-              <a:t>코딩온</a:t>
-            </a:r>
-            <a:r>
-              <a:rPr lang="ko-KR" altLang="en-US" sz="2000" dirty="0"/>
-              <a:t> </a:t>
-            </a:r>
-            <a:r>
-              <a:rPr lang="en-US" altLang="ko-KR" sz="2000" dirty="0"/>
-              <a:t>#CodingOn #SeSAC</a:t>
-            </a:r>
-            <a:r>
-              <a:rPr lang="ko-KR" altLang="en-US" sz="2000" dirty="0"/>
-              <a:t>영등포 </a:t>
-            </a:r>
-            <a:r>
-              <a:rPr lang="en-US" altLang="ko-KR" sz="2000" dirty="0"/>
-              <a:t>#</a:t>
-            </a:r>
-            <a:r>
-              <a:rPr lang="ko-KR" altLang="en-US" sz="2000" dirty="0" err="1"/>
-              <a:t>웹풀스택</a:t>
-            </a:r>
-            <a:endParaRPr lang="en-US" altLang="ko-KR" sz="2000" dirty="0"/>
-          </a:p>
-          <a:p>
-            <a:pPr>
-              <a:buFontTx/>
-              <a:buChar char="-"/>
-            </a:pPr>
-            <a:r>
-              <a:rPr lang="ko-KR" altLang="en-US" sz="2000" dirty="0"/>
-              <a:t>암호</a:t>
-            </a:r>
-            <a:r>
-              <a:rPr lang="en-US" altLang="ko-KR" sz="2000" dirty="0"/>
-              <a:t>: CSYDP6</a:t>
-            </a:r>
-          </a:p>
-          <a:p>
-            <a:pPr>
-              <a:buFontTx/>
-              <a:buChar char="-"/>
-            </a:pPr>
-            <a:r>
-              <a:rPr lang="ko-KR" altLang="en-US" sz="2000" dirty="0"/>
-              <a:t>닉네임</a:t>
-            </a:r>
-            <a:r>
-              <a:rPr lang="en-US" altLang="ko-KR" sz="2000" dirty="0"/>
+              <a:rPr lang="ko-KR" altLang="en-US" sz="1800" dirty="0"/>
+              <a:t>공유</a:t>
+            </a:r>
+            <a:endParaRPr lang="en-US" altLang="ko-KR" sz="1800" dirty="0"/>
+          </a:p>
+          <a:p>
+            <a:pPr lvl="1"/>
+            <a:r>
+              <a:rPr lang="ko-KR" altLang="en-US" sz="1800" dirty="0"/>
+              <a:t>과제 및 블로그 제출</a:t>
+            </a:r>
+            <a:endParaRPr lang="en-US" altLang="ko-KR" sz="1800" dirty="0"/>
+          </a:p>
+          <a:p>
+            <a:pPr lvl="1"/>
+            <a:r>
+              <a:rPr lang="en-US" altLang="ko-KR" sz="1800" dirty="0"/>
+              <a:t>Slack </a:t>
+            </a:r>
+            <a:r>
+              <a:rPr lang="ko-KR" altLang="en-US" sz="1800" dirty="0"/>
+              <a:t>초대 링크는 카카오톡 오픈채팅방 공지에서 확인 가능</a:t>
+            </a:r>
+            <a:endParaRPr lang="en-US" altLang="ko-KR" sz="1800" dirty="0"/>
+          </a:p>
+          <a:p>
+            <a:pPr lvl="1"/>
+            <a:r>
+              <a:rPr lang="ko-KR" altLang="en-US" sz="1800" dirty="0"/>
+              <a:t>이름 양식</a:t>
+            </a:r>
+            <a:r>
+              <a:rPr lang="en-US" altLang="ko-KR" sz="1800" dirty="0"/>
               <a:t>: </a:t>
             </a:r>
             <a:r>
-              <a:rPr lang="ko-KR" altLang="en-US" sz="2000" b="1" dirty="0"/>
+              <a:rPr lang="en-US" altLang="ko-KR" sz="1800" b="1" dirty="0"/>
+              <a:t>SeSAC_6YDP_</a:t>
+            </a:r>
+            <a:r>
+              <a:rPr lang="ko-KR" altLang="en-US" sz="1800" b="1" dirty="0"/>
               <a:t>본명 </a:t>
             </a:r>
             <a:r>
-              <a:rPr lang="en-US" altLang="ko-KR" sz="2000" b="1" dirty="0"/>
-              <a:t>(ex. </a:t>
-            </a:r>
-            <a:r>
-              <a:rPr lang="ko-KR" altLang="en-US" sz="2000" b="1" dirty="0"/>
+              <a:rPr lang="en-US" altLang="ko-KR" sz="1800" b="1" dirty="0"/>
+              <a:t>(ex. SeSAC_6YDP_</a:t>
+            </a:r>
+            <a:r>
+              <a:rPr lang="ko-KR" altLang="en-US" sz="1800" b="1" dirty="0"/>
               <a:t>홍길동</a:t>
             </a:r>
             <a:r>
-              <a:rPr lang="en-US" altLang="ko-KR" sz="2000" b="1" dirty="0"/>
+              <a:rPr lang="en-US" altLang="ko-KR" sz="1800" b="1" dirty="0"/>
               <a:t>)</a:t>
             </a:r>
-            <a:endParaRPr lang="ko-KR" altLang="en-US" sz="2000" b="1" dirty="0"/>
-          </a:p>
-        </p:txBody>
-      </p:sp>
-      <p:sp>
-        <p:nvSpPr>
-          <p:cNvPr id="4" name="날짜 개체 틀 3">
-            <a:extLst>
-              <a:ext uri="{FF2B5EF4-FFF2-40B4-BE49-F238E27FC236}">
-                <a16:creationId xmlns:a16="http://schemas.microsoft.com/office/drawing/2014/main" id="{C6AC93F6-5BE3-6FA0-9A26-5501F1C752C9}"/>
+            <a:endParaRPr lang="ko-KR" altLang="en-US" sz="1800" b="1" dirty="0"/>
+          </a:p>
+          <a:p>
+            <a:pPr lvl="1"/>
+            <a:endParaRPr lang="ko-KR" altLang="en-US" sz="2000" dirty="0"/>
+          </a:p>
+        </p:txBody>
+      </p:sp>
+      <p:sp>
+        <p:nvSpPr>
+          <p:cNvPr id="3" name="날짜 개체 틀 2">
+            <a:extLst>
+              <a:ext uri="{FF2B5EF4-FFF2-40B4-BE49-F238E27FC236}">
+                <a16:creationId xmlns:a16="http://schemas.microsoft.com/office/drawing/2014/main" id="{9DF91455-F0A2-CD93-98D9-C12DFCC1B173}"/>
               </a:ext>
             </a:extLst>
           </p:cNvPr>
@@ -16599,20 +15749,20 @@
           <a:bodyPr/>
           <a:lstStyle/>
           <a:p>
-            <a:fld id="{AFBDD63F-9D56-45F3-85D7-711EA7F065F8}" type="datetime6">
+            <a:fld id="{3C9CE3CE-253F-4F9D-BA15-C226C8D8501E}" type="datetime6">
               <a:rPr lang="ko-KR" altLang="en-US" smtClean="0"/>
               <a:t>2024년 5월</a:t>
             </a:fld>
-            <a:endParaRPr lang="ko-KR" altLang="en-US" dirty="0"/>
-          </a:p>
-        </p:txBody>
-      </p:sp>
-      <p:sp>
-        <p:nvSpPr>
-          <p:cNvPr id="5" name="슬라이드 번호 개체 틀 4">
-            <a:extLst>
-              <a:ext uri="{FF2B5EF4-FFF2-40B4-BE49-F238E27FC236}">
-                <a16:creationId xmlns:a16="http://schemas.microsoft.com/office/drawing/2014/main" id="{6AE2158E-403C-A98E-AC81-E4A319CF374C}"/>
+            <a:endParaRPr lang="ko-KR" altLang="en-US"/>
+          </a:p>
+        </p:txBody>
+      </p:sp>
+      <p:sp>
+        <p:nvSpPr>
+          <p:cNvPr id="4" name="슬라이드 번호 개체 틀 3">
+            <a:extLst>
+              <a:ext uri="{FF2B5EF4-FFF2-40B4-BE49-F238E27FC236}">
+                <a16:creationId xmlns:a16="http://schemas.microsoft.com/office/drawing/2014/main" id="{21717698-EC93-DB48-F232-38FCE519333C}"/>
               </a:ext>
             </a:extLst>
           </p:cNvPr>
@@ -16636,12 +15786,76 @@
           </a:p>
         </p:txBody>
       </p:sp>
+      <p:sp>
+        <p:nvSpPr>
+          <p:cNvPr id="5" name="제목 4">
+            <a:extLst>
+              <a:ext uri="{FF2B5EF4-FFF2-40B4-BE49-F238E27FC236}">
+                <a16:creationId xmlns:a16="http://schemas.microsoft.com/office/drawing/2014/main" id="{155F3A2E-0D16-CB9F-DCFE-10DDB13F49DD}"/>
+              </a:ext>
+            </a:extLst>
+          </p:cNvPr>
+          <p:cNvSpPr>
+            <a:spLocks noGrp="1"/>
+          </p:cNvSpPr>
+          <p:nvPr>
+            <p:ph type="title"/>
+          </p:nvPr>
+        </p:nvSpPr>
+        <p:spPr/>
+        <p:txBody>
+          <a:bodyPr/>
+          <a:lstStyle/>
+          <a:p>
+            <a:r>
+              <a:rPr lang="ko-KR" altLang="en-US" dirty="0"/>
+              <a:t>커뮤니티 안내</a:t>
+            </a:r>
+          </a:p>
+        </p:txBody>
+      </p:sp>
       <p:pic>
         <p:nvPicPr>
-          <p:cNvPr id="3074" name="Picture 2" descr="카카오톡 - 나무위키">
-            <a:extLst>
-              <a:ext uri="{FF2B5EF4-FFF2-40B4-BE49-F238E27FC236}">
-                <a16:creationId xmlns:a16="http://schemas.microsoft.com/office/drawing/2014/main" id="{EC673AFA-4801-17A7-6EA6-CE85DC692A0E}"/>
+          <p:cNvPr id="6" name="그림 5" descr="스크린샷, 그래픽, 패턴, 디자인이(가) 표시된 사진&#10;&#10;자동 생성된 설명">
+            <a:extLst>
+              <a:ext uri="{FF2B5EF4-FFF2-40B4-BE49-F238E27FC236}">
+                <a16:creationId xmlns:a16="http://schemas.microsoft.com/office/drawing/2014/main" id="{D8352459-9BFD-83A0-465B-6CBBA18444F7}"/>
+              </a:ext>
+            </a:extLst>
+          </p:cNvPr>
+          <p:cNvPicPr>
+            <a:picLocks noChangeAspect="1"/>
+          </p:cNvPicPr>
+          <p:nvPr/>
+        </p:nvPicPr>
+        <p:blipFill>
+          <a:blip r:embed="rId3">
+            <a:extLst>
+              <a:ext uri="{28A0092B-C50C-407E-A947-70E740481C1C}">
+                <a14:useLocalDpi xmlns:a14="http://schemas.microsoft.com/office/drawing/2010/main" val="0"/>
+              </a:ext>
+            </a:extLst>
+          </a:blip>
+          <a:stretch>
+            <a:fillRect/>
+          </a:stretch>
+        </p:blipFill>
+        <p:spPr>
+          <a:xfrm>
+            <a:off x="8256174" y="2037779"/>
+            <a:ext cx="3097626" cy="3097626"/>
+          </a:xfrm>
+          <a:prstGeom prst="rect">
+            <a:avLst/>
+          </a:prstGeom>
+        </p:spPr>
+      </p:pic>
+      <p:pic>
+        <p:nvPicPr>
+          <p:cNvPr id="7" name="Picture 2" descr="카카오톡 - 나무위키">
+            <a:extLst>
+              <a:ext uri="{FF2B5EF4-FFF2-40B4-BE49-F238E27FC236}">
+                <a16:creationId xmlns:a16="http://schemas.microsoft.com/office/drawing/2014/main" id="{44B1E52C-E960-8C77-9CD0-02796D5B9DD1}"/>
               </a:ext>
             </a:extLst>
           </p:cNvPr>
@@ -16651,7 +15865,7 @@
           <p:nvPr/>
         </p:nvPicPr>
         <p:blipFill>
-          <a:blip r:embed="rId5">
+          <a:blip r:embed="rId4">
             <a:extLst>
               <a:ext uri="{28A0092B-C50C-407E-A947-70E740481C1C}">
                 <a14:useLocalDpi xmlns:a14="http://schemas.microsoft.com/office/drawing/2010/main" val="0"/>
@@ -16665,8 +15879,8 @@
         </p:blipFill>
         <p:spPr bwMode="auto">
           <a:xfrm>
-            <a:off x="600075" y="529897"/>
-            <a:ext cx="1243473" cy="1243473"/>
+            <a:off x="4097452" y="1846436"/>
+            <a:ext cx="311661" cy="311661"/>
           </a:xfrm>
           <a:prstGeom prst="rect">
             <a:avLst/>
@@ -16685,10 +15899,10 @@
       </p:pic>
       <p:pic>
         <p:nvPicPr>
-          <p:cNvPr id="3076" name="Picture 4" descr="슬랙이 카카오톡보다 좋은 이유. 주로 IT기업과 스타트업들을 중심으로, 기업용 메신저 서비스인 슬랙… | by 진민규의 마케팅/Tech  이야기 | Medium">
-            <a:extLst>
-              <a:ext uri="{FF2B5EF4-FFF2-40B4-BE49-F238E27FC236}">
-                <a16:creationId xmlns:a16="http://schemas.microsoft.com/office/drawing/2014/main" id="{E572D70F-131F-29B8-7969-96253BC8AD59}"/>
+          <p:cNvPr id="1026" name="Picture 2" descr="Logo | Slack brand center">
+            <a:extLst>
+              <a:ext uri="{FF2B5EF4-FFF2-40B4-BE49-F238E27FC236}">
+                <a16:creationId xmlns:a16="http://schemas.microsoft.com/office/drawing/2014/main" id="{82443895-FA81-D07B-F308-9D30FF052087}"/>
               </a:ext>
             </a:extLst>
           </p:cNvPr>
@@ -16697,23 +15911,21 @@
           </p:cNvPicPr>
           <p:nvPr/>
         </p:nvPicPr>
-        <p:blipFill>
-          <a:blip r:embed="rId6">
+        <p:blipFill rotWithShape="1">
+          <a:blip r:embed="rId5">
             <a:extLst>
               <a:ext uri="{28A0092B-C50C-407E-A947-70E740481C1C}">
                 <a14:useLocalDpi xmlns:a14="http://schemas.microsoft.com/office/drawing/2010/main" val="0"/>
               </a:ext>
             </a:extLst>
           </a:blip>
-          <a:srcRect/>
-          <a:stretch>
-            <a:fillRect/>
-          </a:stretch>
+          <a:srcRect l="21163" t="20971" r="18500" b="20258"/>
+          <a:stretch/>
         </p:blipFill>
         <p:spPr bwMode="auto">
           <a:xfrm>
-            <a:off x="600075" y="3249359"/>
-            <a:ext cx="2975760" cy="1243473"/>
+            <a:off x="1920124" y="3941686"/>
+            <a:ext cx="344232" cy="335296"/>
           </a:xfrm>
           <a:prstGeom prst="rect">
             <a:avLst/>
@@ -16730,604 +15942,10 @@
           </a:extLst>
         </p:spPr>
       </p:pic>
-      <p:sp>
-        <p:nvSpPr>
-          <p:cNvPr id="10" name="내용 개체 틀 2">
-            <a:extLst>
-              <a:ext uri="{FF2B5EF4-FFF2-40B4-BE49-F238E27FC236}">
-                <a16:creationId xmlns:a16="http://schemas.microsoft.com/office/drawing/2014/main" id="{1FC8EF8F-BAED-BC90-22CA-C6F655C3EC37}"/>
-              </a:ext>
-            </a:extLst>
-          </p:cNvPr>
-          <p:cNvSpPr txBox="1">
-            <a:spLocks/>
-          </p:cNvSpPr>
-          <p:nvPr/>
-        </p:nvSpPr>
-        <p:spPr>
-          <a:xfrm>
-            <a:off x="3575836" y="3395463"/>
-            <a:ext cx="8355609" cy="2872870"/>
-          </a:xfrm>
-          <a:prstGeom prst="rect">
-            <a:avLst/>
-          </a:prstGeom>
-        </p:spPr>
-        <p:txBody>
-          <a:bodyPr vert="horz" lIns="91440" tIns="45720" rIns="91440" bIns="45720" rtlCol="0">
-            <a:normAutofit/>
-          </a:bodyPr>
-          <a:lstStyle>
-            <a:lvl1pPr marL="228600" indent="-228600" algn="l" defTabSz="914400" rtl="0" eaLnBrk="1" latinLnBrk="1" hangingPunct="1">
-              <a:lnSpc>
-                <a:spcPct val="90000"/>
-              </a:lnSpc>
-              <a:spcBef>
-                <a:spcPts val="1000"/>
-              </a:spcBef>
-              <a:buFont typeface="Arial" panose="020B0604020202020204" pitchFamily="34" charset="0"/>
-              <a:buChar char="•"/>
-              <a:defRPr sz="2800" kern="1200">
-                <a:solidFill>
-                  <a:schemeClr val="tx1"/>
-                </a:solidFill>
-                <a:latin typeface="+mn-lt"/>
-                <a:ea typeface="+mn-ea"/>
-                <a:cs typeface="+mn-cs"/>
-              </a:defRPr>
-            </a:lvl1pPr>
-            <a:lvl2pPr marL="685800" indent="-228600" algn="l" defTabSz="914400" rtl="0" eaLnBrk="1" latinLnBrk="1" hangingPunct="1">
-              <a:lnSpc>
-                <a:spcPct val="90000"/>
-              </a:lnSpc>
-              <a:spcBef>
-                <a:spcPts val="500"/>
-              </a:spcBef>
-              <a:buFont typeface="Arial" panose="020B0604020202020204" pitchFamily="34" charset="0"/>
-              <a:buChar char="•"/>
-              <a:defRPr sz="2400" kern="1200">
-                <a:solidFill>
-                  <a:schemeClr val="tx1"/>
-                </a:solidFill>
-                <a:latin typeface="+mn-lt"/>
-                <a:ea typeface="+mn-ea"/>
-                <a:cs typeface="+mn-cs"/>
-              </a:defRPr>
-            </a:lvl2pPr>
-            <a:lvl3pPr marL="1143000" indent="-228600" algn="l" defTabSz="914400" rtl="0" eaLnBrk="1" latinLnBrk="1" hangingPunct="1">
-              <a:lnSpc>
-                <a:spcPct val="90000"/>
-              </a:lnSpc>
-              <a:spcBef>
-                <a:spcPts val="500"/>
-              </a:spcBef>
-              <a:buFont typeface="Arial" panose="020B0604020202020204" pitchFamily="34" charset="0"/>
-              <a:buChar char="•"/>
-              <a:defRPr sz="2000" kern="1200">
-                <a:solidFill>
-                  <a:schemeClr val="tx1"/>
-                </a:solidFill>
-                <a:latin typeface="+mn-lt"/>
-                <a:ea typeface="+mn-ea"/>
-                <a:cs typeface="+mn-cs"/>
-              </a:defRPr>
-            </a:lvl3pPr>
-            <a:lvl4pPr marL="1600200" indent="-228600" algn="l" defTabSz="914400" rtl="0" eaLnBrk="1" latinLnBrk="1" hangingPunct="1">
-              <a:lnSpc>
-                <a:spcPct val="90000"/>
-              </a:lnSpc>
-              <a:spcBef>
-                <a:spcPts val="500"/>
-              </a:spcBef>
-              <a:buFont typeface="Arial" panose="020B0604020202020204" pitchFamily="34" charset="0"/>
-              <a:buChar char="•"/>
-              <a:defRPr sz="1800" kern="1200">
-                <a:solidFill>
-                  <a:schemeClr val="tx1"/>
-                </a:solidFill>
-                <a:latin typeface="+mn-lt"/>
-                <a:ea typeface="+mn-ea"/>
-                <a:cs typeface="+mn-cs"/>
-              </a:defRPr>
-            </a:lvl4pPr>
-            <a:lvl5pPr marL="2057400" indent="-228600" algn="l" defTabSz="914400" rtl="0" eaLnBrk="1" latinLnBrk="1" hangingPunct="1">
-              <a:lnSpc>
-                <a:spcPct val="90000"/>
-              </a:lnSpc>
-              <a:spcBef>
-                <a:spcPts val="500"/>
-              </a:spcBef>
-              <a:buFont typeface="Arial" panose="020B0604020202020204" pitchFamily="34" charset="0"/>
-              <a:buChar char="•"/>
-              <a:defRPr sz="1800" kern="1200">
-                <a:solidFill>
-                  <a:schemeClr val="tx1"/>
-                </a:solidFill>
-                <a:latin typeface="+mn-lt"/>
-                <a:ea typeface="+mn-ea"/>
-                <a:cs typeface="+mn-cs"/>
-              </a:defRPr>
-            </a:lvl5pPr>
-            <a:lvl6pPr marL="2514600" indent="-228600" algn="l" defTabSz="914400" rtl="0" eaLnBrk="1" latinLnBrk="1" hangingPunct="1">
-              <a:lnSpc>
-                <a:spcPct val="90000"/>
-              </a:lnSpc>
-              <a:spcBef>
-                <a:spcPts val="500"/>
-              </a:spcBef>
-              <a:buFont typeface="Arial" panose="020B0604020202020204" pitchFamily="34" charset="0"/>
-              <a:buChar char="•"/>
-              <a:defRPr sz="1800" kern="1200">
-                <a:solidFill>
-                  <a:schemeClr val="tx1"/>
-                </a:solidFill>
-                <a:latin typeface="+mn-lt"/>
-                <a:ea typeface="+mn-ea"/>
-                <a:cs typeface="+mn-cs"/>
-              </a:defRPr>
-            </a:lvl6pPr>
-            <a:lvl7pPr marL="2971800" indent="-228600" algn="l" defTabSz="914400" rtl="0" eaLnBrk="1" latinLnBrk="1" hangingPunct="1">
-              <a:lnSpc>
-                <a:spcPct val="90000"/>
-              </a:lnSpc>
-              <a:spcBef>
-                <a:spcPts val="500"/>
-              </a:spcBef>
-              <a:buFont typeface="Arial" panose="020B0604020202020204" pitchFamily="34" charset="0"/>
-              <a:buChar char="•"/>
-              <a:defRPr sz="1800" kern="1200">
-                <a:solidFill>
-                  <a:schemeClr val="tx1"/>
-                </a:solidFill>
-                <a:latin typeface="+mn-lt"/>
-                <a:ea typeface="+mn-ea"/>
-                <a:cs typeface="+mn-cs"/>
-              </a:defRPr>
-            </a:lvl7pPr>
-            <a:lvl8pPr marL="3429000" indent="-228600" algn="l" defTabSz="914400" rtl="0" eaLnBrk="1" latinLnBrk="1" hangingPunct="1">
-              <a:lnSpc>
-                <a:spcPct val="90000"/>
-              </a:lnSpc>
-              <a:spcBef>
-                <a:spcPts val="500"/>
-              </a:spcBef>
-              <a:buFont typeface="Arial" panose="020B0604020202020204" pitchFamily="34" charset="0"/>
-              <a:buChar char="•"/>
-              <a:defRPr sz="1800" kern="1200">
-                <a:solidFill>
-                  <a:schemeClr val="tx1"/>
-                </a:solidFill>
-                <a:latin typeface="+mn-lt"/>
-                <a:ea typeface="+mn-ea"/>
-                <a:cs typeface="+mn-cs"/>
-              </a:defRPr>
-            </a:lvl8pPr>
-            <a:lvl9pPr marL="3886200" indent="-228600" algn="l" defTabSz="914400" rtl="0" eaLnBrk="1" latinLnBrk="1" hangingPunct="1">
-              <a:lnSpc>
-                <a:spcPct val="90000"/>
-              </a:lnSpc>
-              <a:spcBef>
-                <a:spcPts val="500"/>
-              </a:spcBef>
-              <a:buFont typeface="Arial" panose="020B0604020202020204" pitchFamily="34" charset="0"/>
-              <a:buChar char="•"/>
-              <a:defRPr sz="1800" kern="1200">
-                <a:solidFill>
-                  <a:schemeClr val="tx1"/>
-                </a:solidFill>
-                <a:latin typeface="+mn-lt"/>
-                <a:ea typeface="+mn-ea"/>
-                <a:cs typeface="+mn-cs"/>
-              </a:defRPr>
-            </a:lvl9pPr>
-          </a:lstStyle>
-          <a:p>
-            <a:pPr marL="0" indent="0">
-              <a:buFont typeface="Arial" panose="020B0604020202020204" pitchFamily="34" charset="0"/>
-              <a:buNone/>
-            </a:pPr>
-            <a:r>
-              <a:rPr lang="en-US" altLang="ko-KR" b="1" dirty="0">
-                <a:solidFill>
-                  <a:srgbClr val="6EC173"/>
-                </a:solidFill>
-              </a:rPr>
-              <a:t>Slack</a:t>
-            </a:r>
-          </a:p>
-          <a:p>
-            <a:pPr>
-              <a:buFontTx/>
-              <a:buChar char="-"/>
-            </a:pPr>
-            <a:r>
-              <a:rPr lang="ko-KR" altLang="en-US" sz="2000" dirty="0"/>
-              <a:t>목적 </a:t>
-            </a:r>
-            <a:r>
-              <a:rPr lang="en-US" altLang="ko-KR" sz="2000" dirty="0"/>
-              <a:t>1: </a:t>
-            </a:r>
-            <a:r>
-              <a:rPr lang="ko-KR" altLang="en-US" sz="2000" dirty="0"/>
-              <a:t>수업 중 링크</a:t>
-            </a:r>
-            <a:r>
-              <a:rPr lang="en-US" altLang="ko-KR" sz="2000" dirty="0"/>
-              <a:t>, </a:t>
-            </a:r>
-            <a:r>
-              <a:rPr lang="ko-KR" altLang="en-US" sz="2000" dirty="0"/>
-              <a:t>이미지</a:t>
-            </a:r>
-            <a:r>
-              <a:rPr lang="en-US" altLang="ko-KR" sz="2000" dirty="0"/>
-              <a:t>, </a:t>
-            </a:r>
-            <a:r>
-              <a:rPr lang="ko-KR" altLang="en-US" sz="2000" dirty="0"/>
-              <a:t>코드 공유 목적 </a:t>
-            </a:r>
-            <a:endParaRPr lang="en-US" altLang="ko-KR" sz="2000" dirty="0"/>
-          </a:p>
-          <a:p>
-            <a:pPr>
-              <a:buFontTx/>
-              <a:buChar char="-"/>
-            </a:pPr>
-            <a:r>
-              <a:rPr lang="ko-KR" altLang="en-US" sz="2000" dirty="0"/>
-              <a:t>목적 </a:t>
-            </a:r>
-            <a:r>
-              <a:rPr lang="en-US" altLang="ko-KR" sz="2000" dirty="0"/>
-              <a:t>2: </a:t>
-            </a:r>
-            <a:r>
-              <a:rPr lang="ko-KR" altLang="en-US" sz="2000" dirty="0"/>
-              <a:t>과제 제출</a:t>
-            </a:r>
-            <a:endParaRPr lang="en-US" altLang="ko-KR" sz="2000" dirty="0">
-              <a:hlinkClick r:id="rId7"/>
-            </a:endParaRPr>
-          </a:p>
-          <a:p>
-            <a:pPr>
-              <a:buFontTx/>
-              <a:buChar char="-"/>
-            </a:pPr>
-            <a:r>
-              <a:rPr lang="en-US" altLang="ko-KR" sz="2000" dirty="0">
-                <a:hlinkClick r:id="rId8"/>
-              </a:rPr>
-              <a:t>https://join.slack.com/t/slack-zfd4180/shared_invite/zt-2ihd0ol41-Gp53lC2FtLVwjYkia0FP8g</a:t>
-            </a:r>
-            <a:endParaRPr lang="en-US" altLang="ko-KR" sz="2000" dirty="0"/>
-          </a:p>
-          <a:p>
-            <a:pPr>
-              <a:buFontTx/>
-              <a:buChar char="-"/>
-            </a:pPr>
-            <a:r>
-              <a:rPr lang="ko-KR" altLang="en-US" sz="2000" dirty="0"/>
-              <a:t>오픈채팅방 공지의 </a:t>
-            </a:r>
-            <a:r>
-              <a:rPr lang="ko-KR" altLang="en-US" sz="2000" dirty="0" err="1"/>
-              <a:t>슬랙</a:t>
-            </a:r>
-            <a:r>
-              <a:rPr lang="ko-KR" altLang="en-US" sz="2000" dirty="0"/>
-              <a:t> 링크 이용하기</a:t>
-            </a:r>
-            <a:endParaRPr lang="en-US" altLang="ko-KR" sz="2000" dirty="0"/>
-          </a:p>
-          <a:p>
-            <a:pPr>
-              <a:buFontTx/>
-              <a:buChar char="-"/>
-            </a:pPr>
-            <a:r>
-              <a:rPr lang="ko-KR" altLang="en-US" sz="2000" dirty="0"/>
-              <a:t>닉네임 </a:t>
-            </a:r>
-            <a:r>
-              <a:rPr lang="en-US" altLang="ko-KR" sz="2000" dirty="0"/>
-              <a:t>: </a:t>
-            </a:r>
-            <a:r>
-              <a:rPr lang="en-US" altLang="ko-KR" sz="2000" b="1" dirty="0"/>
-              <a:t>SeSAC_6YDP_</a:t>
-            </a:r>
-            <a:r>
-              <a:rPr lang="ko-KR" altLang="en-US" sz="2000" b="1" dirty="0"/>
-              <a:t>본명 </a:t>
-            </a:r>
-            <a:r>
-              <a:rPr lang="en-US" altLang="ko-KR" sz="2000" b="1" dirty="0"/>
-              <a:t>(ex. SeSAC_6YDP_</a:t>
-            </a:r>
-            <a:r>
-              <a:rPr lang="ko-KR" altLang="en-US" sz="2000" b="1" dirty="0"/>
-              <a:t>홍길동</a:t>
-            </a:r>
-            <a:r>
-              <a:rPr lang="en-US" altLang="ko-KR" sz="2000" b="1" dirty="0"/>
-              <a:t>)</a:t>
-            </a:r>
-            <a:endParaRPr lang="ko-KR" altLang="en-US" sz="2000" b="1" dirty="0"/>
-          </a:p>
-        </p:txBody>
-      </p:sp>
-      <p:sp>
-        <p:nvSpPr>
-          <p:cNvPr id="8" name="내용 개체 틀 2">
-            <a:extLst>
-              <a:ext uri="{FF2B5EF4-FFF2-40B4-BE49-F238E27FC236}">
-                <a16:creationId xmlns:a16="http://schemas.microsoft.com/office/drawing/2014/main" id="{3F9ED3E5-A219-97C8-062A-00AB8DE418A5}"/>
-              </a:ext>
-            </a:extLst>
-          </p:cNvPr>
-          <p:cNvSpPr txBox="1">
-            <a:spLocks/>
-          </p:cNvSpPr>
-          <p:nvPr/>
-        </p:nvSpPr>
-        <p:spPr>
-          <a:xfrm>
-            <a:off x="6320790" y="3475094"/>
-            <a:ext cx="5271135" cy="365125"/>
-          </a:xfrm>
-          <a:prstGeom prst="rect">
-            <a:avLst/>
-          </a:prstGeom>
-        </p:spPr>
-        <p:txBody>
-          <a:bodyPr vert="horz" lIns="91440" tIns="45720" rIns="91440" bIns="45720" rtlCol="0">
-            <a:normAutofit fontScale="77500" lnSpcReduction="20000"/>
-          </a:bodyPr>
-          <a:lstStyle>
-            <a:lvl1pPr marL="228600" indent="-228600" algn="l" defTabSz="914400" rtl="0" eaLnBrk="1" latinLnBrk="1" hangingPunct="1">
-              <a:lnSpc>
-                <a:spcPct val="90000"/>
-              </a:lnSpc>
-              <a:spcBef>
-                <a:spcPts val="1000"/>
-              </a:spcBef>
-              <a:buFont typeface="Arial" panose="020B0604020202020204" pitchFamily="34" charset="0"/>
-              <a:buChar char="•"/>
-              <a:defRPr sz="2800" kern="1200">
-                <a:solidFill>
-                  <a:schemeClr val="tx1"/>
-                </a:solidFill>
-                <a:latin typeface="+mn-lt"/>
-                <a:ea typeface="+mn-ea"/>
-                <a:cs typeface="+mn-cs"/>
-              </a:defRPr>
-            </a:lvl1pPr>
-            <a:lvl2pPr marL="685800" indent="-228600" algn="l" defTabSz="914400" rtl="0" eaLnBrk="1" latinLnBrk="1" hangingPunct="1">
-              <a:lnSpc>
-                <a:spcPct val="90000"/>
-              </a:lnSpc>
-              <a:spcBef>
-                <a:spcPts val="500"/>
-              </a:spcBef>
-              <a:buFont typeface="Arial" panose="020B0604020202020204" pitchFamily="34" charset="0"/>
-              <a:buChar char="•"/>
-              <a:defRPr sz="2400" kern="1200">
-                <a:solidFill>
-                  <a:schemeClr val="tx1"/>
-                </a:solidFill>
-                <a:latin typeface="+mn-lt"/>
-                <a:ea typeface="+mn-ea"/>
-                <a:cs typeface="+mn-cs"/>
-              </a:defRPr>
-            </a:lvl2pPr>
-            <a:lvl3pPr marL="1143000" indent="-228600" algn="l" defTabSz="914400" rtl="0" eaLnBrk="1" latinLnBrk="1" hangingPunct="1">
-              <a:lnSpc>
-                <a:spcPct val="90000"/>
-              </a:lnSpc>
-              <a:spcBef>
-                <a:spcPts val="500"/>
-              </a:spcBef>
-              <a:buFont typeface="Arial" panose="020B0604020202020204" pitchFamily="34" charset="0"/>
-              <a:buChar char="•"/>
-              <a:defRPr sz="2000" kern="1200">
-                <a:solidFill>
-                  <a:schemeClr val="tx1"/>
-                </a:solidFill>
-                <a:latin typeface="+mn-lt"/>
-                <a:ea typeface="+mn-ea"/>
-                <a:cs typeface="+mn-cs"/>
-              </a:defRPr>
-            </a:lvl3pPr>
-            <a:lvl4pPr marL="1600200" indent="-228600" algn="l" defTabSz="914400" rtl="0" eaLnBrk="1" latinLnBrk="1" hangingPunct="1">
-              <a:lnSpc>
-                <a:spcPct val="90000"/>
-              </a:lnSpc>
-              <a:spcBef>
-                <a:spcPts val="500"/>
-              </a:spcBef>
-              <a:buFont typeface="Arial" panose="020B0604020202020204" pitchFamily="34" charset="0"/>
-              <a:buChar char="•"/>
-              <a:defRPr sz="1800" kern="1200">
-                <a:solidFill>
-                  <a:schemeClr val="tx1"/>
-                </a:solidFill>
-                <a:latin typeface="+mn-lt"/>
-                <a:ea typeface="+mn-ea"/>
-                <a:cs typeface="+mn-cs"/>
-              </a:defRPr>
-            </a:lvl4pPr>
-            <a:lvl5pPr marL="2057400" indent="-228600" algn="l" defTabSz="914400" rtl="0" eaLnBrk="1" latinLnBrk="1" hangingPunct="1">
-              <a:lnSpc>
-                <a:spcPct val="90000"/>
-              </a:lnSpc>
-              <a:spcBef>
-                <a:spcPts val="500"/>
-              </a:spcBef>
-              <a:buFont typeface="Arial" panose="020B0604020202020204" pitchFamily="34" charset="0"/>
-              <a:buChar char="•"/>
-              <a:defRPr sz="1800" kern="1200">
-                <a:solidFill>
-                  <a:schemeClr val="tx1"/>
-                </a:solidFill>
-                <a:latin typeface="+mn-lt"/>
-                <a:ea typeface="+mn-ea"/>
-                <a:cs typeface="+mn-cs"/>
-              </a:defRPr>
-            </a:lvl5pPr>
-            <a:lvl6pPr marL="2514600" indent="-228600" algn="l" defTabSz="914400" rtl="0" eaLnBrk="1" latinLnBrk="1" hangingPunct="1">
-              <a:lnSpc>
-                <a:spcPct val="90000"/>
-              </a:lnSpc>
-              <a:spcBef>
-                <a:spcPts val="500"/>
-              </a:spcBef>
-              <a:buFont typeface="Arial" panose="020B0604020202020204" pitchFamily="34" charset="0"/>
-              <a:buChar char="•"/>
-              <a:defRPr sz="1800" kern="1200">
-                <a:solidFill>
-                  <a:schemeClr val="tx1"/>
-                </a:solidFill>
-                <a:latin typeface="+mn-lt"/>
-                <a:ea typeface="+mn-ea"/>
-                <a:cs typeface="+mn-cs"/>
-              </a:defRPr>
-            </a:lvl6pPr>
-            <a:lvl7pPr marL="2971800" indent="-228600" algn="l" defTabSz="914400" rtl="0" eaLnBrk="1" latinLnBrk="1" hangingPunct="1">
-              <a:lnSpc>
-                <a:spcPct val="90000"/>
-              </a:lnSpc>
-              <a:spcBef>
-                <a:spcPts val="500"/>
-              </a:spcBef>
-              <a:buFont typeface="Arial" panose="020B0604020202020204" pitchFamily="34" charset="0"/>
-              <a:buChar char="•"/>
-              <a:defRPr sz="1800" kern="1200">
-                <a:solidFill>
-                  <a:schemeClr val="tx1"/>
-                </a:solidFill>
-                <a:latin typeface="+mn-lt"/>
-                <a:ea typeface="+mn-ea"/>
-                <a:cs typeface="+mn-cs"/>
-              </a:defRPr>
-            </a:lvl7pPr>
-            <a:lvl8pPr marL="3429000" indent="-228600" algn="l" defTabSz="914400" rtl="0" eaLnBrk="1" latinLnBrk="1" hangingPunct="1">
-              <a:lnSpc>
-                <a:spcPct val="90000"/>
-              </a:lnSpc>
-              <a:spcBef>
-                <a:spcPts val="500"/>
-              </a:spcBef>
-              <a:buFont typeface="Arial" panose="020B0604020202020204" pitchFamily="34" charset="0"/>
-              <a:buChar char="•"/>
-              <a:defRPr sz="1800" kern="1200">
-                <a:solidFill>
-                  <a:schemeClr val="tx1"/>
-                </a:solidFill>
-                <a:latin typeface="+mn-lt"/>
-                <a:ea typeface="+mn-ea"/>
-                <a:cs typeface="+mn-cs"/>
-              </a:defRPr>
-            </a:lvl8pPr>
-            <a:lvl9pPr marL="3886200" indent="-228600" algn="l" defTabSz="914400" rtl="0" eaLnBrk="1" latinLnBrk="1" hangingPunct="1">
-              <a:lnSpc>
-                <a:spcPct val="90000"/>
-              </a:lnSpc>
-              <a:spcBef>
-                <a:spcPts val="500"/>
-              </a:spcBef>
-              <a:buFont typeface="Arial" panose="020B0604020202020204" pitchFamily="34" charset="0"/>
-              <a:buChar char="•"/>
-              <a:defRPr sz="1800" kern="1200">
-                <a:solidFill>
-                  <a:schemeClr val="tx1"/>
-                </a:solidFill>
-                <a:latin typeface="+mn-lt"/>
-                <a:ea typeface="+mn-ea"/>
-                <a:cs typeface="+mn-cs"/>
-              </a:defRPr>
-            </a:lvl9pPr>
-          </a:lstStyle>
-          <a:p>
-            <a:pPr marL="0" indent="0" algn="r">
-              <a:buFont typeface="Arial" panose="020B0604020202020204" pitchFamily="34" charset="0"/>
-              <a:buNone/>
-            </a:pPr>
-            <a:r>
-              <a:rPr lang="en-US" altLang="ko-KR" sz="2000" dirty="0">
-                <a:solidFill>
-                  <a:srgbClr val="6EC173"/>
-                </a:solidFill>
-              </a:rPr>
-              <a:t>*Slack </a:t>
-            </a:r>
-            <a:r>
-              <a:rPr lang="ko-KR" altLang="en-US" sz="2000" dirty="0">
-                <a:solidFill>
-                  <a:srgbClr val="6EC173"/>
-                </a:solidFill>
-              </a:rPr>
-              <a:t>초대 링크는 오픈채팅방 공지에서 확인해주세요</a:t>
-            </a:r>
-            <a:r>
-              <a:rPr lang="en-US" altLang="ko-KR" sz="2000" dirty="0">
-                <a:solidFill>
-                  <a:srgbClr val="6EC173"/>
-                </a:solidFill>
-              </a:rPr>
-              <a:t>!</a:t>
-            </a:r>
-            <a:endParaRPr lang="ko-KR" altLang="en-US" sz="2000" dirty="0">
-              <a:solidFill>
-                <a:srgbClr val="6EC173"/>
-              </a:solidFill>
-            </a:endParaRPr>
-          </a:p>
-        </p:txBody>
-      </p:sp>
-      <p:pic>
-        <p:nvPicPr>
-          <p:cNvPr id="6" name="그림 5" descr="스크린샷, 그래픽, 패턴, 디자인이(가) 표시된 사진&#10;&#10;자동 생성된 설명">
-            <a:extLst>
-              <a:ext uri="{FF2B5EF4-FFF2-40B4-BE49-F238E27FC236}">
-                <a16:creationId xmlns:a16="http://schemas.microsoft.com/office/drawing/2014/main" id="{86876CD6-94CE-536B-2377-4544B877889D}"/>
-              </a:ext>
-            </a:extLst>
-          </p:cNvPr>
-          <p:cNvPicPr>
-            <a:picLocks noChangeAspect="1"/>
-          </p:cNvPicPr>
-          <p:nvPr/>
-        </p:nvPicPr>
-        <p:blipFill>
-          <a:blip r:embed="rId9">
-            <a:extLst>
-              <a:ext uri="{28A0092B-C50C-407E-A947-70E740481C1C}">
-                <a14:useLocalDpi xmlns:a14="http://schemas.microsoft.com/office/drawing/2010/main" val="0"/>
-              </a:ext>
-            </a:extLst>
-          </a:blip>
-          <a:stretch>
-            <a:fillRect/>
-          </a:stretch>
-        </p:blipFill>
-        <p:spPr>
-          <a:xfrm>
-            <a:off x="9226757" y="446209"/>
-            <a:ext cx="2365168" cy="2365168"/>
-          </a:xfrm>
-          <a:prstGeom prst="rect">
-            <a:avLst/>
-          </a:prstGeom>
-        </p:spPr>
-      </p:pic>
     </p:spTree>
     <p:extLst>
       <p:ext uri="{BB962C8B-B14F-4D97-AF65-F5344CB8AC3E}">
-        <p14:creationId xmlns:p14="http://schemas.microsoft.com/office/powerpoint/2010/main" val="2728369097"/>
+        <p14:creationId xmlns:p14="http://schemas.microsoft.com/office/powerpoint/2010/main" val="1174022269"/>
       </p:ext>
     </p:extLst>
   </p:cSld>
@@ -17356,75 +15974,10 @@
       </p:grpSpPr>
       <p:sp>
         <p:nvSpPr>
-          <p:cNvPr id="3" name="내용 개체 틀 2">
-            <a:extLst>
-              <a:ext uri="{FF2B5EF4-FFF2-40B4-BE49-F238E27FC236}">
-                <a16:creationId xmlns:a16="http://schemas.microsoft.com/office/drawing/2014/main" id="{778DA50E-46BE-CF53-0A8C-618613D63298}"/>
-              </a:ext>
-            </a:extLst>
-          </p:cNvPr>
-          <p:cNvSpPr>
-            <a:spLocks noGrp="1"/>
-          </p:cNvSpPr>
-          <p:nvPr>
-            <p:ph idx="1"/>
-          </p:nvPr>
-        </p:nvSpPr>
-        <p:spPr>
-          <a:xfrm>
-            <a:off x="3927253" y="862072"/>
-            <a:ext cx="7620000" cy="2067950"/>
-          </a:xfrm>
-        </p:spPr>
-        <p:txBody>
-          <a:bodyPr>
-            <a:normAutofit/>
-          </a:bodyPr>
-          <a:lstStyle/>
-          <a:p>
-            <a:pPr marL="0" indent="0">
-              <a:buNone/>
-            </a:pPr>
-            <a:r>
-              <a:rPr lang="ko-KR" altLang="en-US" sz="3200" dirty="0"/>
-              <a:t>나눠드린 서류 작성 및 사인 후 </a:t>
-            </a:r>
-            <a:endParaRPr lang="en-US" altLang="ko-KR" sz="3200" dirty="0">
-              <a:highlight>
-                <a:srgbClr val="FFFF00"/>
-              </a:highlight>
-            </a:endParaRPr>
-          </a:p>
-          <a:p>
-            <a:pPr marL="0" indent="0">
-              <a:buNone/>
-            </a:pPr>
-            <a:r>
-              <a:rPr lang="ko-KR" altLang="en-US" sz="3200" dirty="0">
-                <a:highlight>
-                  <a:srgbClr val="FFFF00"/>
-                </a:highlight>
-              </a:rPr>
-              <a:t>주민등록등본</a:t>
-            </a:r>
-            <a:r>
-              <a:rPr lang="ko-KR" altLang="en-US" sz="3200" dirty="0"/>
-              <a:t>과 함께 앞으로 나와주세요</a:t>
-            </a:r>
-            <a:r>
-              <a:rPr lang="en-US" altLang="ko-KR" sz="3200" dirty="0"/>
-              <a:t>.</a:t>
-            </a:r>
-            <a:endParaRPr lang="ko-KR" altLang="en-US" sz="3200" dirty="0"/>
-          </a:p>
-        </p:txBody>
-      </p:sp>
-      <p:sp>
-        <p:nvSpPr>
-          <p:cNvPr id="4" name="날짜 개체 틀 3">
-            <a:extLst>
-              <a:ext uri="{FF2B5EF4-FFF2-40B4-BE49-F238E27FC236}">
-                <a16:creationId xmlns:a16="http://schemas.microsoft.com/office/drawing/2014/main" id="{2E26331B-CABB-6017-2C21-C0F1C619A754}"/>
+          <p:cNvPr id="3" name="날짜 개체 틀 2">
+            <a:extLst>
+              <a:ext uri="{FF2B5EF4-FFF2-40B4-BE49-F238E27FC236}">
+                <a16:creationId xmlns:a16="http://schemas.microsoft.com/office/drawing/2014/main" id="{2ADE279D-187D-FFC8-1BCF-39ED1039484B}"/>
               </a:ext>
             </a:extLst>
           </p:cNvPr>
@@ -17440,7 +15993,7 @@
           <a:bodyPr/>
           <a:lstStyle/>
           <a:p>
-            <a:fld id="{7BEE404C-78DB-4A99-8F6C-3F4C63B60495}" type="datetime6">
+            <a:fld id="{3C9CE3CE-253F-4F9D-BA15-C226C8D8501E}" type="datetime6">
               <a:rPr lang="ko-KR" altLang="en-US" smtClean="0"/>
               <a:t>2024년 5월</a:t>
             </a:fld>
@@ -17450,10 +16003,10 @@
       </p:sp>
       <p:sp>
         <p:nvSpPr>
-          <p:cNvPr id="5" name="슬라이드 번호 개체 틀 4">
-            <a:extLst>
-              <a:ext uri="{FF2B5EF4-FFF2-40B4-BE49-F238E27FC236}">
-                <a16:creationId xmlns:a16="http://schemas.microsoft.com/office/drawing/2014/main" id="{A3ED05A6-B83A-CBAB-2B32-CC051A92A714}"/>
+          <p:cNvPr id="4" name="슬라이드 번호 개체 틀 3">
+            <a:extLst>
+              <a:ext uri="{FF2B5EF4-FFF2-40B4-BE49-F238E27FC236}">
+                <a16:creationId xmlns:a16="http://schemas.microsoft.com/office/drawing/2014/main" id="{C65620E2-371F-92B9-8FFF-EEF653C30865}"/>
               </a:ext>
             </a:extLst>
           </p:cNvPr>
@@ -17477,12 +16030,70 @@
           </a:p>
         </p:txBody>
       </p:sp>
+      <p:sp>
+        <p:nvSpPr>
+          <p:cNvPr id="5" name="제목 4">
+            <a:extLst>
+              <a:ext uri="{FF2B5EF4-FFF2-40B4-BE49-F238E27FC236}">
+                <a16:creationId xmlns:a16="http://schemas.microsoft.com/office/drawing/2014/main" id="{6CE51FDC-3006-5D10-684A-6BF04168043C}"/>
+              </a:ext>
+            </a:extLst>
+          </p:cNvPr>
+          <p:cNvSpPr>
+            <a:spLocks noGrp="1"/>
+          </p:cNvSpPr>
+          <p:nvPr>
+            <p:ph type="title"/>
+          </p:nvPr>
+        </p:nvSpPr>
+        <p:spPr/>
+        <p:txBody>
+          <a:bodyPr/>
+          <a:lstStyle/>
+          <a:p>
+            <a:r>
+              <a:rPr lang="ko-KR" altLang="en-US" dirty="0"/>
+              <a:t>확약서 서명 및 체크리스트 작성</a:t>
+            </a:r>
+          </a:p>
+        </p:txBody>
+      </p:sp>
       <p:pic>
         <p:nvPicPr>
           <p:cNvPr id="7" name="그림 6">
             <a:extLst>
               <a:ext uri="{FF2B5EF4-FFF2-40B4-BE49-F238E27FC236}">
-                <a16:creationId xmlns:a16="http://schemas.microsoft.com/office/drawing/2014/main" id="{63E9ED84-E3B3-51AF-ED77-58388293AA68}"/>
+                <a16:creationId xmlns:a16="http://schemas.microsoft.com/office/drawing/2014/main" id="{020B9F45-0BCE-4FFF-D576-1A68CF8A4E16}"/>
+              </a:ext>
+            </a:extLst>
+          </p:cNvPr>
+          <p:cNvPicPr>
+            <a:picLocks noChangeAspect="1"/>
+          </p:cNvPicPr>
+          <p:nvPr/>
+        </p:nvPicPr>
+        <p:blipFill>
+          <a:blip r:embed="rId2"/>
+          <a:stretch>
+            <a:fillRect/>
+          </a:stretch>
+        </p:blipFill>
+        <p:spPr>
+          <a:xfrm>
+            <a:off x="1486673" y="1539241"/>
+            <a:ext cx="3257805" cy="4526687"/>
+          </a:xfrm>
+          <a:prstGeom prst="rect">
+            <a:avLst/>
+          </a:prstGeom>
+        </p:spPr>
+      </p:pic>
+      <p:pic>
+        <p:nvPicPr>
+          <p:cNvPr id="13" name="그림 12">
+            <a:extLst>
+              <a:ext uri="{FF2B5EF4-FFF2-40B4-BE49-F238E27FC236}">
+                <a16:creationId xmlns:a16="http://schemas.microsoft.com/office/drawing/2014/main" id="{19362997-968B-2B22-074F-738C5AC2819E}"/>
               </a:ext>
             </a:extLst>
           </p:cNvPr>
@@ -17499,8 +16110,8 @@
         </p:blipFill>
         <p:spPr>
           <a:xfrm>
-            <a:off x="526506" y="579937"/>
-            <a:ext cx="3086367" cy="4130398"/>
+            <a:off x="7827195" y="1206765"/>
+            <a:ext cx="3425520" cy="4859163"/>
           </a:xfrm>
           <a:prstGeom prst="rect">
             <a:avLst/>
@@ -17512,7 +16123,7 @@
           <p:cNvPr id="9" name="그림 8">
             <a:extLst>
               <a:ext uri="{FF2B5EF4-FFF2-40B4-BE49-F238E27FC236}">
-                <a16:creationId xmlns:a16="http://schemas.microsoft.com/office/drawing/2014/main" id="{E053626D-FA33-B101-68F5-6B3E6A6A0B31}"/>
+                <a16:creationId xmlns:a16="http://schemas.microsoft.com/office/drawing/2014/main" id="{AEC3B96B-E4B6-CA84-920F-DA215628233A}"/>
               </a:ext>
             </a:extLst>
           </p:cNvPr>
@@ -17529,38 +16140,8 @@
         </p:blipFill>
         <p:spPr>
           <a:xfrm>
-            <a:off x="6096000" y="2419804"/>
-            <a:ext cx="2462689" cy="3580620"/>
-          </a:xfrm>
-          <a:prstGeom prst="rect">
-            <a:avLst/>
-          </a:prstGeom>
-        </p:spPr>
-      </p:pic>
-      <p:pic>
-        <p:nvPicPr>
-          <p:cNvPr id="11" name="그림 10">
-            <a:extLst>
-              <a:ext uri="{FF2B5EF4-FFF2-40B4-BE49-F238E27FC236}">
-                <a16:creationId xmlns:a16="http://schemas.microsoft.com/office/drawing/2014/main" id="{86C85464-27FC-34E2-0B31-9C2D88905E0E}"/>
-              </a:ext>
-            </a:extLst>
-          </p:cNvPr>
-          <p:cNvPicPr>
-            <a:picLocks noChangeAspect="1"/>
-          </p:cNvPicPr>
-          <p:nvPr/>
-        </p:nvPicPr>
-        <p:blipFill>
-          <a:blip r:embed="rId5"/>
-          <a:stretch>
-            <a:fillRect/>
-          </a:stretch>
-        </p:blipFill>
-        <p:spPr>
-          <a:xfrm>
-            <a:off x="8809171" y="2645136"/>
-            <a:ext cx="2605840" cy="3598827"/>
+            <a:off x="5926351" y="1539554"/>
+            <a:ext cx="3175791" cy="4526687"/>
           </a:xfrm>
           <a:prstGeom prst="rect">
             <a:avLst/>
@@ -17570,7 +16151,7 @@
     </p:spTree>
     <p:extLst>
       <p:ext uri="{BB962C8B-B14F-4D97-AF65-F5344CB8AC3E}">
-        <p14:creationId xmlns:p14="http://schemas.microsoft.com/office/powerpoint/2010/main" val="3618666663"/>
+        <p14:creationId xmlns:p14="http://schemas.microsoft.com/office/powerpoint/2010/main" val="2191844993"/>
       </p:ext>
     </p:extLst>
   </p:cSld>

--- a/material/[SeSAC_YDP_6] 01_ot,git.pptx
+++ b/material/[SeSAC_YDP_6] 01_ot,git.pptx
@@ -5,10 +5,10 @@
     <p:sldMasterId id="2147483712" r:id="rId1"/>
   </p:sldMasterIdLst>
   <p:notesMasterIdLst>
-    <p:notesMasterId r:id="rId35"/>
+    <p:notesMasterId r:id="rId36"/>
   </p:notesMasterIdLst>
   <p:handoutMasterIdLst>
-    <p:handoutMasterId r:id="rId36"/>
+    <p:handoutMasterId r:id="rId37"/>
   </p:handoutMasterIdLst>
   <p:sldIdLst>
     <p:sldId id="675" r:id="rId2"/>
@@ -19,31 +19,32 @@
     <p:sldId id="275" r:id="rId7"/>
     <p:sldId id="678" r:id="rId8"/>
     <p:sldId id="691" r:id="rId9"/>
-    <p:sldId id="689" r:id="rId10"/>
-    <p:sldId id="687" r:id="rId11"/>
-    <p:sldId id="303" r:id="rId12"/>
-    <p:sldId id="679" r:id="rId13"/>
-    <p:sldId id="665" r:id="rId14"/>
-    <p:sldId id="291" r:id="rId15"/>
-    <p:sldId id="281" r:id="rId16"/>
-    <p:sldId id="686" r:id="rId17"/>
-    <p:sldId id="676" r:id="rId18"/>
-    <p:sldId id="269" r:id="rId19"/>
-    <p:sldId id="262" r:id="rId20"/>
-    <p:sldId id="664" r:id="rId21"/>
-    <p:sldId id="283" r:id="rId22"/>
-    <p:sldId id="271" r:id="rId23"/>
-    <p:sldId id="683" r:id="rId24"/>
-    <p:sldId id="682" r:id="rId25"/>
-    <p:sldId id="270" r:id="rId26"/>
-    <p:sldId id="284" r:id="rId27"/>
-    <p:sldId id="263" r:id="rId28"/>
-    <p:sldId id="684" r:id="rId29"/>
-    <p:sldId id="677" r:id="rId30"/>
-    <p:sldId id="685" r:id="rId31"/>
-    <p:sldId id="670" r:id="rId32"/>
-    <p:sldId id="671" r:id="rId33"/>
-    <p:sldId id="693" r:id="rId34"/>
+    <p:sldId id="694" r:id="rId10"/>
+    <p:sldId id="689" r:id="rId11"/>
+    <p:sldId id="687" r:id="rId12"/>
+    <p:sldId id="303" r:id="rId13"/>
+    <p:sldId id="679" r:id="rId14"/>
+    <p:sldId id="665" r:id="rId15"/>
+    <p:sldId id="291" r:id="rId16"/>
+    <p:sldId id="281" r:id="rId17"/>
+    <p:sldId id="686" r:id="rId18"/>
+    <p:sldId id="676" r:id="rId19"/>
+    <p:sldId id="269" r:id="rId20"/>
+    <p:sldId id="262" r:id="rId21"/>
+    <p:sldId id="664" r:id="rId22"/>
+    <p:sldId id="283" r:id="rId23"/>
+    <p:sldId id="271" r:id="rId24"/>
+    <p:sldId id="683" r:id="rId25"/>
+    <p:sldId id="682" r:id="rId26"/>
+    <p:sldId id="270" r:id="rId27"/>
+    <p:sldId id="284" r:id="rId28"/>
+    <p:sldId id="263" r:id="rId29"/>
+    <p:sldId id="684" r:id="rId30"/>
+    <p:sldId id="677" r:id="rId31"/>
+    <p:sldId id="685" r:id="rId32"/>
+    <p:sldId id="670" r:id="rId33"/>
+    <p:sldId id="671" r:id="rId34"/>
+    <p:sldId id="693" r:id="rId35"/>
   </p:sldIdLst>
   <p:sldSz cx="12192000" cy="6858000"/>
   <p:notesSz cx="6858000" cy="9144000"/>
@@ -819,30 +820,6 @@
           <a:bodyPr/>
           <a:lstStyle/>
           <a:p>
-            <a:r>
-              <a:rPr lang="ko-KR" altLang="en-US" dirty="0"/>
-              <a:t>선생님</a:t>
-            </a:r>
-            <a:r>
-              <a:rPr lang="en-US" altLang="ko-KR" dirty="0"/>
-              <a:t>, </a:t>
-            </a:r>
-            <a:r>
-              <a:rPr lang="ko-KR" altLang="en-US" dirty="0"/>
-              <a:t>강사님 불러도 안가요</a:t>
-            </a:r>
-            <a:r>
-              <a:rPr lang="en-US" altLang="ko-KR" dirty="0"/>
-              <a:t>~~ </a:t>
-            </a:r>
-            <a:r>
-              <a:rPr lang="ko-KR" altLang="en-US" dirty="0" err="1"/>
-              <a:t>크루리더</a:t>
-            </a:r>
-            <a:r>
-              <a:rPr lang="en-US" altLang="ko-KR" dirty="0"/>
-              <a:t>!!</a:t>
-            </a:r>
             <a:endParaRPr lang="ko-KR" altLang="en-US" dirty="0"/>
           </a:p>
         </p:txBody>
@@ -864,7 +841,7 @@
           <a:p>
             <a:fld id="{C09E5BFC-1559-42F1-8940-AB342D56BF02}" type="slidenum">
               <a:rPr lang="ko-KR" altLang="en-US" smtClean="0"/>
-              <a:t>11</a:t>
+              <a:t>10</a:t>
             </a:fld>
             <a:endParaRPr lang="ko-KR" altLang="en-US"/>
           </a:p>
@@ -873,7 +850,7 @@
     </p:spTree>
     <p:extLst>
       <p:ext uri="{BB962C8B-B14F-4D97-AF65-F5344CB8AC3E}">
-        <p14:creationId xmlns:p14="http://schemas.microsoft.com/office/powerpoint/2010/main" val="3500864067"/>
+        <p14:creationId xmlns:p14="http://schemas.microsoft.com/office/powerpoint/2010/main" val="2413382028"/>
       </p:ext>
     </p:extLst>
   </p:cSld>
@@ -888,7 +865,13 @@
   <p:cSld>
     <p:spTree>
       <p:nvGrpSpPr>
-        <p:cNvPr id="1" name=""/>
+        <p:cNvPr id="1" name="">
+          <a:extLst>
+            <a:ext uri="{FF2B5EF4-FFF2-40B4-BE49-F238E27FC236}">
+              <a16:creationId xmlns:a16="http://schemas.microsoft.com/office/drawing/2014/main" id="{EE889837-5033-E8CC-A215-EF02DE0D4850}"/>
+            </a:ext>
+          </a:extLst>
+        </p:cNvPr>
         <p:cNvGrpSpPr/>
         <p:nvPr/>
       </p:nvGrpSpPr>
@@ -902,7 +885,13 @@
       </p:grpSpPr>
       <p:sp>
         <p:nvSpPr>
-          <p:cNvPr id="2" name="슬라이드 이미지 개체 틀 1"/>
+          <p:cNvPr id="2" name="슬라이드 이미지 개체 틀 1">
+            <a:extLst>
+              <a:ext uri="{FF2B5EF4-FFF2-40B4-BE49-F238E27FC236}">
+                <a16:creationId xmlns:a16="http://schemas.microsoft.com/office/drawing/2014/main" id="{ABA24305-7705-D76E-7641-5985CBEB82B0}"/>
+              </a:ext>
+            </a:extLst>
+          </p:cNvPr>
           <p:cNvSpPr>
             <a:spLocks noGrp="1" noRot="1" noChangeAspect="1"/>
           </p:cNvSpPr>
@@ -914,7 +903,13 @@
       </p:sp>
       <p:sp>
         <p:nvSpPr>
-          <p:cNvPr id="3" name="슬라이드 노트 개체 틀 2"/>
+          <p:cNvPr id="3" name="슬라이드 노트 개체 틀 2">
+            <a:extLst>
+              <a:ext uri="{FF2B5EF4-FFF2-40B4-BE49-F238E27FC236}">
+                <a16:creationId xmlns:a16="http://schemas.microsoft.com/office/drawing/2014/main" id="{1B348CC1-237A-6D67-9854-8DD2CFF59978}"/>
+              </a:ext>
+            </a:extLst>
+          </p:cNvPr>
           <p:cNvSpPr>
             <a:spLocks noGrp="1"/>
           </p:cNvSpPr>
@@ -927,13 +922,19 @@
           <a:bodyPr/>
           <a:lstStyle/>
           <a:p>
-            <a:endParaRPr lang="ko-KR" altLang="en-US" dirty="0"/>
-          </a:p>
-        </p:txBody>
-      </p:sp>
-      <p:sp>
-        <p:nvSpPr>
-          <p:cNvPr id="4" name="슬라이드 번호 개체 틀 3"/>
+            <a:endParaRPr lang="en-US" altLang="ko-KR" dirty="0"/>
+          </a:p>
+        </p:txBody>
+      </p:sp>
+      <p:sp>
+        <p:nvSpPr>
+          <p:cNvPr id="4" name="슬라이드 번호 개체 틀 3">
+            <a:extLst>
+              <a:ext uri="{FF2B5EF4-FFF2-40B4-BE49-F238E27FC236}">
+                <a16:creationId xmlns:a16="http://schemas.microsoft.com/office/drawing/2014/main" id="{2FA454ED-AA18-8AA3-0D45-94405B3EE498}"/>
+              </a:ext>
+            </a:extLst>
+          </p:cNvPr>
           <p:cNvSpPr>
             <a:spLocks noGrp="1"/>
           </p:cNvSpPr>
@@ -946,9 +947,9 @@
           <a:bodyPr/>
           <a:lstStyle/>
           <a:p>
-            <a:fld id="{3550FCFC-DEF0-4809-AB35-5DCCCC68A436}" type="slidenum">
+            <a:fld id="{E731A1BA-5463-484A-B77A-5C292E222CA2}" type="slidenum">
               <a:rPr lang="ko-KR" altLang="en-US" smtClean="0"/>
-              <a:t>12</a:t>
+              <a:t>11</a:t>
             </a:fld>
             <a:endParaRPr lang="ko-KR" altLang="en-US"/>
           </a:p>
@@ -957,7 +958,7 @@
     </p:spTree>
     <p:extLst>
       <p:ext uri="{BB962C8B-B14F-4D97-AF65-F5344CB8AC3E}">
-        <p14:creationId xmlns:p14="http://schemas.microsoft.com/office/powerpoint/2010/main" val="1742751810"/>
+        <p14:creationId xmlns:p14="http://schemas.microsoft.com/office/powerpoint/2010/main" val="981924324"/>
       </p:ext>
     </p:extLst>
   </p:cSld>
@@ -1011,6 +1012,30 @@
           <a:bodyPr/>
           <a:lstStyle/>
           <a:p>
+            <a:r>
+              <a:rPr lang="ko-KR" altLang="en-US" dirty="0"/>
+              <a:t>선생님</a:t>
+            </a:r>
+            <a:r>
+              <a:rPr lang="en-US" altLang="ko-KR" dirty="0"/>
+              <a:t>, </a:t>
+            </a:r>
+            <a:r>
+              <a:rPr lang="ko-KR" altLang="en-US" dirty="0"/>
+              <a:t>강사님 불러도 안가요</a:t>
+            </a:r>
+            <a:r>
+              <a:rPr lang="en-US" altLang="ko-KR" dirty="0"/>
+              <a:t>~~ </a:t>
+            </a:r>
+            <a:r>
+              <a:rPr lang="ko-KR" altLang="en-US" dirty="0" err="1"/>
+              <a:t>크루리더</a:t>
+            </a:r>
+            <a:r>
+              <a:rPr lang="en-US" altLang="ko-KR" dirty="0"/>
+              <a:t>!!</a:t>
+            </a:r>
             <a:endParaRPr lang="ko-KR" altLang="en-US" dirty="0"/>
           </a:p>
         </p:txBody>
@@ -1030,9 +1055,9 @@
           <a:bodyPr/>
           <a:lstStyle/>
           <a:p>
-            <a:fld id="{3550FCFC-DEF0-4809-AB35-5DCCCC68A436}" type="slidenum">
+            <a:fld id="{C09E5BFC-1559-42F1-8940-AB342D56BF02}" type="slidenum">
               <a:rPr lang="ko-KR" altLang="en-US" smtClean="0"/>
-              <a:t>13</a:t>
+              <a:t>12</a:t>
             </a:fld>
             <a:endParaRPr lang="ko-KR" altLang="en-US"/>
           </a:p>
@@ -1041,7 +1066,7 @@
     </p:spTree>
     <p:extLst>
       <p:ext uri="{BB962C8B-B14F-4D97-AF65-F5344CB8AC3E}">
-        <p14:creationId xmlns:p14="http://schemas.microsoft.com/office/powerpoint/2010/main" val="1644858578"/>
+        <p14:creationId xmlns:p14="http://schemas.microsoft.com/office/powerpoint/2010/main" val="3500864067"/>
       </p:ext>
     </p:extLst>
   </p:cSld>
@@ -1095,52 +1120,7 @@
           <a:bodyPr/>
           <a:lstStyle/>
           <a:p>
-            <a:r>
-              <a:rPr lang="ko-KR" altLang="en-US" dirty="0" err="1"/>
-              <a:t>코딩오울</a:t>
-            </a:r>
-            <a:r>
-              <a:rPr lang="ko-KR" altLang="en-US" dirty="0"/>
-              <a:t> 소개 </a:t>
-            </a:r>
-            <a:endParaRPr lang="en-US" altLang="ko-KR" dirty="0"/>
-          </a:p>
-          <a:p>
-            <a:pPr marL="171450" indent="-171450">
-              <a:buFont typeface="Wingdings" panose="05000000000000000000" pitchFamily="2" charset="2"/>
-              <a:buChar char="è"/>
-            </a:pPr>
-            <a:r>
-              <a:rPr lang="ko-KR" altLang="en-US" dirty="0" err="1"/>
-              <a:t>마니또</a:t>
-            </a:r>
-            <a:r>
-              <a:rPr lang="ko-KR" altLang="en-US" dirty="0"/>
-              <a:t> 설명 및 종이 배부</a:t>
-            </a:r>
-            <a:endParaRPr lang="en-US" altLang="ko-KR" dirty="0"/>
-          </a:p>
-          <a:p>
-            <a:pPr marL="171450" indent="-171450">
-              <a:buFont typeface="Wingdings" panose="05000000000000000000" pitchFamily="2" charset="2"/>
-              <a:buChar char="è"/>
-            </a:pPr>
-            <a:r>
-              <a:rPr lang="ko-KR" altLang="en-US" dirty="0"/>
-              <a:t>크루 자기소개</a:t>
-            </a:r>
-            <a:endParaRPr lang="en-US" altLang="ko-KR" dirty="0"/>
-          </a:p>
-          <a:p>
-            <a:pPr marL="171450" indent="-171450">
-              <a:buFont typeface="Wingdings" panose="05000000000000000000" pitchFamily="2" charset="2"/>
-              <a:buChar char="è"/>
-            </a:pPr>
-            <a:r>
-              <a:rPr lang="ko-KR" altLang="en-US" dirty="0"/>
-              <a:t>빙고 게임 </a:t>
-            </a:r>
-            <a:endParaRPr lang="en-US" altLang="ko-KR" dirty="0"/>
+            <a:endParaRPr lang="ko-KR" altLang="en-US" dirty="0"/>
           </a:p>
         </p:txBody>
       </p:sp>
@@ -1159,9 +1139,9 @@
           <a:bodyPr/>
           <a:lstStyle/>
           <a:p>
-            <a:fld id="{E731A1BA-5463-484A-B77A-5C292E222CA2}" type="slidenum">
+            <a:fld id="{3550FCFC-DEF0-4809-AB35-5DCCCC68A436}" type="slidenum">
               <a:rPr lang="ko-KR" altLang="en-US" smtClean="0"/>
-              <a:t>14</a:t>
+              <a:t>13</a:t>
             </a:fld>
             <a:endParaRPr lang="ko-KR" altLang="en-US"/>
           </a:p>
@@ -1170,7 +1150,7 @@
     </p:spTree>
     <p:extLst>
       <p:ext uri="{BB962C8B-B14F-4D97-AF65-F5344CB8AC3E}">
-        <p14:creationId xmlns:p14="http://schemas.microsoft.com/office/powerpoint/2010/main" val="3238105207"/>
+        <p14:creationId xmlns:p14="http://schemas.microsoft.com/office/powerpoint/2010/main" val="1742751810"/>
       </p:ext>
     </p:extLst>
   </p:cSld>
@@ -1224,10 +1204,7 @@
           <a:bodyPr/>
           <a:lstStyle/>
           <a:p>
-            <a:r>
-              <a:rPr lang="ko-KR" altLang="en-US" dirty="0"/>
-              <a:t>한 명 지목 후 크루가 타 크루 랜덤 지목</a:t>
-            </a:r>
+            <a:endParaRPr lang="ko-KR" altLang="en-US" dirty="0"/>
           </a:p>
         </p:txBody>
       </p:sp>
@@ -1248,7 +1225,7 @@
           <a:p>
             <a:fld id="{3550FCFC-DEF0-4809-AB35-5DCCCC68A436}" type="slidenum">
               <a:rPr lang="ko-KR" altLang="en-US" smtClean="0"/>
-              <a:t>15</a:t>
+              <a:t>14</a:t>
             </a:fld>
             <a:endParaRPr lang="ko-KR" altLang="en-US"/>
           </a:p>
@@ -1257,7 +1234,7 @@
     </p:spTree>
     <p:extLst>
       <p:ext uri="{BB962C8B-B14F-4D97-AF65-F5344CB8AC3E}">
-        <p14:creationId xmlns:p14="http://schemas.microsoft.com/office/powerpoint/2010/main" val="1848166386"/>
+        <p14:creationId xmlns:p14="http://schemas.microsoft.com/office/powerpoint/2010/main" val="1644858578"/>
       </p:ext>
     </p:extLst>
   </p:cSld>
@@ -1272,13 +1249,7 @@
   <p:cSld>
     <p:spTree>
       <p:nvGrpSpPr>
-        <p:cNvPr id="1" name="">
-          <a:extLst>
-            <a:ext uri="{FF2B5EF4-FFF2-40B4-BE49-F238E27FC236}">
-              <a16:creationId xmlns:a16="http://schemas.microsoft.com/office/drawing/2014/main" id="{8EB97F51-7D82-7162-AC66-A8512083518E}"/>
-            </a:ext>
-          </a:extLst>
-        </p:cNvPr>
+        <p:cNvPr id="1" name=""/>
         <p:cNvGrpSpPr/>
         <p:nvPr/>
       </p:nvGrpSpPr>
@@ -1292,13 +1263,7 @@
       </p:grpSpPr>
       <p:sp>
         <p:nvSpPr>
-          <p:cNvPr id="2" name="슬라이드 이미지 개체 틀 1">
-            <a:extLst>
-              <a:ext uri="{FF2B5EF4-FFF2-40B4-BE49-F238E27FC236}">
-                <a16:creationId xmlns:a16="http://schemas.microsoft.com/office/drawing/2014/main" id="{D3BB068F-23F9-F369-25E9-468B3E755FC1}"/>
-              </a:ext>
-            </a:extLst>
-          </p:cNvPr>
+          <p:cNvPr id="2" name="슬라이드 이미지 개체 틀 1"/>
           <p:cNvSpPr>
             <a:spLocks noGrp="1" noRot="1" noChangeAspect="1"/>
           </p:cNvSpPr>
@@ -1310,13 +1275,7 @@
       </p:sp>
       <p:sp>
         <p:nvSpPr>
-          <p:cNvPr id="3" name="슬라이드 노트 개체 틀 2">
-            <a:extLst>
-              <a:ext uri="{FF2B5EF4-FFF2-40B4-BE49-F238E27FC236}">
-                <a16:creationId xmlns:a16="http://schemas.microsoft.com/office/drawing/2014/main" id="{49A66899-F11C-3F6C-106C-11075B899A59}"/>
-              </a:ext>
-            </a:extLst>
-          </p:cNvPr>
+          <p:cNvPr id="3" name="슬라이드 노트 개체 틀 2"/>
           <p:cNvSpPr>
             <a:spLocks noGrp="1"/>
           </p:cNvSpPr>
@@ -1329,19 +1288,58 @@
           <a:bodyPr/>
           <a:lstStyle/>
           <a:p>
+            <a:r>
+              <a:rPr lang="ko-KR" altLang="en-US" dirty="0" err="1"/>
+              <a:t>코딩오울</a:t>
+            </a:r>
+            <a:r>
+              <a:rPr lang="ko-KR" altLang="en-US" dirty="0"/>
+              <a:t> 소개 </a:t>
+            </a:r>
             <a:endParaRPr lang="en-US" altLang="ko-KR" dirty="0"/>
           </a:p>
-        </p:txBody>
-      </p:sp>
-      <p:sp>
-        <p:nvSpPr>
-          <p:cNvPr id="4" name="슬라이드 번호 개체 틀 3">
-            <a:extLst>
-              <a:ext uri="{FF2B5EF4-FFF2-40B4-BE49-F238E27FC236}">
-                <a16:creationId xmlns:a16="http://schemas.microsoft.com/office/drawing/2014/main" id="{0C46DC53-3E4E-915D-AB6D-DA1E3ECADEB8}"/>
-              </a:ext>
-            </a:extLst>
-          </p:cNvPr>
+          <a:p>
+            <a:pPr marL="171450" indent="-171450">
+              <a:buFont typeface="Wingdings" panose="05000000000000000000" pitchFamily="2" charset="2"/>
+              <a:buChar char="è"/>
+            </a:pPr>
+            <a:r>
+              <a:rPr lang="ko-KR" altLang="en-US" dirty="0" err="1"/>
+              <a:t>마니또</a:t>
+            </a:r>
+            <a:r>
+              <a:rPr lang="ko-KR" altLang="en-US" dirty="0"/>
+              <a:t> 설명 및 종이 배부</a:t>
+            </a:r>
+            <a:endParaRPr lang="en-US" altLang="ko-KR" dirty="0"/>
+          </a:p>
+          <a:p>
+            <a:pPr marL="171450" indent="-171450">
+              <a:buFont typeface="Wingdings" panose="05000000000000000000" pitchFamily="2" charset="2"/>
+              <a:buChar char="è"/>
+            </a:pPr>
+            <a:r>
+              <a:rPr lang="ko-KR" altLang="en-US" dirty="0"/>
+              <a:t>크루 자기소개</a:t>
+            </a:r>
+            <a:endParaRPr lang="en-US" altLang="ko-KR" dirty="0"/>
+          </a:p>
+          <a:p>
+            <a:pPr marL="171450" indent="-171450">
+              <a:buFont typeface="Wingdings" panose="05000000000000000000" pitchFamily="2" charset="2"/>
+              <a:buChar char="è"/>
+            </a:pPr>
+            <a:r>
+              <a:rPr lang="ko-KR" altLang="en-US" dirty="0"/>
+              <a:t>빙고 게임 </a:t>
+            </a:r>
+            <a:endParaRPr lang="en-US" altLang="ko-KR" dirty="0"/>
+          </a:p>
+        </p:txBody>
+      </p:sp>
+      <p:sp>
+        <p:nvSpPr>
+          <p:cNvPr id="4" name="슬라이드 번호 개체 틀 3"/>
           <p:cNvSpPr>
             <a:spLocks noGrp="1"/>
           </p:cNvSpPr>
@@ -1356,7 +1354,7 @@
           <a:p>
             <a:fld id="{E731A1BA-5463-484A-B77A-5C292E222CA2}" type="slidenum">
               <a:rPr lang="ko-KR" altLang="en-US" smtClean="0"/>
-              <a:t>16</a:t>
+              <a:t>15</a:t>
             </a:fld>
             <a:endParaRPr lang="ko-KR" altLang="en-US"/>
           </a:p>
@@ -1365,7 +1363,7 @@
     </p:spTree>
     <p:extLst>
       <p:ext uri="{BB962C8B-B14F-4D97-AF65-F5344CB8AC3E}">
-        <p14:creationId xmlns:p14="http://schemas.microsoft.com/office/powerpoint/2010/main" val="2583816745"/>
+        <p14:creationId xmlns:p14="http://schemas.microsoft.com/office/powerpoint/2010/main" val="3238105207"/>
       </p:ext>
     </p:extLst>
   </p:cSld>
@@ -1419,7 +1417,10 @@
           <a:bodyPr/>
           <a:lstStyle/>
           <a:p>
-            <a:endParaRPr lang="ko-KR" altLang="en-US" dirty="0"/>
+            <a:r>
+              <a:rPr lang="ko-KR" altLang="en-US" dirty="0"/>
+              <a:t>한 명 지목 후 크루가 타 크루 랜덤 지목</a:t>
+            </a:r>
           </a:p>
         </p:txBody>
       </p:sp>
@@ -1438,9 +1439,9 @@
           <a:bodyPr/>
           <a:lstStyle/>
           <a:p>
-            <a:fld id="{C09E5BFC-1559-42F1-8940-AB342D56BF02}" type="slidenum">
+            <a:fld id="{3550FCFC-DEF0-4809-AB35-5DCCCC68A436}" type="slidenum">
               <a:rPr lang="ko-KR" altLang="en-US" smtClean="0"/>
-              <a:t>19</a:t>
+              <a:t>16</a:t>
             </a:fld>
             <a:endParaRPr lang="ko-KR" altLang="en-US"/>
           </a:p>
@@ -1449,7 +1450,7 @@
     </p:spTree>
     <p:extLst>
       <p:ext uri="{BB962C8B-B14F-4D97-AF65-F5344CB8AC3E}">
-        <p14:creationId xmlns:p14="http://schemas.microsoft.com/office/powerpoint/2010/main" val="2367117523"/>
+        <p14:creationId xmlns:p14="http://schemas.microsoft.com/office/powerpoint/2010/main" val="1848166386"/>
       </p:ext>
     </p:extLst>
   </p:cSld>
@@ -1464,7 +1465,13 @@
   <p:cSld>
     <p:spTree>
       <p:nvGrpSpPr>
-        <p:cNvPr id="1" name=""/>
+        <p:cNvPr id="1" name="">
+          <a:extLst>
+            <a:ext uri="{FF2B5EF4-FFF2-40B4-BE49-F238E27FC236}">
+              <a16:creationId xmlns:a16="http://schemas.microsoft.com/office/drawing/2014/main" id="{8EB97F51-7D82-7162-AC66-A8512083518E}"/>
+            </a:ext>
+          </a:extLst>
+        </p:cNvPr>
         <p:cNvGrpSpPr/>
         <p:nvPr/>
       </p:nvGrpSpPr>
@@ -1478,7 +1485,13 @@
       </p:grpSpPr>
       <p:sp>
         <p:nvSpPr>
-          <p:cNvPr id="2" name="슬라이드 이미지 개체 틀 1"/>
+          <p:cNvPr id="2" name="슬라이드 이미지 개체 틀 1">
+            <a:extLst>
+              <a:ext uri="{FF2B5EF4-FFF2-40B4-BE49-F238E27FC236}">
+                <a16:creationId xmlns:a16="http://schemas.microsoft.com/office/drawing/2014/main" id="{D3BB068F-23F9-F369-25E9-468B3E755FC1}"/>
+              </a:ext>
+            </a:extLst>
+          </p:cNvPr>
           <p:cNvSpPr>
             <a:spLocks noGrp="1" noRot="1" noChangeAspect="1"/>
           </p:cNvSpPr>
@@ -1490,7 +1503,13 @@
       </p:sp>
       <p:sp>
         <p:nvSpPr>
-          <p:cNvPr id="3" name="슬라이드 노트 개체 틀 2"/>
+          <p:cNvPr id="3" name="슬라이드 노트 개체 틀 2">
+            <a:extLst>
+              <a:ext uri="{FF2B5EF4-FFF2-40B4-BE49-F238E27FC236}">
+                <a16:creationId xmlns:a16="http://schemas.microsoft.com/office/drawing/2014/main" id="{49A66899-F11C-3F6C-106C-11075B899A59}"/>
+              </a:ext>
+            </a:extLst>
+          </p:cNvPr>
           <p:cNvSpPr>
             <a:spLocks noGrp="1"/>
           </p:cNvSpPr>
@@ -1503,13 +1522,19 @@
           <a:bodyPr/>
           <a:lstStyle/>
           <a:p>
-            <a:endParaRPr lang="ko-KR" altLang="en-US" dirty="0"/>
-          </a:p>
-        </p:txBody>
-      </p:sp>
-      <p:sp>
-        <p:nvSpPr>
-          <p:cNvPr id="4" name="슬라이드 번호 개체 틀 3"/>
+            <a:endParaRPr lang="en-US" altLang="ko-KR" dirty="0"/>
+          </a:p>
+        </p:txBody>
+      </p:sp>
+      <p:sp>
+        <p:nvSpPr>
+          <p:cNvPr id="4" name="슬라이드 번호 개체 틀 3">
+            <a:extLst>
+              <a:ext uri="{FF2B5EF4-FFF2-40B4-BE49-F238E27FC236}">
+                <a16:creationId xmlns:a16="http://schemas.microsoft.com/office/drawing/2014/main" id="{0C46DC53-3E4E-915D-AB6D-DA1E3ECADEB8}"/>
+              </a:ext>
+            </a:extLst>
+          </p:cNvPr>
           <p:cNvSpPr>
             <a:spLocks noGrp="1"/>
           </p:cNvSpPr>
@@ -1522,9 +1547,9 @@
           <a:bodyPr/>
           <a:lstStyle/>
           <a:p>
-            <a:fld id="{C09E5BFC-1559-42F1-8940-AB342D56BF02}" type="slidenum">
+            <a:fld id="{E731A1BA-5463-484A-B77A-5C292E222CA2}" type="slidenum">
               <a:rPr lang="ko-KR" altLang="en-US" smtClean="0"/>
-              <a:t>20</a:t>
+              <a:t>17</a:t>
             </a:fld>
             <a:endParaRPr lang="ko-KR" altLang="en-US"/>
           </a:p>
@@ -1533,7 +1558,7 @@
     </p:spTree>
     <p:extLst>
       <p:ext uri="{BB962C8B-B14F-4D97-AF65-F5344CB8AC3E}">
-        <p14:creationId xmlns:p14="http://schemas.microsoft.com/office/powerpoint/2010/main" val="2256288870"/>
+        <p14:creationId xmlns:p14="http://schemas.microsoft.com/office/powerpoint/2010/main" val="2583816745"/>
       </p:ext>
     </p:extLst>
   </p:cSld>
@@ -1608,7 +1633,7 @@
           <a:p>
             <a:fld id="{C09E5BFC-1559-42F1-8940-AB342D56BF02}" type="slidenum">
               <a:rPr lang="ko-KR" altLang="en-US" smtClean="0"/>
-              <a:t>21</a:t>
+              <a:t>20</a:t>
             </a:fld>
             <a:endParaRPr lang="ko-KR" altLang="en-US"/>
           </a:p>
@@ -1617,7 +1642,7 @@
     </p:spTree>
     <p:extLst>
       <p:ext uri="{BB962C8B-B14F-4D97-AF65-F5344CB8AC3E}">
-        <p14:creationId xmlns:p14="http://schemas.microsoft.com/office/powerpoint/2010/main" val="3721176523"/>
+        <p14:creationId xmlns:p14="http://schemas.microsoft.com/office/powerpoint/2010/main" val="2367117523"/>
       </p:ext>
     </p:extLst>
   </p:cSld>
@@ -1692,7 +1717,7 @@
           <a:p>
             <a:fld id="{C09E5BFC-1559-42F1-8940-AB342D56BF02}" type="slidenum">
               <a:rPr lang="ko-KR" altLang="en-US" smtClean="0"/>
-              <a:t>22</a:t>
+              <a:t>21</a:t>
             </a:fld>
             <a:endParaRPr lang="ko-KR" altLang="en-US"/>
           </a:p>
@@ -1701,7 +1726,7 @@
     </p:spTree>
     <p:extLst>
       <p:ext uri="{BB962C8B-B14F-4D97-AF65-F5344CB8AC3E}">
-        <p14:creationId xmlns:p14="http://schemas.microsoft.com/office/powerpoint/2010/main" val="845693474"/>
+        <p14:creationId xmlns:p14="http://schemas.microsoft.com/office/powerpoint/2010/main" val="2256288870"/>
       </p:ext>
     </p:extLst>
   </p:cSld>
@@ -1803,13 +1828,7 @@
   <p:cSld>
     <p:spTree>
       <p:nvGrpSpPr>
-        <p:cNvPr id="1" name="">
-          <a:extLst>
-            <a:ext uri="{FF2B5EF4-FFF2-40B4-BE49-F238E27FC236}">
-              <a16:creationId xmlns:a16="http://schemas.microsoft.com/office/drawing/2014/main" id="{9938862A-0E0D-3A28-40BB-D548036C91A9}"/>
-            </a:ext>
-          </a:extLst>
-        </p:cNvPr>
+        <p:cNvPr id="1" name=""/>
         <p:cNvGrpSpPr/>
         <p:nvPr/>
       </p:nvGrpSpPr>
@@ -1823,13 +1842,7 @@
       </p:grpSpPr>
       <p:sp>
         <p:nvSpPr>
-          <p:cNvPr id="2" name="슬라이드 이미지 개체 틀 1">
-            <a:extLst>
-              <a:ext uri="{FF2B5EF4-FFF2-40B4-BE49-F238E27FC236}">
-                <a16:creationId xmlns:a16="http://schemas.microsoft.com/office/drawing/2014/main" id="{8FE665DB-81BE-4C1D-9F40-920BE9EA9803}"/>
-              </a:ext>
-            </a:extLst>
-          </p:cNvPr>
+          <p:cNvPr id="2" name="슬라이드 이미지 개체 틀 1"/>
           <p:cNvSpPr>
             <a:spLocks noGrp="1" noRot="1" noChangeAspect="1"/>
           </p:cNvSpPr>
@@ -1841,13 +1854,7 @@
       </p:sp>
       <p:sp>
         <p:nvSpPr>
-          <p:cNvPr id="3" name="슬라이드 노트 개체 틀 2">
-            <a:extLst>
-              <a:ext uri="{FF2B5EF4-FFF2-40B4-BE49-F238E27FC236}">
-                <a16:creationId xmlns:a16="http://schemas.microsoft.com/office/drawing/2014/main" id="{3FC76334-8B44-0604-EE6F-F49FDA50C79B}"/>
-              </a:ext>
-            </a:extLst>
-          </p:cNvPr>
+          <p:cNvPr id="3" name="슬라이드 노트 개체 틀 2"/>
           <p:cNvSpPr>
             <a:spLocks noGrp="1"/>
           </p:cNvSpPr>
@@ -1860,72 +1867,13 @@
           <a:bodyPr/>
           <a:lstStyle/>
           <a:p>
-            <a:pPr marL="0" marR="0" lvl="0" indent="0" algn="l" defTabSz="914400" rtl="0" eaLnBrk="1" fontAlgn="auto" latinLnBrk="1" hangingPunct="1">
-              <a:lnSpc>
-                <a:spcPct val="100000"/>
-              </a:lnSpc>
-              <a:spcBef>
-                <a:spcPts val="0"/>
-              </a:spcBef>
-              <a:spcAft>
-                <a:spcPts val="0"/>
-              </a:spcAft>
-              <a:buClrTx/>
-              <a:buSzTx/>
-              <a:buFontTx/>
-              <a:buNone/>
-              <a:tabLst/>
-              <a:defRPr/>
-            </a:pPr>
-            <a:r>
-              <a:rPr lang="en-US" altLang="ko-KR" dirty="0">
-                <a:solidFill>
-                  <a:schemeClr val="accent1"/>
-                </a:solidFill>
-              </a:rPr>
-              <a:t>git config --global </a:t>
-            </a:r>
-            <a:r>
-              <a:rPr lang="en-US" altLang="ko-KR" dirty="0" err="1">
-                <a:solidFill>
-                  <a:schemeClr val="accent1"/>
-                </a:solidFill>
-              </a:rPr>
-              <a:t>core.ignorecase</a:t>
-            </a:r>
-            <a:r>
-              <a:rPr lang="en-US" altLang="ko-KR" dirty="0">
-                <a:solidFill>
-                  <a:schemeClr val="accent1"/>
-                </a:solidFill>
-              </a:rPr>
-              <a:t> false:</a:t>
-            </a:r>
-            <a:r>
-              <a:rPr lang="ko-KR" altLang="en-US" dirty="0">
-                <a:solidFill>
-                  <a:schemeClr val="accent1"/>
-                </a:solidFill>
-              </a:rPr>
-              <a:t> 대소문자 구분해달라는 설정</a:t>
-            </a:r>
-            <a:endParaRPr lang="en-US" altLang="ko-KR" dirty="0">
-              <a:solidFill>
-                <a:schemeClr val="accent1"/>
-              </a:solidFill>
-            </a:endParaRPr>
-          </a:p>
-        </p:txBody>
-      </p:sp>
-      <p:sp>
-        <p:nvSpPr>
-          <p:cNvPr id="4" name="슬라이드 번호 개체 틀 3">
-            <a:extLst>
-              <a:ext uri="{FF2B5EF4-FFF2-40B4-BE49-F238E27FC236}">
-                <a16:creationId xmlns:a16="http://schemas.microsoft.com/office/drawing/2014/main" id="{CE7AD3D0-3A43-6344-A47F-92A948EE3975}"/>
-              </a:ext>
-            </a:extLst>
-          </p:cNvPr>
+            <a:endParaRPr lang="ko-KR" altLang="en-US" dirty="0"/>
+          </a:p>
+        </p:txBody>
+      </p:sp>
+      <p:sp>
+        <p:nvSpPr>
+          <p:cNvPr id="4" name="슬라이드 번호 개체 틀 3"/>
           <p:cNvSpPr>
             <a:spLocks noGrp="1"/>
           </p:cNvSpPr>
@@ -1940,7 +1888,7 @@
           <a:p>
             <a:fld id="{C09E5BFC-1559-42F1-8940-AB342D56BF02}" type="slidenum">
               <a:rPr lang="ko-KR" altLang="en-US" smtClean="0"/>
-              <a:t>24</a:t>
+              <a:t>22</a:t>
             </a:fld>
             <a:endParaRPr lang="ko-KR" altLang="en-US"/>
           </a:p>
@@ -1949,7 +1897,7 @@
     </p:spTree>
     <p:extLst>
       <p:ext uri="{BB962C8B-B14F-4D97-AF65-F5344CB8AC3E}">
-        <p14:creationId xmlns:p14="http://schemas.microsoft.com/office/powerpoint/2010/main" val="540481338"/>
+        <p14:creationId xmlns:p14="http://schemas.microsoft.com/office/powerpoint/2010/main" val="3721176523"/>
       </p:ext>
     </p:extLst>
   </p:cSld>
@@ -2024,7 +1972,7 @@
           <a:p>
             <a:fld id="{C09E5BFC-1559-42F1-8940-AB342D56BF02}" type="slidenum">
               <a:rPr lang="ko-KR" altLang="en-US" smtClean="0"/>
-              <a:t>27</a:t>
+              <a:t>23</a:t>
             </a:fld>
             <a:endParaRPr lang="ko-KR" altLang="en-US"/>
           </a:p>
@@ -2033,7 +1981,7 @@
     </p:spTree>
     <p:extLst>
       <p:ext uri="{BB962C8B-B14F-4D97-AF65-F5344CB8AC3E}">
-        <p14:creationId xmlns:p14="http://schemas.microsoft.com/office/powerpoint/2010/main" val="372157867"/>
+        <p14:creationId xmlns:p14="http://schemas.microsoft.com/office/powerpoint/2010/main" val="845693474"/>
       </p:ext>
     </p:extLst>
   </p:cSld>
@@ -2048,7 +1996,13 @@
   <p:cSld>
     <p:spTree>
       <p:nvGrpSpPr>
-        <p:cNvPr id="1" name=""/>
+        <p:cNvPr id="1" name="">
+          <a:extLst>
+            <a:ext uri="{FF2B5EF4-FFF2-40B4-BE49-F238E27FC236}">
+              <a16:creationId xmlns:a16="http://schemas.microsoft.com/office/drawing/2014/main" id="{9938862A-0E0D-3A28-40BB-D548036C91A9}"/>
+            </a:ext>
+          </a:extLst>
+        </p:cNvPr>
         <p:cNvGrpSpPr/>
         <p:nvPr/>
       </p:nvGrpSpPr>
@@ -2062,7 +2016,13 @@
       </p:grpSpPr>
       <p:sp>
         <p:nvSpPr>
-          <p:cNvPr id="2" name="슬라이드 이미지 개체 틀 1"/>
+          <p:cNvPr id="2" name="슬라이드 이미지 개체 틀 1">
+            <a:extLst>
+              <a:ext uri="{FF2B5EF4-FFF2-40B4-BE49-F238E27FC236}">
+                <a16:creationId xmlns:a16="http://schemas.microsoft.com/office/drawing/2014/main" id="{8FE665DB-81BE-4C1D-9F40-920BE9EA9803}"/>
+              </a:ext>
+            </a:extLst>
+          </p:cNvPr>
           <p:cNvSpPr>
             <a:spLocks noGrp="1" noRot="1" noChangeAspect="1"/>
           </p:cNvSpPr>
@@ -2074,7 +2034,13 @@
       </p:sp>
       <p:sp>
         <p:nvSpPr>
-          <p:cNvPr id="3" name="슬라이드 노트 개체 틀 2"/>
+          <p:cNvPr id="3" name="슬라이드 노트 개체 틀 2">
+            <a:extLst>
+              <a:ext uri="{FF2B5EF4-FFF2-40B4-BE49-F238E27FC236}">
+                <a16:creationId xmlns:a16="http://schemas.microsoft.com/office/drawing/2014/main" id="{3FC76334-8B44-0604-EE6F-F49FDA50C79B}"/>
+              </a:ext>
+            </a:extLst>
+          </p:cNvPr>
           <p:cNvSpPr>
             <a:spLocks noGrp="1"/>
           </p:cNvSpPr>
@@ -2087,13 +2053,72 @@
           <a:bodyPr/>
           <a:lstStyle/>
           <a:p>
-            <a:endParaRPr lang="ko-KR" altLang="en-US" dirty="0"/>
-          </a:p>
-        </p:txBody>
-      </p:sp>
-      <p:sp>
-        <p:nvSpPr>
-          <p:cNvPr id="4" name="슬라이드 번호 개체 틀 3"/>
+            <a:pPr marL="0" marR="0" lvl="0" indent="0" algn="l" defTabSz="914400" rtl="0" eaLnBrk="1" fontAlgn="auto" latinLnBrk="1" hangingPunct="1">
+              <a:lnSpc>
+                <a:spcPct val="100000"/>
+              </a:lnSpc>
+              <a:spcBef>
+                <a:spcPts val="0"/>
+              </a:spcBef>
+              <a:spcAft>
+                <a:spcPts val="0"/>
+              </a:spcAft>
+              <a:buClrTx/>
+              <a:buSzTx/>
+              <a:buFontTx/>
+              <a:buNone/>
+              <a:tabLst/>
+              <a:defRPr/>
+            </a:pPr>
+            <a:r>
+              <a:rPr lang="en-US" altLang="ko-KR" dirty="0">
+                <a:solidFill>
+                  <a:schemeClr val="accent1"/>
+                </a:solidFill>
+              </a:rPr>
+              <a:t>git config --global </a:t>
+            </a:r>
+            <a:r>
+              <a:rPr lang="en-US" altLang="ko-KR" dirty="0" err="1">
+                <a:solidFill>
+                  <a:schemeClr val="accent1"/>
+                </a:solidFill>
+              </a:rPr>
+              <a:t>core.ignorecase</a:t>
+            </a:r>
+            <a:r>
+              <a:rPr lang="en-US" altLang="ko-KR" dirty="0">
+                <a:solidFill>
+                  <a:schemeClr val="accent1"/>
+                </a:solidFill>
+              </a:rPr>
+              <a:t> false:</a:t>
+            </a:r>
+            <a:r>
+              <a:rPr lang="ko-KR" altLang="en-US" dirty="0">
+                <a:solidFill>
+                  <a:schemeClr val="accent1"/>
+                </a:solidFill>
+              </a:rPr>
+              <a:t> 대소문자 구분해달라는 설정</a:t>
+            </a:r>
+            <a:endParaRPr lang="en-US" altLang="ko-KR" dirty="0">
+              <a:solidFill>
+                <a:schemeClr val="accent1"/>
+              </a:solidFill>
+            </a:endParaRPr>
+          </a:p>
+        </p:txBody>
+      </p:sp>
+      <p:sp>
+        <p:nvSpPr>
+          <p:cNvPr id="4" name="슬라이드 번호 개체 틀 3">
+            <a:extLst>
+              <a:ext uri="{FF2B5EF4-FFF2-40B4-BE49-F238E27FC236}">
+                <a16:creationId xmlns:a16="http://schemas.microsoft.com/office/drawing/2014/main" id="{CE7AD3D0-3A43-6344-A47F-92A948EE3975}"/>
+              </a:ext>
+            </a:extLst>
+          </p:cNvPr>
           <p:cNvSpPr>
             <a:spLocks noGrp="1"/>
           </p:cNvSpPr>
@@ -2108,7 +2133,7 @@
           <a:p>
             <a:fld id="{C09E5BFC-1559-42F1-8940-AB342D56BF02}" type="slidenum">
               <a:rPr lang="ko-KR" altLang="en-US" smtClean="0"/>
-              <a:t>28</a:t>
+              <a:t>25</a:t>
             </a:fld>
             <a:endParaRPr lang="ko-KR" altLang="en-US"/>
           </a:p>
@@ -2117,7 +2142,7 @@
     </p:spTree>
     <p:extLst>
       <p:ext uri="{BB962C8B-B14F-4D97-AF65-F5344CB8AC3E}">
-        <p14:creationId xmlns:p14="http://schemas.microsoft.com/office/powerpoint/2010/main" val="2128179871"/>
+        <p14:creationId xmlns:p14="http://schemas.microsoft.com/office/powerpoint/2010/main" val="540481338"/>
       </p:ext>
     </p:extLst>
   </p:cSld>
@@ -2192,7 +2217,7 @@
           <a:p>
             <a:fld id="{C09E5BFC-1559-42F1-8940-AB342D56BF02}" type="slidenum">
               <a:rPr lang="ko-KR" altLang="en-US" smtClean="0"/>
-              <a:t>31</a:t>
+              <a:t>28</a:t>
             </a:fld>
             <a:endParaRPr lang="ko-KR" altLang="en-US"/>
           </a:p>
@@ -2201,7 +2226,7 @@
     </p:spTree>
     <p:extLst>
       <p:ext uri="{BB962C8B-B14F-4D97-AF65-F5344CB8AC3E}">
-        <p14:creationId xmlns:p14="http://schemas.microsoft.com/office/powerpoint/2010/main" val="4278536765"/>
+        <p14:creationId xmlns:p14="http://schemas.microsoft.com/office/powerpoint/2010/main" val="372157867"/>
       </p:ext>
     </p:extLst>
   </p:cSld>
@@ -2276,7 +2301,175 @@
           <a:p>
             <a:fld id="{C09E5BFC-1559-42F1-8940-AB342D56BF02}" type="slidenum">
               <a:rPr lang="ko-KR" altLang="en-US" smtClean="0"/>
+              <a:t>29</a:t>
+            </a:fld>
+            <a:endParaRPr lang="ko-KR" altLang="en-US"/>
+          </a:p>
+        </p:txBody>
+      </p:sp>
+    </p:spTree>
+    <p:extLst>
+      <p:ext uri="{BB962C8B-B14F-4D97-AF65-F5344CB8AC3E}">
+        <p14:creationId xmlns:p14="http://schemas.microsoft.com/office/powerpoint/2010/main" val="2128179871"/>
+      </p:ext>
+    </p:extLst>
+  </p:cSld>
+  <p:clrMapOvr>
+    <a:masterClrMapping/>
+  </p:clrMapOvr>
+</p:notes>
+</file>
+
+<file path=ppt/notesSlides/notesSlide25.xml><?xml version="1.0" encoding="utf-8"?>
+<p:notes xmlns:a="http://schemas.openxmlformats.org/drawingml/2006/main" xmlns:r="http://schemas.openxmlformats.org/officeDocument/2006/relationships" xmlns:p="http://schemas.openxmlformats.org/presentationml/2006/main">
+  <p:cSld>
+    <p:spTree>
+      <p:nvGrpSpPr>
+        <p:cNvPr id="1" name=""/>
+        <p:cNvGrpSpPr/>
+        <p:nvPr/>
+      </p:nvGrpSpPr>
+      <p:grpSpPr>
+        <a:xfrm>
+          <a:off x="0" y="0"/>
+          <a:ext cx="0" cy="0"/>
+          <a:chOff x="0" y="0"/>
+          <a:chExt cx="0" cy="0"/>
+        </a:xfrm>
+      </p:grpSpPr>
+      <p:sp>
+        <p:nvSpPr>
+          <p:cNvPr id="2" name="슬라이드 이미지 개체 틀 1"/>
+          <p:cNvSpPr>
+            <a:spLocks noGrp="1" noRot="1" noChangeAspect="1"/>
+          </p:cNvSpPr>
+          <p:nvPr>
+            <p:ph type="sldImg"/>
+          </p:nvPr>
+        </p:nvSpPr>
+        <p:spPr/>
+      </p:sp>
+      <p:sp>
+        <p:nvSpPr>
+          <p:cNvPr id="3" name="슬라이드 노트 개체 틀 2"/>
+          <p:cNvSpPr>
+            <a:spLocks noGrp="1"/>
+          </p:cNvSpPr>
+          <p:nvPr>
+            <p:ph type="body" idx="1"/>
+          </p:nvPr>
+        </p:nvSpPr>
+        <p:spPr/>
+        <p:txBody>
+          <a:bodyPr/>
+          <a:lstStyle/>
+          <a:p>
+            <a:endParaRPr lang="ko-KR" altLang="en-US" dirty="0"/>
+          </a:p>
+        </p:txBody>
+      </p:sp>
+      <p:sp>
+        <p:nvSpPr>
+          <p:cNvPr id="4" name="슬라이드 번호 개체 틀 3"/>
+          <p:cNvSpPr>
+            <a:spLocks noGrp="1"/>
+          </p:cNvSpPr>
+          <p:nvPr>
+            <p:ph type="sldNum" sz="quarter" idx="5"/>
+          </p:nvPr>
+        </p:nvSpPr>
+        <p:spPr/>
+        <p:txBody>
+          <a:bodyPr/>
+          <a:lstStyle/>
+          <a:p>
+            <a:fld id="{C09E5BFC-1559-42F1-8940-AB342D56BF02}" type="slidenum">
+              <a:rPr lang="ko-KR" altLang="en-US" smtClean="0"/>
               <a:t>32</a:t>
+            </a:fld>
+            <a:endParaRPr lang="ko-KR" altLang="en-US"/>
+          </a:p>
+        </p:txBody>
+      </p:sp>
+    </p:spTree>
+    <p:extLst>
+      <p:ext uri="{BB962C8B-B14F-4D97-AF65-F5344CB8AC3E}">
+        <p14:creationId xmlns:p14="http://schemas.microsoft.com/office/powerpoint/2010/main" val="4278536765"/>
+      </p:ext>
+    </p:extLst>
+  </p:cSld>
+  <p:clrMapOvr>
+    <a:masterClrMapping/>
+  </p:clrMapOvr>
+</p:notes>
+</file>
+
+<file path=ppt/notesSlides/notesSlide26.xml><?xml version="1.0" encoding="utf-8"?>
+<p:notes xmlns:a="http://schemas.openxmlformats.org/drawingml/2006/main" xmlns:r="http://schemas.openxmlformats.org/officeDocument/2006/relationships" xmlns:p="http://schemas.openxmlformats.org/presentationml/2006/main">
+  <p:cSld>
+    <p:spTree>
+      <p:nvGrpSpPr>
+        <p:cNvPr id="1" name=""/>
+        <p:cNvGrpSpPr/>
+        <p:nvPr/>
+      </p:nvGrpSpPr>
+      <p:grpSpPr>
+        <a:xfrm>
+          <a:off x="0" y="0"/>
+          <a:ext cx="0" cy="0"/>
+          <a:chOff x="0" y="0"/>
+          <a:chExt cx="0" cy="0"/>
+        </a:xfrm>
+      </p:grpSpPr>
+      <p:sp>
+        <p:nvSpPr>
+          <p:cNvPr id="2" name="슬라이드 이미지 개체 틀 1"/>
+          <p:cNvSpPr>
+            <a:spLocks noGrp="1" noRot="1" noChangeAspect="1"/>
+          </p:cNvSpPr>
+          <p:nvPr>
+            <p:ph type="sldImg"/>
+          </p:nvPr>
+        </p:nvSpPr>
+        <p:spPr/>
+      </p:sp>
+      <p:sp>
+        <p:nvSpPr>
+          <p:cNvPr id="3" name="슬라이드 노트 개체 틀 2"/>
+          <p:cNvSpPr>
+            <a:spLocks noGrp="1"/>
+          </p:cNvSpPr>
+          <p:nvPr>
+            <p:ph type="body" idx="1"/>
+          </p:nvPr>
+        </p:nvSpPr>
+        <p:spPr/>
+        <p:txBody>
+          <a:bodyPr/>
+          <a:lstStyle/>
+          <a:p>
+            <a:endParaRPr lang="ko-KR" altLang="en-US" dirty="0"/>
+          </a:p>
+        </p:txBody>
+      </p:sp>
+      <p:sp>
+        <p:nvSpPr>
+          <p:cNvPr id="4" name="슬라이드 번호 개체 틀 3"/>
+          <p:cNvSpPr>
+            <a:spLocks noGrp="1"/>
+          </p:cNvSpPr>
+          <p:nvPr>
+            <p:ph type="sldNum" sz="quarter" idx="5"/>
+          </p:nvPr>
+        </p:nvSpPr>
+        <p:spPr/>
+        <p:txBody>
+          <a:bodyPr/>
+          <a:lstStyle/>
+          <a:p>
+            <a:fld id="{C09E5BFC-1559-42F1-8940-AB342D56BF02}" type="slidenum">
+              <a:rPr lang="ko-KR" altLang="en-US" smtClean="0"/>
+              <a:t>33</a:t>
             </a:fld>
             <a:endParaRPr lang="ko-KR" altLang="en-US"/>
           </a:p>
@@ -3239,7 +3432,14 @@
           <a:bodyPr/>
           <a:lstStyle/>
           <a:p>
-            <a:endParaRPr lang="ko-KR" altLang="en-US" dirty="0"/>
+            <a:r>
+              <a:rPr lang="ko-KR" altLang="en-US" dirty="0"/>
+              <a:t>핑 안내</a:t>
+            </a:r>
+            <a:r>
+              <a:rPr lang="en-US" altLang="ko-KR" dirty="0"/>
+              <a:t>!</a:t>
+            </a:r>
           </a:p>
         </p:txBody>
       </p:sp>
@@ -3284,13 +3484,7 @@
   <p:cSld>
     <p:spTree>
       <p:nvGrpSpPr>
-        <p:cNvPr id="1" name="">
-          <a:extLst>
-            <a:ext uri="{FF2B5EF4-FFF2-40B4-BE49-F238E27FC236}">
-              <a16:creationId xmlns:a16="http://schemas.microsoft.com/office/drawing/2014/main" id="{EE889837-5033-E8CC-A215-EF02DE0D4850}"/>
-            </a:ext>
-          </a:extLst>
-        </p:cNvPr>
+        <p:cNvPr id="1" name=""/>
         <p:cNvGrpSpPr/>
         <p:nvPr/>
       </p:nvGrpSpPr>
@@ -3304,13 +3498,7 @@
       </p:grpSpPr>
       <p:sp>
         <p:nvSpPr>
-          <p:cNvPr id="2" name="슬라이드 이미지 개체 틀 1">
-            <a:extLst>
-              <a:ext uri="{FF2B5EF4-FFF2-40B4-BE49-F238E27FC236}">
-                <a16:creationId xmlns:a16="http://schemas.microsoft.com/office/drawing/2014/main" id="{ABA24305-7705-D76E-7641-5985CBEB82B0}"/>
-              </a:ext>
-            </a:extLst>
-          </p:cNvPr>
+          <p:cNvPr id="2" name="슬라이드 이미지 개체 틀 1"/>
           <p:cNvSpPr>
             <a:spLocks noGrp="1" noRot="1" noChangeAspect="1"/>
           </p:cNvSpPr>
@@ -3322,13 +3510,7 @@
       </p:sp>
       <p:sp>
         <p:nvSpPr>
-          <p:cNvPr id="3" name="슬라이드 노트 개체 틀 2">
-            <a:extLst>
-              <a:ext uri="{FF2B5EF4-FFF2-40B4-BE49-F238E27FC236}">
-                <a16:creationId xmlns:a16="http://schemas.microsoft.com/office/drawing/2014/main" id="{1B348CC1-237A-6D67-9854-8DD2CFF59978}"/>
-              </a:ext>
-            </a:extLst>
-          </p:cNvPr>
+          <p:cNvPr id="3" name="슬라이드 노트 개체 틀 2"/>
           <p:cNvSpPr>
             <a:spLocks noGrp="1"/>
           </p:cNvSpPr>
@@ -3341,19 +3523,13 @@
           <a:bodyPr/>
           <a:lstStyle/>
           <a:p>
-            <a:endParaRPr lang="en-US" altLang="ko-KR" dirty="0"/>
-          </a:p>
-        </p:txBody>
-      </p:sp>
-      <p:sp>
-        <p:nvSpPr>
-          <p:cNvPr id="4" name="슬라이드 번호 개체 틀 3">
-            <a:extLst>
-              <a:ext uri="{FF2B5EF4-FFF2-40B4-BE49-F238E27FC236}">
-                <a16:creationId xmlns:a16="http://schemas.microsoft.com/office/drawing/2014/main" id="{2FA454ED-AA18-8AA3-0D45-94405B3EE498}"/>
-              </a:ext>
-            </a:extLst>
-          </p:cNvPr>
+            <a:endParaRPr lang="ko-KR" altLang="en-US" dirty="0"/>
+          </a:p>
+        </p:txBody>
+      </p:sp>
+      <p:sp>
+        <p:nvSpPr>
+          <p:cNvPr id="4" name="슬라이드 번호 개체 틀 3"/>
           <p:cNvSpPr>
             <a:spLocks noGrp="1"/>
           </p:cNvSpPr>
@@ -3366,9 +3542,9 @@
           <a:bodyPr/>
           <a:lstStyle/>
           <a:p>
-            <a:fld id="{E731A1BA-5463-484A-B77A-5C292E222CA2}" type="slidenum">
+            <a:fld id="{C09E5BFC-1559-42F1-8940-AB342D56BF02}" type="slidenum">
               <a:rPr lang="ko-KR" altLang="en-US" smtClean="0"/>
-              <a:t>10</a:t>
+              <a:t>9</a:t>
             </a:fld>
             <a:endParaRPr lang="ko-KR" altLang="en-US"/>
           </a:p>
@@ -3377,7 +3553,7 @@
     </p:spTree>
     <p:extLst>
       <p:ext uri="{BB962C8B-B14F-4D97-AF65-F5344CB8AC3E}">
-        <p14:creationId xmlns:p14="http://schemas.microsoft.com/office/powerpoint/2010/main" val="981924324"/>
+        <p14:creationId xmlns:p14="http://schemas.microsoft.com/office/powerpoint/2010/main" val="3051884607"/>
       </p:ext>
     </p:extLst>
   </p:cSld>
@@ -7146,6 +7322,264 @@
   <p:cSld>
     <p:spTree>
       <p:nvGrpSpPr>
+        <p:cNvPr id="1" name=""/>
+        <p:cNvGrpSpPr/>
+        <p:nvPr/>
+      </p:nvGrpSpPr>
+      <p:grpSpPr>
+        <a:xfrm>
+          <a:off x="0" y="0"/>
+          <a:ext cx="0" cy="0"/>
+          <a:chOff x="0" y="0"/>
+          <a:chExt cx="0" cy="0"/>
+        </a:xfrm>
+      </p:grpSpPr>
+      <p:sp>
+        <p:nvSpPr>
+          <p:cNvPr id="3" name="날짜 개체 틀 2">
+            <a:extLst>
+              <a:ext uri="{FF2B5EF4-FFF2-40B4-BE49-F238E27FC236}">
+                <a16:creationId xmlns:a16="http://schemas.microsoft.com/office/drawing/2014/main" id="{2ADE279D-187D-FFC8-1BCF-39ED1039484B}"/>
+              </a:ext>
+            </a:extLst>
+          </p:cNvPr>
+          <p:cNvSpPr>
+            <a:spLocks noGrp="1"/>
+          </p:cNvSpPr>
+          <p:nvPr>
+            <p:ph type="dt" sz="half" idx="10"/>
+          </p:nvPr>
+        </p:nvSpPr>
+        <p:spPr/>
+        <p:txBody>
+          <a:bodyPr/>
+          <a:lstStyle/>
+          <a:p>
+            <a:fld id="{3C9CE3CE-253F-4F9D-BA15-C226C8D8501E}" type="datetime6">
+              <a:rPr lang="ko-KR" altLang="en-US" smtClean="0"/>
+              <a:t>2024년 5월</a:t>
+            </a:fld>
+            <a:endParaRPr lang="ko-KR" altLang="en-US"/>
+          </a:p>
+        </p:txBody>
+      </p:sp>
+      <p:sp>
+        <p:nvSpPr>
+          <p:cNvPr id="4" name="슬라이드 번호 개체 틀 3">
+            <a:extLst>
+              <a:ext uri="{FF2B5EF4-FFF2-40B4-BE49-F238E27FC236}">
+                <a16:creationId xmlns:a16="http://schemas.microsoft.com/office/drawing/2014/main" id="{C65620E2-371F-92B9-8FFF-EEF653C30865}"/>
+              </a:ext>
+            </a:extLst>
+          </p:cNvPr>
+          <p:cNvSpPr>
+            <a:spLocks noGrp="1"/>
+          </p:cNvSpPr>
+          <p:nvPr>
+            <p:ph type="sldNum" sz="quarter" idx="12"/>
+          </p:nvPr>
+        </p:nvSpPr>
+        <p:spPr/>
+        <p:txBody>
+          <a:bodyPr/>
+          <a:lstStyle/>
+          <a:p>
+            <a:fld id="{083A2CE0-18CD-4102-B738-4ACFF9E68BA4}" type="slidenum">
+              <a:rPr lang="ko-KR" altLang="en-US" smtClean="0"/>
+              <a:t>10</a:t>
+            </a:fld>
+            <a:endParaRPr lang="ko-KR" altLang="en-US"/>
+          </a:p>
+        </p:txBody>
+      </p:sp>
+      <p:sp>
+        <p:nvSpPr>
+          <p:cNvPr id="5" name="제목 4">
+            <a:extLst>
+              <a:ext uri="{FF2B5EF4-FFF2-40B4-BE49-F238E27FC236}">
+                <a16:creationId xmlns:a16="http://schemas.microsoft.com/office/drawing/2014/main" id="{6CE51FDC-3006-5D10-684A-6BF04168043C}"/>
+              </a:ext>
+            </a:extLst>
+          </p:cNvPr>
+          <p:cNvSpPr>
+            <a:spLocks noGrp="1"/>
+          </p:cNvSpPr>
+          <p:nvPr>
+            <p:ph type="title"/>
+          </p:nvPr>
+        </p:nvSpPr>
+        <p:spPr/>
+        <p:txBody>
+          <a:bodyPr/>
+          <a:lstStyle/>
+          <a:p>
+            <a:r>
+              <a:rPr lang="ko-KR" altLang="en-US" dirty="0"/>
+              <a:t>확약서 서명 및 체크리스트 작성</a:t>
+            </a:r>
+          </a:p>
+        </p:txBody>
+      </p:sp>
+      <p:pic>
+        <p:nvPicPr>
+          <p:cNvPr id="7" name="그림 6">
+            <a:extLst>
+              <a:ext uri="{FF2B5EF4-FFF2-40B4-BE49-F238E27FC236}">
+                <a16:creationId xmlns:a16="http://schemas.microsoft.com/office/drawing/2014/main" id="{020B9F45-0BCE-4FFF-D576-1A68CF8A4E16}"/>
+              </a:ext>
+            </a:extLst>
+          </p:cNvPr>
+          <p:cNvPicPr>
+            <a:picLocks noChangeAspect="1"/>
+          </p:cNvPicPr>
+          <p:nvPr/>
+        </p:nvPicPr>
+        <p:blipFill>
+          <a:blip r:embed="rId3"/>
+          <a:stretch>
+            <a:fillRect/>
+          </a:stretch>
+        </p:blipFill>
+        <p:spPr>
+          <a:xfrm>
+            <a:off x="1612797" y="2219907"/>
+            <a:ext cx="2767937" cy="3846021"/>
+          </a:xfrm>
+          <a:prstGeom prst="rect">
+            <a:avLst/>
+          </a:prstGeom>
+        </p:spPr>
+      </p:pic>
+      <p:pic>
+        <p:nvPicPr>
+          <p:cNvPr id="13" name="그림 12">
+            <a:extLst>
+              <a:ext uri="{FF2B5EF4-FFF2-40B4-BE49-F238E27FC236}">
+                <a16:creationId xmlns:a16="http://schemas.microsoft.com/office/drawing/2014/main" id="{19362997-968B-2B22-074F-738C5AC2819E}"/>
+              </a:ext>
+            </a:extLst>
+          </p:cNvPr>
+          <p:cNvPicPr>
+            <a:picLocks noChangeAspect="1"/>
+          </p:cNvPicPr>
+          <p:nvPr/>
+        </p:nvPicPr>
+        <p:blipFill>
+          <a:blip r:embed="rId4"/>
+          <a:stretch>
+            <a:fillRect/>
+          </a:stretch>
+        </p:blipFill>
+        <p:spPr>
+          <a:xfrm>
+            <a:off x="7674413" y="1972830"/>
+            <a:ext cx="2904790" cy="4120498"/>
+          </a:xfrm>
+          <a:prstGeom prst="rect">
+            <a:avLst/>
+          </a:prstGeom>
+        </p:spPr>
+      </p:pic>
+      <p:pic>
+        <p:nvPicPr>
+          <p:cNvPr id="9" name="그림 8">
+            <a:extLst>
+              <a:ext uri="{FF2B5EF4-FFF2-40B4-BE49-F238E27FC236}">
+                <a16:creationId xmlns:a16="http://schemas.microsoft.com/office/drawing/2014/main" id="{AEC3B96B-E4B6-CA84-920F-DA215628233A}"/>
+              </a:ext>
+            </a:extLst>
+          </p:cNvPr>
+          <p:cNvPicPr>
+            <a:picLocks noChangeAspect="1"/>
+          </p:cNvPicPr>
+          <p:nvPr/>
+        </p:nvPicPr>
+        <p:blipFill>
+          <a:blip r:embed="rId5"/>
+          <a:stretch>
+            <a:fillRect/>
+          </a:stretch>
+        </p:blipFill>
+        <p:spPr>
+          <a:xfrm>
+            <a:off x="5754587" y="2280348"/>
+            <a:ext cx="2693026" cy="3838564"/>
+          </a:xfrm>
+          <a:prstGeom prst="rect">
+            <a:avLst/>
+          </a:prstGeom>
+        </p:spPr>
+      </p:pic>
+      <p:sp>
+        <p:nvSpPr>
+          <p:cNvPr id="2" name="TextBox 1">
+            <a:extLst>
+              <a:ext uri="{FF2B5EF4-FFF2-40B4-BE49-F238E27FC236}">
+                <a16:creationId xmlns:a16="http://schemas.microsoft.com/office/drawing/2014/main" id="{668BC5BD-6B75-2582-0591-10683FD60FC2}"/>
+              </a:ext>
+            </a:extLst>
+          </p:cNvPr>
+          <p:cNvSpPr txBox="1"/>
+          <p:nvPr/>
+        </p:nvSpPr>
+        <p:spPr>
+          <a:xfrm>
+            <a:off x="1173819" y="1449739"/>
+            <a:ext cx="9844362" cy="369332"/>
+          </a:xfrm>
+          <a:prstGeom prst="rect">
+            <a:avLst/>
+          </a:prstGeom>
+          <a:noFill/>
+        </p:spPr>
+        <p:txBody>
+          <a:bodyPr wrap="none" rtlCol="0">
+            <a:spAutoFit/>
+          </a:bodyPr>
+          <a:lstStyle/>
+          <a:p>
+            <a:r>
+              <a:rPr lang="ko-KR" altLang="en-US" b="1" dirty="0">
+                <a:solidFill>
+                  <a:schemeClr val="accent1"/>
+                </a:solidFill>
+              </a:rPr>
+              <a:t>작성 완료하신 분은 화재보험 가입을 위한 주민번호 기입을 위해 서류와 함께 앞으로 나와주세요</a:t>
+            </a:r>
+            <a:r>
+              <a:rPr lang="en-US" altLang="ko-KR" b="1" dirty="0">
+                <a:solidFill>
+                  <a:schemeClr val="accent1"/>
+                </a:solidFill>
+              </a:rPr>
+              <a:t>!</a:t>
+            </a:r>
+            <a:endParaRPr lang="ko-KR" altLang="en-US" b="1" dirty="0">
+              <a:solidFill>
+                <a:schemeClr val="accent1"/>
+              </a:solidFill>
+            </a:endParaRPr>
+          </a:p>
+        </p:txBody>
+      </p:sp>
+    </p:spTree>
+    <p:extLst>
+      <p:ext uri="{BB962C8B-B14F-4D97-AF65-F5344CB8AC3E}">
+        <p14:creationId xmlns:p14="http://schemas.microsoft.com/office/powerpoint/2010/main" val="2191844993"/>
+      </p:ext>
+    </p:extLst>
+  </p:cSld>
+  <p:clrMapOvr>
+    <a:masterClrMapping/>
+  </p:clrMapOvr>
+</p:sld>
+</file>
+
+<file path=ppt/slides/slide11.xml><?xml version="1.0" encoding="utf-8"?>
+<p:sld xmlns:a="http://schemas.openxmlformats.org/drawingml/2006/main" xmlns:r="http://schemas.openxmlformats.org/officeDocument/2006/relationships" xmlns:p="http://schemas.openxmlformats.org/presentationml/2006/main">
+  <p:cSld>
+    <p:spTree>
+      <p:nvGrpSpPr>
         <p:cNvPr id="1" name="">
           <a:extLst>
             <a:ext uri="{FF2B5EF4-FFF2-40B4-BE49-F238E27FC236}">
@@ -7336,204 +7770,6 @@
     <p:extLst>
       <p:ext uri="{BB962C8B-B14F-4D97-AF65-F5344CB8AC3E}">
         <p14:creationId xmlns:p14="http://schemas.microsoft.com/office/powerpoint/2010/main" val="71235578"/>
-      </p:ext>
-    </p:extLst>
-  </p:cSld>
-  <p:clrMapOvr>
-    <a:masterClrMapping/>
-  </p:clrMapOvr>
-</p:sld>
-</file>
-
-<file path=ppt/slides/slide11.xml><?xml version="1.0" encoding="utf-8"?>
-<p:sld xmlns:a="http://schemas.openxmlformats.org/drawingml/2006/main" xmlns:r="http://schemas.openxmlformats.org/officeDocument/2006/relationships" xmlns:p="http://schemas.openxmlformats.org/presentationml/2006/main">
-  <p:cSld>
-    <p:spTree>
-      <p:nvGrpSpPr>
-        <p:cNvPr id="1" name=""/>
-        <p:cNvGrpSpPr/>
-        <p:nvPr/>
-      </p:nvGrpSpPr>
-      <p:grpSpPr>
-        <a:xfrm>
-          <a:off x="0" y="0"/>
-          <a:ext cx="0" cy="0"/>
-          <a:chOff x="0" y="0"/>
-          <a:chExt cx="0" cy="0"/>
-        </a:xfrm>
-      </p:grpSpPr>
-      <p:sp>
-        <p:nvSpPr>
-          <p:cNvPr id="8" name="직사각형 7">
-            <a:extLst>
-              <a:ext uri="{FF2B5EF4-FFF2-40B4-BE49-F238E27FC236}">
-                <a16:creationId xmlns:a16="http://schemas.microsoft.com/office/drawing/2014/main" id="{5BB94A53-7EB2-9249-2AA7-ADA76A47ACE2}"/>
-              </a:ext>
-            </a:extLst>
-          </p:cNvPr>
-          <p:cNvSpPr/>
-          <p:nvPr/>
-        </p:nvSpPr>
-        <p:spPr>
-          <a:xfrm>
-            <a:off x="874507" y="2027200"/>
-            <a:ext cx="10515600" cy="3262671"/>
-          </a:xfrm>
-          <a:prstGeom prst="rect">
-            <a:avLst/>
-          </a:prstGeom>
-        </p:spPr>
-        <p:style>
-          <a:lnRef idx="2">
-            <a:schemeClr val="dk1">
-              <a:shade val="50000"/>
-            </a:schemeClr>
-          </a:lnRef>
-          <a:fillRef idx="1">
-            <a:schemeClr val="dk1"/>
-          </a:fillRef>
-          <a:effectRef idx="0">
-            <a:schemeClr val="dk1"/>
-          </a:effectRef>
-          <a:fontRef idx="minor">
-            <a:schemeClr val="lt1"/>
-          </a:fontRef>
-        </p:style>
-        <p:txBody>
-          <a:bodyPr rtlCol="0" anchor="ctr"/>
-          <a:lstStyle/>
-          <a:p>
-            <a:pPr algn="ctr"/>
-            <a:endParaRPr lang="ko-KR" altLang="en-US"/>
-          </a:p>
-        </p:txBody>
-      </p:sp>
-      <p:pic>
-        <p:nvPicPr>
-          <p:cNvPr id="7" name="내용 개체 틀 6">
-            <a:extLst>
-              <a:ext uri="{FF2B5EF4-FFF2-40B4-BE49-F238E27FC236}">
-                <a16:creationId xmlns:a16="http://schemas.microsoft.com/office/drawing/2014/main" id="{D8A1035E-C3E6-CAB4-CB53-772856074142}"/>
-              </a:ext>
-            </a:extLst>
-          </p:cNvPr>
-          <p:cNvPicPr>
-            <a:picLocks noGrp="1" noChangeAspect="1"/>
-          </p:cNvPicPr>
-          <p:nvPr>
-            <p:ph idx="1"/>
-          </p:nvPr>
-        </p:nvPicPr>
-        <p:blipFill>
-          <a:blip r:embed="rId3">
-            <a:extLst>
-              <a:ext uri="{28A0092B-C50C-407E-A947-70E740481C1C}">
-                <a14:useLocalDpi xmlns:a14="http://schemas.microsoft.com/office/drawing/2010/main" val="0"/>
-              </a:ext>
-            </a:extLst>
-          </a:blip>
-          <a:stretch>
-            <a:fillRect/>
-          </a:stretch>
-        </p:blipFill>
-        <p:spPr>
-          <a:xfrm>
-            <a:off x="1288803" y="2528177"/>
-            <a:ext cx="9614394" cy="2260716"/>
-          </a:xfrm>
-        </p:spPr>
-      </p:pic>
-      <p:sp>
-        <p:nvSpPr>
-          <p:cNvPr id="4" name="날짜 개체 틀 3">
-            <a:extLst>
-              <a:ext uri="{FF2B5EF4-FFF2-40B4-BE49-F238E27FC236}">
-                <a16:creationId xmlns:a16="http://schemas.microsoft.com/office/drawing/2014/main" id="{262E0B53-E0E0-F605-AE5D-CBC41626BB09}"/>
-              </a:ext>
-            </a:extLst>
-          </p:cNvPr>
-          <p:cNvSpPr>
-            <a:spLocks noGrp="1"/>
-          </p:cNvSpPr>
-          <p:nvPr>
-            <p:ph type="dt" sz="half" idx="10"/>
-          </p:nvPr>
-        </p:nvSpPr>
-        <p:spPr/>
-        <p:txBody>
-          <a:bodyPr/>
-          <a:lstStyle/>
-          <a:p>
-            <a:fld id="{3C9CE3CE-253F-4F9D-BA15-C226C8D8501E}" type="datetime6">
-              <a:rPr lang="ko-KR" altLang="en-US" smtClean="0"/>
-              <a:t>2024년 5월</a:t>
-            </a:fld>
-            <a:endParaRPr lang="ko-KR" altLang="en-US"/>
-          </a:p>
-        </p:txBody>
-      </p:sp>
-      <p:sp>
-        <p:nvSpPr>
-          <p:cNvPr id="5" name="슬라이드 번호 개체 틀 4">
-            <a:extLst>
-              <a:ext uri="{FF2B5EF4-FFF2-40B4-BE49-F238E27FC236}">
-                <a16:creationId xmlns:a16="http://schemas.microsoft.com/office/drawing/2014/main" id="{F07E3F96-E9FB-A7CD-5BE4-ECB3A6952CA2}"/>
-              </a:ext>
-            </a:extLst>
-          </p:cNvPr>
-          <p:cNvSpPr>
-            <a:spLocks noGrp="1"/>
-          </p:cNvSpPr>
-          <p:nvPr>
-            <p:ph type="sldNum" sz="quarter" idx="12"/>
-          </p:nvPr>
-        </p:nvSpPr>
-        <p:spPr/>
-        <p:txBody>
-          <a:bodyPr/>
-          <a:lstStyle/>
-          <a:p>
-            <a:fld id="{083A2CE0-18CD-4102-B738-4ACFF9E68BA4}" type="slidenum">
-              <a:rPr lang="ko-KR" altLang="en-US" smtClean="0"/>
-              <a:t>11</a:t>
-            </a:fld>
-            <a:endParaRPr lang="ko-KR" altLang="en-US"/>
-          </a:p>
-        </p:txBody>
-      </p:sp>
-      <p:sp>
-        <p:nvSpPr>
-          <p:cNvPr id="2" name="제목 1">
-            <a:extLst>
-              <a:ext uri="{FF2B5EF4-FFF2-40B4-BE49-F238E27FC236}">
-                <a16:creationId xmlns:a16="http://schemas.microsoft.com/office/drawing/2014/main" id="{DBCF21E7-CA19-7543-C877-324BE0E54368}"/>
-              </a:ext>
-            </a:extLst>
-          </p:cNvPr>
-          <p:cNvSpPr>
-            <a:spLocks noGrp="1"/>
-          </p:cNvSpPr>
-          <p:nvPr>
-            <p:ph type="title"/>
-          </p:nvPr>
-        </p:nvSpPr>
-        <p:spPr/>
-        <p:txBody>
-          <a:bodyPr/>
-          <a:lstStyle/>
-          <a:p>
-            <a:r>
-              <a:rPr lang="ko-KR" altLang="en-US" dirty="0" err="1"/>
-              <a:t>코딩온에서는</a:t>
-            </a:r>
-            <a:endParaRPr lang="ko-KR" altLang="en-US" dirty="0"/>
-          </a:p>
-        </p:txBody>
-      </p:sp>
-    </p:spTree>
-    <p:extLst>
-      <p:ext uri="{BB962C8B-B14F-4D97-AF65-F5344CB8AC3E}">
-        <p14:creationId xmlns:p14="http://schemas.microsoft.com/office/powerpoint/2010/main" val="3754047923"/>
       </p:ext>
     </p:extLst>
   </p:cSld>
@@ -7562,10 +7798,91 @@
       </p:grpSpPr>
       <p:sp>
         <p:nvSpPr>
+          <p:cNvPr id="8" name="직사각형 7">
+            <a:extLst>
+              <a:ext uri="{FF2B5EF4-FFF2-40B4-BE49-F238E27FC236}">
+                <a16:creationId xmlns:a16="http://schemas.microsoft.com/office/drawing/2014/main" id="{5BB94A53-7EB2-9249-2AA7-ADA76A47ACE2}"/>
+              </a:ext>
+            </a:extLst>
+          </p:cNvPr>
+          <p:cNvSpPr/>
+          <p:nvPr/>
+        </p:nvSpPr>
+        <p:spPr>
+          <a:xfrm>
+            <a:off x="874507" y="2027200"/>
+            <a:ext cx="10515600" cy="3262671"/>
+          </a:xfrm>
+          <a:prstGeom prst="rect">
+            <a:avLst/>
+          </a:prstGeom>
+        </p:spPr>
+        <p:style>
+          <a:lnRef idx="2">
+            <a:schemeClr val="dk1">
+              <a:shade val="50000"/>
+            </a:schemeClr>
+          </a:lnRef>
+          <a:fillRef idx="1">
+            <a:schemeClr val="dk1"/>
+          </a:fillRef>
+          <a:effectRef idx="0">
+            <a:schemeClr val="dk1"/>
+          </a:effectRef>
+          <a:fontRef idx="minor">
+            <a:schemeClr val="lt1"/>
+          </a:fontRef>
+        </p:style>
+        <p:txBody>
+          <a:bodyPr rtlCol="0" anchor="ctr"/>
+          <a:lstStyle/>
+          <a:p>
+            <a:pPr algn="ctr"/>
+            <a:endParaRPr lang="ko-KR" altLang="en-US"/>
+          </a:p>
+        </p:txBody>
+      </p:sp>
+      <p:pic>
+        <p:nvPicPr>
+          <p:cNvPr id="7" name="내용 개체 틀 6">
+            <a:extLst>
+              <a:ext uri="{FF2B5EF4-FFF2-40B4-BE49-F238E27FC236}">
+                <a16:creationId xmlns:a16="http://schemas.microsoft.com/office/drawing/2014/main" id="{D8A1035E-C3E6-CAB4-CB53-772856074142}"/>
+              </a:ext>
+            </a:extLst>
+          </p:cNvPr>
+          <p:cNvPicPr>
+            <a:picLocks noGrp="1" noChangeAspect="1"/>
+          </p:cNvPicPr>
+          <p:nvPr>
+            <p:ph idx="1"/>
+          </p:nvPr>
+        </p:nvPicPr>
+        <p:blipFill>
+          <a:blip r:embed="rId3">
+            <a:extLst>
+              <a:ext uri="{28A0092B-C50C-407E-A947-70E740481C1C}">
+                <a14:useLocalDpi xmlns:a14="http://schemas.microsoft.com/office/drawing/2010/main" val="0"/>
+              </a:ext>
+            </a:extLst>
+          </a:blip>
+          <a:stretch>
+            <a:fillRect/>
+          </a:stretch>
+        </p:blipFill>
+        <p:spPr>
+          <a:xfrm>
+            <a:off x="1288803" y="2528177"/>
+            <a:ext cx="9614394" cy="2260716"/>
+          </a:xfrm>
+        </p:spPr>
+      </p:pic>
+      <p:sp>
+        <p:nvSpPr>
           <p:cNvPr id="4" name="날짜 개체 틀 3">
             <a:extLst>
               <a:ext uri="{FF2B5EF4-FFF2-40B4-BE49-F238E27FC236}">
-                <a16:creationId xmlns:a16="http://schemas.microsoft.com/office/drawing/2014/main" id="{8692A623-1E1A-7CB9-1FC7-84129EFA1C30}"/>
+                <a16:creationId xmlns:a16="http://schemas.microsoft.com/office/drawing/2014/main" id="{262E0B53-E0E0-F605-AE5D-CBC41626BB09}"/>
               </a:ext>
             </a:extLst>
           </p:cNvPr>
@@ -7581,7 +7898,7 @@
           <a:bodyPr/>
           <a:lstStyle/>
           <a:p>
-            <a:fld id="{2CFBFBFA-EBC3-4288-86D0-55A69B340430}" type="datetime6">
+            <a:fld id="{3C9CE3CE-253F-4F9D-BA15-C226C8D8501E}" type="datetime6">
               <a:rPr lang="ko-KR" altLang="en-US" smtClean="0"/>
               <a:t>2024년 5월</a:t>
             </a:fld>
@@ -7594,7 +7911,7 @@
           <p:cNvPr id="5" name="슬라이드 번호 개체 틀 4">
             <a:extLst>
               <a:ext uri="{FF2B5EF4-FFF2-40B4-BE49-F238E27FC236}">
-                <a16:creationId xmlns:a16="http://schemas.microsoft.com/office/drawing/2014/main" id="{0A828EB3-DD5D-5147-DB5C-6EBF4140E72C}"/>
+                <a16:creationId xmlns:a16="http://schemas.microsoft.com/office/drawing/2014/main" id="{F07E3F96-E9FB-A7CD-5BE4-ECB3A6952CA2}"/>
               </a:ext>
             </a:extLst>
           </p:cNvPr>
@@ -7620,204 +7937,37 @@
       </p:sp>
       <p:sp>
         <p:nvSpPr>
-          <p:cNvPr id="8" name="슬라이드 번호 개체 틀 4">
-            <a:extLst>
-              <a:ext uri="{FF2B5EF4-FFF2-40B4-BE49-F238E27FC236}">
-                <a16:creationId xmlns:a16="http://schemas.microsoft.com/office/drawing/2014/main" id="{A7866ED4-0F74-48BC-84C6-42485677A1A4}"/>
-              </a:ext>
-            </a:extLst>
-          </p:cNvPr>
-          <p:cNvSpPr>
-            <a:spLocks noGrp="1"/>
-          </p:cNvSpPr>
-          <p:nvPr/>
-        </p:nvSpPr>
-        <p:spPr>
-          <a:xfrm>
-            <a:off x="9029700" y="6303732"/>
-            <a:ext cx="2743200" cy="365125"/>
-          </a:xfrm>
-          <a:prstGeom prst="rect">
-            <a:avLst/>
-          </a:prstGeom>
-        </p:spPr>
-        <p:txBody>
-          <a:bodyPr vert="horz" lIns="91440" tIns="45720" rIns="91440" bIns="45720" rtlCol="0" anchor="ctr"/>
-          <a:lstStyle>
-            <a:defPPr>
-              <a:defRPr lang="ko-KR"/>
-            </a:defPPr>
-            <a:lvl1pPr marL="0" algn="r" defTabSz="914400" rtl="0" eaLnBrk="1" latinLnBrk="1" hangingPunct="1">
-              <a:defRPr sz="1200" kern="1200">
-                <a:solidFill>
-                  <a:schemeClr val="tx1">
-                    <a:tint val="75000"/>
-                  </a:schemeClr>
-                </a:solidFill>
-                <a:latin typeface="+mn-lt"/>
-                <a:ea typeface="+mn-ea"/>
-                <a:cs typeface="+mn-cs"/>
-              </a:defRPr>
-            </a:lvl1pPr>
-            <a:lvl2pPr marL="457200" algn="l" defTabSz="914400" rtl="0" eaLnBrk="1" latinLnBrk="1" hangingPunct="1">
-              <a:defRPr sz="1800" kern="1200">
-                <a:solidFill>
-                  <a:schemeClr val="tx1"/>
-                </a:solidFill>
-                <a:latin typeface="+mn-lt"/>
-                <a:ea typeface="+mn-ea"/>
-                <a:cs typeface="+mn-cs"/>
-              </a:defRPr>
-            </a:lvl2pPr>
-            <a:lvl3pPr marL="914400" algn="l" defTabSz="914400" rtl="0" eaLnBrk="1" latinLnBrk="1" hangingPunct="1">
-              <a:defRPr sz="1800" kern="1200">
-                <a:solidFill>
-                  <a:schemeClr val="tx1"/>
-                </a:solidFill>
-                <a:latin typeface="+mn-lt"/>
-                <a:ea typeface="+mn-ea"/>
-                <a:cs typeface="+mn-cs"/>
-              </a:defRPr>
-            </a:lvl3pPr>
-            <a:lvl4pPr marL="1371600" algn="l" defTabSz="914400" rtl="0" eaLnBrk="1" latinLnBrk="1" hangingPunct="1">
-              <a:defRPr sz="1800" kern="1200">
-                <a:solidFill>
-                  <a:schemeClr val="tx1"/>
-                </a:solidFill>
-                <a:latin typeface="+mn-lt"/>
-                <a:ea typeface="+mn-ea"/>
-                <a:cs typeface="+mn-cs"/>
-              </a:defRPr>
-            </a:lvl4pPr>
-            <a:lvl5pPr marL="1828800" algn="l" defTabSz="914400" rtl="0" eaLnBrk="1" latinLnBrk="1" hangingPunct="1">
-              <a:defRPr sz="1800" kern="1200">
-                <a:solidFill>
-                  <a:schemeClr val="tx1"/>
-                </a:solidFill>
-                <a:latin typeface="+mn-lt"/>
-                <a:ea typeface="+mn-ea"/>
-                <a:cs typeface="+mn-cs"/>
-              </a:defRPr>
-            </a:lvl5pPr>
-            <a:lvl6pPr marL="2286000" algn="l" defTabSz="914400" rtl="0" eaLnBrk="1" latinLnBrk="1" hangingPunct="1">
-              <a:defRPr sz="1800" kern="1200">
-                <a:solidFill>
-                  <a:schemeClr val="tx1"/>
-                </a:solidFill>
-                <a:latin typeface="+mn-lt"/>
-                <a:ea typeface="+mn-ea"/>
-                <a:cs typeface="+mn-cs"/>
-              </a:defRPr>
-            </a:lvl6pPr>
-            <a:lvl7pPr marL="2743200" algn="l" defTabSz="914400" rtl="0" eaLnBrk="1" latinLnBrk="1" hangingPunct="1">
-              <a:defRPr sz="1800" kern="1200">
-                <a:solidFill>
-                  <a:schemeClr val="tx1"/>
-                </a:solidFill>
-                <a:latin typeface="+mn-lt"/>
-                <a:ea typeface="+mn-ea"/>
-                <a:cs typeface="+mn-cs"/>
-              </a:defRPr>
-            </a:lvl7pPr>
-            <a:lvl8pPr marL="3200400" algn="l" defTabSz="914400" rtl="0" eaLnBrk="1" latinLnBrk="1" hangingPunct="1">
-              <a:defRPr sz="1800" kern="1200">
-                <a:solidFill>
-                  <a:schemeClr val="tx1"/>
-                </a:solidFill>
-                <a:latin typeface="+mn-lt"/>
-                <a:ea typeface="+mn-ea"/>
-                <a:cs typeface="+mn-cs"/>
-              </a:defRPr>
-            </a:lvl8pPr>
-            <a:lvl9pPr marL="3657600" algn="l" defTabSz="914400" rtl="0" eaLnBrk="1" latinLnBrk="1" hangingPunct="1">
-              <a:defRPr sz="1800" kern="1200">
-                <a:solidFill>
-                  <a:schemeClr val="tx1"/>
-                </a:solidFill>
-                <a:latin typeface="+mn-lt"/>
-                <a:ea typeface="+mn-ea"/>
-                <a:cs typeface="+mn-cs"/>
-              </a:defRPr>
-            </a:lvl9pPr>
-          </a:lstStyle>
-          <a:p>
-            <a:fld id="{083A2CE0-18CD-4102-B738-4ACFF9E68BA4}" type="slidenum">
-              <a:rPr lang="ko-KR" altLang="en-US" smtClean="0"/>
-              <a:pPr/>
-              <a:t>12</a:t>
-            </a:fld>
-            <a:endParaRPr lang="ko-KR" altLang="en-US"/>
-          </a:p>
-        </p:txBody>
-      </p:sp>
-      <p:sp>
-        <p:nvSpPr>
-          <p:cNvPr id="3" name="제목 1">
-            <a:extLst>
-              <a:ext uri="{FF2B5EF4-FFF2-40B4-BE49-F238E27FC236}">
-                <a16:creationId xmlns:a16="http://schemas.microsoft.com/office/drawing/2014/main" id="{43054EBB-F401-BE68-C4D1-B1DC2AE0520E}"/>
-              </a:ext>
-            </a:extLst>
-          </p:cNvPr>
-          <p:cNvSpPr>
-            <a:spLocks noGrp="1"/>
-          </p:cNvSpPr>
-          <p:nvPr/>
-        </p:nvSpPr>
-        <p:spPr>
-          <a:xfrm>
-            <a:off x="1265413" y="1649845"/>
-            <a:ext cx="10023122" cy="2999141"/>
-          </a:xfrm>
-          <a:prstGeom prst="rect">
-            <a:avLst/>
-          </a:prstGeom>
-        </p:spPr>
-        <p:txBody>
-          <a:bodyPr vert="horz" lIns="91440" tIns="45720" rIns="91440" bIns="45720" rtlCol="0" anchor="ctr">
-            <a:normAutofit/>
-          </a:bodyPr>
-          <a:lstStyle>
-            <a:lvl1pPr algn="l" defTabSz="914400" rtl="0" eaLnBrk="1" latinLnBrk="1" hangingPunct="1">
-              <a:lnSpc>
-                <a:spcPct val="90000"/>
-              </a:lnSpc>
-              <a:spcBef>
-                <a:spcPct val="0"/>
-              </a:spcBef>
-              <a:buNone/>
-              <a:defRPr sz="4400" kern="1200">
-                <a:solidFill>
-                  <a:schemeClr val="tx1"/>
-                </a:solidFill>
-                <a:latin typeface="+mj-lt"/>
-                <a:ea typeface="+mj-ea"/>
-                <a:cs typeface="+mj-cs"/>
-              </a:defRPr>
-            </a:lvl1pPr>
-          </a:lstStyle>
-          <a:p>
-            <a:pPr algn="ctr"/>
-            <a:r>
-              <a:rPr lang="ko-KR" altLang="en-US" sz="8800" b="1" dirty="0"/>
-              <a:t>션</a:t>
-            </a:r>
-            <a:r>
-              <a:rPr lang="en-US" altLang="ko-KR" sz="8800" b="1" dirty="0"/>
-              <a:t> </a:t>
-            </a:r>
-            <a:r>
-              <a:rPr lang="ko-KR" altLang="en-US" sz="8800" b="1" dirty="0"/>
-              <a:t>리더님</a:t>
-            </a:r>
-            <a:endParaRPr lang="en-US" altLang="ko-KR" sz="3200" b="1" dirty="0"/>
+          <p:cNvPr id="2" name="제목 1">
+            <a:extLst>
+              <a:ext uri="{FF2B5EF4-FFF2-40B4-BE49-F238E27FC236}">
+                <a16:creationId xmlns:a16="http://schemas.microsoft.com/office/drawing/2014/main" id="{DBCF21E7-CA19-7543-C877-324BE0E54368}"/>
+              </a:ext>
+            </a:extLst>
+          </p:cNvPr>
+          <p:cNvSpPr>
+            <a:spLocks noGrp="1"/>
+          </p:cNvSpPr>
+          <p:nvPr>
+            <p:ph type="title"/>
+          </p:nvPr>
+        </p:nvSpPr>
+        <p:spPr/>
+        <p:txBody>
+          <a:bodyPr/>
+          <a:lstStyle/>
+          <a:p>
+            <a:r>
+              <a:rPr lang="ko-KR" altLang="en-US" dirty="0" err="1"/>
+              <a:t>코딩온에서는</a:t>
+            </a:r>
+            <a:endParaRPr lang="ko-KR" altLang="en-US" dirty="0"/>
           </a:p>
         </p:txBody>
       </p:sp>
     </p:spTree>
     <p:extLst>
       <p:ext uri="{BB962C8B-B14F-4D97-AF65-F5344CB8AC3E}">
-        <p14:creationId xmlns:p14="http://schemas.microsoft.com/office/powerpoint/2010/main" val="2020943542"/>
+        <p14:creationId xmlns:p14="http://schemas.microsoft.com/office/powerpoint/2010/main" val="3754047923"/>
       </p:ext>
     </p:extLst>
   </p:cSld>
@@ -8083,6 +8233,290 @@
           <a:p>
             <a:pPr algn="ctr"/>
             <a:r>
+              <a:rPr lang="ko-KR" altLang="en-US" sz="8800" b="1" dirty="0"/>
+              <a:t>션</a:t>
+            </a:r>
+            <a:r>
+              <a:rPr lang="en-US" altLang="ko-KR" sz="8800" b="1" dirty="0"/>
+              <a:t> </a:t>
+            </a:r>
+            <a:r>
+              <a:rPr lang="ko-KR" altLang="en-US" sz="8800" b="1" dirty="0"/>
+              <a:t>리더님</a:t>
+            </a:r>
+            <a:endParaRPr lang="en-US" altLang="ko-KR" sz="3200" b="1" dirty="0"/>
+          </a:p>
+        </p:txBody>
+      </p:sp>
+    </p:spTree>
+    <p:extLst>
+      <p:ext uri="{BB962C8B-B14F-4D97-AF65-F5344CB8AC3E}">
+        <p14:creationId xmlns:p14="http://schemas.microsoft.com/office/powerpoint/2010/main" val="2020943542"/>
+      </p:ext>
+    </p:extLst>
+  </p:cSld>
+  <p:clrMapOvr>
+    <a:masterClrMapping/>
+  </p:clrMapOvr>
+</p:sld>
+</file>
+
+<file path=ppt/slides/slide14.xml><?xml version="1.0" encoding="utf-8"?>
+<p:sld xmlns:a="http://schemas.openxmlformats.org/drawingml/2006/main" xmlns:r="http://schemas.openxmlformats.org/officeDocument/2006/relationships" xmlns:p="http://schemas.openxmlformats.org/presentationml/2006/main">
+  <p:cSld>
+    <p:spTree>
+      <p:nvGrpSpPr>
+        <p:cNvPr id="1" name=""/>
+        <p:cNvGrpSpPr/>
+        <p:nvPr/>
+      </p:nvGrpSpPr>
+      <p:grpSpPr>
+        <a:xfrm>
+          <a:off x="0" y="0"/>
+          <a:ext cx="0" cy="0"/>
+          <a:chOff x="0" y="0"/>
+          <a:chExt cx="0" cy="0"/>
+        </a:xfrm>
+      </p:grpSpPr>
+      <p:sp>
+        <p:nvSpPr>
+          <p:cNvPr id="4" name="날짜 개체 틀 3">
+            <a:extLst>
+              <a:ext uri="{FF2B5EF4-FFF2-40B4-BE49-F238E27FC236}">
+                <a16:creationId xmlns:a16="http://schemas.microsoft.com/office/drawing/2014/main" id="{8692A623-1E1A-7CB9-1FC7-84129EFA1C30}"/>
+              </a:ext>
+            </a:extLst>
+          </p:cNvPr>
+          <p:cNvSpPr>
+            <a:spLocks noGrp="1"/>
+          </p:cNvSpPr>
+          <p:nvPr>
+            <p:ph type="dt" sz="half" idx="10"/>
+          </p:nvPr>
+        </p:nvSpPr>
+        <p:spPr/>
+        <p:txBody>
+          <a:bodyPr/>
+          <a:lstStyle/>
+          <a:p>
+            <a:fld id="{2CFBFBFA-EBC3-4288-86D0-55A69B340430}" type="datetime6">
+              <a:rPr lang="ko-KR" altLang="en-US" smtClean="0"/>
+              <a:t>2024년 5월</a:t>
+            </a:fld>
+            <a:endParaRPr lang="ko-KR" altLang="en-US"/>
+          </a:p>
+        </p:txBody>
+      </p:sp>
+      <p:sp>
+        <p:nvSpPr>
+          <p:cNvPr id="5" name="슬라이드 번호 개체 틀 4">
+            <a:extLst>
+              <a:ext uri="{FF2B5EF4-FFF2-40B4-BE49-F238E27FC236}">
+                <a16:creationId xmlns:a16="http://schemas.microsoft.com/office/drawing/2014/main" id="{0A828EB3-DD5D-5147-DB5C-6EBF4140E72C}"/>
+              </a:ext>
+            </a:extLst>
+          </p:cNvPr>
+          <p:cNvSpPr>
+            <a:spLocks noGrp="1"/>
+          </p:cNvSpPr>
+          <p:nvPr>
+            <p:ph type="sldNum" sz="quarter" idx="12"/>
+          </p:nvPr>
+        </p:nvSpPr>
+        <p:spPr/>
+        <p:txBody>
+          <a:bodyPr/>
+          <a:lstStyle/>
+          <a:p>
+            <a:fld id="{083A2CE0-18CD-4102-B738-4ACFF9E68BA4}" type="slidenum">
+              <a:rPr lang="ko-KR" altLang="en-US" smtClean="0"/>
+              <a:t>14</a:t>
+            </a:fld>
+            <a:endParaRPr lang="ko-KR" altLang="en-US"/>
+          </a:p>
+        </p:txBody>
+      </p:sp>
+      <p:sp>
+        <p:nvSpPr>
+          <p:cNvPr id="8" name="슬라이드 번호 개체 틀 4">
+            <a:extLst>
+              <a:ext uri="{FF2B5EF4-FFF2-40B4-BE49-F238E27FC236}">
+                <a16:creationId xmlns:a16="http://schemas.microsoft.com/office/drawing/2014/main" id="{A7866ED4-0F74-48BC-84C6-42485677A1A4}"/>
+              </a:ext>
+            </a:extLst>
+          </p:cNvPr>
+          <p:cNvSpPr>
+            <a:spLocks noGrp="1"/>
+          </p:cNvSpPr>
+          <p:nvPr/>
+        </p:nvSpPr>
+        <p:spPr>
+          <a:xfrm>
+            <a:off x="9029700" y="6303732"/>
+            <a:ext cx="2743200" cy="365125"/>
+          </a:xfrm>
+          <a:prstGeom prst="rect">
+            <a:avLst/>
+          </a:prstGeom>
+        </p:spPr>
+        <p:txBody>
+          <a:bodyPr vert="horz" lIns="91440" tIns="45720" rIns="91440" bIns="45720" rtlCol="0" anchor="ctr"/>
+          <a:lstStyle>
+            <a:defPPr>
+              <a:defRPr lang="ko-KR"/>
+            </a:defPPr>
+            <a:lvl1pPr marL="0" algn="r" defTabSz="914400" rtl="0" eaLnBrk="1" latinLnBrk="1" hangingPunct="1">
+              <a:defRPr sz="1200" kern="1200">
+                <a:solidFill>
+                  <a:schemeClr val="tx1">
+                    <a:tint val="75000"/>
+                  </a:schemeClr>
+                </a:solidFill>
+                <a:latin typeface="+mn-lt"/>
+                <a:ea typeface="+mn-ea"/>
+                <a:cs typeface="+mn-cs"/>
+              </a:defRPr>
+            </a:lvl1pPr>
+            <a:lvl2pPr marL="457200" algn="l" defTabSz="914400" rtl="0" eaLnBrk="1" latinLnBrk="1" hangingPunct="1">
+              <a:defRPr sz="1800" kern="1200">
+                <a:solidFill>
+                  <a:schemeClr val="tx1"/>
+                </a:solidFill>
+                <a:latin typeface="+mn-lt"/>
+                <a:ea typeface="+mn-ea"/>
+                <a:cs typeface="+mn-cs"/>
+              </a:defRPr>
+            </a:lvl2pPr>
+            <a:lvl3pPr marL="914400" algn="l" defTabSz="914400" rtl="0" eaLnBrk="1" latinLnBrk="1" hangingPunct="1">
+              <a:defRPr sz="1800" kern="1200">
+                <a:solidFill>
+                  <a:schemeClr val="tx1"/>
+                </a:solidFill>
+                <a:latin typeface="+mn-lt"/>
+                <a:ea typeface="+mn-ea"/>
+                <a:cs typeface="+mn-cs"/>
+              </a:defRPr>
+            </a:lvl3pPr>
+            <a:lvl4pPr marL="1371600" algn="l" defTabSz="914400" rtl="0" eaLnBrk="1" latinLnBrk="1" hangingPunct="1">
+              <a:defRPr sz="1800" kern="1200">
+                <a:solidFill>
+                  <a:schemeClr val="tx1"/>
+                </a:solidFill>
+                <a:latin typeface="+mn-lt"/>
+                <a:ea typeface="+mn-ea"/>
+                <a:cs typeface="+mn-cs"/>
+              </a:defRPr>
+            </a:lvl4pPr>
+            <a:lvl5pPr marL="1828800" algn="l" defTabSz="914400" rtl="0" eaLnBrk="1" latinLnBrk="1" hangingPunct="1">
+              <a:defRPr sz="1800" kern="1200">
+                <a:solidFill>
+                  <a:schemeClr val="tx1"/>
+                </a:solidFill>
+                <a:latin typeface="+mn-lt"/>
+                <a:ea typeface="+mn-ea"/>
+                <a:cs typeface="+mn-cs"/>
+              </a:defRPr>
+            </a:lvl5pPr>
+            <a:lvl6pPr marL="2286000" algn="l" defTabSz="914400" rtl="0" eaLnBrk="1" latinLnBrk="1" hangingPunct="1">
+              <a:defRPr sz="1800" kern="1200">
+                <a:solidFill>
+                  <a:schemeClr val="tx1"/>
+                </a:solidFill>
+                <a:latin typeface="+mn-lt"/>
+                <a:ea typeface="+mn-ea"/>
+                <a:cs typeface="+mn-cs"/>
+              </a:defRPr>
+            </a:lvl6pPr>
+            <a:lvl7pPr marL="2743200" algn="l" defTabSz="914400" rtl="0" eaLnBrk="1" latinLnBrk="1" hangingPunct="1">
+              <a:defRPr sz="1800" kern="1200">
+                <a:solidFill>
+                  <a:schemeClr val="tx1"/>
+                </a:solidFill>
+                <a:latin typeface="+mn-lt"/>
+                <a:ea typeface="+mn-ea"/>
+                <a:cs typeface="+mn-cs"/>
+              </a:defRPr>
+            </a:lvl7pPr>
+            <a:lvl8pPr marL="3200400" algn="l" defTabSz="914400" rtl="0" eaLnBrk="1" latinLnBrk="1" hangingPunct="1">
+              <a:defRPr sz="1800" kern="1200">
+                <a:solidFill>
+                  <a:schemeClr val="tx1"/>
+                </a:solidFill>
+                <a:latin typeface="+mn-lt"/>
+                <a:ea typeface="+mn-ea"/>
+                <a:cs typeface="+mn-cs"/>
+              </a:defRPr>
+            </a:lvl8pPr>
+            <a:lvl9pPr marL="3657600" algn="l" defTabSz="914400" rtl="0" eaLnBrk="1" latinLnBrk="1" hangingPunct="1">
+              <a:defRPr sz="1800" kern="1200">
+                <a:solidFill>
+                  <a:schemeClr val="tx1"/>
+                </a:solidFill>
+                <a:latin typeface="+mn-lt"/>
+                <a:ea typeface="+mn-ea"/>
+                <a:cs typeface="+mn-cs"/>
+              </a:defRPr>
+            </a:lvl9pPr>
+          </a:lstStyle>
+          <a:p>
+            <a:fld id="{083A2CE0-18CD-4102-B738-4ACFF9E68BA4}" type="slidenum">
+              <a:rPr lang="ko-KR" altLang="en-US" smtClean="0"/>
+              <a:pPr/>
+              <a:t>14</a:t>
+            </a:fld>
+            <a:endParaRPr lang="ko-KR" altLang="en-US"/>
+          </a:p>
+        </p:txBody>
+      </p:sp>
+      <p:sp>
+        <p:nvSpPr>
+          <p:cNvPr id="3" name="제목 1">
+            <a:extLst>
+              <a:ext uri="{FF2B5EF4-FFF2-40B4-BE49-F238E27FC236}">
+                <a16:creationId xmlns:a16="http://schemas.microsoft.com/office/drawing/2014/main" id="{43054EBB-F401-BE68-C4D1-B1DC2AE0520E}"/>
+              </a:ext>
+            </a:extLst>
+          </p:cNvPr>
+          <p:cNvSpPr>
+            <a:spLocks noGrp="1"/>
+          </p:cNvSpPr>
+          <p:nvPr/>
+        </p:nvSpPr>
+        <p:spPr>
+          <a:xfrm>
+            <a:off x="1265413" y="1649845"/>
+            <a:ext cx="10023122" cy="2999141"/>
+          </a:xfrm>
+          <a:prstGeom prst="rect">
+            <a:avLst/>
+          </a:prstGeom>
+        </p:spPr>
+        <p:txBody>
+          <a:bodyPr vert="horz" lIns="91440" tIns="45720" rIns="91440" bIns="45720" rtlCol="0" anchor="ctr">
+            <a:normAutofit/>
+          </a:bodyPr>
+          <a:lstStyle>
+            <a:lvl1pPr algn="l" defTabSz="914400" rtl="0" eaLnBrk="1" latinLnBrk="1" hangingPunct="1">
+              <a:lnSpc>
+                <a:spcPct val="90000"/>
+              </a:lnSpc>
+              <a:spcBef>
+                <a:spcPct val="0"/>
+              </a:spcBef>
+              <a:buNone/>
+              <a:defRPr sz="4400" kern="1200">
+                <a:solidFill>
+                  <a:schemeClr val="tx1"/>
+                </a:solidFill>
+                <a:latin typeface="+mj-lt"/>
+                <a:ea typeface="+mj-ea"/>
+                <a:cs typeface="+mj-cs"/>
+              </a:defRPr>
+            </a:lvl1pPr>
+          </a:lstStyle>
+          <a:p>
+            <a:pPr algn="ctr"/>
+            <a:r>
               <a:rPr lang="ko-KR" altLang="en-US" sz="8800" b="1" dirty="0" err="1"/>
               <a:t>데이먼</a:t>
             </a:r>
@@ -8111,7 +8545,7 @@
 </p:sld>
 </file>
 
-<file path=ppt/slides/slide14.xml><?xml version="1.0" encoding="utf-8"?>
+<file path=ppt/slides/slide15.xml><?xml version="1.0" encoding="utf-8"?>
 <p:sld xmlns:a="http://schemas.openxmlformats.org/drawingml/2006/main" xmlns:r="http://schemas.openxmlformats.org/officeDocument/2006/relationships" xmlns:p="http://schemas.openxmlformats.org/presentationml/2006/main">
   <p:cSld>
     <p:spTree>
@@ -8177,7 +8611,7 @@
 </p:sld>
 </file>
 
-<file path=ppt/slides/slide15.xml><?xml version="1.0" encoding="utf-8"?>
+<file path=ppt/slides/slide16.xml><?xml version="1.0" encoding="utf-8"?>
 <p:sld xmlns:a="http://schemas.openxmlformats.org/drawingml/2006/main" xmlns:r="http://schemas.openxmlformats.org/officeDocument/2006/relationships" xmlns:p="http://schemas.openxmlformats.org/presentationml/2006/main">
   <p:cSld>
     <p:spTree>
@@ -8246,7 +8680,7 @@
           <a:p>
             <a:fld id="{083A2CE0-18CD-4102-B738-4ACFF9E68BA4}" type="slidenum">
               <a:rPr lang="ko-KR" altLang="en-US" smtClean="0"/>
-              <a:t>15</a:t>
+              <a:t>16</a:t>
             </a:fld>
             <a:endParaRPr lang="ko-KR" altLang="en-US"/>
           </a:p>
@@ -8378,7 +8812,7 @@
             <a:fld id="{083A2CE0-18CD-4102-B738-4ACFF9E68BA4}" type="slidenum">
               <a:rPr lang="ko-KR" altLang="en-US" smtClean="0"/>
               <a:pPr/>
-              <a:t>15</a:t>
+              <a:t>16</a:t>
             </a:fld>
             <a:endParaRPr lang="ko-KR" altLang="en-US"/>
           </a:p>
@@ -8626,7 +9060,7 @@
 </p:sld>
 </file>
 
-<file path=ppt/slides/slide16.xml><?xml version="1.0" encoding="utf-8"?>
+<file path=ppt/slides/slide17.xml><?xml version="1.0" encoding="utf-8"?>
 <p:sld xmlns:a="http://schemas.openxmlformats.org/drawingml/2006/main" xmlns:r="http://schemas.openxmlformats.org/officeDocument/2006/relationships" xmlns:p="http://schemas.openxmlformats.org/presentationml/2006/main">
   <p:cSld>
     <p:spTree>
@@ -8807,105 +9241,6 @@
     <p:extLst>
       <p:ext uri="{BB962C8B-B14F-4D97-AF65-F5344CB8AC3E}">
         <p14:creationId xmlns:p14="http://schemas.microsoft.com/office/powerpoint/2010/main" val="1797300016"/>
-      </p:ext>
-    </p:extLst>
-  </p:cSld>
-  <p:clrMapOvr>
-    <a:masterClrMapping/>
-  </p:clrMapOvr>
-</p:sld>
-</file>
-
-<file path=ppt/slides/slide17.xml><?xml version="1.0" encoding="utf-8"?>
-<p:sld xmlns:a="http://schemas.openxmlformats.org/drawingml/2006/main" xmlns:r="http://schemas.openxmlformats.org/officeDocument/2006/relationships" xmlns:p="http://schemas.openxmlformats.org/presentationml/2006/main">
-  <p:cSld>
-    <p:spTree>
-      <p:nvGrpSpPr>
-        <p:cNvPr id="1" name=""/>
-        <p:cNvGrpSpPr/>
-        <p:nvPr/>
-      </p:nvGrpSpPr>
-      <p:grpSpPr>
-        <a:xfrm>
-          <a:off x="0" y="0"/>
-          <a:ext cx="0" cy="0"/>
-          <a:chOff x="0" y="0"/>
-          <a:chExt cx="0" cy="0"/>
-        </a:xfrm>
-      </p:grpSpPr>
-      <p:sp>
-        <p:nvSpPr>
-          <p:cNvPr id="2" name="날짜 개체 틀 1"/>
-          <p:cNvSpPr>
-            <a:spLocks noGrp="1"/>
-          </p:cNvSpPr>
-          <p:nvPr>
-            <p:ph type="dt" sz="half" idx="10"/>
-          </p:nvPr>
-        </p:nvSpPr>
-        <p:spPr/>
-        <p:txBody>
-          <a:bodyPr/>
-          <a:lstStyle/>
-          <a:p>
-            <a:fld id="{0E19CB95-6D28-40F1-9DA3-1BAC5D4B5B4F}" type="datetime6">
-              <a:rPr lang="ko-KR" altLang="en-US" smtClean="0"/>
-              <a:t>2024년 5월</a:t>
-            </a:fld>
-            <a:endParaRPr lang="ko-KR" altLang="en-US"/>
-          </a:p>
-        </p:txBody>
-      </p:sp>
-      <p:sp>
-        <p:nvSpPr>
-          <p:cNvPr id="3" name="슬라이드 번호 개체 틀 2"/>
-          <p:cNvSpPr>
-            <a:spLocks noGrp="1"/>
-          </p:cNvSpPr>
-          <p:nvPr>
-            <p:ph type="sldNum" sz="quarter" idx="12"/>
-          </p:nvPr>
-        </p:nvSpPr>
-        <p:spPr/>
-        <p:txBody>
-          <a:bodyPr/>
-          <a:lstStyle/>
-          <a:p>
-            <a:fld id="{083A2CE0-18CD-4102-B738-4ACFF9E68BA4}" type="slidenum">
-              <a:rPr lang="ko-KR" altLang="en-US" smtClean="0"/>
-              <a:t>17</a:t>
-            </a:fld>
-            <a:endParaRPr lang="ko-KR" altLang="en-US"/>
-          </a:p>
-        </p:txBody>
-      </p:sp>
-      <p:sp>
-        <p:nvSpPr>
-          <p:cNvPr id="4" name="제목 3"/>
-          <p:cNvSpPr>
-            <a:spLocks noGrp="1"/>
-          </p:cNvSpPr>
-          <p:nvPr>
-            <p:ph type="title"/>
-          </p:nvPr>
-        </p:nvSpPr>
-        <p:spPr/>
-        <p:txBody>
-          <a:bodyPr/>
-          <a:lstStyle/>
-          <a:p>
-            <a:r>
-              <a:rPr lang="en-US" altLang="ko-KR" dirty="0" err="1"/>
-              <a:t>Git</a:t>
-            </a:r>
-            <a:endParaRPr lang="ko-KR" altLang="en-US" dirty="0"/>
-          </a:p>
-        </p:txBody>
-      </p:sp>
-    </p:spTree>
-    <p:extLst>
-      <p:ext uri="{BB962C8B-B14F-4D97-AF65-F5344CB8AC3E}">
-        <p14:creationId xmlns:p14="http://schemas.microsoft.com/office/powerpoint/2010/main" val="1583756813"/>
       </p:ext>
     </p:extLst>
   </p:cSld>
@@ -8934,13 +9269,7 @@
       </p:grpSpPr>
       <p:sp>
         <p:nvSpPr>
-          <p:cNvPr id="4" name="날짜 개체 틀 3">
-            <a:extLst>
-              <a:ext uri="{FF2B5EF4-FFF2-40B4-BE49-F238E27FC236}">
-                <a16:creationId xmlns:a16="http://schemas.microsoft.com/office/drawing/2014/main" id="{284930C1-3800-3283-7676-67E65B80E7F7}"/>
-              </a:ext>
-            </a:extLst>
-          </p:cNvPr>
+          <p:cNvPr id="2" name="날짜 개체 틀 1"/>
           <p:cNvSpPr>
             <a:spLocks noGrp="1"/>
           </p:cNvSpPr>
@@ -8953,7 +9282,7 @@
           <a:bodyPr/>
           <a:lstStyle/>
           <a:p>
-            <a:fld id="{BF037577-ED6E-4A9A-BE84-A36FE19DAF55}" type="datetime6">
+            <a:fld id="{0E19CB95-6D28-40F1-9DA3-1BAC5D4B5B4F}" type="datetime6">
               <a:rPr lang="ko-KR" altLang="en-US" smtClean="0"/>
               <a:t>2024년 5월</a:t>
             </a:fld>
@@ -8963,13 +9292,7 @@
       </p:sp>
       <p:sp>
         <p:nvSpPr>
-          <p:cNvPr id="5" name="슬라이드 번호 개체 틀 4">
-            <a:extLst>
-              <a:ext uri="{FF2B5EF4-FFF2-40B4-BE49-F238E27FC236}">
-                <a16:creationId xmlns:a16="http://schemas.microsoft.com/office/drawing/2014/main" id="{03BA4E39-F813-5D2B-7587-E29FCBC8261A}"/>
-              </a:ext>
-            </a:extLst>
-          </p:cNvPr>
+          <p:cNvPr id="3" name="슬라이드 번호 개체 틀 2"/>
           <p:cNvSpPr>
             <a:spLocks noGrp="1"/>
           </p:cNvSpPr>
@@ -8992,13 +9315,7 @@
       </p:sp>
       <p:sp>
         <p:nvSpPr>
-          <p:cNvPr id="2" name="제목 1">
-            <a:extLst>
-              <a:ext uri="{FF2B5EF4-FFF2-40B4-BE49-F238E27FC236}">
-                <a16:creationId xmlns:a16="http://schemas.microsoft.com/office/drawing/2014/main" id="{2734CB21-9153-185C-018C-D40EE0325E61}"/>
-              </a:ext>
-            </a:extLst>
-          </p:cNvPr>
+          <p:cNvPr id="4" name="제목 3"/>
           <p:cNvSpPr>
             <a:spLocks noGrp="1"/>
           </p:cNvSpPr>
@@ -9012,170 +9329,17 @@
           <a:lstStyle/>
           <a:p>
             <a:r>
-              <a:rPr lang="ko-KR" altLang="en-US" dirty="0"/>
-              <a:t>좋은 포트폴리오를 가꿔보자</a:t>
-            </a:r>
-            <a:r>
-              <a:rPr lang="en-US" altLang="ko-KR" dirty="0"/>
-              <a:t>!</a:t>
+              <a:rPr lang="en-US" altLang="ko-KR" dirty="0" err="1"/>
+              <a:t>Git</a:t>
             </a:r>
             <a:endParaRPr lang="ko-KR" altLang="en-US" dirty="0"/>
-          </a:p>
-        </p:txBody>
-      </p:sp>
-      <p:pic>
-        <p:nvPicPr>
-          <p:cNvPr id="2052" name="Picture 4" descr="개발자 이력서 작성하기 (feat. 이력서 공개) | Wonny Log">
-            <a:extLst>
-              <a:ext uri="{FF2B5EF4-FFF2-40B4-BE49-F238E27FC236}">
-                <a16:creationId xmlns:a16="http://schemas.microsoft.com/office/drawing/2014/main" id="{9A1B6276-E204-7797-6B8C-3218CC40F9A6}"/>
-              </a:ext>
-            </a:extLst>
-          </p:cNvPr>
-          <p:cNvPicPr>
-            <a:picLocks noChangeAspect="1" noChangeArrowheads="1"/>
-          </p:cNvPicPr>
-          <p:nvPr/>
-        </p:nvPicPr>
-        <p:blipFill>
-          <a:blip r:embed="rId2">
-            <a:extLst>
-              <a:ext uri="{28A0092B-C50C-407E-A947-70E740481C1C}">
-                <a14:useLocalDpi xmlns:a14="http://schemas.microsoft.com/office/drawing/2010/main" val="0"/>
-              </a:ext>
-            </a:extLst>
-          </a:blip>
-          <a:srcRect/>
-          <a:stretch>
-            <a:fillRect/>
-          </a:stretch>
-        </p:blipFill>
-        <p:spPr bwMode="auto">
-          <a:xfrm>
-            <a:off x="5710535" y="1735075"/>
-            <a:ext cx="5898221" cy="4131827"/>
-          </a:xfrm>
-          <a:prstGeom prst="rect">
-            <a:avLst/>
-          </a:prstGeom>
-          <a:noFill/>
-          <a:extLst>
-            <a:ext uri="{909E8E84-426E-40DD-AFC4-6F175D3DCCD1}">
-              <a14:hiddenFill xmlns:a14="http://schemas.microsoft.com/office/drawing/2010/main">
-                <a:solidFill>
-                  <a:srgbClr val="FFFFFF"/>
-                </a:solidFill>
-              </a14:hiddenFill>
-            </a:ext>
-          </a:extLst>
-        </p:spPr>
-      </p:pic>
-      <p:pic>
-        <p:nvPicPr>
-          <p:cNvPr id="3" name="Picture 2" descr="1일 1커밋의 목표를 가지고 있다면? - Bitbar Github 플러그인 설정하기 | Fernando 기술 블로그">
-            <a:extLst>
-              <a:ext uri="{FF2B5EF4-FFF2-40B4-BE49-F238E27FC236}">
-                <a16:creationId xmlns:a16="http://schemas.microsoft.com/office/drawing/2014/main" id="{2C642476-CCB6-28F2-C01B-E6AA8A634F21}"/>
-              </a:ext>
-            </a:extLst>
-          </p:cNvPr>
-          <p:cNvPicPr>
-            <a:picLocks noChangeAspect="1" noChangeArrowheads="1"/>
-          </p:cNvPicPr>
-          <p:nvPr/>
-        </p:nvPicPr>
-        <p:blipFill>
-          <a:blip r:embed="rId3">
-            <a:extLst>
-              <a:ext uri="{28A0092B-C50C-407E-A947-70E740481C1C}">
-                <a14:useLocalDpi xmlns:a14="http://schemas.microsoft.com/office/drawing/2010/main" val="0"/>
-              </a:ext>
-            </a:extLst>
-          </a:blip>
-          <a:srcRect/>
-          <a:stretch>
-            <a:fillRect/>
-          </a:stretch>
-        </p:blipFill>
-        <p:spPr bwMode="auto">
-          <a:xfrm>
-            <a:off x="689776" y="2695209"/>
-            <a:ext cx="4454449" cy="1833748"/>
-          </a:xfrm>
-          <a:prstGeom prst="rect">
-            <a:avLst/>
-          </a:prstGeom>
-          <a:noFill/>
-          <a:extLst>
-            <a:ext uri="{909E8E84-426E-40DD-AFC4-6F175D3DCCD1}">
-              <a14:hiddenFill xmlns:a14="http://schemas.microsoft.com/office/drawing/2010/main">
-                <a:solidFill>
-                  <a:srgbClr val="FFFFFF"/>
-                </a:solidFill>
-              </a14:hiddenFill>
-            </a:ext>
-          </a:extLst>
-        </p:spPr>
-      </p:pic>
-      <p:sp>
-        <p:nvSpPr>
-          <p:cNvPr id="6" name="TextBox 5">
-            <a:extLst>
-              <a:ext uri="{FF2B5EF4-FFF2-40B4-BE49-F238E27FC236}">
-                <a16:creationId xmlns:a16="http://schemas.microsoft.com/office/drawing/2014/main" id="{ABB5351B-8B66-EAAB-14E6-629AA921514C}"/>
-              </a:ext>
-            </a:extLst>
-          </p:cNvPr>
-          <p:cNvSpPr txBox="1"/>
-          <p:nvPr/>
-        </p:nvSpPr>
-        <p:spPr>
-          <a:xfrm>
-            <a:off x="1875686" y="4678729"/>
-            <a:ext cx="1930337" cy="338554"/>
-          </a:xfrm>
-          <a:prstGeom prst="rect">
-            <a:avLst/>
-          </a:prstGeom>
-          <a:noFill/>
-        </p:spPr>
-        <p:txBody>
-          <a:bodyPr wrap="none" rtlCol="0">
-            <a:spAutoFit/>
-          </a:bodyPr>
-          <a:lstStyle/>
-          <a:p>
-            <a:r>
-              <a:rPr lang="en-US" altLang="ko-KR" sz="1600" b="1" dirty="0">
-                <a:solidFill>
-                  <a:schemeClr val="accent6"/>
-                </a:solidFill>
-              </a:rPr>
-              <a:t>GitHub </a:t>
-            </a:r>
-            <a:r>
-              <a:rPr lang="ko-KR" altLang="en-US" sz="1600" b="1" dirty="0" err="1">
-                <a:solidFill>
-                  <a:schemeClr val="accent6"/>
-                </a:solidFill>
-              </a:rPr>
-              <a:t>잔디심기</a:t>
-            </a:r>
-            <a:r>
-              <a:rPr lang="ko-KR" altLang="en-US" sz="1600" b="1" dirty="0">
-                <a:solidFill>
-                  <a:schemeClr val="accent6"/>
-                </a:solidFill>
-              </a:rPr>
-              <a:t>🌱</a:t>
-            </a:r>
           </a:p>
         </p:txBody>
       </p:sp>
     </p:spTree>
     <p:extLst>
       <p:ext uri="{BB962C8B-B14F-4D97-AF65-F5344CB8AC3E}">
-        <p14:creationId xmlns:p14="http://schemas.microsoft.com/office/powerpoint/2010/main" val="1969496758"/>
+        <p14:creationId xmlns:p14="http://schemas.microsoft.com/office/powerpoint/2010/main" val="1583756813"/>
       </p:ext>
     </p:extLst>
   </p:cSld>
@@ -9207,7 +9371,7 @@
           <p:cNvPr id="4" name="날짜 개체 틀 3">
             <a:extLst>
               <a:ext uri="{FF2B5EF4-FFF2-40B4-BE49-F238E27FC236}">
-                <a16:creationId xmlns:a16="http://schemas.microsoft.com/office/drawing/2014/main" id="{844D8E3F-3E15-CA55-DE78-C9E8135D7DC5}"/>
+                <a16:creationId xmlns:a16="http://schemas.microsoft.com/office/drawing/2014/main" id="{284930C1-3800-3283-7676-67E65B80E7F7}"/>
               </a:ext>
             </a:extLst>
           </p:cNvPr>
@@ -9223,7 +9387,7 @@
           <a:bodyPr/>
           <a:lstStyle/>
           <a:p>
-            <a:fld id="{282CA0A7-0190-4FAD-B925-425179F7F418}" type="datetime6">
+            <a:fld id="{BF037577-ED6E-4A9A-BE84-A36FE19DAF55}" type="datetime6">
               <a:rPr lang="ko-KR" altLang="en-US" smtClean="0"/>
               <a:t>2024년 5월</a:t>
             </a:fld>
@@ -9236,7 +9400,7 @@
           <p:cNvPr id="5" name="슬라이드 번호 개체 틀 4">
             <a:extLst>
               <a:ext uri="{FF2B5EF4-FFF2-40B4-BE49-F238E27FC236}">
-                <a16:creationId xmlns:a16="http://schemas.microsoft.com/office/drawing/2014/main" id="{5DB29F7D-CB9C-794A-3A35-FAD82167AF9C}"/>
+                <a16:creationId xmlns:a16="http://schemas.microsoft.com/office/drawing/2014/main" id="{03BA4E39-F813-5D2B-7587-E29FCBC8261A}"/>
               </a:ext>
             </a:extLst>
           </p:cNvPr>
@@ -9260,12 +9424,45 @@
           </a:p>
         </p:txBody>
       </p:sp>
+      <p:sp>
+        <p:nvSpPr>
+          <p:cNvPr id="2" name="제목 1">
+            <a:extLst>
+              <a:ext uri="{FF2B5EF4-FFF2-40B4-BE49-F238E27FC236}">
+                <a16:creationId xmlns:a16="http://schemas.microsoft.com/office/drawing/2014/main" id="{2734CB21-9153-185C-018C-D40EE0325E61}"/>
+              </a:ext>
+            </a:extLst>
+          </p:cNvPr>
+          <p:cNvSpPr>
+            <a:spLocks noGrp="1"/>
+          </p:cNvSpPr>
+          <p:nvPr>
+            <p:ph type="title"/>
+          </p:nvPr>
+        </p:nvSpPr>
+        <p:spPr/>
+        <p:txBody>
+          <a:bodyPr/>
+          <a:lstStyle/>
+          <a:p>
+            <a:r>
+              <a:rPr lang="ko-KR" altLang="en-US" dirty="0"/>
+              <a:t>좋은 포트폴리오를 가꿔보자</a:t>
+            </a:r>
+            <a:r>
+              <a:rPr lang="en-US" altLang="ko-KR" dirty="0"/>
+              <a:t>!</a:t>
+            </a:r>
+            <a:endParaRPr lang="ko-KR" altLang="en-US" dirty="0"/>
+          </a:p>
+        </p:txBody>
+      </p:sp>
       <p:pic>
         <p:nvPicPr>
-          <p:cNvPr id="4098" name="Picture 2" descr="시작하기 | Git / GitHub 안내서">
-            <a:extLst>
-              <a:ext uri="{FF2B5EF4-FFF2-40B4-BE49-F238E27FC236}">
-                <a16:creationId xmlns:a16="http://schemas.microsoft.com/office/drawing/2014/main" id="{734FB0B1-DFE8-E05D-B8D6-E471B0B8E8F2}"/>
+          <p:cNvPr id="2052" name="Picture 4" descr="개발자 이력서 작성하기 (feat. 이력서 공개) | Wonny Log">
+            <a:extLst>
+              <a:ext uri="{FF2B5EF4-FFF2-40B4-BE49-F238E27FC236}">
+                <a16:creationId xmlns:a16="http://schemas.microsoft.com/office/drawing/2014/main" id="{9A1B6276-E204-7797-6B8C-3218CC40F9A6}"/>
               </a:ext>
             </a:extLst>
           </p:cNvPr>
@@ -9275,7 +9472,7 @@
           <p:nvPr/>
         </p:nvPicPr>
         <p:blipFill>
-          <a:blip r:embed="rId3">
+          <a:blip r:embed="rId2">
             <a:extLst>
               <a:ext uri="{28A0092B-C50C-407E-A947-70E740481C1C}">
                 <a14:useLocalDpi xmlns:a14="http://schemas.microsoft.com/office/drawing/2010/main" val="0"/>
@@ -9289,8 +9486,8 @@
         </p:blipFill>
         <p:spPr bwMode="auto">
           <a:xfrm>
-            <a:off x="1799777" y="1409915"/>
-            <a:ext cx="3126658" cy="1302774"/>
+            <a:off x="5710535" y="1735075"/>
+            <a:ext cx="5898221" cy="4131827"/>
           </a:xfrm>
           <a:prstGeom prst="rect">
             <a:avLst/>
@@ -9309,10 +9506,10 @@
       </p:pic>
       <p:pic>
         <p:nvPicPr>
-          <p:cNvPr id="3074" name="Picture 2" descr="VSCode 익스텐션 추천 리스트 | Lazy Ren">
-            <a:extLst>
-              <a:ext uri="{FF2B5EF4-FFF2-40B4-BE49-F238E27FC236}">
-                <a16:creationId xmlns:a16="http://schemas.microsoft.com/office/drawing/2014/main" id="{BBD46098-9A9A-2A88-67DF-22BB9F212584}"/>
+          <p:cNvPr id="3" name="Picture 2" descr="1일 1커밋의 목표를 가지고 있다면? - Bitbar Github 플러그인 설정하기 | Fernando 기술 블로그">
+            <a:extLst>
+              <a:ext uri="{FF2B5EF4-FFF2-40B4-BE49-F238E27FC236}">
+                <a16:creationId xmlns:a16="http://schemas.microsoft.com/office/drawing/2014/main" id="{2C642476-CCB6-28F2-C01B-E6AA8A634F21}"/>
               </a:ext>
             </a:extLst>
           </p:cNvPr>
@@ -9322,7 +9519,7 @@
           <p:nvPr/>
         </p:nvPicPr>
         <p:blipFill>
-          <a:blip r:embed="rId4">
+          <a:blip r:embed="rId3">
             <a:extLst>
               <a:ext uri="{28A0092B-C50C-407E-A947-70E740481C1C}">
                 <a14:useLocalDpi xmlns:a14="http://schemas.microsoft.com/office/drawing/2010/main" val="0"/>
@@ -9336,8 +9533,8 @@
         </p:blipFill>
         <p:spPr bwMode="auto">
           <a:xfrm>
-            <a:off x="6757387" y="2061977"/>
-            <a:ext cx="4572000" cy="2286000"/>
+            <a:off x="689776" y="2695209"/>
+            <a:ext cx="4454449" cy="1833748"/>
           </a:xfrm>
           <a:prstGeom prst="rect">
             <a:avLst/>
@@ -9354,57 +9551,65 @@
           </a:extLst>
         </p:spPr>
       </p:pic>
-      <p:pic>
-        <p:nvPicPr>
-          <p:cNvPr id="3076" name="Picture 4" descr="GitHub — A Beginner's Introduction | by Thiago Marsal Farias | Medium">
-            <a:extLst>
-              <a:ext uri="{FF2B5EF4-FFF2-40B4-BE49-F238E27FC236}">
-                <a16:creationId xmlns:a16="http://schemas.microsoft.com/office/drawing/2014/main" id="{05048B77-090B-D782-5A02-11C42B8CC57A}"/>
-              </a:ext>
-            </a:extLst>
-          </p:cNvPr>
-          <p:cNvPicPr>
-            <a:picLocks noChangeAspect="1" noChangeArrowheads="1"/>
-          </p:cNvPicPr>
+      <p:sp>
+        <p:nvSpPr>
+          <p:cNvPr id="6" name="TextBox 5">
+            <a:extLst>
+              <a:ext uri="{FF2B5EF4-FFF2-40B4-BE49-F238E27FC236}">
+                <a16:creationId xmlns:a16="http://schemas.microsoft.com/office/drawing/2014/main" id="{ABB5351B-8B66-EAAB-14E6-629AA921514C}"/>
+              </a:ext>
+            </a:extLst>
+          </p:cNvPr>
+          <p:cNvSpPr txBox="1"/>
           <p:nvPr/>
-        </p:nvPicPr>
-        <p:blipFill>
-          <a:blip r:embed="rId5">
-            <a:extLst>
-              <a:ext uri="{28A0092B-C50C-407E-A947-70E740481C1C}">
-                <a14:useLocalDpi xmlns:a14="http://schemas.microsoft.com/office/drawing/2010/main" val="0"/>
-              </a:ext>
-            </a:extLst>
-          </a:blip>
-          <a:srcRect/>
-          <a:stretch>
-            <a:fillRect/>
-          </a:stretch>
-        </p:blipFill>
-        <p:spPr bwMode="auto">
+        </p:nvSpPr>
+        <p:spPr>
           <a:xfrm>
-            <a:off x="1195386" y="3469287"/>
-            <a:ext cx="4572001" cy="1694688"/>
+            <a:off x="1875686" y="4678729"/>
+            <a:ext cx="1930337" cy="338554"/>
           </a:xfrm>
           <a:prstGeom prst="rect">
             <a:avLst/>
           </a:prstGeom>
           <a:noFill/>
-          <a:extLst>
-            <a:ext uri="{909E8E84-426E-40DD-AFC4-6F175D3DCCD1}">
-              <a14:hiddenFill xmlns:a14="http://schemas.microsoft.com/office/drawing/2010/main">
-                <a:solidFill>
-                  <a:srgbClr val="FFFFFF"/>
-                </a:solidFill>
-              </a14:hiddenFill>
-            </a:ext>
-          </a:extLst>
         </p:spPr>
-      </p:pic>
+        <p:txBody>
+          <a:bodyPr wrap="none" rtlCol="0">
+            <a:spAutoFit/>
+          </a:bodyPr>
+          <a:lstStyle/>
+          <a:p>
+            <a:r>
+              <a:rPr lang="en-US" altLang="ko-KR" sz="1600" b="1" dirty="0">
+                <a:solidFill>
+                  <a:schemeClr val="accent6"/>
+                </a:solidFill>
+              </a:rPr>
+              <a:t>GitHub </a:t>
+            </a:r>
+            <a:r>
+              <a:rPr lang="ko-KR" altLang="en-US" sz="1600" b="1" dirty="0" err="1">
+                <a:solidFill>
+                  <a:schemeClr val="accent6"/>
+                </a:solidFill>
+              </a:rPr>
+              <a:t>잔디심기</a:t>
+            </a:r>
+            <a:r>
+              <a:rPr lang="ko-KR" altLang="en-US" sz="1600" b="1" dirty="0">
+                <a:solidFill>
+                  <a:schemeClr val="accent6"/>
+                </a:solidFill>
+              </a:rPr>
+              <a:t>🌱</a:t>
+            </a:r>
+          </a:p>
+        </p:txBody>
+      </p:sp>
     </p:spTree>
     <p:extLst>
       <p:ext uri="{BB962C8B-B14F-4D97-AF65-F5344CB8AC3E}">
-        <p14:creationId xmlns:p14="http://schemas.microsoft.com/office/powerpoint/2010/main" val="2426247804"/>
+        <p14:creationId xmlns:p14="http://schemas.microsoft.com/office/powerpoint/2010/main" val="1969496758"/>
       </p:ext>
     </p:extLst>
   </p:cSld>
@@ -9811,7 +10016,7 @@
           <p:cNvPr id="4" name="날짜 개체 틀 3">
             <a:extLst>
               <a:ext uri="{FF2B5EF4-FFF2-40B4-BE49-F238E27FC236}">
-                <a16:creationId xmlns:a16="http://schemas.microsoft.com/office/drawing/2014/main" id="{FA492C02-0419-7C8D-8F70-9EAD19B9BFC5}"/>
+                <a16:creationId xmlns:a16="http://schemas.microsoft.com/office/drawing/2014/main" id="{844D8E3F-3E15-CA55-DE78-C9E8135D7DC5}"/>
               </a:ext>
             </a:extLst>
           </p:cNvPr>
@@ -9827,7 +10032,7 @@
           <a:bodyPr/>
           <a:lstStyle/>
           <a:p>
-            <a:fld id="{3C9CE3CE-253F-4F9D-BA15-C226C8D8501E}" type="datetime6">
+            <a:fld id="{282CA0A7-0190-4FAD-B925-425179F7F418}" type="datetime6">
               <a:rPr lang="ko-KR" altLang="en-US" smtClean="0"/>
               <a:t>2024년 5월</a:t>
             </a:fld>
@@ -9840,7 +10045,7 @@
           <p:cNvPr id="5" name="슬라이드 번호 개체 틀 4">
             <a:extLst>
               <a:ext uri="{FF2B5EF4-FFF2-40B4-BE49-F238E27FC236}">
-                <a16:creationId xmlns:a16="http://schemas.microsoft.com/office/drawing/2014/main" id="{66486D8F-3DFA-088C-30BB-98572100AF6A}"/>
+                <a16:creationId xmlns:a16="http://schemas.microsoft.com/office/drawing/2014/main" id="{5DB29F7D-CB9C-794A-3A35-FAD82167AF9C}"/>
               </a:ext>
             </a:extLst>
           </p:cNvPr>
@@ -9864,96 +10069,12 @@
           </a:p>
         </p:txBody>
       </p:sp>
-      <p:sp>
-        <p:nvSpPr>
-          <p:cNvPr id="2" name="제목 1">
-            <a:extLst>
-              <a:ext uri="{FF2B5EF4-FFF2-40B4-BE49-F238E27FC236}">
-                <a16:creationId xmlns:a16="http://schemas.microsoft.com/office/drawing/2014/main" id="{7E93C594-AF29-4C79-505A-FD8260282819}"/>
-              </a:ext>
-            </a:extLst>
-          </p:cNvPr>
-          <p:cNvSpPr>
-            <a:spLocks noGrp="1"/>
-          </p:cNvSpPr>
-          <p:nvPr>
-            <p:ph type="title"/>
-          </p:nvPr>
-        </p:nvSpPr>
-        <p:spPr/>
-        <p:txBody>
-          <a:bodyPr/>
-          <a:lstStyle/>
-          <a:p>
-            <a:r>
-              <a:rPr lang="en-US" altLang="ko-KR" dirty="0" err="1"/>
-              <a:t>Github</a:t>
-            </a:r>
-            <a:r>
-              <a:rPr lang="ko-KR" altLang="en-US" dirty="0"/>
-              <a:t> 회원가입</a:t>
-            </a:r>
-            <a:r>
-              <a:rPr lang="en-US" altLang="ko-KR" dirty="0"/>
-              <a:t>/</a:t>
-            </a:r>
-            <a:r>
-              <a:rPr lang="ko-KR" altLang="en-US" dirty="0"/>
-              <a:t>로그인</a:t>
-            </a:r>
-          </a:p>
-        </p:txBody>
-      </p:sp>
-      <p:sp>
-        <p:nvSpPr>
-          <p:cNvPr id="6" name="TextBox 5">
-            <a:extLst>
-              <a:ext uri="{FF2B5EF4-FFF2-40B4-BE49-F238E27FC236}">
-                <a16:creationId xmlns:a16="http://schemas.microsoft.com/office/drawing/2014/main" id="{B0F7D830-B9D4-9D0A-6994-18E2CD9C9915}"/>
-              </a:ext>
-            </a:extLst>
-          </p:cNvPr>
-          <p:cNvSpPr txBox="1"/>
-          <p:nvPr/>
-        </p:nvSpPr>
-        <p:spPr>
-          <a:xfrm>
-            <a:off x="846667" y="1794933"/>
-            <a:ext cx="7744178" cy="830997"/>
-          </a:xfrm>
-          <a:prstGeom prst="rect">
-            <a:avLst/>
-          </a:prstGeom>
-          <a:noFill/>
-        </p:spPr>
-        <p:txBody>
-          <a:bodyPr wrap="square" rtlCol="0">
-            <a:spAutoFit/>
-          </a:bodyPr>
-          <a:lstStyle/>
-          <a:p>
-            <a:r>
-              <a:rPr lang="en-US" altLang="ko-KR" sz="2400" dirty="0">
-                <a:hlinkClick r:id="rId3"/>
-              </a:rPr>
-              <a:t>https://github.com/</a:t>
-            </a:r>
-            <a:r>
-              <a:rPr lang="en-US" altLang="ko-KR" sz="2400" dirty="0"/>
-              <a:t> </a:t>
-            </a:r>
-          </a:p>
-          <a:p>
-            <a:endParaRPr lang="ko-KR" altLang="en-US" sz="2400" dirty="0"/>
-          </a:p>
-        </p:txBody>
-      </p:sp>
       <p:pic>
         <p:nvPicPr>
-          <p:cNvPr id="7" name="Picture 4" descr="GitHub — A Beginner's Introduction | by Thiago Marsal Farias | Medium">
-            <a:extLst>
-              <a:ext uri="{FF2B5EF4-FFF2-40B4-BE49-F238E27FC236}">
-                <a16:creationId xmlns:a16="http://schemas.microsoft.com/office/drawing/2014/main" id="{B89A765A-9124-E194-8F39-31B054301282}"/>
+          <p:cNvPr id="4098" name="Picture 2" descr="시작하기 | Git / GitHub 안내서">
+            <a:extLst>
+              <a:ext uri="{FF2B5EF4-FFF2-40B4-BE49-F238E27FC236}">
+                <a16:creationId xmlns:a16="http://schemas.microsoft.com/office/drawing/2014/main" id="{734FB0B1-DFE8-E05D-B8D6-E471B0B8E8F2}"/>
               </a:ext>
             </a:extLst>
           </p:cNvPr>
@@ -9963,7 +10084,7 @@
           <p:nvPr/>
         </p:nvPicPr>
         <p:blipFill>
-          <a:blip r:embed="rId4">
+          <a:blip r:embed="rId3">
             <a:extLst>
               <a:ext uri="{28A0092B-C50C-407E-A947-70E740481C1C}">
                 <a14:useLocalDpi xmlns:a14="http://schemas.microsoft.com/office/drawing/2010/main" val="0"/>
@@ -9977,8 +10098,8 @@
         </p:blipFill>
         <p:spPr bwMode="auto">
           <a:xfrm>
-            <a:off x="4444580" y="3053919"/>
-            <a:ext cx="7057782" cy="2616084"/>
+            <a:off x="1799777" y="1409915"/>
+            <a:ext cx="3126658" cy="1302774"/>
           </a:xfrm>
           <a:prstGeom prst="rect">
             <a:avLst/>
@@ -9995,10 +10116,104 @@
           </a:extLst>
         </p:spPr>
       </p:pic>
+      <p:pic>
+        <p:nvPicPr>
+          <p:cNvPr id="3074" name="Picture 2" descr="VSCode 익스텐션 추천 리스트 | Lazy Ren">
+            <a:extLst>
+              <a:ext uri="{FF2B5EF4-FFF2-40B4-BE49-F238E27FC236}">
+                <a16:creationId xmlns:a16="http://schemas.microsoft.com/office/drawing/2014/main" id="{BBD46098-9A9A-2A88-67DF-22BB9F212584}"/>
+              </a:ext>
+            </a:extLst>
+          </p:cNvPr>
+          <p:cNvPicPr>
+            <a:picLocks noChangeAspect="1" noChangeArrowheads="1"/>
+          </p:cNvPicPr>
+          <p:nvPr/>
+        </p:nvPicPr>
+        <p:blipFill>
+          <a:blip r:embed="rId4">
+            <a:extLst>
+              <a:ext uri="{28A0092B-C50C-407E-A947-70E740481C1C}">
+                <a14:useLocalDpi xmlns:a14="http://schemas.microsoft.com/office/drawing/2010/main" val="0"/>
+              </a:ext>
+            </a:extLst>
+          </a:blip>
+          <a:srcRect/>
+          <a:stretch>
+            <a:fillRect/>
+          </a:stretch>
+        </p:blipFill>
+        <p:spPr bwMode="auto">
+          <a:xfrm>
+            <a:off x="6757387" y="2061977"/>
+            <a:ext cx="4572000" cy="2286000"/>
+          </a:xfrm>
+          <a:prstGeom prst="rect">
+            <a:avLst/>
+          </a:prstGeom>
+          <a:noFill/>
+          <a:extLst>
+            <a:ext uri="{909E8E84-426E-40DD-AFC4-6F175D3DCCD1}">
+              <a14:hiddenFill xmlns:a14="http://schemas.microsoft.com/office/drawing/2010/main">
+                <a:solidFill>
+                  <a:srgbClr val="FFFFFF"/>
+                </a:solidFill>
+              </a14:hiddenFill>
+            </a:ext>
+          </a:extLst>
+        </p:spPr>
+      </p:pic>
+      <p:pic>
+        <p:nvPicPr>
+          <p:cNvPr id="3076" name="Picture 4" descr="GitHub — A Beginner's Introduction | by Thiago Marsal Farias | Medium">
+            <a:extLst>
+              <a:ext uri="{FF2B5EF4-FFF2-40B4-BE49-F238E27FC236}">
+                <a16:creationId xmlns:a16="http://schemas.microsoft.com/office/drawing/2014/main" id="{05048B77-090B-D782-5A02-11C42B8CC57A}"/>
+              </a:ext>
+            </a:extLst>
+          </p:cNvPr>
+          <p:cNvPicPr>
+            <a:picLocks noChangeAspect="1" noChangeArrowheads="1"/>
+          </p:cNvPicPr>
+          <p:nvPr/>
+        </p:nvPicPr>
+        <p:blipFill>
+          <a:blip r:embed="rId5">
+            <a:extLst>
+              <a:ext uri="{28A0092B-C50C-407E-A947-70E740481C1C}">
+                <a14:useLocalDpi xmlns:a14="http://schemas.microsoft.com/office/drawing/2010/main" val="0"/>
+              </a:ext>
+            </a:extLst>
+          </a:blip>
+          <a:srcRect/>
+          <a:stretch>
+            <a:fillRect/>
+          </a:stretch>
+        </p:blipFill>
+        <p:spPr bwMode="auto">
+          <a:xfrm>
+            <a:off x="1195386" y="3469287"/>
+            <a:ext cx="4572001" cy="1694688"/>
+          </a:xfrm>
+          <a:prstGeom prst="rect">
+            <a:avLst/>
+          </a:prstGeom>
+          <a:noFill/>
+          <a:extLst>
+            <a:ext uri="{909E8E84-426E-40DD-AFC4-6F175D3DCCD1}">
+              <a14:hiddenFill xmlns:a14="http://schemas.microsoft.com/office/drawing/2010/main">
+                <a:solidFill>
+                  <a:srgbClr val="FFFFFF"/>
+                </a:solidFill>
+              </a14:hiddenFill>
+            </a:ext>
+          </a:extLst>
+        </p:spPr>
+      </p:pic>
     </p:spTree>
     <p:extLst>
       <p:ext uri="{BB962C8B-B14F-4D97-AF65-F5344CB8AC3E}">
-        <p14:creationId xmlns:p14="http://schemas.microsoft.com/office/powerpoint/2010/main" val="1658716870"/>
+        <p14:creationId xmlns:p14="http://schemas.microsoft.com/office/powerpoint/2010/main" val="2426247804"/>
       </p:ext>
     </p:extLst>
   </p:cSld>
@@ -10105,12 +10320,20 @@
           <a:lstStyle/>
           <a:p>
             <a:r>
+              <a:rPr lang="en-US" altLang="ko-KR" dirty="0" err="1"/>
+              <a:t>Github</a:t>
+            </a:r>
+            <a:r>
+              <a:rPr lang="ko-KR" altLang="en-US" dirty="0"/>
+              <a:t> 회원가입</a:t>
+            </a:r>
+            <a:r>
               <a:rPr lang="en-US" altLang="ko-KR" dirty="0"/>
-              <a:t>VS Code </a:t>
+              <a:t>/</a:t>
             </a:r>
             <a:r>
               <a:rPr lang="ko-KR" altLang="en-US" dirty="0"/>
-              <a:t>설치 </a:t>
+              <a:t>로그인</a:t>
             </a:r>
           </a:p>
         </p:txBody>
@@ -10147,9 +10370,12 @@
               <a:rPr lang="en-US" altLang="ko-KR" sz="2400" dirty="0">
                 <a:hlinkClick r:id="rId3"/>
               </a:rPr>
-              <a:t>https://code.visualstudio.com/download</a:t>
-            </a:r>
-            <a:endParaRPr lang="en-US" altLang="ko-KR" sz="2400" dirty="0"/>
+              <a:t>https://github.com/</a:t>
+            </a:r>
+            <a:r>
+              <a:rPr lang="en-US" altLang="ko-KR" sz="2400" dirty="0"/>
+              <a:t> </a:t>
+            </a:r>
           </a:p>
           <a:p>
             <a:endParaRPr lang="ko-KR" altLang="en-US" sz="2400" dirty="0"/>
@@ -10158,10 +10384,10 @@
       </p:sp>
       <p:pic>
         <p:nvPicPr>
-          <p:cNvPr id="3" name="Picture 2" descr="VSCode 익스텐션 추천 리스트 | Lazy Ren">
-            <a:extLst>
-              <a:ext uri="{FF2B5EF4-FFF2-40B4-BE49-F238E27FC236}">
-                <a16:creationId xmlns:a16="http://schemas.microsoft.com/office/drawing/2014/main" id="{627B062B-9462-19DE-55BB-9FC514848CFA}"/>
+          <p:cNvPr id="7" name="Picture 4" descr="GitHub — A Beginner's Introduction | by Thiago Marsal Farias | Medium">
+            <a:extLst>
+              <a:ext uri="{FF2B5EF4-FFF2-40B4-BE49-F238E27FC236}">
+                <a16:creationId xmlns:a16="http://schemas.microsoft.com/office/drawing/2014/main" id="{B89A765A-9124-E194-8F39-31B054301282}"/>
               </a:ext>
             </a:extLst>
           </p:cNvPr>
@@ -10185,8 +10411,8 @@
         </p:blipFill>
         <p:spPr bwMode="auto">
           <a:xfrm>
-            <a:off x="4718756" y="2518438"/>
-            <a:ext cx="6446668" cy="3223334"/>
+            <a:off x="4444580" y="3053919"/>
+            <a:ext cx="7057782" cy="2616084"/>
           </a:xfrm>
           <a:prstGeom prst="rect">
             <a:avLst/>
@@ -10206,7 +10432,7 @@
     </p:spTree>
     <p:extLst>
       <p:ext uri="{BB962C8B-B14F-4D97-AF65-F5344CB8AC3E}">
-        <p14:creationId xmlns:p14="http://schemas.microsoft.com/office/powerpoint/2010/main" val="3610078581"/>
+        <p14:creationId xmlns:p14="http://schemas.microsoft.com/office/powerpoint/2010/main" val="1658716870"/>
       </p:ext>
     </p:extLst>
   </p:cSld>
@@ -10238,6 +10464,214 @@
           <p:cNvPr id="4" name="날짜 개체 틀 3">
             <a:extLst>
               <a:ext uri="{FF2B5EF4-FFF2-40B4-BE49-F238E27FC236}">
+                <a16:creationId xmlns:a16="http://schemas.microsoft.com/office/drawing/2014/main" id="{FA492C02-0419-7C8D-8F70-9EAD19B9BFC5}"/>
+              </a:ext>
+            </a:extLst>
+          </p:cNvPr>
+          <p:cNvSpPr>
+            <a:spLocks noGrp="1"/>
+          </p:cNvSpPr>
+          <p:nvPr>
+            <p:ph type="dt" sz="half" idx="10"/>
+          </p:nvPr>
+        </p:nvSpPr>
+        <p:spPr/>
+        <p:txBody>
+          <a:bodyPr/>
+          <a:lstStyle/>
+          <a:p>
+            <a:fld id="{3C9CE3CE-253F-4F9D-BA15-C226C8D8501E}" type="datetime6">
+              <a:rPr lang="ko-KR" altLang="en-US" smtClean="0"/>
+              <a:t>2024년 5월</a:t>
+            </a:fld>
+            <a:endParaRPr lang="ko-KR" altLang="en-US"/>
+          </a:p>
+        </p:txBody>
+      </p:sp>
+      <p:sp>
+        <p:nvSpPr>
+          <p:cNvPr id="5" name="슬라이드 번호 개체 틀 4">
+            <a:extLst>
+              <a:ext uri="{FF2B5EF4-FFF2-40B4-BE49-F238E27FC236}">
+                <a16:creationId xmlns:a16="http://schemas.microsoft.com/office/drawing/2014/main" id="{66486D8F-3DFA-088C-30BB-98572100AF6A}"/>
+              </a:ext>
+            </a:extLst>
+          </p:cNvPr>
+          <p:cNvSpPr>
+            <a:spLocks noGrp="1"/>
+          </p:cNvSpPr>
+          <p:nvPr>
+            <p:ph type="sldNum" sz="quarter" idx="12"/>
+          </p:nvPr>
+        </p:nvSpPr>
+        <p:spPr/>
+        <p:txBody>
+          <a:bodyPr/>
+          <a:lstStyle/>
+          <a:p>
+            <a:fld id="{083A2CE0-18CD-4102-B738-4ACFF9E68BA4}" type="slidenum">
+              <a:rPr lang="ko-KR" altLang="en-US" smtClean="0"/>
+              <a:t>22</a:t>
+            </a:fld>
+            <a:endParaRPr lang="ko-KR" altLang="en-US"/>
+          </a:p>
+        </p:txBody>
+      </p:sp>
+      <p:sp>
+        <p:nvSpPr>
+          <p:cNvPr id="2" name="제목 1">
+            <a:extLst>
+              <a:ext uri="{FF2B5EF4-FFF2-40B4-BE49-F238E27FC236}">
+                <a16:creationId xmlns:a16="http://schemas.microsoft.com/office/drawing/2014/main" id="{7E93C594-AF29-4C79-505A-FD8260282819}"/>
+              </a:ext>
+            </a:extLst>
+          </p:cNvPr>
+          <p:cNvSpPr>
+            <a:spLocks noGrp="1"/>
+          </p:cNvSpPr>
+          <p:nvPr>
+            <p:ph type="title"/>
+          </p:nvPr>
+        </p:nvSpPr>
+        <p:spPr/>
+        <p:txBody>
+          <a:bodyPr/>
+          <a:lstStyle/>
+          <a:p>
+            <a:r>
+              <a:rPr lang="en-US" altLang="ko-KR" dirty="0"/>
+              <a:t>VS Code </a:t>
+            </a:r>
+            <a:r>
+              <a:rPr lang="ko-KR" altLang="en-US" dirty="0"/>
+              <a:t>설치 </a:t>
+            </a:r>
+          </a:p>
+        </p:txBody>
+      </p:sp>
+      <p:sp>
+        <p:nvSpPr>
+          <p:cNvPr id="6" name="TextBox 5">
+            <a:extLst>
+              <a:ext uri="{FF2B5EF4-FFF2-40B4-BE49-F238E27FC236}">
+                <a16:creationId xmlns:a16="http://schemas.microsoft.com/office/drawing/2014/main" id="{B0F7D830-B9D4-9D0A-6994-18E2CD9C9915}"/>
+              </a:ext>
+            </a:extLst>
+          </p:cNvPr>
+          <p:cNvSpPr txBox="1"/>
+          <p:nvPr/>
+        </p:nvSpPr>
+        <p:spPr>
+          <a:xfrm>
+            <a:off x="846667" y="1794933"/>
+            <a:ext cx="7744178" cy="830997"/>
+          </a:xfrm>
+          <a:prstGeom prst="rect">
+            <a:avLst/>
+          </a:prstGeom>
+          <a:noFill/>
+        </p:spPr>
+        <p:txBody>
+          <a:bodyPr wrap="square" rtlCol="0">
+            <a:spAutoFit/>
+          </a:bodyPr>
+          <a:lstStyle/>
+          <a:p>
+            <a:r>
+              <a:rPr lang="en-US" altLang="ko-KR" sz="2400" dirty="0">
+                <a:hlinkClick r:id="rId3"/>
+              </a:rPr>
+              <a:t>https://code.visualstudio.com/download</a:t>
+            </a:r>
+            <a:endParaRPr lang="en-US" altLang="ko-KR" sz="2400" dirty="0"/>
+          </a:p>
+          <a:p>
+            <a:endParaRPr lang="ko-KR" altLang="en-US" sz="2400" dirty="0"/>
+          </a:p>
+        </p:txBody>
+      </p:sp>
+      <p:pic>
+        <p:nvPicPr>
+          <p:cNvPr id="3" name="Picture 2" descr="VSCode 익스텐션 추천 리스트 | Lazy Ren">
+            <a:extLst>
+              <a:ext uri="{FF2B5EF4-FFF2-40B4-BE49-F238E27FC236}">
+                <a16:creationId xmlns:a16="http://schemas.microsoft.com/office/drawing/2014/main" id="{627B062B-9462-19DE-55BB-9FC514848CFA}"/>
+              </a:ext>
+            </a:extLst>
+          </p:cNvPr>
+          <p:cNvPicPr>
+            <a:picLocks noChangeAspect="1" noChangeArrowheads="1"/>
+          </p:cNvPicPr>
+          <p:nvPr/>
+        </p:nvPicPr>
+        <p:blipFill>
+          <a:blip r:embed="rId4">
+            <a:extLst>
+              <a:ext uri="{28A0092B-C50C-407E-A947-70E740481C1C}">
+                <a14:useLocalDpi xmlns:a14="http://schemas.microsoft.com/office/drawing/2010/main" val="0"/>
+              </a:ext>
+            </a:extLst>
+          </a:blip>
+          <a:srcRect/>
+          <a:stretch>
+            <a:fillRect/>
+          </a:stretch>
+        </p:blipFill>
+        <p:spPr bwMode="auto">
+          <a:xfrm>
+            <a:off x="4718756" y="2518438"/>
+            <a:ext cx="6446668" cy="3223334"/>
+          </a:xfrm>
+          <a:prstGeom prst="rect">
+            <a:avLst/>
+          </a:prstGeom>
+          <a:noFill/>
+          <a:extLst>
+            <a:ext uri="{909E8E84-426E-40DD-AFC4-6F175D3DCCD1}">
+              <a14:hiddenFill xmlns:a14="http://schemas.microsoft.com/office/drawing/2010/main">
+                <a:solidFill>
+                  <a:srgbClr val="FFFFFF"/>
+                </a:solidFill>
+              </a14:hiddenFill>
+            </a:ext>
+          </a:extLst>
+        </p:spPr>
+      </p:pic>
+    </p:spTree>
+    <p:extLst>
+      <p:ext uri="{BB962C8B-B14F-4D97-AF65-F5344CB8AC3E}">
+        <p14:creationId xmlns:p14="http://schemas.microsoft.com/office/powerpoint/2010/main" val="3610078581"/>
+      </p:ext>
+    </p:extLst>
+  </p:cSld>
+  <p:clrMapOvr>
+    <a:masterClrMapping/>
+  </p:clrMapOvr>
+</p:sld>
+</file>
+
+<file path=ppt/slides/slide23.xml><?xml version="1.0" encoding="utf-8"?>
+<p:sld xmlns:a="http://schemas.openxmlformats.org/drawingml/2006/main" xmlns:r="http://schemas.openxmlformats.org/officeDocument/2006/relationships" xmlns:p="http://schemas.openxmlformats.org/presentationml/2006/main">
+  <p:cSld>
+    <p:spTree>
+      <p:nvGrpSpPr>
+        <p:cNvPr id="1" name=""/>
+        <p:cNvGrpSpPr/>
+        <p:nvPr/>
+      </p:nvGrpSpPr>
+      <p:grpSpPr>
+        <a:xfrm>
+          <a:off x="0" y="0"/>
+          <a:ext cx="0" cy="0"/>
+          <a:chOff x="0" y="0"/>
+          <a:chExt cx="0" cy="0"/>
+        </a:xfrm>
+      </p:grpSpPr>
+      <p:sp>
+        <p:nvSpPr>
+          <p:cNvPr id="4" name="날짜 개체 틀 3">
+            <a:extLst>
+              <a:ext uri="{FF2B5EF4-FFF2-40B4-BE49-F238E27FC236}">
                 <a16:creationId xmlns:a16="http://schemas.microsoft.com/office/drawing/2014/main" id="{2989FCA7-10AB-8AF6-D2BD-97B935935DA7}"/>
               </a:ext>
             </a:extLst>
@@ -10285,7 +10719,7 @@
           <a:p>
             <a:fld id="{083A2CE0-18CD-4102-B738-4ACFF9E68BA4}" type="slidenum">
               <a:rPr lang="ko-KR" altLang="en-US" smtClean="0"/>
-              <a:t>22</a:t>
+              <a:t>23</a:t>
             </a:fld>
             <a:endParaRPr lang="ko-KR" altLang="en-US"/>
           </a:p>
@@ -10411,7 +10845,7 @@
 </p:sld>
 </file>
 
-<file path=ppt/slides/slide23.xml><?xml version="1.0" encoding="utf-8"?>
+<file path=ppt/slides/slide24.xml><?xml version="1.0" encoding="utf-8"?>
 <p:sld xmlns:a="http://schemas.openxmlformats.org/drawingml/2006/main" xmlns:r="http://schemas.openxmlformats.org/officeDocument/2006/relationships" xmlns:p="http://schemas.openxmlformats.org/presentationml/2006/main">
   <p:cSld>
     <p:spTree>
@@ -10522,7 +10956,7 @@
           <a:p>
             <a:fld id="{083A2CE0-18CD-4102-B738-4ACFF9E68BA4}" type="slidenum">
               <a:rPr lang="ko-KR" altLang="en-US" smtClean="0"/>
-              <a:t>23</a:t>
+              <a:t>24</a:t>
             </a:fld>
             <a:endParaRPr lang="ko-KR" altLang="en-US"/>
           </a:p>
@@ -10608,7 +11042,7 @@
 </p:sld>
 </file>
 
-<file path=ppt/slides/slide24.xml><?xml version="1.0" encoding="utf-8"?>
+<file path=ppt/slides/slide25.xml><?xml version="1.0" encoding="utf-8"?>
 <p:sld xmlns:a="http://schemas.openxmlformats.org/drawingml/2006/main" xmlns:r="http://schemas.openxmlformats.org/officeDocument/2006/relationships" xmlns:p="http://schemas.openxmlformats.org/presentationml/2006/main">
   <p:cSld>
     <p:spTree>
@@ -10932,7 +11366,7 @@
           <a:p>
             <a:fld id="{083A2CE0-18CD-4102-B738-4ACFF9E68BA4}" type="slidenum">
               <a:rPr lang="ko-KR" altLang="en-US" smtClean="0"/>
-              <a:t>24</a:t>
+              <a:t>25</a:t>
             </a:fld>
             <a:endParaRPr lang="ko-KR" altLang="en-US"/>
           </a:p>
@@ -11021,7 +11455,7 @@
 </p:sld>
 </file>
 
-<file path=ppt/slides/slide25.xml><?xml version="1.0" encoding="utf-8"?>
+<file path=ppt/slides/slide26.xml><?xml version="1.0" encoding="utf-8"?>
 <p:sld xmlns:a="http://schemas.openxmlformats.org/drawingml/2006/main" xmlns:r="http://schemas.openxmlformats.org/officeDocument/2006/relationships" xmlns:p="http://schemas.openxmlformats.org/presentationml/2006/main">
   <p:cSld>
     <p:spTree>
@@ -11137,7 +11571,7 @@
           <a:p>
             <a:fld id="{083A2CE0-18CD-4102-B738-4ACFF9E68BA4}" type="slidenum">
               <a:rPr lang="ko-KR" altLang="en-US" smtClean="0"/>
-              <a:t>25</a:t>
+              <a:t>26</a:t>
             </a:fld>
             <a:endParaRPr lang="ko-KR" altLang="en-US"/>
           </a:p>
@@ -11226,7 +11660,7 @@
 </p:sld>
 </file>
 
-<file path=ppt/slides/slide26.xml><?xml version="1.0" encoding="utf-8"?>
+<file path=ppt/slides/slide27.xml><?xml version="1.0" encoding="utf-8"?>
 <p:sld xmlns:a="http://schemas.openxmlformats.org/drawingml/2006/main" xmlns:r="http://schemas.openxmlformats.org/officeDocument/2006/relationships" xmlns:p="http://schemas.openxmlformats.org/presentationml/2006/main">
   <p:cSld>
     <p:spTree>
@@ -11295,7 +11729,7 @@
           <a:p>
             <a:fld id="{083A2CE0-18CD-4102-B738-4ACFF9E68BA4}" type="slidenum">
               <a:rPr lang="ko-KR" altLang="en-US" smtClean="0"/>
-              <a:t>26</a:t>
+              <a:t>27</a:t>
             </a:fld>
             <a:endParaRPr lang="ko-KR" altLang="en-US"/>
           </a:p>
@@ -11406,7 +11840,7 @@
 </p:sld>
 </file>
 
-<file path=ppt/slides/slide27.xml><?xml version="1.0" encoding="utf-8"?>
+<file path=ppt/slides/slide28.xml><?xml version="1.0" encoding="utf-8"?>
 <p:sld xmlns:a="http://schemas.openxmlformats.org/drawingml/2006/main" xmlns:r="http://schemas.openxmlformats.org/officeDocument/2006/relationships" xmlns:p="http://schemas.openxmlformats.org/presentationml/2006/main">
   <p:cSld>
     <p:spTree>
@@ -11475,7 +11909,7 @@
           <a:p>
             <a:fld id="{083A2CE0-18CD-4102-B738-4ACFF9E68BA4}" type="slidenum">
               <a:rPr lang="ko-KR" altLang="en-US" smtClean="0"/>
-              <a:t>27</a:t>
+              <a:t>28</a:t>
             </a:fld>
             <a:endParaRPr lang="ko-KR" altLang="en-US"/>
           </a:p>
@@ -11530,438 +11964,6 @@
 </p:sld>
 </file>
 
-<file path=ppt/slides/slide28.xml><?xml version="1.0" encoding="utf-8"?>
-<p:sld xmlns:a="http://schemas.openxmlformats.org/drawingml/2006/main" xmlns:r="http://schemas.openxmlformats.org/officeDocument/2006/relationships" xmlns:p="http://schemas.openxmlformats.org/presentationml/2006/main">
-  <p:cSld>
-    <p:spTree>
-      <p:nvGrpSpPr>
-        <p:cNvPr id="1" name=""/>
-        <p:cNvGrpSpPr/>
-        <p:nvPr/>
-      </p:nvGrpSpPr>
-      <p:grpSpPr>
-        <a:xfrm>
-          <a:off x="0" y="0"/>
-          <a:ext cx="0" cy="0"/>
-          <a:chOff x="0" y="0"/>
-          <a:chExt cx="0" cy="0"/>
-        </a:xfrm>
-      </p:grpSpPr>
-      <p:sp>
-        <p:nvSpPr>
-          <p:cNvPr id="2" name="내용 개체 틀 1">
-            <a:extLst>
-              <a:ext uri="{FF2B5EF4-FFF2-40B4-BE49-F238E27FC236}">
-                <a16:creationId xmlns:a16="http://schemas.microsoft.com/office/drawing/2014/main" id="{1C847C42-5B19-643E-6060-D9D2F849F11D}"/>
-              </a:ext>
-            </a:extLst>
-          </p:cNvPr>
-          <p:cNvSpPr>
-            <a:spLocks noGrp="1"/>
-          </p:cNvSpPr>
-          <p:nvPr>
-            <p:ph idx="1"/>
-          </p:nvPr>
-        </p:nvSpPr>
-        <p:spPr/>
-        <p:txBody>
-          <a:bodyPr>
-            <a:normAutofit/>
-          </a:bodyPr>
-          <a:lstStyle/>
-          <a:p>
-            <a:pPr>
-              <a:lnSpc>
-                <a:spcPct val="100000"/>
-              </a:lnSpc>
-            </a:pPr>
-            <a:r>
-              <a:rPr lang="en-US" altLang="ko-KR" sz="2400" dirty="0">
-                <a:solidFill>
-                  <a:srgbClr val="0070C0"/>
-                </a:solidFill>
-                <a:ea typeface="강한공군체 Medium" panose="020B0600000101010101" pitchFamily="34" charset="-127"/>
-              </a:rPr>
-              <a:t>git status</a:t>
-            </a:r>
-            <a:r>
-              <a:rPr lang="en-US" altLang="ko-KR" sz="2400" dirty="0">
-                <a:ea typeface="강한공군체 Medium" panose="020B0600000101010101" pitchFamily="34" charset="-127"/>
-              </a:rPr>
-              <a:t> : </a:t>
-            </a:r>
-            <a:r>
-              <a:rPr lang="ko-KR" altLang="en-US" sz="2400" dirty="0">
-                <a:ea typeface="강한공군체 Medium" panose="020B0600000101010101" pitchFamily="34" charset="-127"/>
-              </a:rPr>
-              <a:t>현재 디렉토리 상태 보기</a:t>
-            </a:r>
-            <a:endParaRPr lang="en-US" altLang="ko-KR" sz="2400" dirty="0">
-              <a:ea typeface="강한공군체 Medium" panose="020B0600000101010101" pitchFamily="34" charset="-127"/>
-            </a:endParaRPr>
-          </a:p>
-          <a:p>
-            <a:pPr>
-              <a:lnSpc>
-                <a:spcPct val="100000"/>
-              </a:lnSpc>
-            </a:pPr>
-            <a:r>
-              <a:rPr lang="en-US" altLang="ko-KR" sz="2400" dirty="0">
-                <a:solidFill>
-                  <a:srgbClr val="0070C0"/>
-                </a:solidFill>
-                <a:ea typeface="강한공군체 Medium" panose="020B0600000101010101" pitchFamily="34" charset="-127"/>
-              </a:rPr>
-              <a:t>git add</a:t>
-            </a:r>
-            <a:r>
-              <a:rPr lang="ko-KR" altLang="en-US" sz="2400" dirty="0">
-                <a:solidFill>
-                  <a:srgbClr val="0070C0"/>
-                </a:solidFill>
-                <a:ea typeface="강한공군체 Medium" panose="020B0600000101010101" pitchFamily="34" charset="-127"/>
-              </a:rPr>
-              <a:t> </a:t>
-            </a:r>
-            <a:r>
-              <a:rPr lang="en-US" altLang="ko-KR" sz="2400" dirty="0">
-                <a:solidFill>
-                  <a:srgbClr val="0070C0"/>
-                </a:solidFill>
-                <a:ea typeface="강한공군체 Medium" panose="020B0600000101010101" pitchFamily="34" charset="-127"/>
-              </a:rPr>
-              <a:t>. </a:t>
-            </a:r>
-            <a:r>
-              <a:rPr lang="en-US" altLang="ko-KR" sz="2400" dirty="0">
-                <a:ea typeface="강한공군체 Medium" panose="020B0600000101010101" pitchFamily="34" charset="-127"/>
-              </a:rPr>
-              <a:t>: </a:t>
-            </a:r>
-            <a:r>
-              <a:rPr lang="ko-KR" altLang="en-US" sz="2400" dirty="0">
-                <a:ea typeface="강한공군체 Medium" panose="020B0600000101010101" pitchFamily="34" charset="-127"/>
-              </a:rPr>
-              <a:t>현재 디렉토리의 모든 변경 사항을 </a:t>
-            </a:r>
-            <a:r>
-              <a:rPr lang="ko-KR" altLang="en-US" sz="2400" dirty="0" err="1">
-                <a:ea typeface="강한공군체 Medium" panose="020B0600000101010101" pitchFamily="34" charset="-127"/>
-              </a:rPr>
-              <a:t>스테이징</a:t>
-            </a:r>
-            <a:r>
-              <a:rPr lang="ko-KR" altLang="en-US" sz="2400" dirty="0">
-                <a:ea typeface="강한공군체 Medium" panose="020B0600000101010101" pitchFamily="34" charset="-127"/>
-              </a:rPr>
-              <a:t> 영역에 추가 </a:t>
-            </a:r>
-            <a:endParaRPr lang="en-US" altLang="ko-KR" sz="2400" dirty="0">
-              <a:ea typeface="강한공군체 Medium" panose="020B0600000101010101" pitchFamily="34" charset="-127"/>
-            </a:endParaRPr>
-          </a:p>
-          <a:p>
-            <a:pPr>
-              <a:lnSpc>
-                <a:spcPct val="100000"/>
-              </a:lnSpc>
-            </a:pPr>
-            <a:r>
-              <a:rPr lang="en-US" altLang="ko-KR" sz="2400" dirty="0">
-                <a:solidFill>
-                  <a:srgbClr val="0070C0"/>
-                </a:solidFill>
-                <a:ea typeface="강한공군체 Medium" panose="020B0600000101010101" pitchFamily="34" charset="-127"/>
-              </a:rPr>
-              <a:t>git status </a:t>
-            </a:r>
-            <a:r>
-              <a:rPr lang="en-US" altLang="ko-KR" sz="2400" dirty="0">
-                <a:ea typeface="강한공군체 Medium" panose="020B0600000101010101" pitchFamily="34" charset="-127"/>
-              </a:rPr>
-              <a:t>: </a:t>
-            </a:r>
-            <a:r>
-              <a:rPr lang="ko-KR" altLang="en-US" sz="2400" dirty="0">
-                <a:ea typeface="강한공군체 Medium" panose="020B0600000101010101" pitchFamily="34" charset="-127"/>
-              </a:rPr>
-              <a:t>현재 디렉토리 상태 보기 </a:t>
-            </a:r>
-            <a:r>
-              <a:rPr lang="en-US" altLang="ko-KR" sz="2400" dirty="0">
-                <a:ea typeface="강한공군체 Medium" panose="020B0600000101010101" pitchFamily="34" charset="-127"/>
-              </a:rPr>
-              <a:t>(</a:t>
-            </a:r>
-            <a:r>
-              <a:rPr lang="ko-KR" altLang="en-US" sz="2400" dirty="0">
-                <a:ea typeface="강한공군체 Medium" panose="020B0600000101010101" pitchFamily="34" charset="-127"/>
-              </a:rPr>
-              <a:t>상태 변경 확인</a:t>
-            </a:r>
-            <a:r>
-              <a:rPr lang="en-US" altLang="ko-KR" sz="2400" dirty="0">
-                <a:ea typeface="강한공군체 Medium" panose="020B0600000101010101" pitchFamily="34" charset="-127"/>
-              </a:rPr>
-              <a:t>)</a:t>
-            </a:r>
-          </a:p>
-          <a:p>
-            <a:pPr>
-              <a:lnSpc>
-                <a:spcPct val="100000"/>
-              </a:lnSpc>
-            </a:pPr>
-            <a:r>
-              <a:rPr lang="en-US" altLang="ko-KR" sz="2400" dirty="0">
-                <a:solidFill>
-                  <a:srgbClr val="0070C0"/>
-                </a:solidFill>
-                <a:ea typeface="강한공군체 Medium" panose="020B0600000101010101" pitchFamily="34" charset="-127"/>
-              </a:rPr>
-              <a:t>git</a:t>
-            </a:r>
-            <a:r>
-              <a:rPr lang="ko-KR" altLang="en-US" sz="2400" dirty="0">
-                <a:solidFill>
-                  <a:srgbClr val="0070C0"/>
-                </a:solidFill>
-                <a:ea typeface="강한공군체 Medium" panose="020B0600000101010101" pitchFamily="34" charset="-127"/>
-              </a:rPr>
-              <a:t> </a:t>
-            </a:r>
-            <a:r>
-              <a:rPr lang="en-US" altLang="ko-KR" sz="2400" dirty="0">
-                <a:solidFill>
-                  <a:srgbClr val="0070C0"/>
-                </a:solidFill>
-                <a:ea typeface="강한공군체 Medium" panose="020B0600000101010101" pitchFamily="34" charset="-127"/>
-              </a:rPr>
-              <a:t>commit -m “study: first commit” </a:t>
-            </a:r>
-            <a:r>
-              <a:rPr lang="en-US" altLang="ko-KR" sz="2400" dirty="0">
-                <a:ea typeface="강한공군체 Medium" panose="020B0600000101010101" pitchFamily="34" charset="-127"/>
-              </a:rPr>
-              <a:t>: </a:t>
-            </a:r>
-            <a:r>
-              <a:rPr lang="ko-KR" altLang="en-US" sz="2400" dirty="0" err="1">
-                <a:ea typeface="강한공군체 Medium" panose="020B0600000101010101" pitchFamily="34" charset="-127"/>
-              </a:rPr>
-              <a:t>스테이징</a:t>
-            </a:r>
-            <a:r>
-              <a:rPr lang="ko-KR" altLang="en-US" sz="2400" dirty="0">
-                <a:ea typeface="강한공군체 Medium" panose="020B0600000101010101" pitchFamily="34" charset="-127"/>
-              </a:rPr>
-              <a:t> 영역의 파일을 커밋하여 저장소의 히스토리에 기록</a:t>
-            </a:r>
-            <a:endParaRPr lang="en-US" altLang="ko-KR" sz="2400" dirty="0">
-              <a:ea typeface="강한공군체 Medium" panose="020B0600000101010101" pitchFamily="34" charset="-127"/>
-            </a:endParaRPr>
-          </a:p>
-          <a:p>
-            <a:pPr>
-              <a:lnSpc>
-                <a:spcPct val="100000"/>
-              </a:lnSpc>
-            </a:pPr>
-            <a:r>
-              <a:rPr lang="en-US" altLang="ko-KR" sz="2400" dirty="0">
-                <a:solidFill>
-                  <a:srgbClr val="0070C0"/>
-                </a:solidFill>
-                <a:ea typeface="강한공군체 Medium" panose="020B0600000101010101" pitchFamily="34" charset="-127"/>
-              </a:rPr>
-              <a:t>git log </a:t>
-            </a:r>
-            <a:r>
-              <a:rPr lang="en-US" altLang="ko-KR" sz="2400" dirty="0">
-                <a:ea typeface="강한공군체 Medium" panose="020B0600000101010101" pitchFamily="34" charset="-127"/>
-              </a:rPr>
-              <a:t>: </a:t>
-            </a:r>
-            <a:r>
-              <a:rPr lang="ko-KR" altLang="en-US" sz="2400" dirty="0">
-                <a:ea typeface="강한공군체 Medium" panose="020B0600000101010101" pitchFamily="34" charset="-127"/>
-              </a:rPr>
-              <a:t>저장소의 </a:t>
-            </a:r>
-            <a:r>
-              <a:rPr lang="ko-KR" altLang="en-US" sz="2400" dirty="0" err="1">
-                <a:ea typeface="강한공군체 Medium" panose="020B0600000101010101" pitchFamily="34" charset="-127"/>
-              </a:rPr>
-              <a:t>커밋</a:t>
-            </a:r>
-            <a:r>
-              <a:rPr lang="ko-KR" altLang="en-US" sz="2400" dirty="0">
-                <a:ea typeface="강한공군체 Medium" panose="020B0600000101010101" pitchFamily="34" charset="-127"/>
-              </a:rPr>
-              <a:t> 히스토리 확인</a:t>
-            </a:r>
-            <a:endParaRPr lang="en-US" altLang="ko-KR" sz="2400" dirty="0">
-              <a:ea typeface="강한공군체 Medium" panose="020B0600000101010101" pitchFamily="34" charset="-127"/>
-            </a:endParaRPr>
-          </a:p>
-          <a:p>
-            <a:pPr>
-              <a:lnSpc>
-                <a:spcPct val="100000"/>
-              </a:lnSpc>
-            </a:pPr>
-            <a:r>
-              <a:rPr lang="en-US" altLang="ko-KR" sz="2400" dirty="0">
-                <a:solidFill>
-                  <a:srgbClr val="0070C0"/>
-                </a:solidFill>
-                <a:ea typeface="강한공군체 Medium" panose="020B0600000101010101" pitchFamily="34" charset="-127"/>
-              </a:rPr>
-              <a:t>git</a:t>
-            </a:r>
-            <a:r>
-              <a:rPr lang="ko-KR" altLang="en-US" sz="2400" dirty="0">
-                <a:solidFill>
-                  <a:srgbClr val="0070C0"/>
-                </a:solidFill>
-                <a:ea typeface="강한공군체 Medium" panose="020B0600000101010101" pitchFamily="34" charset="-127"/>
-              </a:rPr>
-              <a:t> </a:t>
-            </a:r>
-            <a:r>
-              <a:rPr lang="en-US" altLang="ko-KR" sz="2400" dirty="0">
-                <a:solidFill>
-                  <a:srgbClr val="0070C0"/>
-                </a:solidFill>
-                <a:ea typeface="강한공군체 Medium" panose="020B0600000101010101" pitchFamily="34" charset="-127"/>
-              </a:rPr>
-              <a:t>push –u origin main </a:t>
-            </a:r>
-            <a:r>
-              <a:rPr lang="en-US" altLang="ko-KR" sz="2400" dirty="0">
-                <a:ea typeface="강한공군체 Medium" panose="020B0600000101010101" pitchFamily="34" charset="-127"/>
-              </a:rPr>
-              <a:t>: </a:t>
-            </a:r>
-            <a:r>
-              <a:rPr lang="ko-KR" altLang="en-US" sz="2400" dirty="0">
-                <a:ea typeface="강한공군체 Medium" panose="020B0600000101010101" pitchFamily="34" charset="-127"/>
-              </a:rPr>
-              <a:t>로컬 저장소의 변경 사항을 원격 저장소로 푸시</a:t>
-            </a:r>
-            <a:endParaRPr lang="en-US" altLang="ko-KR" sz="2400" dirty="0">
-              <a:ea typeface="강한공군체 Medium" panose="020B0600000101010101" pitchFamily="34" charset="-127"/>
-            </a:endParaRPr>
-          </a:p>
-          <a:p>
-            <a:endParaRPr lang="ko-KR" altLang="en-US" sz="2400" dirty="0"/>
-          </a:p>
-        </p:txBody>
-      </p:sp>
-      <p:sp>
-        <p:nvSpPr>
-          <p:cNvPr id="3" name="날짜 개체 틀 2">
-            <a:extLst>
-              <a:ext uri="{FF2B5EF4-FFF2-40B4-BE49-F238E27FC236}">
-                <a16:creationId xmlns:a16="http://schemas.microsoft.com/office/drawing/2014/main" id="{A9D7B475-9B14-ED2B-6D54-DB49F3841811}"/>
-              </a:ext>
-            </a:extLst>
-          </p:cNvPr>
-          <p:cNvSpPr>
-            <a:spLocks noGrp="1"/>
-          </p:cNvSpPr>
-          <p:nvPr>
-            <p:ph type="dt" sz="half" idx="10"/>
-          </p:nvPr>
-        </p:nvSpPr>
-        <p:spPr/>
-        <p:txBody>
-          <a:bodyPr/>
-          <a:lstStyle/>
-          <a:p>
-            <a:fld id="{3C9CE3CE-253F-4F9D-BA15-C226C8D8501E}" type="datetime6">
-              <a:rPr lang="ko-KR" altLang="en-US" smtClean="0"/>
-              <a:t>2024년 5월</a:t>
-            </a:fld>
-            <a:endParaRPr lang="ko-KR" altLang="en-US"/>
-          </a:p>
-        </p:txBody>
-      </p:sp>
-      <p:sp>
-        <p:nvSpPr>
-          <p:cNvPr id="4" name="슬라이드 번호 개체 틀 3">
-            <a:extLst>
-              <a:ext uri="{FF2B5EF4-FFF2-40B4-BE49-F238E27FC236}">
-                <a16:creationId xmlns:a16="http://schemas.microsoft.com/office/drawing/2014/main" id="{E32B312E-2FAB-7276-F2BF-2F6DBC9DD044}"/>
-              </a:ext>
-            </a:extLst>
-          </p:cNvPr>
-          <p:cNvSpPr>
-            <a:spLocks noGrp="1"/>
-          </p:cNvSpPr>
-          <p:nvPr>
-            <p:ph type="sldNum" sz="quarter" idx="12"/>
-          </p:nvPr>
-        </p:nvSpPr>
-        <p:spPr/>
-        <p:txBody>
-          <a:bodyPr/>
-          <a:lstStyle/>
-          <a:p>
-            <a:fld id="{083A2CE0-18CD-4102-B738-4ACFF9E68BA4}" type="slidenum">
-              <a:rPr lang="ko-KR" altLang="en-US" smtClean="0"/>
-              <a:t>28</a:t>
-            </a:fld>
-            <a:endParaRPr lang="ko-KR" altLang="en-US"/>
-          </a:p>
-        </p:txBody>
-      </p:sp>
-      <p:sp>
-        <p:nvSpPr>
-          <p:cNvPr id="5" name="제목 4">
-            <a:extLst>
-              <a:ext uri="{FF2B5EF4-FFF2-40B4-BE49-F238E27FC236}">
-                <a16:creationId xmlns:a16="http://schemas.microsoft.com/office/drawing/2014/main" id="{1DD2F534-EE96-0891-B750-CA1FFA363EA9}"/>
-              </a:ext>
-            </a:extLst>
-          </p:cNvPr>
-          <p:cNvSpPr>
-            <a:spLocks noGrp="1"/>
-          </p:cNvSpPr>
-          <p:nvPr>
-            <p:ph type="title"/>
-          </p:nvPr>
-        </p:nvSpPr>
-        <p:spPr/>
-        <p:txBody>
-          <a:bodyPr/>
-          <a:lstStyle/>
-          <a:p>
-            <a:r>
-              <a:rPr lang="en-US" altLang="ko-KR" dirty="0"/>
-              <a:t>Git </a:t>
-            </a:r>
-            <a:r>
-              <a:rPr lang="ko-KR" altLang="en-US" dirty="0"/>
-              <a:t>명령어</a:t>
-            </a:r>
-          </a:p>
-        </p:txBody>
-      </p:sp>
-    </p:spTree>
-    <p:extLst>
-      <p:ext uri="{BB962C8B-B14F-4D97-AF65-F5344CB8AC3E}">
-        <p14:creationId xmlns:p14="http://schemas.microsoft.com/office/powerpoint/2010/main" val="656453146"/>
-      </p:ext>
-    </p:extLst>
-  </p:cSld>
-  <p:clrMapOvr>
-    <a:masterClrMapping/>
-  </p:clrMapOvr>
-</p:sld>
-</file>
-
 <file path=ppt/slides/slide29.xml><?xml version="1.0" encoding="utf-8"?>
 <p:sld xmlns:a="http://schemas.openxmlformats.org/drawingml/2006/main" xmlns:r="http://schemas.openxmlformats.org/officeDocument/2006/relationships" xmlns:p="http://schemas.openxmlformats.org/presentationml/2006/main">
   <p:cSld>
@@ -11981,7 +11983,325 @@
       </p:grpSpPr>
       <p:sp>
         <p:nvSpPr>
-          <p:cNvPr id="2" name="날짜 개체 틀 1"/>
+          <p:cNvPr id="2" name="내용 개체 틀 1">
+            <a:extLst>
+              <a:ext uri="{FF2B5EF4-FFF2-40B4-BE49-F238E27FC236}">
+                <a16:creationId xmlns:a16="http://schemas.microsoft.com/office/drawing/2014/main" id="{1C847C42-5B19-643E-6060-D9D2F849F11D}"/>
+              </a:ext>
+            </a:extLst>
+          </p:cNvPr>
+          <p:cNvSpPr>
+            <a:spLocks noGrp="1"/>
+          </p:cNvSpPr>
+          <p:nvPr>
+            <p:ph idx="1"/>
+          </p:nvPr>
+        </p:nvSpPr>
+        <p:spPr/>
+        <p:txBody>
+          <a:bodyPr>
+            <a:normAutofit/>
+          </a:bodyPr>
+          <a:lstStyle/>
+          <a:p>
+            <a:pPr>
+              <a:lnSpc>
+                <a:spcPct val="100000"/>
+              </a:lnSpc>
+            </a:pPr>
+            <a:r>
+              <a:rPr lang="en-US" altLang="ko-KR" sz="2400" dirty="0">
+                <a:solidFill>
+                  <a:srgbClr val="0070C0"/>
+                </a:solidFill>
+                <a:ea typeface="강한공군체 Medium" panose="020B0600000101010101" pitchFamily="34" charset="-127"/>
+              </a:rPr>
+              <a:t>git status</a:t>
+            </a:r>
+            <a:r>
+              <a:rPr lang="en-US" altLang="ko-KR" sz="2400" dirty="0">
+                <a:ea typeface="강한공군체 Medium" panose="020B0600000101010101" pitchFamily="34" charset="-127"/>
+              </a:rPr>
+              <a:t> : </a:t>
+            </a:r>
+            <a:r>
+              <a:rPr lang="ko-KR" altLang="en-US" sz="2400" dirty="0">
+                <a:ea typeface="강한공군체 Medium" panose="020B0600000101010101" pitchFamily="34" charset="-127"/>
+              </a:rPr>
+              <a:t>현재 디렉토리 상태 보기</a:t>
+            </a:r>
+            <a:endParaRPr lang="en-US" altLang="ko-KR" sz="2400" dirty="0">
+              <a:ea typeface="강한공군체 Medium" panose="020B0600000101010101" pitchFamily="34" charset="-127"/>
+            </a:endParaRPr>
+          </a:p>
+          <a:p>
+            <a:pPr>
+              <a:lnSpc>
+                <a:spcPct val="100000"/>
+              </a:lnSpc>
+            </a:pPr>
+            <a:r>
+              <a:rPr lang="en-US" altLang="ko-KR" sz="2400" dirty="0">
+                <a:solidFill>
+                  <a:srgbClr val="0070C0"/>
+                </a:solidFill>
+                <a:ea typeface="강한공군체 Medium" panose="020B0600000101010101" pitchFamily="34" charset="-127"/>
+              </a:rPr>
+              <a:t>git add</a:t>
+            </a:r>
+            <a:r>
+              <a:rPr lang="ko-KR" altLang="en-US" sz="2400" dirty="0">
+                <a:solidFill>
+                  <a:srgbClr val="0070C0"/>
+                </a:solidFill>
+                <a:ea typeface="강한공군체 Medium" panose="020B0600000101010101" pitchFamily="34" charset="-127"/>
+              </a:rPr>
+              <a:t> </a:t>
+            </a:r>
+            <a:r>
+              <a:rPr lang="en-US" altLang="ko-KR" sz="2400" dirty="0">
+                <a:solidFill>
+                  <a:srgbClr val="0070C0"/>
+                </a:solidFill>
+                <a:ea typeface="강한공군체 Medium" panose="020B0600000101010101" pitchFamily="34" charset="-127"/>
+              </a:rPr>
+              <a:t>. </a:t>
+            </a:r>
+            <a:r>
+              <a:rPr lang="en-US" altLang="ko-KR" sz="2400" dirty="0">
+                <a:ea typeface="강한공군체 Medium" panose="020B0600000101010101" pitchFamily="34" charset="-127"/>
+              </a:rPr>
+              <a:t>: </a:t>
+            </a:r>
+            <a:r>
+              <a:rPr lang="ko-KR" altLang="en-US" sz="2400" dirty="0">
+                <a:ea typeface="강한공군체 Medium" panose="020B0600000101010101" pitchFamily="34" charset="-127"/>
+              </a:rPr>
+              <a:t>현재 디렉토리의 모든 변경 사항을 </a:t>
+            </a:r>
+            <a:r>
+              <a:rPr lang="ko-KR" altLang="en-US" sz="2400" dirty="0" err="1">
+                <a:ea typeface="강한공군체 Medium" panose="020B0600000101010101" pitchFamily="34" charset="-127"/>
+              </a:rPr>
+              <a:t>스테이징</a:t>
+            </a:r>
+            <a:r>
+              <a:rPr lang="ko-KR" altLang="en-US" sz="2400" dirty="0">
+                <a:ea typeface="강한공군체 Medium" panose="020B0600000101010101" pitchFamily="34" charset="-127"/>
+              </a:rPr>
+              <a:t> 영역에 추가 </a:t>
+            </a:r>
+            <a:endParaRPr lang="en-US" altLang="ko-KR" sz="2400" dirty="0">
+              <a:ea typeface="강한공군체 Medium" panose="020B0600000101010101" pitchFamily="34" charset="-127"/>
+            </a:endParaRPr>
+          </a:p>
+          <a:p>
+            <a:pPr>
+              <a:lnSpc>
+                <a:spcPct val="100000"/>
+              </a:lnSpc>
+            </a:pPr>
+            <a:r>
+              <a:rPr lang="en-US" altLang="ko-KR" sz="2400" dirty="0">
+                <a:solidFill>
+                  <a:srgbClr val="0070C0"/>
+                </a:solidFill>
+                <a:ea typeface="강한공군체 Medium" panose="020B0600000101010101" pitchFamily="34" charset="-127"/>
+              </a:rPr>
+              <a:t>git status </a:t>
+            </a:r>
+            <a:r>
+              <a:rPr lang="en-US" altLang="ko-KR" sz="2400" dirty="0">
+                <a:ea typeface="강한공군체 Medium" panose="020B0600000101010101" pitchFamily="34" charset="-127"/>
+              </a:rPr>
+              <a:t>: </a:t>
+            </a:r>
+            <a:r>
+              <a:rPr lang="ko-KR" altLang="en-US" sz="2400" dirty="0">
+                <a:ea typeface="강한공군체 Medium" panose="020B0600000101010101" pitchFamily="34" charset="-127"/>
+              </a:rPr>
+              <a:t>현재 디렉토리 상태 보기 </a:t>
+            </a:r>
+            <a:r>
+              <a:rPr lang="en-US" altLang="ko-KR" sz="2400" dirty="0">
+                <a:ea typeface="강한공군체 Medium" panose="020B0600000101010101" pitchFamily="34" charset="-127"/>
+              </a:rPr>
+              <a:t>(</a:t>
+            </a:r>
+            <a:r>
+              <a:rPr lang="ko-KR" altLang="en-US" sz="2400" dirty="0">
+                <a:ea typeface="강한공군체 Medium" panose="020B0600000101010101" pitchFamily="34" charset="-127"/>
+              </a:rPr>
+              <a:t>상태 변경 확인</a:t>
+            </a:r>
+            <a:r>
+              <a:rPr lang="en-US" altLang="ko-KR" sz="2400" dirty="0">
+                <a:ea typeface="강한공군체 Medium" panose="020B0600000101010101" pitchFamily="34" charset="-127"/>
+              </a:rPr>
+              <a:t>)</a:t>
+            </a:r>
+          </a:p>
+          <a:p>
+            <a:pPr>
+              <a:lnSpc>
+                <a:spcPct val="100000"/>
+              </a:lnSpc>
+            </a:pPr>
+            <a:r>
+              <a:rPr lang="en-US" altLang="ko-KR" sz="2400" dirty="0">
+                <a:solidFill>
+                  <a:srgbClr val="0070C0"/>
+                </a:solidFill>
+                <a:ea typeface="강한공군체 Medium" panose="020B0600000101010101" pitchFamily="34" charset="-127"/>
+              </a:rPr>
+              <a:t>git</a:t>
+            </a:r>
+            <a:r>
+              <a:rPr lang="ko-KR" altLang="en-US" sz="2400" dirty="0">
+                <a:solidFill>
+                  <a:srgbClr val="0070C0"/>
+                </a:solidFill>
+                <a:ea typeface="강한공군체 Medium" panose="020B0600000101010101" pitchFamily="34" charset="-127"/>
+              </a:rPr>
+              <a:t> </a:t>
+            </a:r>
+            <a:r>
+              <a:rPr lang="en-US" altLang="ko-KR" sz="2400" dirty="0">
+                <a:solidFill>
+                  <a:srgbClr val="0070C0"/>
+                </a:solidFill>
+                <a:ea typeface="강한공군체 Medium" panose="020B0600000101010101" pitchFamily="34" charset="-127"/>
+              </a:rPr>
+              <a:t>commit -m “study: first commit” </a:t>
+            </a:r>
+            <a:r>
+              <a:rPr lang="en-US" altLang="ko-KR" sz="2400" dirty="0">
+                <a:ea typeface="강한공군체 Medium" panose="020B0600000101010101" pitchFamily="34" charset="-127"/>
+              </a:rPr>
+              <a:t>: </a:t>
+            </a:r>
+            <a:r>
+              <a:rPr lang="ko-KR" altLang="en-US" sz="2400" dirty="0" err="1">
+                <a:ea typeface="강한공군체 Medium" panose="020B0600000101010101" pitchFamily="34" charset="-127"/>
+              </a:rPr>
+              <a:t>스테이징</a:t>
+            </a:r>
+            <a:r>
+              <a:rPr lang="ko-KR" altLang="en-US" sz="2400" dirty="0">
+                <a:ea typeface="강한공군체 Medium" panose="020B0600000101010101" pitchFamily="34" charset="-127"/>
+              </a:rPr>
+              <a:t> 영역의 파일을 커밋하여 저장소의 히스토리에 기록</a:t>
+            </a:r>
+            <a:endParaRPr lang="en-US" altLang="ko-KR" sz="2400" dirty="0">
+              <a:ea typeface="강한공군체 Medium" panose="020B0600000101010101" pitchFamily="34" charset="-127"/>
+            </a:endParaRPr>
+          </a:p>
+          <a:p>
+            <a:pPr>
+              <a:lnSpc>
+                <a:spcPct val="100000"/>
+              </a:lnSpc>
+            </a:pPr>
+            <a:r>
+              <a:rPr lang="en-US" altLang="ko-KR" sz="2400" dirty="0">
+                <a:solidFill>
+                  <a:srgbClr val="0070C0"/>
+                </a:solidFill>
+                <a:ea typeface="강한공군체 Medium" panose="020B0600000101010101" pitchFamily="34" charset="-127"/>
+              </a:rPr>
+              <a:t>git log </a:t>
+            </a:r>
+            <a:r>
+              <a:rPr lang="en-US" altLang="ko-KR" sz="2400" dirty="0">
+                <a:ea typeface="강한공군체 Medium" panose="020B0600000101010101" pitchFamily="34" charset="-127"/>
+              </a:rPr>
+              <a:t>: </a:t>
+            </a:r>
+            <a:r>
+              <a:rPr lang="ko-KR" altLang="en-US" sz="2400" dirty="0">
+                <a:ea typeface="강한공군체 Medium" panose="020B0600000101010101" pitchFamily="34" charset="-127"/>
+              </a:rPr>
+              <a:t>저장소의 </a:t>
+            </a:r>
+            <a:r>
+              <a:rPr lang="ko-KR" altLang="en-US" sz="2400" dirty="0" err="1">
+                <a:ea typeface="강한공군체 Medium" panose="020B0600000101010101" pitchFamily="34" charset="-127"/>
+              </a:rPr>
+              <a:t>커밋</a:t>
+            </a:r>
+            <a:r>
+              <a:rPr lang="ko-KR" altLang="en-US" sz="2400" dirty="0">
+                <a:ea typeface="강한공군체 Medium" panose="020B0600000101010101" pitchFamily="34" charset="-127"/>
+              </a:rPr>
+              <a:t> 히스토리 확인</a:t>
+            </a:r>
+            <a:endParaRPr lang="en-US" altLang="ko-KR" sz="2400" dirty="0">
+              <a:ea typeface="강한공군체 Medium" panose="020B0600000101010101" pitchFamily="34" charset="-127"/>
+            </a:endParaRPr>
+          </a:p>
+          <a:p>
+            <a:pPr>
+              <a:lnSpc>
+                <a:spcPct val="100000"/>
+              </a:lnSpc>
+            </a:pPr>
+            <a:r>
+              <a:rPr lang="en-US" altLang="ko-KR" sz="2400" dirty="0">
+                <a:solidFill>
+                  <a:srgbClr val="0070C0"/>
+                </a:solidFill>
+                <a:ea typeface="강한공군체 Medium" panose="020B0600000101010101" pitchFamily="34" charset="-127"/>
+              </a:rPr>
+              <a:t>git</a:t>
+            </a:r>
+            <a:r>
+              <a:rPr lang="ko-KR" altLang="en-US" sz="2400" dirty="0">
+                <a:solidFill>
+                  <a:srgbClr val="0070C0"/>
+                </a:solidFill>
+                <a:ea typeface="강한공군체 Medium" panose="020B0600000101010101" pitchFamily="34" charset="-127"/>
+              </a:rPr>
+              <a:t> </a:t>
+            </a:r>
+            <a:r>
+              <a:rPr lang="en-US" altLang="ko-KR" sz="2400" dirty="0">
+                <a:solidFill>
+                  <a:srgbClr val="0070C0"/>
+                </a:solidFill>
+                <a:ea typeface="강한공군체 Medium" panose="020B0600000101010101" pitchFamily="34" charset="-127"/>
+              </a:rPr>
+              <a:t>push –u origin main </a:t>
+            </a:r>
+            <a:r>
+              <a:rPr lang="en-US" altLang="ko-KR" sz="2400" dirty="0">
+                <a:ea typeface="강한공군체 Medium" panose="020B0600000101010101" pitchFamily="34" charset="-127"/>
+              </a:rPr>
+              <a:t>: </a:t>
+            </a:r>
+            <a:r>
+              <a:rPr lang="ko-KR" altLang="en-US" sz="2400" dirty="0">
+                <a:ea typeface="강한공군체 Medium" panose="020B0600000101010101" pitchFamily="34" charset="-127"/>
+              </a:rPr>
+              <a:t>로컬 저장소의 변경 사항을 원격 저장소로 푸시</a:t>
+            </a:r>
+            <a:endParaRPr lang="en-US" altLang="ko-KR" sz="2400" dirty="0">
+              <a:ea typeface="강한공군체 Medium" panose="020B0600000101010101" pitchFamily="34" charset="-127"/>
+            </a:endParaRPr>
+          </a:p>
+          <a:p>
+            <a:endParaRPr lang="ko-KR" altLang="en-US" sz="2400" dirty="0"/>
+          </a:p>
+        </p:txBody>
+      </p:sp>
+      <p:sp>
+        <p:nvSpPr>
+          <p:cNvPr id="3" name="날짜 개체 틀 2">
+            <a:extLst>
+              <a:ext uri="{FF2B5EF4-FFF2-40B4-BE49-F238E27FC236}">
+                <a16:creationId xmlns:a16="http://schemas.microsoft.com/office/drawing/2014/main" id="{A9D7B475-9B14-ED2B-6D54-DB49F3841811}"/>
+              </a:ext>
+            </a:extLst>
+          </p:cNvPr>
           <p:cNvSpPr>
             <a:spLocks noGrp="1"/>
           </p:cNvSpPr>
@@ -11994,7 +12314,7 @@
           <a:bodyPr/>
           <a:lstStyle/>
           <a:p>
-            <a:fld id="{0E19CB95-6D28-40F1-9DA3-1BAC5D4B5B4F}" type="datetime6">
+            <a:fld id="{3C9CE3CE-253F-4F9D-BA15-C226C8D8501E}" type="datetime6">
               <a:rPr lang="ko-KR" altLang="en-US" smtClean="0"/>
               <a:t>2024년 5월</a:t>
             </a:fld>
@@ -12004,7 +12324,13 @@
       </p:sp>
       <p:sp>
         <p:nvSpPr>
-          <p:cNvPr id="3" name="슬라이드 번호 개체 틀 2"/>
+          <p:cNvPr id="4" name="슬라이드 번호 개체 틀 3">
+            <a:extLst>
+              <a:ext uri="{FF2B5EF4-FFF2-40B4-BE49-F238E27FC236}">
+                <a16:creationId xmlns:a16="http://schemas.microsoft.com/office/drawing/2014/main" id="{E32B312E-2FAB-7276-F2BF-2F6DBC9DD044}"/>
+              </a:ext>
+            </a:extLst>
+          </p:cNvPr>
           <p:cNvSpPr>
             <a:spLocks noGrp="1"/>
           </p:cNvSpPr>
@@ -12027,7 +12353,13 @@
       </p:sp>
       <p:sp>
         <p:nvSpPr>
-          <p:cNvPr id="4" name="제목 3"/>
+          <p:cNvPr id="5" name="제목 4">
+            <a:extLst>
+              <a:ext uri="{FF2B5EF4-FFF2-40B4-BE49-F238E27FC236}">
+                <a16:creationId xmlns:a16="http://schemas.microsoft.com/office/drawing/2014/main" id="{1DD2F534-EE96-0891-B750-CA1FFA363EA9}"/>
+              </a:ext>
+            </a:extLst>
+          </p:cNvPr>
           <p:cNvSpPr>
             <a:spLocks noGrp="1"/>
           </p:cNvSpPr>
@@ -12041,17 +12373,20 @@
           <a:lstStyle/>
           <a:p>
             <a:r>
-              <a:rPr lang="ko-KR" altLang="en-US" dirty="0" err="1"/>
-              <a:t>블로깅</a:t>
-            </a:r>
-            <a:endParaRPr lang="ko-KR" altLang="en-US" dirty="0"/>
+              <a:rPr lang="en-US" altLang="ko-KR" dirty="0"/>
+              <a:t>Git </a:t>
+            </a:r>
+            <a:r>
+              <a:rPr lang="ko-KR" altLang="en-US" dirty="0"/>
+              <a:t>명령어</a:t>
+            </a:r>
           </a:p>
         </p:txBody>
       </p:sp>
     </p:spTree>
     <p:extLst>
       <p:ext uri="{BB962C8B-B14F-4D97-AF65-F5344CB8AC3E}">
-        <p14:creationId xmlns:p14="http://schemas.microsoft.com/office/powerpoint/2010/main" val="327552701"/>
+        <p14:creationId xmlns:p14="http://schemas.microsoft.com/office/powerpoint/2010/main" val="656453146"/>
       </p:ext>
     </p:extLst>
   </p:cSld>
@@ -12227,16 +12562,15 @@
           </p:cNvPicPr>
           <p:nvPr/>
         </p:nvPicPr>
-        <p:blipFill>
+        <p:blipFill rotWithShape="1">
           <a:blip r:embed="rId3"/>
-          <a:stretch>
-            <a:fillRect/>
-          </a:stretch>
+          <a:srcRect r="472"/>
+          <a:stretch/>
         </p:blipFill>
         <p:spPr>
           <a:xfrm>
-            <a:off x="1470967" y="2892367"/>
-            <a:ext cx="9250066" cy="2715004"/>
+            <a:off x="1499196" y="2892367"/>
+            <a:ext cx="9206476" cy="2715004"/>
           </a:xfrm>
           <a:prstGeom prst="rect">
             <a:avLst/>
@@ -12275,6 +12609,105 @@
       </p:grpSpPr>
       <p:sp>
         <p:nvSpPr>
+          <p:cNvPr id="2" name="날짜 개체 틀 1"/>
+          <p:cNvSpPr>
+            <a:spLocks noGrp="1"/>
+          </p:cNvSpPr>
+          <p:nvPr>
+            <p:ph type="dt" sz="half" idx="10"/>
+          </p:nvPr>
+        </p:nvSpPr>
+        <p:spPr/>
+        <p:txBody>
+          <a:bodyPr/>
+          <a:lstStyle/>
+          <a:p>
+            <a:fld id="{0E19CB95-6D28-40F1-9DA3-1BAC5D4B5B4F}" type="datetime6">
+              <a:rPr lang="ko-KR" altLang="en-US" smtClean="0"/>
+              <a:t>2024년 5월</a:t>
+            </a:fld>
+            <a:endParaRPr lang="ko-KR" altLang="en-US"/>
+          </a:p>
+        </p:txBody>
+      </p:sp>
+      <p:sp>
+        <p:nvSpPr>
+          <p:cNvPr id="3" name="슬라이드 번호 개체 틀 2"/>
+          <p:cNvSpPr>
+            <a:spLocks noGrp="1"/>
+          </p:cNvSpPr>
+          <p:nvPr>
+            <p:ph type="sldNum" sz="quarter" idx="12"/>
+          </p:nvPr>
+        </p:nvSpPr>
+        <p:spPr/>
+        <p:txBody>
+          <a:bodyPr/>
+          <a:lstStyle/>
+          <a:p>
+            <a:fld id="{083A2CE0-18CD-4102-B738-4ACFF9E68BA4}" type="slidenum">
+              <a:rPr lang="ko-KR" altLang="en-US" smtClean="0"/>
+              <a:t>30</a:t>
+            </a:fld>
+            <a:endParaRPr lang="ko-KR" altLang="en-US"/>
+          </a:p>
+        </p:txBody>
+      </p:sp>
+      <p:sp>
+        <p:nvSpPr>
+          <p:cNvPr id="4" name="제목 3"/>
+          <p:cNvSpPr>
+            <a:spLocks noGrp="1"/>
+          </p:cNvSpPr>
+          <p:nvPr>
+            <p:ph type="title"/>
+          </p:nvPr>
+        </p:nvSpPr>
+        <p:spPr/>
+        <p:txBody>
+          <a:bodyPr/>
+          <a:lstStyle/>
+          <a:p>
+            <a:r>
+              <a:rPr lang="ko-KR" altLang="en-US" dirty="0" err="1"/>
+              <a:t>블로깅</a:t>
+            </a:r>
+            <a:endParaRPr lang="ko-KR" altLang="en-US" dirty="0"/>
+          </a:p>
+        </p:txBody>
+      </p:sp>
+    </p:spTree>
+    <p:extLst>
+      <p:ext uri="{BB962C8B-B14F-4D97-AF65-F5344CB8AC3E}">
+        <p14:creationId xmlns:p14="http://schemas.microsoft.com/office/powerpoint/2010/main" val="327552701"/>
+      </p:ext>
+    </p:extLst>
+  </p:cSld>
+  <p:clrMapOvr>
+    <a:masterClrMapping/>
+  </p:clrMapOvr>
+</p:sld>
+</file>
+
+<file path=ppt/slides/slide31.xml><?xml version="1.0" encoding="utf-8"?>
+<p:sld xmlns:a="http://schemas.openxmlformats.org/drawingml/2006/main" xmlns:r="http://schemas.openxmlformats.org/officeDocument/2006/relationships" xmlns:p="http://schemas.openxmlformats.org/presentationml/2006/main">
+  <p:cSld>
+    <p:spTree>
+      <p:nvGrpSpPr>
+        <p:cNvPr id="1" name=""/>
+        <p:cNvGrpSpPr/>
+        <p:nvPr/>
+      </p:nvGrpSpPr>
+      <p:grpSpPr>
+        <a:xfrm>
+          <a:off x="0" y="0"/>
+          <a:ext cx="0" cy="0"/>
+          <a:chOff x="0" y="0"/>
+          <a:chExt cx="0" cy="0"/>
+        </a:xfrm>
+      </p:grpSpPr>
+      <p:sp>
+        <p:nvSpPr>
           <p:cNvPr id="3" name="날짜 개체 틀 2">
             <a:extLst>
               <a:ext uri="{FF2B5EF4-FFF2-40B4-BE49-F238E27FC236}">
@@ -12325,7 +12758,7 @@
           <a:p>
             <a:fld id="{083A2CE0-18CD-4102-B738-4ACFF9E68BA4}" type="slidenum">
               <a:rPr lang="ko-KR" altLang="en-US" smtClean="0"/>
-              <a:t>30</a:t>
+              <a:t>31</a:t>
             </a:fld>
             <a:endParaRPr lang="ko-KR" altLang="en-US"/>
           </a:p>
@@ -13074,7 +13507,7 @@
 </p:sld>
 </file>
 
-<file path=ppt/slides/slide31.xml><?xml version="1.0" encoding="utf-8"?>
+<file path=ppt/slides/slide32.xml><?xml version="1.0" encoding="utf-8"?>
 <p:sld xmlns:a="http://schemas.openxmlformats.org/drawingml/2006/main" xmlns:r="http://schemas.openxmlformats.org/officeDocument/2006/relationships" xmlns:p="http://schemas.openxmlformats.org/presentationml/2006/main">
   <p:cSld>
     <p:spTree>
@@ -13189,7 +13622,7 @@
           <a:p>
             <a:fld id="{083A2CE0-18CD-4102-B738-4ACFF9E68BA4}" type="slidenum">
               <a:rPr lang="ko-KR" altLang="en-US" smtClean="0"/>
-              <a:t>31</a:t>
+              <a:t>32</a:t>
             </a:fld>
             <a:endParaRPr lang="ko-KR" altLang="en-US"/>
           </a:p>
@@ -13270,7 +13703,7 @@
 </p:sld>
 </file>
 
-<file path=ppt/slides/slide32.xml><?xml version="1.0" encoding="utf-8"?>
+<file path=ppt/slides/slide33.xml><?xml version="1.0" encoding="utf-8"?>
 <p:sld xmlns:a="http://schemas.openxmlformats.org/drawingml/2006/main" xmlns:r="http://schemas.openxmlformats.org/officeDocument/2006/relationships" xmlns:p="http://schemas.openxmlformats.org/presentationml/2006/main">
   <p:cSld>
     <p:spTree>
@@ -13693,7 +14126,7 @@
           <a:p>
             <a:fld id="{083A2CE0-18CD-4102-B738-4ACFF9E68BA4}" type="slidenum">
               <a:rPr lang="ko-KR" altLang="en-US" smtClean="0"/>
-              <a:t>32</a:t>
+              <a:t>33</a:t>
             </a:fld>
             <a:endParaRPr lang="ko-KR" altLang="en-US"/>
           </a:p>
@@ -13776,7 +14209,7 @@
 </p:sld>
 </file>
 
-<file path=ppt/slides/slide33.xml><?xml version="1.0" encoding="utf-8"?>
+<file path=ppt/slides/slide34.xml><?xml version="1.0" encoding="utf-8"?>
 <p:sld xmlns:a="http://schemas.openxmlformats.org/drawingml/2006/main" xmlns:r="http://schemas.openxmlformats.org/officeDocument/2006/relationships" xmlns:p="http://schemas.openxmlformats.org/presentationml/2006/main">
   <p:cSld>
     <p:spTree>
@@ -13845,7 +14278,7 @@
           <a:p>
             <a:fld id="{083A2CE0-18CD-4102-B738-4ACFF9E68BA4}" type="slidenum">
               <a:rPr lang="ko-KR" altLang="en-US" smtClean="0"/>
-              <a:t>33</a:t>
+              <a:t>34</a:t>
             </a:fld>
             <a:endParaRPr lang="ko-KR" altLang="en-US"/>
           </a:p>
@@ -15880,7 +16313,7 @@
         <p:spPr bwMode="auto">
           <a:xfrm>
             <a:off x="4097452" y="1846436"/>
-            <a:ext cx="311661" cy="311661"/>
+            <a:ext cx="288000" cy="288000"/>
           </a:xfrm>
           <a:prstGeom prst="rect">
             <a:avLst/>
@@ -15924,8 +16357,8 @@
         </p:blipFill>
         <p:spPr bwMode="auto">
           <a:xfrm>
-            <a:off x="1920124" y="3941686"/>
-            <a:ext cx="344232" cy="335296"/>
+            <a:off x="1920124" y="3962234"/>
+            <a:ext cx="295676" cy="288000"/>
           </a:xfrm>
           <a:prstGeom prst="rect">
             <a:avLst/>
@@ -15974,10 +16407,119 @@
       </p:grpSpPr>
       <p:sp>
         <p:nvSpPr>
+          <p:cNvPr id="2" name="내용 개체 틀 1">
+            <a:extLst>
+              <a:ext uri="{FF2B5EF4-FFF2-40B4-BE49-F238E27FC236}">
+                <a16:creationId xmlns:a16="http://schemas.microsoft.com/office/drawing/2014/main" id="{1C650068-969C-82B4-E3F9-AC97B3A7A99A}"/>
+              </a:ext>
+            </a:extLst>
+          </p:cNvPr>
+          <p:cNvSpPr>
+            <a:spLocks noGrp="1"/>
+          </p:cNvSpPr>
+          <p:nvPr>
+            <p:ph idx="1"/>
+          </p:nvPr>
+        </p:nvSpPr>
+        <p:spPr/>
+        <p:txBody>
+          <a:bodyPr>
+            <a:normAutofit/>
+          </a:bodyPr>
+          <a:lstStyle/>
+          <a:p>
+            <a:r>
+              <a:rPr lang="en-US" altLang="ko-KR" sz="2000" b="0" i="0" u="none" strike="noStrike" dirty="0">
+                <a:solidFill>
+                  <a:srgbClr val="273144"/>
+                </a:solidFill>
+                <a:effectLst/>
+                <a:highlight>
+                  <a:srgbClr val="FFFFFF"/>
+                </a:highlight>
+                <a:latin typeface="proxima nova"/>
+                <a:hlinkClick r:id="rId3"/>
+              </a:rPr>
+              <a:t>https://codingon.co.kr/partner/sesac_ydp_6th</a:t>
+            </a:r>
+            <a:endParaRPr lang="en-US" altLang="ko-KR" sz="2000" dirty="0"/>
+          </a:p>
+          <a:p>
+            <a:r>
+              <a:rPr lang="ko-KR" altLang="en-US" sz="2000" dirty="0"/>
+              <a:t>무료 온라인 강의 제공 및 실습 문제 강의 제공</a:t>
+            </a:r>
+            <a:endParaRPr lang="en-US" altLang="ko-KR" sz="2000" dirty="0"/>
+          </a:p>
+          <a:p>
+            <a:r>
+              <a:rPr lang="ko-KR" altLang="en-US" sz="2000" dirty="0"/>
+              <a:t>이메일</a:t>
+            </a:r>
+            <a:r>
+              <a:rPr lang="en-US" altLang="ko-KR" sz="2000" dirty="0"/>
+              <a:t>: </a:t>
+            </a:r>
+            <a:r>
+              <a:rPr lang="ko-KR" altLang="en-US" sz="2000" dirty="0"/>
+              <a:t>새싹 지원 시 입력한 이메일</a:t>
+            </a:r>
+            <a:endParaRPr lang="en-US" altLang="ko-KR" sz="2000" dirty="0"/>
+          </a:p>
+          <a:p>
+            <a:pPr lvl="1"/>
+            <a:r>
+              <a:rPr lang="ko-KR" altLang="en-US" sz="1600" dirty="0">
+                <a:solidFill>
+                  <a:schemeClr val="accent6"/>
+                </a:solidFill>
+              </a:rPr>
+              <a:t>잊어버린 경우</a:t>
+            </a:r>
+            <a:r>
+              <a:rPr lang="en-US" altLang="ko-KR" sz="1600" dirty="0">
+                <a:solidFill>
+                  <a:schemeClr val="accent6"/>
+                </a:solidFill>
+              </a:rPr>
+              <a:t> </a:t>
+            </a:r>
+            <a:r>
+              <a:rPr lang="ko-KR" altLang="en-US" sz="1600" dirty="0">
+                <a:solidFill>
+                  <a:schemeClr val="accent6"/>
+                </a:solidFill>
+              </a:rPr>
+              <a:t>크루 리더에게 문의해주세요</a:t>
+            </a:r>
+            <a:endParaRPr lang="en-US" altLang="ko-KR" sz="1600" dirty="0">
+              <a:solidFill>
+                <a:schemeClr val="accent6"/>
+              </a:solidFill>
+            </a:endParaRPr>
+          </a:p>
+          <a:p>
+            <a:r>
+              <a:rPr lang="ko-KR" altLang="en-US" sz="2000" dirty="0"/>
+              <a:t>초기 비밀번호</a:t>
+            </a:r>
+            <a:r>
+              <a:rPr lang="en-US" altLang="ko-KR" sz="2000" dirty="0"/>
+              <a:t>: 1234</a:t>
+            </a:r>
+            <a:r>
+              <a:rPr lang="ko-KR" altLang="en-US" sz="2000" dirty="0"/>
+              <a:t> </a:t>
+            </a:r>
+          </a:p>
+        </p:txBody>
+      </p:sp>
+      <p:sp>
+        <p:nvSpPr>
           <p:cNvPr id="3" name="날짜 개체 틀 2">
             <a:extLst>
               <a:ext uri="{FF2B5EF4-FFF2-40B4-BE49-F238E27FC236}">
-                <a16:creationId xmlns:a16="http://schemas.microsoft.com/office/drawing/2014/main" id="{2ADE279D-187D-FFC8-1BCF-39ED1039484B}"/>
+                <a16:creationId xmlns:a16="http://schemas.microsoft.com/office/drawing/2014/main" id="{87FC0C01-D0A1-5714-14D0-D6CD65F45635}"/>
               </a:ext>
             </a:extLst>
           </p:cNvPr>
@@ -16006,7 +16548,7 @@
           <p:cNvPr id="4" name="슬라이드 번호 개체 틀 3">
             <a:extLst>
               <a:ext uri="{FF2B5EF4-FFF2-40B4-BE49-F238E27FC236}">
-                <a16:creationId xmlns:a16="http://schemas.microsoft.com/office/drawing/2014/main" id="{C65620E2-371F-92B9-8FFF-EEF653C30865}"/>
+                <a16:creationId xmlns:a16="http://schemas.microsoft.com/office/drawing/2014/main" id="{BCE53921-6764-6F73-A8D6-35A3A91B7FF0}"/>
               </a:ext>
             </a:extLst>
           </p:cNvPr>
@@ -16035,7 +16577,7 @@
           <p:cNvPr id="5" name="제목 4">
             <a:extLst>
               <a:ext uri="{FF2B5EF4-FFF2-40B4-BE49-F238E27FC236}">
-                <a16:creationId xmlns:a16="http://schemas.microsoft.com/office/drawing/2014/main" id="{6CE51FDC-3006-5D10-684A-6BF04168043C}"/>
+                <a16:creationId xmlns:a16="http://schemas.microsoft.com/office/drawing/2014/main" id="{FCFCC5E3-C862-D44C-CA75-5E5A0986AB34}"/>
               </a:ext>
             </a:extLst>
           </p:cNvPr>
@@ -16052,8 +16594,20 @@
           <a:lstStyle/>
           <a:p>
             <a:r>
+              <a:rPr lang="ko-KR" altLang="en-US" dirty="0" err="1"/>
+              <a:t>코딩온</a:t>
+            </a:r>
+            <a:r>
               <a:rPr lang="ko-KR" altLang="en-US" dirty="0"/>
-              <a:t>확약서 서명 및 체크리스트 작성</a:t>
+              <a:t> 온라인 </a:t>
+            </a:r>
+            <a:r>
+              <a:rPr lang="en-US" altLang="ko-KR" dirty="0"/>
+              <a:t>LMS </a:t>
+            </a:r>
+            <a:r>
+              <a:rPr lang="ko-KR" altLang="en-US" dirty="0"/>
+              <a:t>안내</a:t>
             </a:r>
           </a:p>
         </p:txBody>
@@ -16063,7 +16617,7 @@
           <p:cNvPr id="7" name="그림 6">
             <a:extLst>
               <a:ext uri="{FF2B5EF4-FFF2-40B4-BE49-F238E27FC236}">
-                <a16:creationId xmlns:a16="http://schemas.microsoft.com/office/drawing/2014/main" id="{020B9F45-0BCE-4FFF-D576-1A68CF8A4E16}"/>
+                <a16:creationId xmlns:a16="http://schemas.microsoft.com/office/drawing/2014/main" id="{AFA9E42B-4E21-370A-9DC7-F9A8FBE75C31}"/>
               </a:ext>
             </a:extLst>
           </p:cNvPr>
@@ -16072,16 +16626,15 @@
           </p:cNvPicPr>
           <p:nvPr/>
         </p:nvPicPr>
-        <p:blipFill>
-          <a:blip r:embed="rId2"/>
-          <a:stretch>
-            <a:fillRect/>
-          </a:stretch>
+        <p:blipFill rotWithShape="1">
+          <a:blip r:embed="rId4"/>
+          <a:srcRect l="11198" t="7362" r="9714" b="8773"/>
+          <a:stretch/>
         </p:blipFill>
         <p:spPr>
           <a:xfrm>
-            <a:off x="1486673" y="1539241"/>
-            <a:ext cx="3257805" cy="4526687"/>
+            <a:off x="8895651" y="2392423"/>
+            <a:ext cx="3143949" cy="3784540"/>
           </a:xfrm>
           <a:prstGeom prst="rect">
             <a:avLst/>
@@ -16090,10 +16643,10 @@
       </p:pic>
       <p:pic>
         <p:nvPicPr>
-          <p:cNvPr id="13" name="그림 12">
-            <a:extLst>
-              <a:ext uri="{FF2B5EF4-FFF2-40B4-BE49-F238E27FC236}">
-                <a16:creationId xmlns:a16="http://schemas.microsoft.com/office/drawing/2014/main" id="{19362997-968B-2B22-074F-738C5AC2819E}"/>
+          <p:cNvPr id="9" name="그림 8" descr="패턴, 픽셀, 디자인이(가) 표시된 사진&#10;&#10;자동 생성된 설명">
+            <a:extLst>
+              <a:ext uri="{FF2B5EF4-FFF2-40B4-BE49-F238E27FC236}">
+                <a16:creationId xmlns:a16="http://schemas.microsoft.com/office/drawing/2014/main" id="{7A77014D-2B00-9268-A221-FAA7FCE52A3F}"/>
               </a:ext>
             </a:extLst>
           </p:cNvPr>
@@ -16103,27 +16656,162 @@
           <p:nvPr/>
         </p:nvPicPr>
         <p:blipFill>
-          <a:blip r:embed="rId3"/>
+          <a:blip r:embed="rId5">
+            <a:extLst>
+              <a:ext uri="{28A0092B-C50C-407E-A947-70E740481C1C}">
+                <a14:useLocalDpi xmlns:a14="http://schemas.microsoft.com/office/drawing/2010/main" val="0"/>
+              </a:ext>
+            </a:extLst>
+          </a:blip>
           <a:stretch>
             <a:fillRect/>
           </a:stretch>
         </p:blipFill>
         <p:spPr>
           <a:xfrm>
-            <a:off x="7827195" y="1206765"/>
-            <a:ext cx="3425520" cy="4859163"/>
+            <a:off x="6976203" y="1011691"/>
+            <a:ext cx="2165957" cy="2165957"/>
           </a:xfrm>
           <a:prstGeom prst="rect">
             <a:avLst/>
           </a:prstGeom>
         </p:spPr>
       </p:pic>
+      <p:grpSp>
+        <p:nvGrpSpPr>
+          <p:cNvPr id="15" name="그룹 14">
+            <a:extLst>
+              <a:ext uri="{FF2B5EF4-FFF2-40B4-BE49-F238E27FC236}">
+                <a16:creationId xmlns:a16="http://schemas.microsoft.com/office/drawing/2014/main" id="{B4C682D1-15CA-2587-00D2-8CFC50B8A419}"/>
+              </a:ext>
+            </a:extLst>
+          </p:cNvPr>
+          <p:cNvGrpSpPr/>
+          <p:nvPr/>
+        </p:nvGrpSpPr>
+        <p:grpSpPr>
+          <a:xfrm>
+            <a:off x="5943770" y="4789466"/>
+            <a:ext cx="3373445" cy="307777"/>
+            <a:chOff x="5943770" y="4789466"/>
+            <a:chExt cx="3373445" cy="307777"/>
+          </a:xfrm>
+        </p:grpSpPr>
+        <p:sp>
+          <p:nvSpPr>
+            <p:cNvPr id="10" name="TextBox 9">
+              <a:extLst>
+                <a:ext uri="{FF2B5EF4-FFF2-40B4-BE49-F238E27FC236}">
+                  <a16:creationId xmlns:a16="http://schemas.microsoft.com/office/drawing/2014/main" id="{5D7D08AF-C4A8-1D5A-4227-E188F3507C46}"/>
+                </a:ext>
+              </a:extLst>
+            </p:cNvPr>
+            <p:cNvSpPr txBox="1"/>
+            <p:nvPr/>
+          </p:nvSpPr>
+          <p:spPr>
+            <a:xfrm>
+              <a:off x="5943770" y="4789466"/>
+              <a:ext cx="3095719" cy="307777"/>
+            </a:xfrm>
+            <a:prstGeom prst="rect">
+              <a:avLst/>
+            </a:prstGeom>
+            <a:noFill/>
+          </p:spPr>
+          <p:txBody>
+            <a:bodyPr wrap="none" rtlCol="0">
+              <a:spAutoFit/>
+            </a:bodyPr>
+            <a:lstStyle/>
+            <a:p>
+              <a:r>
+                <a:rPr lang="ko-KR" altLang="en-US" sz="1400" b="1" dirty="0">
+                  <a:solidFill>
+                    <a:schemeClr val="accent5"/>
+                  </a:solidFill>
+                </a:rPr>
+                <a:t>로그인 화면 일치하는지 반드시 확인</a:t>
+              </a:r>
+              <a:r>
+                <a:rPr lang="en-US" altLang="ko-KR" sz="1400" b="1" dirty="0">
+                  <a:solidFill>
+                    <a:schemeClr val="accent5"/>
+                  </a:solidFill>
+                </a:rPr>
+                <a:t>!</a:t>
+              </a:r>
+              <a:endParaRPr lang="ko-KR" altLang="en-US" sz="1400" b="1" dirty="0">
+                <a:solidFill>
+                  <a:schemeClr val="accent5"/>
+                </a:solidFill>
+              </a:endParaRPr>
+            </a:p>
+          </p:txBody>
+        </p:sp>
+        <p:sp>
+          <p:nvSpPr>
+            <p:cNvPr id="11" name="화살표: 오른쪽 10">
+              <a:extLst>
+                <a:ext uri="{FF2B5EF4-FFF2-40B4-BE49-F238E27FC236}">
+                  <a16:creationId xmlns:a16="http://schemas.microsoft.com/office/drawing/2014/main" id="{F0C631AE-9F29-7FB8-9318-F8E01CDE2CA1}"/>
+                </a:ext>
+              </a:extLst>
+            </p:cNvPr>
+            <p:cNvSpPr/>
+            <p:nvPr/>
+          </p:nvSpPr>
+          <p:spPr>
+            <a:xfrm>
+              <a:off x="9019264" y="4835476"/>
+              <a:ext cx="297951" cy="215758"/>
+            </a:xfrm>
+            <a:prstGeom prst="rightArrow">
+              <a:avLst/>
+            </a:prstGeom>
+            <a:solidFill>
+              <a:schemeClr val="accent5"/>
+            </a:solidFill>
+            <a:ln>
+              <a:noFill/>
+            </a:ln>
+          </p:spPr>
+          <p:style>
+            <a:lnRef idx="2">
+              <a:schemeClr val="accent1">
+                <a:shade val="15000"/>
+              </a:schemeClr>
+            </a:lnRef>
+            <a:fillRef idx="1">
+              <a:schemeClr val="accent1"/>
+            </a:fillRef>
+            <a:effectRef idx="0">
+              <a:schemeClr val="accent1"/>
+            </a:effectRef>
+            <a:fontRef idx="minor">
+              <a:schemeClr val="lt1"/>
+            </a:fontRef>
+          </p:style>
+          <p:txBody>
+            <a:bodyPr rtlCol="0" anchor="ctr"/>
+            <a:lstStyle/>
+            <a:p>
+              <a:pPr algn="ctr"/>
+              <a:endParaRPr lang="ko-KR" altLang="en-US">
+                <a:solidFill>
+                  <a:schemeClr val="accent5"/>
+                </a:solidFill>
+              </a:endParaRPr>
+            </a:p>
+          </p:txBody>
+        </p:sp>
+      </p:grpSp>
       <p:pic>
         <p:nvPicPr>
-          <p:cNvPr id="9" name="그림 8">
-            <a:extLst>
-              <a:ext uri="{FF2B5EF4-FFF2-40B4-BE49-F238E27FC236}">
-                <a16:creationId xmlns:a16="http://schemas.microsoft.com/office/drawing/2014/main" id="{AEC3B96B-E4B6-CA84-920F-DA215628233A}"/>
+          <p:cNvPr id="13" name="그림 12">
+            <a:extLst>
+              <a:ext uri="{FF2B5EF4-FFF2-40B4-BE49-F238E27FC236}">
+                <a16:creationId xmlns:a16="http://schemas.microsoft.com/office/drawing/2014/main" id="{4055E03E-03C7-B605-B68F-3E6DE78E1E52}"/>
               </a:ext>
             </a:extLst>
           </p:cNvPr>
@@ -16133,25 +16821,135 @@
           <p:nvPr/>
         </p:nvPicPr>
         <p:blipFill>
-          <a:blip r:embed="rId4"/>
+          <a:blip r:embed="rId6"/>
           <a:stretch>
             <a:fillRect/>
           </a:stretch>
         </p:blipFill>
         <p:spPr>
           <a:xfrm>
-            <a:off x="5926351" y="1539554"/>
-            <a:ext cx="3175791" cy="4526687"/>
+            <a:off x="1153991" y="3924847"/>
+            <a:ext cx="3804484" cy="2234028"/>
           </a:xfrm>
           <a:prstGeom prst="rect">
             <a:avLst/>
           </a:prstGeom>
         </p:spPr>
       </p:pic>
+      <p:sp>
+        <p:nvSpPr>
+          <p:cNvPr id="14" name="곱하기 기호 13">
+            <a:extLst>
+              <a:ext uri="{FF2B5EF4-FFF2-40B4-BE49-F238E27FC236}">
+                <a16:creationId xmlns:a16="http://schemas.microsoft.com/office/drawing/2014/main" id="{5C3B1A90-3906-E6A0-8806-BC5E41C1A7DA}"/>
+              </a:ext>
+            </a:extLst>
+          </p:cNvPr>
+          <p:cNvSpPr/>
+          <p:nvPr/>
+        </p:nvSpPr>
+        <p:spPr>
+          <a:xfrm>
+            <a:off x="-46646" y="3261810"/>
+            <a:ext cx="6188467" cy="3560101"/>
+          </a:xfrm>
+          <a:prstGeom prst="mathMultiply">
+            <a:avLst>
+              <a:gd name="adj1" fmla="val 3265"/>
+            </a:avLst>
+          </a:prstGeom>
+          <a:solidFill>
+            <a:srgbClr val="FF0000"/>
+          </a:solidFill>
+          <a:ln>
+            <a:noFill/>
+          </a:ln>
+        </p:spPr>
+        <p:style>
+          <a:lnRef idx="2">
+            <a:schemeClr val="accent1">
+              <a:shade val="15000"/>
+            </a:schemeClr>
+          </a:lnRef>
+          <a:fillRef idx="1">
+            <a:schemeClr val="accent1"/>
+          </a:fillRef>
+          <a:effectRef idx="0">
+            <a:schemeClr val="accent1"/>
+          </a:effectRef>
+          <a:fontRef idx="minor">
+            <a:schemeClr val="lt1"/>
+          </a:fontRef>
+        </p:style>
+        <p:txBody>
+          <a:bodyPr rtlCol="0" anchor="ctr"/>
+          <a:lstStyle/>
+          <a:p>
+            <a:pPr algn="ctr"/>
+            <a:endParaRPr lang="ko-KR" altLang="en-US"/>
+          </a:p>
+        </p:txBody>
+      </p:sp>
+      <p:sp>
+        <p:nvSpPr>
+          <p:cNvPr id="16" name="화살표: 오른쪽 15">
+            <a:extLst>
+              <a:ext uri="{FF2B5EF4-FFF2-40B4-BE49-F238E27FC236}">
+                <a16:creationId xmlns:a16="http://schemas.microsoft.com/office/drawing/2014/main" id="{B9FC0603-68E0-9508-9639-75B0F325985F}"/>
+              </a:ext>
+            </a:extLst>
+          </p:cNvPr>
+          <p:cNvSpPr/>
+          <p:nvPr/>
+        </p:nvSpPr>
+        <p:spPr>
+          <a:xfrm>
+            <a:off x="6492550" y="1867513"/>
+            <a:ext cx="425025" cy="307777"/>
+          </a:xfrm>
+          <a:prstGeom prst="rightArrow">
+            <a:avLst/>
+          </a:prstGeom>
+          <a:solidFill>
+            <a:schemeClr val="accent5"/>
+          </a:solidFill>
+          <a:ln>
+            <a:noFill/>
+          </a:ln>
+        </p:spPr>
+        <p:style>
+          <a:lnRef idx="2">
+            <a:schemeClr val="accent1">
+              <a:shade val="15000"/>
+            </a:schemeClr>
+          </a:lnRef>
+          <a:fillRef idx="1">
+            <a:schemeClr val="accent1"/>
+          </a:fillRef>
+          <a:effectRef idx="0">
+            <a:schemeClr val="accent1"/>
+          </a:effectRef>
+          <a:fontRef idx="minor">
+            <a:schemeClr val="lt1"/>
+          </a:fontRef>
+        </p:style>
+        <p:txBody>
+          <a:bodyPr rtlCol="0" anchor="ctr"/>
+          <a:lstStyle/>
+          <a:p>
+            <a:pPr algn="ctr"/>
+            <a:endParaRPr lang="ko-KR" altLang="en-US">
+              <a:solidFill>
+                <a:schemeClr val="accent5"/>
+              </a:solidFill>
+            </a:endParaRPr>
+          </a:p>
+        </p:txBody>
+      </p:sp>
     </p:spTree>
     <p:extLst>
       <p:ext uri="{BB962C8B-B14F-4D97-AF65-F5344CB8AC3E}">
-        <p14:creationId xmlns:p14="http://schemas.microsoft.com/office/powerpoint/2010/main" val="2191844993"/>
+        <p14:creationId xmlns:p14="http://schemas.microsoft.com/office/powerpoint/2010/main" val="126494019"/>
       </p:ext>
     </p:extLst>
   </p:cSld>
